--- a/reports/case_deck.pptx
+++ b/reports/case_deck.pptx
@@ -1073,7 +1073,7 @@
           <a:lstStyle/>
           <a:p>
             <a:r>
-              <a:t>[1:45–2:10] Детектор — пиксельный LightGBM. На test MARIDA F1 0.871, RandomForest — 0.771, индексы FDI — 0.042. На саргассуме и мутной воде ложных нет, ошибается на судах и органике. На реальных парах он почти ничего не видит: на пиксель 10 метров приходится меньше одного предмета, а редкие срабатывания — на блике.</a:t>
+              <a:t>[1:45–2:10] Детектор — пиксельный LightGBM. На test MARIDA F1 0.871, RandomForest — 0.771, индексы FDI — 0.042; саргассум и мутную воду он не путает. На снимках пар это не переносится: из 975 объектов почти все — блик, облака или барашки, а без гармонизации каналов остаётся 5. Поэтому на карте это «подозрительные пиксели», а не находки.</a:t>
             </a:r>
           </a:p>
         </p:txBody>
@@ -4602,7 +4602,7 @@
                 </a:solidFill>
                 <a:latin typeface="Segoe UI"/>
               </a:rPr>
-              <a:t>Источник: reports/final_numbers.json → case.sections (4 раздела с источником и протоколом)</a:t>
+              <a:t>Источник: reports/final_numbers.json → case.sections (5 разделов с источником и протоколом)</a:t>
             </a:r>
           </a:p>
         </p:txBody>
@@ -5362,7 +5362,7 @@
                 </a:solidFill>
                 <a:latin typeface="Segoe UI"/>
               </a:rPr>
-              <a:t>Одна команда, 9.9 с без сети; чистый клон до карты — 7,5 мин, числа совпали</a:t>
+              <a:t>Одна команда, 6.7 с без сети; чистый клон до карты — 7,5 мин, числа совпали</a:t>
             </a:r>
           </a:p>
         </p:txBody>
@@ -5417,7 +5417,7 @@
                 </a:solidFill>
                 <a:latin typeface="Segoe UI"/>
               </a:rPr>
-              <a:t>• 24 выходные таблицы с одинаковыми sha256 при повторе; отпечаток 95dc41db12d029dc…</a:t>
+              <a:t>• 24 выходные таблицы с одинаковыми sha256 при повторе; отпечаток 8f765cc35dfefef3…</a:t>
             </a:r>
           </a:p>
           <a:p>
@@ -5449,7 +5449,7 @@
                 </a:solidFill>
                 <a:latin typeface="Segoe UI"/>
               </a:rPr>
-              <a:t>• Тесты кейса: 142 passed, 1 skipped за 22 с; все числа — из final_numbers.json</a:t>
+              <a:t>• Тесты кейса (25.09.2026 22:32): 211 passed, 1 skipped, 0 failed; числа документов сверяет тест</a:t>
             </a:r>
           </a:p>
         </p:txBody>
@@ -7943,7 +7943,7 @@
                 </a:solidFill>
                 <a:latin typeface="Segoe UI"/>
               </a:rPr>
-              <a:t>Детектор: F1 0.871 на test MARIDA — лучше RandomForest на 0.100 и не путает саргассум</a:t>
+              <a:t>Детектор: F1 0.871 на test MARIDA, но на снимках пар срабатывает на блике, облаках и барашках</a:t>
             </a:r>
           </a:p>
         </p:txBody>
@@ -7982,7 +7982,7 @@
                 </a:solidFill>
                 <a:latin typeface="Segoe UI"/>
               </a:rPr>
-              <a:t>• Пиксельный LightGBM, 48 признаков, порог 0.63 выбран на val; test (15 сцен) посчитан один раз</a:t>
+              <a:t>• LightGBM, порог 0.63 с val; test MARIDA посчитан один раз: ΔF1 к RF 0.100 [0.049; 0.150]</a:t>
             </a:r>
           </a:p>
           <a:p>
@@ -7998,7 +7998,7 @@
                 </a:solidFill>
                 <a:latin typeface="Segoe UI"/>
               </a:rPr>
-              <a:t>• ΔF1 к RF 0.100 [0.049; 0.150] (парный бутстреп по сценам), лучше в 9 сценах, хуже в 3</a:t>
+              <a:t>• Ложные: 75, из них суда 27 и органика 21; на саргассуме и мутной воде — 0 (FDI × NDVI помечает 46 % саргассума)</a:t>
             </a:r>
           </a:p>
           <a:p>
@@ -8014,7 +8014,7 @@
                 </a:solidFill>
                 <a:latin typeface="Segoe UI"/>
               </a:rPr>
-              <a:t>• Ложные: 75, из них суда 27 и органика 21; на саргассуме и мутной воде — 0 (FDI × NDVI помечает 46 % саргассума)</a:t>
+              <a:t>• На 22 снимках пар (L2A): 975 объектов, в полосах 6; без HE460 т.03 ложные типы — 55.0 % (блик, облака); 721 вне полосы на HE460 т.03 — вероятно барашки/пена</a:t>
             </a:r>
           </a:p>
           <a:p>
@@ -8030,7 +8030,7 @@
                 </a:solidFill>
                 <a:latin typeface="Segoe UI"/>
               </a:rPr>
-              <a:t>• На реальных парах: в полосах 10 чистых черноморских пар 0 пикселей; срабатывания — на бликовых сценах (T14, T20, T21) и на одной паре Северного моря на уровне фона</a:t>
+              <a:t>• Без гармонизации L2A → MARIDA остаётся 5 объектов из 975: F1 0.871 на снимки пар не переносится</a:t>
             </a:r>
           </a:p>
         </p:txBody>
@@ -8474,7 +8474,7 @@
                 </a:solidFill>
                 <a:latin typeface="Segoe UI"/>
               </a:rPr>
-              <a:t>Источник: reports/case_detector/compare.md, metrics.json; reports/case_pairs/quality.md</a:t>
+              <a:t>Источник: reports/case_detector/compare.md; reports/case_pairs/detector_review.md (final_numbers → case.detector_review)</a:t>
             </a:r>
           </a:p>
         </p:txBody>
@@ -9670,7 +9670,7 @@
                 </a:solidFill>
                 <a:latin typeface="Segoe UI"/>
               </a:rPr>
-              <a:t>• Реестр пар, выгрузка GeoJSON/CSV, сохранённые запросы; самопроверка API ↔ выгрузка: 283 из 283, ошибочные входы 46/46, p95 ≤ 264 мс</a:t>
+              <a:t>• Реестр пар, выгрузка GeoJSON/CSV, сохранённые запросы; самопроверка API ↔ выгрузка: 284 из 284, ошибочные входы 46/46, p95 ≤ 89 мс</a:t>
             </a:r>
           </a:p>
         </p:txBody>

--- a/reports/case_deck.pptx
+++ b/reports/case_deck.pptx
@@ -1213,7 +1213,7 @@
           <a:lstStyle/>
           <a:p>
             <a:r>
-              <a:t>[2:45–3:05] Связь снимка с полем мы всё же проверили. На 11 парах FDI даёт ρ −0.75, но после поправки Холма p 0.15, а случайная вода той же сцены даёт почти то же. Вывод — данных мало: нужно около 33 независимых пар.</a:t>
+              <a:t>[2:45–3:05] Связь снимка с полем мы всё же проверили. На 11 парах FDI даёт ρ −0.75, но после поправки Холма p 0.12, а случайная вода той же сцены даёт почти то же. Вывод — данных мало: нужно около 33 независимых пар.</a:t>
             </a:r>
           </a:p>
         </p:txBody>
@@ -4602,7 +4602,7 @@
                 </a:solidFill>
                 <a:latin typeface="Segoe UI"/>
               </a:rPr>
-              <a:t>Источник: reports/final_numbers.json → case.sections (5 разделов с источником и протоколом)</a:t>
+              <a:t>Источник: reports/final_numbers.json → case.sections (6 разделов с источником и протоколом)</a:t>
             </a:r>
           </a:p>
         </p:txBody>
@@ -5362,7 +5362,7 @@
                 </a:solidFill>
                 <a:latin typeface="Segoe UI"/>
               </a:rPr>
-              <a:t>Одна команда, 6.7 с без сети; чистый клон до карты — 7,5 мин, числа совпали</a:t>
+              <a:t>Одна команда, 7.0 с без сети; чистый клон до карты — 7,5 мин, числа совпали</a:t>
             </a:r>
           </a:p>
         </p:txBody>
@@ -5417,7 +5417,7 @@
                 </a:solidFill>
                 <a:latin typeface="Segoe UI"/>
               </a:rPr>
-              <a:t>• 24 выходные таблицы с одинаковыми sha256 при повторе; отпечаток 8f765cc35dfefef3…</a:t>
+              <a:t>• 24 выходные таблицы с одинаковыми sha256 при повторе; отпечаток fccf808a8817d7c4…</a:t>
             </a:r>
           </a:p>
           <a:p>
@@ -5449,7 +5449,7 @@
                 </a:solidFill>
                 <a:latin typeface="Segoe UI"/>
               </a:rPr>
-              <a:t>• Тесты кейса (25.09.2026 22:32): 211 passed, 1 skipped, 0 failed; числа документов сверяет тест</a:t>
+              <a:t>• Тесты кейса (25.09.2026 23:17): 211 passed, 2 skipped, 0 failed; числа документов сверяет тест</a:t>
             </a:r>
           </a:p>
         </p:txBody>
@@ -9263,7 +9263,7 @@
                 </a:solidFill>
                 <a:latin typeface="Segoe UI"/>
               </a:rPr>
-              <a:t>• FDI в полосе: ρ −0.75 [−1.00; −0.14], p Холма 0.15; та же полоса в случайной воде сцены — −0.54</a:t>
+              <a:t>• FDI в полосе: ρ −0.75 [−1.00; −0.14], p Холма 0.12; та же полоса в случайной воде сцены — −0.52</a:t>
             </a:r>
           </a:p>
           <a:p>
@@ -9670,7 +9670,7 @@
                 </a:solidFill>
                 <a:latin typeface="Segoe UI"/>
               </a:rPr>
-              <a:t>• Реестр пар, выгрузка GeoJSON/CSV, сохранённые запросы; самопроверка API ↔ выгрузка: 284 из 284, ошибочные входы 46/46, p95 ≤ 89 мс</a:t>
+              <a:t>• Реестр пар, выгрузка GeoJSON/CSV, сохранённые запросы; самопроверка API ↔ выгрузка: 259 из 259, ошибочные входы 46/46, p95 ≤ 66 мс</a:t>
             </a:r>
           </a:p>
         </p:txBody>

--- a/reports/case_deck.pptx
+++ b/reports/case_deck.pptx
@@ -17,6 +17,7 @@
     <p:sldId id="265" r:id="rId17"/>
     <p:sldId id="266" r:id="rId18"/>
     <p:sldId id="267" r:id="rId19"/>
+    <p:sldId id="268" r:id="rId20"/>
   </p:sldIdLst>
   <p:sldSz cx="12191695" cy="6858000" type="screen4x3"/>
   <p:notesSz cx="6858000" cy="9144000"/>
@@ -513,7 +514,7 @@
           <a:lstStyle/>
           <a:p>
             <a:r>
-              <a:t>[0:00–0:20] Мы решали кейс как два алгоритма, проверенных по отдельности. Детектор по снимку — F1 0.871 на test MARIDA. Концентрация — по полевым данным. Синхронных пар «снимок — поле» 0, поэтому переноса на снимок мы не заявляем, и карта это прямо говорит.</a:t>
+              <a:t>[0:00–0:15] Мы решали кейс как два алгоритма, проверенных по отдельности. Детектор по снимку — F1 0.871 на test MARIDA. Концентрация — по полевым данным. Синхронных пар «снимок — поле» 0, поэтому переноса на снимок мы не заявляем, и карта это прямо говорит.</a:t>
             </a:r>
           </a:p>
         </p:txBody>
@@ -583,7 +584,7 @@
           <a:lstStyle/>
           <a:p>
             <a:r>
-              <a:t>[3:25–3:40] Из правила дрейфа мы сделали инструмент «Подобрать снимок»: он говорит, когда выходить на трансекту. Для Чёрного моря это окна UTC у 12 событий. Геометрию трансект восстановили по PANGAEA.</a:t>
+              <a:t>[2:48–3:18] Наш вклад — не модель, а решения, которые защищают выводы от самообмана. Допуск по дрейфу в реестре пар, сплит по участкам маршрута, найденный после утечки через соседей дня, test один раз по заранее записанному правилу, отказ от гармонизации по val, геометрия трансект по первоисточникам и один источник чисел с тестом. Разметка MARIDA, протокол RandomForest и индекс FDI — готовые, мы с ними сравниваемся.</a:t>
             </a:r>
           </a:p>
         </p:txBody>
@@ -653,7 +654,7 @@
           <a:lstStyle/>
           <a:p>
             <a:r>
-              <a:t>[3:40–3:52] Ограничения называем сами: перенос на снимок не доказан, данных мало, интервалы недопокрывают. Развитие — трансекты под пролёт с записанным временем и больше рейсов.</a:t>
+              <a:t>[3:18–3:32] Из правила дрейфа мы сделали инструмент «Подобрать снимок»: он говорит, когда выходить на трансекту. Для Чёрного моря это окна UTC у 12 событий. Геометрию трансект восстановили по PANGAEA.</a:t>
             </a:r>
           </a:p>
         </p:txBody>
@@ -723,7 +724,77 @@
           <a:lstStyle/>
           <a:p>
             <a:r>
-              <a:t>[3:52–4:00] Всё воспроизводится одной командой без сети; чистый клон до карты — 7,5 минуты, числа совпали. Спасибо, готовы к вопросам.</a:t>
+              <a:t>[3:32–3:48] Ограничения называем сами: перенос на снимок не доказан, данных мало, интервалы недопокрывают. Развитие — трансекты под пролёт с записанным временем и больше рейсов.</a:t>
+            </a:r>
+          </a:p>
+        </p:txBody>
+      </p:sp>
+      <p:sp>
+        <p:nvSpPr>
+          <p:cNvPr id="4" name="Slide Number Placeholder 3"/>
+          <p:cNvSpPr>
+            <a:spLocks noGrp="1"/>
+          </p:cNvSpPr>
+          <p:nvPr>
+            <p:ph type="sldNum" idx="5" sz="quarter"/>
+          </p:nvPr>
+        </p:nvSpPr>
+        <p:spPr/>
+      </p:sp>
+    </p:spTree>
+  </p:cSld>
+  <p:clrMapOvr>
+    <a:masterClrMapping/>
+  </p:clrMapOvr>
+</p:notes>
+</file>
+
+<file path=ppt/notesSlides/notesSlide13.xml><?xml version="1.0" encoding="utf-8"?>
+<p:notes xmlns:a="http://schemas.openxmlformats.org/drawingml/2006/main" xmlns:p="http://schemas.openxmlformats.org/presentationml/2006/main" xmlns:r="http://schemas.openxmlformats.org/officeDocument/2006/relationships">
+  <p:cSld>
+    <p:spTree>
+      <p:nvGrpSpPr>
+        <p:cNvPr id="1" name=""/>
+        <p:cNvGrpSpPr/>
+        <p:nvPr/>
+      </p:nvGrpSpPr>
+      <p:grpSpPr>
+        <a:xfrm>
+          <a:off x="0" y="0"/>
+          <a:ext cx="0" cy="0"/>
+          <a:chOff x="0" y="0"/>
+          <a:chExt cx="0" cy="0"/>
+        </a:xfrm>
+      </p:grpSpPr>
+      <p:sp>
+        <p:nvSpPr>
+          <p:cNvPr id="2" name="Slide Image Placeholder 1"/>
+          <p:cNvSpPr>
+            <a:spLocks noGrp="1"/>
+          </p:cNvSpPr>
+          <p:nvPr>
+            <p:ph type="sldImg" idx="2"/>
+          </p:nvPr>
+        </p:nvSpPr>
+        <p:spPr/>
+      </p:sp>
+      <p:sp>
+        <p:nvSpPr>
+          <p:cNvPr id="3" name="Notes Placeholder 2"/>
+          <p:cNvSpPr>
+            <a:spLocks noGrp="1"/>
+          </p:cNvSpPr>
+          <p:nvPr>
+            <p:ph type="body" idx="3" sz="quarter"/>
+          </p:nvPr>
+        </p:nvSpPr>
+        <p:spPr/>
+        <p:txBody>
+          <a:bodyPr/>
+          <a:lstStyle/>
+          <a:p>
+            <a:r>
+              <a:t>[3:48–4:00] Всё воспроизводится одной командой без сети; чистый клон до карты — 7,5 минуты, числа совпали. Спасибо, готовы к вопросам.</a:t>
             </a:r>
           </a:p>
         </p:txBody>
@@ -793,7 +864,7 @@
           <a:lstStyle/>
           <a:p>
             <a:r>
-              <a:t>[0:20–0:40] Пользователь — специалист по мониторингу. Он выбирает акваторию и дату, проверяет находки детектора, сравнивает с полем и выгружает результат. Измерение, оценка и площадь маски у нас везде — разные поля.</a:t>
+              <a:t>[0:15–0:30] Пользователь — специалист по мониторингу. Он выбирает акваторию и дату, проверяет находки детектора, сравнивает с полем и выгружает результат. Измерение, оценка и площадь маски у нас везде — разные поля.</a:t>
             </a:r>
           </a:p>
         </p:txBody>
@@ -863,7 +934,7 @@
           <a:lstStyle/>
           <a:p>
             <a:r>
-              <a:t>[0:40–1:00] Целевая величина — суммарный плавающий пластик больше двух сантиметров, штук на квадратный километр, визуальная полоса с судна. Это 63 события Саргассова моря, у каждого есть N и A. Весь мусор Северного и Чёрного морей — не пластик, он только для эксперимента.</a:t>
+              <a:t>[0:30–0:47] Целевая величина — суммарный плавающий пластик больше двух сантиметров, штук на квадратный километр, визуальная полоса с судна. Это 63 события Саргассова моря, у каждого есть N и A. Весь мусор Северного и Чёрного морей — не пластик, он только для эксперимента.</a:t>
             </a:r>
           </a:p>
         </p:txBody>
@@ -933,7 +1004,7 @@
           <a:lstStyle/>
           <a:p>
             <a:r>
-              <a:t>[1:00–1:20] Из 935 строк в основной профиль попадают 63. У каждого отказа есть причина: объектные строки, категории, весь мусор. Поля-утечки в признаки не попадают, это проверяют тесты.</a:t>
+              <a:t>[0:47–1:02] Из 935 строк в основной профиль попадают 63. У каждого отказа есть причина: объектные строки, категории, весь мусор. Поля-утечки в признаки не попадают, это проверяют тесты.</a:t>
             </a:r>
           </a:p>
         </p:txBody>
@@ -1003,7 +1074,7 @@
           <a:lstStyle/>
           <a:p>
             <a:r>
-              <a:t>[1:20–1:45] Реестр пар — главный фильтр. Из 318 событий по метаданным проходят 29, маски в полосе — 12. Но вода за сутки уходит на десятки километров: пара синхронна, только если между снимком и наблюдением не больше 4.2 часа. Таких ноль. Для пластика снимков нет вообще.</a:t>
+              <a:t>[1:02–1:22] Реестр пар — главный фильтр. Из 318 событий по метаданным проходят 29, маски в полосе — 12. Но вода за сутки уходит на десятки километров: пара синхронна, только если между снимком и наблюдением не больше 4.2 часа. Таких ноль. Для пластика снимков нет вообще.</a:t>
             </a:r>
           </a:p>
         </p:txBody>
@@ -1073,7 +1144,7 @@
           <a:lstStyle/>
           <a:p>
             <a:r>
-              <a:t>[1:45–2:10] Детектор — пиксельный LightGBM. На test MARIDA F1 0.871, RandomForest — 0.771, индексы FDI — 0.042; саргассум и мутную воду он не путает. На снимках пар это не переносится: из 975 объектов почти все — блик, облака или барашки, а без гармонизации каналов остаётся 5. Поэтому на карте это «подозрительные пиксели», а не находки.</a:t>
+              <a:t>[1:22–1:47] Детектор — пиксельный LightGBM. На test MARIDA F1 0.871, RandomForest — 0.771, индексы FDI — 0.042; саргассум и мутную воду он не путает. На снимках пар мы выключили гармонизацию каналов — решение по MARIDA val, не по тесту. Сейчас 5 объектов на 22 сценах и ни одного в полосах; вне полосы — судно, это верное срабатывание. Прежний режим давал 975 объектов, почти всё — фон моря.</a:t>
             </a:r>
           </a:p>
         </p:txBody>
@@ -1143,7 +1214,7 @@
           <a:lstStyle/>
           <a:p>
             <a:r>
-              <a:t>[2:10–2:45] Концентрация: C равно N на A, интервал Пуассона, контрольный пример — 60.0. Модели сравниваем с медианой на участках маршрута. На dev ridge выигрывает слабо, а на отложенном test, посчитанном один раз, — 30.0 против 25.2 у медианы. Правило записано до открытия test, поэтому на карте — медиана. Модель не спасаем.</a:t>
+              <a:t>[1:47–2:15] Концентрация: C равно N на A, интервал Пуассона, контрольный пример — 60.0. Модели сравниваем с медианой на участках маршрута. На dev ridge выигрывает слабо, а на отложенном test, посчитанном один раз, — 30.0 против 25.2 у медианы. Правило записано до открытия test, поэтому на карте — медиана. Модель не спасаем.</a:t>
             </a:r>
           </a:p>
         </p:txBody>
@@ -1213,7 +1284,7 @@
           <a:lstStyle/>
           <a:p>
             <a:r>
-              <a:t>[2:45–3:05] Связь снимка с полем мы всё же проверили. На 11 парах FDI даёт ρ −0.75, но после поправки Холма p 0.12, а случайная вода той же сцены даёт почти то же. Вывод — данных мало: нужно около 33 независимых пар.</a:t>
+              <a:t>[2:15–2:32] Связь снимка с полем мы всё же проверили. На 11 парах FDI даёт ρ −0.75, но после поправки Холма p 0.12, а случайная вода той же сцены даёт почти то же. Вывод — данных мало: нужно около 33 независимых пар.</a:t>
             </a:r>
           </a:p>
         </p:txBody>
@@ -1283,7 +1354,7 @@
           <a:lstStyle/>
           <a:p>
             <a:r>
-              <a:t>[3:05–3:25] Карта повторяет отчёт: три слоя и два статуса полосы. Здесь детектор нашёл пиксели, но пара отклонена по дрейфу, поэтому это «подозрительные пиксели без полевого подтверждения», а не «обнаружено». Выгрузка сверена с API самопроверкой.</a:t>
+              <a:t>[2:32–2:48] Карта повторяет отчёт: три слоя и два статуса полосы. Эта пара отклонена по дрейфу — «связь не подтверждена»; пикселей детектора в полосе нет, концентрация по снимку недоступна. Выгрузка сверена с API самопроверкой.</a:t>
             </a:r>
           </a:p>
         </p:txBody>
@@ -4706,7 +4777,7 @@
                 </a:solidFill>
                 <a:latin typeface="Segoe UI"/>
               </a:rPr>
-              <a:t>10 · Дополнительные функции</a:t>
+              <a:t>10 · Собственный вклад и ключевые решения</a:t>
             </a:r>
           </a:p>
         </p:txBody>
@@ -4745,7 +4816,7 @@
                 </a:solidFill>
                 <a:latin typeface="Segoe UI"/>
               </a:rPr>
-              <a:t>«Подобрать снимок»: из правила дрейфа — инструмент планирования полевых работ под пролёт</a:t>
+              <a:t>Наш вклад — решения, каждое проверено экспериментом или записано до результата</a:t>
             </a:r>
           </a:p>
         </p:txBody>
@@ -4759,7 +4830,7 @@
         <p:spPr>
           <a:xfrm>
             <a:off x="457200" y="1600200"/>
-            <a:ext cx="5577840" cy="4572000"/>
+            <a:ext cx="11247120" cy="4572000"/>
           </a:xfrm>
           <a:prstGeom prst="rect">
             <a:avLst/>
@@ -4778,13 +4849,13 @@
               </a:spcAft>
             </a:pPr>
             <a:r>
-              <a:rPr sz="1600" b="0">
+              <a:rPr sz="1500" b="0">
                 <a:solidFill>
                   <a:srgbClr val="EEEFF1"/>
                 </a:solidFill>
                 <a:latin typeface="Segoe UI"/>
               </a:rPr>
-              <a:t>• Окно синхронизации |dt| ≤ 4.17 ч; наивное окно ±1 сут даёт 29 «пар», синхронных 0</a:t>
+              <a:t>• Реестр пар с допуском по дрейфу вместо «±1 сут»: 29 пар по метаданным → 0 синхронных; причины у каждого из 318 событий</a:t>
             </a:r>
           </a:p>
           <a:p>
@@ -4794,13 +4865,13 @@
               </a:spcAft>
             </a:pPr>
             <a:r>
-              <a:rPr sz="1600" b="0">
+              <a:rPr sz="1500" b="0">
                 <a:solidFill>
                   <a:srgbClr val="EEEFF1"/>
                 </a:solidFill>
                 <a:latin typeface="Segoe UI"/>
               </a:rPr>
-              <a:t>• Чёрное море без времени трансект: 12 событий получают окно UTC, у 8 полоса чистая по маскам</a:t>
+              <a:t>• Сплит по участкам маршрута + буфер: на «связных компонентах» kNN выигрывал −11.6 [−23.1; −0.9], на маршруте −4.2 [−12.0; 3.4] — утечка через соседей дня</a:t>
             </a:r>
           </a:p>
           <a:p>
@@ -4810,13 +4881,13 @@
               </a:spcAft>
             </a:pPr>
             <a:r>
-              <a:rPr sz="1600" b="0">
+              <a:rPr sz="1500" b="0">
                 <a:solidFill>
                   <a:srgbClr val="EEEFF1"/>
                 </a:solidFill>
                 <a:latin typeface="Segoe UI"/>
               </a:rPr>
-              <a:t>• Прогноз пролётов на архиве совпал с реальной съёмкой в 82 из 88 случаев (±5 мин)</a:t>
+              <a:t>• Отложенный test один раз: правило «не лучше медианы → медиана» записано 25.09.2026 19:05, test открыт 25.09.2026 19:15 — на карте медиана</a:t>
             </a:r>
           </a:p>
           <a:p>
@@ -4826,51 +4897,75 @@
               </a:spcAft>
             </a:pPr>
             <a:r>
-              <a:rPr sz="1600" b="0">
+              <a:rPr sz="1500" b="0">
                 <a:solidFill>
                   <a:srgbClr val="EEEFF1"/>
                 </a:solidFill>
                 <a:latin typeface="Segoe UI"/>
               </a:rPr>
-              <a:t>• Геометрия трансект по PANGAEA: 104 события S2/S3, 108 сегментов; 4 прерванные трансекты — двумя сегментами</a:t>
-            </a:r>
-          </a:p>
-        </p:txBody>
-      </p:sp>
-      <p:pic>
-        <p:nvPicPr>
-          <p:cNvPr id="5" name="Picture 4" descr="04_pairfinder_transect.jpg"/>
-          <p:cNvPicPr>
-            <a:picLocks noChangeAspect="1"/>
-          </p:cNvPicPr>
-          <p:nvPr/>
-        </p:nvPicPr>
-        <p:blipFill>
-          <a:blip r:embed="rId2"/>
-          <a:stretch>
-            <a:fillRect/>
-          </a:stretch>
-        </p:blipFill>
-        <p:spPr>
-          <a:xfrm>
-            <a:off x="6914726" y="1645920"/>
-            <a:ext cx="4321386" cy="4023360"/>
-          </a:xfrm>
-          <a:prstGeom prst="rect">
-            <a:avLst/>
-          </a:prstGeom>
-        </p:spPr>
-      </p:pic>
-      <p:sp>
-        <p:nvSpPr>
-          <p:cNvPr id="6" name="TextBox 5"/>
+              <a:t>• Отказ от гармонизации L2A по MARIDA val (F1 0.923 против 0.897), test не использовался</a:t>
+            </a:r>
+          </a:p>
+          <a:p>
+            <a:pPr algn="l">
+              <a:spcAft>
+                <a:spcPts val="1000"/>
+              </a:spcAft>
+            </a:pPr>
+            <a:r>
+              <a:rPr sz="1500" b="0">
+                <a:solidFill>
+                  <a:srgbClr val="EEEFF1"/>
+                </a:solidFill>
+                <a:latin typeface="Segoe UI"/>
+              </a:rPr>
+              <a:t>• Геометрия трансект по первоисточникам PANGAEA: 104 события, 4 прерванные — двумя сегментами; окно синхронизации |dt| ≤ 4.17 ч</a:t>
+            </a:r>
+          </a:p>
+          <a:p>
+            <a:pPr algn="l">
+              <a:spcAft>
+                <a:spcPts val="1000"/>
+              </a:spcAft>
+            </a:pPr>
+            <a:r>
+              <a:rPr sz="1500" b="0">
+                <a:solidFill>
+                  <a:srgbClr val="EEEFF1"/>
+                </a:solidFill>
+                <a:latin typeface="Segoe UI"/>
+              </a:rPr>
+              <a:t>• Один источник чисел: final_numbers.json → README, отчёт, дека, речь, ответы; тест сверяет (225 passed)</a:t>
+            </a:r>
+          </a:p>
+          <a:p>
+            <a:pPr algn="l">
+              <a:spcAft>
+                <a:spcPts val="1000"/>
+              </a:spcAft>
+            </a:pPr>
+            <a:r>
+              <a:rPr sz="1500" b="0">
+                <a:solidFill>
+                  <a:srgbClr val="EEEFF1"/>
+                </a:solidFill>
+                <a:latin typeface="Segoe UI"/>
+              </a:rPr>
+              <a:t>• Готовое, не наше: разметка MARIDA и MADOS, протокол RandomForest MARIDA, индекс FDI, каталоги STAC</a:t>
+            </a:r>
+          </a:p>
+        </p:txBody>
+      </p:sp>
+      <p:sp>
+        <p:nvSpPr>
+          <p:cNvPr id="5" name="TextBox 4"/>
           <p:cNvSpPr txBox="1"/>
           <p:nvPr/>
         </p:nvSpPr>
         <p:spPr>
           <a:xfrm>
-            <a:off x="6400800" y="5715000"/>
-            <a:ext cx="5349240" cy="548640"/>
+            <a:off x="457200" y="6355080"/>
+            <a:ext cx="10515600" cy="320040"/>
           </a:xfrm>
           <a:prstGeom prst="rect">
             <a:avLst/>
@@ -4889,27 +4984,27 @@
               </a:spcAft>
             </a:pPr>
             <a:r>
-              <a:rPr sz="1200" b="0">
+              <a:rPr sz="1000" b="0">
                 <a:solidFill>
                   <a:srgbClr val="9AA1AC"/>
                 </a:solidFill>
                 <a:latin typeface="Segoe UI"/>
               </a:rPr>
-              <a:t>Саргассово море, T18: прерванная трансекта (2 сегмента) и «Подбор снимка» — сцен в окне нет</a:t>
-            </a:r>
-          </a:p>
-        </p:txBody>
-      </p:sp>
-      <p:sp>
-        <p:nvSpPr>
-          <p:cNvPr id="7" name="TextBox 6"/>
+              <a:t>Источник: reports/case_pairs/summary.md; reports/case_conc/metrics.json; configs/case_selection.yaml; docs/DECISIONS.md; reports/case_geometry/summary.md</a:t>
+            </a:r>
+          </a:p>
+        </p:txBody>
+      </p:sp>
+      <p:sp>
+        <p:nvSpPr>
+          <p:cNvPr id="6" name="TextBox 5"/>
           <p:cNvSpPr txBox="1"/>
           <p:nvPr/>
         </p:nvSpPr>
         <p:spPr>
           <a:xfrm>
-            <a:off x="457200" y="6355080"/>
-            <a:ext cx="10515600" cy="320040"/>
+            <a:off x="11155680" y="6355080"/>
+            <a:ext cx="640080" cy="320040"/>
           </a:xfrm>
           <a:prstGeom prst="rect">
             <a:avLst/>
@@ -4922,7 +5017,7 @@
           </a:bodyPr>
           <a:lstStyle/>
           <a:p>
-            <a:pPr algn="l">
+            <a:pPr algn="r">
               <a:spcAft>
                 <a:spcPts val="600"/>
               </a:spcAft>
@@ -4934,46 +5029,7 @@
                 </a:solidFill>
                 <a:latin typeface="Segoe UI"/>
               </a:rPr>
-              <a:t>Источник: docs/EXTRA_FEATURES.md; reports/case_pairfinder/evidence.md; reports/case_geometry/summary.md</a:t>
-            </a:r>
-          </a:p>
-        </p:txBody>
-      </p:sp>
-      <p:sp>
-        <p:nvSpPr>
-          <p:cNvPr id="8" name="TextBox 7"/>
-          <p:cNvSpPr txBox="1"/>
-          <p:nvPr/>
-        </p:nvSpPr>
-        <p:spPr>
-          <a:xfrm>
-            <a:off x="11155680" y="6355080"/>
-            <a:ext cx="640080" cy="320040"/>
-          </a:xfrm>
-          <a:prstGeom prst="rect">
-            <a:avLst/>
-          </a:prstGeom>
-          <a:noFill/>
-        </p:spPr>
-        <p:txBody>
-          <a:bodyPr wrap="square" anchor="t" lIns="18288" rIns="18288" tIns="18288" bIns="18288">
-            <a:spAutoFit/>
-          </a:bodyPr>
-          <a:lstStyle/>
-          <a:p>
-            <a:pPr algn="r">
-              <a:spcAft>
-                <a:spcPts val="600"/>
-              </a:spcAft>
-            </a:pPr>
-            <a:r>
-              <a:rPr sz="1000" b="0">
-                <a:solidFill>
-                  <a:srgbClr val="9AA1AC"/>
-                </a:solidFill>
-                <a:latin typeface="Segoe UI"/>
-              </a:rPr>
-              <a:t>3:25</a:t>
+              <a:t>2:48</a:t>
             </a:r>
           </a:p>
         </p:txBody>
@@ -5038,7 +5094,7 @@
                 </a:solidFill>
                 <a:latin typeface="Segoe UI"/>
               </a:rPr>
-              <a:t>11 · Ограничения и развитие</a:t>
+              <a:t>11 · Дополнительные функции</a:t>
             </a:r>
           </a:p>
         </p:txBody>
@@ -5077,7 +5133,7 @@
                 </a:solidFill>
                 <a:latin typeface="Segoe UI"/>
               </a:rPr>
-              <a:t>Ограничения названы на карте и в отчёте; развитие — синхронные пары и больше рейсов</a:t>
+              <a:t>«Подобрать снимок»: из правила дрейфа — инструмент планирования полевых работ под пролёт</a:t>
             </a:r>
           </a:p>
         </p:txBody>
@@ -5091,7 +5147,7 @@
         <p:spPr>
           <a:xfrm>
             <a:off x="457200" y="1600200"/>
-            <a:ext cx="11247120" cy="4572000"/>
+            <a:ext cx="5577840" cy="4572000"/>
           </a:xfrm>
           <a:prstGeom prst="rect">
             <a:avLst/>
@@ -5116,7 +5172,7 @@
                 </a:solidFill>
                 <a:latin typeface="Segoe UI"/>
               </a:rPr>
-              <a:t>• Перенос «снимок → шт./км²» не доказан: синхронных пар нет, для пластика снимков нет</a:t>
+              <a:t>• Окно синхронизации |dt| ≤ 4.17 ч; наивное окно ±1 сут даёт 29 «пар», синхронных 0</a:t>
             </a:r>
           </a:p>
           <a:p>
@@ -5132,7 +5188,7 @@
                 </a:solidFill>
                 <a:latin typeface="Segoe UI"/>
               </a:rPr>
-              <a:t>• Мало независимых данных: S2 — один рейс, 26 дней; интервалы недопокрывают (84 % и 74 % вместо 90 %)</a:t>
+              <a:t>• Чёрное море без времени трансект: 12 событий получают окно UTC, у 8 полоса чистая по маскам</a:t>
             </a:r>
           </a:p>
           <a:p>
@@ -5148,7 +5204,7 @@
                 </a:solidFill>
                 <a:latin typeface="Segoe UI"/>
               </a:rPr>
-              <a:t>• Test не абсолютно нетронутый: ранняя разведка бейзлайнов видела все события профиля (записано до открытия)</a:t>
+              <a:t>• Прогноз пролётов на архиве совпал с реальной съёмкой в 82 из 88 случаев (±5 мин)</a:t>
             </a:r>
           </a:p>
           <a:p>
@@ -5164,37 +5220,45 @@
                 </a:solidFill>
                 <a:latin typeface="Segoe UI"/>
               </a:rPr>
-              <a:t>• Детектор на L2A пар по разметке не измерен; порог блика не калибровался на этих сценах</a:t>
-            </a:r>
-          </a:p>
-          <a:p>
-            <a:pPr algn="l">
-              <a:spcAft>
-                <a:spcPts val="1000"/>
-              </a:spcAft>
-            </a:pPr>
-            <a:r>
-              <a:rPr sz="1600" b="0">
-                <a:solidFill>
-                  <a:srgbClr val="EEEFF1"/>
-                </a:solidFill>
-                <a:latin typeface="Segoe UI"/>
-              </a:rPr>
-              <a:t>• Дальше: трансекты под пролёт с записанным временем (≈ 33 пар), больше рейсов и сезонов, ERA5 для дрейфа, разметка скоплений на L2A</a:t>
-            </a:r>
-          </a:p>
-        </p:txBody>
-      </p:sp>
-      <p:sp>
-        <p:nvSpPr>
-          <p:cNvPr id="5" name="TextBox 4"/>
+              <a:t>• Геометрия трансект по PANGAEA: 104 события S2/S3, 108 сегментов; 4 прерванные трансекты — двумя сегментами</a:t>
+            </a:r>
+          </a:p>
+        </p:txBody>
+      </p:sp>
+      <p:pic>
+        <p:nvPicPr>
+          <p:cNvPr id="5" name="Picture 4" descr="04_pairfinder_transect.jpg"/>
+          <p:cNvPicPr>
+            <a:picLocks noChangeAspect="1"/>
+          </p:cNvPicPr>
+          <p:nvPr/>
+        </p:nvPicPr>
+        <p:blipFill>
+          <a:blip r:embed="rId2"/>
+          <a:stretch>
+            <a:fillRect/>
+          </a:stretch>
+        </p:blipFill>
+        <p:spPr>
+          <a:xfrm>
+            <a:off x="6914726" y="1645920"/>
+            <a:ext cx="4321386" cy="4023360"/>
+          </a:xfrm>
+          <a:prstGeom prst="rect">
+            <a:avLst/>
+          </a:prstGeom>
+        </p:spPr>
+      </p:pic>
+      <p:sp>
+        <p:nvSpPr>
+          <p:cNvPr id="6" name="TextBox 5"/>
           <p:cNvSpPr txBox="1"/>
           <p:nvPr/>
         </p:nvSpPr>
         <p:spPr>
           <a:xfrm>
-            <a:off x="457200" y="6355080"/>
-            <a:ext cx="10515600" cy="320040"/>
+            <a:off x="6400800" y="5715000"/>
+            <a:ext cx="5349240" cy="548640"/>
           </a:xfrm>
           <a:prstGeom prst="rect">
             <a:avLst/>
@@ -5213,27 +5277,27 @@
               </a:spcAft>
             </a:pPr>
             <a:r>
-              <a:rPr sz="1000" b="0">
+              <a:rPr sz="1200" b="0">
                 <a:solidFill>
                   <a:srgbClr val="9AA1AC"/>
                 </a:solidFill>
                 <a:latin typeface="Segoe UI"/>
               </a:rPr>
-              <a:t>Источник: reports/report.md §8–9; README.md «Ограничения»</a:t>
-            </a:r>
-          </a:p>
-        </p:txBody>
-      </p:sp>
-      <p:sp>
-        <p:nvSpPr>
-          <p:cNvPr id="6" name="TextBox 5"/>
+              <a:t>Саргассово море, T18: прерванная трансекта (2 сегмента) и «Подбор снимка» — сцен в окне нет</a:t>
+            </a:r>
+          </a:p>
+        </p:txBody>
+      </p:sp>
+      <p:sp>
+        <p:nvSpPr>
+          <p:cNvPr id="7" name="TextBox 6"/>
           <p:cNvSpPr txBox="1"/>
           <p:nvPr/>
         </p:nvSpPr>
         <p:spPr>
           <a:xfrm>
-            <a:off x="11155680" y="6355080"/>
-            <a:ext cx="640080" cy="320040"/>
+            <a:off x="457200" y="6355080"/>
+            <a:ext cx="10515600" cy="320040"/>
           </a:xfrm>
           <a:prstGeom prst="rect">
             <a:avLst/>
@@ -5246,6 +5310,45 @@
           </a:bodyPr>
           <a:lstStyle/>
           <a:p>
+            <a:pPr algn="l">
+              <a:spcAft>
+                <a:spcPts val="600"/>
+              </a:spcAft>
+            </a:pPr>
+            <a:r>
+              <a:rPr sz="1000" b="0">
+                <a:solidFill>
+                  <a:srgbClr val="9AA1AC"/>
+                </a:solidFill>
+                <a:latin typeface="Segoe UI"/>
+              </a:rPr>
+              <a:t>Источник: docs/EXTRA_FEATURES.md; reports/case_pairfinder/evidence.md; reports/case_geometry/summary.md</a:t>
+            </a:r>
+          </a:p>
+        </p:txBody>
+      </p:sp>
+      <p:sp>
+        <p:nvSpPr>
+          <p:cNvPr id="8" name="TextBox 7"/>
+          <p:cNvSpPr txBox="1"/>
+          <p:nvPr/>
+        </p:nvSpPr>
+        <p:spPr>
+          <a:xfrm>
+            <a:off x="11155680" y="6355080"/>
+            <a:ext cx="640080" cy="320040"/>
+          </a:xfrm>
+          <a:prstGeom prst="rect">
+            <a:avLst/>
+          </a:prstGeom>
+          <a:noFill/>
+        </p:spPr>
+        <p:txBody>
+          <a:bodyPr wrap="square" anchor="t" lIns="18288" rIns="18288" tIns="18288" bIns="18288">
+            <a:spAutoFit/>
+          </a:bodyPr>
+          <a:lstStyle/>
+          <a:p>
             <a:pPr algn="r">
               <a:spcAft>
                 <a:spcPts val="600"/>
@@ -5258,7 +5361,7 @@
                 </a:solidFill>
                 <a:latin typeface="Segoe UI"/>
               </a:rPr>
-              <a:t>3:40</a:t>
+              <a:t>3:18</a:t>
             </a:r>
           </a:p>
         </p:txBody>
@@ -5323,7 +5426,7 @@
                 </a:solidFill>
                 <a:latin typeface="Segoe UI"/>
               </a:rPr>
-              <a:t>12 · Воспроизводимость</a:t>
+              <a:t>12 · Ограничения и развитие</a:t>
             </a:r>
           </a:p>
         </p:txBody>
@@ -5362,7 +5465,7 @@
                 </a:solidFill>
                 <a:latin typeface="Segoe UI"/>
               </a:rPr>
-              <a:t>Одна команда, 7.0 с без сети; чистый клон до карты — 7,5 мин, числа совпали</a:t>
+              <a:t>Ограничения названы на карте и в отчёте; развитие — синхронные пары и больше рейсов</a:t>
             </a:r>
           </a:p>
         </p:txBody>
@@ -5376,7 +5479,7 @@
         <p:spPr>
           <a:xfrm>
             <a:off x="457200" y="1600200"/>
-            <a:ext cx="5577840" cy="4572000"/>
+            <a:ext cx="11247120" cy="4572000"/>
           </a:xfrm>
           <a:prstGeom prst="rect">
             <a:avLst/>
@@ -5401,6 +5504,291 @@
                 </a:solidFill>
                 <a:latin typeface="Segoe UI"/>
               </a:rPr>
+              <a:t>• Перенос «снимок → шт./км²» не доказан: синхронных пар нет, для пластика снимков нет</a:t>
+            </a:r>
+          </a:p>
+          <a:p>
+            <a:pPr algn="l">
+              <a:spcAft>
+                <a:spcPts val="1000"/>
+              </a:spcAft>
+            </a:pPr>
+            <a:r>
+              <a:rPr sz="1600" b="0">
+                <a:solidFill>
+                  <a:srgbClr val="EEEFF1"/>
+                </a:solidFill>
+                <a:latin typeface="Segoe UI"/>
+              </a:rPr>
+              <a:t>• Мало независимых данных: S2 — один рейс, 26 дней; интервалы недопокрывают (84 % и 74 % вместо 90 %)</a:t>
+            </a:r>
+          </a:p>
+          <a:p>
+            <a:pPr algn="l">
+              <a:spcAft>
+                <a:spcPts val="1000"/>
+              </a:spcAft>
+            </a:pPr>
+            <a:r>
+              <a:rPr sz="1600" b="0">
+                <a:solidFill>
+                  <a:srgbClr val="EEEFF1"/>
+                </a:solidFill>
+                <a:latin typeface="Segoe UI"/>
+              </a:rPr>
+              <a:t>• Test не абсолютно нетронутый: ранняя разведка бейзлайнов видела все события профиля (записано до открытия)</a:t>
+            </a:r>
+          </a:p>
+          <a:p>
+            <a:pPr algn="l">
+              <a:spcAft>
+                <a:spcPts val="1000"/>
+              </a:spcAft>
+            </a:pPr>
+            <a:r>
+              <a:rPr sz="1600" b="0">
+                <a:solidFill>
+                  <a:srgbClr val="EEEFF1"/>
+                </a:solidFill>
+                <a:latin typeface="Segoe UI"/>
+              </a:rPr>
+              <a:t>• Детектор на L2A пар по разметке не измерен; порог блика не калибровался на этих сценах</a:t>
+            </a:r>
+          </a:p>
+          <a:p>
+            <a:pPr algn="l">
+              <a:spcAft>
+                <a:spcPts val="1000"/>
+              </a:spcAft>
+            </a:pPr>
+            <a:r>
+              <a:rPr sz="1600" b="0">
+                <a:solidFill>
+                  <a:srgbClr val="EEEFF1"/>
+                </a:solidFill>
+                <a:latin typeface="Segoe UI"/>
+              </a:rPr>
+              <a:t>• Дальше: трансекты под пролёт с записанным временем (≈ 33 пар), больше рейсов и сезонов, ERA5 для дрейфа, разметка скоплений на L2A</a:t>
+            </a:r>
+          </a:p>
+        </p:txBody>
+      </p:sp>
+      <p:sp>
+        <p:nvSpPr>
+          <p:cNvPr id="5" name="TextBox 4"/>
+          <p:cNvSpPr txBox="1"/>
+          <p:nvPr/>
+        </p:nvSpPr>
+        <p:spPr>
+          <a:xfrm>
+            <a:off x="457200" y="6355080"/>
+            <a:ext cx="10515600" cy="320040"/>
+          </a:xfrm>
+          <a:prstGeom prst="rect">
+            <a:avLst/>
+          </a:prstGeom>
+          <a:noFill/>
+        </p:spPr>
+        <p:txBody>
+          <a:bodyPr wrap="square" anchor="t" lIns="18288" rIns="18288" tIns="18288" bIns="18288">
+            <a:spAutoFit/>
+          </a:bodyPr>
+          <a:lstStyle/>
+          <a:p>
+            <a:pPr algn="l">
+              <a:spcAft>
+                <a:spcPts val="600"/>
+              </a:spcAft>
+            </a:pPr>
+            <a:r>
+              <a:rPr sz="1000" b="0">
+                <a:solidFill>
+                  <a:srgbClr val="9AA1AC"/>
+                </a:solidFill>
+                <a:latin typeface="Segoe UI"/>
+              </a:rPr>
+              <a:t>Источник: reports/report.md §8–9; README.md «Ограничения»</a:t>
+            </a:r>
+          </a:p>
+        </p:txBody>
+      </p:sp>
+      <p:sp>
+        <p:nvSpPr>
+          <p:cNvPr id="6" name="TextBox 5"/>
+          <p:cNvSpPr txBox="1"/>
+          <p:nvPr/>
+        </p:nvSpPr>
+        <p:spPr>
+          <a:xfrm>
+            <a:off x="11155680" y="6355080"/>
+            <a:ext cx="640080" cy="320040"/>
+          </a:xfrm>
+          <a:prstGeom prst="rect">
+            <a:avLst/>
+          </a:prstGeom>
+          <a:noFill/>
+        </p:spPr>
+        <p:txBody>
+          <a:bodyPr wrap="square" anchor="t" lIns="18288" rIns="18288" tIns="18288" bIns="18288">
+            <a:spAutoFit/>
+          </a:bodyPr>
+          <a:lstStyle/>
+          <a:p>
+            <a:pPr algn="r">
+              <a:spcAft>
+                <a:spcPts val="600"/>
+              </a:spcAft>
+            </a:pPr>
+            <a:r>
+              <a:rPr sz="1000" b="0">
+                <a:solidFill>
+                  <a:srgbClr val="9AA1AC"/>
+                </a:solidFill>
+                <a:latin typeface="Segoe UI"/>
+              </a:rPr>
+              <a:t>3:32</a:t>
+            </a:r>
+          </a:p>
+        </p:txBody>
+      </p:sp>
+    </p:spTree>
+  </p:cSld>
+  <p:clrMapOvr>
+    <a:masterClrMapping/>
+  </p:clrMapOvr>
+</p:sld>
+</file>
+
+<file path=ppt/slides/slide13.xml><?xml version="1.0" encoding="utf-8"?>
+<p:sld xmlns:a="http://schemas.openxmlformats.org/drawingml/2006/main" xmlns:p="http://schemas.openxmlformats.org/presentationml/2006/main" xmlns:r="http://schemas.openxmlformats.org/officeDocument/2006/relationships">
+  <p:cSld>
+    <p:bg>
+      <p:bgPr>
+        <a:solidFill>
+          <a:srgbClr val="101216"/>
+        </a:solidFill>
+        <a:effectLst/>
+      </p:bgPr>
+    </p:bg>
+    <p:spTree>
+      <p:nvGrpSpPr>
+        <p:cNvPr id="1" name=""/>
+        <p:cNvGrpSpPr/>
+        <p:nvPr/>
+      </p:nvGrpSpPr>
+      <p:grpSpPr/>
+      <p:sp>
+        <p:nvSpPr>
+          <p:cNvPr id="2" name="TextBox 1"/>
+          <p:cNvSpPr txBox="1"/>
+          <p:nvPr/>
+        </p:nvSpPr>
+        <p:spPr>
+          <a:xfrm>
+            <a:off x="457200" y="201168"/>
+            <a:ext cx="8229600" cy="274320"/>
+          </a:xfrm>
+          <a:prstGeom prst="rect">
+            <a:avLst/>
+          </a:prstGeom>
+          <a:noFill/>
+        </p:spPr>
+        <p:txBody>
+          <a:bodyPr wrap="square" anchor="t" lIns="18288" rIns="18288" tIns="18288" bIns="18288">
+            <a:spAutoFit/>
+          </a:bodyPr>
+          <a:lstStyle/>
+          <a:p>
+            <a:pPr algn="l">
+              <a:spcAft>
+                <a:spcPts val="600"/>
+              </a:spcAft>
+            </a:pPr>
+            <a:r>
+              <a:rPr sz="1200" b="1">
+                <a:solidFill>
+                  <a:srgbClr val="D9912E"/>
+                </a:solidFill>
+                <a:latin typeface="Segoe UI"/>
+              </a:rPr>
+              <a:t>13 · Воспроизводимость</a:t>
+            </a:r>
+          </a:p>
+        </p:txBody>
+      </p:sp>
+      <p:sp>
+        <p:nvSpPr>
+          <p:cNvPr id="3" name="TextBox 2"/>
+          <p:cNvSpPr txBox="1"/>
+          <p:nvPr/>
+        </p:nvSpPr>
+        <p:spPr>
+          <a:xfrm>
+            <a:off x="457200" y="457200"/>
+            <a:ext cx="11247120" cy="960120"/>
+          </a:xfrm>
+          <a:prstGeom prst="rect">
+            <a:avLst/>
+          </a:prstGeom>
+          <a:noFill/>
+        </p:spPr>
+        <p:txBody>
+          <a:bodyPr wrap="square" anchor="t" lIns="18288" rIns="18288" tIns="18288" bIns="18288">
+            <a:spAutoFit/>
+          </a:bodyPr>
+          <a:lstStyle/>
+          <a:p>
+            <a:pPr algn="l">
+              <a:spcAft>
+                <a:spcPts val="600"/>
+              </a:spcAft>
+            </a:pPr>
+            <a:r>
+              <a:rPr sz="2600" b="1">
+                <a:solidFill>
+                  <a:srgbClr val="EEEFF1"/>
+                </a:solidFill>
+                <a:latin typeface="Segoe UI"/>
+              </a:rPr>
+              <a:t>Одна команда, 6.9 с без сети; чистый клон до карты — 7,5 мин, числа совпали</a:t>
+            </a:r>
+          </a:p>
+        </p:txBody>
+      </p:sp>
+      <p:sp>
+        <p:nvSpPr>
+          <p:cNvPr id="4" name="TextBox 3"/>
+          <p:cNvSpPr txBox="1"/>
+          <p:nvPr/>
+        </p:nvSpPr>
+        <p:spPr>
+          <a:xfrm>
+            <a:off x="457200" y="1600200"/>
+            <a:ext cx="5577840" cy="4572000"/>
+          </a:xfrm>
+          <a:prstGeom prst="rect">
+            <a:avLst/>
+          </a:prstGeom>
+          <a:noFill/>
+        </p:spPr>
+        <p:txBody>
+          <a:bodyPr wrap="square" anchor="t" lIns="18288" rIns="18288" tIns="18288" bIns="18288">
+            <a:spAutoFit/>
+          </a:bodyPr>
+          <a:lstStyle/>
+          <a:p>
+            <a:pPr algn="l">
+              <a:spcAft>
+                <a:spcPts val="1000"/>
+              </a:spcAft>
+            </a:pPr>
+            <a:r>
+              <a:rPr sz="1600" b="0">
+                <a:solidFill>
+                  <a:srgbClr val="EEEFF1"/>
+                </a:solidFill>
+                <a:latin typeface="Segoe UI"/>
+              </a:rPr>
               <a:t>• Одна команда: run.ps1 -Case all -Offline (CSV → отбор → пары → маски → детектор → метрики → выгрузка)</a:t>
             </a:r>
           </a:p>
@@ -5449,7 +5837,7 @@
                 </a:solidFill>
                 <a:latin typeface="Segoe UI"/>
               </a:rPr>
-              <a:t>• Тесты кейса (25.09.2026 23:17): 211 passed, 2 skipped, 0 failed; числа документов сверяет тест</a:t>
+              <a:t>• Тесты кейса (25.09.2026 23:54): 225 passed, 2 skipped, 0 failed; числа документов сверяет тест</a:t>
             </a:r>
           </a:p>
         </p:txBody>
@@ -5649,7 +6037,7 @@
                 </a:solidFill>
                 <a:latin typeface="Segoe UI"/>
               </a:rPr>
-              <a:t>3:52</a:t>
+              <a:t>3:48</a:t>
             </a:r>
           </a:p>
         </p:txBody>
@@ -5981,7 +6369,7 @@
                 </a:solidFill>
                 <a:latin typeface="Segoe UI"/>
               </a:rPr>
-              <a:t>0:20</a:t>
+              <a:t>0:15</a:t>
             </a:r>
           </a:p>
         </p:txBody>
@@ -6388,7 +6776,7 @@
                 </a:solidFill>
                 <a:latin typeface="Segoe UI"/>
               </a:rPr>
-              <a:t>0:40</a:t>
+              <a:t>0:30</a:t>
             </a:r>
           </a:p>
         </p:txBody>
@@ -7043,7 +7431,7 @@
                 </a:solidFill>
                 <a:latin typeface="Segoe UI"/>
               </a:rPr>
-              <a:t>1:00</a:t>
+              <a:t>0:47</a:t>
             </a:r>
           </a:p>
         </p:txBody>
@@ -7839,7 +8227,7 @@
                 </a:solidFill>
                 <a:latin typeface="Segoe UI"/>
               </a:rPr>
-              <a:t>1:20</a:t>
+              <a:t>1:02</a:t>
             </a:r>
           </a:p>
         </p:txBody>
@@ -7943,7 +8331,7 @@
                 </a:solidFill>
                 <a:latin typeface="Segoe UI"/>
               </a:rPr>
-              <a:t>Детектор: F1 0.871 на test MARIDA, но на снимках пар срабатывает на блике, облаках и барашках</a:t>
+              <a:t>Детектор: F1 0.871 на test MARIDA; на снимках пар — 5 объектов, в полосах 0</a:t>
             </a:r>
           </a:p>
         </p:txBody>
@@ -7976,7 +8364,7 @@
               </a:spcAft>
             </a:pPr>
             <a:r>
-              <a:rPr sz="1600" b="0">
+              <a:rPr sz="1500" b="0">
                 <a:solidFill>
                   <a:srgbClr val="EEEFF1"/>
                 </a:solidFill>
@@ -7992,13 +8380,13 @@
               </a:spcAft>
             </a:pPr>
             <a:r>
-              <a:rPr sz="1600" b="0">
+              <a:rPr sz="1500" b="0">
                 <a:solidFill>
                   <a:srgbClr val="EEEFF1"/>
                 </a:solidFill>
                 <a:latin typeface="Segoe UI"/>
               </a:rPr>
-              <a:t>• Ложные: 75, из них суда 27 и органика 21; на саргассуме и мутной воде — 0 (FDI × NDVI помечает 46 % саргассума)</a:t>
+              <a:t>• MARIDA test: на саргассуме и мутной воде ложных 0 (FDI × NDVI помечает 46 % саргассума); ошибки — суда 27 и органика 21</a:t>
             </a:r>
           </a:p>
           <a:p>
@@ -8008,13 +8396,13 @@
               </a:spcAft>
             </a:pPr>
             <a:r>
-              <a:rPr sz="1600" b="0">
+              <a:rPr sz="1500" b="0">
                 <a:solidFill>
                   <a:srgbClr val="EEEFF1"/>
                 </a:solidFill>
                 <a:latin typeface="Segoe UI"/>
               </a:rPr>
-              <a:t>• На 22 снимках пар (L2A): 975 объектов, в полосах 6; без HE460 т.03 ложные типы — 55.0 % (блик, облака); 721 вне полосы на HE460 т.03 — вероятно барашки/пена</a:t>
+              <a:t>• Снимки пар (L2A): гармонизация каналов выключена по MARIDA val — F1 0.923 без сдвига против 0.897 со сдвигом, Δ −0.025 [−0.072; −0.013]</a:t>
             </a:r>
           </a:p>
           <a:p>
@@ -8024,13 +8412,29 @@
               </a:spcAft>
             </a:pPr>
             <a:r>
-              <a:rPr sz="1600" b="0">
+              <a:rPr sz="1500" b="0">
                 <a:solidFill>
                   <a:srgbClr val="EEEFF1"/>
                 </a:solidFill>
                 <a:latin typeface="Segoe UI"/>
               </a:rPr>
-              <a:t>• Без гармонизации L2A → MARIDA остаётся 5 объектов из 975: F1 0.871 на снимки пар не переносится</a:t>
+              <a:t>• Сейчас: 5 объектов на 22 сценах, в полосах 0; вне полосы HE460 т.03 — 1 судно (верное срабатывание на сложном фоне) и 4 одиночных пикселя</a:t>
+            </a:r>
+          </a:p>
+          <a:p>
+            <a:pPr algn="l">
+              <a:spcAft>
+                <a:spcPts val="1000"/>
+              </a:spcAft>
+            </a:pPr>
+            <a:r>
+              <a:rPr sz="1500" b="0">
+                <a:solidFill>
+                  <a:srgbClr val="EEEFF1"/>
+                </a:solidFill>
+                <a:latin typeface="Segoe UI"/>
+              </a:rPr>
+              <a:t>• Прежний режим (с гармонизацией) — основание отказа: 975 объектов, вероятное скопление по виду у 1.7 % [0.0; 5.0]; размечал ИИ-агент, один аннотатор, κ 0.77 — его же слепой повтор</a:t>
             </a:r>
           </a:p>
         </p:txBody>
@@ -8474,7 +8878,7 @@
                 </a:solidFill>
                 <a:latin typeface="Segoe UI"/>
               </a:rPr>
-              <a:t>Источник: reports/case_detector/compare.md; reports/case_pairs/detector_review.md (final_numbers → case.detector_review)</a:t>
+              <a:t>Источник: reports/case_detector/compare.md; reports/case_pairs/visual_review.md; docs/DECISIONS.md (final_numbers → case.detector_current)</a:t>
             </a:r>
           </a:p>
         </p:txBody>
@@ -8513,7 +8917,7 @@
                 </a:solidFill>
                 <a:latin typeface="Segoe UI"/>
               </a:rPr>
-              <a:t>1:45</a:t>
+              <a:t>1:22</a:t>
             </a:r>
           </a:p>
         </p:txBody>
@@ -9104,7 +9508,7 @@
                 </a:solidFill>
                 <a:latin typeface="Segoe UI"/>
               </a:rPr>
-              <a:t>2:10</a:t>
+              <a:t>1:47</a:t>
             </a:r>
           </a:p>
         </p:txBody>
@@ -9495,7 +9899,7 @@
                 </a:solidFill>
                 <a:latin typeface="Segoe UI"/>
               </a:rPr>
-              <a:t>2:45</a:t>
+              <a:t>2:15</a:t>
             </a:r>
           </a:p>
         </p:txBody>
@@ -9670,14 +10074,14 @@
                 </a:solidFill>
                 <a:latin typeface="Segoe UI"/>
               </a:rPr>
-              <a:t>• Реестр пар, выгрузка GeoJSON/CSV, сохранённые запросы; самопроверка API ↔ выгрузка: 259 из 259, ошибочные входы 46/46, p95 ≤ 66 мс</a:t>
+              <a:t>• Реестр пар, выгрузка GeoJSON/CSV, сохранённые запросы; самопроверка API ↔ выгрузка: 284 из 284, ошибочные входы 46/46, p95 ≤ 81 мс</a:t>
             </a:r>
           </a:p>
         </p:txBody>
       </p:sp>
       <p:pic>
         <p:nvPicPr>
-          <p:cNvPr id="5" name="Picture 4" descr="02_zone_suspicious_pixels.jpg"/>
+          <p:cNvPr id="5" name="Picture 4" descr="02_zone_he460_t03.jpg"/>
           <p:cNvPicPr>
             <a:picLocks noChangeAspect="1"/>
           </p:cNvPicPr>
@@ -9733,7 +10137,7 @@
                 </a:solidFill>
                 <a:latin typeface="Segoe UI"/>
               </a:rPr>
-              <a:t>Северное море, HE460 трансекта 03: пиксели есть, но связь с полем не подтверждена (дрейф &gt; допуска)</a:t>
+              <a:t>Северное море, HE460 трансекта 03: связь с полем не подтверждена (дрейф &gt; допуска), подозрительных пикселей в полосе нет</a:t>
             </a:r>
           </a:p>
         </p:txBody>
@@ -9811,7 +10215,7 @@
                 </a:solidFill>
                 <a:latin typeface="Segoe UI"/>
               </a:rPr>
-              <a:t>3:05</a:t>
+              <a:t>2:32</a:t>
             </a:r>
           </a:p>
         </p:txBody>

--- a/reports/case_deck.pptx
+++ b/reports/case_deck.pptx
@@ -4935,7 +4935,7 @@
                 </a:solidFill>
                 <a:latin typeface="Segoe UI"/>
               </a:rPr>
-              <a:t>• Один источник чисел: final_numbers.json → README, отчёт, дека, речь, ответы; тест сверяет (225 passed)</a:t>
+              <a:t>• Один источник чисел: final_numbers.json → README, отчёт, дека, речь, ответы; тест сверяет (232 passed)</a:t>
             </a:r>
           </a:p>
           <a:p>
@@ -5837,7 +5837,7 @@
                 </a:solidFill>
                 <a:latin typeface="Segoe UI"/>
               </a:rPr>
-              <a:t>• Тесты кейса (25.09.2026 23:54): 225 passed, 2 skipped, 0 failed; числа документов сверяет тест</a:t>
+              <a:t>• Тесты кейса (26.09.2026 00:18): 232 passed, 2 skipped, 0 failed; числа документов сверяет тест</a:t>
             </a:r>
           </a:p>
         </p:txBody>
@@ -10074,7 +10074,7 @@
                 </a:solidFill>
                 <a:latin typeface="Segoe UI"/>
               </a:rPr>
-              <a:t>• Реестр пар, выгрузка GeoJSON/CSV, сохранённые запросы; самопроверка API ↔ выгрузка: 284 из 284, ошибочные входы 46/46, p95 ≤ 81 мс</a:t>
+              <a:t>• Реестр пар, выгрузка GeoJSON/CSV, сохранённые запросы; самопроверка API ↔ выгрузка: 284 из 284, ошибочные входы 46/46, p95 ≤ 104 мс</a:t>
             </a:r>
           </a:p>
         </p:txBody>

--- a/reports/case_deck.pptx
+++ b/reports/case_deck.pptx
@@ -18,6 +18,12 @@
     <p:sldId id="266" r:id="rId18"/>
     <p:sldId id="267" r:id="rId19"/>
     <p:sldId id="268" r:id="rId20"/>
+    <p:sldId id="269" r:id="rId21"/>
+    <p:sldId id="270" r:id="rId22"/>
+    <p:sldId id="271" r:id="rId23"/>
+    <p:sldId id="272" r:id="rId24"/>
+    <p:sldId id="273" r:id="rId25"/>
+    <p:sldId id="274" r:id="rId26"/>
   </p:sldIdLst>
   <p:sldSz cx="12191695" cy="6858000" type="screen4x3"/>
   <p:notesSz cx="6858000" cy="9144000"/>
@@ -514,7 +520,7 @@
           <a:lstStyle/>
           <a:p>
             <a:r>
-              <a:t>[0:00–0:15] Мы решали кейс как два алгоритма, проверенных по отдельности. Детектор по снимку — F1 0.871 на test MARIDA. Концентрация — по полевым данным. Синхронных пар «снимок — поле» 0, поэтому переноса на снимок мы не заявляем, и карта это прямо говорит.</a:t>
+              <a:t>[0:00–0:19] Мы решали кейс как два алгоритма, проверенных по отдельности. Детектор по снимку — F1 0.871 на test MARIDA. Концентрация — по полевым данным. Синхронных пар «снимок — поле» 0, поэтому переноса на снимок мы не заявляем, и карта это прямо говорит.</a:t>
             </a:r>
           </a:p>
         </p:txBody>
@@ -584,7 +590,7 @@
           <a:lstStyle/>
           <a:p>
             <a:r>
-              <a:t>[2:48–3:18] Наш вклад — не модель, а решения, которые защищают выводы от самообмана. Допуск по дрейфу в реестре пар, сплит по участкам маршрута, найденный после утечки через соседей дня, test один раз по заранее записанному правилу, отказ от гармонизации по val, геометрия трансект по первоисточникам и один источник чисел с тестом. Разметка MARIDA, протокол RandomForest и индекс FDI — готовые, мы с ними сравниваемся.</a:t>
+              <a:t>[2:55–3:17] Количество мы считаем раздельно. По полю — штуки на квадратный километр с интервалом Пуассона. По снимку — только доля покрытия подозрительного материала, это не мусор и не штуки. Связать их может только калибровка на парах A с сигналом, а таких пар 0; нужно от 4 до 12.</a:t>
             </a:r>
           </a:p>
         </p:txBody>
@@ -654,7 +660,7 @@
           <a:lstStyle/>
           <a:p>
             <a:r>
-              <a:t>[3:18–3:32] Из правила дрейфа мы сделали инструмент «Подобрать снимок»: он говорит, когда выходить на трансекту. Для Чёрного моря это окна UTC у 12 событий. Геометрию трансект восстановили по PANGAEA.</a:t>
+              <a:t>[3:17–3:30] Нефть — отдельный эксперимент. На разметке MADOS голова лучше простого индекса, но известный разлив Wakashio на реальном снимке она не нашла. Поэтому слой выключен и подписан как эксперимент.</a:t>
             </a:r>
           </a:p>
         </p:txBody>
@@ -724,7 +730,7 @@
           <a:lstStyle/>
           <a:p>
             <a:r>
-              <a:t>[3:32–3:48] Ограничения называем сами: перенос на снимок не доказан, данных мало, интервалы недопокрывают. Развитие — трансекты под пролёт с записанным временем и больше рейсов.</a:t>
+              <a:t>[3:30–4:00] Детектор — пиксельный LightGBM. На test MARIDA F1 0.871, RandomForest — 0.771, индексы FDI — 0.042; саргассум и мутную воду он не путает. На снимках пар мы выключили гармонизацию каналов — решение по MARIDA val, не по тесту. Сейчас 5 объектов на 22 сценах и ни одного в полосах; вне полосы — судно, это верное срабатывание. Прежний режим давал 975 объектов, почти всё — фон моря.</a:t>
             </a:r>
           </a:p>
         </p:txBody>
@@ -794,7 +800,427 @@
           <a:lstStyle/>
           <a:p>
             <a:r>
-              <a:t>[3:48–4:00] Всё воспроизводится одной командой без сети; чистый клон до карты — 7,5 минуты, числа совпали. Спасибо, готовы к вопросам.</a:t>
+              <a:t>[4:00–4:23] Концентрация: C равно N на A, интервал Пуассона, контрольный пример — 60.0. Модели сравниваем с медианой на участках маршрута. На dev ridge выигрывает слабо, а на отложенном test, посчитанном один раз, — 30.0 против 25.2 у медианы. Правило записано до открытия test, поэтому на карте — медиана. Модель не спасаем.</a:t>
+            </a:r>
+          </a:p>
+        </p:txBody>
+      </p:sp>
+      <p:sp>
+        <p:nvSpPr>
+          <p:cNvPr id="4" name="Slide Number Placeholder 3"/>
+          <p:cNvSpPr>
+            <a:spLocks noGrp="1"/>
+          </p:cNvSpPr>
+          <p:nvPr>
+            <p:ph type="sldNum" idx="5" sz="quarter"/>
+          </p:nvPr>
+        </p:nvSpPr>
+        <p:spPr/>
+      </p:sp>
+    </p:spTree>
+  </p:cSld>
+  <p:clrMapOvr>
+    <a:masterClrMapping/>
+  </p:clrMapOvr>
+</p:notes>
+</file>
+
+<file path=ppt/notesSlides/notesSlide14.xml><?xml version="1.0" encoding="utf-8"?>
+<p:notes xmlns:a="http://schemas.openxmlformats.org/drawingml/2006/main" xmlns:p="http://schemas.openxmlformats.org/presentationml/2006/main" xmlns:r="http://schemas.openxmlformats.org/officeDocument/2006/relationships">
+  <p:cSld>
+    <p:spTree>
+      <p:nvGrpSpPr>
+        <p:cNvPr id="1" name=""/>
+        <p:cNvGrpSpPr/>
+        <p:nvPr/>
+      </p:nvGrpSpPr>
+      <p:grpSpPr>
+        <a:xfrm>
+          <a:off x="0" y="0"/>
+          <a:ext cx="0" cy="0"/>
+          <a:chOff x="0" y="0"/>
+          <a:chExt cx="0" cy="0"/>
+        </a:xfrm>
+      </p:grpSpPr>
+      <p:sp>
+        <p:nvSpPr>
+          <p:cNvPr id="2" name="Slide Image Placeholder 1"/>
+          <p:cNvSpPr>
+            <a:spLocks noGrp="1"/>
+          </p:cNvSpPr>
+          <p:nvPr>
+            <p:ph type="sldImg" idx="2"/>
+          </p:nvPr>
+        </p:nvSpPr>
+        <p:spPr/>
+      </p:sp>
+      <p:sp>
+        <p:nvSpPr>
+          <p:cNvPr id="3" name="Notes Placeholder 2"/>
+          <p:cNvSpPr>
+            <a:spLocks noGrp="1"/>
+          </p:cNvSpPr>
+          <p:nvPr>
+            <p:ph type="body" idx="3" sz="quarter"/>
+          </p:nvPr>
+        </p:nvSpPr>
+        <p:spPr/>
+        <p:txBody>
+          <a:bodyPr/>
+          <a:lstStyle/>
+          <a:p>
+            <a:r>
+              <a:t>[4:23–4:41] Связь снимка с полем мы всё же проверили. На 11 парах FDI даёт ρ −0.75, но после поправки Холма p 0.12, а случайная вода той же сцены даёт почти то же. Вывод — данных мало: нужно около 33 независимых пар.</a:t>
+            </a:r>
+          </a:p>
+        </p:txBody>
+      </p:sp>
+      <p:sp>
+        <p:nvSpPr>
+          <p:cNvPr id="4" name="Slide Number Placeholder 3"/>
+          <p:cNvSpPr>
+            <a:spLocks noGrp="1"/>
+          </p:cNvSpPr>
+          <p:nvPr>
+            <p:ph type="sldNum" idx="5" sz="quarter"/>
+          </p:nvPr>
+        </p:nvSpPr>
+        <p:spPr/>
+      </p:sp>
+    </p:spTree>
+  </p:cSld>
+  <p:clrMapOvr>
+    <a:masterClrMapping/>
+  </p:clrMapOvr>
+</p:notes>
+</file>
+
+<file path=ppt/notesSlides/notesSlide15.xml><?xml version="1.0" encoding="utf-8"?>
+<p:notes xmlns:a="http://schemas.openxmlformats.org/drawingml/2006/main" xmlns:p="http://schemas.openxmlformats.org/presentationml/2006/main" xmlns:r="http://schemas.openxmlformats.org/officeDocument/2006/relationships">
+  <p:cSld>
+    <p:spTree>
+      <p:nvGrpSpPr>
+        <p:cNvPr id="1" name=""/>
+        <p:cNvGrpSpPr/>
+        <p:nvPr/>
+      </p:nvGrpSpPr>
+      <p:grpSpPr>
+        <a:xfrm>
+          <a:off x="0" y="0"/>
+          <a:ext cx="0" cy="0"/>
+          <a:chOff x="0" y="0"/>
+          <a:chExt cx="0" cy="0"/>
+        </a:xfrm>
+      </p:grpSpPr>
+      <p:sp>
+        <p:nvSpPr>
+          <p:cNvPr id="2" name="Slide Image Placeholder 1"/>
+          <p:cNvSpPr>
+            <a:spLocks noGrp="1"/>
+          </p:cNvSpPr>
+          <p:nvPr>
+            <p:ph type="sldImg" idx="2"/>
+          </p:nvPr>
+        </p:nvSpPr>
+        <p:spPr/>
+      </p:sp>
+      <p:sp>
+        <p:nvSpPr>
+          <p:cNvPr id="3" name="Notes Placeholder 2"/>
+          <p:cNvSpPr>
+            <a:spLocks noGrp="1"/>
+          </p:cNvSpPr>
+          <p:nvPr>
+            <p:ph type="body" idx="3" sz="quarter"/>
+          </p:nvPr>
+        </p:nvSpPr>
+        <p:spPr/>
+        <p:txBody>
+          <a:bodyPr/>
+          <a:lstStyle/>
+          <a:p>
+            <a:r>
+              <a:t>[4:41–4:56] Карта повторяет отчёт: три слоя и два статуса полосы. Эта пара отклонена по дрейфу — «связь не подтверждена»; пикселей детектора в полосе нет, концентрация по снимку недоступна. Выгрузка сверена с API самопроверкой.</a:t>
+            </a:r>
+          </a:p>
+        </p:txBody>
+      </p:sp>
+      <p:sp>
+        <p:nvSpPr>
+          <p:cNvPr id="4" name="Slide Number Placeholder 3"/>
+          <p:cNvSpPr>
+            <a:spLocks noGrp="1"/>
+          </p:cNvSpPr>
+          <p:nvPr>
+            <p:ph type="sldNum" idx="5" sz="quarter"/>
+          </p:nvPr>
+        </p:nvSpPr>
+        <p:spPr/>
+      </p:sp>
+    </p:spTree>
+  </p:cSld>
+  <p:clrMapOvr>
+    <a:masterClrMapping/>
+  </p:clrMapOvr>
+</p:notes>
+</file>
+
+<file path=ppt/notesSlides/notesSlide16.xml><?xml version="1.0" encoding="utf-8"?>
+<p:notes xmlns:a="http://schemas.openxmlformats.org/drawingml/2006/main" xmlns:p="http://schemas.openxmlformats.org/presentationml/2006/main" xmlns:r="http://schemas.openxmlformats.org/officeDocument/2006/relationships">
+  <p:cSld>
+    <p:spTree>
+      <p:nvGrpSpPr>
+        <p:cNvPr id="1" name=""/>
+        <p:cNvGrpSpPr/>
+        <p:nvPr/>
+      </p:nvGrpSpPr>
+      <p:grpSpPr>
+        <a:xfrm>
+          <a:off x="0" y="0"/>
+          <a:ext cx="0" cy="0"/>
+          <a:chOff x="0" y="0"/>
+          <a:chExt cx="0" cy="0"/>
+        </a:xfrm>
+      </p:grpSpPr>
+      <p:sp>
+        <p:nvSpPr>
+          <p:cNvPr id="2" name="Slide Image Placeholder 1"/>
+          <p:cNvSpPr>
+            <a:spLocks noGrp="1"/>
+          </p:cNvSpPr>
+          <p:nvPr>
+            <p:ph type="sldImg" idx="2"/>
+          </p:nvPr>
+        </p:nvSpPr>
+        <p:spPr/>
+      </p:sp>
+      <p:sp>
+        <p:nvSpPr>
+          <p:cNvPr id="3" name="Notes Placeholder 2"/>
+          <p:cNvSpPr>
+            <a:spLocks noGrp="1"/>
+          </p:cNvSpPr>
+          <p:nvPr>
+            <p:ph type="body" idx="3" sz="quarter"/>
+          </p:nvPr>
+        </p:nvSpPr>
+        <p:spPr/>
+        <p:txBody>
+          <a:bodyPr/>
+          <a:lstStyle/>
+          <a:p>
+            <a:r>
+              <a:t>[4:56–5:25] Наш вклад — не модель, а решения, которые защищают выводы от самообмана. Допуск по дрейфу в реестре пар, сплит по участкам маршрута, найденный после утечки через соседей дня, test один раз по заранее записанному правилу, отказ от гармонизации по val, геометрия трансект по первоисточникам и один источник чисел с тестом. Разметка MARIDA, протокол RandomForest и индекс FDI — готовые, мы с ними сравниваемся.</a:t>
+            </a:r>
+          </a:p>
+        </p:txBody>
+      </p:sp>
+      <p:sp>
+        <p:nvSpPr>
+          <p:cNvPr id="4" name="Slide Number Placeholder 3"/>
+          <p:cNvSpPr>
+            <a:spLocks noGrp="1"/>
+          </p:cNvSpPr>
+          <p:nvPr>
+            <p:ph type="sldNum" idx="5" sz="quarter"/>
+          </p:nvPr>
+        </p:nvSpPr>
+        <p:spPr/>
+      </p:sp>
+    </p:spTree>
+  </p:cSld>
+  <p:clrMapOvr>
+    <a:masterClrMapping/>
+  </p:clrMapOvr>
+</p:notes>
+</file>
+
+<file path=ppt/notesSlides/notesSlide17.xml><?xml version="1.0" encoding="utf-8"?>
+<p:notes xmlns:a="http://schemas.openxmlformats.org/drawingml/2006/main" xmlns:p="http://schemas.openxmlformats.org/presentationml/2006/main" xmlns:r="http://schemas.openxmlformats.org/officeDocument/2006/relationships">
+  <p:cSld>
+    <p:spTree>
+      <p:nvGrpSpPr>
+        <p:cNvPr id="1" name=""/>
+        <p:cNvGrpSpPr/>
+        <p:nvPr/>
+      </p:nvGrpSpPr>
+      <p:grpSpPr>
+        <a:xfrm>
+          <a:off x="0" y="0"/>
+          <a:ext cx="0" cy="0"/>
+          <a:chOff x="0" y="0"/>
+          <a:chExt cx="0" cy="0"/>
+        </a:xfrm>
+      </p:grpSpPr>
+      <p:sp>
+        <p:nvSpPr>
+          <p:cNvPr id="2" name="Slide Image Placeholder 1"/>
+          <p:cNvSpPr>
+            <a:spLocks noGrp="1"/>
+          </p:cNvSpPr>
+          <p:nvPr>
+            <p:ph type="sldImg" idx="2"/>
+          </p:nvPr>
+        </p:nvSpPr>
+        <p:spPr/>
+      </p:sp>
+      <p:sp>
+        <p:nvSpPr>
+          <p:cNvPr id="3" name="Notes Placeholder 2"/>
+          <p:cNvSpPr>
+            <a:spLocks noGrp="1"/>
+          </p:cNvSpPr>
+          <p:nvPr>
+            <p:ph type="body" idx="3" sz="quarter"/>
+          </p:nvPr>
+        </p:nvSpPr>
+        <p:spPr/>
+        <p:txBody>
+          <a:bodyPr/>
+          <a:lstStyle/>
+          <a:p>
+            <a:r>
+              <a:t>[5:25–5:38] Из правила дрейфа мы сделали инструмент «Подобрать снимок»: он говорит, когда выходить на трансекту. Для Чёрного моря это окна UTC у 12 событий. Геометрию трансект восстановили по PANGAEA.</a:t>
+            </a:r>
+          </a:p>
+        </p:txBody>
+      </p:sp>
+      <p:sp>
+        <p:nvSpPr>
+          <p:cNvPr id="4" name="Slide Number Placeholder 3"/>
+          <p:cNvSpPr>
+            <a:spLocks noGrp="1"/>
+          </p:cNvSpPr>
+          <p:nvPr>
+            <p:ph type="sldNum" idx="5" sz="quarter"/>
+          </p:nvPr>
+        </p:nvSpPr>
+        <p:spPr/>
+      </p:sp>
+    </p:spTree>
+  </p:cSld>
+  <p:clrMapOvr>
+    <a:masterClrMapping/>
+  </p:clrMapOvr>
+</p:notes>
+</file>
+
+<file path=ppt/notesSlides/notesSlide18.xml><?xml version="1.0" encoding="utf-8"?>
+<p:notes xmlns:a="http://schemas.openxmlformats.org/drawingml/2006/main" xmlns:p="http://schemas.openxmlformats.org/presentationml/2006/main" xmlns:r="http://schemas.openxmlformats.org/officeDocument/2006/relationships">
+  <p:cSld>
+    <p:spTree>
+      <p:nvGrpSpPr>
+        <p:cNvPr id="1" name=""/>
+        <p:cNvGrpSpPr/>
+        <p:nvPr/>
+      </p:nvGrpSpPr>
+      <p:grpSpPr>
+        <a:xfrm>
+          <a:off x="0" y="0"/>
+          <a:ext cx="0" cy="0"/>
+          <a:chOff x="0" y="0"/>
+          <a:chExt cx="0" cy="0"/>
+        </a:xfrm>
+      </p:grpSpPr>
+      <p:sp>
+        <p:nvSpPr>
+          <p:cNvPr id="2" name="Slide Image Placeholder 1"/>
+          <p:cNvSpPr>
+            <a:spLocks noGrp="1"/>
+          </p:cNvSpPr>
+          <p:nvPr>
+            <p:ph type="sldImg" idx="2"/>
+          </p:nvPr>
+        </p:nvSpPr>
+        <p:spPr/>
+      </p:sp>
+      <p:sp>
+        <p:nvSpPr>
+          <p:cNvPr id="3" name="Notes Placeholder 2"/>
+          <p:cNvSpPr>
+            <a:spLocks noGrp="1"/>
+          </p:cNvSpPr>
+          <p:nvPr>
+            <p:ph type="body" idx="3" sz="quarter"/>
+          </p:nvPr>
+        </p:nvSpPr>
+        <p:spPr/>
+        <p:txBody>
+          <a:bodyPr/>
+          <a:lstStyle/>
+          <a:p>
+            <a:r>
+              <a:t>[5:38–5:50] Ограничения называем сами: перенос на снимок не доказан, данных мало, интервалы недопокрывают. Развитие — трансекты под пролёт с записанным временем и больше рейсов.</a:t>
+            </a:r>
+          </a:p>
+        </p:txBody>
+      </p:sp>
+      <p:sp>
+        <p:nvSpPr>
+          <p:cNvPr id="4" name="Slide Number Placeholder 3"/>
+          <p:cNvSpPr>
+            <a:spLocks noGrp="1"/>
+          </p:cNvSpPr>
+          <p:nvPr>
+            <p:ph type="sldNum" idx="5" sz="quarter"/>
+          </p:nvPr>
+        </p:nvSpPr>
+        <p:spPr/>
+      </p:sp>
+    </p:spTree>
+  </p:cSld>
+  <p:clrMapOvr>
+    <a:masterClrMapping/>
+  </p:clrMapOvr>
+</p:notes>
+</file>
+
+<file path=ppt/notesSlides/notesSlide19.xml><?xml version="1.0" encoding="utf-8"?>
+<p:notes xmlns:a="http://schemas.openxmlformats.org/drawingml/2006/main" xmlns:p="http://schemas.openxmlformats.org/presentationml/2006/main" xmlns:r="http://schemas.openxmlformats.org/officeDocument/2006/relationships">
+  <p:cSld>
+    <p:spTree>
+      <p:nvGrpSpPr>
+        <p:cNvPr id="1" name=""/>
+        <p:cNvGrpSpPr/>
+        <p:nvPr/>
+      </p:nvGrpSpPr>
+      <p:grpSpPr>
+        <a:xfrm>
+          <a:off x="0" y="0"/>
+          <a:ext cx="0" cy="0"/>
+          <a:chOff x="0" y="0"/>
+          <a:chExt cx="0" cy="0"/>
+        </a:xfrm>
+      </p:grpSpPr>
+      <p:sp>
+        <p:nvSpPr>
+          <p:cNvPr id="2" name="Slide Image Placeholder 1"/>
+          <p:cNvSpPr>
+            <a:spLocks noGrp="1"/>
+          </p:cNvSpPr>
+          <p:nvPr>
+            <p:ph type="sldImg" idx="2"/>
+          </p:nvPr>
+        </p:nvSpPr>
+        <p:spPr/>
+      </p:sp>
+      <p:sp>
+        <p:nvSpPr>
+          <p:cNvPr id="3" name="Notes Placeholder 2"/>
+          <p:cNvSpPr>
+            <a:spLocks noGrp="1"/>
+          </p:cNvSpPr>
+          <p:nvPr>
+            <p:ph type="body" idx="3" sz="quarter"/>
+          </p:nvPr>
+        </p:nvSpPr>
+        <p:spPr/>
+        <p:txBody>
+          <a:bodyPr/>
+          <a:lstStyle/>
+          <a:p>
+            <a:r>
+              <a:t>[5:50–6:02] Всё воспроизводится одной командой без сети; чистый клон до карты — 7,5 минуты, числа совпали. Спасибо, готовы к вопросам.</a:t>
             </a:r>
           </a:p>
         </p:txBody>
@@ -864,7 +1290,7 @@
           <a:lstStyle/>
           <a:p>
             <a:r>
-              <a:t>[0:15–0:30] Пользователь — специалист по мониторингу. Он выбирает акваторию и дату, проверяет находки детектора, сравнивает с полем и выгружает результат. Измерение, оценка и площадь маски у нас везде — разные поля.</a:t>
+              <a:t>[0:19–0:33] Пользователь — специалист по мониторингу. Он выбирает акваторию и дату, проверяет находки детектора, сравнивает с полем и выгружает результат. Измерение, оценка и площадь маски у нас везде — разные поля.</a:t>
             </a:r>
           </a:p>
         </p:txBody>
@@ -934,7 +1360,7 @@
           <a:lstStyle/>
           <a:p>
             <a:r>
-              <a:t>[0:30–0:47] Целевая величина — суммарный плавающий пластик больше двух сантиметров, штук на квадратный километр, визуальная полоса с судна. Это 63 события Саргассова моря, у каждого есть N и A. Весь мусор Северного и Чёрного морей — не пластик, он только для эксперимента.</a:t>
+              <a:t>[0:33–0:52] Целевая величина — суммарный плавающий пластик больше двух сантиметров, штук на квадратный километр, визуальная полоса с судна. Это 63 события Саргассова моря, у каждого есть N и A. Весь мусор Северного и Чёрного морей — не пластик, он только для эксперимента.</a:t>
             </a:r>
           </a:p>
         </p:txBody>
@@ -1004,7 +1430,7 @@
           <a:lstStyle/>
           <a:p>
             <a:r>
-              <a:t>[0:47–1:02] Из 935 строк в основной профиль попадают 63. У каждого отказа есть причина: объектные строки, категории, весь мусор. Поля-утечки в признаки не попадают, это проверяют тесты.</a:t>
+              <a:t>[0:52–1:04] Из 935 строк в основной профиль попадают 63. У каждого отказа есть причина: объектные строки, категории, весь мусор. Поля-утечки в признаки не попадают, это проверяют тесты.</a:t>
             </a:r>
           </a:p>
         </p:txBody>
@@ -1074,7 +1500,7 @@
           <a:lstStyle/>
           <a:p>
             <a:r>
-              <a:t>[1:02–1:22] Реестр пар — главный фильтр. Из 318 событий по метаданным проходят 29, маски в полосе — 12. Но вода за сутки уходит на десятки километров: пара синхронна, только если между снимком и наблюдением не больше 4.2 часа. Таких ноль. Для пластика снимков нет вообще.</a:t>
+              <a:t>[1:04–1:24] Реестр пар — главный фильтр. Из 318 событий по метаданным проходят 29, маски в полосе — 12. Но вода за сутки уходит на десятки километров: пара синхронна, только если между снимком и наблюдением не больше 4.2 часа. Таких ноль. Для пластика снимков нет вообще.</a:t>
             </a:r>
           </a:p>
         </p:txBody>
@@ -1144,7 +1570,7 @@
           <a:lstStyle/>
           <a:p>
             <a:r>
-              <a:t>[1:22–1:47] Детектор — пиксельный LightGBM. На test MARIDA F1 0.871, RandomForest — 0.771, индексы FDI — 0.042; саргассум и мутную воду он не путает. На снимках пар мы выключили гармонизацию каналов — решение по MARIDA val, не по тесту. Сейчас 5 объектов на 22 сценах и ни одного в полосах; вне полосы — судно, это верное срабатывание. Прежний режим давал 975 объектов, почти всё — фон моря.</a:t>
+              <a:t>[1:24–1:51] Главное в работе — как мы искали данные. CSV — это подсчёты вдоль маршрутов, поэтому каждую находку мы помечаем уровнем: A, B, C или D. У событий CSV пар уровня A — 0: для пластика снимков нет, в Северном море облака, в Чёрном время трансект не опубликовано. Тогда мы нашли открытые данные ADIS и получили 66 пар уровня A.</a:t>
             </a:r>
           </a:p>
         </p:txBody>
@@ -1214,7 +1640,7 @@
           <a:lstStyle/>
           <a:p>
             <a:r>
-              <a:t>[1:47–2:15] Концентрация: C равно N на A, интервал Пуассона, контрольный пример — 60.0. Модели сравниваем с медианой на участках маршрута. На dev ridge выигрывает слабо, а на отложенном test, посчитанном один раз, — 30.0 против 25.2 у медианы. Правило записано до открытия test, поэтому на карте — медиана. Модель не спасаем.</a:t>
+              <a:t>[1:51–2:12] Пар уровня A — 66. Время подтверждено даже по самому судну на снимке. В 6 парах, где камера видела предметы, детектор дал 0 пикселей. Это не ошибка, а предел: предмет занимает меньше процента пикселя. Калибровку на таких парах построить нельзя, и мы её не заявляем.</a:t>
             </a:r>
           </a:p>
         </p:txBody>
@@ -1284,7 +1710,7 @@
           <a:lstStyle/>
           <a:p>
             <a:r>
-              <a:t>[2:15–2:32] Связь снимка с полем мы всё же проверили. На 11 парах FDI даёт ρ −0.75, но после поправки Холма p 0.12, а случайная вода той же сцены даёт почти то же. Вывод — данных мало: нужно около 33 независимых пар.</a:t>
+              <a:t>[2:12–2:33] Для детектора мы собрали новые метки: подтверждённые скопления PLP, FloatingObjects и нити Cózar — это B, суда и облака — D. Утечек с MARIDA и MADOS нет, проверяли по дате и по самим пикселям. Текущий детектор на них почти не видит нити и путает суда.</a:t>
             </a:r>
           </a:p>
         </p:txBody>
@@ -1354,7 +1780,7 @@
           <a:lstStyle/>
           <a:p>
             <a:r>
-              <a:t>[2:32–2:48] Карта повторяет отчёт: три слоя и два статуса полосы. Эта пара отклонена по дрейфу — «связь не подтверждена»; пикселей детектора в полосе нет, концентрация по снимку недоступна. Выгрузка сверена с API самопроверкой.</a:t>
+              <a:t>[2:33–2:55] На новых данных мы попробовали дообучить детектор — 11 вариантов по правилу, записанному заранее. Не прошёл ни один: суда и нити спектрально похожи, выигрыш на одном ломает другое. В сервисе остался прежний детектор. Официальный U-Net MARIDA на том же test — F1 0.501, наш LightGBM — 0.871.</a:t>
             </a:r>
           </a:p>
         </p:txBody>
@@ -4673,7 +5099,7 @@
                 </a:solidFill>
                 <a:latin typeface="Segoe UI"/>
               </a:rPr>
-              <a:t>Источник: reports/final_numbers.json → case.sections (6 разделов с источником и протоколом)</a:t>
+              <a:t>Источник: reports/final_numbers.json → case.sections (13 разделов с источником и протоколом)</a:t>
             </a:r>
           </a:p>
         </p:txBody>
@@ -4777,7 +5203,7 @@
                 </a:solidFill>
                 <a:latin typeface="Segoe UI"/>
               </a:rPr>
-              <a:t>10 · Собственный вклад и ключевые решения</a:t>
+              <a:t>10 · Количество: поле и снимок раздельно</a:t>
             </a:r>
           </a:p>
         </p:txBody>
@@ -4810,13 +5236,13 @@
               </a:spcAft>
             </a:pPr>
             <a:r>
-              <a:rPr sz="2600" b="1">
+              <a:rPr sz="2300" b="1">
                 <a:solidFill>
                   <a:srgbClr val="EEEFF1"/>
                 </a:solidFill>
                 <a:latin typeface="Segoe UI"/>
               </a:rPr>
-              <a:t>Наш вклад — решения, каждое проверено экспериментом или записано до результата</a:t>
+              <a:t>Количество раздельно: поле — шт./км², снимок — доля покрытия; калибровки нет, нужно 4–12 пар A с сигналом</a:t>
             </a:r>
           </a:p>
         </p:txBody>
@@ -4830,7 +5256,7 @@
         <p:spPr>
           <a:xfrm>
             <a:off x="457200" y="1600200"/>
-            <a:ext cx="11247120" cy="4572000"/>
+            <a:ext cx="5577840" cy="4572000"/>
           </a:xfrm>
           <a:prstGeom prst="rect">
             <a:avLst/>
@@ -4849,13 +5275,13 @@
               </a:spcAft>
             </a:pPr>
             <a:r>
-              <a:rPr sz="1500" b="0">
+              <a:rPr sz="1600" b="0">
                 <a:solidFill>
                   <a:srgbClr val="EEEFF1"/>
                 </a:solidFill>
                 <a:latin typeface="Segoe UI"/>
               </a:rPr>
-              <a:t>• Реестр пар с допуском по дрейфу вместо «±1 сут»: 29 пар по метаданным → 0 синхронных; причины у каждого из 318 событий</a:t>
+              <a:t>• Поле (измерение): S2 ΣN/ΣA = 697 / 12.94 км² = 53.9 [49.9–58.0] шт./км²</a:t>
             </a:r>
           </a:p>
           <a:p>
@@ -4865,13 +5291,13 @@
               </a:spcAft>
             </a:pPr>
             <a:r>
-              <a:rPr sz="1500" b="0">
+              <a:rPr sz="1600" b="0">
                 <a:solidFill>
                   <a:srgbClr val="EEEFF1"/>
                 </a:solidFill>
                 <a:latin typeface="Segoe UI"/>
               </a:rPr>
-              <a:t>• Сплит по участкам маршрута + буфер: на «связных компонентах» kNN выигрывал −11.6 [−23.1; −0.9], на маршруте −4.2 [−12.0; 3.4] — утечка через соседей дня</a:t>
+              <a:t>• Снимок: доля покрытия подозрительного материала, м²/км² пригодной воды; медиана на 64 живых сценах 3.2; это не мусор и не шт./км²</a:t>
             </a:r>
           </a:p>
           <a:p>
@@ -4881,13 +5307,13 @@
               </a:spcAft>
             </a:pPr>
             <a:r>
-              <a:rPr sz="1500" b="0">
+              <a:rPr sz="1600" b="0">
                 <a:solidFill>
                   <a:srgbClr val="EEEFF1"/>
                 </a:solidFill>
                 <a:latin typeface="Segoe UI"/>
               </a:rPr>
-              <a:t>• Отложенный test один раз: правило «не лучше медианы → медиана» записано 25.09.2026 19:05, test открыт 25.09.2026 19:15 — на карте медиана</a:t>
+              <a:t>• Калибровка ln C = ln k + b · ln S требует пар A с ненулевым сигналом — их 0; в 11 полосах CSV сигнал 0</a:t>
             </a:r>
           </a:p>
           <a:p>
@@ -4897,13 +5323,13 @@
               </a:spcAft>
             </a:pPr>
             <a:r>
-              <a:rPr sz="1500" b="0">
+              <a:rPr sz="1600" b="0">
                 <a:solidFill>
                   <a:srgbClr val="EEEFF1"/>
                 </a:solidFill>
                 <a:latin typeface="Segoe UI"/>
               </a:rPr>
-              <a:t>• Отказ от гармонизации L2A по MARIDA val (F1 0.923 против 0.897), test не использовался</a:t>
+              <a:t>• Нужно: k в пределах ×/÷2 — 4–12 пар с сигналом; для связи r = 0.5 — 30 пар; обследований в 3.5 раза больше</a:t>
             </a:r>
           </a:p>
           <a:p>
@@ -4913,52 +5339,142 @@
               </a:spcAft>
             </a:pPr>
             <a:r>
-              <a:rPr sz="1500" b="0">
+              <a:rPr sz="1600" b="0">
                 <a:solidFill>
                   <a:srgbClr val="EEEFF1"/>
                 </a:solidFill>
                 <a:latin typeface="Segoe UI"/>
               </a:rPr>
-              <a:t>• Геометрия трансект по первоисточникам PANGAEA: 104 события, 4 прерванные — двумя сегментами; окно синхронизации |dt| ≤ 4.17 ч</a:t>
-            </a:r>
-          </a:p>
-          <a:p>
-            <a:pPr algn="l">
-              <a:spcAft>
-                <a:spcPts val="1000"/>
-              </a:spcAft>
-            </a:pPr>
-            <a:r>
-              <a:rPr sz="1500" b="0">
+              <a:t>• «Площадь / размер = штуки» — только сценарий: 200 м² маски = 160–500000 предметов; массу не оцениваем</a:t>
+            </a:r>
+          </a:p>
+        </p:txBody>
+      </p:sp>
+      <p:sp>
+        <p:nvSpPr>
+          <p:cNvPr id="5" name="Rectangle 4"/>
+          <p:cNvSpPr/>
+          <p:nvPr/>
+        </p:nvSpPr>
+        <p:spPr>
+          <a:xfrm>
+            <a:off x="6400800" y="1691640"/>
+            <a:ext cx="5349240" cy="1554480"/>
+          </a:xfrm>
+          <a:prstGeom prst="rect">
+            <a:avLst/>
+          </a:prstGeom>
+          <a:solidFill>
+            <a:srgbClr val="1B1E24"/>
+          </a:solidFill>
+          <a:ln>
+            <a:noFill/>
+          </a:ln>
+          <a:effectLst/>
+        </p:spPr>
+        <p:style>
+          <a:lnRef idx="1">
+            <a:schemeClr val="accent1"/>
+          </a:lnRef>
+          <a:fillRef idx="3">
+            <a:schemeClr val="accent1"/>
+          </a:fillRef>
+          <a:effectRef idx="2">
+            <a:schemeClr val="accent1"/>
+          </a:effectRef>
+          <a:fontRef idx="minor">
+            <a:schemeClr val="lt1"/>
+          </a:fontRef>
+        </p:style>
+        <p:txBody>
+          <a:bodyPr rtlCol="0" anchor="ctr"/>
+          <a:lstStyle/>
+          <a:p>
+            <a:pPr algn="ctr"/>
+          </a:p>
+        </p:txBody>
+      </p:sp>
+      <p:sp>
+        <p:nvSpPr>
+          <p:cNvPr id="6" name="TextBox 5"/>
+          <p:cNvSpPr txBox="1"/>
+          <p:nvPr/>
+        </p:nvSpPr>
+        <p:spPr>
+          <a:xfrm>
+            <a:off x="6675120" y="1783080"/>
+            <a:ext cx="4800600" cy="822960"/>
+          </a:xfrm>
+          <a:prstGeom prst="rect">
+            <a:avLst/>
+          </a:prstGeom>
+          <a:noFill/>
+        </p:spPr>
+        <p:txBody>
+          <a:bodyPr wrap="square" anchor="t" lIns="18288" rIns="18288" tIns="18288" bIns="18288">
+            <a:spAutoFit/>
+          </a:bodyPr>
+          <a:lstStyle/>
+          <a:p>
+            <a:pPr algn="l">
+              <a:spcAft>
+                <a:spcPts val="600"/>
+              </a:spcAft>
+            </a:pPr>
+            <a:r>
+              <a:rPr sz="4800" b="1">
+                <a:solidFill>
+                  <a:srgbClr val="D9912E"/>
+                </a:solidFill>
+                <a:latin typeface="Segoe UI"/>
+              </a:rPr>
+              <a:t>4–12</a:t>
+            </a:r>
+          </a:p>
+        </p:txBody>
+      </p:sp>
+      <p:sp>
+        <p:nvSpPr>
+          <p:cNvPr id="7" name="TextBox 6"/>
+          <p:cNvSpPr txBox="1"/>
+          <p:nvPr/>
+        </p:nvSpPr>
+        <p:spPr>
+          <a:xfrm>
+            <a:off x="6675120" y="2606040"/>
+            <a:ext cx="4800600" cy="594360"/>
+          </a:xfrm>
+          <a:prstGeom prst="rect">
+            <a:avLst/>
+          </a:prstGeom>
+          <a:noFill/>
+        </p:spPr>
+        <p:txBody>
+          <a:bodyPr wrap="square" anchor="t" lIns="18288" rIns="18288" tIns="18288" bIns="18288">
+            <a:spAutoFit/>
+          </a:bodyPr>
+          <a:lstStyle/>
+          <a:p>
+            <a:pPr algn="l">
+              <a:spcAft>
+                <a:spcPts val="600"/>
+              </a:spcAft>
+            </a:pPr>
+            <a:r>
+              <a:rPr sz="1300" b="0">
                 <a:solidFill>
                   <a:srgbClr val="EEEFF1"/>
                 </a:solidFill>
                 <a:latin typeface="Segoe UI"/>
               </a:rPr>
-              <a:t>• Один источник чисел: final_numbers.json → README, отчёт, дека, речь, ответы; тест сверяет (232 passed)</a:t>
-            </a:r>
-          </a:p>
-          <a:p>
-            <a:pPr algn="l">
-              <a:spcAft>
-                <a:spcPts val="1000"/>
-              </a:spcAft>
-            </a:pPr>
-            <a:r>
-              <a:rPr sz="1500" b="0">
-                <a:solidFill>
-                  <a:srgbClr val="EEEFF1"/>
-                </a:solidFill>
-                <a:latin typeface="Segoe UI"/>
-              </a:rPr>
-              <a:t>• Готовое, не наше: разметка MARIDA и MADOS, протокол RandomForest MARIDA, индекс FDI, каталоги STAC</a:t>
-            </a:r>
-          </a:p>
-        </p:txBody>
-      </p:sp>
-      <p:sp>
-        <p:nvSpPr>
-          <p:cNvPr id="5" name="TextBox 4"/>
+              <a:t>независимых пар A с ненулевым сигналом нужно для калибровки (есть 0)</a:t>
+            </a:r>
+          </a:p>
+        </p:txBody>
+      </p:sp>
+      <p:sp>
+        <p:nvSpPr>
+          <p:cNvPr id="8" name="TextBox 7"/>
           <p:cNvSpPr txBox="1"/>
           <p:nvPr/>
         </p:nvSpPr>
@@ -4990,14 +5506,14 @@
                 </a:solidFill>
                 <a:latin typeface="Segoe UI"/>
               </a:rPr>
-              <a:t>Источник: reports/case_pairs/summary.md; reports/case_conc/metrics.json; configs/case_selection.yaml; docs/DECISIONS.md; reports/case_geometry/summary.md</a:t>
-            </a:r>
-          </a:p>
-        </p:txBody>
-      </p:sp>
-      <p:sp>
-        <p:nvSpPr>
-          <p:cNvPr id="6" name="TextBox 5"/>
+              <a:t>Источник: reports/quantity/*.json, docs/QUANTITY.md (final_numbers → case.sections.quantity)</a:t>
+            </a:r>
+          </a:p>
+        </p:txBody>
+      </p:sp>
+      <p:sp>
+        <p:nvSpPr>
+          <p:cNvPr id="9" name="TextBox 8"/>
           <p:cNvSpPr txBox="1"/>
           <p:nvPr/>
         </p:nvSpPr>
@@ -5029,7 +5545,7 @@
                 </a:solidFill>
                 <a:latin typeface="Segoe UI"/>
               </a:rPr>
-              <a:t>2:48</a:t>
+              <a:t>2:55</a:t>
             </a:r>
           </a:p>
         </p:txBody>
@@ -5094,7 +5610,7 @@
                 </a:solidFill>
                 <a:latin typeface="Segoe UI"/>
               </a:rPr>
-              <a:t>11 · Дополнительные функции</a:t>
+              <a:t>11 · Нефтяное пятно — эксперимент</a:t>
             </a:r>
           </a:p>
         </p:txBody>
@@ -5133,7 +5649,7 @@
                 </a:solidFill>
                 <a:latin typeface="Segoe UI"/>
               </a:rPr>
-              <a:t>«Подобрать снимок»: из правила дрейфа — инструмент планирования полевых работ под пролёт</a:t>
+              <a:t>Нефть: на MADOS F1 0.733 против OSI 0.324, но разлив Wakashio не найден — слой выключен</a:t>
             </a:r>
           </a:p>
         </p:txBody>
@@ -5172,7 +5688,7 @@
                 </a:solidFill>
                 <a:latin typeface="Segoe UI"/>
               </a:rPr>
-              <a:t>• Окно синхронизации |dt| ≤ 4.17 ч; наивное окно ±1 сут даёт 29 «пар», синхронных 0</a:t>
+              <a:t>• Отдельная голова на MADOS, сплит по сценам заморожен до обучения; val F1 0.888, test один раз 0.733 [0.612; 0.947]</a:t>
             </a:r>
           </a:p>
           <a:p>
@@ -5188,7 +5704,7 @@
                 </a:solidFill>
                 <a:latin typeface="Segoe UI"/>
               </a:rPr>
-              <a:t>• Чёрное море без времени трансект: 12 событий получают окно UTC, у 8 полоса чистая по маскам</a:t>
+              <a:t>• Контроль на реальном L2A: Wakashio 2020-08-11 — 0.17 км² мелких пятен (пятно в лагуне не найдено), 2020-08-16 — 62.41 км² ряби</a:t>
             </a:r>
           </a:p>
           <a:p>
@@ -5204,93 +5720,136 @@
                 </a:solidFill>
                 <a:latin typeface="Segoe UI"/>
               </a:rPr>
-              <a:t>• Прогноз пролётов на архиве совпал с реальной съёмкой в 82 из 88 случаев (±5 мин)</a:t>
-            </a:r>
-          </a:p>
-          <a:p>
-            <a:pPr algn="l">
-              <a:spcAft>
-                <a:spcPts val="1000"/>
-              </a:spcAft>
-            </a:pPr>
-            <a:r>
-              <a:rPr sz="1600" b="0">
+              <a:t>• Честный отказ: это не детектор нефти на L2A; слой «эксперимент», выключен по умолчанию; единица — площадь, не объём и не масса</a:t>
+            </a:r>
+          </a:p>
+        </p:txBody>
+      </p:sp>
+      <p:sp>
+        <p:nvSpPr>
+          <p:cNvPr id="5" name="Rectangle 4"/>
+          <p:cNvSpPr/>
+          <p:nvPr/>
+        </p:nvSpPr>
+        <p:spPr>
+          <a:xfrm>
+            <a:off x="6400800" y="1691640"/>
+            <a:ext cx="5349240" cy="1554480"/>
+          </a:xfrm>
+          <a:prstGeom prst="rect">
+            <a:avLst/>
+          </a:prstGeom>
+          <a:solidFill>
+            <a:srgbClr val="1B1E24"/>
+          </a:solidFill>
+          <a:ln>
+            <a:noFill/>
+          </a:ln>
+          <a:effectLst/>
+        </p:spPr>
+        <p:style>
+          <a:lnRef idx="1">
+            <a:schemeClr val="accent1"/>
+          </a:lnRef>
+          <a:fillRef idx="3">
+            <a:schemeClr val="accent1"/>
+          </a:fillRef>
+          <a:effectRef idx="2">
+            <a:schemeClr val="accent1"/>
+          </a:effectRef>
+          <a:fontRef idx="minor">
+            <a:schemeClr val="lt1"/>
+          </a:fontRef>
+        </p:style>
+        <p:txBody>
+          <a:bodyPr rtlCol="0" anchor="ctr"/>
+          <a:lstStyle/>
+          <a:p>
+            <a:pPr algn="ctr"/>
+          </a:p>
+        </p:txBody>
+      </p:sp>
+      <p:sp>
+        <p:nvSpPr>
+          <p:cNvPr id="6" name="TextBox 5"/>
+          <p:cNvSpPr txBox="1"/>
+          <p:nvPr/>
+        </p:nvSpPr>
+        <p:spPr>
+          <a:xfrm>
+            <a:off x="6675120" y="1783080"/>
+            <a:ext cx="4800600" cy="822960"/>
+          </a:xfrm>
+          <a:prstGeom prst="rect">
+            <a:avLst/>
+          </a:prstGeom>
+          <a:noFill/>
+        </p:spPr>
+        <p:txBody>
+          <a:bodyPr wrap="square" anchor="t" lIns="18288" rIns="18288" tIns="18288" bIns="18288">
+            <a:spAutoFit/>
+          </a:bodyPr>
+          <a:lstStyle/>
+          <a:p>
+            <a:pPr algn="l">
+              <a:spcAft>
+                <a:spcPts val="600"/>
+              </a:spcAft>
+            </a:pPr>
+            <a:r>
+              <a:rPr sz="4800" b="1">
+                <a:solidFill>
+                  <a:srgbClr val="D9912E"/>
+                </a:solidFill>
+                <a:latin typeface="Segoe UI"/>
+              </a:rPr>
+              <a:t>выкл.</a:t>
+            </a:r>
+          </a:p>
+        </p:txBody>
+      </p:sp>
+      <p:sp>
+        <p:nvSpPr>
+          <p:cNvPr id="7" name="TextBox 6"/>
+          <p:cNvSpPr txBox="1"/>
+          <p:nvPr/>
+        </p:nvSpPr>
+        <p:spPr>
+          <a:xfrm>
+            <a:off x="6675120" y="2606040"/>
+            <a:ext cx="4800600" cy="594360"/>
+          </a:xfrm>
+          <a:prstGeom prst="rect">
+            <a:avLst/>
+          </a:prstGeom>
+          <a:noFill/>
+        </p:spPr>
+        <p:txBody>
+          <a:bodyPr wrap="square" anchor="t" lIns="18288" rIns="18288" tIns="18288" bIns="18288">
+            <a:spAutoFit/>
+          </a:bodyPr>
+          <a:lstStyle/>
+          <a:p>
+            <a:pPr algn="l">
+              <a:spcAft>
+                <a:spcPts val="600"/>
+              </a:spcAft>
+            </a:pPr>
+            <a:r>
+              <a:rPr sz="1300" b="0">
                 <a:solidFill>
                   <a:srgbClr val="EEEFF1"/>
                 </a:solidFill>
                 <a:latin typeface="Segoe UI"/>
               </a:rPr>
-              <a:t>• Геометрия трансект по PANGAEA: 104 события S2/S3, 108 сегментов; 4 прерванные трансекты — двумя сегментами</a:t>
-            </a:r>
-          </a:p>
-        </p:txBody>
-      </p:sp>
-      <p:pic>
-        <p:nvPicPr>
-          <p:cNvPr id="5" name="Picture 4" descr="04_pairfinder_transect.jpg"/>
-          <p:cNvPicPr>
-            <a:picLocks noChangeAspect="1"/>
-          </p:cNvPicPr>
-          <p:nvPr/>
-        </p:nvPicPr>
-        <p:blipFill>
-          <a:blip r:embed="rId2"/>
-          <a:stretch>
-            <a:fillRect/>
-          </a:stretch>
-        </p:blipFill>
-        <p:spPr>
-          <a:xfrm>
-            <a:off x="6914726" y="1645920"/>
-            <a:ext cx="4321386" cy="4023360"/>
-          </a:xfrm>
-          <a:prstGeom prst="rect">
-            <a:avLst/>
-          </a:prstGeom>
-        </p:spPr>
-      </p:pic>
-      <p:sp>
-        <p:nvSpPr>
-          <p:cNvPr id="6" name="TextBox 5"/>
-          <p:cNvSpPr txBox="1"/>
-          <p:nvPr/>
-        </p:nvSpPr>
-        <p:spPr>
-          <a:xfrm>
-            <a:off x="6400800" y="5715000"/>
-            <a:ext cx="5349240" cy="548640"/>
-          </a:xfrm>
-          <a:prstGeom prst="rect">
-            <a:avLst/>
-          </a:prstGeom>
-          <a:noFill/>
-        </p:spPr>
-        <p:txBody>
-          <a:bodyPr wrap="square" anchor="t" lIns="18288" rIns="18288" tIns="18288" bIns="18288">
-            <a:spAutoFit/>
-          </a:bodyPr>
-          <a:lstStyle/>
-          <a:p>
-            <a:pPr algn="l">
-              <a:spcAft>
-                <a:spcPts val="600"/>
-              </a:spcAft>
-            </a:pPr>
-            <a:r>
-              <a:rPr sz="1200" b="0">
-                <a:solidFill>
-                  <a:srgbClr val="9AA1AC"/>
-                </a:solidFill>
-                <a:latin typeface="Segoe UI"/>
-              </a:rPr>
-              <a:t>Саргассово море, T18: прерванная трансекта (2 сегмента) и «Подбор снимка» — сцен в окне нет</a:t>
-            </a:r>
-          </a:p>
-        </p:txBody>
-      </p:sp>
-      <p:sp>
-        <p:nvSpPr>
-          <p:cNvPr id="7" name="TextBox 6"/>
+              <a:t>слой «Нефтяное пятно» — эксперимент; для нефти обычно нужен радар Sentinel-1</a:t>
+            </a:r>
+          </a:p>
+        </p:txBody>
+      </p:sp>
+      <p:sp>
+        <p:nvSpPr>
+          <p:cNvPr id="8" name="TextBox 7"/>
           <p:cNvSpPr txBox="1"/>
           <p:nvPr/>
         </p:nvSpPr>
@@ -5322,14 +5881,14 @@
                 </a:solidFill>
                 <a:latin typeface="Segoe UI"/>
               </a:rPr>
-              <a:t>Источник: docs/EXTRA_FEATURES.md; reports/case_pairfinder/evidence.md; reports/case_geometry/summary.md</a:t>
-            </a:r>
-          </a:p>
-        </p:txBody>
-      </p:sp>
-      <p:sp>
-        <p:nvSpPr>
-          <p:cNvPr id="8" name="TextBox 7"/>
+              <a:t>Источник: reports/oil/test.json, control.json; docs/OIL.md</a:t>
+            </a:r>
+          </a:p>
+        </p:txBody>
+      </p:sp>
+      <p:sp>
+        <p:nvSpPr>
+          <p:cNvPr id="9" name="TextBox 8"/>
           <p:cNvSpPr txBox="1"/>
           <p:nvPr/>
         </p:nvSpPr>
@@ -5361,7 +5920,7 @@
                 </a:solidFill>
                 <a:latin typeface="Segoe UI"/>
               </a:rPr>
-              <a:t>3:18</a:t>
+              <a:t>3:17</a:t>
             </a:r>
           </a:p>
         </p:txBody>
@@ -5426,7 +5985,7 @@
                 </a:solidFill>
                 <a:latin typeface="Segoe UI"/>
               </a:rPr>
-              <a:t>12 · Ограничения и развитие</a:t>
+              <a:t>12 · Детектор</a:t>
             </a:r>
           </a:p>
         </p:txBody>
@@ -5465,7 +6024,7 @@
                 </a:solidFill>
                 <a:latin typeface="Segoe UI"/>
               </a:rPr>
-              <a:t>Ограничения названы на карте и в отчёте; развитие — синхронные пары и больше рейсов</a:t>
+              <a:t>Детектор: F1 0.871 на test MARIDA; на снимках пар — 5 объектов, в полосах 0</a:t>
             </a:r>
           </a:p>
         </p:txBody>
@@ -5479,7 +6038,7 @@
         <p:spPr>
           <a:xfrm>
             <a:off x="457200" y="1600200"/>
-            <a:ext cx="11247120" cy="4572000"/>
+            <a:ext cx="5577840" cy="4572000"/>
           </a:xfrm>
           <a:prstGeom prst="rect">
             <a:avLst/>
@@ -5498,13 +6057,13 @@
               </a:spcAft>
             </a:pPr>
             <a:r>
-              <a:rPr sz="1600" b="0">
+              <a:rPr sz="1500" b="0">
                 <a:solidFill>
                   <a:srgbClr val="EEEFF1"/>
                 </a:solidFill>
                 <a:latin typeface="Segoe UI"/>
               </a:rPr>
-              <a:t>• Перенос «снимок → шт./км²» не доказан: синхронных пар нет, для пластика снимков нет</a:t>
+              <a:t>• LightGBM, порог 0.63 с val; test MARIDA посчитан один раз: ΔF1 к RF 0.100 [0.049; 0.150]</a:t>
             </a:r>
           </a:p>
           <a:p>
@@ -5514,13 +6073,13 @@
               </a:spcAft>
             </a:pPr>
             <a:r>
-              <a:rPr sz="1600" b="0">
+              <a:rPr sz="1500" b="0">
                 <a:solidFill>
                   <a:srgbClr val="EEEFF1"/>
                 </a:solidFill>
                 <a:latin typeface="Segoe UI"/>
               </a:rPr>
-              <a:t>• Мало независимых данных: S2 — один рейс, 26 дней; интервалы недопокрывают (84 % и 74 % вместо 90 %)</a:t>
+              <a:t>• MARIDA test: на саргассуме и мутной воде ложных 0 (FDI × NDVI помечает 46 % саргассума); ошибки — суда 27 и органика 21</a:t>
             </a:r>
           </a:p>
           <a:p>
@@ -5530,13 +6089,13 @@
               </a:spcAft>
             </a:pPr>
             <a:r>
-              <a:rPr sz="1600" b="0">
+              <a:rPr sz="1500" b="0">
                 <a:solidFill>
                   <a:srgbClr val="EEEFF1"/>
                 </a:solidFill>
                 <a:latin typeface="Segoe UI"/>
               </a:rPr>
-              <a:t>• Test не абсолютно нетронутый: ранняя разведка бейзлайнов видела все события профиля (записано до открытия)</a:t>
+              <a:t>• Снимки пар (L2A): гармонизация каналов выключена по MARIDA val — F1 0.923 без сдвига против 0.897 со сдвигом, Δ −0.025 [−0.072; −0.013]</a:t>
             </a:r>
           </a:p>
           <a:p>
@@ -5546,13 +6105,13 @@
               </a:spcAft>
             </a:pPr>
             <a:r>
-              <a:rPr sz="1600" b="0">
+              <a:rPr sz="1500" b="0">
                 <a:solidFill>
                   <a:srgbClr val="EEEFF1"/>
                 </a:solidFill>
                 <a:latin typeface="Segoe UI"/>
               </a:rPr>
-              <a:t>• Детектор на L2A пар по разметке не измерен; порог блика не калибровался на этих сценах</a:t>
+              <a:t>• Сейчас: 5 объектов на 22 сценах, в полосах 0; вне полосы HE460 т.03 — 1 судно (верное срабатывание на сложном фоне) и 4 одиночных пикселя</a:t>
             </a:r>
           </a:p>
           <a:p>
@@ -5562,13 +6121,13 @@
               </a:spcAft>
             </a:pPr>
             <a:r>
-              <a:rPr sz="1600" b="0">
+              <a:rPr sz="1500" b="0">
                 <a:solidFill>
                   <a:srgbClr val="EEEFF1"/>
                 </a:solidFill>
                 <a:latin typeface="Segoe UI"/>
               </a:rPr>
-              <a:t>• Дальше: трансекты под пролёт с записанным временем (≈ 33 пар), больше рейсов и сезонов, ERA5 для дрейфа, разметка скоплений на L2A</a:t>
+              <a:t>• Прежний режим (с гармонизацией) — основание отказа: 975 объектов, вероятное скопление по виду у 1.7 % [0.0; 5.0]; размечал ИИ-агент, один аннотатор, κ 0.77 — его же слепой повтор</a:t>
             </a:r>
           </a:p>
         </p:txBody>
@@ -5576,6 +6135,411 @@
       <p:sp>
         <p:nvSpPr>
           <p:cNvPr id="5" name="TextBox 4"/>
+          <p:cNvSpPr txBox="1"/>
+          <p:nvPr/>
+        </p:nvSpPr>
+        <p:spPr>
+          <a:xfrm>
+            <a:off x="6400800" y="1691640"/>
+            <a:ext cx="5349240" cy="365760"/>
+          </a:xfrm>
+          <a:prstGeom prst="rect">
+            <a:avLst/>
+          </a:prstGeom>
+          <a:noFill/>
+        </p:spPr>
+        <p:txBody>
+          <a:bodyPr wrap="square" anchor="t" lIns="18288" rIns="18288" tIns="18288" bIns="18288">
+            <a:spAutoFit/>
+          </a:bodyPr>
+          <a:lstStyle/>
+          <a:p>
+            <a:pPr algn="l">
+              <a:spcAft>
+                <a:spcPts val="600"/>
+              </a:spcAft>
+            </a:pPr>
+            <a:r>
+              <a:rPr sz="1400" b="0">
+                <a:solidFill>
+                  <a:srgbClr val="9AA1AC"/>
+                </a:solidFill>
+                <a:latin typeface="Segoe UI"/>
+              </a:rPr>
+              <a:t>F1 Marine Debris, test MARIDA (15 сцен)</a:t>
+            </a:r>
+          </a:p>
+        </p:txBody>
+      </p:sp>
+      <p:sp>
+        <p:nvSpPr>
+          <p:cNvPr id="6" name="TextBox 5"/>
+          <p:cNvSpPr txBox="1"/>
+          <p:nvPr/>
+        </p:nvSpPr>
+        <p:spPr>
+          <a:xfrm>
+            <a:off x="6400800" y="2148840"/>
+            <a:ext cx="2155240" cy="384048"/>
+          </a:xfrm>
+          <a:prstGeom prst="rect">
+            <a:avLst/>
+          </a:prstGeom>
+          <a:noFill/>
+        </p:spPr>
+        <p:txBody>
+          <a:bodyPr wrap="square" anchor="ctr" lIns="18288" rIns="18288" tIns="18288" bIns="18288">
+            <a:spAutoFit/>
+          </a:bodyPr>
+          <a:lstStyle/>
+          <a:p>
+            <a:pPr algn="l">
+              <a:spcAft>
+                <a:spcPts val="600"/>
+              </a:spcAft>
+            </a:pPr>
+            <a:r>
+              <a:rPr sz="1300" b="0">
+                <a:solidFill>
+                  <a:srgbClr val="EEEFF1"/>
+                </a:solidFill>
+                <a:latin typeface="Segoe UI"/>
+              </a:rPr>
+              <a:t>LightGBM (основной)</a:t>
+            </a:r>
+          </a:p>
+        </p:txBody>
+      </p:sp>
+      <p:sp>
+        <p:nvSpPr>
+          <p:cNvPr id="7" name="Rectangle 6"/>
+          <p:cNvSpPr/>
+          <p:nvPr/>
+        </p:nvSpPr>
+        <p:spPr>
+          <a:xfrm>
+            <a:off x="8647480" y="2212848"/>
+            <a:ext cx="1985530" cy="274320"/>
+          </a:xfrm>
+          <a:prstGeom prst="rect">
+            <a:avLst/>
+          </a:prstGeom>
+          <a:solidFill>
+            <a:srgbClr val="D9912E"/>
+          </a:solidFill>
+          <a:ln>
+            <a:noFill/>
+          </a:ln>
+          <a:effectLst/>
+        </p:spPr>
+        <p:style>
+          <a:lnRef idx="1">
+            <a:schemeClr val="accent1"/>
+          </a:lnRef>
+          <a:fillRef idx="3">
+            <a:schemeClr val="accent1"/>
+          </a:fillRef>
+          <a:effectRef idx="2">
+            <a:schemeClr val="accent1"/>
+          </a:effectRef>
+          <a:fontRef idx="minor">
+            <a:schemeClr val="lt1"/>
+          </a:fontRef>
+        </p:style>
+        <p:txBody>
+          <a:bodyPr rtlCol="0" anchor="ctr"/>
+          <a:lstStyle/>
+          <a:p>
+            <a:pPr algn="ctr"/>
+          </a:p>
+        </p:txBody>
+      </p:sp>
+      <p:sp>
+        <p:nvSpPr>
+          <p:cNvPr id="8" name="TextBox 7"/>
+          <p:cNvSpPr txBox="1"/>
+          <p:nvPr/>
+        </p:nvSpPr>
+        <p:spPr>
+          <a:xfrm>
+            <a:off x="10706163" y="2148840"/>
+            <a:ext cx="822960" cy="384048"/>
+          </a:xfrm>
+          <a:prstGeom prst="rect">
+            <a:avLst/>
+          </a:prstGeom>
+          <a:noFill/>
+        </p:spPr>
+        <p:txBody>
+          <a:bodyPr wrap="square" anchor="ctr" lIns="18288" rIns="18288" tIns="18288" bIns="18288">
+            <a:spAutoFit/>
+          </a:bodyPr>
+          <a:lstStyle/>
+          <a:p>
+            <a:pPr algn="l">
+              <a:spcAft>
+                <a:spcPts val="600"/>
+              </a:spcAft>
+            </a:pPr>
+            <a:r>
+              <a:rPr sz="1400" b="1">
+                <a:solidFill>
+                  <a:srgbClr val="EEEFF1"/>
+                </a:solidFill>
+                <a:latin typeface="Segoe UI"/>
+              </a:rPr>
+              <a:t>0.871</a:t>
+            </a:r>
+          </a:p>
+        </p:txBody>
+      </p:sp>
+      <p:sp>
+        <p:nvSpPr>
+          <p:cNvPr id="9" name="TextBox 8"/>
+          <p:cNvSpPr txBox="1"/>
+          <p:nvPr/>
+        </p:nvSpPr>
+        <p:spPr>
+          <a:xfrm>
+            <a:off x="6400800" y="2651760"/>
+            <a:ext cx="2155240" cy="384048"/>
+          </a:xfrm>
+          <a:prstGeom prst="rect">
+            <a:avLst/>
+          </a:prstGeom>
+          <a:noFill/>
+        </p:spPr>
+        <p:txBody>
+          <a:bodyPr wrap="square" anchor="ctr" lIns="18288" rIns="18288" tIns="18288" bIns="18288">
+            <a:spAutoFit/>
+          </a:bodyPr>
+          <a:lstStyle/>
+          <a:p>
+            <a:pPr algn="l">
+              <a:spcAft>
+                <a:spcPts val="600"/>
+              </a:spcAft>
+            </a:pPr>
+            <a:r>
+              <a:rPr sz="1300" b="0">
+                <a:solidFill>
+                  <a:srgbClr val="EEEFF1"/>
+                </a:solidFill>
+                <a:latin typeface="Segoe UI"/>
+              </a:rPr>
+              <a:t>RandomForest, протокол MARIDA</a:t>
+            </a:r>
+          </a:p>
+        </p:txBody>
+      </p:sp>
+      <p:sp>
+        <p:nvSpPr>
+          <p:cNvPr id="10" name="Rectangle 9"/>
+          <p:cNvSpPr/>
+          <p:nvPr/>
+        </p:nvSpPr>
+        <p:spPr>
+          <a:xfrm>
+            <a:off x="8647480" y="2715768"/>
+            <a:ext cx="1757570" cy="274320"/>
+          </a:xfrm>
+          <a:prstGeom prst="rect">
+            <a:avLst/>
+          </a:prstGeom>
+          <a:solidFill>
+            <a:srgbClr val="5B6370"/>
+          </a:solidFill>
+          <a:ln>
+            <a:noFill/>
+          </a:ln>
+          <a:effectLst/>
+        </p:spPr>
+        <p:style>
+          <a:lnRef idx="1">
+            <a:schemeClr val="accent1"/>
+          </a:lnRef>
+          <a:fillRef idx="3">
+            <a:schemeClr val="accent1"/>
+          </a:fillRef>
+          <a:effectRef idx="2">
+            <a:schemeClr val="accent1"/>
+          </a:effectRef>
+          <a:fontRef idx="minor">
+            <a:schemeClr val="lt1"/>
+          </a:fontRef>
+        </p:style>
+        <p:txBody>
+          <a:bodyPr rtlCol="0" anchor="ctr"/>
+          <a:lstStyle/>
+          <a:p>
+            <a:pPr algn="ctr"/>
+          </a:p>
+        </p:txBody>
+      </p:sp>
+      <p:sp>
+        <p:nvSpPr>
+          <p:cNvPr id="11" name="TextBox 10"/>
+          <p:cNvSpPr txBox="1"/>
+          <p:nvPr/>
+        </p:nvSpPr>
+        <p:spPr>
+          <a:xfrm>
+            <a:off x="10478203" y="2651760"/>
+            <a:ext cx="822960" cy="384048"/>
+          </a:xfrm>
+          <a:prstGeom prst="rect">
+            <a:avLst/>
+          </a:prstGeom>
+          <a:noFill/>
+        </p:spPr>
+        <p:txBody>
+          <a:bodyPr wrap="square" anchor="ctr" lIns="18288" rIns="18288" tIns="18288" bIns="18288">
+            <a:spAutoFit/>
+          </a:bodyPr>
+          <a:lstStyle/>
+          <a:p>
+            <a:pPr algn="l">
+              <a:spcAft>
+                <a:spcPts val="600"/>
+              </a:spcAft>
+            </a:pPr>
+            <a:r>
+              <a:rPr sz="1400" b="1">
+                <a:solidFill>
+                  <a:srgbClr val="EEEFF1"/>
+                </a:solidFill>
+                <a:latin typeface="Segoe UI"/>
+              </a:rPr>
+              <a:t>0.771</a:t>
+            </a:r>
+          </a:p>
+        </p:txBody>
+      </p:sp>
+      <p:sp>
+        <p:nvSpPr>
+          <p:cNvPr id="12" name="TextBox 11"/>
+          <p:cNvSpPr txBox="1"/>
+          <p:nvPr/>
+        </p:nvSpPr>
+        <p:spPr>
+          <a:xfrm>
+            <a:off x="6400800" y="3154680"/>
+            <a:ext cx="2155240" cy="384048"/>
+          </a:xfrm>
+          <a:prstGeom prst="rect">
+            <a:avLst/>
+          </a:prstGeom>
+          <a:noFill/>
+        </p:spPr>
+        <p:txBody>
+          <a:bodyPr wrap="square" anchor="ctr" lIns="18288" rIns="18288" tIns="18288" bIns="18288">
+            <a:spAutoFit/>
+          </a:bodyPr>
+          <a:lstStyle/>
+          <a:p>
+            <a:pPr algn="l">
+              <a:spcAft>
+                <a:spcPts val="600"/>
+              </a:spcAft>
+            </a:pPr>
+            <a:r>
+              <a:rPr sz="1300" b="0">
+                <a:solidFill>
+                  <a:srgbClr val="EEEFF1"/>
+                </a:solidFill>
+                <a:latin typeface="Segoe UI"/>
+              </a:rPr>
+              <a:t>окно FDI × NDVI</a:t>
+            </a:r>
+          </a:p>
+        </p:txBody>
+      </p:sp>
+      <p:sp>
+        <p:nvSpPr>
+          <p:cNvPr id="13" name="Rectangle 12"/>
+          <p:cNvSpPr/>
+          <p:nvPr/>
+        </p:nvSpPr>
+        <p:spPr>
+          <a:xfrm>
+            <a:off x="8647480" y="3218688"/>
+            <a:ext cx="95743" cy="274320"/>
+          </a:xfrm>
+          <a:prstGeom prst="rect">
+            <a:avLst/>
+          </a:prstGeom>
+          <a:solidFill>
+            <a:srgbClr val="5B6370"/>
+          </a:solidFill>
+          <a:ln>
+            <a:noFill/>
+          </a:ln>
+          <a:effectLst/>
+        </p:spPr>
+        <p:style>
+          <a:lnRef idx="1">
+            <a:schemeClr val="accent1"/>
+          </a:lnRef>
+          <a:fillRef idx="3">
+            <a:schemeClr val="accent1"/>
+          </a:fillRef>
+          <a:effectRef idx="2">
+            <a:schemeClr val="accent1"/>
+          </a:effectRef>
+          <a:fontRef idx="minor">
+            <a:schemeClr val="lt1"/>
+          </a:fontRef>
+        </p:style>
+        <p:txBody>
+          <a:bodyPr rtlCol="0" anchor="ctr"/>
+          <a:lstStyle/>
+          <a:p>
+            <a:pPr algn="ctr"/>
+          </a:p>
+        </p:txBody>
+      </p:sp>
+      <p:sp>
+        <p:nvSpPr>
+          <p:cNvPr id="14" name="TextBox 13"/>
+          <p:cNvSpPr txBox="1"/>
+          <p:nvPr/>
+        </p:nvSpPr>
+        <p:spPr>
+          <a:xfrm>
+            <a:off x="8816375" y="3154680"/>
+            <a:ext cx="822960" cy="384048"/>
+          </a:xfrm>
+          <a:prstGeom prst="rect">
+            <a:avLst/>
+          </a:prstGeom>
+          <a:noFill/>
+        </p:spPr>
+        <p:txBody>
+          <a:bodyPr wrap="square" anchor="ctr" lIns="18288" rIns="18288" tIns="18288" bIns="18288">
+            <a:spAutoFit/>
+          </a:bodyPr>
+          <a:lstStyle/>
+          <a:p>
+            <a:pPr algn="l">
+              <a:spcAft>
+                <a:spcPts val="600"/>
+              </a:spcAft>
+            </a:pPr>
+            <a:r>
+              <a:rPr sz="1400" b="1">
+                <a:solidFill>
+                  <a:srgbClr val="EEEFF1"/>
+                </a:solidFill>
+                <a:latin typeface="Segoe UI"/>
+              </a:rPr>
+              <a:t>0.042</a:t>
+            </a:r>
+          </a:p>
+        </p:txBody>
+      </p:sp>
+      <p:sp>
+        <p:nvSpPr>
+          <p:cNvPr id="15" name="TextBox 14"/>
           <p:cNvSpPr txBox="1"/>
           <p:nvPr/>
         </p:nvSpPr>
@@ -5607,14 +6571,14 @@
                 </a:solidFill>
                 <a:latin typeface="Segoe UI"/>
               </a:rPr>
-              <a:t>Источник: reports/report.md §8–9; README.md «Ограничения»</a:t>
-            </a:r>
-          </a:p>
-        </p:txBody>
-      </p:sp>
-      <p:sp>
-        <p:nvSpPr>
-          <p:cNvPr id="6" name="TextBox 5"/>
+              <a:t>Источник: reports/case_detector/compare.md; reports/case_pairs/visual_review.md; docs/DECISIONS.md (final_numbers → case.detector_current)</a:t>
+            </a:r>
+          </a:p>
+        </p:txBody>
+      </p:sp>
+      <p:sp>
+        <p:nvSpPr>
+          <p:cNvPr id="16" name="TextBox 15"/>
           <p:cNvSpPr txBox="1"/>
           <p:nvPr/>
         </p:nvSpPr>
@@ -5646,7 +6610,7 @@
                 </a:solidFill>
                 <a:latin typeface="Segoe UI"/>
               </a:rPr>
-              <a:t>3:32</a:t>
+              <a:t>3:30</a:t>
             </a:r>
           </a:p>
         </p:txBody>
@@ -5711,7 +6675,7 @@
                 </a:solidFill>
                 <a:latin typeface="Segoe UI"/>
               </a:rPr>
-              <a:t>13 · Воспроизводимость</a:t>
+              <a:t>13 · Концентрация</a:t>
             </a:r>
           </a:p>
         </p:txBody>
@@ -5744,13 +6708,13 @@
               </a:spcAft>
             </a:pPr>
             <a:r>
-              <a:rPr sz="2600" b="1">
+              <a:rPr sz="2300" b="1">
                 <a:solidFill>
                   <a:srgbClr val="EEEFF1"/>
                 </a:solidFill>
                 <a:latin typeface="Segoe UI"/>
               </a:rPr>
-              <a:t>Одна команда, 6.9 с без сети; чистый клон до карты — 7,5 мин, числа совпали</a:t>
+              <a:t>C = N/A сошлась с опубликованной у 467 из 467 строк; на отложенном test модель не лучше медианы — на карте медиана</a:t>
             </a:r>
           </a:p>
         </p:txBody>
@@ -5789,7 +6753,7 @@
                 </a:solidFill>
                 <a:latin typeface="Segoe UI"/>
               </a:rPr>
-              <a:t>• Одна команда: run.ps1 -Case all -Offline (CSV → отбор → пары → маски → детектор → метрики → выгрузка)</a:t>
+              <a:t>• Контроль: 12 / 0.20 км² = 60.0 шт./км², 95 % ДИ Пуассона 31.0–104.8; C = N/A совпала с опубликованной у 467 из 467 строк</a:t>
             </a:r>
           </a:p>
           <a:p>
@@ -5805,7 +6769,7 @@
                 </a:solidFill>
                 <a:latin typeface="Segoe UI"/>
               </a:rPr>
-              <a:t>• 24 выходные таблицы с одинаковыми sha256 при повторе; отпечаток fccf808a8817d7c4…</a:t>
+              <a:t>• Сплит: 5 участков маршрута + буфер 1 сут; протокол и правило выбора записаны до CV</a:t>
             </a:r>
           </a:p>
           <a:p>
@@ -5821,7 +6785,7 @@
                 </a:solidFill>
                 <a:latin typeface="Segoe UI"/>
               </a:rPr>
-              <a:t>• Чистый клон: клон 76 с, установка и маршрут 3 мин 17 с, карта 8,1 с</a:t>
+              <a:t>• Dev CV S2: ridge_log 28.5 против медианы 44.2, ΔMAE [−31.6; −0.3] — слабый выигрыш (с Бонферрони [−38.7; 7.3])</a:t>
             </a:r>
           </a:p>
           <a:p>
@@ -5837,27 +6801,105 @@
                 </a:solidFill>
                 <a:latin typeface="Segoe UI"/>
               </a:rPr>
-              <a:t>• Тесты кейса (26.09.2026 00:18): 232 passed, 2 skipped, 0 failed; числа документов сверяет тест</a:t>
-            </a:r>
-          </a:p>
-        </p:txBody>
-      </p:sp>
-      <p:sp>
-        <p:nvSpPr>
-          <p:cNvPr id="5" name="Rectangle 4"/>
+              <a:t>• Отложенный test (25.09.2026 19:15, один раз): S2 30.0 против 25.2 (основная модель не лучше медианы); S1 370.0 против 371.1 (разницы с медианой нет)</a:t>
+            </a:r>
+          </a:p>
+        </p:txBody>
+      </p:sp>
+      <p:sp>
+        <p:nvSpPr>
+          <p:cNvPr id="5" name="TextBox 4"/>
+          <p:cNvSpPr txBox="1"/>
+          <p:nvPr/>
+        </p:nvSpPr>
+        <p:spPr>
+          <a:xfrm>
+            <a:off x="6400800" y="1691640"/>
+            <a:ext cx="5349240" cy="365760"/>
+          </a:xfrm>
+          <a:prstGeom prst="rect">
+            <a:avLst/>
+          </a:prstGeom>
+          <a:noFill/>
+        </p:spPr>
+        <p:txBody>
+          <a:bodyPr wrap="square" anchor="t" lIns="18288" rIns="18288" tIns="18288" bIns="18288">
+            <a:spAutoFit/>
+          </a:bodyPr>
+          <a:lstStyle/>
+          <a:p>
+            <a:pPr algn="l">
+              <a:spcAft>
+                <a:spcPts val="600"/>
+              </a:spcAft>
+            </a:pPr>
+            <a:r>
+              <a:rPr sz="1400" b="0">
+                <a:solidFill>
+                  <a:srgbClr val="9AA1AC"/>
+                </a:solidFill>
+                <a:latin typeface="Segoe UI"/>
+              </a:rPr>
+              <a:t>S2, отложенный test (14 событий): MAE, шт./км²</a:t>
+            </a:r>
+          </a:p>
+        </p:txBody>
+      </p:sp>
+      <p:sp>
+        <p:nvSpPr>
+          <p:cNvPr id="6" name="TextBox 5"/>
+          <p:cNvSpPr txBox="1"/>
+          <p:nvPr/>
+        </p:nvSpPr>
+        <p:spPr>
+          <a:xfrm>
+            <a:off x="6400800" y="2148840"/>
+            <a:ext cx="2155240" cy="384048"/>
+          </a:xfrm>
+          <a:prstGeom prst="rect">
+            <a:avLst/>
+          </a:prstGeom>
+          <a:noFill/>
+        </p:spPr>
+        <p:txBody>
+          <a:bodyPr wrap="square" anchor="ctr" lIns="18288" rIns="18288" tIns="18288" bIns="18288">
+            <a:spAutoFit/>
+          </a:bodyPr>
+          <a:lstStyle/>
+          <a:p>
+            <a:pPr algn="l">
+              <a:spcAft>
+                <a:spcPts val="600"/>
+              </a:spcAft>
+            </a:pPr>
+            <a:r>
+              <a:rPr sz="1300" b="0">
+                <a:solidFill>
+                  <a:srgbClr val="EEEFF1"/>
+                </a:solidFill>
+                <a:latin typeface="Segoe UI"/>
+              </a:rPr>
+              <a:t>ridge_log (основная)</a:t>
+            </a:r>
+          </a:p>
+        </p:txBody>
+      </p:sp>
+      <p:sp>
+        <p:nvSpPr>
+          <p:cNvPr id="7" name="Rectangle 6"/>
           <p:cNvSpPr/>
           <p:nvPr/>
         </p:nvSpPr>
         <p:spPr>
           <a:xfrm>
-            <a:off x="6400800" y="1691640"/>
-            <a:ext cx="5349240" cy="1554480"/>
+            <a:off x="8647480" y="2212848"/>
+            <a:ext cx="2279599" cy="274320"/>
           </a:xfrm>
           <a:prstGeom prst="rect">
             <a:avLst/>
           </a:prstGeom>
           <a:solidFill>
-            <a:srgbClr val="1B1E24"/>
+            <a:srgbClr val="5B6370"/>
           </a:solidFill>
           <a:ln>
             <a:noFill/>
@@ -5888,6 +6930,519 @@
       </p:sp>
       <p:sp>
         <p:nvSpPr>
+          <p:cNvPr id="8" name="TextBox 7"/>
+          <p:cNvSpPr txBox="1"/>
+          <p:nvPr/>
+        </p:nvSpPr>
+        <p:spPr>
+          <a:xfrm>
+            <a:off x="11000232" y="2148840"/>
+            <a:ext cx="822960" cy="384048"/>
+          </a:xfrm>
+          <a:prstGeom prst="rect">
+            <a:avLst/>
+          </a:prstGeom>
+          <a:noFill/>
+        </p:spPr>
+        <p:txBody>
+          <a:bodyPr wrap="square" anchor="ctr" lIns="18288" rIns="18288" tIns="18288" bIns="18288">
+            <a:spAutoFit/>
+          </a:bodyPr>
+          <a:lstStyle/>
+          <a:p>
+            <a:pPr algn="l">
+              <a:spcAft>
+                <a:spcPts val="600"/>
+              </a:spcAft>
+            </a:pPr>
+            <a:r>
+              <a:rPr sz="1400" b="1">
+                <a:solidFill>
+                  <a:srgbClr val="EEEFF1"/>
+                </a:solidFill>
+                <a:latin typeface="Segoe UI"/>
+              </a:rPr>
+              <a:t>30.0</a:t>
+            </a:r>
+          </a:p>
+        </p:txBody>
+      </p:sp>
+      <p:sp>
+        <p:nvSpPr>
+          <p:cNvPr id="9" name="TextBox 8"/>
+          <p:cNvSpPr txBox="1"/>
+          <p:nvPr/>
+        </p:nvSpPr>
+        <p:spPr>
+          <a:xfrm>
+            <a:off x="6400800" y="2651760"/>
+            <a:ext cx="2155240" cy="384048"/>
+          </a:xfrm>
+          <a:prstGeom prst="rect">
+            <a:avLst/>
+          </a:prstGeom>
+          <a:noFill/>
+        </p:spPr>
+        <p:txBody>
+          <a:bodyPr wrap="square" anchor="ctr" lIns="18288" rIns="18288" tIns="18288" bIns="18288">
+            <a:spAutoFit/>
+          </a:bodyPr>
+          <a:lstStyle/>
+          <a:p>
+            <a:pPr algn="l">
+              <a:spcAft>
+                <a:spcPts val="600"/>
+              </a:spcAft>
+            </a:pPr>
+            <a:r>
+              <a:rPr sz="1300" b="0">
+                <a:solidFill>
+                  <a:srgbClr val="EEEFF1"/>
+                </a:solidFill>
+                <a:latin typeface="Segoe UI"/>
+              </a:rPr>
+              <a:t>медиана dev (на карте)</a:t>
+            </a:r>
+          </a:p>
+        </p:txBody>
+      </p:sp>
+      <p:sp>
+        <p:nvSpPr>
+          <p:cNvPr id="10" name="Rectangle 9"/>
+          <p:cNvSpPr/>
+          <p:nvPr/>
+        </p:nvSpPr>
+        <p:spPr>
+          <a:xfrm>
+            <a:off x="8647480" y="2715768"/>
+            <a:ext cx="1914863" cy="274320"/>
+          </a:xfrm>
+          <a:prstGeom prst="rect">
+            <a:avLst/>
+          </a:prstGeom>
+          <a:solidFill>
+            <a:srgbClr val="D9912E"/>
+          </a:solidFill>
+          <a:ln>
+            <a:noFill/>
+          </a:ln>
+          <a:effectLst/>
+        </p:spPr>
+        <p:style>
+          <a:lnRef idx="1">
+            <a:schemeClr val="accent1"/>
+          </a:lnRef>
+          <a:fillRef idx="3">
+            <a:schemeClr val="accent1"/>
+          </a:fillRef>
+          <a:effectRef idx="2">
+            <a:schemeClr val="accent1"/>
+          </a:effectRef>
+          <a:fontRef idx="minor">
+            <a:schemeClr val="lt1"/>
+          </a:fontRef>
+        </p:style>
+        <p:txBody>
+          <a:bodyPr rtlCol="0" anchor="ctr"/>
+          <a:lstStyle/>
+          <a:p>
+            <a:pPr algn="ctr"/>
+          </a:p>
+        </p:txBody>
+      </p:sp>
+      <p:sp>
+        <p:nvSpPr>
+          <p:cNvPr id="11" name="TextBox 10"/>
+          <p:cNvSpPr txBox="1"/>
+          <p:nvPr/>
+        </p:nvSpPr>
+        <p:spPr>
+          <a:xfrm>
+            <a:off x="10635496" y="2651760"/>
+            <a:ext cx="822960" cy="384048"/>
+          </a:xfrm>
+          <a:prstGeom prst="rect">
+            <a:avLst/>
+          </a:prstGeom>
+          <a:noFill/>
+        </p:spPr>
+        <p:txBody>
+          <a:bodyPr wrap="square" anchor="ctr" lIns="18288" rIns="18288" tIns="18288" bIns="18288">
+            <a:spAutoFit/>
+          </a:bodyPr>
+          <a:lstStyle/>
+          <a:p>
+            <a:pPr algn="l">
+              <a:spcAft>
+                <a:spcPts val="600"/>
+              </a:spcAft>
+            </a:pPr>
+            <a:r>
+              <a:rPr sz="1400" b="1">
+                <a:solidFill>
+                  <a:srgbClr val="EEEFF1"/>
+                </a:solidFill>
+                <a:latin typeface="Segoe UI"/>
+              </a:rPr>
+              <a:t>25.2</a:t>
+            </a:r>
+          </a:p>
+        </p:txBody>
+      </p:sp>
+      <p:sp>
+        <p:nvSpPr>
+          <p:cNvPr id="12" name="TextBox 11"/>
+          <p:cNvSpPr txBox="1"/>
+          <p:nvPr/>
+        </p:nvSpPr>
+        <p:spPr>
+          <a:xfrm>
+            <a:off x="6400800" y="3200400"/>
+            <a:ext cx="5349240" cy="365760"/>
+          </a:xfrm>
+          <a:prstGeom prst="rect">
+            <a:avLst/>
+          </a:prstGeom>
+          <a:noFill/>
+        </p:spPr>
+        <p:txBody>
+          <a:bodyPr wrap="square" anchor="t" lIns="18288" rIns="18288" tIns="18288" bIns="18288">
+            <a:spAutoFit/>
+          </a:bodyPr>
+          <a:lstStyle/>
+          <a:p>
+            <a:pPr algn="l">
+              <a:spcAft>
+                <a:spcPts val="600"/>
+              </a:spcAft>
+            </a:pPr>
+            <a:r>
+              <a:rPr sz="1300" b="0">
+                <a:solidFill>
+                  <a:srgbClr val="9AA1AC"/>
+                </a:solidFill>
+                <a:latin typeface="Segoe UI"/>
+              </a:rPr>
+              <a:t>ΔMAE +4.8 [−1.6; +12.9] — ДИ содержит 0</a:t>
+            </a:r>
+          </a:p>
+        </p:txBody>
+      </p:sp>
+      <p:sp>
+        <p:nvSpPr>
+          <p:cNvPr id="13" name="TextBox 12"/>
+          <p:cNvSpPr txBox="1"/>
+          <p:nvPr/>
+        </p:nvSpPr>
+        <p:spPr>
+          <a:xfrm>
+            <a:off x="457200" y="6355080"/>
+            <a:ext cx="10515600" cy="320040"/>
+          </a:xfrm>
+          <a:prstGeom prst="rect">
+            <a:avLst/>
+          </a:prstGeom>
+          <a:noFill/>
+        </p:spPr>
+        <p:txBody>
+          <a:bodyPr wrap="square" anchor="t" lIns="18288" rIns="18288" tIns="18288" bIns="18288">
+            <a:spAutoFit/>
+          </a:bodyPr>
+          <a:lstStyle/>
+          <a:p>
+            <a:pPr algn="l">
+              <a:spcAft>
+                <a:spcPts val="600"/>
+              </a:spcAft>
+            </a:pPr>
+            <a:r>
+              <a:rPr sz="1000" b="0">
+                <a:solidFill>
+                  <a:srgbClr val="9AA1AC"/>
+                </a:solidFill>
+                <a:latin typeface="Segoe UI"/>
+              </a:rPr>
+              <a:t>Источник: reports/case_conc/dev_cv.json, final_test.json; configs/case_selection.yaml: final_test</a:t>
+            </a:r>
+          </a:p>
+        </p:txBody>
+      </p:sp>
+      <p:sp>
+        <p:nvSpPr>
+          <p:cNvPr id="14" name="TextBox 13"/>
+          <p:cNvSpPr txBox="1"/>
+          <p:nvPr/>
+        </p:nvSpPr>
+        <p:spPr>
+          <a:xfrm>
+            <a:off x="11155680" y="6355080"/>
+            <a:ext cx="640080" cy="320040"/>
+          </a:xfrm>
+          <a:prstGeom prst="rect">
+            <a:avLst/>
+          </a:prstGeom>
+          <a:noFill/>
+        </p:spPr>
+        <p:txBody>
+          <a:bodyPr wrap="square" anchor="t" lIns="18288" rIns="18288" tIns="18288" bIns="18288">
+            <a:spAutoFit/>
+          </a:bodyPr>
+          <a:lstStyle/>
+          <a:p>
+            <a:pPr algn="r">
+              <a:spcAft>
+                <a:spcPts val="600"/>
+              </a:spcAft>
+            </a:pPr>
+            <a:r>
+              <a:rPr sz="1000" b="0">
+                <a:solidFill>
+                  <a:srgbClr val="9AA1AC"/>
+                </a:solidFill>
+                <a:latin typeface="Segoe UI"/>
+              </a:rPr>
+              <a:t>4:00</a:t>
+            </a:r>
+          </a:p>
+        </p:txBody>
+      </p:sp>
+    </p:spTree>
+  </p:cSld>
+  <p:clrMapOvr>
+    <a:masterClrMapping/>
+  </p:clrMapOvr>
+</p:sld>
+</file>
+
+<file path=ppt/slides/slide14.xml><?xml version="1.0" encoding="utf-8"?>
+<p:sld xmlns:a="http://schemas.openxmlformats.org/drawingml/2006/main" xmlns:p="http://schemas.openxmlformats.org/presentationml/2006/main" xmlns:r="http://schemas.openxmlformats.org/officeDocument/2006/relationships">
+  <p:cSld>
+    <p:bg>
+      <p:bgPr>
+        <a:solidFill>
+          <a:srgbClr val="101216"/>
+        </a:solidFill>
+        <a:effectLst/>
+      </p:bgPr>
+    </p:bg>
+    <p:spTree>
+      <p:nvGrpSpPr>
+        <p:cNvPr id="1" name=""/>
+        <p:cNvGrpSpPr/>
+        <p:nvPr/>
+      </p:nvGrpSpPr>
+      <p:grpSpPr/>
+      <p:sp>
+        <p:nvSpPr>
+          <p:cNvPr id="2" name="TextBox 1"/>
+          <p:cNvSpPr txBox="1"/>
+          <p:nvPr/>
+        </p:nvSpPr>
+        <p:spPr>
+          <a:xfrm>
+            <a:off x="457200" y="201168"/>
+            <a:ext cx="8229600" cy="274320"/>
+          </a:xfrm>
+          <a:prstGeom prst="rect">
+            <a:avLst/>
+          </a:prstGeom>
+          <a:noFill/>
+        </p:spPr>
+        <p:txBody>
+          <a:bodyPr wrap="square" anchor="t" lIns="18288" rIns="18288" tIns="18288" bIns="18288">
+            <a:spAutoFit/>
+          </a:bodyPr>
+          <a:lstStyle/>
+          <a:p>
+            <a:pPr algn="l">
+              <a:spcAft>
+                <a:spcPts val="600"/>
+              </a:spcAft>
+            </a:pPr>
+            <a:r>
+              <a:rPr sz="1200" b="1">
+                <a:solidFill>
+                  <a:srgbClr val="D9912E"/>
+                </a:solidFill>
+                <a:latin typeface="Segoe UI"/>
+              </a:rPr>
+              <a:t>14 · Эксперимент «снимок vs all_litter»</a:t>
+            </a:r>
+          </a:p>
+        </p:txBody>
+      </p:sp>
+      <p:sp>
+        <p:nvSpPr>
+          <p:cNvPr id="3" name="TextBox 2"/>
+          <p:cNvSpPr txBox="1"/>
+          <p:nvPr/>
+        </p:nvSpPr>
+        <p:spPr>
+          <a:xfrm>
+            <a:off x="457200" y="457200"/>
+            <a:ext cx="11247120" cy="960120"/>
+          </a:xfrm>
+          <a:prstGeom prst="rect">
+            <a:avLst/>
+          </a:prstGeom>
+          <a:noFill/>
+        </p:spPr>
+        <p:txBody>
+          <a:bodyPr wrap="square" anchor="t" lIns="18288" rIns="18288" tIns="18288" bIns="18288">
+            <a:spAutoFit/>
+          </a:bodyPr>
+          <a:lstStyle/>
+          <a:p>
+            <a:pPr algn="l">
+              <a:spcAft>
+                <a:spcPts val="600"/>
+              </a:spcAft>
+            </a:pPr>
+            <a:r>
+              <a:rPr sz="2600" b="1">
+                <a:solidFill>
+                  <a:srgbClr val="EEEFF1"/>
+                </a:solidFill>
+                <a:latin typeface="Segoe UI"/>
+              </a:rPr>
+              <a:t>Связь признаков снимка с полевой плотностью всего мусора не установлена: данных на это мало</a:t>
+            </a:r>
+          </a:p>
+        </p:txBody>
+      </p:sp>
+      <p:sp>
+        <p:nvSpPr>
+          <p:cNvPr id="4" name="TextBox 3"/>
+          <p:cNvSpPr txBox="1"/>
+          <p:nvPr/>
+        </p:nvSpPr>
+        <p:spPr>
+          <a:xfrm>
+            <a:off x="457200" y="1600200"/>
+            <a:ext cx="5577840" cy="4572000"/>
+          </a:xfrm>
+          <a:prstGeom prst="rect">
+            <a:avLst/>
+          </a:prstGeom>
+          <a:noFill/>
+        </p:spPr>
+        <p:txBody>
+          <a:bodyPr wrap="square" anchor="t" lIns="18288" rIns="18288" tIns="18288" bIns="18288">
+            <a:spAutoFit/>
+          </a:bodyPr>
+          <a:lstStyle/>
+          <a:p>
+            <a:pPr algn="l">
+              <a:spcAft>
+                <a:spcPts val="1000"/>
+              </a:spcAft>
+            </a:pPr>
+            <a:r>
+              <a:rPr sz="1600" b="0">
+                <a:solidFill>
+                  <a:srgbClr val="EEEFF1"/>
+                </a:solidFill>
+                <a:latin typeface="Segoe UI"/>
+              </a:rPr>
+              <a:t>• 11 пар S2 прошли маски, независимых групп «район × день» — 6; эталон — весь мусор, не пластик</a:t>
+            </a:r>
+          </a:p>
+          <a:p>
+            <a:pPr algn="l">
+              <a:spcAft>
+                <a:spcPts val="1000"/>
+              </a:spcAft>
+            </a:pPr>
+            <a:r>
+              <a:rPr sz="1600" b="0">
+                <a:solidFill>
+                  <a:srgbClr val="EEEFF1"/>
+                </a:solidFill>
+                <a:latin typeface="Segoe UI"/>
+              </a:rPr>
+              <a:t>• FDI в полосе: ρ −0.75 [−1.00; −0.14], p Холма 0.12; та же полоса в случайной воде сцены — −0.52</a:t>
+            </a:r>
+          </a:p>
+          <a:p>
+            <a:pPr algn="l">
+              <a:spcAft>
+                <a:spcPts val="1000"/>
+              </a:spcAft>
+            </a:pPr>
+            <a:r>
+              <a:rPr sz="1600" b="0">
+                <a:solidFill>
+                  <a:srgbClr val="EEEFF1"/>
+                </a:solidFill>
+                <a:latin typeface="Segoe UI"/>
+              </a:rPr>
+              <a:t>• Значит, связь на уровне сцены или дня, а не места; знак к тому же обратный ожидаемому</a:t>
+            </a:r>
+          </a:p>
+          <a:p>
+            <a:pPr algn="l">
+              <a:spcAft>
+                <a:spcPts val="1000"/>
+              </a:spcAft>
+            </a:pPr>
+            <a:r>
+              <a:rPr sz="1600" b="0">
+                <a:solidFill>
+                  <a:srgbClr val="EEEFF1"/>
+                </a:solidFill>
+                <a:latin typeface="Segoe UI"/>
+              </a:rPr>
+              <a:t>• Мощность: при 6 группах видна только |ρ| ≥ 0.96; для ρ = 0.5 нужно ≈ 33 независимых пар</a:t>
+            </a:r>
+          </a:p>
+        </p:txBody>
+      </p:sp>
+      <p:sp>
+        <p:nvSpPr>
+          <p:cNvPr id="5" name="Rectangle 4"/>
+          <p:cNvSpPr/>
+          <p:nvPr/>
+        </p:nvSpPr>
+        <p:spPr>
+          <a:xfrm>
+            <a:off x="6400800" y="1691640"/>
+            <a:ext cx="5349240" cy="1554480"/>
+          </a:xfrm>
+          <a:prstGeom prst="rect">
+            <a:avLst/>
+          </a:prstGeom>
+          <a:solidFill>
+            <a:srgbClr val="1B1E24"/>
+          </a:solidFill>
+          <a:ln>
+            <a:noFill/>
+          </a:ln>
+          <a:effectLst/>
+        </p:spPr>
+        <p:style>
+          <a:lnRef idx="1">
+            <a:schemeClr val="accent1"/>
+          </a:lnRef>
+          <a:fillRef idx="3">
+            <a:schemeClr val="accent1"/>
+          </a:fillRef>
+          <a:effectRef idx="2">
+            <a:schemeClr val="accent1"/>
+          </a:effectRef>
+          <a:fontRef idx="minor">
+            <a:schemeClr val="lt1"/>
+          </a:fontRef>
+        </p:style>
+        <p:txBody>
+          <a:bodyPr rtlCol="0" anchor="ctr"/>
+          <a:lstStyle/>
+          <a:p>
+            <a:pPr algn="ctr"/>
+          </a:p>
+        </p:txBody>
+      </p:sp>
+      <p:sp>
+        <p:nvSpPr>
           <p:cNvPr id="6" name="TextBox 5"/>
           <p:cNvSpPr txBox="1"/>
           <p:nvPr/>
@@ -5920,7 +7475,7 @@
                 </a:solidFill>
                 <a:latin typeface="Segoe UI"/>
               </a:rPr>
-              <a:t>7,5 мин</a:t>
+              <a:t>33</a:t>
             </a:r>
           </a:p>
         </p:txBody>
@@ -5959,7 +7514,7 @@
                 </a:solidFill>
                 <a:latin typeface="Segoe UI"/>
               </a:rPr>
-              <a:t>от git clone до карты на экране, CPU</a:t>
+              <a:t>независимых синхронных пар нужно, чтобы увидеть ρ = 0.5 (есть 6 групп)</a:t>
             </a:r>
           </a:p>
         </p:txBody>
@@ -5998,7 +7553,7 @@
                 </a:solidFill>
                 <a:latin typeface="Segoe UI"/>
               </a:rPr>
-              <a:t>Источник: reports/selfcheck/clean_clone_1941.md; reports/case_run/run_summary.json</a:t>
+              <a:t>Источник: reports/case_pairs/experiment.md, experiment.json</a:t>
             </a:r>
           </a:p>
         </p:txBody>
@@ -6037,7 +7592,1648 @@
                 </a:solidFill>
                 <a:latin typeface="Segoe UI"/>
               </a:rPr>
-              <a:t>3:48</a:t>
+              <a:t>4:23</a:t>
+            </a:r>
+          </a:p>
+        </p:txBody>
+      </p:sp>
+    </p:spTree>
+  </p:cSld>
+  <p:clrMapOvr>
+    <a:masterClrMapping/>
+  </p:clrMapOvr>
+</p:sld>
+</file>
+
+<file path=ppt/slides/slide15.xml><?xml version="1.0" encoding="utf-8"?>
+<p:sld xmlns:a="http://schemas.openxmlformats.org/drawingml/2006/main" xmlns:p="http://schemas.openxmlformats.org/presentationml/2006/main" xmlns:r="http://schemas.openxmlformats.org/officeDocument/2006/relationships">
+  <p:cSld>
+    <p:bg>
+      <p:bgPr>
+        <a:solidFill>
+          <a:srgbClr val="101216"/>
+        </a:solidFill>
+        <a:effectLst/>
+      </p:bgPr>
+    </p:bg>
+    <p:spTree>
+      <p:nvGrpSpPr>
+        <p:cNvPr id="1" name=""/>
+        <p:cNvGrpSpPr/>
+        <p:nvPr/>
+      </p:nvGrpSpPr>
+      <p:grpSpPr/>
+      <p:sp>
+        <p:nvSpPr>
+          <p:cNvPr id="2" name="TextBox 1"/>
+          <p:cNvSpPr txBox="1"/>
+          <p:nvPr/>
+        </p:nvSpPr>
+        <p:spPr>
+          <a:xfrm>
+            <a:off x="457200" y="201168"/>
+            <a:ext cx="8229600" cy="274320"/>
+          </a:xfrm>
+          <a:prstGeom prst="rect">
+            <a:avLst/>
+          </a:prstGeom>
+          <a:noFill/>
+        </p:spPr>
+        <p:txBody>
+          <a:bodyPr wrap="square" anchor="t" lIns="18288" rIns="18288" tIns="18288" bIns="18288">
+            <a:spAutoFit/>
+          </a:bodyPr>
+          <a:lstStyle/>
+          <a:p>
+            <a:pPr algn="l">
+              <a:spcAft>
+                <a:spcPts val="600"/>
+              </a:spcAft>
+            </a:pPr>
+            <a:r>
+              <a:rPr sz="1200" b="1">
+                <a:solidFill>
+                  <a:srgbClr val="D9912E"/>
+                </a:solidFill>
+                <a:latin typeface="Segoe UI"/>
+              </a:rPr>
+              <a:t>15 · Карта</a:t>
+            </a:r>
+          </a:p>
+        </p:txBody>
+      </p:sp>
+      <p:sp>
+        <p:nvSpPr>
+          <p:cNvPr id="3" name="TextBox 2"/>
+          <p:cNvSpPr txBox="1"/>
+          <p:nvPr/>
+        </p:nvSpPr>
+        <p:spPr>
+          <a:xfrm>
+            <a:off x="457200" y="457200"/>
+            <a:ext cx="11247120" cy="960120"/>
+          </a:xfrm>
+          <a:prstGeom prst="rect">
+            <a:avLst/>
+          </a:prstGeom>
+          <a:noFill/>
+        </p:spPr>
+        <p:txBody>
+          <a:bodyPr wrap="square" anchor="t" lIns="18288" rIns="18288" tIns="18288" bIns="18288">
+            <a:spAutoFit/>
+          </a:bodyPr>
+          <a:lstStyle/>
+          <a:p>
+            <a:pPr algn="l">
+              <a:spcAft>
+                <a:spcPts val="600"/>
+              </a:spcAft>
+            </a:pPr>
+            <a:r>
+              <a:rPr sz="2300" b="1">
+                <a:solidFill>
+                  <a:srgbClr val="EEEFF1"/>
+                </a:solidFill>
+                <a:latin typeface="Segoe UI"/>
+              </a:rPr>
+              <a:t>Карта говорит то же, что отчёт: 29 полос-кандидатов, 0 подтверждённых пар, концентрация по снимку недоступна</a:t>
+            </a:r>
+          </a:p>
+        </p:txBody>
+      </p:sp>
+      <p:sp>
+        <p:nvSpPr>
+          <p:cNvPr id="4" name="TextBox 3"/>
+          <p:cNvSpPr txBox="1"/>
+          <p:nvPr/>
+        </p:nvSpPr>
+        <p:spPr>
+          <a:xfrm>
+            <a:off x="457200" y="1600200"/>
+            <a:ext cx="5577840" cy="4572000"/>
+          </a:xfrm>
+          <a:prstGeom prst="rect">
+            <a:avLst/>
+          </a:prstGeom>
+          <a:noFill/>
+        </p:spPr>
+        <p:txBody>
+          <a:bodyPr wrap="square" anchor="t" lIns="18288" rIns="18288" tIns="18288" bIns="18288">
+            <a:spAutoFit/>
+          </a:bodyPr>
+          <a:lstStyle/>
+          <a:p>
+            <a:pPr algn="l">
+              <a:spcAft>
+                <a:spcPts val="1000"/>
+              </a:spcAft>
+            </a:pPr>
+            <a:r>
+              <a:rPr sz="1600" b="0">
+                <a:solidFill>
+                  <a:srgbClr val="EEEFF1"/>
+                </a:solidFill>
+                <a:latin typeface="Segoe UI"/>
+              </a:rPr>
+              <a:t>• Три слоя: полевые измерения (шт./км² с интервалом Пуассона) · снимки-кандидаты (полосы обследования) · подозрительные пиксели детектора</a:t>
+            </a:r>
+          </a:p>
+          <a:p>
+            <a:pPr algn="l">
+              <a:spcAft>
+                <a:spcPts val="1000"/>
+              </a:spcAft>
+            </a:pPr>
+            <a:r>
+              <a:rPr sz="1600" b="0">
+                <a:solidFill>
+                  <a:srgbClr val="EEEFF1"/>
+                </a:solidFill>
+                <a:latin typeface="Segoe UI"/>
+              </a:rPr>
+              <a:t>• Два статуса полосы: детекция («связь не подтверждена» + причина) и концентрация («недоступна»)</a:t>
+            </a:r>
+          </a:p>
+          <a:p>
+            <a:pPr algn="l">
+              <a:spcAft>
+                <a:spcPts val="1000"/>
+              </a:spcAft>
+            </a:pPr>
+            <a:r>
+              <a:rPr sz="1600" b="0">
+                <a:solidFill>
+                  <a:srgbClr val="EEEFF1"/>
+                </a:solidFill>
+                <a:latin typeface="Segoe UI"/>
+              </a:rPr>
+              <a:t>• Реестр пар, выгрузка GeoJSON/CSV, сохранённые запросы; самопроверка API ↔ выгрузка: 284 из 284, ошибочные входы 46/46, p95 ≤ 104 мс</a:t>
+            </a:r>
+          </a:p>
+        </p:txBody>
+      </p:sp>
+      <p:pic>
+        <p:nvPicPr>
+          <p:cNvPr id="5" name="Picture 4" descr="02_zone_he460_t03.jpg"/>
+          <p:cNvPicPr>
+            <a:picLocks noChangeAspect="1"/>
+          </p:cNvPicPr>
+          <p:nvPr/>
+        </p:nvPicPr>
+        <p:blipFill>
+          <a:blip r:embed="rId2"/>
+          <a:stretch>
+            <a:fillRect/>
+          </a:stretch>
+        </p:blipFill>
+        <p:spPr>
+          <a:xfrm>
+            <a:off x="6400800" y="1645920"/>
+            <a:ext cx="5349240" cy="3656442"/>
+          </a:xfrm>
+          <a:prstGeom prst="rect">
+            <a:avLst/>
+          </a:prstGeom>
+        </p:spPr>
+      </p:pic>
+      <p:sp>
+        <p:nvSpPr>
+          <p:cNvPr id="6" name="TextBox 5"/>
+          <p:cNvSpPr txBox="1"/>
+          <p:nvPr/>
+        </p:nvSpPr>
+        <p:spPr>
+          <a:xfrm>
+            <a:off x="6400800" y="5348082"/>
+            <a:ext cx="5349240" cy="548640"/>
+          </a:xfrm>
+          <a:prstGeom prst="rect">
+            <a:avLst/>
+          </a:prstGeom>
+          <a:noFill/>
+        </p:spPr>
+        <p:txBody>
+          <a:bodyPr wrap="square" anchor="t" lIns="18288" rIns="18288" tIns="18288" bIns="18288">
+            <a:spAutoFit/>
+          </a:bodyPr>
+          <a:lstStyle/>
+          <a:p>
+            <a:pPr algn="l">
+              <a:spcAft>
+                <a:spcPts val="600"/>
+              </a:spcAft>
+            </a:pPr>
+            <a:r>
+              <a:rPr sz="1200" b="0">
+                <a:solidFill>
+                  <a:srgbClr val="9AA1AC"/>
+                </a:solidFill>
+                <a:latin typeface="Segoe UI"/>
+              </a:rPr>
+              <a:t>Северное море, HE460 трансекта 03: связь с полем не подтверждена (дрейф &gt; допуска), подозрительных пикселей в полосе нет</a:t>
+            </a:r>
+          </a:p>
+        </p:txBody>
+      </p:sp>
+      <p:sp>
+        <p:nvSpPr>
+          <p:cNvPr id="7" name="TextBox 6"/>
+          <p:cNvSpPr txBox="1"/>
+          <p:nvPr/>
+        </p:nvSpPr>
+        <p:spPr>
+          <a:xfrm>
+            <a:off x="457200" y="6355080"/>
+            <a:ext cx="10515600" cy="320040"/>
+          </a:xfrm>
+          <a:prstGeom prst="rect">
+            <a:avLst/>
+          </a:prstGeom>
+          <a:noFill/>
+        </p:spPr>
+        <p:txBody>
+          <a:bodyPr wrap="square" anchor="t" lIns="18288" rIns="18288" tIns="18288" bIns="18288">
+            <a:spAutoFit/>
+          </a:bodyPr>
+          <a:lstStyle/>
+          <a:p>
+            <a:pPr algn="l">
+              <a:spcAft>
+                <a:spcPts val="600"/>
+              </a:spcAft>
+            </a:pPr>
+            <a:r>
+              <a:rPr sz="1000" b="0">
+                <a:solidFill>
+                  <a:srgbClr val="9AA1AC"/>
+                </a:solidFill>
+                <a:latin typeface="Segoe UI"/>
+              </a:rPr>
+              <a:t>Источник: service/routes_v3.py; reports/selfcheck/consistency_latest.json</a:t>
+            </a:r>
+          </a:p>
+        </p:txBody>
+      </p:sp>
+      <p:sp>
+        <p:nvSpPr>
+          <p:cNvPr id="8" name="TextBox 7"/>
+          <p:cNvSpPr txBox="1"/>
+          <p:nvPr/>
+        </p:nvSpPr>
+        <p:spPr>
+          <a:xfrm>
+            <a:off x="11155680" y="6355080"/>
+            <a:ext cx="640080" cy="320040"/>
+          </a:xfrm>
+          <a:prstGeom prst="rect">
+            <a:avLst/>
+          </a:prstGeom>
+          <a:noFill/>
+        </p:spPr>
+        <p:txBody>
+          <a:bodyPr wrap="square" anchor="t" lIns="18288" rIns="18288" tIns="18288" bIns="18288">
+            <a:spAutoFit/>
+          </a:bodyPr>
+          <a:lstStyle/>
+          <a:p>
+            <a:pPr algn="r">
+              <a:spcAft>
+                <a:spcPts val="600"/>
+              </a:spcAft>
+            </a:pPr>
+            <a:r>
+              <a:rPr sz="1000" b="0">
+                <a:solidFill>
+                  <a:srgbClr val="9AA1AC"/>
+                </a:solidFill>
+                <a:latin typeface="Segoe UI"/>
+              </a:rPr>
+              <a:t>4:41</a:t>
+            </a:r>
+          </a:p>
+        </p:txBody>
+      </p:sp>
+    </p:spTree>
+  </p:cSld>
+  <p:clrMapOvr>
+    <a:masterClrMapping/>
+  </p:clrMapOvr>
+</p:sld>
+</file>
+
+<file path=ppt/slides/slide16.xml><?xml version="1.0" encoding="utf-8"?>
+<p:sld xmlns:a="http://schemas.openxmlformats.org/drawingml/2006/main" xmlns:p="http://schemas.openxmlformats.org/presentationml/2006/main" xmlns:r="http://schemas.openxmlformats.org/officeDocument/2006/relationships">
+  <p:cSld>
+    <p:bg>
+      <p:bgPr>
+        <a:solidFill>
+          <a:srgbClr val="101216"/>
+        </a:solidFill>
+        <a:effectLst/>
+      </p:bgPr>
+    </p:bg>
+    <p:spTree>
+      <p:nvGrpSpPr>
+        <p:cNvPr id="1" name=""/>
+        <p:cNvGrpSpPr/>
+        <p:nvPr/>
+      </p:nvGrpSpPr>
+      <p:grpSpPr/>
+      <p:sp>
+        <p:nvSpPr>
+          <p:cNvPr id="2" name="TextBox 1"/>
+          <p:cNvSpPr txBox="1"/>
+          <p:nvPr/>
+        </p:nvSpPr>
+        <p:spPr>
+          <a:xfrm>
+            <a:off x="457200" y="201168"/>
+            <a:ext cx="8229600" cy="274320"/>
+          </a:xfrm>
+          <a:prstGeom prst="rect">
+            <a:avLst/>
+          </a:prstGeom>
+          <a:noFill/>
+        </p:spPr>
+        <p:txBody>
+          <a:bodyPr wrap="square" anchor="t" lIns="18288" rIns="18288" tIns="18288" bIns="18288">
+            <a:spAutoFit/>
+          </a:bodyPr>
+          <a:lstStyle/>
+          <a:p>
+            <a:pPr algn="l">
+              <a:spcAft>
+                <a:spcPts val="600"/>
+              </a:spcAft>
+            </a:pPr>
+            <a:r>
+              <a:rPr sz="1200" b="1">
+                <a:solidFill>
+                  <a:srgbClr val="D9912E"/>
+                </a:solidFill>
+                <a:latin typeface="Segoe UI"/>
+              </a:rPr>
+              <a:t>16 · Собственный вклад и ключевые решения</a:t>
+            </a:r>
+          </a:p>
+        </p:txBody>
+      </p:sp>
+      <p:sp>
+        <p:nvSpPr>
+          <p:cNvPr id="3" name="TextBox 2"/>
+          <p:cNvSpPr txBox="1"/>
+          <p:nvPr/>
+        </p:nvSpPr>
+        <p:spPr>
+          <a:xfrm>
+            <a:off x="457200" y="457200"/>
+            <a:ext cx="11247120" cy="960120"/>
+          </a:xfrm>
+          <a:prstGeom prst="rect">
+            <a:avLst/>
+          </a:prstGeom>
+          <a:noFill/>
+        </p:spPr>
+        <p:txBody>
+          <a:bodyPr wrap="square" anchor="t" lIns="18288" rIns="18288" tIns="18288" bIns="18288">
+            <a:spAutoFit/>
+          </a:bodyPr>
+          <a:lstStyle/>
+          <a:p>
+            <a:pPr algn="l">
+              <a:spcAft>
+                <a:spcPts val="600"/>
+              </a:spcAft>
+            </a:pPr>
+            <a:r>
+              <a:rPr sz="2600" b="1">
+                <a:solidFill>
+                  <a:srgbClr val="EEEFF1"/>
+                </a:solidFill>
+                <a:latin typeface="Segoe UI"/>
+              </a:rPr>
+              <a:t>Наш вклад — решения, каждое проверено экспериментом или записано до результата</a:t>
+            </a:r>
+          </a:p>
+        </p:txBody>
+      </p:sp>
+      <p:sp>
+        <p:nvSpPr>
+          <p:cNvPr id="4" name="TextBox 3"/>
+          <p:cNvSpPr txBox="1"/>
+          <p:nvPr/>
+        </p:nvSpPr>
+        <p:spPr>
+          <a:xfrm>
+            <a:off x="457200" y="1600200"/>
+            <a:ext cx="11247120" cy="4572000"/>
+          </a:xfrm>
+          <a:prstGeom prst="rect">
+            <a:avLst/>
+          </a:prstGeom>
+          <a:noFill/>
+        </p:spPr>
+        <p:txBody>
+          <a:bodyPr wrap="square" anchor="t" lIns="18288" rIns="18288" tIns="18288" bIns="18288">
+            <a:spAutoFit/>
+          </a:bodyPr>
+          <a:lstStyle/>
+          <a:p>
+            <a:pPr algn="l">
+              <a:spcAft>
+                <a:spcPts val="1000"/>
+              </a:spcAft>
+            </a:pPr>
+            <a:r>
+              <a:rPr sz="1500" b="0">
+                <a:solidFill>
+                  <a:srgbClr val="EEEFF1"/>
+                </a:solidFill>
+                <a:latin typeface="Segoe UI"/>
+              </a:rPr>
+              <a:t>• Реестр пар с допуском по дрейфу вместо «±1 сут»: 29 пар по метаданным → 0 синхронных; причины у каждого из 318 событий</a:t>
+            </a:r>
+          </a:p>
+          <a:p>
+            <a:pPr algn="l">
+              <a:spcAft>
+                <a:spcPts val="1000"/>
+              </a:spcAft>
+            </a:pPr>
+            <a:r>
+              <a:rPr sz="1500" b="0">
+                <a:solidFill>
+                  <a:srgbClr val="EEEFF1"/>
+                </a:solidFill>
+                <a:latin typeface="Segoe UI"/>
+              </a:rPr>
+              <a:t>• Сплит по участкам маршрута + буфер: на «связных компонентах» kNN выигрывал −11.6 [−23.1; −0.9], на маршруте −4.2 [−12.0; 3.4] — утечка через соседей дня</a:t>
+            </a:r>
+          </a:p>
+          <a:p>
+            <a:pPr algn="l">
+              <a:spcAft>
+                <a:spcPts val="1000"/>
+              </a:spcAft>
+            </a:pPr>
+            <a:r>
+              <a:rPr sz="1500" b="0">
+                <a:solidFill>
+                  <a:srgbClr val="EEEFF1"/>
+                </a:solidFill>
+                <a:latin typeface="Segoe UI"/>
+              </a:rPr>
+              <a:t>• Отложенный test один раз: правило «не лучше медианы → медиана» записано 25.09.2026 19:05, test открыт 25.09.2026 19:15 — на карте медиана</a:t>
+            </a:r>
+          </a:p>
+          <a:p>
+            <a:pPr algn="l">
+              <a:spcAft>
+                <a:spcPts val="1000"/>
+              </a:spcAft>
+            </a:pPr>
+            <a:r>
+              <a:rPr sz="1500" b="0">
+                <a:solidFill>
+                  <a:srgbClr val="EEEFF1"/>
+                </a:solidFill>
+                <a:latin typeface="Segoe UI"/>
+              </a:rPr>
+              <a:t>• Отказ от гармонизации L2A по MARIDA val (F1 0.923 против 0.897), test не использовался</a:t>
+            </a:r>
+          </a:p>
+          <a:p>
+            <a:pPr algn="l">
+              <a:spcAft>
+                <a:spcPts val="1000"/>
+              </a:spcAft>
+            </a:pPr>
+            <a:r>
+              <a:rPr sz="1500" b="0">
+                <a:solidFill>
+                  <a:srgbClr val="EEEFF1"/>
+                </a:solidFill>
+                <a:latin typeface="Segoe UI"/>
+              </a:rPr>
+              <a:t>• Геометрия трансект по первоисточникам PANGAEA: 104 события, 4 прерванные — двумя сегментами; окно синхронизации |dt| ≤ 4.17 ч</a:t>
+            </a:r>
+          </a:p>
+          <a:p>
+            <a:pPr algn="l">
+              <a:spcAft>
+                <a:spcPts val="1000"/>
+              </a:spcAft>
+            </a:pPr>
+            <a:r>
+              <a:rPr sz="1500" b="0">
+                <a:solidFill>
+                  <a:srgbClr val="EEEFF1"/>
+                </a:solidFill>
+                <a:latin typeface="Segoe UI"/>
+              </a:rPr>
+              <a:t>• Один источник чисел: final_numbers.json → README, отчёт, дека, речь, ответы; тест сверяет (232 passed)</a:t>
+            </a:r>
+          </a:p>
+          <a:p>
+            <a:pPr algn="l">
+              <a:spcAft>
+                <a:spcPts val="1000"/>
+              </a:spcAft>
+            </a:pPr>
+            <a:r>
+              <a:rPr sz="1500" b="0">
+                <a:solidFill>
+                  <a:srgbClr val="EEEFF1"/>
+                </a:solidFill>
+                <a:latin typeface="Segoe UI"/>
+              </a:rPr>
+              <a:t>• Готовое, не наше: разметка MARIDA и MADOS, протокол RandomForest MARIDA, индекс FDI, каталоги STAC</a:t>
+            </a:r>
+          </a:p>
+        </p:txBody>
+      </p:sp>
+      <p:sp>
+        <p:nvSpPr>
+          <p:cNvPr id="5" name="TextBox 4"/>
+          <p:cNvSpPr txBox="1"/>
+          <p:nvPr/>
+        </p:nvSpPr>
+        <p:spPr>
+          <a:xfrm>
+            <a:off x="457200" y="6355080"/>
+            <a:ext cx="10515600" cy="320040"/>
+          </a:xfrm>
+          <a:prstGeom prst="rect">
+            <a:avLst/>
+          </a:prstGeom>
+          <a:noFill/>
+        </p:spPr>
+        <p:txBody>
+          <a:bodyPr wrap="square" anchor="t" lIns="18288" rIns="18288" tIns="18288" bIns="18288">
+            <a:spAutoFit/>
+          </a:bodyPr>
+          <a:lstStyle/>
+          <a:p>
+            <a:pPr algn="l">
+              <a:spcAft>
+                <a:spcPts val="600"/>
+              </a:spcAft>
+            </a:pPr>
+            <a:r>
+              <a:rPr sz="1000" b="0">
+                <a:solidFill>
+                  <a:srgbClr val="9AA1AC"/>
+                </a:solidFill>
+                <a:latin typeface="Segoe UI"/>
+              </a:rPr>
+              <a:t>Источник: reports/case_pairs/summary.md; reports/case_conc/metrics.json; configs/case_selection.yaml; docs/DECISIONS.md; reports/case_geometry/summary.md</a:t>
+            </a:r>
+          </a:p>
+        </p:txBody>
+      </p:sp>
+      <p:sp>
+        <p:nvSpPr>
+          <p:cNvPr id="6" name="TextBox 5"/>
+          <p:cNvSpPr txBox="1"/>
+          <p:nvPr/>
+        </p:nvSpPr>
+        <p:spPr>
+          <a:xfrm>
+            <a:off x="11155680" y="6355080"/>
+            <a:ext cx="640080" cy="320040"/>
+          </a:xfrm>
+          <a:prstGeom prst="rect">
+            <a:avLst/>
+          </a:prstGeom>
+          <a:noFill/>
+        </p:spPr>
+        <p:txBody>
+          <a:bodyPr wrap="square" anchor="t" lIns="18288" rIns="18288" tIns="18288" bIns="18288">
+            <a:spAutoFit/>
+          </a:bodyPr>
+          <a:lstStyle/>
+          <a:p>
+            <a:pPr algn="r">
+              <a:spcAft>
+                <a:spcPts val="600"/>
+              </a:spcAft>
+            </a:pPr>
+            <a:r>
+              <a:rPr sz="1000" b="0">
+                <a:solidFill>
+                  <a:srgbClr val="9AA1AC"/>
+                </a:solidFill>
+                <a:latin typeface="Segoe UI"/>
+              </a:rPr>
+              <a:t>4:56</a:t>
+            </a:r>
+          </a:p>
+        </p:txBody>
+      </p:sp>
+    </p:spTree>
+  </p:cSld>
+  <p:clrMapOvr>
+    <a:masterClrMapping/>
+  </p:clrMapOvr>
+</p:sld>
+</file>
+
+<file path=ppt/slides/slide17.xml><?xml version="1.0" encoding="utf-8"?>
+<p:sld xmlns:a="http://schemas.openxmlformats.org/drawingml/2006/main" xmlns:p="http://schemas.openxmlformats.org/presentationml/2006/main" xmlns:r="http://schemas.openxmlformats.org/officeDocument/2006/relationships">
+  <p:cSld>
+    <p:bg>
+      <p:bgPr>
+        <a:solidFill>
+          <a:srgbClr val="101216"/>
+        </a:solidFill>
+        <a:effectLst/>
+      </p:bgPr>
+    </p:bg>
+    <p:spTree>
+      <p:nvGrpSpPr>
+        <p:cNvPr id="1" name=""/>
+        <p:cNvGrpSpPr/>
+        <p:nvPr/>
+      </p:nvGrpSpPr>
+      <p:grpSpPr/>
+      <p:sp>
+        <p:nvSpPr>
+          <p:cNvPr id="2" name="TextBox 1"/>
+          <p:cNvSpPr txBox="1"/>
+          <p:nvPr/>
+        </p:nvSpPr>
+        <p:spPr>
+          <a:xfrm>
+            <a:off x="457200" y="201168"/>
+            <a:ext cx="8229600" cy="274320"/>
+          </a:xfrm>
+          <a:prstGeom prst="rect">
+            <a:avLst/>
+          </a:prstGeom>
+          <a:noFill/>
+        </p:spPr>
+        <p:txBody>
+          <a:bodyPr wrap="square" anchor="t" lIns="18288" rIns="18288" tIns="18288" bIns="18288">
+            <a:spAutoFit/>
+          </a:bodyPr>
+          <a:lstStyle/>
+          <a:p>
+            <a:pPr algn="l">
+              <a:spcAft>
+                <a:spcPts val="600"/>
+              </a:spcAft>
+            </a:pPr>
+            <a:r>
+              <a:rPr sz="1200" b="1">
+                <a:solidFill>
+                  <a:srgbClr val="D9912E"/>
+                </a:solidFill>
+                <a:latin typeface="Segoe UI"/>
+              </a:rPr>
+              <a:t>17 · Дополнительные функции</a:t>
+            </a:r>
+          </a:p>
+        </p:txBody>
+      </p:sp>
+      <p:sp>
+        <p:nvSpPr>
+          <p:cNvPr id="3" name="TextBox 2"/>
+          <p:cNvSpPr txBox="1"/>
+          <p:nvPr/>
+        </p:nvSpPr>
+        <p:spPr>
+          <a:xfrm>
+            <a:off x="457200" y="457200"/>
+            <a:ext cx="11247120" cy="960120"/>
+          </a:xfrm>
+          <a:prstGeom prst="rect">
+            <a:avLst/>
+          </a:prstGeom>
+          <a:noFill/>
+        </p:spPr>
+        <p:txBody>
+          <a:bodyPr wrap="square" anchor="t" lIns="18288" rIns="18288" tIns="18288" bIns="18288">
+            <a:spAutoFit/>
+          </a:bodyPr>
+          <a:lstStyle/>
+          <a:p>
+            <a:pPr algn="l">
+              <a:spcAft>
+                <a:spcPts val="600"/>
+              </a:spcAft>
+            </a:pPr>
+            <a:r>
+              <a:rPr sz="2600" b="1">
+                <a:solidFill>
+                  <a:srgbClr val="EEEFF1"/>
+                </a:solidFill>
+                <a:latin typeface="Segoe UI"/>
+              </a:rPr>
+              <a:t>«Подобрать снимок»: из правила дрейфа — инструмент планирования полевых работ под пролёт</a:t>
+            </a:r>
+          </a:p>
+        </p:txBody>
+      </p:sp>
+      <p:sp>
+        <p:nvSpPr>
+          <p:cNvPr id="4" name="TextBox 3"/>
+          <p:cNvSpPr txBox="1"/>
+          <p:nvPr/>
+        </p:nvSpPr>
+        <p:spPr>
+          <a:xfrm>
+            <a:off x="457200" y="1600200"/>
+            <a:ext cx="5577840" cy="4572000"/>
+          </a:xfrm>
+          <a:prstGeom prst="rect">
+            <a:avLst/>
+          </a:prstGeom>
+          <a:noFill/>
+        </p:spPr>
+        <p:txBody>
+          <a:bodyPr wrap="square" anchor="t" lIns="18288" rIns="18288" tIns="18288" bIns="18288">
+            <a:spAutoFit/>
+          </a:bodyPr>
+          <a:lstStyle/>
+          <a:p>
+            <a:pPr algn="l">
+              <a:spcAft>
+                <a:spcPts val="1000"/>
+              </a:spcAft>
+            </a:pPr>
+            <a:r>
+              <a:rPr sz="1600" b="0">
+                <a:solidFill>
+                  <a:srgbClr val="EEEFF1"/>
+                </a:solidFill>
+                <a:latin typeface="Segoe UI"/>
+              </a:rPr>
+              <a:t>• Окно синхронизации |dt| ≤ 4.17 ч; наивное окно ±1 сут даёт 29 «пар», синхронных 0</a:t>
+            </a:r>
+          </a:p>
+          <a:p>
+            <a:pPr algn="l">
+              <a:spcAft>
+                <a:spcPts val="1000"/>
+              </a:spcAft>
+            </a:pPr>
+            <a:r>
+              <a:rPr sz="1600" b="0">
+                <a:solidFill>
+                  <a:srgbClr val="EEEFF1"/>
+                </a:solidFill>
+                <a:latin typeface="Segoe UI"/>
+              </a:rPr>
+              <a:t>• Чёрное море без времени трансект: 12 событий получают окно UTC, у 8 полоса чистая по маскам</a:t>
+            </a:r>
+          </a:p>
+          <a:p>
+            <a:pPr algn="l">
+              <a:spcAft>
+                <a:spcPts val="1000"/>
+              </a:spcAft>
+            </a:pPr>
+            <a:r>
+              <a:rPr sz="1600" b="0">
+                <a:solidFill>
+                  <a:srgbClr val="EEEFF1"/>
+                </a:solidFill>
+                <a:latin typeface="Segoe UI"/>
+              </a:rPr>
+              <a:t>• Прогноз пролётов на архиве совпал с реальной съёмкой в 82 из 88 случаев (±5 мин)</a:t>
+            </a:r>
+          </a:p>
+          <a:p>
+            <a:pPr algn="l">
+              <a:spcAft>
+                <a:spcPts val="1000"/>
+              </a:spcAft>
+            </a:pPr>
+            <a:r>
+              <a:rPr sz="1600" b="0">
+                <a:solidFill>
+                  <a:srgbClr val="EEEFF1"/>
+                </a:solidFill>
+                <a:latin typeface="Segoe UI"/>
+              </a:rPr>
+              <a:t>• Геометрия трансект по PANGAEA: 104 события S2/S3, 108 сегментов; 4 прерванные трансекты — двумя сегментами</a:t>
+            </a:r>
+          </a:p>
+        </p:txBody>
+      </p:sp>
+      <p:pic>
+        <p:nvPicPr>
+          <p:cNvPr id="5" name="Picture 4" descr="04_pairfinder_transect.jpg"/>
+          <p:cNvPicPr>
+            <a:picLocks noChangeAspect="1"/>
+          </p:cNvPicPr>
+          <p:nvPr/>
+        </p:nvPicPr>
+        <p:blipFill>
+          <a:blip r:embed="rId2"/>
+          <a:stretch>
+            <a:fillRect/>
+          </a:stretch>
+        </p:blipFill>
+        <p:spPr>
+          <a:xfrm>
+            <a:off x="6914726" y="1645920"/>
+            <a:ext cx="4321386" cy="4023360"/>
+          </a:xfrm>
+          <a:prstGeom prst="rect">
+            <a:avLst/>
+          </a:prstGeom>
+        </p:spPr>
+      </p:pic>
+      <p:sp>
+        <p:nvSpPr>
+          <p:cNvPr id="6" name="TextBox 5"/>
+          <p:cNvSpPr txBox="1"/>
+          <p:nvPr/>
+        </p:nvSpPr>
+        <p:spPr>
+          <a:xfrm>
+            <a:off x="6400800" y="5715000"/>
+            <a:ext cx="5349240" cy="548640"/>
+          </a:xfrm>
+          <a:prstGeom prst="rect">
+            <a:avLst/>
+          </a:prstGeom>
+          <a:noFill/>
+        </p:spPr>
+        <p:txBody>
+          <a:bodyPr wrap="square" anchor="t" lIns="18288" rIns="18288" tIns="18288" bIns="18288">
+            <a:spAutoFit/>
+          </a:bodyPr>
+          <a:lstStyle/>
+          <a:p>
+            <a:pPr algn="l">
+              <a:spcAft>
+                <a:spcPts val="600"/>
+              </a:spcAft>
+            </a:pPr>
+            <a:r>
+              <a:rPr sz="1200" b="0">
+                <a:solidFill>
+                  <a:srgbClr val="9AA1AC"/>
+                </a:solidFill>
+                <a:latin typeface="Segoe UI"/>
+              </a:rPr>
+              <a:t>Саргассово море, T18: прерванная трансекта (2 сегмента) и «Подбор снимка» — сцен в окне нет</a:t>
+            </a:r>
+          </a:p>
+        </p:txBody>
+      </p:sp>
+      <p:sp>
+        <p:nvSpPr>
+          <p:cNvPr id="7" name="TextBox 6"/>
+          <p:cNvSpPr txBox="1"/>
+          <p:nvPr/>
+        </p:nvSpPr>
+        <p:spPr>
+          <a:xfrm>
+            <a:off x="457200" y="6355080"/>
+            <a:ext cx="10515600" cy="320040"/>
+          </a:xfrm>
+          <a:prstGeom prst="rect">
+            <a:avLst/>
+          </a:prstGeom>
+          <a:noFill/>
+        </p:spPr>
+        <p:txBody>
+          <a:bodyPr wrap="square" anchor="t" lIns="18288" rIns="18288" tIns="18288" bIns="18288">
+            <a:spAutoFit/>
+          </a:bodyPr>
+          <a:lstStyle/>
+          <a:p>
+            <a:pPr algn="l">
+              <a:spcAft>
+                <a:spcPts val="600"/>
+              </a:spcAft>
+            </a:pPr>
+            <a:r>
+              <a:rPr sz="1000" b="0">
+                <a:solidFill>
+                  <a:srgbClr val="9AA1AC"/>
+                </a:solidFill>
+                <a:latin typeface="Segoe UI"/>
+              </a:rPr>
+              <a:t>Источник: docs/EXTRA_FEATURES.md; reports/case_pairfinder/evidence.md; reports/case_geometry/summary.md</a:t>
+            </a:r>
+          </a:p>
+        </p:txBody>
+      </p:sp>
+      <p:sp>
+        <p:nvSpPr>
+          <p:cNvPr id="8" name="TextBox 7"/>
+          <p:cNvSpPr txBox="1"/>
+          <p:nvPr/>
+        </p:nvSpPr>
+        <p:spPr>
+          <a:xfrm>
+            <a:off x="11155680" y="6355080"/>
+            <a:ext cx="640080" cy="320040"/>
+          </a:xfrm>
+          <a:prstGeom prst="rect">
+            <a:avLst/>
+          </a:prstGeom>
+          <a:noFill/>
+        </p:spPr>
+        <p:txBody>
+          <a:bodyPr wrap="square" anchor="t" lIns="18288" rIns="18288" tIns="18288" bIns="18288">
+            <a:spAutoFit/>
+          </a:bodyPr>
+          <a:lstStyle/>
+          <a:p>
+            <a:pPr algn="r">
+              <a:spcAft>
+                <a:spcPts val="600"/>
+              </a:spcAft>
+            </a:pPr>
+            <a:r>
+              <a:rPr sz="1000" b="0">
+                <a:solidFill>
+                  <a:srgbClr val="9AA1AC"/>
+                </a:solidFill>
+                <a:latin typeface="Segoe UI"/>
+              </a:rPr>
+              <a:t>5:25</a:t>
+            </a:r>
+          </a:p>
+        </p:txBody>
+      </p:sp>
+    </p:spTree>
+  </p:cSld>
+  <p:clrMapOvr>
+    <a:masterClrMapping/>
+  </p:clrMapOvr>
+</p:sld>
+</file>
+
+<file path=ppt/slides/slide18.xml><?xml version="1.0" encoding="utf-8"?>
+<p:sld xmlns:a="http://schemas.openxmlformats.org/drawingml/2006/main" xmlns:p="http://schemas.openxmlformats.org/presentationml/2006/main" xmlns:r="http://schemas.openxmlformats.org/officeDocument/2006/relationships">
+  <p:cSld>
+    <p:bg>
+      <p:bgPr>
+        <a:solidFill>
+          <a:srgbClr val="101216"/>
+        </a:solidFill>
+        <a:effectLst/>
+      </p:bgPr>
+    </p:bg>
+    <p:spTree>
+      <p:nvGrpSpPr>
+        <p:cNvPr id="1" name=""/>
+        <p:cNvGrpSpPr/>
+        <p:nvPr/>
+      </p:nvGrpSpPr>
+      <p:grpSpPr/>
+      <p:sp>
+        <p:nvSpPr>
+          <p:cNvPr id="2" name="TextBox 1"/>
+          <p:cNvSpPr txBox="1"/>
+          <p:nvPr/>
+        </p:nvSpPr>
+        <p:spPr>
+          <a:xfrm>
+            <a:off x="457200" y="201168"/>
+            <a:ext cx="8229600" cy="274320"/>
+          </a:xfrm>
+          <a:prstGeom prst="rect">
+            <a:avLst/>
+          </a:prstGeom>
+          <a:noFill/>
+        </p:spPr>
+        <p:txBody>
+          <a:bodyPr wrap="square" anchor="t" lIns="18288" rIns="18288" tIns="18288" bIns="18288">
+            <a:spAutoFit/>
+          </a:bodyPr>
+          <a:lstStyle/>
+          <a:p>
+            <a:pPr algn="l">
+              <a:spcAft>
+                <a:spcPts val="600"/>
+              </a:spcAft>
+            </a:pPr>
+            <a:r>
+              <a:rPr sz="1200" b="1">
+                <a:solidFill>
+                  <a:srgbClr val="D9912E"/>
+                </a:solidFill>
+                <a:latin typeface="Segoe UI"/>
+              </a:rPr>
+              <a:t>18 · Ограничения и развитие</a:t>
+            </a:r>
+          </a:p>
+        </p:txBody>
+      </p:sp>
+      <p:sp>
+        <p:nvSpPr>
+          <p:cNvPr id="3" name="TextBox 2"/>
+          <p:cNvSpPr txBox="1"/>
+          <p:nvPr/>
+        </p:nvSpPr>
+        <p:spPr>
+          <a:xfrm>
+            <a:off x="457200" y="457200"/>
+            <a:ext cx="11247120" cy="960120"/>
+          </a:xfrm>
+          <a:prstGeom prst="rect">
+            <a:avLst/>
+          </a:prstGeom>
+          <a:noFill/>
+        </p:spPr>
+        <p:txBody>
+          <a:bodyPr wrap="square" anchor="t" lIns="18288" rIns="18288" tIns="18288" bIns="18288">
+            <a:spAutoFit/>
+          </a:bodyPr>
+          <a:lstStyle/>
+          <a:p>
+            <a:pPr algn="l">
+              <a:spcAft>
+                <a:spcPts val="600"/>
+              </a:spcAft>
+            </a:pPr>
+            <a:r>
+              <a:rPr sz="2600" b="1">
+                <a:solidFill>
+                  <a:srgbClr val="EEEFF1"/>
+                </a:solidFill>
+                <a:latin typeface="Segoe UI"/>
+              </a:rPr>
+              <a:t>Ограничения названы на карте и в отчёте; развитие — синхронные пары и больше рейсов</a:t>
+            </a:r>
+          </a:p>
+        </p:txBody>
+      </p:sp>
+      <p:sp>
+        <p:nvSpPr>
+          <p:cNvPr id="4" name="TextBox 3"/>
+          <p:cNvSpPr txBox="1"/>
+          <p:nvPr/>
+        </p:nvSpPr>
+        <p:spPr>
+          <a:xfrm>
+            <a:off x="457200" y="1600200"/>
+            <a:ext cx="11247120" cy="4572000"/>
+          </a:xfrm>
+          <a:prstGeom prst="rect">
+            <a:avLst/>
+          </a:prstGeom>
+          <a:noFill/>
+        </p:spPr>
+        <p:txBody>
+          <a:bodyPr wrap="square" anchor="t" lIns="18288" rIns="18288" tIns="18288" bIns="18288">
+            <a:spAutoFit/>
+          </a:bodyPr>
+          <a:lstStyle/>
+          <a:p>
+            <a:pPr algn="l">
+              <a:spcAft>
+                <a:spcPts val="1000"/>
+              </a:spcAft>
+            </a:pPr>
+            <a:r>
+              <a:rPr sz="1600" b="0">
+                <a:solidFill>
+                  <a:srgbClr val="EEEFF1"/>
+                </a:solidFill>
+                <a:latin typeface="Segoe UI"/>
+              </a:rPr>
+              <a:t>• Перенос «снимок → шт./км²» не доказан: синхронных пар нет, для пластика снимков нет</a:t>
+            </a:r>
+          </a:p>
+          <a:p>
+            <a:pPr algn="l">
+              <a:spcAft>
+                <a:spcPts val="1000"/>
+              </a:spcAft>
+            </a:pPr>
+            <a:r>
+              <a:rPr sz="1600" b="0">
+                <a:solidFill>
+                  <a:srgbClr val="EEEFF1"/>
+                </a:solidFill>
+                <a:latin typeface="Segoe UI"/>
+              </a:rPr>
+              <a:t>• Мало независимых данных: S2 — один рейс, 26 дней; интервалы недопокрывают (84 % и 74 % вместо 90 %)</a:t>
+            </a:r>
+          </a:p>
+          <a:p>
+            <a:pPr algn="l">
+              <a:spcAft>
+                <a:spcPts val="1000"/>
+              </a:spcAft>
+            </a:pPr>
+            <a:r>
+              <a:rPr sz="1600" b="0">
+                <a:solidFill>
+                  <a:srgbClr val="EEEFF1"/>
+                </a:solidFill>
+                <a:latin typeface="Segoe UI"/>
+              </a:rPr>
+              <a:t>• Test не абсолютно нетронутый: ранняя разведка бейзлайнов видела все события профиля (записано до открытия)</a:t>
+            </a:r>
+          </a:p>
+          <a:p>
+            <a:pPr algn="l">
+              <a:spcAft>
+                <a:spcPts val="1000"/>
+              </a:spcAft>
+            </a:pPr>
+            <a:r>
+              <a:rPr sz="1600" b="0">
+                <a:solidFill>
+                  <a:srgbClr val="EEEFF1"/>
+                </a:solidFill>
+                <a:latin typeface="Segoe UI"/>
+              </a:rPr>
+              <a:t>• Детектор на L2A пар по разметке не измерен; порог блика не калибровался на этих сценах</a:t>
+            </a:r>
+          </a:p>
+          <a:p>
+            <a:pPr algn="l">
+              <a:spcAft>
+                <a:spcPts val="1000"/>
+              </a:spcAft>
+            </a:pPr>
+            <a:r>
+              <a:rPr sz="1600" b="0">
+                <a:solidFill>
+                  <a:srgbClr val="EEEFF1"/>
+                </a:solidFill>
+                <a:latin typeface="Segoe UI"/>
+              </a:rPr>
+              <a:t>• Дальше: трансекты под пролёт с записанным временем (≈ 33 пар), больше рейсов и сезонов, ERA5 для дрейфа, разметка скоплений на L2A</a:t>
+            </a:r>
+          </a:p>
+        </p:txBody>
+      </p:sp>
+      <p:sp>
+        <p:nvSpPr>
+          <p:cNvPr id="5" name="TextBox 4"/>
+          <p:cNvSpPr txBox="1"/>
+          <p:nvPr/>
+        </p:nvSpPr>
+        <p:spPr>
+          <a:xfrm>
+            <a:off x="457200" y="6355080"/>
+            <a:ext cx="10515600" cy="320040"/>
+          </a:xfrm>
+          <a:prstGeom prst="rect">
+            <a:avLst/>
+          </a:prstGeom>
+          <a:noFill/>
+        </p:spPr>
+        <p:txBody>
+          <a:bodyPr wrap="square" anchor="t" lIns="18288" rIns="18288" tIns="18288" bIns="18288">
+            <a:spAutoFit/>
+          </a:bodyPr>
+          <a:lstStyle/>
+          <a:p>
+            <a:pPr algn="l">
+              <a:spcAft>
+                <a:spcPts val="600"/>
+              </a:spcAft>
+            </a:pPr>
+            <a:r>
+              <a:rPr sz="1000" b="0">
+                <a:solidFill>
+                  <a:srgbClr val="9AA1AC"/>
+                </a:solidFill>
+                <a:latin typeface="Segoe UI"/>
+              </a:rPr>
+              <a:t>Источник: reports/report.md §8–9; README.md «Ограничения»</a:t>
+            </a:r>
+          </a:p>
+        </p:txBody>
+      </p:sp>
+      <p:sp>
+        <p:nvSpPr>
+          <p:cNvPr id="6" name="TextBox 5"/>
+          <p:cNvSpPr txBox="1"/>
+          <p:nvPr/>
+        </p:nvSpPr>
+        <p:spPr>
+          <a:xfrm>
+            <a:off x="11155680" y="6355080"/>
+            <a:ext cx="640080" cy="320040"/>
+          </a:xfrm>
+          <a:prstGeom prst="rect">
+            <a:avLst/>
+          </a:prstGeom>
+          <a:noFill/>
+        </p:spPr>
+        <p:txBody>
+          <a:bodyPr wrap="square" anchor="t" lIns="18288" rIns="18288" tIns="18288" bIns="18288">
+            <a:spAutoFit/>
+          </a:bodyPr>
+          <a:lstStyle/>
+          <a:p>
+            <a:pPr algn="r">
+              <a:spcAft>
+                <a:spcPts val="600"/>
+              </a:spcAft>
+            </a:pPr>
+            <a:r>
+              <a:rPr sz="1000" b="0">
+                <a:solidFill>
+                  <a:srgbClr val="9AA1AC"/>
+                </a:solidFill>
+                <a:latin typeface="Segoe UI"/>
+              </a:rPr>
+              <a:t>5:38</a:t>
+            </a:r>
+          </a:p>
+        </p:txBody>
+      </p:sp>
+    </p:spTree>
+  </p:cSld>
+  <p:clrMapOvr>
+    <a:masterClrMapping/>
+  </p:clrMapOvr>
+</p:sld>
+</file>
+
+<file path=ppt/slides/slide19.xml><?xml version="1.0" encoding="utf-8"?>
+<p:sld xmlns:a="http://schemas.openxmlformats.org/drawingml/2006/main" xmlns:p="http://schemas.openxmlformats.org/presentationml/2006/main" xmlns:r="http://schemas.openxmlformats.org/officeDocument/2006/relationships">
+  <p:cSld>
+    <p:bg>
+      <p:bgPr>
+        <a:solidFill>
+          <a:srgbClr val="101216"/>
+        </a:solidFill>
+        <a:effectLst/>
+      </p:bgPr>
+    </p:bg>
+    <p:spTree>
+      <p:nvGrpSpPr>
+        <p:cNvPr id="1" name=""/>
+        <p:cNvGrpSpPr/>
+        <p:nvPr/>
+      </p:nvGrpSpPr>
+      <p:grpSpPr/>
+      <p:sp>
+        <p:nvSpPr>
+          <p:cNvPr id="2" name="TextBox 1"/>
+          <p:cNvSpPr txBox="1"/>
+          <p:nvPr/>
+        </p:nvSpPr>
+        <p:spPr>
+          <a:xfrm>
+            <a:off x="457200" y="201168"/>
+            <a:ext cx="8229600" cy="274320"/>
+          </a:xfrm>
+          <a:prstGeom prst="rect">
+            <a:avLst/>
+          </a:prstGeom>
+          <a:noFill/>
+        </p:spPr>
+        <p:txBody>
+          <a:bodyPr wrap="square" anchor="t" lIns="18288" rIns="18288" tIns="18288" bIns="18288">
+            <a:spAutoFit/>
+          </a:bodyPr>
+          <a:lstStyle/>
+          <a:p>
+            <a:pPr algn="l">
+              <a:spcAft>
+                <a:spcPts val="600"/>
+              </a:spcAft>
+            </a:pPr>
+            <a:r>
+              <a:rPr sz="1200" b="1">
+                <a:solidFill>
+                  <a:srgbClr val="D9912E"/>
+                </a:solidFill>
+                <a:latin typeface="Segoe UI"/>
+              </a:rPr>
+              <a:t>19 · Воспроизводимость</a:t>
+            </a:r>
+          </a:p>
+        </p:txBody>
+      </p:sp>
+      <p:sp>
+        <p:nvSpPr>
+          <p:cNvPr id="3" name="TextBox 2"/>
+          <p:cNvSpPr txBox="1"/>
+          <p:nvPr/>
+        </p:nvSpPr>
+        <p:spPr>
+          <a:xfrm>
+            <a:off x="457200" y="457200"/>
+            <a:ext cx="11247120" cy="960120"/>
+          </a:xfrm>
+          <a:prstGeom prst="rect">
+            <a:avLst/>
+          </a:prstGeom>
+          <a:noFill/>
+        </p:spPr>
+        <p:txBody>
+          <a:bodyPr wrap="square" anchor="t" lIns="18288" rIns="18288" tIns="18288" bIns="18288">
+            <a:spAutoFit/>
+          </a:bodyPr>
+          <a:lstStyle/>
+          <a:p>
+            <a:pPr algn="l">
+              <a:spcAft>
+                <a:spcPts val="600"/>
+              </a:spcAft>
+            </a:pPr>
+            <a:r>
+              <a:rPr sz="2600" b="1">
+                <a:solidFill>
+                  <a:srgbClr val="EEEFF1"/>
+                </a:solidFill>
+                <a:latin typeface="Segoe UI"/>
+              </a:rPr>
+              <a:t>Одна команда, 6.9 с без сети; чистый клон до карты — 7,5 мин, числа совпали</a:t>
+            </a:r>
+          </a:p>
+        </p:txBody>
+      </p:sp>
+      <p:sp>
+        <p:nvSpPr>
+          <p:cNvPr id="4" name="TextBox 3"/>
+          <p:cNvSpPr txBox="1"/>
+          <p:nvPr/>
+        </p:nvSpPr>
+        <p:spPr>
+          <a:xfrm>
+            <a:off x="457200" y="1600200"/>
+            <a:ext cx="5577840" cy="4572000"/>
+          </a:xfrm>
+          <a:prstGeom prst="rect">
+            <a:avLst/>
+          </a:prstGeom>
+          <a:noFill/>
+        </p:spPr>
+        <p:txBody>
+          <a:bodyPr wrap="square" anchor="t" lIns="18288" rIns="18288" tIns="18288" bIns="18288">
+            <a:spAutoFit/>
+          </a:bodyPr>
+          <a:lstStyle/>
+          <a:p>
+            <a:pPr algn="l">
+              <a:spcAft>
+                <a:spcPts val="1000"/>
+              </a:spcAft>
+            </a:pPr>
+            <a:r>
+              <a:rPr sz="1600" b="0">
+                <a:solidFill>
+                  <a:srgbClr val="EEEFF1"/>
+                </a:solidFill>
+                <a:latin typeface="Segoe UI"/>
+              </a:rPr>
+              <a:t>• Одна команда: run.ps1 -Case all -Offline (CSV → отбор → пары → маски → детектор → метрики → выгрузка)</a:t>
+            </a:r>
+          </a:p>
+          <a:p>
+            <a:pPr algn="l">
+              <a:spcAft>
+                <a:spcPts val="1000"/>
+              </a:spcAft>
+            </a:pPr>
+            <a:r>
+              <a:rPr sz="1600" b="0">
+                <a:solidFill>
+                  <a:srgbClr val="EEEFF1"/>
+                </a:solidFill>
+                <a:latin typeface="Segoe UI"/>
+              </a:rPr>
+              <a:t>• 24 выходные таблицы с одинаковыми sha256 при повторе; отпечаток fccf808a8817d7c4…</a:t>
+            </a:r>
+          </a:p>
+          <a:p>
+            <a:pPr algn="l">
+              <a:spcAft>
+                <a:spcPts val="1000"/>
+              </a:spcAft>
+            </a:pPr>
+            <a:r>
+              <a:rPr sz="1600" b="0">
+                <a:solidFill>
+                  <a:srgbClr val="EEEFF1"/>
+                </a:solidFill>
+                <a:latin typeface="Segoe UI"/>
+              </a:rPr>
+              <a:t>• Чистый клон: клон 76 с, установка и маршрут 3 мин 17 с, карта 8,1 с</a:t>
+            </a:r>
+          </a:p>
+          <a:p>
+            <a:pPr algn="l">
+              <a:spcAft>
+                <a:spcPts val="1000"/>
+              </a:spcAft>
+            </a:pPr>
+            <a:r>
+              <a:rPr sz="1600" b="0">
+                <a:solidFill>
+                  <a:srgbClr val="EEEFF1"/>
+                </a:solidFill>
+                <a:latin typeface="Segoe UI"/>
+              </a:rPr>
+              <a:t>• Тесты кейса (26.09.2026 00:18): 232 passed, 2 skipped, 0 failed; числа документов сверяет тест</a:t>
+            </a:r>
+          </a:p>
+        </p:txBody>
+      </p:sp>
+      <p:sp>
+        <p:nvSpPr>
+          <p:cNvPr id="5" name="Rectangle 4"/>
+          <p:cNvSpPr/>
+          <p:nvPr/>
+        </p:nvSpPr>
+        <p:spPr>
+          <a:xfrm>
+            <a:off x="6400800" y="1691640"/>
+            <a:ext cx="5349240" cy="1554480"/>
+          </a:xfrm>
+          <a:prstGeom prst="rect">
+            <a:avLst/>
+          </a:prstGeom>
+          <a:solidFill>
+            <a:srgbClr val="1B1E24"/>
+          </a:solidFill>
+          <a:ln>
+            <a:noFill/>
+          </a:ln>
+          <a:effectLst/>
+        </p:spPr>
+        <p:style>
+          <a:lnRef idx="1">
+            <a:schemeClr val="accent1"/>
+          </a:lnRef>
+          <a:fillRef idx="3">
+            <a:schemeClr val="accent1"/>
+          </a:fillRef>
+          <a:effectRef idx="2">
+            <a:schemeClr val="accent1"/>
+          </a:effectRef>
+          <a:fontRef idx="minor">
+            <a:schemeClr val="lt1"/>
+          </a:fontRef>
+        </p:style>
+        <p:txBody>
+          <a:bodyPr rtlCol="0" anchor="ctr"/>
+          <a:lstStyle/>
+          <a:p>
+            <a:pPr algn="ctr"/>
+          </a:p>
+        </p:txBody>
+      </p:sp>
+      <p:sp>
+        <p:nvSpPr>
+          <p:cNvPr id="6" name="TextBox 5"/>
+          <p:cNvSpPr txBox="1"/>
+          <p:nvPr/>
+        </p:nvSpPr>
+        <p:spPr>
+          <a:xfrm>
+            <a:off x="6675120" y="1783080"/>
+            <a:ext cx="4800600" cy="822960"/>
+          </a:xfrm>
+          <a:prstGeom prst="rect">
+            <a:avLst/>
+          </a:prstGeom>
+          <a:noFill/>
+        </p:spPr>
+        <p:txBody>
+          <a:bodyPr wrap="square" anchor="t" lIns="18288" rIns="18288" tIns="18288" bIns="18288">
+            <a:spAutoFit/>
+          </a:bodyPr>
+          <a:lstStyle/>
+          <a:p>
+            <a:pPr algn="l">
+              <a:spcAft>
+                <a:spcPts val="600"/>
+              </a:spcAft>
+            </a:pPr>
+            <a:r>
+              <a:rPr sz="4800" b="1">
+                <a:solidFill>
+                  <a:srgbClr val="D9912E"/>
+                </a:solidFill>
+                <a:latin typeface="Segoe UI"/>
+              </a:rPr>
+              <a:t>7,5 мин</a:t>
+            </a:r>
+          </a:p>
+        </p:txBody>
+      </p:sp>
+      <p:sp>
+        <p:nvSpPr>
+          <p:cNvPr id="7" name="TextBox 6"/>
+          <p:cNvSpPr txBox="1"/>
+          <p:nvPr/>
+        </p:nvSpPr>
+        <p:spPr>
+          <a:xfrm>
+            <a:off x="6675120" y="2606040"/>
+            <a:ext cx="4800600" cy="594360"/>
+          </a:xfrm>
+          <a:prstGeom prst="rect">
+            <a:avLst/>
+          </a:prstGeom>
+          <a:noFill/>
+        </p:spPr>
+        <p:txBody>
+          <a:bodyPr wrap="square" anchor="t" lIns="18288" rIns="18288" tIns="18288" bIns="18288">
+            <a:spAutoFit/>
+          </a:bodyPr>
+          <a:lstStyle/>
+          <a:p>
+            <a:pPr algn="l">
+              <a:spcAft>
+                <a:spcPts val="600"/>
+              </a:spcAft>
+            </a:pPr>
+            <a:r>
+              <a:rPr sz="1300" b="0">
+                <a:solidFill>
+                  <a:srgbClr val="EEEFF1"/>
+                </a:solidFill>
+                <a:latin typeface="Segoe UI"/>
+              </a:rPr>
+              <a:t>от git clone до карты на экране, CPU</a:t>
+            </a:r>
+          </a:p>
+        </p:txBody>
+      </p:sp>
+      <p:sp>
+        <p:nvSpPr>
+          <p:cNvPr id="8" name="TextBox 7"/>
+          <p:cNvSpPr txBox="1"/>
+          <p:nvPr/>
+        </p:nvSpPr>
+        <p:spPr>
+          <a:xfrm>
+            <a:off x="457200" y="6355080"/>
+            <a:ext cx="10515600" cy="320040"/>
+          </a:xfrm>
+          <a:prstGeom prst="rect">
+            <a:avLst/>
+          </a:prstGeom>
+          <a:noFill/>
+        </p:spPr>
+        <p:txBody>
+          <a:bodyPr wrap="square" anchor="t" lIns="18288" rIns="18288" tIns="18288" bIns="18288">
+            <a:spAutoFit/>
+          </a:bodyPr>
+          <a:lstStyle/>
+          <a:p>
+            <a:pPr algn="l">
+              <a:spcAft>
+                <a:spcPts val="600"/>
+              </a:spcAft>
+            </a:pPr>
+            <a:r>
+              <a:rPr sz="1000" b="0">
+                <a:solidFill>
+                  <a:srgbClr val="9AA1AC"/>
+                </a:solidFill>
+                <a:latin typeface="Segoe UI"/>
+              </a:rPr>
+              <a:t>Источник: reports/selfcheck/clean_clone_1941.md; reports/case_run/run_summary.json</a:t>
+            </a:r>
+          </a:p>
+        </p:txBody>
+      </p:sp>
+      <p:sp>
+        <p:nvSpPr>
+          <p:cNvPr id="9" name="TextBox 8"/>
+          <p:cNvSpPr txBox="1"/>
+          <p:nvPr/>
+        </p:nvSpPr>
+        <p:spPr>
+          <a:xfrm>
+            <a:off x="11155680" y="6355080"/>
+            <a:ext cx="640080" cy="320040"/>
+          </a:xfrm>
+          <a:prstGeom prst="rect">
+            <a:avLst/>
+          </a:prstGeom>
+          <a:noFill/>
+        </p:spPr>
+        <p:txBody>
+          <a:bodyPr wrap="square" anchor="t" lIns="18288" rIns="18288" tIns="18288" bIns="18288">
+            <a:spAutoFit/>
+          </a:bodyPr>
+          <a:lstStyle/>
+          <a:p>
+            <a:pPr algn="r">
+              <a:spcAft>
+                <a:spcPts val="600"/>
+              </a:spcAft>
+            </a:pPr>
+            <a:r>
+              <a:rPr sz="1000" b="0">
+                <a:solidFill>
+                  <a:srgbClr val="9AA1AC"/>
+                </a:solidFill>
+                <a:latin typeface="Segoe UI"/>
+              </a:rPr>
+              <a:t>5:50</a:t>
             </a:r>
           </a:p>
         </p:txBody>
@@ -6369,7 +9565,7 @@
                 </a:solidFill>
                 <a:latin typeface="Segoe UI"/>
               </a:rPr>
-              <a:t>0:15</a:t>
+              <a:t>0:19</a:t>
             </a:r>
           </a:p>
         </p:txBody>
@@ -6776,7 +9972,7 @@
                 </a:solidFill>
                 <a:latin typeface="Segoe UI"/>
               </a:rPr>
-              <a:t>0:30</a:t>
+              <a:t>0:33</a:t>
             </a:r>
           </a:p>
         </p:txBody>
@@ -7431,7 +10627,7 @@
                 </a:solidFill>
                 <a:latin typeface="Segoe UI"/>
               </a:rPr>
-              <a:t>0:47</a:t>
+              <a:t>0:52</a:t>
             </a:r>
           </a:p>
         </p:txBody>
@@ -8227,7 +11423,7 @@
                 </a:solidFill>
                 <a:latin typeface="Segoe UI"/>
               </a:rPr>
-              <a:t>1:02</a:t>
+              <a:t>1:04</a:t>
             </a:r>
           </a:p>
         </p:txBody>
@@ -8292,7 +11488,7 @@
                 </a:solidFill>
                 <a:latin typeface="Segoe UI"/>
               </a:rPr>
-              <a:t>06 · Детектор</a:t>
+              <a:t>06 · Как мы искали данные</a:t>
             </a:r>
           </a:p>
         </p:txBody>
@@ -8331,7 +11527,7 @@
                 </a:solidFill>
                 <a:latin typeface="Segoe UI"/>
               </a:rPr>
-              <a:t>Детектор: F1 0.871 на test MARIDA; на снимках пар — 5 объектов, в полосах 0</a:t>
+              <a:t>Пайплайн поиска данных: 318 событий CSV → пар уровня A 0; в найденных нами данных ADIS — 66</a:t>
             </a:r>
           </a:p>
         </p:txBody>
@@ -8370,7 +11566,7 @@
                 </a:solidFill>
                 <a:latin typeface="Segoe UI"/>
               </a:rPr>
-              <a:t>• LightGBM, порог 0.63 с val; test MARIDA посчитан один раз: ΔF1 к RF 0.100 [0.049; 0.150]</a:t>
+              <a:t>• Уровни: A — снимок и полевое число связаны по времени, месту, площади и категории; B — подтверждённая разметка скопления; C — кандидат; D — отвергнутый или отрицательный пример</a:t>
             </a:r>
           </a:p>
           <a:p>
@@ -8386,7 +11582,7 @@
                 </a:solidFill>
                 <a:latin typeface="Segoe UI"/>
               </a:rPr>
-              <a:t>• MARIDA test: на саргассуме и мутной воде ложных 0 (FDI × NDVI помечает 46 % саргассума); ошибки — суда 27 и органика 21</a:t>
+              <a:t>• Детектор учим только на B + проверенных D; «снимок → шт./км²» — только на A; C меткой не становится</a:t>
             </a:r>
           </a:p>
           <a:p>
@@ -8402,7 +11598,7 @@
                 </a:solidFill>
                 <a:latin typeface="Segoe UI"/>
               </a:rPr>
-              <a:t>• Снимки пар (L2A): гармонизация каналов выключена по MARIDA val — F1 0.923 без сдвига против 0.897 со сдвигом, Δ −0.025 [−0.072; −0.013]</a:t>
+              <a:t>• Пластик: снимка нет у 62 из 63 событий Саргассова моря, у S1 датчики не видят предметы; Северное море — облака 21, маршрут вне снимка 29; Чёрное море — C 8 (время и площадь трансект не опубликованы)</a:t>
             </a:r>
           </a:p>
           <a:p>
@@ -8418,37 +11614,45 @@
                 </a:solidFill>
                 <a:latin typeface="Segoe UI"/>
               </a:rPr>
-              <a:t>• Сейчас: 5 объектов на 22 сценах, в полосах 0; вне полосы HE460 т.03 — 1 судно (верное срабатывание на сложном фоне) и 4 одиночных пикселя</a:t>
-            </a:r>
-          </a:p>
-          <a:p>
-            <a:pPr algn="l">
-              <a:spcAft>
-                <a:spcPts val="1000"/>
-              </a:spcAft>
-            </a:pPr>
-            <a:r>
-              <a:rPr sz="1500" b="0">
-                <a:solidFill>
-                  <a:srgbClr val="EEEFF1"/>
-                </a:solidFill>
-                <a:latin typeface="Segoe UI"/>
-              </a:rPr>
-              <a:t>• Прежний режим (с гармонизацией) — основание отказа: 975 объектов, вероятное скопление по виду у 1.7 % [0.0; 5.0]; размечал ИИ-агент, один аннотатор, κ 0.77 — его же слепой повтор</a:t>
-            </a:r>
-          </a:p>
-        </p:txBody>
-      </p:sp>
-      <p:sp>
-        <p:nvSpPr>
-          <p:cNvPr id="5" name="TextBox 4"/>
-          <p:cNvSpPr txBox="1"/>
-          <p:nvPr/>
-        </p:nvSpPr>
-        <p:spPr>
-          <a:xfrm>
-            <a:off x="6400800" y="1691640"/>
-            <a:ext cx="5349240" cy="365760"/>
+              <a:t>• Стоп-правило: нет A за пилот — поиск по дрейфу не расширяем. Нашли ADIS (The Ocean Cleanup): 177 отрезков → A 66, C 3, D 108</a:t>
+            </a:r>
+          </a:p>
+        </p:txBody>
+      </p:sp>
+      <p:pic>
+        <p:nvPicPr>
+          <p:cNvPr id="5" name="Picture 4" descr="05_funnel.jpg"/>
+          <p:cNvPicPr>
+            <a:picLocks noChangeAspect="1"/>
+          </p:cNvPicPr>
+          <p:nvPr/>
+        </p:nvPicPr>
+        <p:blipFill>
+          <a:blip r:embed="rId2"/>
+          <a:stretch>
+            <a:fillRect/>
+          </a:stretch>
+        </p:blipFill>
+        <p:spPr>
+          <a:xfrm>
+            <a:off x="6400800" y="1645920"/>
+            <a:ext cx="5349240" cy="2808351"/>
+          </a:xfrm>
+          <a:prstGeom prst="rect">
+            <a:avLst/>
+          </a:prstGeom>
+        </p:spPr>
+      </p:pic>
+      <p:sp>
+        <p:nvSpPr>
+          <p:cNvPr id="6" name="TextBox 5"/>
+          <p:cNvSpPr txBox="1"/>
+          <p:nvPr/>
+        </p:nvSpPr>
+        <p:spPr>
+          <a:xfrm>
+            <a:off x="6400800" y="4499991"/>
+            <a:ext cx="5349240" cy="548640"/>
           </a:xfrm>
           <a:prstGeom prst="rect">
             <a:avLst/>
@@ -8467,386 +11671,20 @@
               </a:spcAft>
             </a:pPr>
             <a:r>
-              <a:rPr sz="1400" b="0">
+              <a:rPr sz="1200" b="0">
                 <a:solidFill>
                   <a:srgbClr val="9AA1AC"/>
                 </a:solidFill>
                 <a:latin typeface="Segoe UI"/>
               </a:rPr>
-              <a:t>F1 Marine Debris, test MARIDA (15 сцен)</a:t>
-            </a:r>
-          </a:p>
-        </p:txBody>
-      </p:sp>
-      <p:sp>
-        <p:nvSpPr>
-          <p:cNvPr id="6" name="TextBox 5"/>
-          <p:cNvSpPr txBox="1"/>
-          <p:nvPr/>
-        </p:nvSpPr>
-        <p:spPr>
-          <a:xfrm>
-            <a:off x="6400800" y="2148840"/>
-            <a:ext cx="2155240" cy="384048"/>
-          </a:xfrm>
-          <a:prstGeom prst="rect">
-            <a:avLst/>
-          </a:prstGeom>
-          <a:noFill/>
-        </p:spPr>
-        <p:txBody>
-          <a:bodyPr wrap="square" anchor="ctr" lIns="18288" rIns="18288" tIns="18288" bIns="18288">
-            <a:spAutoFit/>
-          </a:bodyPr>
-          <a:lstStyle/>
-          <a:p>
-            <a:pPr algn="l">
-              <a:spcAft>
-                <a:spcPts val="600"/>
-              </a:spcAft>
-            </a:pPr>
-            <a:r>
-              <a:rPr sz="1300" b="0">
-                <a:solidFill>
-                  <a:srgbClr val="EEEFF1"/>
-                </a:solidFill>
-                <a:latin typeface="Segoe UI"/>
-              </a:rPr>
-              <a:t>LightGBM (основной)</a:t>
-            </a:r>
-          </a:p>
-        </p:txBody>
-      </p:sp>
-      <p:sp>
-        <p:nvSpPr>
-          <p:cNvPr id="7" name="Rectangle 6"/>
-          <p:cNvSpPr/>
-          <p:nvPr/>
-        </p:nvSpPr>
-        <p:spPr>
-          <a:xfrm>
-            <a:off x="8647480" y="2212848"/>
-            <a:ext cx="1985530" cy="274320"/>
-          </a:xfrm>
-          <a:prstGeom prst="rect">
-            <a:avLst/>
-          </a:prstGeom>
-          <a:solidFill>
-            <a:srgbClr val="D9912E"/>
-          </a:solidFill>
-          <a:ln>
-            <a:noFill/>
-          </a:ln>
-          <a:effectLst/>
-        </p:spPr>
-        <p:style>
-          <a:lnRef idx="1">
-            <a:schemeClr val="accent1"/>
-          </a:lnRef>
-          <a:fillRef idx="3">
-            <a:schemeClr val="accent1"/>
-          </a:fillRef>
-          <a:effectRef idx="2">
-            <a:schemeClr val="accent1"/>
-          </a:effectRef>
-          <a:fontRef idx="minor">
-            <a:schemeClr val="lt1"/>
-          </a:fontRef>
-        </p:style>
-        <p:txBody>
-          <a:bodyPr rtlCol="0" anchor="ctr"/>
-          <a:lstStyle/>
-          <a:p>
-            <a:pPr algn="ctr"/>
-          </a:p>
-        </p:txBody>
-      </p:sp>
-      <p:sp>
-        <p:nvSpPr>
-          <p:cNvPr id="8" name="TextBox 7"/>
-          <p:cNvSpPr txBox="1"/>
-          <p:nvPr/>
-        </p:nvSpPr>
-        <p:spPr>
-          <a:xfrm>
-            <a:off x="10706163" y="2148840"/>
-            <a:ext cx="822960" cy="384048"/>
-          </a:xfrm>
-          <a:prstGeom prst="rect">
-            <a:avLst/>
-          </a:prstGeom>
-          <a:noFill/>
-        </p:spPr>
-        <p:txBody>
-          <a:bodyPr wrap="square" anchor="ctr" lIns="18288" rIns="18288" tIns="18288" bIns="18288">
-            <a:spAutoFit/>
-          </a:bodyPr>
-          <a:lstStyle/>
-          <a:p>
-            <a:pPr algn="l">
-              <a:spcAft>
-                <a:spcPts val="600"/>
-              </a:spcAft>
-            </a:pPr>
-            <a:r>
-              <a:rPr sz="1400" b="1">
-                <a:solidFill>
-                  <a:srgbClr val="EEEFF1"/>
-                </a:solidFill>
-                <a:latin typeface="Segoe UI"/>
-              </a:rPr>
-              <a:t>0.871</a:t>
-            </a:r>
-          </a:p>
-        </p:txBody>
-      </p:sp>
-      <p:sp>
-        <p:nvSpPr>
-          <p:cNvPr id="9" name="TextBox 8"/>
-          <p:cNvSpPr txBox="1"/>
-          <p:nvPr/>
-        </p:nvSpPr>
-        <p:spPr>
-          <a:xfrm>
-            <a:off x="6400800" y="2651760"/>
-            <a:ext cx="2155240" cy="384048"/>
-          </a:xfrm>
-          <a:prstGeom prst="rect">
-            <a:avLst/>
-          </a:prstGeom>
-          <a:noFill/>
-        </p:spPr>
-        <p:txBody>
-          <a:bodyPr wrap="square" anchor="ctr" lIns="18288" rIns="18288" tIns="18288" bIns="18288">
-            <a:spAutoFit/>
-          </a:bodyPr>
-          <a:lstStyle/>
-          <a:p>
-            <a:pPr algn="l">
-              <a:spcAft>
-                <a:spcPts val="600"/>
-              </a:spcAft>
-            </a:pPr>
-            <a:r>
-              <a:rPr sz="1300" b="0">
-                <a:solidFill>
-                  <a:srgbClr val="EEEFF1"/>
-                </a:solidFill>
-                <a:latin typeface="Segoe UI"/>
-              </a:rPr>
-              <a:t>RandomForest, протокол MARIDA</a:t>
-            </a:r>
-          </a:p>
-        </p:txBody>
-      </p:sp>
-      <p:sp>
-        <p:nvSpPr>
-          <p:cNvPr id="10" name="Rectangle 9"/>
-          <p:cNvSpPr/>
-          <p:nvPr/>
-        </p:nvSpPr>
-        <p:spPr>
-          <a:xfrm>
-            <a:off x="8647480" y="2715768"/>
-            <a:ext cx="1757570" cy="274320"/>
-          </a:xfrm>
-          <a:prstGeom prst="rect">
-            <a:avLst/>
-          </a:prstGeom>
-          <a:solidFill>
-            <a:srgbClr val="5B6370"/>
-          </a:solidFill>
-          <a:ln>
-            <a:noFill/>
-          </a:ln>
-          <a:effectLst/>
-        </p:spPr>
-        <p:style>
-          <a:lnRef idx="1">
-            <a:schemeClr val="accent1"/>
-          </a:lnRef>
-          <a:fillRef idx="3">
-            <a:schemeClr val="accent1"/>
-          </a:fillRef>
-          <a:effectRef idx="2">
-            <a:schemeClr val="accent1"/>
-          </a:effectRef>
-          <a:fontRef idx="minor">
-            <a:schemeClr val="lt1"/>
-          </a:fontRef>
-        </p:style>
-        <p:txBody>
-          <a:bodyPr rtlCol="0" anchor="ctr"/>
-          <a:lstStyle/>
-          <a:p>
-            <a:pPr algn="ctr"/>
-          </a:p>
-        </p:txBody>
-      </p:sp>
-      <p:sp>
-        <p:nvSpPr>
-          <p:cNvPr id="11" name="TextBox 10"/>
-          <p:cNvSpPr txBox="1"/>
-          <p:nvPr/>
-        </p:nvSpPr>
-        <p:spPr>
-          <a:xfrm>
-            <a:off x="10478203" y="2651760"/>
-            <a:ext cx="822960" cy="384048"/>
-          </a:xfrm>
-          <a:prstGeom prst="rect">
-            <a:avLst/>
-          </a:prstGeom>
-          <a:noFill/>
-        </p:spPr>
-        <p:txBody>
-          <a:bodyPr wrap="square" anchor="ctr" lIns="18288" rIns="18288" tIns="18288" bIns="18288">
-            <a:spAutoFit/>
-          </a:bodyPr>
-          <a:lstStyle/>
-          <a:p>
-            <a:pPr algn="l">
-              <a:spcAft>
-                <a:spcPts val="600"/>
-              </a:spcAft>
-            </a:pPr>
-            <a:r>
-              <a:rPr sz="1400" b="1">
-                <a:solidFill>
-                  <a:srgbClr val="EEEFF1"/>
-                </a:solidFill>
-                <a:latin typeface="Segoe UI"/>
-              </a:rPr>
-              <a:t>0.771</a:t>
-            </a:r>
-          </a:p>
-        </p:txBody>
-      </p:sp>
-      <p:sp>
-        <p:nvSpPr>
-          <p:cNvPr id="12" name="TextBox 11"/>
-          <p:cNvSpPr txBox="1"/>
-          <p:nvPr/>
-        </p:nvSpPr>
-        <p:spPr>
-          <a:xfrm>
-            <a:off x="6400800" y="3154680"/>
-            <a:ext cx="2155240" cy="384048"/>
-          </a:xfrm>
-          <a:prstGeom prst="rect">
-            <a:avLst/>
-          </a:prstGeom>
-          <a:noFill/>
-        </p:spPr>
-        <p:txBody>
-          <a:bodyPr wrap="square" anchor="ctr" lIns="18288" rIns="18288" tIns="18288" bIns="18288">
-            <a:spAutoFit/>
-          </a:bodyPr>
-          <a:lstStyle/>
-          <a:p>
-            <a:pPr algn="l">
-              <a:spcAft>
-                <a:spcPts val="600"/>
-              </a:spcAft>
-            </a:pPr>
-            <a:r>
-              <a:rPr sz="1300" b="0">
-                <a:solidFill>
-                  <a:srgbClr val="EEEFF1"/>
-                </a:solidFill>
-                <a:latin typeface="Segoe UI"/>
-              </a:rPr>
-              <a:t>окно FDI × NDVI</a:t>
-            </a:r>
-          </a:p>
-        </p:txBody>
-      </p:sp>
-      <p:sp>
-        <p:nvSpPr>
-          <p:cNvPr id="13" name="Rectangle 12"/>
-          <p:cNvSpPr/>
-          <p:nvPr/>
-        </p:nvSpPr>
-        <p:spPr>
-          <a:xfrm>
-            <a:off x="8647480" y="3218688"/>
-            <a:ext cx="95743" cy="274320"/>
-          </a:xfrm>
-          <a:prstGeom prst="rect">
-            <a:avLst/>
-          </a:prstGeom>
-          <a:solidFill>
-            <a:srgbClr val="5B6370"/>
-          </a:solidFill>
-          <a:ln>
-            <a:noFill/>
-          </a:ln>
-          <a:effectLst/>
-        </p:spPr>
-        <p:style>
-          <a:lnRef idx="1">
-            <a:schemeClr val="accent1"/>
-          </a:lnRef>
-          <a:fillRef idx="3">
-            <a:schemeClr val="accent1"/>
-          </a:fillRef>
-          <a:effectRef idx="2">
-            <a:schemeClr val="accent1"/>
-          </a:effectRef>
-          <a:fontRef idx="minor">
-            <a:schemeClr val="lt1"/>
-          </a:fontRef>
-        </p:style>
-        <p:txBody>
-          <a:bodyPr rtlCol="0" anchor="ctr"/>
-          <a:lstStyle/>
-          <a:p>
-            <a:pPr algn="ctr"/>
-          </a:p>
-        </p:txBody>
-      </p:sp>
-      <p:sp>
-        <p:nvSpPr>
-          <p:cNvPr id="14" name="TextBox 13"/>
-          <p:cNvSpPr txBox="1"/>
-          <p:nvPr/>
-        </p:nvSpPr>
-        <p:spPr>
-          <a:xfrm>
-            <a:off x="8816375" y="3154680"/>
-            <a:ext cx="822960" cy="384048"/>
-          </a:xfrm>
-          <a:prstGeom prst="rect">
-            <a:avLst/>
-          </a:prstGeom>
-          <a:noFill/>
-        </p:spPr>
-        <p:txBody>
-          <a:bodyPr wrap="square" anchor="ctr" lIns="18288" rIns="18288" tIns="18288" bIns="18288">
-            <a:spAutoFit/>
-          </a:bodyPr>
-          <a:lstStyle/>
-          <a:p>
-            <a:pPr algn="l">
-              <a:spcAft>
-                <a:spcPts val="600"/>
-              </a:spcAft>
-            </a:pPr>
-            <a:r>
-              <a:rPr sz="1400" b="1">
-                <a:solidFill>
-                  <a:srgbClr val="EEEFF1"/>
-                </a:solidFill>
-                <a:latin typeface="Segoe UI"/>
-              </a:rPr>
-              <a:t>0.042</a:t>
-            </a:r>
-          </a:p>
-        </p:txBody>
-      </p:sp>
-      <p:sp>
-        <p:nvSpPr>
-          <p:cNvPr id="15" name="TextBox 14"/>
+              <a:t>Воронка «событие → снимок → маски → синхронность»; каждая попытка — docs/SEARCH_LOG.md, хронология — docs/PIPELINE.md</a:t>
+            </a:r>
+          </a:p>
+        </p:txBody>
+      </p:sp>
+      <p:sp>
+        <p:nvSpPr>
+          <p:cNvPr id="7" name="TextBox 6"/>
           <p:cNvSpPr txBox="1"/>
           <p:nvPr/>
         </p:nvSpPr>
@@ -8878,14 +11716,14 @@
                 </a:solidFill>
                 <a:latin typeface="Segoe UI"/>
               </a:rPr>
-              <a:t>Источник: reports/case_detector/compare.md; reports/case_pairs/visual_review.md; docs/DECISIONS.md (final_numbers → case.detector_current)</a:t>
-            </a:r>
-          </a:p>
-        </p:txBody>
-      </p:sp>
-      <p:sp>
-        <p:nvSpPr>
-          <p:cNvPr id="16" name="TextBox 15"/>
+              <a:t>Источник: docs/PIPELINE.md; docs/SEARCH_LOG.md; reports/search/*_candidates.csv (final_numbers → case.sections.search)</a:t>
+            </a:r>
+          </a:p>
+        </p:txBody>
+      </p:sp>
+      <p:sp>
+        <p:nvSpPr>
+          <p:cNvPr id="8" name="TextBox 7"/>
           <p:cNvSpPr txBox="1"/>
           <p:nvPr/>
         </p:nvSpPr>
@@ -8917,7 +11755,7 @@
                 </a:solidFill>
                 <a:latin typeface="Segoe UI"/>
               </a:rPr>
-              <a:t>1:22</a:t>
+              <a:t>1:24</a:t>
             </a:r>
           </a:p>
         </p:txBody>
@@ -8982,7 +11820,7 @@
                 </a:solidFill>
                 <a:latin typeface="Segoe UI"/>
               </a:rPr>
-              <a:t>07 · Концентрация</a:t>
+              <a:t>07 · Пары уровня A</a:t>
             </a:r>
           </a:p>
         </p:txBody>
@@ -9015,13 +11853,13 @@
               </a:spcAft>
             </a:pPr>
             <a:r>
-              <a:rPr sz="2300" b="1">
+              <a:rPr sz="2600" b="1">
                 <a:solidFill>
                   <a:srgbClr val="EEEFF1"/>
                 </a:solidFill>
                 <a:latin typeface="Segoe UI"/>
               </a:rPr>
-              <a:t>C = N/A сошлась с опубликованной у 467 из 467 строк; на отложенном test модель не лучше медианы — на карте медиана</a:t>
+              <a:t>66 пар A: при 3.5–4.4 шт./км² на снимке 0 пикселей — это предел обнаружения</a:t>
             </a:r>
           </a:p>
         </p:txBody>
@@ -9054,13 +11892,13 @@
               </a:spcAft>
             </a:pPr>
             <a:r>
-              <a:rPr sz="1600" b="0">
+              <a:rPr sz="1500" b="0">
                 <a:solidFill>
                   <a:srgbClr val="EEEFF1"/>
                 </a:solidFill>
                 <a:latin typeface="Segoe UI"/>
               </a:rPr>
-              <a:t>• Контроль: 12 / 0.20 км² = 60.0 шт./км², 95 % ДИ Пуассона 31.0–104.8; C = N/A совпала с опубликованной у 467 из 467 строк</a:t>
+              <a:t>• ADIS: камера судна, счёт предметов по размерам, время GPS; |dt| ≤ 3 ч; ≈ 52 независимых проходов, время у 26 пар подтверждено самим судном на снимке</a:t>
             </a:r>
           </a:p>
           <a:p>
@@ -9070,13 +11908,13 @@
               </a:spcAft>
             </a:pPr>
             <a:r>
-              <a:rPr sz="1600" b="0">
+              <a:rPr sz="1500" b="0">
                 <a:solidFill>
                   <a:srgbClr val="EEEFF1"/>
                 </a:solidFill>
                 <a:latin typeface="Segoe UI"/>
               </a:rPr>
-              <a:t>• Сплит: 5 участков маршрута + буфер 1 сут; протокол и правило выбора записаны до CV</a:t>
+              <a:t>• Детектор оценивается на 28 парах A (на 38 — низкое солнце или слабый сигнал воды)</a:t>
             </a:r>
           </a:p>
           <a:p>
@@ -9086,13 +11924,13 @@
               </a:spcAft>
             </a:pPr>
             <a:r>
-              <a:rPr sz="1600" b="0">
+              <a:rPr sz="1500" b="0">
                 <a:solidFill>
                   <a:srgbClr val="EEEFF1"/>
                 </a:solidFill>
                 <a:latin typeface="Segoe UI"/>
               </a:rPr>
-              <a:t>• Dev CV S2: ridge_log 28.5 против медианы 44.2, ΔMAE [−31.6; −0.3] — слабый выигрыш (с Бонферрони [−38.7; 7.3])</a:t>
+              <a:t>• В 6 парах с предметами детектор дал 0 пикселей в полосе и 0 в полосе, сдвинутой на дрейф; из них оцениваемых 3 — тоже 0</a:t>
             </a:r>
           </a:p>
           <a:p>
@@ -9102,27 +11940,83 @@
               </a:spcAft>
             </a:pPr>
             <a:r>
-              <a:rPr sz="1600" b="0">
+              <a:rPr sz="1500" b="0">
                 <a:solidFill>
                   <a:srgbClr val="EEEFF1"/>
                 </a:solidFill>
                 <a:latin typeface="Segoe UI"/>
               </a:rPr>
-              <a:t>• Отложенный test (25.09.2026 19:15, один раз): S2 30.0 против 25.2 (основная модель не лучше медианы); S1 370.0 против 371.1 (разницы с медианой нет)</a:t>
-            </a:r>
-          </a:p>
-        </p:txBody>
-      </p:sp>
-      <p:sp>
-        <p:nvSpPr>
-          <p:cNvPr id="5" name="TextBox 4"/>
-          <p:cNvSpPr txBox="1"/>
-          <p:nvPr/>
-        </p:nvSpPr>
-        <p:spPr>
-          <a:xfrm>
-            <a:off x="6400800" y="1691640"/>
-            <a:ext cx="5349240" cy="365760"/>
+              <a:t>• Доля покрытия предметами ≈ 6.6·10⁻⁸; крупнейший предмет — 0.7 % пикселя: Sentinel-2 такие предметы не видит</a:t>
+            </a:r>
+          </a:p>
+          <a:p>
+            <a:pPr algn="l">
+              <a:spcAft>
+                <a:spcPts val="1000"/>
+              </a:spcAft>
+            </a:pPr>
+            <a:r>
+              <a:rPr sz="1500" b="0">
+                <a:solidFill>
+                  <a:srgbClr val="EEEFF1"/>
+                </a:solidFill>
+                <a:latin typeface="Segoe UI"/>
+              </a:rPr>
+              <a:t>• Ложные при полевом нуле (25 пар): ветер &lt; 7 м/с — 0 пикселей на 9.5 км²; сильнее — 1 на 8.8 км², в зоне 0.16 объекта/км² (барашки)</a:t>
+            </a:r>
+          </a:p>
+          <a:p>
+            <a:pPr algn="l">
+              <a:spcAft>
+                <a:spcPts val="1000"/>
+              </a:spcAft>
+            </a:pPr>
+            <a:r>
+              <a:rPr sz="1500" b="0">
+                <a:solidFill>
+                  <a:srgbClr val="EEEFF1"/>
+                </a:solidFill>
+                <a:latin typeface="Segoe UI"/>
+              </a:rPr>
+              <a:t>• Вывод: пары A подтверждают предел обнаружения, но калибровку «снимок → шт./км²» на них не построить</a:t>
+            </a:r>
+          </a:p>
+        </p:txBody>
+      </p:sp>
+      <p:pic>
+        <p:nvPicPr>
+          <p:cNvPr id="5" name="Picture 4" descr="06_adis_pair.jpg"/>
+          <p:cNvPicPr>
+            <a:picLocks noChangeAspect="1"/>
+          </p:cNvPicPr>
+          <p:nvPr/>
+        </p:nvPicPr>
+        <p:blipFill>
+          <a:blip r:embed="rId2"/>
+          <a:stretch>
+            <a:fillRect/>
+          </a:stretch>
+        </p:blipFill>
+        <p:spPr>
+          <a:xfrm>
+            <a:off x="6400800" y="1645920"/>
+            <a:ext cx="5349240" cy="1327280"/>
+          </a:xfrm>
+          <a:prstGeom prst="rect">
+            <a:avLst/>
+          </a:prstGeom>
+        </p:spPr>
+      </p:pic>
+      <p:sp>
+        <p:nvSpPr>
+          <p:cNvPr id="6" name="TextBox 5"/>
+          <p:cNvSpPr txBox="1"/>
+          <p:nvPr/>
+        </p:nvSpPr>
+        <p:spPr>
+          <a:xfrm>
+            <a:off x="6400800" y="3018920"/>
+            <a:ext cx="5349240" cy="548640"/>
           </a:xfrm>
           <a:prstGeom prst="rect">
             <a:avLst/>
@@ -9141,303 +12035,20 @@
               </a:spcAft>
             </a:pPr>
             <a:r>
-              <a:rPr sz="1400" b="0">
+              <a:rPr sz="1200" b="0">
                 <a:solidFill>
                   <a:srgbClr val="9AA1AC"/>
                 </a:solidFill>
                 <a:latin typeface="Segoe UI"/>
               </a:rPr>
-              <a:t>S2, отложенный test (14 событий): MAE, шт./км²</a:t>
-            </a:r>
-          </a:p>
-        </p:txBody>
-      </p:sp>
-      <p:sp>
-        <p:nvSpPr>
-          <p:cNvPr id="6" name="TextBox 5"/>
-          <p:cNvSpPr txBox="1"/>
-          <p:nvPr/>
-        </p:nvSpPr>
-        <p:spPr>
-          <a:xfrm>
-            <a:off x="6400800" y="2148840"/>
-            <a:ext cx="2155240" cy="384048"/>
-          </a:xfrm>
-          <a:prstGeom prst="rect">
-            <a:avLst/>
-          </a:prstGeom>
-          <a:noFill/>
-        </p:spPr>
-        <p:txBody>
-          <a:bodyPr wrap="square" anchor="ctr" lIns="18288" rIns="18288" tIns="18288" bIns="18288">
-            <a:spAutoFit/>
-          </a:bodyPr>
-          <a:lstStyle/>
-          <a:p>
-            <a:pPr algn="l">
-              <a:spcAft>
-                <a:spcPts val="600"/>
-              </a:spcAft>
-            </a:pPr>
-            <a:r>
-              <a:rPr sz="1300" b="0">
-                <a:solidFill>
-                  <a:srgbClr val="EEEFF1"/>
-                </a:solidFill>
-                <a:latin typeface="Segoe UI"/>
-              </a:rPr>
-              <a:t>ridge_log (основная)</a:t>
-            </a:r>
-          </a:p>
-        </p:txBody>
-      </p:sp>
-      <p:sp>
-        <p:nvSpPr>
-          <p:cNvPr id="7" name="Rectangle 6"/>
-          <p:cNvSpPr/>
-          <p:nvPr/>
-        </p:nvSpPr>
-        <p:spPr>
-          <a:xfrm>
-            <a:off x="8647480" y="2212848"/>
-            <a:ext cx="2279599" cy="274320"/>
-          </a:xfrm>
-          <a:prstGeom prst="rect">
-            <a:avLst/>
-          </a:prstGeom>
-          <a:solidFill>
-            <a:srgbClr val="5B6370"/>
-          </a:solidFill>
-          <a:ln>
-            <a:noFill/>
-          </a:ln>
-          <a:effectLst/>
-        </p:spPr>
-        <p:style>
-          <a:lnRef idx="1">
-            <a:schemeClr val="accent1"/>
-          </a:lnRef>
-          <a:fillRef idx="3">
-            <a:schemeClr val="accent1"/>
-          </a:fillRef>
-          <a:effectRef idx="2">
-            <a:schemeClr val="accent1"/>
-          </a:effectRef>
-          <a:fontRef idx="minor">
-            <a:schemeClr val="lt1"/>
-          </a:fontRef>
-        </p:style>
-        <p:txBody>
-          <a:bodyPr rtlCol="0" anchor="ctr"/>
-          <a:lstStyle/>
-          <a:p>
-            <a:pPr algn="ctr"/>
-          </a:p>
-        </p:txBody>
-      </p:sp>
-      <p:sp>
-        <p:nvSpPr>
-          <p:cNvPr id="8" name="TextBox 7"/>
-          <p:cNvSpPr txBox="1"/>
-          <p:nvPr/>
-        </p:nvSpPr>
-        <p:spPr>
-          <a:xfrm>
-            <a:off x="11000232" y="2148840"/>
-            <a:ext cx="822960" cy="384048"/>
-          </a:xfrm>
-          <a:prstGeom prst="rect">
-            <a:avLst/>
-          </a:prstGeom>
-          <a:noFill/>
-        </p:spPr>
-        <p:txBody>
-          <a:bodyPr wrap="square" anchor="ctr" lIns="18288" rIns="18288" tIns="18288" bIns="18288">
-            <a:spAutoFit/>
-          </a:bodyPr>
-          <a:lstStyle/>
-          <a:p>
-            <a:pPr algn="l">
-              <a:spcAft>
-                <a:spcPts val="600"/>
-              </a:spcAft>
-            </a:pPr>
-            <a:r>
-              <a:rPr sz="1400" b="1">
-                <a:solidFill>
-                  <a:srgbClr val="EEEFF1"/>
-                </a:solidFill>
-                <a:latin typeface="Segoe UI"/>
-              </a:rPr>
-              <a:t>30.0</a:t>
-            </a:r>
-          </a:p>
-        </p:txBody>
-      </p:sp>
-      <p:sp>
-        <p:nvSpPr>
-          <p:cNvPr id="9" name="TextBox 8"/>
-          <p:cNvSpPr txBox="1"/>
-          <p:nvPr/>
-        </p:nvSpPr>
-        <p:spPr>
-          <a:xfrm>
-            <a:off x="6400800" y="2651760"/>
-            <a:ext cx="2155240" cy="384048"/>
-          </a:xfrm>
-          <a:prstGeom prst="rect">
-            <a:avLst/>
-          </a:prstGeom>
-          <a:noFill/>
-        </p:spPr>
-        <p:txBody>
-          <a:bodyPr wrap="square" anchor="ctr" lIns="18288" rIns="18288" tIns="18288" bIns="18288">
-            <a:spAutoFit/>
-          </a:bodyPr>
-          <a:lstStyle/>
-          <a:p>
-            <a:pPr algn="l">
-              <a:spcAft>
-                <a:spcPts val="600"/>
-              </a:spcAft>
-            </a:pPr>
-            <a:r>
-              <a:rPr sz="1300" b="0">
-                <a:solidFill>
-                  <a:srgbClr val="EEEFF1"/>
-                </a:solidFill>
-                <a:latin typeface="Segoe UI"/>
-              </a:rPr>
-              <a:t>медиана dev (на карте)</a:t>
-            </a:r>
-          </a:p>
-        </p:txBody>
-      </p:sp>
-      <p:sp>
-        <p:nvSpPr>
-          <p:cNvPr id="10" name="Rectangle 9"/>
-          <p:cNvSpPr/>
-          <p:nvPr/>
-        </p:nvSpPr>
-        <p:spPr>
-          <a:xfrm>
-            <a:off x="8647480" y="2715768"/>
-            <a:ext cx="1914863" cy="274320"/>
-          </a:xfrm>
-          <a:prstGeom prst="rect">
-            <a:avLst/>
-          </a:prstGeom>
-          <a:solidFill>
-            <a:srgbClr val="D9912E"/>
-          </a:solidFill>
-          <a:ln>
-            <a:noFill/>
-          </a:ln>
-          <a:effectLst/>
-        </p:spPr>
-        <p:style>
-          <a:lnRef idx="1">
-            <a:schemeClr val="accent1"/>
-          </a:lnRef>
-          <a:fillRef idx="3">
-            <a:schemeClr val="accent1"/>
-          </a:fillRef>
-          <a:effectRef idx="2">
-            <a:schemeClr val="accent1"/>
-          </a:effectRef>
-          <a:fontRef idx="minor">
-            <a:schemeClr val="lt1"/>
-          </a:fontRef>
-        </p:style>
-        <p:txBody>
-          <a:bodyPr rtlCol="0" anchor="ctr"/>
-          <a:lstStyle/>
-          <a:p>
-            <a:pPr algn="ctr"/>
-          </a:p>
-        </p:txBody>
-      </p:sp>
-      <p:sp>
-        <p:nvSpPr>
-          <p:cNvPr id="11" name="TextBox 10"/>
-          <p:cNvSpPr txBox="1"/>
-          <p:nvPr/>
-        </p:nvSpPr>
-        <p:spPr>
-          <a:xfrm>
-            <a:off x="10635496" y="2651760"/>
-            <a:ext cx="822960" cy="384048"/>
-          </a:xfrm>
-          <a:prstGeom prst="rect">
-            <a:avLst/>
-          </a:prstGeom>
-          <a:noFill/>
-        </p:spPr>
-        <p:txBody>
-          <a:bodyPr wrap="square" anchor="ctr" lIns="18288" rIns="18288" tIns="18288" bIns="18288">
-            <a:spAutoFit/>
-          </a:bodyPr>
-          <a:lstStyle/>
-          <a:p>
-            <a:pPr algn="l">
-              <a:spcAft>
-                <a:spcPts val="600"/>
-              </a:spcAft>
-            </a:pPr>
-            <a:r>
-              <a:rPr sz="1400" b="1">
-                <a:solidFill>
-                  <a:srgbClr val="EEEFF1"/>
-                </a:solidFill>
-                <a:latin typeface="Segoe UI"/>
-              </a:rPr>
-              <a:t>25.2</a:t>
-            </a:r>
-          </a:p>
-        </p:txBody>
-      </p:sp>
-      <p:sp>
-        <p:nvSpPr>
-          <p:cNvPr id="12" name="TextBox 11"/>
-          <p:cNvSpPr txBox="1"/>
-          <p:nvPr/>
-        </p:nvSpPr>
-        <p:spPr>
-          <a:xfrm>
-            <a:off x="6400800" y="3200400"/>
-            <a:ext cx="5349240" cy="365760"/>
-          </a:xfrm>
-          <a:prstGeom prst="rect">
-            <a:avLst/>
-          </a:prstGeom>
-          <a:noFill/>
-        </p:spPr>
-        <p:txBody>
-          <a:bodyPr wrap="square" anchor="t" lIns="18288" rIns="18288" tIns="18288" bIns="18288">
-            <a:spAutoFit/>
-          </a:bodyPr>
-          <a:lstStyle/>
-          <a:p>
-            <a:pPr algn="l">
-              <a:spcAft>
-                <a:spcPts val="600"/>
-              </a:spcAft>
-            </a:pPr>
-            <a:r>
-              <a:rPr sz="1300" b="0">
-                <a:solidFill>
-                  <a:srgbClr val="9AA1AC"/>
-                </a:solidFill>
-                <a:latin typeface="Segoe UI"/>
-              </a:rPr>
-              <a:t>ΔMAE +4.8 [−1.6; +12.9] — ДИ содержит 0</a:t>
-            </a:r>
-          </a:p>
-        </p:txBody>
-      </p:sp>
-      <p:sp>
-        <p:nvSpPr>
-          <p:cNvPr id="13" name="TextBox 12"/>
+              <a:t>Пара A, Средиземное море: судно-съёмщик видно на снимке в конце полосы скана (пурпур) — время подтверждено; детектор в полосе пикселей не дал</a:t>
+            </a:r>
+          </a:p>
+        </p:txBody>
+      </p:sp>
+      <p:sp>
+        <p:nvSpPr>
+          <p:cNvPr id="7" name="TextBox 6"/>
           <p:cNvSpPr txBox="1"/>
           <p:nvPr/>
         </p:nvSpPr>
@@ -9469,14 +12080,14 @@
                 </a:solidFill>
                 <a:latin typeface="Segoe UI"/>
               </a:rPr>
-              <a:t>Источник: reports/case_conc/dev_cv.json, final_test.json; configs/case_selection.yaml: final_test</a:t>
-            </a:r>
-          </a:p>
-        </p:txBody>
-      </p:sp>
-      <p:sp>
-        <p:nvSpPr>
-          <p:cNvPr id="14" name="TextBox 13"/>
+              <a:t>Источник: reports/search/adis_candidates.csv, reports/search/adis.md (final_numbers → case.sections.adis_pairs)</a:t>
+            </a:r>
+          </a:p>
+        </p:txBody>
+      </p:sp>
+      <p:sp>
+        <p:nvSpPr>
+          <p:cNvPr id="8" name="TextBox 7"/>
           <p:cNvSpPr txBox="1"/>
           <p:nvPr/>
         </p:nvSpPr>
@@ -9508,7 +12119,7 @@
                 </a:solidFill>
                 <a:latin typeface="Segoe UI"/>
               </a:rPr>
-              <a:t>1:47</a:t>
+              <a:t>1:51</a:t>
             </a:r>
           </a:p>
         </p:txBody>
@@ -9573,7 +12184,7 @@
                 </a:solidFill>
                 <a:latin typeface="Segoe UI"/>
               </a:rPr>
-              <a:t>08 · Эксперимент «снимок vs all_litter»</a:t>
+              <a:t>08 · Новые размеченные данные B/D</a:t>
             </a:r>
           </a:p>
         </p:txBody>
@@ -9612,7 +12223,7 @@
                 </a:solidFill>
                 <a:latin typeface="Segoe UI"/>
               </a:rPr>
-              <a:t>Связь признаков снимка с полевой плотностью всего мусора не установлена: данных на это мало</a:t>
+              <a:t>Новые данные: B — 65 съёмок и 14374 нитей Cózar, D — 2094 судов и облака; утечек 0</a:t>
             </a:r>
           </a:p>
         </p:txBody>
@@ -9651,7 +12262,7 @@
                 </a:solidFill>
                 <a:latin typeface="Segoe UI"/>
               </a:rPr>
-              <a:t>• 11 пар S2 прошли маски, независимых групп «район × день» — 6; эталон — весь мусор, не пластик</a:t>
+              <a:t>• B: PLP 38 съёмок (мишени), FloatingObjects 27 съёмок (25 регионов), Cózar 2024 — 14374 окон на 4435 съёмках</a:t>
             </a:r>
           </a:p>
           <a:p>
@@ -9667,7 +12278,7 @@
                 </a:solidFill>
                 <a:latin typeface="Segoe UI"/>
               </a:rPr>
-              <a:t>• FDI в полосе: ρ −0.75 [−1.00; −0.14], p Холма 0.12; та же полоса в случайной воде сцены — −0.52</a:t>
+              <a:t>• D: суда у Финляндии — 2094 рамок, 18 съёмок; облака — 28 сцен; отклонено источников 13 (у каждого причина)</a:t>
             </a:r>
           </a:p>
           <a:p>
@@ -9683,7 +12294,7 @@
                 </a:solidFill>
                 <a:latin typeface="Segoe UI"/>
               </a:rPr>
-              <a:t>• Значит, связь на уровне сцены или дня, а не места; знак к тому же обратный ожидаемому</a:t>
+              <a:t>• Утечки: та же съёмка или те же пиксели с MARIDA, MADOS и нашими сценами — 0; по содержимому 0 из 119; исключён 1 дубль</a:t>
             </a:r>
           </a:p>
           <a:p>
@@ -9699,136 +12310,275 @@
                 </a:solidFill>
                 <a:latin typeface="Segoe UI"/>
               </a:rPr>
-              <a:t>• Мощность: при 6 группах видна только |ρ| ≥ 0.96; для ρ = 0.5 нужно ≈ 33 независимых пар</a:t>
-            </a:r>
-          </a:p>
-        </p:txBody>
-      </p:sp>
-      <p:sp>
-        <p:nvSpPr>
-          <p:cNvPr id="5" name="Rectangle 4"/>
-          <p:cNvSpPr/>
-          <p:nvPr/>
-        </p:nvSpPr>
-        <p:spPr>
-          <a:xfrm>
-            <a:off x="6400800" y="1691640"/>
-            <a:ext cx="5349240" cy="1554480"/>
-          </a:xfrm>
-          <a:prstGeom prst="rect">
-            <a:avLst/>
-          </a:prstGeom>
-          <a:solidFill>
-            <a:srgbClr val="1B1E24"/>
-          </a:solidFill>
-          <a:ln>
-            <a:noFill/>
-          </a:ln>
-          <a:effectLst/>
-        </p:spPr>
-        <p:style>
-          <a:lnRef idx="1">
-            <a:schemeClr val="accent1"/>
-          </a:lnRef>
-          <a:fillRef idx="3">
-            <a:schemeClr val="accent1"/>
-          </a:fillRef>
-          <a:effectRef idx="2">
-            <a:schemeClr val="accent1"/>
-          </a:effectRef>
-          <a:fontRef idx="minor">
-            <a:schemeClr val="lt1"/>
-          </a:fontRef>
-        </p:style>
-        <p:txBody>
-          <a:bodyPr rtlCol="0" anchor="ctr"/>
-          <a:lstStyle/>
-          <a:p>
-            <a:pPr algn="ctr"/>
-          </a:p>
-        </p:txBody>
-      </p:sp>
+              <a:t>• Детектор без дообучения на L2A: нити Cózar 36 %, Refined 2.8 % пикселей; ложные на судах 25.9 %; облака — 4 пикс.</a:t>
+            </a:r>
+          </a:p>
+        </p:txBody>
+      </p:sp>
+      <p:graphicFrame>
+        <p:nvGraphicFramePr>
+          <p:cNvPr id="5" name="Table 4"/>
+          <p:cNvGraphicFramePr>
+            <a:graphicFrameLocks noGrp="1"/>
+          </p:cNvGraphicFramePr>
+          <p:nvPr/>
+        </p:nvGraphicFramePr>
+        <p:xfrm>
+          <a:off x="6400800" y="1691640"/>
+          <a:ext cx="5349239" cy="1645919"/>
+        </p:xfrm>
+        <a:graphic>
+          <a:graphicData uri="http://schemas.openxmlformats.org/drawingml/2006/table">
+            <a:tbl>
+              <a:tblPr firstRow="1" bandRow="1">
+                <a:tableStyleId>{5C22544A-7EE6-4342-B048-85BDC9FD1C3A}</a:tableStyleId>
+              </a:tblPr>
+              <a:tblGrid>
+                <a:gridCol w="4172407"/>
+                <a:gridCol w="1176832"/>
+              </a:tblGrid>
+              <a:tr h="329183">
+                <a:tc>
+                  <a:txBody>
+                    <a:bodyPr/>
+                    <a:lstStyle/>
+                    <a:p>
+                      <a:r>
+                        <a:rPr sz="1300" b="1">
+                          <a:solidFill>
+                            <a:srgbClr val="EEEFF1"/>
+                          </a:solidFill>
+                          <a:latin typeface="Segoe UI"/>
+                        </a:rPr>
+                        <a:t>Набор (уровень)</a:t>
+                      </a:r>
+                    </a:p>
+                  </a:txBody>
+                  <a:tcPr marL="73152" marR="73152" marT="27432" marB="27432">
+                    <a:solidFill>
+                      <a:srgbClr val="5B6370"/>
+                    </a:solidFill>
+                  </a:tcPr>
+                </a:tc>
+                <a:tc>
+                  <a:txBody>
+                    <a:bodyPr/>
+                    <a:lstStyle/>
+                    <a:p>
+                      <a:pPr algn="r"/>
+                      <a:r>
+                        <a:rPr sz="1300" b="1">
+                          <a:solidFill>
+                            <a:srgbClr val="EEEFF1"/>
+                          </a:solidFill>
+                          <a:latin typeface="Segoe UI"/>
+                        </a:rPr>
+                        <a:t>Детектор</a:t>
+                      </a:r>
+                    </a:p>
+                  </a:txBody>
+                  <a:tcPr marL="73152" marR="73152" marT="27432" marB="27432">
+                    <a:solidFill>
+                      <a:srgbClr val="5B6370"/>
+                    </a:solidFill>
+                  </a:tcPr>
+                </a:tc>
+              </a:tr>
+              <a:tr h="329183">
+                <a:tc>
+                  <a:txBody>
+                    <a:bodyPr/>
+                    <a:lstStyle/>
+                    <a:p>
+                      <a:r>
+                        <a:rPr sz="1300" b="0">
+                          <a:solidFill>
+                            <a:srgbClr val="EEEFF1"/>
+                          </a:solidFill>
+                          <a:latin typeface="Segoe UI"/>
+                        </a:rPr>
+                        <a:t>Cózar, нити (B), из 234</a:t>
+                      </a:r>
+                    </a:p>
+                  </a:txBody>
+                  <a:tcPr marL="73152" marR="73152" marT="27432" marB="27432">
+                    <a:solidFill>
+                      <a:srgbClr val="1B1E24"/>
+                    </a:solidFill>
+                  </a:tcPr>
+                </a:tc>
+                <a:tc>
+                  <a:txBody>
+                    <a:bodyPr/>
+                    <a:lstStyle/>
+                    <a:p>
+                      <a:pPr algn="r"/>
+                      <a:r>
+                        <a:rPr sz="1300" b="0">
+                          <a:solidFill>
+                            <a:srgbClr val="EEEFF1"/>
+                          </a:solidFill>
+                          <a:latin typeface="Segoe UI"/>
+                        </a:rPr>
+                        <a:t>85</a:t>
+                      </a:r>
+                    </a:p>
+                  </a:txBody>
+                  <a:tcPr marL="73152" marR="73152" marT="27432" marB="27432">
+                    <a:solidFill>
+                      <a:srgbClr val="1B1E24"/>
+                    </a:solidFill>
+                  </a:tcPr>
+                </a:tc>
+              </a:tr>
+              <a:tr h="329183">
+                <a:tc>
+                  <a:txBody>
+                    <a:bodyPr/>
+                    <a:lstStyle/>
+                    <a:p>
+                      <a:r>
+                        <a:rPr sz="1300" b="0">
+                          <a:solidFill>
+                            <a:srgbClr val="EEEFF1"/>
+                          </a:solidFill>
+                          <a:latin typeface="Segoe UI"/>
+                        </a:rPr>
+                        <a:t>PLP, пластик (B), % пикс.</a:t>
+                      </a:r>
+                    </a:p>
+                  </a:txBody>
+                  <a:tcPr marL="73152" marR="73152" marT="27432" marB="27432">
+                    <a:solidFill>
+                      <a:srgbClr val="1B1E24"/>
+                    </a:solidFill>
+                  </a:tcPr>
+                </a:tc>
+                <a:tc>
+                  <a:txBody>
+                    <a:bodyPr/>
+                    <a:lstStyle/>
+                    <a:p>
+                      <a:pPr algn="r"/>
+                      <a:r>
+                        <a:rPr sz="1300" b="0">
+                          <a:solidFill>
+                            <a:srgbClr val="EEEFF1"/>
+                          </a:solidFill>
+                          <a:latin typeface="Segoe UI"/>
+                        </a:rPr>
+                        <a:t>0.9</a:t>
+                      </a:r>
+                    </a:p>
+                  </a:txBody>
+                  <a:tcPr marL="73152" marR="73152" marT="27432" marB="27432">
+                    <a:solidFill>
+                      <a:srgbClr val="1B1E24"/>
+                    </a:solidFill>
+                  </a:tcPr>
+                </a:tc>
+              </a:tr>
+              <a:tr h="329183">
+                <a:tc>
+                  <a:txBody>
+                    <a:bodyPr/>
+                    <a:lstStyle/>
+                    <a:p>
+                      <a:r>
+                        <a:rPr sz="1300" b="0">
+                          <a:solidFill>
+                            <a:srgbClr val="EEEFF1"/>
+                          </a:solidFill>
+                          <a:latin typeface="Segoe UI"/>
+                        </a:rPr>
+                        <a:t>Суда (D), ложные рамки</a:t>
+                      </a:r>
+                    </a:p>
+                  </a:txBody>
+                  <a:tcPr marL="73152" marR="73152" marT="27432" marB="27432">
+                    <a:solidFill>
+                      <a:srgbClr val="1B1E24"/>
+                    </a:solidFill>
+                  </a:tcPr>
+                </a:tc>
+                <a:tc>
+                  <a:txBody>
+                    <a:bodyPr/>
+                    <a:lstStyle/>
+                    <a:p>
+                      <a:pPr algn="r"/>
+                      <a:r>
+                        <a:rPr sz="1300" b="0">
+                          <a:solidFill>
+                            <a:srgbClr val="EEEFF1"/>
+                          </a:solidFill>
+                          <a:latin typeface="Segoe UI"/>
+                        </a:rPr>
+                        <a:t>543</a:t>
+                      </a:r>
+                    </a:p>
+                  </a:txBody>
+                  <a:tcPr marL="73152" marR="73152" marT="27432" marB="27432">
+                    <a:solidFill>
+                      <a:srgbClr val="1B1E24"/>
+                    </a:solidFill>
+                  </a:tcPr>
+                </a:tc>
+              </a:tr>
+              <a:tr h="329187">
+                <a:tc>
+                  <a:txBody>
+                    <a:bodyPr/>
+                    <a:lstStyle/>
+                    <a:p>
+                      <a:r>
+                        <a:rPr sz="1300" b="1">
+                          <a:solidFill>
+                            <a:srgbClr val="EEEFF1"/>
+                          </a:solidFill>
+                          <a:latin typeface="Segoe UI"/>
+                        </a:rPr>
+                        <a:t>Облака (D), ложные пикс.</a:t>
+                      </a:r>
+                    </a:p>
+                  </a:txBody>
+                  <a:tcPr marL="73152" marR="73152" marT="27432" marB="27432">
+                    <a:solidFill>
+                      <a:srgbClr val="1B1E24"/>
+                    </a:solidFill>
+                  </a:tcPr>
+                </a:tc>
+                <a:tc>
+                  <a:txBody>
+                    <a:bodyPr/>
+                    <a:lstStyle/>
+                    <a:p>
+                      <a:pPr algn="r"/>
+                      <a:r>
+                        <a:rPr sz="1300" b="1">
+                          <a:solidFill>
+                            <a:srgbClr val="EEEFF1"/>
+                          </a:solidFill>
+                          <a:latin typeface="Segoe UI"/>
+                        </a:rPr>
+                        <a:t>4</a:t>
+                      </a:r>
+                    </a:p>
+                  </a:txBody>
+                  <a:tcPr marL="73152" marR="73152" marT="27432" marB="27432">
+                    <a:solidFill>
+                      <a:srgbClr val="1B1E24"/>
+                    </a:solidFill>
+                  </a:tcPr>
+                </a:tc>
+              </a:tr>
+            </a:tbl>
+          </a:graphicData>
+        </a:graphic>
+      </p:graphicFrame>
       <p:sp>
         <p:nvSpPr>
           <p:cNvPr id="6" name="TextBox 5"/>
-          <p:cNvSpPr txBox="1"/>
-          <p:nvPr/>
-        </p:nvSpPr>
-        <p:spPr>
-          <a:xfrm>
-            <a:off x="6675120" y="1783080"/>
-            <a:ext cx="4800600" cy="822960"/>
-          </a:xfrm>
-          <a:prstGeom prst="rect">
-            <a:avLst/>
-          </a:prstGeom>
-          <a:noFill/>
-        </p:spPr>
-        <p:txBody>
-          <a:bodyPr wrap="square" anchor="t" lIns="18288" rIns="18288" tIns="18288" bIns="18288">
-            <a:spAutoFit/>
-          </a:bodyPr>
-          <a:lstStyle/>
-          <a:p>
-            <a:pPr algn="l">
-              <a:spcAft>
-                <a:spcPts val="600"/>
-              </a:spcAft>
-            </a:pPr>
-            <a:r>
-              <a:rPr sz="4800" b="1">
-                <a:solidFill>
-                  <a:srgbClr val="D9912E"/>
-                </a:solidFill>
-                <a:latin typeface="Segoe UI"/>
-              </a:rPr>
-              <a:t>33</a:t>
-            </a:r>
-          </a:p>
-        </p:txBody>
-      </p:sp>
-      <p:sp>
-        <p:nvSpPr>
-          <p:cNvPr id="7" name="TextBox 6"/>
-          <p:cNvSpPr txBox="1"/>
-          <p:nvPr/>
-        </p:nvSpPr>
-        <p:spPr>
-          <a:xfrm>
-            <a:off x="6675120" y="2606040"/>
-            <a:ext cx="4800600" cy="594360"/>
-          </a:xfrm>
-          <a:prstGeom prst="rect">
-            <a:avLst/>
-          </a:prstGeom>
-          <a:noFill/>
-        </p:spPr>
-        <p:txBody>
-          <a:bodyPr wrap="square" anchor="t" lIns="18288" rIns="18288" tIns="18288" bIns="18288">
-            <a:spAutoFit/>
-          </a:bodyPr>
-          <a:lstStyle/>
-          <a:p>
-            <a:pPr algn="l">
-              <a:spcAft>
-                <a:spcPts val="600"/>
-              </a:spcAft>
-            </a:pPr>
-            <a:r>
-              <a:rPr sz="1300" b="0">
-                <a:solidFill>
-                  <a:srgbClr val="EEEFF1"/>
-                </a:solidFill>
-                <a:latin typeface="Segoe UI"/>
-              </a:rPr>
-              <a:t>независимых синхронных пар нужно, чтобы увидеть ρ = 0.5 (есть 6 групп)</a:t>
-            </a:r>
-          </a:p>
-        </p:txBody>
-      </p:sp>
-      <p:sp>
-        <p:nvSpPr>
-          <p:cNvPr id="8" name="TextBox 7"/>
           <p:cNvSpPr txBox="1"/>
           <p:nvPr/>
         </p:nvSpPr>
@@ -9860,14 +12610,14 @@
                 </a:solidFill>
                 <a:latin typeface="Segoe UI"/>
               </a:rPr>
-              <a:t>Источник: reports/case_pairs/experiment.md, experiment.json</a:t>
-            </a:r>
-          </a:p>
-        </p:txBody>
-      </p:sp>
-      <p:sp>
-        <p:nvSpPr>
-          <p:cNvPr id="9" name="TextBox 8"/>
+              <a:t>Источник: reports/extra_data/registry*.csv, fp_current_detector.json (final_numbers → case.sections.labeled_data)</a:t>
+            </a:r>
+          </a:p>
+        </p:txBody>
+      </p:sp>
+      <p:sp>
+        <p:nvSpPr>
+          <p:cNvPr id="7" name="TextBox 6"/>
           <p:cNvSpPr txBox="1"/>
           <p:nvPr/>
         </p:nvSpPr>
@@ -9899,7 +12649,7 @@
                 </a:solidFill>
                 <a:latin typeface="Segoe UI"/>
               </a:rPr>
-              <a:t>2:15</a:t>
+              <a:t>2:12</a:t>
             </a:r>
           </a:p>
         </p:txBody>
@@ -9964,7 +12714,7 @@
                 </a:solidFill>
                 <a:latin typeface="Segoe UI"/>
               </a:rPr>
-              <a:t>09 · Карта</a:t>
+              <a:t>09 · Детектор v2 и бейзлайны</a:t>
             </a:r>
           </a:p>
         </p:txBody>
@@ -9997,13 +12747,13 @@
               </a:spcAft>
             </a:pPr>
             <a:r>
-              <a:rPr sz="2300" b="1">
+              <a:rPr sz="2600" b="1">
                 <a:solidFill>
                   <a:srgbClr val="EEEFF1"/>
                 </a:solidFill>
                 <a:latin typeface="Segoe UI"/>
               </a:rPr>
-              <a:t>Карта говорит то же, что отчёт: 29 полос-кандидатов, 0 подтверждённых пар, концентрация по снимку недоступна</a:t>
+              <a:t>Дообучение на B + D: принято 0 из 11 вариантов; U-Net MARIDA на test — F1 0.501</a:t>
             </a:r>
           </a:p>
         </p:txBody>
@@ -10042,7 +12792,7 @@
                 </a:solidFill>
                 <a:latin typeface="Segoe UI"/>
               </a:rPr>
-              <a:t>• Три слоя: полевые измерения (шт./км² с интервалом Пуассона) · снимки-кандидаты (полосы обследования) · подозрительные пиксели детектора</a:t>
+              <a:t>• Правило принятия записано до экспериментов: ΔF1 val ≥ 0.01 и не хуже на B и D; 3 seed; test не читался</a:t>
             </a:r>
           </a:p>
           <a:p>
@@ -10058,7 +12808,7 @@
                 </a:solidFill>
                 <a:latin typeface="Segoe UI"/>
               </a:rPr>
-              <a:t>• Два статуса полосы: детекция («связь не подтверждена» + причина) и концентрация («недоступна»)</a:t>
+              <a:t>• ΔF1 val от −0.031 до 0.002 — в сервисе остаётся weights/lgbm</a:t>
             </a:r>
           </a:p>
           <a:p>
@@ -10074,35 +12824,66 @@
                 </a:solidFill>
                 <a:latin typeface="Segoe UI"/>
               </a:rPr>
-              <a:t>• Реестр пар, выгрузка GeoJSON/CSV, сохранённые запросы; самопроверка API ↔ выгрузка: 284 из 284, ошибочные входы 46/46, p95 ≤ 104 мс</a:t>
-            </a:r>
-          </a:p>
-        </p:txBody>
-      </p:sp>
-      <p:pic>
-        <p:nvPicPr>
-          <p:cNvPr id="5" name="Picture 4" descr="02_zone_he460_t03.jpg"/>
-          <p:cNvPicPr>
-            <a:picLocks noChangeAspect="1"/>
-          </p:cNvPicPr>
-          <p:nvPr/>
-        </p:nvPicPr>
-        <p:blipFill>
-          <a:blip r:embed="rId2"/>
-          <a:stretch>
-            <a:fillRect/>
-          </a:stretch>
-        </p:blipFill>
-        <p:spPr>
-          <a:xfrm>
-            <a:off x="6400800" y="1645920"/>
-            <a:ext cx="5349240" cy="3656442"/>
-          </a:xfrm>
-          <a:prstGeom prst="rect">
-            <a:avLst/>
-          </a:prstGeom>
-        </p:spPr>
-      </p:pic>
+              <a:t>• Компромисс: D судов — ложные на судах 26 % → 4 %, но нити Cózar 36 % → 27 %</a:t>
+            </a:r>
+          </a:p>
+          <a:p>
+            <a:pPr algn="l">
+              <a:spcAft>
+                <a:spcPts val="1000"/>
+              </a:spcAft>
+            </a:pPr>
+            <a:r>
+              <a:rPr sz="1600" b="0">
+                <a:solidFill>
+                  <a:srgbClr val="EEEFF1"/>
+                </a:solidFill>
+                <a:latin typeface="Segoe UI"/>
+              </a:rPr>
+              <a:t>• U-Net MARIDA (официальные веса): LightGBM лучше на 0.370 [0.215; 0.481], в 13 из 15 сцен; на снимках пар U-Net — 253 объектов «соль-перец», в полосах 0</a:t>
+            </a:r>
+          </a:p>
+        </p:txBody>
+      </p:sp>
+      <p:sp>
+        <p:nvSpPr>
+          <p:cNvPr id="5" name="TextBox 4"/>
+          <p:cNvSpPr txBox="1"/>
+          <p:nvPr/>
+        </p:nvSpPr>
+        <p:spPr>
+          <a:xfrm>
+            <a:off x="6400800" y="1691640"/>
+            <a:ext cx="5349240" cy="365760"/>
+          </a:xfrm>
+          <a:prstGeom prst="rect">
+            <a:avLst/>
+          </a:prstGeom>
+          <a:noFill/>
+        </p:spPr>
+        <p:txBody>
+          <a:bodyPr wrap="square" anchor="t" lIns="18288" rIns="18288" tIns="18288" bIns="18288">
+            <a:spAutoFit/>
+          </a:bodyPr>
+          <a:lstStyle/>
+          <a:p>
+            <a:pPr algn="l">
+              <a:spcAft>
+                <a:spcPts val="600"/>
+              </a:spcAft>
+            </a:pPr>
+            <a:r>
+              <a:rPr sz="1400" b="0">
+                <a:solidFill>
+                  <a:srgbClr val="9AA1AC"/>
+                </a:solidFill>
+                <a:latin typeface="Segoe UI"/>
+              </a:rPr>
+              <a:t>F1 Marine Debris, test MARIDA (15 сцен)</a:t>
+            </a:r>
+          </a:p>
+        </p:txBody>
+      </p:sp>
       <p:sp>
         <p:nvSpPr>
           <p:cNvPr id="6" name="TextBox 5"/>
@@ -10111,16 +12892,16 @@
         </p:nvSpPr>
         <p:spPr>
           <a:xfrm>
-            <a:off x="6400800" y="5348082"/>
-            <a:ext cx="5349240" cy="548640"/>
-          </a:xfrm>
-          <a:prstGeom prst="rect">
-            <a:avLst/>
-          </a:prstGeom>
-          <a:noFill/>
-        </p:spPr>
-        <p:txBody>
-          <a:bodyPr wrap="square" anchor="t" lIns="18288" rIns="18288" tIns="18288" bIns="18288">
+            <a:off x="6400800" y="2148840"/>
+            <a:ext cx="2155240" cy="384048"/>
+          </a:xfrm>
+          <a:prstGeom prst="rect">
+            <a:avLst/>
+          </a:prstGeom>
+          <a:noFill/>
+        </p:spPr>
+        <p:txBody>
+          <a:bodyPr wrap="square" anchor="ctr" lIns="18288" rIns="18288" tIns="18288" bIns="18288">
             <a:spAutoFit/>
           </a:bodyPr>
           <a:lstStyle/>
@@ -10131,20 +12912,469 @@
               </a:spcAft>
             </a:pPr>
             <a:r>
-              <a:rPr sz="1200" b="0">
-                <a:solidFill>
-                  <a:srgbClr val="9AA1AC"/>
-                </a:solidFill>
-                <a:latin typeface="Segoe UI"/>
-              </a:rPr>
-              <a:t>Северное море, HE460 трансекта 03: связь с полем не подтверждена (дрейф &gt; допуска), подозрительных пикселей в полосе нет</a:t>
-            </a:r>
-          </a:p>
-        </p:txBody>
-      </p:sp>
-      <p:sp>
-        <p:nvSpPr>
-          <p:cNvPr id="7" name="TextBox 6"/>
+              <a:rPr sz="1300" b="0">
+                <a:solidFill>
+                  <a:srgbClr val="EEEFF1"/>
+                </a:solidFill>
+                <a:latin typeface="Segoe UI"/>
+              </a:rPr>
+              <a:t>LightGBM (основной)</a:t>
+            </a:r>
+          </a:p>
+        </p:txBody>
+      </p:sp>
+      <p:sp>
+        <p:nvSpPr>
+          <p:cNvPr id="7" name="Rectangle 6"/>
+          <p:cNvSpPr/>
+          <p:nvPr/>
+        </p:nvSpPr>
+        <p:spPr>
+          <a:xfrm>
+            <a:off x="8647480" y="2212848"/>
+            <a:ext cx="1985530" cy="274320"/>
+          </a:xfrm>
+          <a:prstGeom prst="rect">
+            <a:avLst/>
+          </a:prstGeom>
+          <a:solidFill>
+            <a:srgbClr val="D9912E"/>
+          </a:solidFill>
+          <a:ln>
+            <a:noFill/>
+          </a:ln>
+          <a:effectLst/>
+        </p:spPr>
+        <p:style>
+          <a:lnRef idx="1">
+            <a:schemeClr val="accent1"/>
+          </a:lnRef>
+          <a:fillRef idx="3">
+            <a:schemeClr val="accent1"/>
+          </a:fillRef>
+          <a:effectRef idx="2">
+            <a:schemeClr val="accent1"/>
+          </a:effectRef>
+          <a:fontRef idx="minor">
+            <a:schemeClr val="lt1"/>
+          </a:fontRef>
+        </p:style>
+        <p:txBody>
+          <a:bodyPr rtlCol="0" anchor="ctr"/>
+          <a:lstStyle/>
+          <a:p>
+            <a:pPr algn="ctr"/>
+          </a:p>
+        </p:txBody>
+      </p:sp>
+      <p:sp>
+        <p:nvSpPr>
+          <p:cNvPr id="8" name="TextBox 7"/>
+          <p:cNvSpPr txBox="1"/>
+          <p:nvPr/>
+        </p:nvSpPr>
+        <p:spPr>
+          <a:xfrm>
+            <a:off x="10706163" y="2148840"/>
+            <a:ext cx="822960" cy="384048"/>
+          </a:xfrm>
+          <a:prstGeom prst="rect">
+            <a:avLst/>
+          </a:prstGeom>
+          <a:noFill/>
+        </p:spPr>
+        <p:txBody>
+          <a:bodyPr wrap="square" anchor="ctr" lIns="18288" rIns="18288" tIns="18288" bIns="18288">
+            <a:spAutoFit/>
+          </a:bodyPr>
+          <a:lstStyle/>
+          <a:p>
+            <a:pPr algn="l">
+              <a:spcAft>
+                <a:spcPts val="600"/>
+              </a:spcAft>
+            </a:pPr>
+            <a:r>
+              <a:rPr sz="1400" b="1">
+                <a:solidFill>
+                  <a:srgbClr val="EEEFF1"/>
+                </a:solidFill>
+                <a:latin typeface="Segoe UI"/>
+              </a:rPr>
+              <a:t>0.871</a:t>
+            </a:r>
+          </a:p>
+        </p:txBody>
+      </p:sp>
+      <p:sp>
+        <p:nvSpPr>
+          <p:cNvPr id="9" name="TextBox 8"/>
+          <p:cNvSpPr txBox="1"/>
+          <p:nvPr/>
+        </p:nvSpPr>
+        <p:spPr>
+          <a:xfrm>
+            <a:off x="6400800" y="2651760"/>
+            <a:ext cx="2155240" cy="384048"/>
+          </a:xfrm>
+          <a:prstGeom prst="rect">
+            <a:avLst/>
+          </a:prstGeom>
+          <a:noFill/>
+        </p:spPr>
+        <p:txBody>
+          <a:bodyPr wrap="square" anchor="ctr" lIns="18288" rIns="18288" tIns="18288" bIns="18288">
+            <a:spAutoFit/>
+          </a:bodyPr>
+          <a:lstStyle/>
+          <a:p>
+            <a:pPr algn="l">
+              <a:spcAft>
+                <a:spcPts val="600"/>
+              </a:spcAft>
+            </a:pPr>
+            <a:r>
+              <a:rPr sz="1300" b="0">
+                <a:solidFill>
+                  <a:srgbClr val="EEEFF1"/>
+                </a:solidFill>
+                <a:latin typeface="Segoe UI"/>
+              </a:rPr>
+              <a:t>RandomForest, протокол MARIDA</a:t>
+            </a:r>
+          </a:p>
+        </p:txBody>
+      </p:sp>
+      <p:sp>
+        <p:nvSpPr>
+          <p:cNvPr id="10" name="Rectangle 9"/>
+          <p:cNvSpPr/>
+          <p:nvPr/>
+        </p:nvSpPr>
+        <p:spPr>
+          <a:xfrm>
+            <a:off x="8647480" y="2715768"/>
+            <a:ext cx="1757570" cy="274320"/>
+          </a:xfrm>
+          <a:prstGeom prst="rect">
+            <a:avLst/>
+          </a:prstGeom>
+          <a:solidFill>
+            <a:srgbClr val="5B6370"/>
+          </a:solidFill>
+          <a:ln>
+            <a:noFill/>
+          </a:ln>
+          <a:effectLst/>
+        </p:spPr>
+        <p:style>
+          <a:lnRef idx="1">
+            <a:schemeClr val="accent1"/>
+          </a:lnRef>
+          <a:fillRef idx="3">
+            <a:schemeClr val="accent1"/>
+          </a:fillRef>
+          <a:effectRef idx="2">
+            <a:schemeClr val="accent1"/>
+          </a:effectRef>
+          <a:fontRef idx="minor">
+            <a:schemeClr val="lt1"/>
+          </a:fontRef>
+        </p:style>
+        <p:txBody>
+          <a:bodyPr rtlCol="0" anchor="ctr"/>
+          <a:lstStyle/>
+          <a:p>
+            <a:pPr algn="ctr"/>
+          </a:p>
+        </p:txBody>
+      </p:sp>
+      <p:sp>
+        <p:nvSpPr>
+          <p:cNvPr id="11" name="TextBox 10"/>
+          <p:cNvSpPr txBox="1"/>
+          <p:nvPr/>
+        </p:nvSpPr>
+        <p:spPr>
+          <a:xfrm>
+            <a:off x="10478203" y="2651760"/>
+            <a:ext cx="822960" cy="384048"/>
+          </a:xfrm>
+          <a:prstGeom prst="rect">
+            <a:avLst/>
+          </a:prstGeom>
+          <a:noFill/>
+        </p:spPr>
+        <p:txBody>
+          <a:bodyPr wrap="square" anchor="ctr" lIns="18288" rIns="18288" tIns="18288" bIns="18288">
+            <a:spAutoFit/>
+          </a:bodyPr>
+          <a:lstStyle/>
+          <a:p>
+            <a:pPr algn="l">
+              <a:spcAft>
+                <a:spcPts val="600"/>
+              </a:spcAft>
+            </a:pPr>
+            <a:r>
+              <a:rPr sz="1400" b="1">
+                <a:solidFill>
+                  <a:srgbClr val="EEEFF1"/>
+                </a:solidFill>
+                <a:latin typeface="Segoe UI"/>
+              </a:rPr>
+              <a:t>0.771</a:t>
+            </a:r>
+          </a:p>
+        </p:txBody>
+      </p:sp>
+      <p:sp>
+        <p:nvSpPr>
+          <p:cNvPr id="12" name="TextBox 11"/>
+          <p:cNvSpPr txBox="1"/>
+          <p:nvPr/>
+        </p:nvSpPr>
+        <p:spPr>
+          <a:xfrm>
+            <a:off x="6400800" y="3154680"/>
+            <a:ext cx="2155240" cy="384048"/>
+          </a:xfrm>
+          <a:prstGeom prst="rect">
+            <a:avLst/>
+          </a:prstGeom>
+          <a:noFill/>
+        </p:spPr>
+        <p:txBody>
+          <a:bodyPr wrap="square" anchor="ctr" lIns="18288" rIns="18288" tIns="18288" bIns="18288">
+            <a:spAutoFit/>
+          </a:bodyPr>
+          <a:lstStyle/>
+          <a:p>
+            <a:pPr algn="l">
+              <a:spcAft>
+                <a:spcPts val="600"/>
+              </a:spcAft>
+            </a:pPr>
+            <a:r>
+              <a:rPr sz="1300" b="0">
+                <a:solidFill>
+                  <a:srgbClr val="EEEFF1"/>
+                </a:solidFill>
+                <a:latin typeface="Segoe UI"/>
+              </a:rPr>
+              <a:t>U-Net MARIDA, веса авторов</a:t>
+            </a:r>
+          </a:p>
+        </p:txBody>
+      </p:sp>
+      <p:sp>
+        <p:nvSpPr>
+          <p:cNvPr id="13" name="Rectangle 12"/>
+          <p:cNvSpPr/>
+          <p:nvPr/>
+        </p:nvSpPr>
+        <p:spPr>
+          <a:xfrm>
+            <a:off x="8647480" y="3218688"/>
+            <a:ext cx="1142079" cy="274320"/>
+          </a:xfrm>
+          <a:prstGeom prst="rect">
+            <a:avLst/>
+          </a:prstGeom>
+          <a:solidFill>
+            <a:srgbClr val="5B6370"/>
+          </a:solidFill>
+          <a:ln>
+            <a:noFill/>
+          </a:ln>
+          <a:effectLst/>
+        </p:spPr>
+        <p:style>
+          <a:lnRef idx="1">
+            <a:schemeClr val="accent1"/>
+          </a:lnRef>
+          <a:fillRef idx="3">
+            <a:schemeClr val="accent1"/>
+          </a:fillRef>
+          <a:effectRef idx="2">
+            <a:schemeClr val="accent1"/>
+          </a:effectRef>
+          <a:fontRef idx="minor">
+            <a:schemeClr val="lt1"/>
+          </a:fontRef>
+        </p:style>
+        <p:txBody>
+          <a:bodyPr rtlCol="0" anchor="ctr"/>
+          <a:lstStyle/>
+          <a:p>
+            <a:pPr algn="ctr"/>
+          </a:p>
+        </p:txBody>
+      </p:sp>
+      <p:sp>
+        <p:nvSpPr>
+          <p:cNvPr id="14" name="TextBox 13"/>
+          <p:cNvSpPr txBox="1"/>
+          <p:nvPr/>
+        </p:nvSpPr>
+        <p:spPr>
+          <a:xfrm>
+            <a:off x="9862711" y="3154680"/>
+            <a:ext cx="822960" cy="384048"/>
+          </a:xfrm>
+          <a:prstGeom prst="rect">
+            <a:avLst/>
+          </a:prstGeom>
+          <a:noFill/>
+        </p:spPr>
+        <p:txBody>
+          <a:bodyPr wrap="square" anchor="ctr" lIns="18288" rIns="18288" tIns="18288" bIns="18288">
+            <a:spAutoFit/>
+          </a:bodyPr>
+          <a:lstStyle/>
+          <a:p>
+            <a:pPr algn="l">
+              <a:spcAft>
+                <a:spcPts val="600"/>
+              </a:spcAft>
+            </a:pPr>
+            <a:r>
+              <a:rPr sz="1400" b="1">
+                <a:solidFill>
+                  <a:srgbClr val="EEEFF1"/>
+                </a:solidFill>
+                <a:latin typeface="Segoe UI"/>
+              </a:rPr>
+              <a:t>0.501</a:t>
+            </a:r>
+          </a:p>
+        </p:txBody>
+      </p:sp>
+      <p:sp>
+        <p:nvSpPr>
+          <p:cNvPr id="15" name="TextBox 14"/>
+          <p:cNvSpPr txBox="1"/>
+          <p:nvPr/>
+        </p:nvSpPr>
+        <p:spPr>
+          <a:xfrm>
+            <a:off x="6400800" y="3657600"/>
+            <a:ext cx="2155240" cy="384048"/>
+          </a:xfrm>
+          <a:prstGeom prst="rect">
+            <a:avLst/>
+          </a:prstGeom>
+          <a:noFill/>
+        </p:spPr>
+        <p:txBody>
+          <a:bodyPr wrap="square" anchor="ctr" lIns="18288" rIns="18288" tIns="18288" bIns="18288">
+            <a:spAutoFit/>
+          </a:bodyPr>
+          <a:lstStyle/>
+          <a:p>
+            <a:pPr algn="l">
+              <a:spcAft>
+                <a:spcPts val="600"/>
+              </a:spcAft>
+            </a:pPr>
+            <a:r>
+              <a:rPr sz="1300" b="0">
+                <a:solidFill>
+                  <a:srgbClr val="EEEFF1"/>
+                </a:solidFill>
+                <a:latin typeface="Segoe UI"/>
+              </a:rPr>
+              <a:t>окно FDI × NDVI</a:t>
+            </a:r>
+          </a:p>
+        </p:txBody>
+      </p:sp>
+      <p:sp>
+        <p:nvSpPr>
+          <p:cNvPr id="16" name="Rectangle 15"/>
+          <p:cNvSpPr/>
+          <p:nvPr/>
+        </p:nvSpPr>
+        <p:spPr>
+          <a:xfrm>
+            <a:off x="8647480" y="3721608"/>
+            <a:ext cx="95743" cy="274320"/>
+          </a:xfrm>
+          <a:prstGeom prst="rect">
+            <a:avLst/>
+          </a:prstGeom>
+          <a:solidFill>
+            <a:srgbClr val="5B6370"/>
+          </a:solidFill>
+          <a:ln>
+            <a:noFill/>
+          </a:ln>
+          <a:effectLst/>
+        </p:spPr>
+        <p:style>
+          <a:lnRef idx="1">
+            <a:schemeClr val="accent1"/>
+          </a:lnRef>
+          <a:fillRef idx="3">
+            <a:schemeClr val="accent1"/>
+          </a:fillRef>
+          <a:effectRef idx="2">
+            <a:schemeClr val="accent1"/>
+          </a:effectRef>
+          <a:fontRef idx="minor">
+            <a:schemeClr val="lt1"/>
+          </a:fontRef>
+        </p:style>
+        <p:txBody>
+          <a:bodyPr rtlCol="0" anchor="ctr"/>
+          <a:lstStyle/>
+          <a:p>
+            <a:pPr algn="ctr"/>
+          </a:p>
+        </p:txBody>
+      </p:sp>
+      <p:sp>
+        <p:nvSpPr>
+          <p:cNvPr id="17" name="TextBox 16"/>
+          <p:cNvSpPr txBox="1"/>
+          <p:nvPr/>
+        </p:nvSpPr>
+        <p:spPr>
+          <a:xfrm>
+            <a:off x="8816375" y="3657600"/>
+            <a:ext cx="822960" cy="384048"/>
+          </a:xfrm>
+          <a:prstGeom prst="rect">
+            <a:avLst/>
+          </a:prstGeom>
+          <a:noFill/>
+        </p:spPr>
+        <p:txBody>
+          <a:bodyPr wrap="square" anchor="ctr" lIns="18288" rIns="18288" tIns="18288" bIns="18288">
+            <a:spAutoFit/>
+          </a:bodyPr>
+          <a:lstStyle/>
+          <a:p>
+            <a:pPr algn="l">
+              <a:spcAft>
+                <a:spcPts val="600"/>
+              </a:spcAft>
+            </a:pPr>
+            <a:r>
+              <a:rPr sz="1400" b="1">
+                <a:solidFill>
+                  <a:srgbClr val="EEEFF1"/>
+                </a:solidFill>
+                <a:latin typeface="Segoe UI"/>
+              </a:rPr>
+              <a:t>0.042</a:t>
+            </a:r>
+          </a:p>
+        </p:txBody>
+      </p:sp>
+      <p:sp>
+        <p:nvSpPr>
+          <p:cNvPr id="18" name="TextBox 17"/>
           <p:cNvSpPr txBox="1"/>
           <p:nvPr/>
         </p:nvSpPr>
@@ -10176,14 +13406,14 @@
                 </a:solidFill>
                 <a:latin typeface="Segoe UI"/>
               </a:rPr>
-              <a:t>Источник: service/routes_v3.py; reports/selfcheck/consistency_latest.json</a:t>
-            </a:r>
-          </a:p>
-        </p:txBody>
-      </p:sp>
-      <p:sp>
-        <p:nvSpPr>
-          <p:cNvPr id="8" name="TextBox 7"/>
+              <a:t>Источник: reports/detector_v2/experiments.md, unet_test.json; configs/detector_v2_eval.yaml</a:t>
+            </a:r>
+          </a:p>
+        </p:txBody>
+      </p:sp>
+      <p:sp>
+        <p:nvSpPr>
+          <p:cNvPr id="19" name="TextBox 18"/>
           <p:cNvSpPr txBox="1"/>
           <p:nvPr/>
         </p:nvSpPr>
@@ -10215,7 +13445,7 @@
                 </a:solidFill>
                 <a:latin typeface="Segoe UI"/>
               </a:rPr>
-              <a:t>2:32</a:t>
+              <a:t>2:33</a:t>
             </a:r>
           </a:p>
         </p:txBody>

--- a/reports/case_deck.pptx
+++ b/reports/case_deck.pptx
@@ -590,7 +590,7 @@
           <a:lstStyle/>
           <a:p>
             <a:r>
-              <a:t>[2:55–3:17] Количество мы считаем раздельно. По полю — штуки на квадратный километр с интервалом Пуассона. По снимку — только доля покрытия подозрительного материала, это не мусор и не штуки. Связать их может только калибровка на парах A с сигналом, а таких пар 0; нужно от 4 до 12.</a:t>
+              <a:t>[3:09–3:32] Концентрация: C равно N на A, интервал Пуассона, контрольный пример — 60.0. Модели сравниваем с медианой на участках маршрута. На dev ridge выигрывает слабо, а на отложенном test, посчитанном один раз, — 30.0 против 25.2 у медианы. Правило записано до открытия test, поэтому на карте — медиана. Модель не спасаем.</a:t>
             </a:r>
           </a:p>
         </p:txBody>
@@ -660,7 +660,7 @@
           <a:lstStyle/>
           <a:p>
             <a:r>
-              <a:t>[3:17–3:30] Нефть — отдельный эксперимент. На разметке MADOS голова лучше простого индекса, но известный разлив Wakashio на реальном снимке она не нашла. Поэтому слой выключен и подписан как эксперимент.</a:t>
+              <a:t>[3:32–3:47] Карта повторяет отчёт: три слоя и два статуса полосы. Эта пара отклонена по дрейфу — «связь не подтверждена»; пикселей детектора в полосе нет, концентрация по снимку недоступна. Выгрузка сверена с API самопроверкой.</a:t>
             </a:r>
           </a:p>
         </p:txBody>
@@ -730,7 +730,7 @@
           <a:lstStyle/>
           <a:p>
             <a:r>
-              <a:t>[3:30–4:00] Детектор — пиксельный LightGBM. На test MARIDA F1 0.871, RandomForest — 0.771, индексы FDI — 0.042; саргассум и мутную воду он не путает. На снимках пар мы выключили гармонизацию каналов — решение по MARIDA val, не по тесту. Сейчас 5 объектов на 22 сценах и ни одного в полосах; вне полосы — судно, это верное срабатывание. Прежний режим давал 975 объектов, почти всё — фон моря.</a:t>
+              <a:t>[3:47–4:16] Наш вклад — не модель, а решения, которые защищают выводы от самообмана. Допуск по дрейфу в реестре пар, сплит по участкам маршрута, найденный после утечки через соседей дня, test один раз по заранее записанному правилу, отказ от гармонизации по val, геометрия трансект по первоисточникам и один источник чисел с тестом. Разметка MARIDA, протокол RandomForest и индекс FDI — готовые, мы с ними сравниваемся.</a:t>
             </a:r>
           </a:p>
         </p:txBody>
@@ -800,7 +800,7 @@
           <a:lstStyle/>
           <a:p>
             <a:r>
-              <a:t>[4:00–4:23] Концентрация: C равно N на A, интервал Пуассона, контрольный пример — 60.0. Модели сравниваем с медианой на участках маршрута. На dev ridge выигрывает слабо, а на отложенном test, посчитанном один раз, — 30.0 против 25.2 у медианы. Правило записано до открытия test, поэтому на карте — медиана. Модель не спасаем.</a:t>
+              <a:t>[4:16–4:28] Ограничения называем сами: перенос на снимок не доказан, данных мало, интервалы недопокрывают. Развитие — трансекты под пролёт с записанным временем и больше рейсов.</a:t>
             </a:r>
           </a:p>
         </p:txBody>
@@ -870,7 +870,7 @@
           <a:lstStyle/>
           <a:p>
             <a:r>
-              <a:t>[4:23–4:41] Связь снимка с полем мы всё же проверили. На 11 парах FDI даёт ρ −0.75, но после поправки Холма p 0.12, а случайная вода той же сцены даёт почти то же. Вывод — данных мало: нужно около 33 независимых пар.</a:t>
+              <a:t>[4:28–4:40] Всё воспроизводится одной командой без сети; чистый клон до карты — 7,5 минуты, числа совпали. Спасибо, готовы к вопросам.</a:t>
             </a:r>
           </a:p>
         </p:txBody>
@@ -940,7 +940,7 @@
           <a:lstStyle/>
           <a:p>
             <a:r>
-              <a:t>[4:41–4:56] Карта повторяет отчёт: три слоя и два статуса полосы. Эта пара отклонена по дрейфу — «связь не подтверждена»; пикселей детектора в полосе нет, концентрация по снимку недоступна. Выгрузка сверена с API самопроверкой.</a:t>
+              <a:t>[прил.–прил.] На новых данных мы попробовали дообучить детектор — 11 вариантов по правилу, записанному заранее. Не прошёл ни один: суда и нити спектрально похожи, выигрыш на одном ломает другое. В сервисе остался прежний детектор. Официальный U-Net MARIDA на том же test — F1 0.501, наш LightGBM — 0.871.</a:t>
             </a:r>
           </a:p>
         </p:txBody>
@@ -1010,7 +1010,7 @@
           <a:lstStyle/>
           <a:p>
             <a:r>
-              <a:t>[4:56–5:25] Наш вклад — не модель, а решения, которые защищают выводы от самообмана. Допуск по дрейфу в реестре пар, сплит по участкам маршрута, найденный после утечки через соседей дня, test один раз по заранее записанному правилу, отказ от гармонизации по val, геометрия трансект по первоисточникам и один источник чисел с тестом. Разметка MARIDA, протокол RandomForest и индекс FDI — готовые, мы с ними сравниваемся.</a:t>
+              <a:t>[прил.–прил.] Количество мы считаем раздельно. По полю — штуки на квадратный километр с интервалом Пуассона. По снимку — только доля покрытия подозрительного материала, это не мусор и не штуки. Связать их может только калибровка на парах A с сигналом, а таких пар 0; нужно от 4 до 12.</a:t>
             </a:r>
           </a:p>
         </p:txBody>
@@ -1080,7 +1080,7 @@
           <a:lstStyle/>
           <a:p>
             <a:r>
-              <a:t>[5:25–5:38] Из правила дрейфа мы сделали инструмент «Подобрать снимок»: он говорит, когда выходить на трансекту. Для Чёрного моря это окна UTC у 12 событий. Геометрию трансект восстановили по PANGAEA.</a:t>
+              <a:t>[прил.–прил.] Нефть — отдельный эксперимент. На разметке MADOS голова лучше простого индекса, но известный разлив Wakashio на реальном снимке она не нашла. Поэтому слой выключен и подписан как эксперимент.</a:t>
             </a:r>
           </a:p>
         </p:txBody>
@@ -1150,7 +1150,7 @@
           <a:lstStyle/>
           <a:p>
             <a:r>
-              <a:t>[5:38–5:50] Ограничения называем сами: перенос на снимок не доказан, данных мало, интервалы недопокрывают. Развитие — трансекты под пролёт с записанным временем и больше рейсов.</a:t>
+              <a:t>[прил.–прил.] Связь снимка с полем мы всё же проверили. На 11 парах FDI даёт ρ −0.75, но после поправки Холма p 0.12, а случайная вода той же сцены даёт почти то же. Вывод — данных мало: нужно около 33 независимых пар.</a:t>
             </a:r>
           </a:p>
         </p:txBody>
@@ -1220,7 +1220,7 @@
           <a:lstStyle/>
           <a:p>
             <a:r>
-              <a:t>[5:50–6:02] Всё воспроизводится одной командой без сети; чистый клон до карты — 7,5 минуты, числа совпали. Спасибо, готовы к вопросам.</a:t>
+              <a:t>[прил.–прил.] Из правила дрейфа мы сделали инструмент «Подобрать снимок»: он говорит, когда выходить на трансекту. Для Чёрного моря это окна UTC у 12 событий. Геометрию трансект восстановили по PANGAEA.</a:t>
             </a:r>
           </a:p>
         </p:txBody>
@@ -1710,7 +1710,7 @@
           <a:lstStyle/>
           <a:p>
             <a:r>
-              <a:t>[2:12–2:33] Для детектора мы собрали новые метки: подтверждённые скопления PLP, FloatingObjects и нити Cózar — это B, суда и облака — D. Утечек с MARIDA и MADOS нет, проверяли по дате и по самим пикселям. Текущий детектор на них почти не видит нити и путает суда.</a:t>
+              <a:t>[2:12–2:39] Для детектора мы собрали новые метки: подтверждённые скопления PLP, FloatingObjects и нити Cózar — это B, суда и облака — D. Утечек с MARIDA и MADOS нет, проверяли по дате и по самим пикселям. Текущий детектор на них почти не видит нити и путает суда, а дообучение по заранее записанному правилу не прошло — в сервисе прежний детектор.</a:t>
             </a:r>
           </a:p>
         </p:txBody>
@@ -1780,7 +1780,7 @@
           <a:lstStyle/>
           <a:p>
             <a:r>
-              <a:t>[2:33–2:55] На новых данных мы попробовали дообучить детектор — 11 вариантов по правилу, записанному заранее. Не прошёл ни один: суда и нити спектрально похожи, выигрыш на одном ломает другое. В сервисе остался прежний детектор. Официальный U-Net MARIDA на том же test — F1 0.501, наш LightGBM — 0.871.</a:t>
+              <a:t>[2:39–3:09] Детектор — пиксельный LightGBM. На test MARIDA F1 0.871, RandomForest — 0.771, индексы FDI — 0.042; саргассум и мутную воду он не путает. На снимках пар мы выключили гармонизацию каналов — решение по MARIDA val, не по тесту. Сейчас 5 объектов на 22 сценах и ни одного в полосах; вне полосы — судно, это верное срабатывание. Прежний режим давал 975 объектов, почти всё — фон моря.</a:t>
             </a:r>
           </a:p>
         </p:txBody>
@@ -5203,7 +5203,7 @@
                 </a:solidFill>
                 <a:latin typeface="Segoe UI"/>
               </a:rPr>
-              <a:t>10 · Количество: поле и снимок раздельно</a:t>
+              <a:t>10 · Концентрация</a:t>
             </a:r>
           </a:p>
         </p:txBody>
@@ -5242,7 +5242,7 @@
                 </a:solidFill>
                 <a:latin typeface="Segoe UI"/>
               </a:rPr>
-              <a:t>Количество раздельно: поле — шт./км², снимок — доля покрытия; калибровки нет, нужно 4–12 пар A с сигналом</a:t>
+              <a:t>C = N/A сошлась с опубликованной у 467 из 467 строк; на отложенном test модель не лучше медианы — на карте медиана</a:t>
             </a:r>
           </a:p>
         </p:txBody>
@@ -5281,7 +5281,7 @@
                 </a:solidFill>
                 <a:latin typeface="Segoe UI"/>
               </a:rPr>
-              <a:t>• Поле (измерение): S2 ΣN/ΣA = 697 / 12.94 км² = 53.9 [49.9–58.0] шт./км²</a:t>
+              <a:t>• Контроль: 12 / 0.20 км² = 60.0 шт./км², 95 % ДИ Пуассона 31.0–104.8; C = N/A совпала с опубликованной у 467 из 467 строк</a:t>
             </a:r>
           </a:p>
           <a:p>
@@ -5297,7 +5297,7 @@
                 </a:solidFill>
                 <a:latin typeface="Segoe UI"/>
               </a:rPr>
-              <a:t>• Снимок: доля покрытия подозрительного материала, м²/км² пригодной воды; медиана на 64 живых сценах 3.2; это не мусор и не шт./км²</a:t>
+              <a:t>• Сплит: 5 участков маршрута + буфер 1 сут; протокол и правило выбора записаны до CV</a:t>
             </a:r>
           </a:p>
           <a:p>
@@ -5313,7 +5313,7 @@
                 </a:solidFill>
                 <a:latin typeface="Segoe UI"/>
               </a:rPr>
-              <a:t>• Калибровка ln C = ln k + b · ln S требует пар A с ненулевым сигналом — их 0; в 11 полосах CSV сигнал 0</a:t>
+              <a:t>• Dev CV S2: ridge_log 28.5 против медианы 44.2, ΔMAE [−31.6; −0.3] — слабый выигрыш (с Бонферрони [−38.7; 7.3])</a:t>
             </a:r>
           </a:p>
           <a:p>
@@ -5329,43 +5329,105 @@
                 </a:solidFill>
                 <a:latin typeface="Segoe UI"/>
               </a:rPr>
-              <a:t>• Нужно: k в пределах ×/÷2 — 4–12 пар с сигналом; для связи r = 0.5 — 30 пар; обследований в 3.5 раза больше</a:t>
-            </a:r>
-          </a:p>
-          <a:p>
-            <a:pPr algn="l">
-              <a:spcAft>
-                <a:spcPts val="1000"/>
-              </a:spcAft>
-            </a:pPr>
-            <a:r>
-              <a:rPr sz="1600" b="0">
+              <a:t>• Отложенный test (25.09.2026 19:15, один раз): S2 30.0 против 25.2 (основная модель не лучше медианы); S1 370.0 против 371.1 (разницы с медианой нет)</a:t>
+            </a:r>
+          </a:p>
+        </p:txBody>
+      </p:sp>
+      <p:sp>
+        <p:nvSpPr>
+          <p:cNvPr id="5" name="TextBox 4"/>
+          <p:cNvSpPr txBox="1"/>
+          <p:nvPr/>
+        </p:nvSpPr>
+        <p:spPr>
+          <a:xfrm>
+            <a:off x="6400800" y="1691640"/>
+            <a:ext cx="5349240" cy="365760"/>
+          </a:xfrm>
+          <a:prstGeom prst="rect">
+            <a:avLst/>
+          </a:prstGeom>
+          <a:noFill/>
+        </p:spPr>
+        <p:txBody>
+          <a:bodyPr wrap="square" anchor="t" lIns="18288" rIns="18288" tIns="18288" bIns="18288">
+            <a:spAutoFit/>
+          </a:bodyPr>
+          <a:lstStyle/>
+          <a:p>
+            <a:pPr algn="l">
+              <a:spcAft>
+                <a:spcPts val="600"/>
+              </a:spcAft>
+            </a:pPr>
+            <a:r>
+              <a:rPr sz="1400" b="0">
+                <a:solidFill>
+                  <a:srgbClr val="9AA1AC"/>
+                </a:solidFill>
+                <a:latin typeface="Segoe UI"/>
+              </a:rPr>
+              <a:t>S2, отложенный test (14 событий): MAE, шт./км²</a:t>
+            </a:r>
+          </a:p>
+        </p:txBody>
+      </p:sp>
+      <p:sp>
+        <p:nvSpPr>
+          <p:cNvPr id="6" name="TextBox 5"/>
+          <p:cNvSpPr txBox="1"/>
+          <p:nvPr/>
+        </p:nvSpPr>
+        <p:spPr>
+          <a:xfrm>
+            <a:off x="6400800" y="2148840"/>
+            <a:ext cx="2155240" cy="384048"/>
+          </a:xfrm>
+          <a:prstGeom prst="rect">
+            <a:avLst/>
+          </a:prstGeom>
+          <a:noFill/>
+        </p:spPr>
+        <p:txBody>
+          <a:bodyPr wrap="square" anchor="ctr" lIns="18288" rIns="18288" tIns="18288" bIns="18288">
+            <a:spAutoFit/>
+          </a:bodyPr>
+          <a:lstStyle/>
+          <a:p>
+            <a:pPr algn="l">
+              <a:spcAft>
+                <a:spcPts val="600"/>
+              </a:spcAft>
+            </a:pPr>
+            <a:r>
+              <a:rPr sz="1300" b="0">
                 <a:solidFill>
                   <a:srgbClr val="EEEFF1"/>
                 </a:solidFill>
                 <a:latin typeface="Segoe UI"/>
               </a:rPr>
-              <a:t>• «Площадь / размер = штуки» — только сценарий: 200 м² маски = 160–500000 предметов; массу не оцениваем</a:t>
-            </a:r>
-          </a:p>
-        </p:txBody>
-      </p:sp>
-      <p:sp>
-        <p:nvSpPr>
-          <p:cNvPr id="5" name="Rectangle 4"/>
+              <a:t>ridge_log (основная)</a:t>
+            </a:r>
+          </a:p>
+        </p:txBody>
+      </p:sp>
+      <p:sp>
+        <p:nvSpPr>
+          <p:cNvPr id="7" name="Rectangle 6"/>
           <p:cNvSpPr/>
           <p:nvPr/>
         </p:nvSpPr>
         <p:spPr>
           <a:xfrm>
-            <a:off x="6400800" y="1691640"/>
-            <a:ext cx="5349240" cy="1554480"/>
+            <a:off x="8647480" y="2212848"/>
+            <a:ext cx="2279599" cy="274320"/>
           </a:xfrm>
           <a:prstGeom prst="rect">
             <a:avLst/>
           </a:prstGeom>
           <a:solidFill>
-            <a:srgbClr val="1B1E24"/>
+            <a:srgbClr val="5B6370"/>
           </a:solidFill>
           <a:ln>
             <a:noFill/>
@@ -5396,14 +5458,175 @@
       </p:sp>
       <p:sp>
         <p:nvSpPr>
-          <p:cNvPr id="6" name="TextBox 5"/>
-          <p:cNvSpPr txBox="1"/>
-          <p:nvPr/>
-        </p:nvSpPr>
-        <p:spPr>
-          <a:xfrm>
-            <a:off x="6675120" y="1783080"/>
-            <a:ext cx="4800600" cy="822960"/>
+          <p:cNvPr id="8" name="TextBox 7"/>
+          <p:cNvSpPr txBox="1"/>
+          <p:nvPr/>
+        </p:nvSpPr>
+        <p:spPr>
+          <a:xfrm>
+            <a:off x="11000232" y="2148840"/>
+            <a:ext cx="822960" cy="384048"/>
+          </a:xfrm>
+          <a:prstGeom prst="rect">
+            <a:avLst/>
+          </a:prstGeom>
+          <a:noFill/>
+        </p:spPr>
+        <p:txBody>
+          <a:bodyPr wrap="square" anchor="ctr" lIns="18288" rIns="18288" tIns="18288" bIns="18288">
+            <a:spAutoFit/>
+          </a:bodyPr>
+          <a:lstStyle/>
+          <a:p>
+            <a:pPr algn="l">
+              <a:spcAft>
+                <a:spcPts val="600"/>
+              </a:spcAft>
+            </a:pPr>
+            <a:r>
+              <a:rPr sz="1400" b="1">
+                <a:solidFill>
+                  <a:srgbClr val="EEEFF1"/>
+                </a:solidFill>
+                <a:latin typeface="Segoe UI"/>
+              </a:rPr>
+              <a:t>30.0</a:t>
+            </a:r>
+          </a:p>
+        </p:txBody>
+      </p:sp>
+      <p:sp>
+        <p:nvSpPr>
+          <p:cNvPr id="9" name="TextBox 8"/>
+          <p:cNvSpPr txBox="1"/>
+          <p:nvPr/>
+        </p:nvSpPr>
+        <p:spPr>
+          <a:xfrm>
+            <a:off x="6400800" y="2651760"/>
+            <a:ext cx="2155240" cy="384048"/>
+          </a:xfrm>
+          <a:prstGeom prst="rect">
+            <a:avLst/>
+          </a:prstGeom>
+          <a:noFill/>
+        </p:spPr>
+        <p:txBody>
+          <a:bodyPr wrap="square" anchor="ctr" lIns="18288" rIns="18288" tIns="18288" bIns="18288">
+            <a:spAutoFit/>
+          </a:bodyPr>
+          <a:lstStyle/>
+          <a:p>
+            <a:pPr algn="l">
+              <a:spcAft>
+                <a:spcPts val="600"/>
+              </a:spcAft>
+            </a:pPr>
+            <a:r>
+              <a:rPr sz="1300" b="0">
+                <a:solidFill>
+                  <a:srgbClr val="EEEFF1"/>
+                </a:solidFill>
+                <a:latin typeface="Segoe UI"/>
+              </a:rPr>
+              <a:t>медиана dev (на карте)</a:t>
+            </a:r>
+          </a:p>
+        </p:txBody>
+      </p:sp>
+      <p:sp>
+        <p:nvSpPr>
+          <p:cNvPr id="10" name="Rectangle 9"/>
+          <p:cNvSpPr/>
+          <p:nvPr/>
+        </p:nvSpPr>
+        <p:spPr>
+          <a:xfrm>
+            <a:off x="8647480" y="2715768"/>
+            <a:ext cx="1914863" cy="274320"/>
+          </a:xfrm>
+          <a:prstGeom prst="rect">
+            <a:avLst/>
+          </a:prstGeom>
+          <a:solidFill>
+            <a:srgbClr val="D9912E"/>
+          </a:solidFill>
+          <a:ln>
+            <a:noFill/>
+          </a:ln>
+          <a:effectLst/>
+        </p:spPr>
+        <p:style>
+          <a:lnRef idx="1">
+            <a:schemeClr val="accent1"/>
+          </a:lnRef>
+          <a:fillRef idx="3">
+            <a:schemeClr val="accent1"/>
+          </a:fillRef>
+          <a:effectRef idx="2">
+            <a:schemeClr val="accent1"/>
+          </a:effectRef>
+          <a:fontRef idx="minor">
+            <a:schemeClr val="lt1"/>
+          </a:fontRef>
+        </p:style>
+        <p:txBody>
+          <a:bodyPr rtlCol="0" anchor="ctr"/>
+          <a:lstStyle/>
+          <a:p>
+            <a:pPr algn="ctr"/>
+          </a:p>
+        </p:txBody>
+      </p:sp>
+      <p:sp>
+        <p:nvSpPr>
+          <p:cNvPr id="11" name="TextBox 10"/>
+          <p:cNvSpPr txBox="1"/>
+          <p:nvPr/>
+        </p:nvSpPr>
+        <p:spPr>
+          <a:xfrm>
+            <a:off x="10635496" y="2651760"/>
+            <a:ext cx="822960" cy="384048"/>
+          </a:xfrm>
+          <a:prstGeom prst="rect">
+            <a:avLst/>
+          </a:prstGeom>
+          <a:noFill/>
+        </p:spPr>
+        <p:txBody>
+          <a:bodyPr wrap="square" anchor="ctr" lIns="18288" rIns="18288" tIns="18288" bIns="18288">
+            <a:spAutoFit/>
+          </a:bodyPr>
+          <a:lstStyle/>
+          <a:p>
+            <a:pPr algn="l">
+              <a:spcAft>
+                <a:spcPts val="600"/>
+              </a:spcAft>
+            </a:pPr>
+            <a:r>
+              <a:rPr sz="1400" b="1">
+                <a:solidFill>
+                  <a:srgbClr val="EEEFF1"/>
+                </a:solidFill>
+                <a:latin typeface="Segoe UI"/>
+              </a:rPr>
+              <a:t>25.2</a:t>
+            </a:r>
+          </a:p>
+        </p:txBody>
+      </p:sp>
+      <p:sp>
+        <p:nvSpPr>
+          <p:cNvPr id="12" name="TextBox 11"/>
+          <p:cNvSpPr txBox="1"/>
+          <p:nvPr/>
+        </p:nvSpPr>
+        <p:spPr>
+          <a:xfrm>
+            <a:off x="6400800" y="3200400"/>
+            <a:ext cx="5349240" cy="365760"/>
           </a:xfrm>
           <a:prstGeom prst="rect">
             <a:avLst/>
@@ -5422,59 +5645,20 @@
               </a:spcAft>
             </a:pPr>
             <a:r>
-              <a:rPr sz="4800" b="1">
-                <a:solidFill>
-                  <a:srgbClr val="D9912E"/>
-                </a:solidFill>
-                <a:latin typeface="Segoe UI"/>
-              </a:rPr>
-              <a:t>4–12</a:t>
-            </a:r>
-          </a:p>
-        </p:txBody>
-      </p:sp>
-      <p:sp>
-        <p:nvSpPr>
-          <p:cNvPr id="7" name="TextBox 6"/>
-          <p:cNvSpPr txBox="1"/>
-          <p:nvPr/>
-        </p:nvSpPr>
-        <p:spPr>
-          <a:xfrm>
-            <a:off x="6675120" y="2606040"/>
-            <a:ext cx="4800600" cy="594360"/>
-          </a:xfrm>
-          <a:prstGeom prst="rect">
-            <a:avLst/>
-          </a:prstGeom>
-          <a:noFill/>
-        </p:spPr>
-        <p:txBody>
-          <a:bodyPr wrap="square" anchor="t" lIns="18288" rIns="18288" tIns="18288" bIns="18288">
-            <a:spAutoFit/>
-          </a:bodyPr>
-          <a:lstStyle/>
-          <a:p>
-            <a:pPr algn="l">
-              <a:spcAft>
-                <a:spcPts val="600"/>
-              </a:spcAft>
-            </a:pPr>
-            <a:r>
               <a:rPr sz="1300" b="0">
                 <a:solidFill>
-                  <a:srgbClr val="EEEFF1"/>
-                </a:solidFill>
-                <a:latin typeface="Segoe UI"/>
-              </a:rPr>
-              <a:t>независимых пар A с ненулевым сигналом нужно для калибровки (есть 0)</a:t>
-            </a:r>
-          </a:p>
-        </p:txBody>
-      </p:sp>
-      <p:sp>
-        <p:nvSpPr>
-          <p:cNvPr id="8" name="TextBox 7"/>
+                  <a:srgbClr val="9AA1AC"/>
+                </a:solidFill>
+                <a:latin typeface="Segoe UI"/>
+              </a:rPr>
+              <a:t>ΔMAE +4.8 [−1.6; +12.9] — ДИ содержит 0</a:t>
+            </a:r>
+          </a:p>
+        </p:txBody>
+      </p:sp>
+      <p:sp>
+        <p:nvSpPr>
+          <p:cNvPr id="13" name="TextBox 12"/>
           <p:cNvSpPr txBox="1"/>
           <p:nvPr/>
         </p:nvSpPr>
@@ -5506,14 +5690,14 @@
                 </a:solidFill>
                 <a:latin typeface="Segoe UI"/>
               </a:rPr>
-              <a:t>Источник: reports/quantity/*.json, docs/QUANTITY.md (final_numbers → case.sections.quantity)</a:t>
-            </a:r>
-          </a:p>
-        </p:txBody>
-      </p:sp>
-      <p:sp>
-        <p:nvSpPr>
-          <p:cNvPr id="9" name="TextBox 8"/>
+              <a:t>Источник: reports/case_conc/dev_cv.json, final_test.json; configs/case_selection.yaml: final_test</a:t>
+            </a:r>
+          </a:p>
+        </p:txBody>
+      </p:sp>
+      <p:sp>
+        <p:nvSpPr>
+          <p:cNvPr id="14" name="TextBox 13"/>
           <p:cNvSpPr txBox="1"/>
           <p:nvPr/>
         </p:nvSpPr>
@@ -5545,7 +5729,7 @@
                 </a:solidFill>
                 <a:latin typeface="Segoe UI"/>
               </a:rPr>
-              <a:t>2:55</a:t>
+              <a:t>3:09</a:t>
             </a:r>
           </a:p>
         </p:txBody>
@@ -5610,7 +5794,7 @@
                 </a:solidFill>
                 <a:latin typeface="Segoe UI"/>
               </a:rPr>
-              <a:t>11 · Нефтяное пятно — эксперимент</a:t>
+              <a:t>11 · Карта</a:t>
             </a:r>
           </a:p>
         </p:txBody>
@@ -5643,13 +5827,13 @@
               </a:spcAft>
             </a:pPr>
             <a:r>
-              <a:rPr sz="2600" b="1">
+              <a:rPr sz="2300" b="1">
                 <a:solidFill>
                   <a:srgbClr val="EEEFF1"/>
                 </a:solidFill>
                 <a:latin typeface="Segoe UI"/>
               </a:rPr>
-              <a:t>Нефть: на MADOS F1 0.733 против OSI 0.324, но разлив Wakashio не найден — слой выключен</a:t>
+              <a:t>Карта говорит то же, что отчёт: 29 полос-кандидатов, 0 подтверждённых пар, концентрация по снимку недоступна</a:t>
             </a:r>
           </a:p>
         </p:txBody>
@@ -5688,7 +5872,7 @@
                 </a:solidFill>
                 <a:latin typeface="Segoe UI"/>
               </a:rPr>
-              <a:t>• Отдельная голова на MADOS, сплит по сценам заморожен до обучения; val F1 0.888, test один раз 0.733 [0.612; 0.947]</a:t>
+              <a:t>• Три слоя: полевые измерения (шт./км² с интервалом Пуассона) · снимки-кандидаты (полосы обследования) · подозрительные пиксели детектора</a:t>
             </a:r>
           </a:p>
           <a:p>
@@ -5704,7 +5888,7 @@
                 </a:solidFill>
                 <a:latin typeface="Segoe UI"/>
               </a:rPr>
-              <a:t>• Контроль на реальном L2A: Wakashio 2020-08-11 — 0.17 км² мелких пятен (пятно в лагуне не найдено), 2020-08-16 — 62.41 км² ряби</a:t>
+              <a:t>• Два статуса полосы: детекция («связь не подтверждена» + причина) и концентрация («недоступна»)</a:t>
             </a:r>
           </a:p>
           <a:p>
@@ -5720,55 +5904,35 @@
                 </a:solidFill>
                 <a:latin typeface="Segoe UI"/>
               </a:rPr>
-              <a:t>• Честный отказ: это не детектор нефти на L2A; слой «эксперимент», выключен по умолчанию; единица — площадь, не объём и не масса</a:t>
-            </a:r>
-          </a:p>
-        </p:txBody>
-      </p:sp>
-      <p:sp>
-        <p:nvSpPr>
-          <p:cNvPr id="5" name="Rectangle 4"/>
-          <p:cNvSpPr/>
-          <p:nvPr/>
-        </p:nvSpPr>
-        <p:spPr>
-          <a:xfrm>
-            <a:off x="6400800" y="1691640"/>
-            <a:ext cx="5349240" cy="1554480"/>
-          </a:xfrm>
-          <a:prstGeom prst="rect">
-            <a:avLst/>
-          </a:prstGeom>
-          <a:solidFill>
-            <a:srgbClr val="1B1E24"/>
-          </a:solidFill>
-          <a:ln>
-            <a:noFill/>
-          </a:ln>
-          <a:effectLst/>
-        </p:spPr>
-        <p:style>
-          <a:lnRef idx="1">
-            <a:schemeClr val="accent1"/>
-          </a:lnRef>
-          <a:fillRef idx="3">
-            <a:schemeClr val="accent1"/>
-          </a:fillRef>
-          <a:effectRef idx="2">
-            <a:schemeClr val="accent1"/>
-          </a:effectRef>
-          <a:fontRef idx="minor">
-            <a:schemeClr val="lt1"/>
-          </a:fontRef>
-        </p:style>
-        <p:txBody>
-          <a:bodyPr rtlCol="0" anchor="ctr"/>
-          <a:lstStyle/>
-          <a:p>
-            <a:pPr algn="ctr"/>
-          </a:p>
-        </p:txBody>
-      </p:sp>
+              <a:t>• Реестр пар, выгрузка GeoJSON/CSV, сохранённые запросы; самопроверка API ↔ выгрузка: 284 из 284, ошибочные входы 46/46, p95 ≤ 104 мс</a:t>
+            </a:r>
+          </a:p>
+        </p:txBody>
+      </p:sp>
+      <p:pic>
+        <p:nvPicPr>
+          <p:cNvPr id="5" name="Picture 4" descr="02_zone_he460_t03.jpg"/>
+          <p:cNvPicPr>
+            <a:picLocks noChangeAspect="1"/>
+          </p:cNvPicPr>
+          <p:nvPr/>
+        </p:nvPicPr>
+        <p:blipFill>
+          <a:blip r:embed="rId2"/>
+          <a:stretch>
+            <a:fillRect/>
+          </a:stretch>
+        </p:blipFill>
+        <p:spPr>
+          <a:xfrm>
+            <a:off x="6400800" y="1645920"/>
+            <a:ext cx="5349240" cy="3656442"/>
+          </a:xfrm>
+          <a:prstGeom prst="rect">
+            <a:avLst/>
+          </a:prstGeom>
+        </p:spPr>
+      </p:pic>
       <p:sp>
         <p:nvSpPr>
           <p:cNvPr id="6" name="TextBox 5"/>
@@ -5777,8 +5941,8 @@
         </p:nvSpPr>
         <p:spPr>
           <a:xfrm>
-            <a:off x="6675120" y="1783080"/>
-            <a:ext cx="4800600" cy="822960"/>
+            <a:off x="6400800" y="5348082"/>
+            <a:ext cx="5349240" cy="548640"/>
           </a:xfrm>
           <a:prstGeom prst="rect">
             <a:avLst/>
@@ -5797,13 +5961,13 @@
               </a:spcAft>
             </a:pPr>
             <a:r>
-              <a:rPr sz="4800" b="1">
-                <a:solidFill>
-                  <a:srgbClr val="D9912E"/>
-                </a:solidFill>
-                <a:latin typeface="Segoe UI"/>
-              </a:rPr>
-              <a:t>выкл.</a:t>
+              <a:rPr sz="1200" b="0">
+                <a:solidFill>
+                  <a:srgbClr val="9AA1AC"/>
+                </a:solidFill>
+                <a:latin typeface="Segoe UI"/>
+              </a:rPr>
+              <a:t>Северное море, HE460 трансекта 03: связь с полем не подтверждена (дрейф &gt; допуска), подозрительных пикселей в полосе нет</a:t>
             </a:r>
           </a:p>
         </p:txBody>
@@ -5811,45 +5975,6 @@
       <p:sp>
         <p:nvSpPr>
           <p:cNvPr id="7" name="TextBox 6"/>
-          <p:cNvSpPr txBox="1"/>
-          <p:nvPr/>
-        </p:nvSpPr>
-        <p:spPr>
-          <a:xfrm>
-            <a:off x="6675120" y="2606040"/>
-            <a:ext cx="4800600" cy="594360"/>
-          </a:xfrm>
-          <a:prstGeom prst="rect">
-            <a:avLst/>
-          </a:prstGeom>
-          <a:noFill/>
-        </p:spPr>
-        <p:txBody>
-          <a:bodyPr wrap="square" anchor="t" lIns="18288" rIns="18288" tIns="18288" bIns="18288">
-            <a:spAutoFit/>
-          </a:bodyPr>
-          <a:lstStyle/>
-          <a:p>
-            <a:pPr algn="l">
-              <a:spcAft>
-                <a:spcPts val="600"/>
-              </a:spcAft>
-            </a:pPr>
-            <a:r>
-              <a:rPr sz="1300" b="0">
-                <a:solidFill>
-                  <a:srgbClr val="EEEFF1"/>
-                </a:solidFill>
-                <a:latin typeface="Segoe UI"/>
-              </a:rPr>
-              <a:t>слой «Нефтяное пятно» — эксперимент; для нефти обычно нужен радар Sentinel-1</a:t>
-            </a:r>
-          </a:p>
-        </p:txBody>
-      </p:sp>
-      <p:sp>
-        <p:nvSpPr>
-          <p:cNvPr id="8" name="TextBox 7"/>
           <p:cNvSpPr txBox="1"/>
           <p:nvPr/>
         </p:nvSpPr>
@@ -5881,14 +6006,14 @@
                 </a:solidFill>
                 <a:latin typeface="Segoe UI"/>
               </a:rPr>
-              <a:t>Источник: reports/oil/test.json, control.json; docs/OIL.md</a:t>
-            </a:r>
-          </a:p>
-        </p:txBody>
-      </p:sp>
-      <p:sp>
-        <p:nvSpPr>
-          <p:cNvPr id="9" name="TextBox 8"/>
+              <a:t>Источник: service/routes_v3.py; reports/selfcheck/consistency_latest.json</a:t>
+            </a:r>
+          </a:p>
+        </p:txBody>
+      </p:sp>
+      <p:sp>
+        <p:nvSpPr>
+          <p:cNvPr id="8" name="TextBox 7"/>
           <p:cNvSpPr txBox="1"/>
           <p:nvPr/>
         </p:nvSpPr>
@@ -5920,7 +6045,7 @@
                 </a:solidFill>
                 <a:latin typeface="Segoe UI"/>
               </a:rPr>
-              <a:t>3:17</a:t>
+              <a:t>3:32</a:t>
             </a:r>
           </a:p>
         </p:txBody>
@@ -5985,7 +6110,7 @@
                 </a:solidFill>
                 <a:latin typeface="Segoe UI"/>
               </a:rPr>
-              <a:t>12 · Детектор</a:t>
+              <a:t>12 · Собственный вклад и ключевые решения</a:t>
             </a:r>
           </a:p>
         </p:txBody>
@@ -6024,7 +6149,7 @@
                 </a:solidFill>
                 <a:latin typeface="Segoe UI"/>
               </a:rPr>
-              <a:t>Детектор: F1 0.871 на test MARIDA; на снимках пар — 5 объектов, в полосах 0</a:t>
+              <a:t>Наш вклад — решения, каждое проверено экспериментом или записано до результата</a:t>
             </a:r>
           </a:p>
         </p:txBody>
@@ -6038,7 +6163,7 @@
         <p:spPr>
           <a:xfrm>
             <a:off x="457200" y="1600200"/>
-            <a:ext cx="5577840" cy="4572000"/>
+            <a:ext cx="11247120" cy="4572000"/>
           </a:xfrm>
           <a:prstGeom prst="rect">
             <a:avLst/>
@@ -6063,7 +6188,7 @@
                 </a:solidFill>
                 <a:latin typeface="Segoe UI"/>
               </a:rPr>
-              <a:t>• LightGBM, порог 0.63 с val; test MARIDA посчитан один раз: ΔF1 к RF 0.100 [0.049; 0.150]</a:t>
+              <a:t>• Реестр пар с допуском по дрейфу вместо «±1 сут»: 29 пар по метаданным → 0 синхронных; причины у каждого из 318 событий</a:t>
             </a:r>
           </a:p>
           <a:p>
@@ -6079,7 +6204,7 @@
                 </a:solidFill>
                 <a:latin typeface="Segoe UI"/>
               </a:rPr>
-              <a:t>• MARIDA test: на саргассуме и мутной воде ложных 0 (FDI × NDVI помечает 46 % саргассума); ошибки — суда 27 и органика 21</a:t>
+              <a:t>• Сплит по участкам маршрута + буфер: на «связных компонентах» kNN выигрывал −11.6 [−23.1; −0.9], на маршруте −4.2 [−12.0; 3.4] — утечка через соседей дня</a:t>
             </a:r>
           </a:p>
           <a:p>
@@ -6095,7 +6220,7 @@
                 </a:solidFill>
                 <a:latin typeface="Segoe UI"/>
               </a:rPr>
-              <a:t>• Снимки пар (L2A): гармонизация каналов выключена по MARIDA val — F1 0.923 без сдвига против 0.897 со сдвигом, Δ −0.025 [−0.072; −0.013]</a:t>
+              <a:t>• Отложенный test один раз: правило «не лучше медианы → медиана» записано 25.09.2026 19:05, test открыт 25.09.2026 19:15 — на карте медиана</a:t>
             </a:r>
           </a:p>
           <a:p>
@@ -6111,7 +6236,7 @@
                 </a:solidFill>
                 <a:latin typeface="Segoe UI"/>
               </a:rPr>
-              <a:t>• Сейчас: 5 объектов на 22 сценах, в полосах 0; вне полосы HE460 т.03 — 1 судно (верное срабатывание на сложном фоне) и 4 одиночных пикселя</a:t>
+              <a:t>• Отказ от гармонизации L2A по MARIDA val (F1 0.923 против 0.897), test не использовался</a:t>
             </a:r>
           </a:p>
           <a:p>
@@ -6127,7 +6252,39 @@
                 </a:solidFill>
                 <a:latin typeface="Segoe UI"/>
               </a:rPr>
-              <a:t>• Прежний режим (с гармонизацией) — основание отказа: 975 объектов, вероятное скопление по виду у 1.7 % [0.0; 5.0]; размечал ИИ-агент, один аннотатор, κ 0.77 — его же слепой повтор</a:t>
+              <a:t>• Геометрия трансект по первоисточникам PANGAEA: 104 события, 4 прерванные — двумя сегментами; окно синхронизации |dt| ≤ 4.17 ч</a:t>
+            </a:r>
+          </a:p>
+          <a:p>
+            <a:pPr algn="l">
+              <a:spcAft>
+                <a:spcPts val="1000"/>
+              </a:spcAft>
+            </a:pPr>
+            <a:r>
+              <a:rPr sz="1500" b="0">
+                <a:solidFill>
+                  <a:srgbClr val="EEEFF1"/>
+                </a:solidFill>
+                <a:latin typeface="Segoe UI"/>
+              </a:rPr>
+              <a:t>• Один источник чисел: final_numbers.json → README, отчёт, дека, речь, ответы; тест сверяет (242 passed)</a:t>
+            </a:r>
+          </a:p>
+          <a:p>
+            <a:pPr algn="l">
+              <a:spcAft>
+                <a:spcPts val="1000"/>
+              </a:spcAft>
+            </a:pPr>
+            <a:r>
+              <a:rPr sz="1500" b="0">
+                <a:solidFill>
+                  <a:srgbClr val="EEEFF1"/>
+                </a:solidFill>
+                <a:latin typeface="Segoe UI"/>
+              </a:rPr>
+              <a:t>• Готовое, не наше: разметка MARIDA и MADOS, протокол RandomForest MARIDA, индекс FDI, каталоги STAC</a:t>
             </a:r>
           </a:p>
         </p:txBody>
@@ -6135,411 +6292,6 @@
       <p:sp>
         <p:nvSpPr>
           <p:cNvPr id="5" name="TextBox 4"/>
-          <p:cNvSpPr txBox="1"/>
-          <p:nvPr/>
-        </p:nvSpPr>
-        <p:spPr>
-          <a:xfrm>
-            <a:off x="6400800" y="1691640"/>
-            <a:ext cx="5349240" cy="365760"/>
-          </a:xfrm>
-          <a:prstGeom prst="rect">
-            <a:avLst/>
-          </a:prstGeom>
-          <a:noFill/>
-        </p:spPr>
-        <p:txBody>
-          <a:bodyPr wrap="square" anchor="t" lIns="18288" rIns="18288" tIns="18288" bIns="18288">
-            <a:spAutoFit/>
-          </a:bodyPr>
-          <a:lstStyle/>
-          <a:p>
-            <a:pPr algn="l">
-              <a:spcAft>
-                <a:spcPts val="600"/>
-              </a:spcAft>
-            </a:pPr>
-            <a:r>
-              <a:rPr sz="1400" b="0">
-                <a:solidFill>
-                  <a:srgbClr val="9AA1AC"/>
-                </a:solidFill>
-                <a:latin typeface="Segoe UI"/>
-              </a:rPr>
-              <a:t>F1 Marine Debris, test MARIDA (15 сцен)</a:t>
-            </a:r>
-          </a:p>
-        </p:txBody>
-      </p:sp>
-      <p:sp>
-        <p:nvSpPr>
-          <p:cNvPr id="6" name="TextBox 5"/>
-          <p:cNvSpPr txBox="1"/>
-          <p:nvPr/>
-        </p:nvSpPr>
-        <p:spPr>
-          <a:xfrm>
-            <a:off x="6400800" y="2148840"/>
-            <a:ext cx="2155240" cy="384048"/>
-          </a:xfrm>
-          <a:prstGeom prst="rect">
-            <a:avLst/>
-          </a:prstGeom>
-          <a:noFill/>
-        </p:spPr>
-        <p:txBody>
-          <a:bodyPr wrap="square" anchor="ctr" lIns="18288" rIns="18288" tIns="18288" bIns="18288">
-            <a:spAutoFit/>
-          </a:bodyPr>
-          <a:lstStyle/>
-          <a:p>
-            <a:pPr algn="l">
-              <a:spcAft>
-                <a:spcPts val="600"/>
-              </a:spcAft>
-            </a:pPr>
-            <a:r>
-              <a:rPr sz="1300" b="0">
-                <a:solidFill>
-                  <a:srgbClr val="EEEFF1"/>
-                </a:solidFill>
-                <a:latin typeface="Segoe UI"/>
-              </a:rPr>
-              <a:t>LightGBM (основной)</a:t>
-            </a:r>
-          </a:p>
-        </p:txBody>
-      </p:sp>
-      <p:sp>
-        <p:nvSpPr>
-          <p:cNvPr id="7" name="Rectangle 6"/>
-          <p:cNvSpPr/>
-          <p:nvPr/>
-        </p:nvSpPr>
-        <p:spPr>
-          <a:xfrm>
-            <a:off x="8647480" y="2212848"/>
-            <a:ext cx="1985530" cy="274320"/>
-          </a:xfrm>
-          <a:prstGeom prst="rect">
-            <a:avLst/>
-          </a:prstGeom>
-          <a:solidFill>
-            <a:srgbClr val="D9912E"/>
-          </a:solidFill>
-          <a:ln>
-            <a:noFill/>
-          </a:ln>
-          <a:effectLst/>
-        </p:spPr>
-        <p:style>
-          <a:lnRef idx="1">
-            <a:schemeClr val="accent1"/>
-          </a:lnRef>
-          <a:fillRef idx="3">
-            <a:schemeClr val="accent1"/>
-          </a:fillRef>
-          <a:effectRef idx="2">
-            <a:schemeClr val="accent1"/>
-          </a:effectRef>
-          <a:fontRef idx="minor">
-            <a:schemeClr val="lt1"/>
-          </a:fontRef>
-        </p:style>
-        <p:txBody>
-          <a:bodyPr rtlCol="0" anchor="ctr"/>
-          <a:lstStyle/>
-          <a:p>
-            <a:pPr algn="ctr"/>
-          </a:p>
-        </p:txBody>
-      </p:sp>
-      <p:sp>
-        <p:nvSpPr>
-          <p:cNvPr id="8" name="TextBox 7"/>
-          <p:cNvSpPr txBox="1"/>
-          <p:nvPr/>
-        </p:nvSpPr>
-        <p:spPr>
-          <a:xfrm>
-            <a:off x="10706163" y="2148840"/>
-            <a:ext cx="822960" cy="384048"/>
-          </a:xfrm>
-          <a:prstGeom prst="rect">
-            <a:avLst/>
-          </a:prstGeom>
-          <a:noFill/>
-        </p:spPr>
-        <p:txBody>
-          <a:bodyPr wrap="square" anchor="ctr" lIns="18288" rIns="18288" tIns="18288" bIns="18288">
-            <a:spAutoFit/>
-          </a:bodyPr>
-          <a:lstStyle/>
-          <a:p>
-            <a:pPr algn="l">
-              <a:spcAft>
-                <a:spcPts val="600"/>
-              </a:spcAft>
-            </a:pPr>
-            <a:r>
-              <a:rPr sz="1400" b="1">
-                <a:solidFill>
-                  <a:srgbClr val="EEEFF1"/>
-                </a:solidFill>
-                <a:latin typeface="Segoe UI"/>
-              </a:rPr>
-              <a:t>0.871</a:t>
-            </a:r>
-          </a:p>
-        </p:txBody>
-      </p:sp>
-      <p:sp>
-        <p:nvSpPr>
-          <p:cNvPr id="9" name="TextBox 8"/>
-          <p:cNvSpPr txBox="1"/>
-          <p:nvPr/>
-        </p:nvSpPr>
-        <p:spPr>
-          <a:xfrm>
-            <a:off x="6400800" y="2651760"/>
-            <a:ext cx="2155240" cy="384048"/>
-          </a:xfrm>
-          <a:prstGeom prst="rect">
-            <a:avLst/>
-          </a:prstGeom>
-          <a:noFill/>
-        </p:spPr>
-        <p:txBody>
-          <a:bodyPr wrap="square" anchor="ctr" lIns="18288" rIns="18288" tIns="18288" bIns="18288">
-            <a:spAutoFit/>
-          </a:bodyPr>
-          <a:lstStyle/>
-          <a:p>
-            <a:pPr algn="l">
-              <a:spcAft>
-                <a:spcPts val="600"/>
-              </a:spcAft>
-            </a:pPr>
-            <a:r>
-              <a:rPr sz="1300" b="0">
-                <a:solidFill>
-                  <a:srgbClr val="EEEFF1"/>
-                </a:solidFill>
-                <a:latin typeface="Segoe UI"/>
-              </a:rPr>
-              <a:t>RandomForest, протокол MARIDA</a:t>
-            </a:r>
-          </a:p>
-        </p:txBody>
-      </p:sp>
-      <p:sp>
-        <p:nvSpPr>
-          <p:cNvPr id="10" name="Rectangle 9"/>
-          <p:cNvSpPr/>
-          <p:nvPr/>
-        </p:nvSpPr>
-        <p:spPr>
-          <a:xfrm>
-            <a:off x="8647480" y="2715768"/>
-            <a:ext cx="1757570" cy="274320"/>
-          </a:xfrm>
-          <a:prstGeom prst="rect">
-            <a:avLst/>
-          </a:prstGeom>
-          <a:solidFill>
-            <a:srgbClr val="5B6370"/>
-          </a:solidFill>
-          <a:ln>
-            <a:noFill/>
-          </a:ln>
-          <a:effectLst/>
-        </p:spPr>
-        <p:style>
-          <a:lnRef idx="1">
-            <a:schemeClr val="accent1"/>
-          </a:lnRef>
-          <a:fillRef idx="3">
-            <a:schemeClr val="accent1"/>
-          </a:fillRef>
-          <a:effectRef idx="2">
-            <a:schemeClr val="accent1"/>
-          </a:effectRef>
-          <a:fontRef idx="minor">
-            <a:schemeClr val="lt1"/>
-          </a:fontRef>
-        </p:style>
-        <p:txBody>
-          <a:bodyPr rtlCol="0" anchor="ctr"/>
-          <a:lstStyle/>
-          <a:p>
-            <a:pPr algn="ctr"/>
-          </a:p>
-        </p:txBody>
-      </p:sp>
-      <p:sp>
-        <p:nvSpPr>
-          <p:cNvPr id="11" name="TextBox 10"/>
-          <p:cNvSpPr txBox="1"/>
-          <p:nvPr/>
-        </p:nvSpPr>
-        <p:spPr>
-          <a:xfrm>
-            <a:off x="10478203" y="2651760"/>
-            <a:ext cx="822960" cy="384048"/>
-          </a:xfrm>
-          <a:prstGeom prst="rect">
-            <a:avLst/>
-          </a:prstGeom>
-          <a:noFill/>
-        </p:spPr>
-        <p:txBody>
-          <a:bodyPr wrap="square" anchor="ctr" lIns="18288" rIns="18288" tIns="18288" bIns="18288">
-            <a:spAutoFit/>
-          </a:bodyPr>
-          <a:lstStyle/>
-          <a:p>
-            <a:pPr algn="l">
-              <a:spcAft>
-                <a:spcPts val="600"/>
-              </a:spcAft>
-            </a:pPr>
-            <a:r>
-              <a:rPr sz="1400" b="1">
-                <a:solidFill>
-                  <a:srgbClr val="EEEFF1"/>
-                </a:solidFill>
-                <a:latin typeface="Segoe UI"/>
-              </a:rPr>
-              <a:t>0.771</a:t>
-            </a:r>
-          </a:p>
-        </p:txBody>
-      </p:sp>
-      <p:sp>
-        <p:nvSpPr>
-          <p:cNvPr id="12" name="TextBox 11"/>
-          <p:cNvSpPr txBox="1"/>
-          <p:nvPr/>
-        </p:nvSpPr>
-        <p:spPr>
-          <a:xfrm>
-            <a:off x="6400800" y="3154680"/>
-            <a:ext cx="2155240" cy="384048"/>
-          </a:xfrm>
-          <a:prstGeom prst="rect">
-            <a:avLst/>
-          </a:prstGeom>
-          <a:noFill/>
-        </p:spPr>
-        <p:txBody>
-          <a:bodyPr wrap="square" anchor="ctr" lIns="18288" rIns="18288" tIns="18288" bIns="18288">
-            <a:spAutoFit/>
-          </a:bodyPr>
-          <a:lstStyle/>
-          <a:p>
-            <a:pPr algn="l">
-              <a:spcAft>
-                <a:spcPts val="600"/>
-              </a:spcAft>
-            </a:pPr>
-            <a:r>
-              <a:rPr sz="1300" b="0">
-                <a:solidFill>
-                  <a:srgbClr val="EEEFF1"/>
-                </a:solidFill>
-                <a:latin typeface="Segoe UI"/>
-              </a:rPr>
-              <a:t>окно FDI × NDVI</a:t>
-            </a:r>
-          </a:p>
-        </p:txBody>
-      </p:sp>
-      <p:sp>
-        <p:nvSpPr>
-          <p:cNvPr id="13" name="Rectangle 12"/>
-          <p:cNvSpPr/>
-          <p:nvPr/>
-        </p:nvSpPr>
-        <p:spPr>
-          <a:xfrm>
-            <a:off x="8647480" y="3218688"/>
-            <a:ext cx="95743" cy="274320"/>
-          </a:xfrm>
-          <a:prstGeom prst="rect">
-            <a:avLst/>
-          </a:prstGeom>
-          <a:solidFill>
-            <a:srgbClr val="5B6370"/>
-          </a:solidFill>
-          <a:ln>
-            <a:noFill/>
-          </a:ln>
-          <a:effectLst/>
-        </p:spPr>
-        <p:style>
-          <a:lnRef idx="1">
-            <a:schemeClr val="accent1"/>
-          </a:lnRef>
-          <a:fillRef idx="3">
-            <a:schemeClr val="accent1"/>
-          </a:fillRef>
-          <a:effectRef idx="2">
-            <a:schemeClr val="accent1"/>
-          </a:effectRef>
-          <a:fontRef idx="minor">
-            <a:schemeClr val="lt1"/>
-          </a:fontRef>
-        </p:style>
-        <p:txBody>
-          <a:bodyPr rtlCol="0" anchor="ctr"/>
-          <a:lstStyle/>
-          <a:p>
-            <a:pPr algn="ctr"/>
-          </a:p>
-        </p:txBody>
-      </p:sp>
-      <p:sp>
-        <p:nvSpPr>
-          <p:cNvPr id="14" name="TextBox 13"/>
-          <p:cNvSpPr txBox="1"/>
-          <p:nvPr/>
-        </p:nvSpPr>
-        <p:spPr>
-          <a:xfrm>
-            <a:off x="8816375" y="3154680"/>
-            <a:ext cx="822960" cy="384048"/>
-          </a:xfrm>
-          <a:prstGeom prst="rect">
-            <a:avLst/>
-          </a:prstGeom>
-          <a:noFill/>
-        </p:spPr>
-        <p:txBody>
-          <a:bodyPr wrap="square" anchor="ctr" lIns="18288" rIns="18288" tIns="18288" bIns="18288">
-            <a:spAutoFit/>
-          </a:bodyPr>
-          <a:lstStyle/>
-          <a:p>
-            <a:pPr algn="l">
-              <a:spcAft>
-                <a:spcPts val="600"/>
-              </a:spcAft>
-            </a:pPr>
-            <a:r>
-              <a:rPr sz="1400" b="1">
-                <a:solidFill>
-                  <a:srgbClr val="EEEFF1"/>
-                </a:solidFill>
-                <a:latin typeface="Segoe UI"/>
-              </a:rPr>
-              <a:t>0.042</a:t>
-            </a:r>
-          </a:p>
-        </p:txBody>
-      </p:sp>
-      <p:sp>
-        <p:nvSpPr>
-          <p:cNvPr id="15" name="TextBox 14"/>
           <p:cNvSpPr txBox="1"/>
           <p:nvPr/>
         </p:nvSpPr>
@@ -6571,14 +6323,14 @@
                 </a:solidFill>
                 <a:latin typeface="Segoe UI"/>
               </a:rPr>
-              <a:t>Источник: reports/case_detector/compare.md; reports/case_pairs/visual_review.md; docs/DECISIONS.md (final_numbers → case.detector_current)</a:t>
-            </a:r>
-          </a:p>
-        </p:txBody>
-      </p:sp>
-      <p:sp>
-        <p:nvSpPr>
-          <p:cNvPr id="16" name="TextBox 15"/>
+              <a:t>Источник: reports/case_pairs/summary.md; reports/case_conc/metrics.json; configs/case_selection.yaml; docs/DECISIONS.md; reports/case_geometry/summary.md</a:t>
+            </a:r>
+          </a:p>
+        </p:txBody>
+      </p:sp>
+      <p:sp>
+        <p:nvSpPr>
+          <p:cNvPr id="6" name="TextBox 5"/>
           <p:cNvSpPr txBox="1"/>
           <p:nvPr/>
         </p:nvSpPr>
@@ -6610,7 +6362,7 @@
                 </a:solidFill>
                 <a:latin typeface="Segoe UI"/>
               </a:rPr>
-              <a:t>3:30</a:t>
+              <a:t>3:47</a:t>
             </a:r>
           </a:p>
         </p:txBody>
@@ -6675,7 +6427,7 @@
                 </a:solidFill>
                 <a:latin typeface="Segoe UI"/>
               </a:rPr>
-              <a:t>13 · Концентрация</a:t>
+              <a:t>13 · Ограничения и развитие</a:t>
             </a:r>
           </a:p>
         </p:txBody>
@@ -6708,13 +6460,13 @@
               </a:spcAft>
             </a:pPr>
             <a:r>
-              <a:rPr sz="2300" b="1">
+              <a:rPr sz="2600" b="1">
                 <a:solidFill>
                   <a:srgbClr val="EEEFF1"/>
                 </a:solidFill>
                 <a:latin typeface="Segoe UI"/>
               </a:rPr>
-              <a:t>C = N/A сошлась с опубликованной у 467 из 467 строк; на отложенном test модель не лучше медианы — на карте медиана</a:t>
+              <a:t>Ограничения названы на карте и в отчёте; развитие — синхронные пары и больше рейсов</a:t>
             </a:r>
           </a:p>
         </p:txBody>
@@ -6728,7 +6480,7 @@
         <p:spPr>
           <a:xfrm>
             <a:off x="457200" y="1600200"/>
-            <a:ext cx="5577840" cy="4572000"/>
+            <a:ext cx="11247120" cy="4572000"/>
           </a:xfrm>
           <a:prstGeom prst="rect">
             <a:avLst/>
@@ -6753,7 +6505,7 @@
                 </a:solidFill>
                 <a:latin typeface="Segoe UI"/>
               </a:rPr>
-              <a:t>• Контроль: 12 / 0.20 км² = 60.0 шт./км², 95 % ДИ Пуассона 31.0–104.8; C = N/A совпала с опубликованной у 467 из 467 строк</a:t>
+              <a:t>• Перенос «снимок → шт./км²» не доказан: синхронных пар нет, для пластика снимков нет</a:t>
             </a:r>
           </a:p>
           <a:p>
@@ -6769,7 +6521,7 @@
                 </a:solidFill>
                 <a:latin typeface="Segoe UI"/>
               </a:rPr>
-              <a:t>• Сплит: 5 участков маршрута + буфер 1 сут; протокол и правило выбора записаны до CV</a:t>
+              <a:t>• Мало независимых данных: S2 — один рейс, 26 дней; интервалы недопокрывают (84 % и 74 % вместо 90 %)</a:t>
             </a:r>
           </a:p>
           <a:p>
@@ -6785,7 +6537,7 @@
                 </a:solidFill>
                 <a:latin typeface="Segoe UI"/>
               </a:rPr>
-              <a:t>• Dev CV S2: ridge_log 28.5 против медианы 44.2, ΔMAE [−31.6; −0.3] — слабый выигрыш (с Бонферрони [−38.7; 7.3])</a:t>
+              <a:t>• Test не абсолютно нетронутый: ранняя разведка бейзлайнов видела все события профиля (записано до открытия)</a:t>
             </a:r>
           </a:p>
           <a:p>
@@ -6801,7 +6553,23 @@
                 </a:solidFill>
                 <a:latin typeface="Segoe UI"/>
               </a:rPr>
-              <a:t>• Отложенный test (25.09.2026 19:15, один раз): S2 30.0 против 25.2 (основная модель не лучше медианы); S1 370.0 против 371.1 (разницы с медианой нет)</a:t>
+              <a:t>• Детектор на L2A пар по разметке не измерен; порог блика не калибровался на этих сценах</a:t>
+            </a:r>
+          </a:p>
+          <a:p>
+            <a:pPr algn="l">
+              <a:spcAft>
+                <a:spcPts val="1000"/>
+              </a:spcAft>
+            </a:pPr>
+            <a:r>
+              <a:rPr sz="1600" b="0">
+                <a:solidFill>
+                  <a:srgbClr val="EEEFF1"/>
+                </a:solidFill>
+                <a:latin typeface="Segoe UI"/>
+              </a:rPr>
+              <a:t>• Дальше: трансекты под пролёт с записанным временем (≈ 33 пар), больше рейсов и сезонов, ERA5 для дрейфа, разметка скоплений на L2A</a:t>
             </a:r>
           </a:p>
         </p:txBody>
@@ -6809,328 +6577,6 @@
       <p:sp>
         <p:nvSpPr>
           <p:cNvPr id="5" name="TextBox 4"/>
-          <p:cNvSpPr txBox="1"/>
-          <p:nvPr/>
-        </p:nvSpPr>
-        <p:spPr>
-          <a:xfrm>
-            <a:off x="6400800" y="1691640"/>
-            <a:ext cx="5349240" cy="365760"/>
-          </a:xfrm>
-          <a:prstGeom prst="rect">
-            <a:avLst/>
-          </a:prstGeom>
-          <a:noFill/>
-        </p:spPr>
-        <p:txBody>
-          <a:bodyPr wrap="square" anchor="t" lIns="18288" rIns="18288" tIns="18288" bIns="18288">
-            <a:spAutoFit/>
-          </a:bodyPr>
-          <a:lstStyle/>
-          <a:p>
-            <a:pPr algn="l">
-              <a:spcAft>
-                <a:spcPts val="600"/>
-              </a:spcAft>
-            </a:pPr>
-            <a:r>
-              <a:rPr sz="1400" b="0">
-                <a:solidFill>
-                  <a:srgbClr val="9AA1AC"/>
-                </a:solidFill>
-                <a:latin typeface="Segoe UI"/>
-              </a:rPr>
-              <a:t>S2, отложенный test (14 событий): MAE, шт./км²</a:t>
-            </a:r>
-          </a:p>
-        </p:txBody>
-      </p:sp>
-      <p:sp>
-        <p:nvSpPr>
-          <p:cNvPr id="6" name="TextBox 5"/>
-          <p:cNvSpPr txBox="1"/>
-          <p:nvPr/>
-        </p:nvSpPr>
-        <p:spPr>
-          <a:xfrm>
-            <a:off x="6400800" y="2148840"/>
-            <a:ext cx="2155240" cy="384048"/>
-          </a:xfrm>
-          <a:prstGeom prst="rect">
-            <a:avLst/>
-          </a:prstGeom>
-          <a:noFill/>
-        </p:spPr>
-        <p:txBody>
-          <a:bodyPr wrap="square" anchor="ctr" lIns="18288" rIns="18288" tIns="18288" bIns="18288">
-            <a:spAutoFit/>
-          </a:bodyPr>
-          <a:lstStyle/>
-          <a:p>
-            <a:pPr algn="l">
-              <a:spcAft>
-                <a:spcPts val="600"/>
-              </a:spcAft>
-            </a:pPr>
-            <a:r>
-              <a:rPr sz="1300" b="0">
-                <a:solidFill>
-                  <a:srgbClr val="EEEFF1"/>
-                </a:solidFill>
-                <a:latin typeface="Segoe UI"/>
-              </a:rPr>
-              <a:t>ridge_log (основная)</a:t>
-            </a:r>
-          </a:p>
-        </p:txBody>
-      </p:sp>
-      <p:sp>
-        <p:nvSpPr>
-          <p:cNvPr id="7" name="Rectangle 6"/>
-          <p:cNvSpPr/>
-          <p:nvPr/>
-        </p:nvSpPr>
-        <p:spPr>
-          <a:xfrm>
-            <a:off x="8647480" y="2212848"/>
-            <a:ext cx="2279599" cy="274320"/>
-          </a:xfrm>
-          <a:prstGeom prst="rect">
-            <a:avLst/>
-          </a:prstGeom>
-          <a:solidFill>
-            <a:srgbClr val="5B6370"/>
-          </a:solidFill>
-          <a:ln>
-            <a:noFill/>
-          </a:ln>
-          <a:effectLst/>
-        </p:spPr>
-        <p:style>
-          <a:lnRef idx="1">
-            <a:schemeClr val="accent1"/>
-          </a:lnRef>
-          <a:fillRef idx="3">
-            <a:schemeClr val="accent1"/>
-          </a:fillRef>
-          <a:effectRef idx="2">
-            <a:schemeClr val="accent1"/>
-          </a:effectRef>
-          <a:fontRef idx="minor">
-            <a:schemeClr val="lt1"/>
-          </a:fontRef>
-        </p:style>
-        <p:txBody>
-          <a:bodyPr rtlCol="0" anchor="ctr"/>
-          <a:lstStyle/>
-          <a:p>
-            <a:pPr algn="ctr"/>
-          </a:p>
-        </p:txBody>
-      </p:sp>
-      <p:sp>
-        <p:nvSpPr>
-          <p:cNvPr id="8" name="TextBox 7"/>
-          <p:cNvSpPr txBox="1"/>
-          <p:nvPr/>
-        </p:nvSpPr>
-        <p:spPr>
-          <a:xfrm>
-            <a:off x="11000232" y="2148840"/>
-            <a:ext cx="822960" cy="384048"/>
-          </a:xfrm>
-          <a:prstGeom prst="rect">
-            <a:avLst/>
-          </a:prstGeom>
-          <a:noFill/>
-        </p:spPr>
-        <p:txBody>
-          <a:bodyPr wrap="square" anchor="ctr" lIns="18288" rIns="18288" tIns="18288" bIns="18288">
-            <a:spAutoFit/>
-          </a:bodyPr>
-          <a:lstStyle/>
-          <a:p>
-            <a:pPr algn="l">
-              <a:spcAft>
-                <a:spcPts val="600"/>
-              </a:spcAft>
-            </a:pPr>
-            <a:r>
-              <a:rPr sz="1400" b="1">
-                <a:solidFill>
-                  <a:srgbClr val="EEEFF1"/>
-                </a:solidFill>
-                <a:latin typeface="Segoe UI"/>
-              </a:rPr>
-              <a:t>30.0</a:t>
-            </a:r>
-          </a:p>
-        </p:txBody>
-      </p:sp>
-      <p:sp>
-        <p:nvSpPr>
-          <p:cNvPr id="9" name="TextBox 8"/>
-          <p:cNvSpPr txBox="1"/>
-          <p:nvPr/>
-        </p:nvSpPr>
-        <p:spPr>
-          <a:xfrm>
-            <a:off x="6400800" y="2651760"/>
-            <a:ext cx="2155240" cy="384048"/>
-          </a:xfrm>
-          <a:prstGeom prst="rect">
-            <a:avLst/>
-          </a:prstGeom>
-          <a:noFill/>
-        </p:spPr>
-        <p:txBody>
-          <a:bodyPr wrap="square" anchor="ctr" lIns="18288" rIns="18288" tIns="18288" bIns="18288">
-            <a:spAutoFit/>
-          </a:bodyPr>
-          <a:lstStyle/>
-          <a:p>
-            <a:pPr algn="l">
-              <a:spcAft>
-                <a:spcPts val="600"/>
-              </a:spcAft>
-            </a:pPr>
-            <a:r>
-              <a:rPr sz="1300" b="0">
-                <a:solidFill>
-                  <a:srgbClr val="EEEFF1"/>
-                </a:solidFill>
-                <a:latin typeface="Segoe UI"/>
-              </a:rPr>
-              <a:t>медиана dev (на карте)</a:t>
-            </a:r>
-          </a:p>
-        </p:txBody>
-      </p:sp>
-      <p:sp>
-        <p:nvSpPr>
-          <p:cNvPr id="10" name="Rectangle 9"/>
-          <p:cNvSpPr/>
-          <p:nvPr/>
-        </p:nvSpPr>
-        <p:spPr>
-          <a:xfrm>
-            <a:off x="8647480" y="2715768"/>
-            <a:ext cx="1914863" cy="274320"/>
-          </a:xfrm>
-          <a:prstGeom prst="rect">
-            <a:avLst/>
-          </a:prstGeom>
-          <a:solidFill>
-            <a:srgbClr val="D9912E"/>
-          </a:solidFill>
-          <a:ln>
-            <a:noFill/>
-          </a:ln>
-          <a:effectLst/>
-        </p:spPr>
-        <p:style>
-          <a:lnRef idx="1">
-            <a:schemeClr val="accent1"/>
-          </a:lnRef>
-          <a:fillRef idx="3">
-            <a:schemeClr val="accent1"/>
-          </a:fillRef>
-          <a:effectRef idx="2">
-            <a:schemeClr val="accent1"/>
-          </a:effectRef>
-          <a:fontRef idx="minor">
-            <a:schemeClr val="lt1"/>
-          </a:fontRef>
-        </p:style>
-        <p:txBody>
-          <a:bodyPr rtlCol="0" anchor="ctr"/>
-          <a:lstStyle/>
-          <a:p>
-            <a:pPr algn="ctr"/>
-          </a:p>
-        </p:txBody>
-      </p:sp>
-      <p:sp>
-        <p:nvSpPr>
-          <p:cNvPr id="11" name="TextBox 10"/>
-          <p:cNvSpPr txBox="1"/>
-          <p:nvPr/>
-        </p:nvSpPr>
-        <p:spPr>
-          <a:xfrm>
-            <a:off x="10635496" y="2651760"/>
-            <a:ext cx="822960" cy="384048"/>
-          </a:xfrm>
-          <a:prstGeom prst="rect">
-            <a:avLst/>
-          </a:prstGeom>
-          <a:noFill/>
-        </p:spPr>
-        <p:txBody>
-          <a:bodyPr wrap="square" anchor="ctr" lIns="18288" rIns="18288" tIns="18288" bIns="18288">
-            <a:spAutoFit/>
-          </a:bodyPr>
-          <a:lstStyle/>
-          <a:p>
-            <a:pPr algn="l">
-              <a:spcAft>
-                <a:spcPts val="600"/>
-              </a:spcAft>
-            </a:pPr>
-            <a:r>
-              <a:rPr sz="1400" b="1">
-                <a:solidFill>
-                  <a:srgbClr val="EEEFF1"/>
-                </a:solidFill>
-                <a:latin typeface="Segoe UI"/>
-              </a:rPr>
-              <a:t>25.2</a:t>
-            </a:r>
-          </a:p>
-        </p:txBody>
-      </p:sp>
-      <p:sp>
-        <p:nvSpPr>
-          <p:cNvPr id="12" name="TextBox 11"/>
-          <p:cNvSpPr txBox="1"/>
-          <p:nvPr/>
-        </p:nvSpPr>
-        <p:spPr>
-          <a:xfrm>
-            <a:off x="6400800" y="3200400"/>
-            <a:ext cx="5349240" cy="365760"/>
-          </a:xfrm>
-          <a:prstGeom prst="rect">
-            <a:avLst/>
-          </a:prstGeom>
-          <a:noFill/>
-        </p:spPr>
-        <p:txBody>
-          <a:bodyPr wrap="square" anchor="t" lIns="18288" rIns="18288" tIns="18288" bIns="18288">
-            <a:spAutoFit/>
-          </a:bodyPr>
-          <a:lstStyle/>
-          <a:p>
-            <a:pPr algn="l">
-              <a:spcAft>
-                <a:spcPts val="600"/>
-              </a:spcAft>
-            </a:pPr>
-            <a:r>
-              <a:rPr sz="1300" b="0">
-                <a:solidFill>
-                  <a:srgbClr val="9AA1AC"/>
-                </a:solidFill>
-                <a:latin typeface="Segoe UI"/>
-              </a:rPr>
-              <a:t>ΔMAE +4.8 [−1.6; +12.9] — ДИ содержит 0</a:t>
-            </a:r>
-          </a:p>
-        </p:txBody>
-      </p:sp>
-      <p:sp>
-        <p:nvSpPr>
-          <p:cNvPr id="13" name="TextBox 12"/>
           <p:cNvSpPr txBox="1"/>
           <p:nvPr/>
         </p:nvSpPr>
@@ -7162,14 +6608,14 @@
                 </a:solidFill>
                 <a:latin typeface="Segoe UI"/>
               </a:rPr>
-              <a:t>Источник: reports/case_conc/dev_cv.json, final_test.json; configs/case_selection.yaml: final_test</a:t>
-            </a:r>
-          </a:p>
-        </p:txBody>
-      </p:sp>
-      <p:sp>
-        <p:nvSpPr>
-          <p:cNvPr id="14" name="TextBox 13"/>
+              <a:t>Источник: reports/report.md §8–9; README.md «Ограничения»</a:t>
+            </a:r>
+          </a:p>
+        </p:txBody>
+      </p:sp>
+      <p:sp>
+        <p:nvSpPr>
+          <p:cNvPr id="6" name="TextBox 5"/>
           <p:cNvSpPr txBox="1"/>
           <p:nvPr/>
         </p:nvSpPr>
@@ -7201,7 +6647,7 @@
                 </a:solidFill>
                 <a:latin typeface="Segoe UI"/>
               </a:rPr>
-              <a:t>4:00</a:t>
+              <a:t>4:16</a:t>
             </a:r>
           </a:p>
         </p:txBody>
@@ -7266,7 +6712,7 @@
                 </a:solidFill>
                 <a:latin typeface="Segoe UI"/>
               </a:rPr>
-              <a:t>14 · Эксперимент «снимок vs all_litter»</a:t>
+              <a:t>14 · Воспроизводимость</a:t>
             </a:r>
           </a:p>
         </p:txBody>
@@ -7305,7 +6751,7 @@
                 </a:solidFill>
                 <a:latin typeface="Segoe UI"/>
               </a:rPr>
-              <a:t>Связь признаков снимка с полевой плотностью всего мусора не установлена: данных на это мало</a:t>
+              <a:t>Одна команда, 7.7 с без сети; чистый клон до карты — 7,5 мин, числа совпали</a:t>
             </a:r>
           </a:p>
         </p:txBody>
@@ -7344,7 +6790,7 @@
                 </a:solidFill>
                 <a:latin typeface="Segoe UI"/>
               </a:rPr>
-              <a:t>• 11 пар S2 прошли маски, независимых групп «район × день» — 6; эталон — весь мусор, не пластик</a:t>
+              <a:t>• Одна команда: run.ps1 -Case all -Offline (CSV → отбор → пары → маски → детектор → метрики → выгрузка)</a:t>
             </a:r>
           </a:p>
           <a:p>
@@ -7360,7 +6806,7 @@
                 </a:solidFill>
                 <a:latin typeface="Segoe UI"/>
               </a:rPr>
-              <a:t>• FDI в полосе: ρ −0.75 [−1.00; −0.14], p Холма 0.12; та же полоса в случайной воде сцены — −0.52</a:t>
+              <a:t>• 24 выходные таблицы с одинаковыми sha256 при повторе; отпечаток fccf808a8817d7c4…</a:t>
             </a:r>
           </a:p>
           <a:p>
@@ -7376,7 +6822,7 @@
                 </a:solidFill>
                 <a:latin typeface="Segoe UI"/>
               </a:rPr>
-              <a:t>• Значит, связь на уровне сцены или дня, а не места; знак к тому же обратный ожидаемому</a:t>
+              <a:t>• Чистый клон: клон 76 с, установка и маршрут 3 мин 17 с, карта 8,1 с</a:t>
             </a:r>
           </a:p>
           <a:p>
@@ -7392,7 +6838,7 @@
                 </a:solidFill>
                 <a:latin typeface="Segoe UI"/>
               </a:rPr>
-              <a:t>• Мощность: при 6 группах видна только |ρ| ≥ 0.96; для ρ = 0.5 нужно ≈ 33 независимых пар</a:t>
+              <a:t>• Тесты кейса (26.09.2026 03:52): 242 passed, 2 skipped, 0 failed; числа документов сверяет тест</a:t>
             </a:r>
           </a:p>
         </p:txBody>
@@ -7475,7 +6921,7 @@
                 </a:solidFill>
                 <a:latin typeface="Segoe UI"/>
               </a:rPr>
-              <a:t>33</a:t>
+              <a:t>7,5 мин</a:t>
             </a:r>
           </a:p>
         </p:txBody>
@@ -7514,7 +6960,7 @@
                 </a:solidFill>
                 <a:latin typeface="Segoe UI"/>
               </a:rPr>
-              <a:t>независимых синхронных пар нужно, чтобы увидеть ρ = 0.5 (есть 6 групп)</a:t>
+              <a:t>от git clone до карты на экране, CPU</a:t>
             </a:r>
           </a:p>
         </p:txBody>
@@ -7553,7 +6999,7 @@
                 </a:solidFill>
                 <a:latin typeface="Segoe UI"/>
               </a:rPr>
-              <a:t>Источник: reports/case_pairs/experiment.md, experiment.json</a:t>
+              <a:t>Источник: reports/selfcheck/clean_clone_1941.md; reports/case_run/run_summary.json</a:t>
             </a:r>
           </a:p>
         </p:txBody>
@@ -7592,7 +7038,7 @@
                 </a:solidFill>
                 <a:latin typeface="Segoe UI"/>
               </a:rPr>
-              <a:t>4:23</a:t>
+              <a:t>4:28</a:t>
             </a:r>
           </a:p>
         </p:txBody>
@@ -7657,7 +7103,7 @@
                 </a:solidFill>
                 <a:latin typeface="Segoe UI"/>
               </a:rPr>
-              <a:t>15 · Карта</a:t>
+              <a:t>15 · Приложение · Детектор v2 и бейзлайны</a:t>
             </a:r>
           </a:p>
         </p:txBody>
@@ -7690,13 +7136,13 @@
               </a:spcAft>
             </a:pPr>
             <a:r>
-              <a:rPr sz="2300" b="1">
+              <a:rPr sz="2600" b="1">
                 <a:solidFill>
                   <a:srgbClr val="EEEFF1"/>
                 </a:solidFill>
                 <a:latin typeface="Segoe UI"/>
               </a:rPr>
-              <a:t>Карта говорит то же, что отчёт: 29 полос-кандидатов, 0 подтверждённых пар, концентрация по снимку недоступна</a:t>
+              <a:t>Дообучение на B + D: принято 0 из 11 вариантов; U-Net MARIDA на test — F1 0.501</a:t>
             </a:r>
           </a:p>
         </p:txBody>
@@ -7735,7 +7181,7 @@
                 </a:solidFill>
                 <a:latin typeface="Segoe UI"/>
               </a:rPr>
-              <a:t>• Три слоя: полевые измерения (шт./км² с интервалом Пуассона) · снимки-кандидаты (полосы обследования) · подозрительные пиксели детектора</a:t>
+              <a:t>• Правило принятия записано до экспериментов: ΔF1 val ≥ 0.01 и не хуже на B и D; 3 seed; test не читался</a:t>
             </a:r>
           </a:p>
           <a:p>
@@ -7751,7 +7197,7 @@
                 </a:solidFill>
                 <a:latin typeface="Segoe UI"/>
               </a:rPr>
-              <a:t>• Два статуса полосы: детекция («связь не подтверждена» + причина) и концентрация («недоступна»)</a:t>
+              <a:t>• ΔF1 val от −0.031 до 0.002 — в сервисе остаётся weights/lgbm</a:t>
             </a:r>
           </a:p>
           <a:p>
@@ -7767,35 +7213,66 @@
                 </a:solidFill>
                 <a:latin typeface="Segoe UI"/>
               </a:rPr>
-              <a:t>• Реестр пар, выгрузка GeoJSON/CSV, сохранённые запросы; самопроверка API ↔ выгрузка: 284 из 284, ошибочные входы 46/46, p95 ≤ 104 мс</a:t>
-            </a:r>
-          </a:p>
-        </p:txBody>
-      </p:sp>
-      <p:pic>
-        <p:nvPicPr>
-          <p:cNvPr id="5" name="Picture 4" descr="02_zone_he460_t03.jpg"/>
-          <p:cNvPicPr>
-            <a:picLocks noChangeAspect="1"/>
-          </p:cNvPicPr>
-          <p:nvPr/>
-        </p:nvPicPr>
-        <p:blipFill>
-          <a:blip r:embed="rId2"/>
-          <a:stretch>
-            <a:fillRect/>
-          </a:stretch>
-        </p:blipFill>
-        <p:spPr>
-          <a:xfrm>
-            <a:off x="6400800" y="1645920"/>
-            <a:ext cx="5349240" cy="3656442"/>
-          </a:xfrm>
-          <a:prstGeom prst="rect">
-            <a:avLst/>
-          </a:prstGeom>
-        </p:spPr>
-      </p:pic>
+              <a:t>• Компромисс: D судов — ложные на судах 26 % → 4 %, но нити Cózar 36 % → 27 %</a:t>
+            </a:r>
+          </a:p>
+          <a:p>
+            <a:pPr algn="l">
+              <a:spcAft>
+                <a:spcPts val="1000"/>
+              </a:spcAft>
+            </a:pPr>
+            <a:r>
+              <a:rPr sz="1600" b="0">
+                <a:solidFill>
+                  <a:srgbClr val="EEEFF1"/>
+                </a:solidFill>
+                <a:latin typeface="Segoe UI"/>
+              </a:rPr>
+              <a:t>• U-Net MARIDA (официальные веса): LightGBM лучше на 0.370 [0.215; 0.481], в 13 из 15 сцен; на снимках пар U-Net — 253 объектов «соль-перец», в полосах 0</a:t>
+            </a:r>
+          </a:p>
+        </p:txBody>
+      </p:sp>
+      <p:sp>
+        <p:nvSpPr>
+          <p:cNvPr id="5" name="TextBox 4"/>
+          <p:cNvSpPr txBox="1"/>
+          <p:nvPr/>
+        </p:nvSpPr>
+        <p:spPr>
+          <a:xfrm>
+            <a:off x="6400800" y="1691640"/>
+            <a:ext cx="5349240" cy="365760"/>
+          </a:xfrm>
+          <a:prstGeom prst="rect">
+            <a:avLst/>
+          </a:prstGeom>
+          <a:noFill/>
+        </p:spPr>
+        <p:txBody>
+          <a:bodyPr wrap="square" anchor="t" lIns="18288" rIns="18288" tIns="18288" bIns="18288">
+            <a:spAutoFit/>
+          </a:bodyPr>
+          <a:lstStyle/>
+          <a:p>
+            <a:pPr algn="l">
+              <a:spcAft>
+                <a:spcPts val="600"/>
+              </a:spcAft>
+            </a:pPr>
+            <a:r>
+              <a:rPr sz="1400" b="0">
+                <a:solidFill>
+                  <a:srgbClr val="9AA1AC"/>
+                </a:solidFill>
+                <a:latin typeface="Segoe UI"/>
+              </a:rPr>
+              <a:t>F1 Marine Debris, test MARIDA (15 сцен)</a:t>
+            </a:r>
+          </a:p>
+        </p:txBody>
+      </p:sp>
       <p:sp>
         <p:nvSpPr>
           <p:cNvPr id="6" name="TextBox 5"/>
@@ -7804,16 +7281,16 @@
         </p:nvSpPr>
         <p:spPr>
           <a:xfrm>
-            <a:off x="6400800" y="5348082"/>
-            <a:ext cx="5349240" cy="548640"/>
-          </a:xfrm>
-          <a:prstGeom prst="rect">
-            <a:avLst/>
-          </a:prstGeom>
-          <a:noFill/>
-        </p:spPr>
-        <p:txBody>
-          <a:bodyPr wrap="square" anchor="t" lIns="18288" rIns="18288" tIns="18288" bIns="18288">
+            <a:off x="6400800" y="2148840"/>
+            <a:ext cx="2155240" cy="384048"/>
+          </a:xfrm>
+          <a:prstGeom prst="rect">
+            <a:avLst/>
+          </a:prstGeom>
+          <a:noFill/>
+        </p:spPr>
+        <p:txBody>
+          <a:bodyPr wrap="square" anchor="ctr" lIns="18288" rIns="18288" tIns="18288" bIns="18288">
             <a:spAutoFit/>
           </a:bodyPr>
           <a:lstStyle/>
@@ -7824,20 +7301,469 @@
               </a:spcAft>
             </a:pPr>
             <a:r>
-              <a:rPr sz="1200" b="0">
-                <a:solidFill>
-                  <a:srgbClr val="9AA1AC"/>
-                </a:solidFill>
-                <a:latin typeface="Segoe UI"/>
-              </a:rPr>
-              <a:t>Северное море, HE460 трансекта 03: связь с полем не подтверждена (дрейф &gt; допуска), подозрительных пикселей в полосе нет</a:t>
-            </a:r>
-          </a:p>
-        </p:txBody>
-      </p:sp>
-      <p:sp>
-        <p:nvSpPr>
-          <p:cNvPr id="7" name="TextBox 6"/>
+              <a:rPr sz="1300" b="0">
+                <a:solidFill>
+                  <a:srgbClr val="EEEFF1"/>
+                </a:solidFill>
+                <a:latin typeface="Segoe UI"/>
+              </a:rPr>
+              <a:t>LightGBM (основной)</a:t>
+            </a:r>
+          </a:p>
+        </p:txBody>
+      </p:sp>
+      <p:sp>
+        <p:nvSpPr>
+          <p:cNvPr id="7" name="Rectangle 6"/>
+          <p:cNvSpPr/>
+          <p:nvPr/>
+        </p:nvSpPr>
+        <p:spPr>
+          <a:xfrm>
+            <a:off x="8647480" y="2212848"/>
+            <a:ext cx="1985530" cy="274320"/>
+          </a:xfrm>
+          <a:prstGeom prst="rect">
+            <a:avLst/>
+          </a:prstGeom>
+          <a:solidFill>
+            <a:srgbClr val="D9912E"/>
+          </a:solidFill>
+          <a:ln>
+            <a:noFill/>
+          </a:ln>
+          <a:effectLst/>
+        </p:spPr>
+        <p:style>
+          <a:lnRef idx="1">
+            <a:schemeClr val="accent1"/>
+          </a:lnRef>
+          <a:fillRef idx="3">
+            <a:schemeClr val="accent1"/>
+          </a:fillRef>
+          <a:effectRef idx="2">
+            <a:schemeClr val="accent1"/>
+          </a:effectRef>
+          <a:fontRef idx="minor">
+            <a:schemeClr val="lt1"/>
+          </a:fontRef>
+        </p:style>
+        <p:txBody>
+          <a:bodyPr rtlCol="0" anchor="ctr"/>
+          <a:lstStyle/>
+          <a:p>
+            <a:pPr algn="ctr"/>
+          </a:p>
+        </p:txBody>
+      </p:sp>
+      <p:sp>
+        <p:nvSpPr>
+          <p:cNvPr id="8" name="TextBox 7"/>
+          <p:cNvSpPr txBox="1"/>
+          <p:nvPr/>
+        </p:nvSpPr>
+        <p:spPr>
+          <a:xfrm>
+            <a:off x="10706163" y="2148840"/>
+            <a:ext cx="822960" cy="384048"/>
+          </a:xfrm>
+          <a:prstGeom prst="rect">
+            <a:avLst/>
+          </a:prstGeom>
+          <a:noFill/>
+        </p:spPr>
+        <p:txBody>
+          <a:bodyPr wrap="square" anchor="ctr" lIns="18288" rIns="18288" tIns="18288" bIns="18288">
+            <a:spAutoFit/>
+          </a:bodyPr>
+          <a:lstStyle/>
+          <a:p>
+            <a:pPr algn="l">
+              <a:spcAft>
+                <a:spcPts val="600"/>
+              </a:spcAft>
+            </a:pPr>
+            <a:r>
+              <a:rPr sz="1400" b="1">
+                <a:solidFill>
+                  <a:srgbClr val="EEEFF1"/>
+                </a:solidFill>
+                <a:latin typeface="Segoe UI"/>
+              </a:rPr>
+              <a:t>0.871</a:t>
+            </a:r>
+          </a:p>
+        </p:txBody>
+      </p:sp>
+      <p:sp>
+        <p:nvSpPr>
+          <p:cNvPr id="9" name="TextBox 8"/>
+          <p:cNvSpPr txBox="1"/>
+          <p:nvPr/>
+        </p:nvSpPr>
+        <p:spPr>
+          <a:xfrm>
+            <a:off x="6400800" y="2651760"/>
+            <a:ext cx="2155240" cy="384048"/>
+          </a:xfrm>
+          <a:prstGeom prst="rect">
+            <a:avLst/>
+          </a:prstGeom>
+          <a:noFill/>
+        </p:spPr>
+        <p:txBody>
+          <a:bodyPr wrap="square" anchor="ctr" lIns="18288" rIns="18288" tIns="18288" bIns="18288">
+            <a:spAutoFit/>
+          </a:bodyPr>
+          <a:lstStyle/>
+          <a:p>
+            <a:pPr algn="l">
+              <a:spcAft>
+                <a:spcPts val="600"/>
+              </a:spcAft>
+            </a:pPr>
+            <a:r>
+              <a:rPr sz="1300" b="0">
+                <a:solidFill>
+                  <a:srgbClr val="EEEFF1"/>
+                </a:solidFill>
+                <a:latin typeface="Segoe UI"/>
+              </a:rPr>
+              <a:t>RandomForest, протокол MARIDA</a:t>
+            </a:r>
+          </a:p>
+        </p:txBody>
+      </p:sp>
+      <p:sp>
+        <p:nvSpPr>
+          <p:cNvPr id="10" name="Rectangle 9"/>
+          <p:cNvSpPr/>
+          <p:nvPr/>
+        </p:nvSpPr>
+        <p:spPr>
+          <a:xfrm>
+            <a:off x="8647480" y="2715768"/>
+            <a:ext cx="1757570" cy="274320"/>
+          </a:xfrm>
+          <a:prstGeom prst="rect">
+            <a:avLst/>
+          </a:prstGeom>
+          <a:solidFill>
+            <a:srgbClr val="5B6370"/>
+          </a:solidFill>
+          <a:ln>
+            <a:noFill/>
+          </a:ln>
+          <a:effectLst/>
+        </p:spPr>
+        <p:style>
+          <a:lnRef idx="1">
+            <a:schemeClr val="accent1"/>
+          </a:lnRef>
+          <a:fillRef idx="3">
+            <a:schemeClr val="accent1"/>
+          </a:fillRef>
+          <a:effectRef idx="2">
+            <a:schemeClr val="accent1"/>
+          </a:effectRef>
+          <a:fontRef idx="minor">
+            <a:schemeClr val="lt1"/>
+          </a:fontRef>
+        </p:style>
+        <p:txBody>
+          <a:bodyPr rtlCol="0" anchor="ctr"/>
+          <a:lstStyle/>
+          <a:p>
+            <a:pPr algn="ctr"/>
+          </a:p>
+        </p:txBody>
+      </p:sp>
+      <p:sp>
+        <p:nvSpPr>
+          <p:cNvPr id="11" name="TextBox 10"/>
+          <p:cNvSpPr txBox="1"/>
+          <p:nvPr/>
+        </p:nvSpPr>
+        <p:spPr>
+          <a:xfrm>
+            <a:off x="10478203" y="2651760"/>
+            <a:ext cx="822960" cy="384048"/>
+          </a:xfrm>
+          <a:prstGeom prst="rect">
+            <a:avLst/>
+          </a:prstGeom>
+          <a:noFill/>
+        </p:spPr>
+        <p:txBody>
+          <a:bodyPr wrap="square" anchor="ctr" lIns="18288" rIns="18288" tIns="18288" bIns="18288">
+            <a:spAutoFit/>
+          </a:bodyPr>
+          <a:lstStyle/>
+          <a:p>
+            <a:pPr algn="l">
+              <a:spcAft>
+                <a:spcPts val="600"/>
+              </a:spcAft>
+            </a:pPr>
+            <a:r>
+              <a:rPr sz="1400" b="1">
+                <a:solidFill>
+                  <a:srgbClr val="EEEFF1"/>
+                </a:solidFill>
+                <a:latin typeface="Segoe UI"/>
+              </a:rPr>
+              <a:t>0.771</a:t>
+            </a:r>
+          </a:p>
+        </p:txBody>
+      </p:sp>
+      <p:sp>
+        <p:nvSpPr>
+          <p:cNvPr id="12" name="TextBox 11"/>
+          <p:cNvSpPr txBox="1"/>
+          <p:nvPr/>
+        </p:nvSpPr>
+        <p:spPr>
+          <a:xfrm>
+            <a:off x="6400800" y="3154680"/>
+            <a:ext cx="2155240" cy="384048"/>
+          </a:xfrm>
+          <a:prstGeom prst="rect">
+            <a:avLst/>
+          </a:prstGeom>
+          <a:noFill/>
+        </p:spPr>
+        <p:txBody>
+          <a:bodyPr wrap="square" anchor="ctr" lIns="18288" rIns="18288" tIns="18288" bIns="18288">
+            <a:spAutoFit/>
+          </a:bodyPr>
+          <a:lstStyle/>
+          <a:p>
+            <a:pPr algn="l">
+              <a:spcAft>
+                <a:spcPts val="600"/>
+              </a:spcAft>
+            </a:pPr>
+            <a:r>
+              <a:rPr sz="1300" b="0">
+                <a:solidFill>
+                  <a:srgbClr val="EEEFF1"/>
+                </a:solidFill>
+                <a:latin typeface="Segoe UI"/>
+              </a:rPr>
+              <a:t>U-Net MARIDA, веса авторов</a:t>
+            </a:r>
+          </a:p>
+        </p:txBody>
+      </p:sp>
+      <p:sp>
+        <p:nvSpPr>
+          <p:cNvPr id="13" name="Rectangle 12"/>
+          <p:cNvSpPr/>
+          <p:nvPr/>
+        </p:nvSpPr>
+        <p:spPr>
+          <a:xfrm>
+            <a:off x="8647480" y="3218688"/>
+            <a:ext cx="1142079" cy="274320"/>
+          </a:xfrm>
+          <a:prstGeom prst="rect">
+            <a:avLst/>
+          </a:prstGeom>
+          <a:solidFill>
+            <a:srgbClr val="5B6370"/>
+          </a:solidFill>
+          <a:ln>
+            <a:noFill/>
+          </a:ln>
+          <a:effectLst/>
+        </p:spPr>
+        <p:style>
+          <a:lnRef idx="1">
+            <a:schemeClr val="accent1"/>
+          </a:lnRef>
+          <a:fillRef idx="3">
+            <a:schemeClr val="accent1"/>
+          </a:fillRef>
+          <a:effectRef idx="2">
+            <a:schemeClr val="accent1"/>
+          </a:effectRef>
+          <a:fontRef idx="minor">
+            <a:schemeClr val="lt1"/>
+          </a:fontRef>
+        </p:style>
+        <p:txBody>
+          <a:bodyPr rtlCol="0" anchor="ctr"/>
+          <a:lstStyle/>
+          <a:p>
+            <a:pPr algn="ctr"/>
+          </a:p>
+        </p:txBody>
+      </p:sp>
+      <p:sp>
+        <p:nvSpPr>
+          <p:cNvPr id="14" name="TextBox 13"/>
+          <p:cNvSpPr txBox="1"/>
+          <p:nvPr/>
+        </p:nvSpPr>
+        <p:spPr>
+          <a:xfrm>
+            <a:off x="9862711" y="3154680"/>
+            <a:ext cx="822960" cy="384048"/>
+          </a:xfrm>
+          <a:prstGeom prst="rect">
+            <a:avLst/>
+          </a:prstGeom>
+          <a:noFill/>
+        </p:spPr>
+        <p:txBody>
+          <a:bodyPr wrap="square" anchor="ctr" lIns="18288" rIns="18288" tIns="18288" bIns="18288">
+            <a:spAutoFit/>
+          </a:bodyPr>
+          <a:lstStyle/>
+          <a:p>
+            <a:pPr algn="l">
+              <a:spcAft>
+                <a:spcPts val="600"/>
+              </a:spcAft>
+            </a:pPr>
+            <a:r>
+              <a:rPr sz="1400" b="1">
+                <a:solidFill>
+                  <a:srgbClr val="EEEFF1"/>
+                </a:solidFill>
+                <a:latin typeface="Segoe UI"/>
+              </a:rPr>
+              <a:t>0.501</a:t>
+            </a:r>
+          </a:p>
+        </p:txBody>
+      </p:sp>
+      <p:sp>
+        <p:nvSpPr>
+          <p:cNvPr id="15" name="TextBox 14"/>
+          <p:cNvSpPr txBox="1"/>
+          <p:nvPr/>
+        </p:nvSpPr>
+        <p:spPr>
+          <a:xfrm>
+            <a:off x="6400800" y="3657600"/>
+            <a:ext cx="2155240" cy="384048"/>
+          </a:xfrm>
+          <a:prstGeom prst="rect">
+            <a:avLst/>
+          </a:prstGeom>
+          <a:noFill/>
+        </p:spPr>
+        <p:txBody>
+          <a:bodyPr wrap="square" anchor="ctr" lIns="18288" rIns="18288" tIns="18288" bIns="18288">
+            <a:spAutoFit/>
+          </a:bodyPr>
+          <a:lstStyle/>
+          <a:p>
+            <a:pPr algn="l">
+              <a:spcAft>
+                <a:spcPts val="600"/>
+              </a:spcAft>
+            </a:pPr>
+            <a:r>
+              <a:rPr sz="1300" b="0">
+                <a:solidFill>
+                  <a:srgbClr val="EEEFF1"/>
+                </a:solidFill>
+                <a:latin typeface="Segoe UI"/>
+              </a:rPr>
+              <a:t>окно FDI × NDVI</a:t>
+            </a:r>
+          </a:p>
+        </p:txBody>
+      </p:sp>
+      <p:sp>
+        <p:nvSpPr>
+          <p:cNvPr id="16" name="Rectangle 15"/>
+          <p:cNvSpPr/>
+          <p:nvPr/>
+        </p:nvSpPr>
+        <p:spPr>
+          <a:xfrm>
+            <a:off x="8647480" y="3721608"/>
+            <a:ext cx="95743" cy="274320"/>
+          </a:xfrm>
+          <a:prstGeom prst="rect">
+            <a:avLst/>
+          </a:prstGeom>
+          <a:solidFill>
+            <a:srgbClr val="5B6370"/>
+          </a:solidFill>
+          <a:ln>
+            <a:noFill/>
+          </a:ln>
+          <a:effectLst/>
+        </p:spPr>
+        <p:style>
+          <a:lnRef idx="1">
+            <a:schemeClr val="accent1"/>
+          </a:lnRef>
+          <a:fillRef idx="3">
+            <a:schemeClr val="accent1"/>
+          </a:fillRef>
+          <a:effectRef idx="2">
+            <a:schemeClr val="accent1"/>
+          </a:effectRef>
+          <a:fontRef idx="minor">
+            <a:schemeClr val="lt1"/>
+          </a:fontRef>
+        </p:style>
+        <p:txBody>
+          <a:bodyPr rtlCol="0" anchor="ctr"/>
+          <a:lstStyle/>
+          <a:p>
+            <a:pPr algn="ctr"/>
+          </a:p>
+        </p:txBody>
+      </p:sp>
+      <p:sp>
+        <p:nvSpPr>
+          <p:cNvPr id="17" name="TextBox 16"/>
+          <p:cNvSpPr txBox="1"/>
+          <p:nvPr/>
+        </p:nvSpPr>
+        <p:spPr>
+          <a:xfrm>
+            <a:off x="8816375" y="3657600"/>
+            <a:ext cx="822960" cy="384048"/>
+          </a:xfrm>
+          <a:prstGeom prst="rect">
+            <a:avLst/>
+          </a:prstGeom>
+          <a:noFill/>
+        </p:spPr>
+        <p:txBody>
+          <a:bodyPr wrap="square" anchor="ctr" lIns="18288" rIns="18288" tIns="18288" bIns="18288">
+            <a:spAutoFit/>
+          </a:bodyPr>
+          <a:lstStyle/>
+          <a:p>
+            <a:pPr algn="l">
+              <a:spcAft>
+                <a:spcPts val="600"/>
+              </a:spcAft>
+            </a:pPr>
+            <a:r>
+              <a:rPr sz="1400" b="1">
+                <a:solidFill>
+                  <a:srgbClr val="EEEFF1"/>
+                </a:solidFill>
+                <a:latin typeface="Segoe UI"/>
+              </a:rPr>
+              <a:t>0.042</a:t>
+            </a:r>
+          </a:p>
+        </p:txBody>
+      </p:sp>
+      <p:sp>
+        <p:nvSpPr>
+          <p:cNvPr id="18" name="TextBox 17"/>
           <p:cNvSpPr txBox="1"/>
           <p:nvPr/>
         </p:nvSpPr>
@@ -7869,14 +7795,14 @@
                 </a:solidFill>
                 <a:latin typeface="Segoe UI"/>
               </a:rPr>
-              <a:t>Источник: service/routes_v3.py; reports/selfcheck/consistency_latest.json</a:t>
-            </a:r>
-          </a:p>
-        </p:txBody>
-      </p:sp>
-      <p:sp>
-        <p:nvSpPr>
-          <p:cNvPr id="8" name="TextBox 7"/>
+              <a:t>Источник: reports/detector_v2/experiments.md, unet_test.json; configs/detector_v2_eval.yaml</a:t>
+            </a:r>
+          </a:p>
+        </p:txBody>
+      </p:sp>
+      <p:sp>
+        <p:nvSpPr>
+          <p:cNvPr id="19" name="TextBox 18"/>
           <p:cNvSpPr txBox="1"/>
           <p:nvPr/>
         </p:nvSpPr>
@@ -7908,7 +7834,7 @@
                 </a:solidFill>
                 <a:latin typeface="Segoe UI"/>
               </a:rPr>
-              <a:t>4:41</a:t>
+              <a:t>прил.</a:t>
             </a:r>
           </a:p>
         </p:txBody>
@@ -7973,7 +7899,7 @@
                 </a:solidFill>
                 <a:latin typeface="Segoe UI"/>
               </a:rPr>
-              <a:t>16 · Собственный вклад и ключевые решения</a:t>
+              <a:t>16 · Приложение · Количество: поле и снимок раздельно</a:t>
             </a:r>
           </a:p>
         </p:txBody>
@@ -8006,13 +7932,13 @@
               </a:spcAft>
             </a:pPr>
             <a:r>
-              <a:rPr sz="2600" b="1">
+              <a:rPr sz="2300" b="1">
                 <a:solidFill>
                   <a:srgbClr val="EEEFF1"/>
                 </a:solidFill>
                 <a:latin typeface="Segoe UI"/>
               </a:rPr>
-              <a:t>Наш вклад — решения, каждое проверено экспериментом или записано до результата</a:t>
+              <a:t>Количество раздельно: поле — шт./км², снимок — доля покрытия; калибровки нет, нужно 4–12 пар A с сигналом</a:t>
             </a:r>
           </a:p>
         </p:txBody>
@@ -8026,7 +7952,7 @@
         <p:spPr>
           <a:xfrm>
             <a:off x="457200" y="1600200"/>
-            <a:ext cx="11247120" cy="4572000"/>
+            <a:ext cx="5577840" cy="4572000"/>
           </a:xfrm>
           <a:prstGeom prst="rect">
             <a:avLst/>
@@ -8045,13 +7971,13 @@
               </a:spcAft>
             </a:pPr>
             <a:r>
-              <a:rPr sz="1500" b="0">
+              <a:rPr sz="1600" b="0">
                 <a:solidFill>
                   <a:srgbClr val="EEEFF1"/>
                 </a:solidFill>
                 <a:latin typeface="Segoe UI"/>
               </a:rPr>
-              <a:t>• Реестр пар с допуском по дрейфу вместо «±1 сут»: 29 пар по метаданным → 0 синхронных; причины у каждого из 318 событий</a:t>
+              <a:t>• Поле (измерение): S2 ΣN/ΣA = 697 / 12.94 км² = 53.9 [49.9–58.0] шт./км²</a:t>
             </a:r>
           </a:p>
           <a:p>
@@ -8061,13 +7987,13 @@
               </a:spcAft>
             </a:pPr>
             <a:r>
-              <a:rPr sz="1500" b="0">
+              <a:rPr sz="1600" b="0">
                 <a:solidFill>
                   <a:srgbClr val="EEEFF1"/>
                 </a:solidFill>
                 <a:latin typeface="Segoe UI"/>
               </a:rPr>
-              <a:t>• Сплит по участкам маршрута + буфер: на «связных компонентах» kNN выигрывал −11.6 [−23.1; −0.9], на маршруте −4.2 [−12.0; 3.4] — утечка через соседей дня</a:t>
+              <a:t>• Снимок: доля покрытия подозрительного материала, м²/км² пригодной воды; медиана на 64 живых сценах 3.2; это не мусор и не шт./км²</a:t>
             </a:r>
           </a:p>
           <a:p>
@@ -8077,13 +8003,13 @@
               </a:spcAft>
             </a:pPr>
             <a:r>
-              <a:rPr sz="1500" b="0">
+              <a:rPr sz="1600" b="0">
                 <a:solidFill>
                   <a:srgbClr val="EEEFF1"/>
                 </a:solidFill>
                 <a:latin typeface="Segoe UI"/>
               </a:rPr>
-              <a:t>• Отложенный test один раз: правило «не лучше медианы → медиана» записано 25.09.2026 19:05, test открыт 25.09.2026 19:15 — на карте медиана</a:t>
+              <a:t>• Калибровка ln C = ln k + b · ln S требует пар A с ненулевым сигналом — их 0; в 11 полосах CSV сигнал 0</a:t>
             </a:r>
           </a:p>
           <a:p>
@@ -8093,13 +8019,13 @@
               </a:spcAft>
             </a:pPr>
             <a:r>
-              <a:rPr sz="1500" b="0">
+              <a:rPr sz="1600" b="0">
                 <a:solidFill>
                   <a:srgbClr val="EEEFF1"/>
                 </a:solidFill>
                 <a:latin typeface="Segoe UI"/>
               </a:rPr>
-              <a:t>• Отказ от гармонизации L2A по MARIDA val (F1 0.923 против 0.897), test не использовался</a:t>
+              <a:t>• Нужно: k в пределах ×/÷2 — 4–12 пар с сигналом; для связи r = 0.5 — 30 пар; обследований в 3.5 раза больше</a:t>
             </a:r>
           </a:p>
           <a:p>
@@ -8109,52 +8035,142 @@
               </a:spcAft>
             </a:pPr>
             <a:r>
-              <a:rPr sz="1500" b="0">
+              <a:rPr sz="1600" b="0">
                 <a:solidFill>
                   <a:srgbClr val="EEEFF1"/>
                 </a:solidFill>
                 <a:latin typeface="Segoe UI"/>
               </a:rPr>
-              <a:t>• Геометрия трансект по первоисточникам PANGAEA: 104 события, 4 прерванные — двумя сегментами; окно синхронизации |dt| ≤ 4.17 ч</a:t>
-            </a:r>
-          </a:p>
-          <a:p>
-            <a:pPr algn="l">
-              <a:spcAft>
-                <a:spcPts val="1000"/>
-              </a:spcAft>
-            </a:pPr>
-            <a:r>
-              <a:rPr sz="1500" b="0">
+              <a:t>• «Площадь / размер = штуки» — только сценарий: 200 м² маски = 160–500000 предметов; массу не оцениваем</a:t>
+            </a:r>
+          </a:p>
+        </p:txBody>
+      </p:sp>
+      <p:sp>
+        <p:nvSpPr>
+          <p:cNvPr id="5" name="Rectangle 4"/>
+          <p:cNvSpPr/>
+          <p:nvPr/>
+        </p:nvSpPr>
+        <p:spPr>
+          <a:xfrm>
+            <a:off x="6400800" y="1691640"/>
+            <a:ext cx="5349240" cy="1554480"/>
+          </a:xfrm>
+          <a:prstGeom prst="rect">
+            <a:avLst/>
+          </a:prstGeom>
+          <a:solidFill>
+            <a:srgbClr val="1B1E24"/>
+          </a:solidFill>
+          <a:ln>
+            <a:noFill/>
+          </a:ln>
+          <a:effectLst/>
+        </p:spPr>
+        <p:style>
+          <a:lnRef idx="1">
+            <a:schemeClr val="accent1"/>
+          </a:lnRef>
+          <a:fillRef idx="3">
+            <a:schemeClr val="accent1"/>
+          </a:fillRef>
+          <a:effectRef idx="2">
+            <a:schemeClr val="accent1"/>
+          </a:effectRef>
+          <a:fontRef idx="minor">
+            <a:schemeClr val="lt1"/>
+          </a:fontRef>
+        </p:style>
+        <p:txBody>
+          <a:bodyPr rtlCol="0" anchor="ctr"/>
+          <a:lstStyle/>
+          <a:p>
+            <a:pPr algn="ctr"/>
+          </a:p>
+        </p:txBody>
+      </p:sp>
+      <p:sp>
+        <p:nvSpPr>
+          <p:cNvPr id="6" name="TextBox 5"/>
+          <p:cNvSpPr txBox="1"/>
+          <p:nvPr/>
+        </p:nvSpPr>
+        <p:spPr>
+          <a:xfrm>
+            <a:off x="6675120" y="1783080"/>
+            <a:ext cx="4800600" cy="822960"/>
+          </a:xfrm>
+          <a:prstGeom prst="rect">
+            <a:avLst/>
+          </a:prstGeom>
+          <a:noFill/>
+        </p:spPr>
+        <p:txBody>
+          <a:bodyPr wrap="square" anchor="t" lIns="18288" rIns="18288" tIns="18288" bIns="18288">
+            <a:spAutoFit/>
+          </a:bodyPr>
+          <a:lstStyle/>
+          <a:p>
+            <a:pPr algn="l">
+              <a:spcAft>
+                <a:spcPts val="600"/>
+              </a:spcAft>
+            </a:pPr>
+            <a:r>
+              <a:rPr sz="4800" b="1">
+                <a:solidFill>
+                  <a:srgbClr val="D9912E"/>
+                </a:solidFill>
+                <a:latin typeface="Segoe UI"/>
+              </a:rPr>
+              <a:t>4–12</a:t>
+            </a:r>
+          </a:p>
+        </p:txBody>
+      </p:sp>
+      <p:sp>
+        <p:nvSpPr>
+          <p:cNvPr id="7" name="TextBox 6"/>
+          <p:cNvSpPr txBox="1"/>
+          <p:nvPr/>
+        </p:nvSpPr>
+        <p:spPr>
+          <a:xfrm>
+            <a:off x="6675120" y="2606040"/>
+            <a:ext cx="4800600" cy="594360"/>
+          </a:xfrm>
+          <a:prstGeom prst="rect">
+            <a:avLst/>
+          </a:prstGeom>
+          <a:noFill/>
+        </p:spPr>
+        <p:txBody>
+          <a:bodyPr wrap="square" anchor="t" lIns="18288" rIns="18288" tIns="18288" bIns="18288">
+            <a:spAutoFit/>
+          </a:bodyPr>
+          <a:lstStyle/>
+          <a:p>
+            <a:pPr algn="l">
+              <a:spcAft>
+                <a:spcPts val="600"/>
+              </a:spcAft>
+            </a:pPr>
+            <a:r>
+              <a:rPr sz="1300" b="0">
                 <a:solidFill>
                   <a:srgbClr val="EEEFF1"/>
                 </a:solidFill>
                 <a:latin typeface="Segoe UI"/>
               </a:rPr>
-              <a:t>• Один источник чисел: final_numbers.json → README, отчёт, дека, речь, ответы; тест сверяет (232 passed)</a:t>
-            </a:r>
-          </a:p>
-          <a:p>
-            <a:pPr algn="l">
-              <a:spcAft>
-                <a:spcPts val="1000"/>
-              </a:spcAft>
-            </a:pPr>
-            <a:r>
-              <a:rPr sz="1500" b="0">
-                <a:solidFill>
-                  <a:srgbClr val="EEEFF1"/>
-                </a:solidFill>
-                <a:latin typeface="Segoe UI"/>
-              </a:rPr>
-              <a:t>• Готовое, не наше: разметка MARIDA и MADOS, протокол RandomForest MARIDA, индекс FDI, каталоги STAC</a:t>
-            </a:r>
-          </a:p>
-        </p:txBody>
-      </p:sp>
-      <p:sp>
-        <p:nvSpPr>
-          <p:cNvPr id="5" name="TextBox 4"/>
+              <a:t>независимых пар A с ненулевым сигналом нужно для калибровки (есть 0)</a:t>
+            </a:r>
+          </a:p>
+        </p:txBody>
+      </p:sp>
+      <p:sp>
+        <p:nvSpPr>
+          <p:cNvPr id="8" name="TextBox 7"/>
           <p:cNvSpPr txBox="1"/>
           <p:nvPr/>
         </p:nvSpPr>
@@ -8186,14 +8202,14 @@
                 </a:solidFill>
                 <a:latin typeface="Segoe UI"/>
               </a:rPr>
-              <a:t>Источник: reports/case_pairs/summary.md; reports/case_conc/metrics.json; configs/case_selection.yaml; docs/DECISIONS.md; reports/case_geometry/summary.md</a:t>
-            </a:r>
-          </a:p>
-        </p:txBody>
-      </p:sp>
-      <p:sp>
-        <p:nvSpPr>
-          <p:cNvPr id="6" name="TextBox 5"/>
+              <a:t>Источник: reports/quantity/*.json, docs/QUANTITY.md (final_numbers → case.sections.quantity)</a:t>
+            </a:r>
+          </a:p>
+        </p:txBody>
+      </p:sp>
+      <p:sp>
+        <p:nvSpPr>
+          <p:cNvPr id="9" name="TextBox 8"/>
           <p:cNvSpPr txBox="1"/>
           <p:nvPr/>
         </p:nvSpPr>
@@ -8225,7 +8241,7 @@
                 </a:solidFill>
                 <a:latin typeface="Segoe UI"/>
               </a:rPr>
-              <a:t>4:56</a:t>
+              <a:t>прил.</a:t>
             </a:r>
           </a:p>
         </p:txBody>
@@ -8290,7 +8306,7 @@
                 </a:solidFill>
                 <a:latin typeface="Segoe UI"/>
               </a:rPr>
-              <a:t>17 · Дополнительные функции</a:t>
+              <a:t>17 · Приложение · Нефтяное пятно — эксперимент</a:t>
             </a:r>
           </a:p>
         </p:txBody>
@@ -8329,7 +8345,7 @@
                 </a:solidFill>
                 <a:latin typeface="Segoe UI"/>
               </a:rPr>
-              <a:t>«Подобрать снимок»: из правила дрейфа — инструмент планирования полевых работ под пролёт</a:t>
+              <a:t>Нефть: на MADOS F1 0.733 против OSI 0.324, но разлив Wakashio не найден — слой выключен</a:t>
             </a:r>
           </a:p>
         </p:txBody>
@@ -8368,7 +8384,7 @@
                 </a:solidFill>
                 <a:latin typeface="Segoe UI"/>
               </a:rPr>
-              <a:t>• Окно синхронизации |dt| ≤ 4.17 ч; наивное окно ±1 сут даёт 29 «пар», синхронных 0</a:t>
+              <a:t>• Отдельная голова на MADOS, сплит по сценам заморожен до обучения; val F1 0.888, test один раз 0.733 [0.612; 0.947]</a:t>
             </a:r>
           </a:p>
           <a:p>
@@ -8384,7 +8400,7 @@
                 </a:solidFill>
                 <a:latin typeface="Segoe UI"/>
               </a:rPr>
-              <a:t>• Чёрное море без времени трансект: 12 событий получают окно UTC, у 8 полоса чистая по маскам</a:t>
+              <a:t>• Контроль на реальном L2A: Wakashio 2020-08-11 — 0.17 км² мелких пятен (пятно в лагуне не найдено), 2020-08-16 — 62.41 км² ряби</a:t>
             </a:r>
           </a:p>
           <a:p>
@@ -8400,93 +8416,136 @@
                 </a:solidFill>
                 <a:latin typeface="Segoe UI"/>
               </a:rPr>
-              <a:t>• Прогноз пролётов на архиве совпал с реальной съёмкой в 82 из 88 случаев (±5 мин)</a:t>
-            </a:r>
-          </a:p>
-          <a:p>
-            <a:pPr algn="l">
-              <a:spcAft>
-                <a:spcPts val="1000"/>
-              </a:spcAft>
-            </a:pPr>
-            <a:r>
-              <a:rPr sz="1600" b="0">
+              <a:t>• Честный отказ: это не детектор нефти на L2A; слой «эксперимент», выключен по умолчанию; единица — площадь, не объём и не масса</a:t>
+            </a:r>
+          </a:p>
+        </p:txBody>
+      </p:sp>
+      <p:sp>
+        <p:nvSpPr>
+          <p:cNvPr id="5" name="Rectangle 4"/>
+          <p:cNvSpPr/>
+          <p:nvPr/>
+        </p:nvSpPr>
+        <p:spPr>
+          <a:xfrm>
+            <a:off x="6400800" y="1691640"/>
+            <a:ext cx="5349240" cy="1554480"/>
+          </a:xfrm>
+          <a:prstGeom prst="rect">
+            <a:avLst/>
+          </a:prstGeom>
+          <a:solidFill>
+            <a:srgbClr val="1B1E24"/>
+          </a:solidFill>
+          <a:ln>
+            <a:noFill/>
+          </a:ln>
+          <a:effectLst/>
+        </p:spPr>
+        <p:style>
+          <a:lnRef idx="1">
+            <a:schemeClr val="accent1"/>
+          </a:lnRef>
+          <a:fillRef idx="3">
+            <a:schemeClr val="accent1"/>
+          </a:fillRef>
+          <a:effectRef idx="2">
+            <a:schemeClr val="accent1"/>
+          </a:effectRef>
+          <a:fontRef idx="minor">
+            <a:schemeClr val="lt1"/>
+          </a:fontRef>
+        </p:style>
+        <p:txBody>
+          <a:bodyPr rtlCol="0" anchor="ctr"/>
+          <a:lstStyle/>
+          <a:p>
+            <a:pPr algn="ctr"/>
+          </a:p>
+        </p:txBody>
+      </p:sp>
+      <p:sp>
+        <p:nvSpPr>
+          <p:cNvPr id="6" name="TextBox 5"/>
+          <p:cNvSpPr txBox="1"/>
+          <p:nvPr/>
+        </p:nvSpPr>
+        <p:spPr>
+          <a:xfrm>
+            <a:off x="6675120" y="1783080"/>
+            <a:ext cx="4800600" cy="822960"/>
+          </a:xfrm>
+          <a:prstGeom prst="rect">
+            <a:avLst/>
+          </a:prstGeom>
+          <a:noFill/>
+        </p:spPr>
+        <p:txBody>
+          <a:bodyPr wrap="square" anchor="t" lIns="18288" rIns="18288" tIns="18288" bIns="18288">
+            <a:spAutoFit/>
+          </a:bodyPr>
+          <a:lstStyle/>
+          <a:p>
+            <a:pPr algn="l">
+              <a:spcAft>
+                <a:spcPts val="600"/>
+              </a:spcAft>
+            </a:pPr>
+            <a:r>
+              <a:rPr sz="4800" b="1">
+                <a:solidFill>
+                  <a:srgbClr val="D9912E"/>
+                </a:solidFill>
+                <a:latin typeface="Segoe UI"/>
+              </a:rPr>
+              <a:t>выкл.</a:t>
+            </a:r>
+          </a:p>
+        </p:txBody>
+      </p:sp>
+      <p:sp>
+        <p:nvSpPr>
+          <p:cNvPr id="7" name="TextBox 6"/>
+          <p:cNvSpPr txBox="1"/>
+          <p:nvPr/>
+        </p:nvSpPr>
+        <p:spPr>
+          <a:xfrm>
+            <a:off x="6675120" y="2606040"/>
+            <a:ext cx="4800600" cy="594360"/>
+          </a:xfrm>
+          <a:prstGeom prst="rect">
+            <a:avLst/>
+          </a:prstGeom>
+          <a:noFill/>
+        </p:spPr>
+        <p:txBody>
+          <a:bodyPr wrap="square" anchor="t" lIns="18288" rIns="18288" tIns="18288" bIns="18288">
+            <a:spAutoFit/>
+          </a:bodyPr>
+          <a:lstStyle/>
+          <a:p>
+            <a:pPr algn="l">
+              <a:spcAft>
+                <a:spcPts val="600"/>
+              </a:spcAft>
+            </a:pPr>
+            <a:r>
+              <a:rPr sz="1300" b="0">
                 <a:solidFill>
                   <a:srgbClr val="EEEFF1"/>
                 </a:solidFill>
                 <a:latin typeface="Segoe UI"/>
               </a:rPr>
-              <a:t>• Геометрия трансект по PANGAEA: 104 события S2/S3, 108 сегментов; 4 прерванные трансекты — двумя сегментами</a:t>
-            </a:r>
-          </a:p>
-        </p:txBody>
-      </p:sp>
-      <p:pic>
-        <p:nvPicPr>
-          <p:cNvPr id="5" name="Picture 4" descr="04_pairfinder_transect.jpg"/>
-          <p:cNvPicPr>
-            <a:picLocks noChangeAspect="1"/>
-          </p:cNvPicPr>
-          <p:nvPr/>
-        </p:nvPicPr>
-        <p:blipFill>
-          <a:blip r:embed="rId2"/>
-          <a:stretch>
-            <a:fillRect/>
-          </a:stretch>
-        </p:blipFill>
-        <p:spPr>
-          <a:xfrm>
-            <a:off x="6914726" y="1645920"/>
-            <a:ext cx="4321386" cy="4023360"/>
-          </a:xfrm>
-          <a:prstGeom prst="rect">
-            <a:avLst/>
-          </a:prstGeom>
-        </p:spPr>
-      </p:pic>
-      <p:sp>
-        <p:nvSpPr>
-          <p:cNvPr id="6" name="TextBox 5"/>
-          <p:cNvSpPr txBox="1"/>
-          <p:nvPr/>
-        </p:nvSpPr>
-        <p:spPr>
-          <a:xfrm>
-            <a:off x="6400800" y="5715000"/>
-            <a:ext cx="5349240" cy="548640"/>
-          </a:xfrm>
-          <a:prstGeom prst="rect">
-            <a:avLst/>
-          </a:prstGeom>
-          <a:noFill/>
-        </p:spPr>
-        <p:txBody>
-          <a:bodyPr wrap="square" anchor="t" lIns="18288" rIns="18288" tIns="18288" bIns="18288">
-            <a:spAutoFit/>
-          </a:bodyPr>
-          <a:lstStyle/>
-          <a:p>
-            <a:pPr algn="l">
-              <a:spcAft>
-                <a:spcPts val="600"/>
-              </a:spcAft>
-            </a:pPr>
-            <a:r>
-              <a:rPr sz="1200" b="0">
-                <a:solidFill>
-                  <a:srgbClr val="9AA1AC"/>
-                </a:solidFill>
-                <a:latin typeface="Segoe UI"/>
-              </a:rPr>
-              <a:t>Саргассово море, T18: прерванная трансекта (2 сегмента) и «Подбор снимка» — сцен в окне нет</a:t>
-            </a:r>
-          </a:p>
-        </p:txBody>
-      </p:sp>
-      <p:sp>
-        <p:nvSpPr>
-          <p:cNvPr id="7" name="TextBox 6"/>
+              <a:t>слой «Нефтяное пятно» — эксперимент; для нефти обычно нужен радар Sentinel-1</a:t>
+            </a:r>
+          </a:p>
+        </p:txBody>
+      </p:sp>
+      <p:sp>
+        <p:nvSpPr>
+          <p:cNvPr id="8" name="TextBox 7"/>
           <p:cNvSpPr txBox="1"/>
           <p:nvPr/>
         </p:nvSpPr>
@@ -8518,14 +8577,14 @@
                 </a:solidFill>
                 <a:latin typeface="Segoe UI"/>
               </a:rPr>
-              <a:t>Источник: docs/EXTRA_FEATURES.md; reports/case_pairfinder/evidence.md; reports/case_geometry/summary.md</a:t>
-            </a:r>
-          </a:p>
-        </p:txBody>
-      </p:sp>
-      <p:sp>
-        <p:nvSpPr>
-          <p:cNvPr id="8" name="TextBox 7"/>
+              <a:t>Источник: reports/oil/test.json, control.json; docs/OIL.md</a:t>
+            </a:r>
+          </a:p>
+        </p:txBody>
+      </p:sp>
+      <p:sp>
+        <p:nvSpPr>
+          <p:cNvPr id="9" name="TextBox 8"/>
           <p:cNvSpPr txBox="1"/>
           <p:nvPr/>
         </p:nvSpPr>
@@ -8557,7 +8616,7 @@
                 </a:solidFill>
                 <a:latin typeface="Segoe UI"/>
               </a:rPr>
-              <a:t>5:25</a:t>
+              <a:t>прил.</a:t>
             </a:r>
           </a:p>
         </p:txBody>
@@ -8622,7 +8681,7 @@
                 </a:solidFill>
                 <a:latin typeface="Segoe UI"/>
               </a:rPr>
-              <a:t>18 · Ограничения и развитие</a:t>
+              <a:t>18 · Приложение · Эксперимент «снимок vs all_litter»</a:t>
             </a:r>
           </a:p>
         </p:txBody>
@@ -8661,7 +8720,7 @@
                 </a:solidFill>
                 <a:latin typeface="Segoe UI"/>
               </a:rPr>
-              <a:t>Ограничения названы на карте и в отчёте; развитие — синхронные пары и больше рейсов</a:t>
+              <a:t>Связь признаков снимка с полевой плотностью всего мусора не установлена: данных на это мало</a:t>
             </a:r>
           </a:p>
         </p:txBody>
@@ -8675,7 +8734,7 @@
         <p:spPr>
           <a:xfrm>
             <a:off x="457200" y="1600200"/>
-            <a:ext cx="11247120" cy="4572000"/>
+            <a:ext cx="5577840" cy="4572000"/>
           </a:xfrm>
           <a:prstGeom prst="rect">
             <a:avLst/>
@@ -8700,7 +8759,7 @@
                 </a:solidFill>
                 <a:latin typeface="Segoe UI"/>
               </a:rPr>
-              <a:t>• Перенос «снимок → шт./км²» не доказан: синхронных пар нет, для пластика снимков нет</a:t>
+              <a:t>• 11 пар S2 прошли маски, независимых групп «район × день» — 6; эталон — весь мусор, не пластик</a:t>
             </a:r>
           </a:p>
           <a:p>
@@ -8716,7 +8775,7 @@
                 </a:solidFill>
                 <a:latin typeface="Segoe UI"/>
               </a:rPr>
-              <a:t>• Мало независимых данных: S2 — один рейс, 26 дней; интервалы недопокрывают (84 % и 74 % вместо 90 %)</a:t>
+              <a:t>• FDI в полосе: ρ −0.75 [−1.00; −0.14], p Холма 0.12; та же полоса в случайной воде сцены — −0.52</a:t>
             </a:r>
           </a:p>
           <a:p>
@@ -8732,7 +8791,7 @@
                 </a:solidFill>
                 <a:latin typeface="Segoe UI"/>
               </a:rPr>
-              <a:t>• Test не абсолютно нетронутый: ранняя разведка бейзлайнов видела все события профиля (записано до открытия)</a:t>
+              <a:t>• Значит, связь на уровне сцены или дня, а не места; знак к тому же обратный ожидаемому</a:t>
             </a:r>
           </a:p>
           <a:p>
@@ -8748,30 +8807,136 @@
                 </a:solidFill>
                 <a:latin typeface="Segoe UI"/>
               </a:rPr>
-              <a:t>• Детектор на L2A пар по разметке не измерен; порог блика не калибровался на этих сценах</a:t>
-            </a:r>
-          </a:p>
-          <a:p>
-            <a:pPr algn="l">
-              <a:spcAft>
-                <a:spcPts val="1000"/>
-              </a:spcAft>
-            </a:pPr>
-            <a:r>
-              <a:rPr sz="1600" b="0">
+              <a:t>• Мощность: при 6 группах видна только |ρ| ≥ 0.96; для ρ = 0.5 нужно ≈ 33 независимых пар</a:t>
+            </a:r>
+          </a:p>
+        </p:txBody>
+      </p:sp>
+      <p:sp>
+        <p:nvSpPr>
+          <p:cNvPr id="5" name="Rectangle 4"/>
+          <p:cNvSpPr/>
+          <p:nvPr/>
+        </p:nvSpPr>
+        <p:spPr>
+          <a:xfrm>
+            <a:off x="6400800" y="1691640"/>
+            <a:ext cx="5349240" cy="1554480"/>
+          </a:xfrm>
+          <a:prstGeom prst="rect">
+            <a:avLst/>
+          </a:prstGeom>
+          <a:solidFill>
+            <a:srgbClr val="1B1E24"/>
+          </a:solidFill>
+          <a:ln>
+            <a:noFill/>
+          </a:ln>
+          <a:effectLst/>
+        </p:spPr>
+        <p:style>
+          <a:lnRef idx="1">
+            <a:schemeClr val="accent1"/>
+          </a:lnRef>
+          <a:fillRef idx="3">
+            <a:schemeClr val="accent1"/>
+          </a:fillRef>
+          <a:effectRef idx="2">
+            <a:schemeClr val="accent1"/>
+          </a:effectRef>
+          <a:fontRef idx="minor">
+            <a:schemeClr val="lt1"/>
+          </a:fontRef>
+        </p:style>
+        <p:txBody>
+          <a:bodyPr rtlCol="0" anchor="ctr"/>
+          <a:lstStyle/>
+          <a:p>
+            <a:pPr algn="ctr"/>
+          </a:p>
+        </p:txBody>
+      </p:sp>
+      <p:sp>
+        <p:nvSpPr>
+          <p:cNvPr id="6" name="TextBox 5"/>
+          <p:cNvSpPr txBox="1"/>
+          <p:nvPr/>
+        </p:nvSpPr>
+        <p:spPr>
+          <a:xfrm>
+            <a:off x="6675120" y="1783080"/>
+            <a:ext cx="4800600" cy="822960"/>
+          </a:xfrm>
+          <a:prstGeom prst="rect">
+            <a:avLst/>
+          </a:prstGeom>
+          <a:noFill/>
+        </p:spPr>
+        <p:txBody>
+          <a:bodyPr wrap="square" anchor="t" lIns="18288" rIns="18288" tIns="18288" bIns="18288">
+            <a:spAutoFit/>
+          </a:bodyPr>
+          <a:lstStyle/>
+          <a:p>
+            <a:pPr algn="l">
+              <a:spcAft>
+                <a:spcPts val="600"/>
+              </a:spcAft>
+            </a:pPr>
+            <a:r>
+              <a:rPr sz="4800" b="1">
+                <a:solidFill>
+                  <a:srgbClr val="D9912E"/>
+                </a:solidFill>
+                <a:latin typeface="Segoe UI"/>
+              </a:rPr>
+              <a:t>33</a:t>
+            </a:r>
+          </a:p>
+        </p:txBody>
+      </p:sp>
+      <p:sp>
+        <p:nvSpPr>
+          <p:cNvPr id="7" name="TextBox 6"/>
+          <p:cNvSpPr txBox="1"/>
+          <p:nvPr/>
+        </p:nvSpPr>
+        <p:spPr>
+          <a:xfrm>
+            <a:off x="6675120" y="2606040"/>
+            <a:ext cx="4800600" cy="594360"/>
+          </a:xfrm>
+          <a:prstGeom prst="rect">
+            <a:avLst/>
+          </a:prstGeom>
+          <a:noFill/>
+        </p:spPr>
+        <p:txBody>
+          <a:bodyPr wrap="square" anchor="t" lIns="18288" rIns="18288" tIns="18288" bIns="18288">
+            <a:spAutoFit/>
+          </a:bodyPr>
+          <a:lstStyle/>
+          <a:p>
+            <a:pPr algn="l">
+              <a:spcAft>
+                <a:spcPts val="600"/>
+              </a:spcAft>
+            </a:pPr>
+            <a:r>
+              <a:rPr sz="1300" b="0">
                 <a:solidFill>
                   <a:srgbClr val="EEEFF1"/>
                 </a:solidFill>
                 <a:latin typeface="Segoe UI"/>
               </a:rPr>
-              <a:t>• Дальше: трансекты под пролёт с записанным временем (≈ 33 пар), больше рейсов и сезонов, ERA5 для дрейфа, разметка скоплений на L2A</a:t>
-            </a:r>
-          </a:p>
-        </p:txBody>
-      </p:sp>
-      <p:sp>
-        <p:nvSpPr>
-          <p:cNvPr id="5" name="TextBox 4"/>
+              <a:t>независимых синхронных пар нужно, чтобы увидеть ρ = 0.5 (есть 6 групп)</a:t>
+            </a:r>
+          </a:p>
+        </p:txBody>
+      </p:sp>
+      <p:sp>
+        <p:nvSpPr>
+          <p:cNvPr id="8" name="TextBox 7"/>
           <p:cNvSpPr txBox="1"/>
           <p:nvPr/>
         </p:nvSpPr>
@@ -8803,14 +8968,14 @@
                 </a:solidFill>
                 <a:latin typeface="Segoe UI"/>
               </a:rPr>
-              <a:t>Источник: reports/report.md §8–9; README.md «Ограничения»</a:t>
-            </a:r>
-          </a:p>
-        </p:txBody>
-      </p:sp>
-      <p:sp>
-        <p:nvSpPr>
-          <p:cNvPr id="6" name="TextBox 5"/>
+              <a:t>Источник: reports/case_pairs/experiment.md, experiment.json</a:t>
+            </a:r>
+          </a:p>
+        </p:txBody>
+      </p:sp>
+      <p:sp>
+        <p:nvSpPr>
+          <p:cNvPr id="9" name="TextBox 8"/>
           <p:cNvSpPr txBox="1"/>
           <p:nvPr/>
         </p:nvSpPr>
@@ -8842,7 +9007,7 @@
                 </a:solidFill>
                 <a:latin typeface="Segoe UI"/>
               </a:rPr>
-              <a:t>5:38</a:t>
+              <a:t>прил.</a:t>
             </a:r>
           </a:p>
         </p:txBody>
@@ -8907,7 +9072,7 @@
                 </a:solidFill>
                 <a:latin typeface="Segoe UI"/>
               </a:rPr>
-              <a:t>19 · Воспроизводимость</a:t>
+              <a:t>19 · Приложение · Дополнительные функции</a:t>
             </a:r>
           </a:p>
         </p:txBody>
@@ -8946,7 +9111,7 @@
                 </a:solidFill>
                 <a:latin typeface="Segoe UI"/>
               </a:rPr>
-              <a:t>Одна команда, 6.9 с без сети; чистый клон до карты — 7,5 мин, числа совпали</a:t>
+              <a:t>«Подобрать снимок»: из правила дрейфа — инструмент планирования полевых работ под пролёт</a:t>
             </a:r>
           </a:p>
         </p:txBody>
@@ -8985,7 +9150,7 @@
                 </a:solidFill>
                 <a:latin typeface="Segoe UI"/>
               </a:rPr>
-              <a:t>• Одна команда: run.ps1 -Case all -Offline (CSV → отбор → пары → маски → детектор → метрики → выгрузка)</a:t>
+              <a:t>• Окно синхронизации |dt| ≤ 4.17 ч; наивное окно ±1 сут даёт 29 «пар», синхронных 0</a:t>
             </a:r>
           </a:p>
           <a:p>
@@ -9001,7 +9166,7 @@
                 </a:solidFill>
                 <a:latin typeface="Segoe UI"/>
               </a:rPr>
-              <a:t>• 24 выходные таблицы с одинаковыми sha256 при повторе; отпечаток fccf808a8817d7c4…</a:t>
+              <a:t>• Чёрное море без времени трансект: 12 событий получают окно UTC, у 8 полоса чистая по маскам</a:t>
             </a:r>
           </a:p>
           <a:p>
@@ -9017,7 +9182,7 @@
                 </a:solidFill>
                 <a:latin typeface="Segoe UI"/>
               </a:rPr>
-              <a:t>• Чистый клон: клон 76 с, установка и маршрут 3 мин 17 с, карта 8,1 с</a:t>
+              <a:t>• Прогноз пролётов на архиве совпал с реальной съёмкой в 82 из 88 случаев (±5 мин)</a:t>
             </a:r>
           </a:p>
           <a:p>
@@ -9033,55 +9198,35 @@
                 </a:solidFill>
                 <a:latin typeface="Segoe UI"/>
               </a:rPr>
-              <a:t>• Тесты кейса (26.09.2026 00:18): 232 passed, 2 skipped, 0 failed; числа документов сверяет тест</a:t>
-            </a:r>
-          </a:p>
-        </p:txBody>
-      </p:sp>
-      <p:sp>
-        <p:nvSpPr>
-          <p:cNvPr id="5" name="Rectangle 4"/>
-          <p:cNvSpPr/>
-          <p:nvPr/>
-        </p:nvSpPr>
-        <p:spPr>
-          <a:xfrm>
-            <a:off x="6400800" y="1691640"/>
-            <a:ext cx="5349240" cy="1554480"/>
-          </a:xfrm>
-          <a:prstGeom prst="rect">
-            <a:avLst/>
-          </a:prstGeom>
-          <a:solidFill>
-            <a:srgbClr val="1B1E24"/>
-          </a:solidFill>
-          <a:ln>
-            <a:noFill/>
-          </a:ln>
-          <a:effectLst/>
-        </p:spPr>
-        <p:style>
-          <a:lnRef idx="1">
-            <a:schemeClr val="accent1"/>
-          </a:lnRef>
-          <a:fillRef idx="3">
-            <a:schemeClr val="accent1"/>
-          </a:fillRef>
-          <a:effectRef idx="2">
-            <a:schemeClr val="accent1"/>
-          </a:effectRef>
-          <a:fontRef idx="minor">
-            <a:schemeClr val="lt1"/>
-          </a:fontRef>
-        </p:style>
-        <p:txBody>
-          <a:bodyPr rtlCol="0" anchor="ctr"/>
-          <a:lstStyle/>
-          <a:p>
-            <a:pPr algn="ctr"/>
-          </a:p>
-        </p:txBody>
-      </p:sp>
+              <a:t>• Геометрия трансект по PANGAEA: 104 события S2/S3, 108 сегментов; 4 прерванные трансекты — двумя сегментами</a:t>
+            </a:r>
+          </a:p>
+        </p:txBody>
+      </p:sp>
+      <p:pic>
+        <p:nvPicPr>
+          <p:cNvPr id="5" name="Picture 4" descr="04_pairfinder_transect.jpg"/>
+          <p:cNvPicPr>
+            <a:picLocks noChangeAspect="1"/>
+          </p:cNvPicPr>
+          <p:nvPr/>
+        </p:nvPicPr>
+        <p:blipFill>
+          <a:blip r:embed="rId2"/>
+          <a:stretch>
+            <a:fillRect/>
+          </a:stretch>
+        </p:blipFill>
+        <p:spPr>
+          <a:xfrm>
+            <a:off x="6914726" y="1645920"/>
+            <a:ext cx="4321386" cy="4023360"/>
+          </a:xfrm>
+          <a:prstGeom prst="rect">
+            <a:avLst/>
+          </a:prstGeom>
+        </p:spPr>
+      </p:pic>
       <p:sp>
         <p:nvSpPr>
           <p:cNvPr id="6" name="TextBox 5"/>
@@ -9090,8 +9235,8 @@
         </p:nvSpPr>
         <p:spPr>
           <a:xfrm>
-            <a:off x="6675120" y="1783080"/>
-            <a:ext cx="4800600" cy="822960"/>
+            <a:off x="6400800" y="5715000"/>
+            <a:ext cx="5349240" cy="548640"/>
           </a:xfrm>
           <a:prstGeom prst="rect">
             <a:avLst/>
@@ -9110,13 +9255,13 @@
               </a:spcAft>
             </a:pPr>
             <a:r>
-              <a:rPr sz="4800" b="1">
-                <a:solidFill>
-                  <a:srgbClr val="D9912E"/>
-                </a:solidFill>
-                <a:latin typeface="Segoe UI"/>
-              </a:rPr>
-              <a:t>7,5 мин</a:t>
+              <a:rPr sz="1200" b="0">
+                <a:solidFill>
+                  <a:srgbClr val="9AA1AC"/>
+                </a:solidFill>
+                <a:latin typeface="Segoe UI"/>
+              </a:rPr>
+              <a:t>Саргассово море, T18: прерванная трансекта (2 сегмента) и «Подбор снимка» — сцен в окне нет</a:t>
             </a:r>
           </a:p>
         </p:txBody>
@@ -9124,45 +9269,6 @@
       <p:sp>
         <p:nvSpPr>
           <p:cNvPr id="7" name="TextBox 6"/>
-          <p:cNvSpPr txBox="1"/>
-          <p:nvPr/>
-        </p:nvSpPr>
-        <p:spPr>
-          <a:xfrm>
-            <a:off x="6675120" y="2606040"/>
-            <a:ext cx="4800600" cy="594360"/>
-          </a:xfrm>
-          <a:prstGeom prst="rect">
-            <a:avLst/>
-          </a:prstGeom>
-          <a:noFill/>
-        </p:spPr>
-        <p:txBody>
-          <a:bodyPr wrap="square" anchor="t" lIns="18288" rIns="18288" tIns="18288" bIns="18288">
-            <a:spAutoFit/>
-          </a:bodyPr>
-          <a:lstStyle/>
-          <a:p>
-            <a:pPr algn="l">
-              <a:spcAft>
-                <a:spcPts val="600"/>
-              </a:spcAft>
-            </a:pPr>
-            <a:r>
-              <a:rPr sz="1300" b="0">
-                <a:solidFill>
-                  <a:srgbClr val="EEEFF1"/>
-                </a:solidFill>
-                <a:latin typeface="Segoe UI"/>
-              </a:rPr>
-              <a:t>от git clone до карты на экране, CPU</a:t>
-            </a:r>
-          </a:p>
-        </p:txBody>
-      </p:sp>
-      <p:sp>
-        <p:nvSpPr>
-          <p:cNvPr id="8" name="TextBox 7"/>
           <p:cNvSpPr txBox="1"/>
           <p:nvPr/>
         </p:nvSpPr>
@@ -9194,14 +9300,14 @@
                 </a:solidFill>
                 <a:latin typeface="Segoe UI"/>
               </a:rPr>
-              <a:t>Источник: reports/selfcheck/clean_clone_1941.md; reports/case_run/run_summary.json</a:t>
-            </a:r>
-          </a:p>
-        </p:txBody>
-      </p:sp>
-      <p:sp>
-        <p:nvSpPr>
-          <p:cNvPr id="9" name="TextBox 8"/>
+              <a:t>Источник: docs/EXTRA_FEATURES.md; reports/case_pairfinder/evidence.md; reports/case_geometry/summary.md</a:t>
+            </a:r>
+          </a:p>
+        </p:txBody>
+      </p:sp>
+      <p:sp>
+        <p:nvSpPr>
+          <p:cNvPr id="8" name="TextBox 7"/>
           <p:cNvSpPr txBox="1"/>
           <p:nvPr/>
         </p:nvSpPr>
@@ -9233,7 +9339,7 @@
                 </a:solidFill>
                 <a:latin typeface="Segoe UI"/>
               </a:rPr>
-              <a:t>5:50</a:t>
+              <a:t>прил.</a:t>
             </a:r>
           </a:p>
         </p:txBody>
@@ -11636,7 +11742,7 @@
         <p:spPr>
           <a:xfrm>
             <a:off x="6400800" y="1645920"/>
-            <a:ext cx="5349240" cy="2808351"/>
+            <a:ext cx="5349240" cy="3209544"/>
           </a:xfrm>
           <a:prstGeom prst="rect">
             <a:avLst/>
@@ -11651,7 +11757,7 @@
         </p:nvSpPr>
         <p:spPr>
           <a:xfrm>
-            <a:off x="6400800" y="4499991"/>
+            <a:off x="6400800" y="4901183"/>
             <a:ext cx="5349240" cy="548640"/>
           </a:xfrm>
           <a:prstGeom prst="rect">
@@ -11978,7 +12084,7 @@
                 </a:solidFill>
                 <a:latin typeface="Segoe UI"/>
               </a:rPr>
-              <a:t>• Вывод: пары A подтверждают предел обнаружения, но калибровку «снимок → шт./км²» на них не построить</a:t>
+              <a:t>• Вывод: калибровку «снимок → шт./км²» на них не построить — нужно 4–12 пар A с ненулевым сигналом, есть 0; со снимка — только доля покрытия подозрительного материала</a:t>
             </a:r>
           </a:p>
         </p:txBody>
@@ -12256,7 +12362,7 @@
               </a:spcAft>
             </a:pPr>
             <a:r>
-              <a:rPr sz="1600" b="0">
+              <a:rPr sz="1500" b="0">
                 <a:solidFill>
                   <a:srgbClr val="EEEFF1"/>
                 </a:solidFill>
@@ -12272,7 +12378,7 @@
               </a:spcAft>
             </a:pPr>
             <a:r>
-              <a:rPr sz="1600" b="0">
+              <a:rPr sz="1500" b="0">
                 <a:solidFill>
                   <a:srgbClr val="EEEFF1"/>
                 </a:solidFill>
@@ -12288,7 +12394,7 @@
               </a:spcAft>
             </a:pPr>
             <a:r>
-              <a:rPr sz="1600" b="0">
+              <a:rPr sz="1500" b="0">
                 <a:solidFill>
                   <a:srgbClr val="EEEFF1"/>
                 </a:solidFill>
@@ -12304,13 +12410,29 @@
               </a:spcAft>
             </a:pPr>
             <a:r>
-              <a:rPr sz="1600" b="0">
+              <a:rPr sz="1500" b="0">
                 <a:solidFill>
                   <a:srgbClr val="EEEFF1"/>
                 </a:solidFill>
                 <a:latin typeface="Segoe UI"/>
               </a:rPr>
               <a:t>• Детектор без дообучения на L2A: нити Cózar 36 %, Refined 2.8 % пикселей; ложные на судах 25.9 %; облака — 4 пикс.</a:t>
+            </a:r>
+          </a:p>
+          <a:p>
+            <a:pPr algn="l">
+              <a:spcAft>
+                <a:spcPts val="1000"/>
+              </a:spcAft>
+            </a:pPr>
+            <a:r>
+              <a:rPr sz="1500" b="0">
+                <a:solidFill>
+                  <a:srgbClr val="EEEFF1"/>
+                </a:solidFill>
+                <a:latin typeface="Segoe UI"/>
+              </a:rPr>
+              <a:t>• Дообучение на B + D по правилу, записанному заранее: принято 0 из 11 — в сервисе weights/lgbm; U-Net MARIDA на test 0.501 против 0.871 (приложение)</a:t>
             </a:r>
           </a:p>
         </p:txBody>
@@ -12714,7 +12836,7 @@
                 </a:solidFill>
                 <a:latin typeface="Segoe UI"/>
               </a:rPr>
-              <a:t>09 · Детектор v2 и бейзлайны</a:t>
+              <a:t>09 · Детектор</a:t>
             </a:r>
           </a:p>
         </p:txBody>
@@ -12753,7 +12875,7 @@
                 </a:solidFill>
                 <a:latin typeface="Segoe UI"/>
               </a:rPr>
-              <a:t>Дообучение на B + D: принято 0 из 11 вариантов; U-Net MARIDA на test — F1 0.501</a:t>
+              <a:t>Детектор: F1 0.871 на test MARIDA; на снимках пар — 5 объектов, в полосах 0</a:t>
             </a:r>
           </a:p>
         </p:txBody>
@@ -12786,13 +12908,13 @@
               </a:spcAft>
             </a:pPr>
             <a:r>
-              <a:rPr sz="1600" b="0">
+              <a:rPr sz="1500" b="0">
                 <a:solidFill>
                   <a:srgbClr val="EEEFF1"/>
                 </a:solidFill>
                 <a:latin typeface="Segoe UI"/>
               </a:rPr>
-              <a:t>• Правило принятия записано до экспериментов: ΔF1 val ≥ 0.01 и не хуже на B и D; 3 seed; test не читался</a:t>
+              <a:t>• LightGBM, порог 0.63 с val; test MARIDA посчитан один раз: ΔF1 к RF 0.100 [0.049; 0.150]</a:t>
             </a:r>
           </a:p>
           <a:p>
@@ -12802,13 +12924,13 @@
               </a:spcAft>
             </a:pPr>
             <a:r>
-              <a:rPr sz="1600" b="0">
+              <a:rPr sz="1500" b="0">
                 <a:solidFill>
                   <a:srgbClr val="EEEFF1"/>
                 </a:solidFill>
                 <a:latin typeface="Segoe UI"/>
               </a:rPr>
-              <a:t>• ΔF1 val от −0.031 до 0.002 — в сервисе остаётся weights/lgbm</a:t>
+              <a:t>• MARIDA test: на саргассуме и мутной воде ложных 0 (FDI × NDVI помечает 46 % саргассума); ошибки — суда 27 и органика 21</a:t>
             </a:r>
           </a:p>
           <a:p>
@@ -12818,13 +12940,13 @@
               </a:spcAft>
             </a:pPr>
             <a:r>
-              <a:rPr sz="1600" b="0">
+              <a:rPr sz="1500" b="0">
                 <a:solidFill>
                   <a:srgbClr val="EEEFF1"/>
                 </a:solidFill>
                 <a:latin typeface="Segoe UI"/>
               </a:rPr>
-              <a:t>• Компромисс: D судов — ложные на судах 26 % → 4 %, но нити Cózar 36 % → 27 %</a:t>
+              <a:t>• Снимки пар (L2A): гармонизация каналов выключена по MARIDA val — F1 0.923 без сдвига против 0.897 со сдвигом, Δ −0.025 [−0.072; −0.013]</a:t>
             </a:r>
           </a:p>
           <a:p>
@@ -12834,13 +12956,29 @@
               </a:spcAft>
             </a:pPr>
             <a:r>
-              <a:rPr sz="1600" b="0">
+              <a:rPr sz="1500" b="0">
                 <a:solidFill>
                   <a:srgbClr val="EEEFF1"/>
                 </a:solidFill>
                 <a:latin typeface="Segoe UI"/>
               </a:rPr>
-              <a:t>• U-Net MARIDA (официальные веса): LightGBM лучше на 0.370 [0.215; 0.481], в 13 из 15 сцен; на снимках пар U-Net — 253 объектов «соль-перец», в полосах 0</a:t>
+              <a:t>• Сейчас: 5 объектов на 22 сценах, в полосах 0; вне полосы HE460 т.03 — 1 судно (верное срабатывание на сложном фоне) и 4 одиночных пикселя</a:t>
+            </a:r>
+          </a:p>
+          <a:p>
+            <a:pPr algn="l">
+              <a:spcAft>
+                <a:spcPts val="1000"/>
+              </a:spcAft>
+            </a:pPr>
+            <a:r>
+              <a:rPr sz="1500" b="0">
+                <a:solidFill>
+                  <a:srgbClr val="EEEFF1"/>
+                </a:solidFill>
+                <a:latin typeface="Segoe UI"/>
+              </a:rPr>
+              <a:t>• Прежний режим (с гармонизацией) — основание отказа: 975 объектов, вероятное скопление по виду у 1.7 % [0.0; 5.0]; размечал ИИ-агент, один аннотатор, κ 0.77 — его же слепой повтор</a:t>
             </a:r>
           </a:p>
         </p:txBody>
@@ -13162,7 +13300,7 @@
                 </a:solidFill>
                 <a:latin typeface="Segoe UI"/>
               </a:rPr>
-              <a:t>U-Net MARIDA, веса авторов</a:t>
+              <a:t>окно FDI × NDVI</a:t>
             </a:r>
           </a:p>
         </p:txBody>
@@ -13176,7 +13314,7 @@
         <p:spPr>
           <a:xfrm>
             <a:off x="8647480" y="3218688"/>
-            <a:ext cx="1142079" cy="274320"/>
+            <a:ext cx="95743" cy="274320"/>
           </a:xfrm>
           <a:prstGeom prst="rect">
             <a:avLst/>
@@ -13219,7 +13357,7 @@
         </p:nvSpPr>
         <p:spPr>
           <a:xfrm>
-            <a:off x="9862711" y="3154680"/>
+            <a:off x="8816375" y="3154680"/>
             <a:ext cx="822960" cy="384048"/>
           </a:xfrm>
           <a:prstGeom prst="rect">
@@ -13245,7 +13383,7 @@
                 </a:solidFill>
                 <a:latin typeface="Segoe UI"/>
               </a:rPr>
-              <a:t>0.501</a:t>
+              <a:t>0.042</a:t>
             </a:r>
           </a:p>
         </p:txBody>
@@ -13253,128 +13391,6 @@
       <p:sp>
         <p:nvSpPr>
           <p:cNvPr id="15" name="TextBox 14"/>
-          <p:cNvSpPr txBox="1"/>
-          <p:nvPr/>
-        </p:nvSpPr>
-        <p:spPr>
-          <a:xfrm>
-            <a:off x="6400800" y="3657600"/>
-            <a:ext cx="2155240" cy="384048"/>
-          </a:xfrm>
-          <a:prstGeom prst="rect">
-            <a:avLst/>
-          </a:prstGeom>
-          <a:noFill/>
-        </p:spPr>
-        <p:txBody>
-          <a:bodyPr wrap="square" anchor="ctr" lIns="18288" rIns="18288" tIns="18288" bIns="18288">
-            <a:spAutoFit/>
-          </a:bodyPr>
-          <a:lstStyle/>
-          <a:p>
-            <a:pPr algn="l">
-              <a:spcAft>
-                <a:spcPts val="600"/>
-              </a:spcAft>
-            </a:pPr>
-            <a:r>
-              <a:rPr sz="1300" b="0">
-                <a:solidFill>
-                  <a:srgbClr val="EEEFF1"/>
-                </a:solidFill>
-                <a:latin typeface="Segoe UI"/>
-              </a:rPr>
-              <a:t>окно FDI × NDVI</a:t>
-            </a:r>
-          </a:p>
-        </p:txBody>
-      </p:sp>
-      <p:sp>
-        <p:nvSpPr>
-          <p:cNvPr id="16" name="Rectangle 15"/>
-          <p:cNvSpPr/>
-          <p:nvPr/>
-        </p:nvSpPr>
-        <p:spPr>
-          <a:xfrm>
-            <a:off x="8647480" y="3721608"/>
-            <a:ext cx="95743" cy="274320"/>
-          </a:xfrm>
-          <a:prstGeom prst="rect">
-            <a:avLst/>
-          </a:prstGeom>
-          <a:solidFill>
-            <a:srgbClr val="5B6370"/>
-          </a:solidFill>
-          <a:ln>
-            <a:noFill/>
-          </a:ln>
-          <a:effectLst/>
-        </p:spPr>
-        <p:style>
-          <a:lnRef idx="1">
-            <a:schemeClr val="accent1"/>
-          </a:lnRef>
-          <a:fillRef idx="3">
-            <a:schemeClr val="accent1"/>
-          </a:fillRef>
-          <a:effectRef idx="2">
-            <a:schemeClr val="accent1"/>
-          </a:effectRef>
-          <a:fontRef idx="minor">
-            <a:schemeClr val="lt1"/>
-          </a:fontRef>
-        </p:style>
-        <p:txBody>
-          <a:bodyPr rtlCol="0" anchor="ctr"/>
-          <a:lstStyle/>
-          <a:p>
-            <a:pPr algn="ctr"/>
-          </a:p>
-        </p:txBody>
-      </p:sp>
-      <p:sp>
-        <p:nvSpPr>
-          <p:cNvPr id="17" name="TextBox 16"/>
-          <p:cNvSpPr txBox="1"/>
-          <p:nvPr/>
-        </p:nvSpPr>
-        <p:spPr>
-          <a:xfrm>
-            <a:off x="8816375" y="3657600"/>
-            <a:ext cx="822960" cy="384048"/>
-          </a:xfrm>
-          <a:prstGeom prst="rect">
-            <a:avLst/>
-          </a:prstGeom>
-          <a:noFill/>
-        </p:spPr>
-        <p:txBody>
-          <a:bodyPr wrap="square" anchor="ctr" lIns="18288" rIns="18288" tIns="18288" bIns="18288">
-            <a:spAutoFit/>
-          </a:bodyPr>
-          <a:lstStyle/>
-          <a:p>
-            <a:pPr algn="l">
-              <a:spcAft>
-                <a:spcPts val="600"/>
-              </a:spcAft>
-            </a:pPr>
-            <a:r>
-              <a:rPr sz="1400" b="1">
-                <a:solidFill>
-                  <a:srgbClr val="EEEFF1"/>
-                </a:solidFill>
-                <a:latin typeface="Segoe UI"/>
-              </a:rPr>
-              <a:t>0.042</a:t>
-            </a:r>
-          </a:p>
-        </p:txBody>
-      </p:sp>
-      <p:sp>
-        <p:nvSpPr>
-          <p:cNvPr id="18" name="TextBox 17"/>
           <p:cNvSpPr txBox="1"/>
           <p:nvPr/>
         </p:nvSpPr>
@@ -13406,14 +13422,14 @@
                 </a:solidFill>
                 <a:latin typeface="Segoe UI"/>
               </a:rPr>
-              <a:t>Источник: reports/detector_v2/experiments.md, unet_test.json; configs/detector_v2_eval.yaml</a:t>
-            </a:r>
-          </a:p>
-        </p:txBody>
-      </p:sp>
-      <p:sp>
-        <p:nvSpPr>
-          <p:cNvPr id="19" name="TextBox 18"/>
+              <a:t>Источник: reports/case_detector/compare.md; reports/case_pairs/visual_review.md; docs/DECISIONS.md (final_numbers → case.detector_current)</a:t>
+            </a:r>
+          </a:p>
+        </p:txBody>
+      </p:sp>
+      <p:sp>
+        <p:nvSpPr>
+          <p:cNvPr id="16" name="TextBox 15"/>
           <p:cNvSpPr txBox="1"/>
           <p:nvPr/>
         </p:nvSpPr>
@@ -13445,7 +13461,7 @@
                 </a:solidFill>
                 <a:latin typeface="Segoe UI"/>
               </a:rPr>
-              <a:t>2:33</a:t>
+              <a:t>2:39</a:t>
             </a:r>
           </a:p>
         </p:txBody>

--- a/reports/case_deck.pptx
+++ b/reports/case_deck.pptx
@@ -940,7 +940,7 @@
           <a:lstStyle/>
           <a:p>
             <a:r>
-              <a:t>[прил.–прил.] На новых данных мы попробовали дообучить детектор — 11 вариантов по правилу, записанному заранее. Не прошёл ни один: суда и нити спектрально похожи, выигрыш на одном ломает другое. В сервисе остался прежний детектор. Официальный U-Net MARIDA на том же test — F1 0.501, наш LightGBM — 0.871.</a:t>
+              <a:t>[прил.–прил.] На новых данных мы попробовали дообучить детектор — 10 вариантов по правилу, записанному заранее. Не прошёл ни один: суда и нити спектрально похожи, выигрыш на одном ломает другое. В сервисе остался прежний детектор. Официальный U-Net MARIDA на том же test — F1 0.501, наш LightGBM — 0.871.</a:t>
             </a:r>
           </a:p>
         </p:txBody>
@@ -6838,7 +6838,7 @@
                 </a:solidFill>
                 <a:latin typeface="Segoe UI"/>
               </a:rPr>
-              <a:t>• Тесты кейса (26.09.2026 03:52): 242 passed, 2 skipped, 0 failed; числа документов сверяет тест</a:t>
+              <a:t>• Тесты кейса (26.09.2026 04:09): 242 passed, 2 skipped, 0 failed; числа документов сверяет тест</a:t>
             </a:r>
           </a:p>
         </p:txBody>
@@ -7142,7 +7142,7 @@
                 </a:solidFill>
                 <a:latin typeface="Segoe UI"/>
               </a:rPr>
-              <a:t>Дообучение на B + D: принято 0 из 11 вариантов; U-Net MARIDA на test — F1 0.501</a:t>
+              <a:t>Дообучение на B + D: принято 0 из 10 вариантов; U-Net MARIDA на test — F1 0.501</a:t>
             </a:r>
           </a:p>
         </p:txBody>
@@ -7197,7 +7197,7 @@
                 </a:solidFill>
                 <a:latin typeface="Segoe UI"/>
               </a:rPr>
-              <a:t>• ΔF1 val от −0.031 до 0.002 — в сервисе остаётся weights/lgbm</a:t>
+              <a:t>• ΔF1 val от −0.057 до 0.002 — в сервисе остаётся weights/lgbm</a:t>
             </a:r>
           </a:p>
           <a:p>
@@ -12432,7 +12432,7 @@
                 </a:solidFill>
                 <a:latin typeface="Segoe UI"/>
               </a:rPr>
-              <a:t>• Дообучение на B + D по правилу, записанному заранее: принято 0 из 11 — в сервисе weights/lgbm; U-Net MARIDA на test 0.501 против 0.871 (приложение)</a:t>
+              <a:t>• Дообучение на B + D по правилу, записанному заранее: принято 0 из 10 — в сервисе weights/lgbm; U-Net MARIDA на test 0.501 против 0.871 (приложение)</a:t>
             </a:r>
           </a:p>
         </p:txBody>

--- a/reports/case_deck.pptx
+++ b/reports/case_deck.pptx
@@ -24,6 +24,7 @@
     <p:sldId id="272" r:id="rId24"/>
     <p:sldId id="273" r:id="rId25"/>
     <p:sldId id="274" r:id="rId26"/>
+    <p:sldId id="275" r:id="rId27"/>
   </p:sldIdLst>
   <p:sldSz cx="12191695" cy="6858000" type="screen4x3"/>
   <p:notesSz cx="6858000" cy="9144000"/>
@@ -590,7 +591,7 @@
           <a:lstStyle/>
           <a:p>
             <a:r>
-              <a:t>[3:09–3:32] Концентрация: C равно N на A, интервал Пуассона, контрольный пример — 60.0. Модели сравниваем с медианой на участках маршрута. На dev ridge выигрывает слабо, а на отложенном test, посчитанном один раз, — 30.0 против 25.2 у медианы. Правило записано до открытия test, поэтому на карте — медиана. Модель не спасаем.</a:t>
+              <a:t>[3:25–3:48] Концентрация: C равно N на A, интервал Пуассона, контрольный пример — 60.0. Модели сравниваем с медианой на участках маршрута. На dev ridge выигрывает слабо, а на отложенном test, посчитанном один раз, — 30.0 против 25.2 у медианы. Правило записано до открытия test, поэтому на карте — медиана. Модель не спасаем.</a:t>
             </a:r>
           </a:p>
         </p:txBody>
@@ -660,7 +661,7 @@
           <a:lstStyle/>
           <a:p>
             <a:r>
-              <a:t>[3:32–3:47] Карта повторяет отчёт: три слоя и два статуса полосы. Эта пара отклонена по дрейфу — «связь не подтверждена»; пикселей детектора в полосе нет, концентрация по снимку недоступна. Выгрузка сверена с API самопроверкой.</a:t>
+              <a:t>[3:48–4:03] Карта повторяет отчёт: три слоя и два статуса полосы. Эта пара отклонена по дрейфу — «связь не подтверждена»; пикселей детектора в полосе нет, концентрация по снимку недоступна. Выгрузка сверена с API самопроверкой.</a:t>
             </a:r>
           </a:p>
         </p:txBody>
@@ -730,7 +731,7 @@
           <a:lstStyle/>
           <a:p>
             <a:r>
-              <a:t>[3:47–4:16] Наш вклад — не модель, а решения, которые защищают выводы от самообмана. Допуск по дрейфу в реестре пар, сплит по участкам маршрута, найденный после утечки через соседей дня, test один раз по заранее записанному правилу, отказ от гармонизации по val, геометрия трансект по первоисточникам и один источник чисел с тестом. Разметка MARIDA, протокол RandomForest и индекс FDI — готовые, мы с ними сравниваемся.</a:t>
+              <a:t>[4:03–4:32] Наш вклад — не модель, а решения, которые защищают выводы от самообмана. Допуск по дрейфу в реестре пар, сплит по участкам маршрута, найденный после утечки через соседей дня, test один раз по заранее записанному правилу, отказ от гармонизации по val, геометрия трансект по первоисточникам и один источник чисел с тестом. Разметка MARIDA, протокол RandomForest и индекс FDI — готовые, мы с ними сравниваемся.</a:t>
             </a:r>
           </a:p>
         </p:txBody>
@@ -800,7 +801,7 @@
           <a:lstStyle/>
           <a:p>
             <a:r>
-              <a:t>[4:16–4:28] Ограничения называем сами: перенос на снимок не доказан, данных мало, интервалы недопокрывают. Развитие — трансекты под пролёт с записанным временем и больше рейсов.</a:t>
+              <a:t>[4:32–4:44] Ограничения называем сами: перенос на снимок не доказан, данных мало, интервалы недопокрывают. Развитие — трансекты под пролёт с записанным временем и больше рейсов.</a:t>
             </a:r>
           </a:p>
         </p:txBody>
@@ -870,7 +871,7 @@
           <a:lstStyle/>
           <a:p>
             <a:r>
-              <a:t>[4:28–4:40] Всё воспроизводится одной командой без сети; чистый клон до карты — 7,5 минуты, числа совпали. Спасибо, готовы к вопросам.</a:t>
+              <a:t>[4:44–4:56] Всё воспроизводится одной командой без сети; чистый клон до карты — 7,5 минуты, числа совпали. Спасибо, готовы к вопросам.</a:t>
             </a:r>
           </a:p>
         </p:txBody>
@@ -940,7 +941,7 @@
           <a:lstStyle/>
           <a:p>
             <a:r>
-              <a:t>[прил.–прил.] На новых данных мы попробовали дообучить детектор — 10 вариантов по правилу, записанному заранее. Не прошёл ни один: суда и нити спектрально похожи, выигрыш на одном ломает другое. В сервисе остался прежний детектор. Официальный U-Net MARIDA на том же test — F1 0.501, наш LightGBM — 0.871.</a:t>
+              <a:t>[прил.–прил.] Ответ на вопрос о дообучении: правило принятия (записано до экспериментов) не прошёл ни один из 13 вариантов с новыми данными (×3 seed) и контрольный r0 → остаётся weights/lgbm. Официальный U-Net MARIDA на том же test — F1 0.501, наш LightGBM — 0.871.</a:t>
             </a:r>
           </a:p>
         </p:txBody>
@@ -1010,7 +1011,7 @@
           <a:lstStyle/>
           <a:p>
             <a:r>
-              <a:t>[прил.–прил.] Количество мы считаем раздельно. По полю — штуки на квадратный километр с интервалом Пуассона. По снимку — только доля покрытия подозрительного материала, это не мусор и не штуки. Связать их может только калибровка на парах A с сигналом, а таких пар 0; нужно от 4 до 12.</a:t>
+              <a:t>[прил.–прил.] Количество: штуки на квадратный километр — только по полю. Со снимка — площадь маски и доля покрытия; сценарий в штуках — только условный диапазон с допущениями.</a:t>
             </a:r>
           </a:p>
         </p:txBody>
@@ -1150,7 +1151,7 @@
           <a:lstStyle/>
           <a:p>
             <a:r>
-              <a:t>[прил.–прил.] Связь снимка с полем мы всё же проверили. На 11 парах FDI даёт ρ −0.75, но после поправки Холма p 0.12, а случайная вода той же сцены даёт почти то же. Вывод — данных мало: нужно около 33 независимых пар.</a:t>
+              <a:t>[прил.–прил.] Из 935 строк в основной профиль попадают 63. У каждого отказа есть причина: объектные строки, категории, весь мусор. Поля-утечки в признаки не попадают, это проверяют тесты.</a:t>
             </a:r>
           </a:p>
         </p:txBody>
@@ -1220,7 +1221,7 @@
           <a:lstStyle/>
           <a:p>
             <a:r>
-              <a:t>[прил.–прил.] Из правила дрейфа мы сделали инструмент «Подобрать снимок»: он говорит, когда выходить на трансекту. Для Чёрного моря это окна UTC у 12 событий. Геометрию трансект восстановили по PANGAEA.</a:t>
+              <a:t>[прил.–прил.] Связь снимка с полем мы всё же проверили. На 11 парах FDI даёт ρ −0.75, но после поправки Холма p 0.12, а случайная вода той же сцены даёт почти то же. Вывод — данных мало: нужно около 33 независимых пар.</a:t>
             </a:r>
           </a:p>
         </p:txBody>
@@ -1315,6 +1316,76 @@
 </p:notes>
 </file>
 
+<file path=ppt/notesSlides/notesSlide20.xml><?xml version="1.0" encoding="utf-8"?>
+<p:notes xmlns:a="http://schemas.openxmlformats.org/drawingml/2006/main" xmlns:p="http://schemas.openxmlformats.org/presentationml/2006/main" xmlns:r="http://schemas.openxmlformats.org/officeDocument/2006/relationships">
+  <p:cSld>
+    <p:spTree>
+      <p:nvGrpSpPr>
+        <p:cNvPr id="1" name=""/>
+        <p:cNvGrpSpPr/>
+        <p:nvPr/>
+      </p:nvGrpSpPr>
+      <p:grpSpPr>
+        <a:xfrm>
+          <a:off x="0" y="0"/>
+          <a:ext cx="0" cy="0"/>
+          <a:chOff x="0" y="0"/>
+          <a:chExt cx="0" cy="0"/>
+        </a:xfrm>
+      </p:grpSpPr>
+      <p:sp>
+        <p:nvSpPr>
+          <p:cNvPr id="2" name="Slide Image Placeholder 1"/>
+          <p:cNvSpPr>
+            <a:spLocks noGrp="1"/>
+          </p:cNvSpPr>
+          <p:nvPr>
+            <p:ph type="sldImg" idx="2"/>
+          </p:nvPr>
+        </p:nvSpPr>
+        <p:spPr/>
+      </p:sp>
+      <p:sp>
+        <p:nvSpPr>
+          <p:cNvPr id="3" name="Notes Placeholder 2"/>
+          <p:cNvSpPr>
+            <a:spLocks noGrp="1"/>
+          </p:cNvSpPr>
+          <p:nvPr>
+            <p:ph type="body" idx="3" sz="quarter"/>
+          </p:nvPr>
+        </p:nvSpPr>
+        <p:spPr/>
+        <p:txBody>
+          <a:bodyPr/>
+          <a:lstStyle/>
+          <a:p>
+            <a:r>
+              <a:t>[прил.–прил.] Из правила дрейфа мы сделали инструмент «Подобрать снимок»: он говорит, когда выходить на трансекту. Для Чёрного моря это окна UTC у 12 событий. Геометрию трансект восстановили по PANGAEA.</a:t>
+            </a:r>
+          </a:p>
+        </p:txBody>
+      </p:sp>
+      <p:sp>
+        <p:nvSpPr>
+          <p:cNvPr id="4" name="Slide Number Placeholder 3"/>
+          <p:cNvSpPr>
+            <a:spLocks noGrp="1"/>
+          </p:cNvSpPr>
+          <p:nvPr>
+            <p:ph type="sldNum" idx="5" sz="quarter"/>
+          </p:nvPr>
+        </p:nvSpPr>
+        <p:spPr/>
+      </p:sp>
+    </p:spTree>
+  </p:cSld>
+  <p:clrMapOvr>
+    <a:masterClrMapping/>
+  </p:clrMapOvr>
+</p:notes>
+</file>
+
 <file path=ppt/notesSlides/notesSlide3.xml><?xml version="1.0" encoding="utf-8"?>
 <p:notes xmlns:a="http://schemas.openxmlformats.org/drawingml/2006/main" xmlns:p="http://schemas.openxmlformats.org/presentationml/2006/main" xmlns:r="http://schemas.openxmlformats.org/officeDocument/2006/relationships">
   <p:cSld>
@@ -1430,7 +1501,7 @@
           <a:lstStyle/>
           <a:p>
             <a:r>
-              <a:t>[0:52–1:04] Из 935 строк в основной профиль попадают 63. У каждого отказа есть причина: объектные строки, категории, весь мусор. Поля-утечки в признаки не попадают, это проверяют тесты.</a:t>
+              <a:t>[0:52–1:12] Реестр пар — главный фильтр. Из 318 событий по метаданным проходят 29, маски в полосе — 12. Но вода за сутки уходит на десятки километров: пара синхронна, только если между снимком и наблюдением не больше 4.2 часа. Таких ноль. Для пластика снимков нет вообще.</a:t>
             </a:r>
           </a:p>
         </p:txBody>
@@ -1500,7 +1571,7 @@
           <a:lstStyle/>
           <a:p>
             <a:r>
-              <a:t>[1:04–1:24] Реестр пар — главный фильтр. Из 318 событий по метаданным проходят 29, маски в полосе — 12. Но вода за сутки уходит на десятки километров: пара синхронна, только если между снимком и наблюдением не больше 4.2 часа. Таких ноль. Для пластика снимков нет вообще.</a:t>
+              <a:t>[1:12–1:39] Главное в работе — как мы искали данные. CSV — это подсчёты вдоль маршрутов, поэтому каждую находку мы помечаем уровнем: A, B, C или D. У событий CSV пар уровня A — 0: для пластика снимков нет, в Северном море облака, в Чёрном время трансект не опубликовано. Тогда мы нашли открытые данные ADIS: 66 пар по месту и времени.</a:t>
             </a:r>
           </a:p>
         </p:txBody>
@@ -1570,7 +1641,7 @@
           <a:lstStyle/>
           <a:p>
             <a:r>
-              <a:t>[1:24–1:51] Главное в работе — как мы искали данные. CSV — это подсчёты вдоль маршрутов, поэтому каждую находку мы помечаем уровнем: A, B, C или D. У событий CSV пар уровня A — 0: для пластика снимков нет, в Северном море облака, в Чёрном время трансект не опубликовано. Тогда мы нашли открытые данные ADIS и получили 66 пар уровня A.</a:t>
+              <a:t>[1:39–2:05] Пар по месту и времени — 66, время подтверждено даже по самому судну на снимке. Это не калибровочные пары. На 6 отрезках с единичными предметами детектор их не увидел: предмет меньше процента пикселя. Это согласуется с физикой, но общий предел для плотных скоплений не задаёт. Калибровочных пар — 0, поэтому перевода «снимок в штуки» мы не заявляем.</a:t>
             </a:r>
           </a:p>
         </p:txBody>
@@ -1640,7 +1711,7 @@
           <a:lstStyle/>
           <a:p>
             <a:r>
-              <a:t>[1:51–2:12] Пар уровня A — 66. Время подтверждено даже по самому судну на снимке. В 6 парах, где камера видела предметы, детектор дал 0 пикселей. Это не ошибка, а предел: предмет занимает меньше процента пикселя. Калибровку на таких парах построить нельзя, и мы её не заявляем.</a:t>
+              <a:t>[2:05–2:26] Для детектора мы собрали новые метки: подтверждённые скопления PLP, FloatingObjects и нити Cózar — это B, суда и облака — D. Утечек с MARIDA и MADOS нет, проверяли по дате и по самим пикселям. Текущий детектор на них почти не видит нити и путает суда.</a:t>
             </a:r>
           </a:p>
         </p:txBody>
@@ -1710,7 +1781,7 @@
           <a:lstStyle/>
           <a:p>
             <a:r>
-              <a:t>[2:12–2:39] Для детектора мы собрали новые метки: подтверждённые скопления PLP, FloatingObjects и нити Cózar — это B, суда и облака — D. Утечек с MARIDA и MADOS нет, проверяли по дате и по самим пикселям. Текущий детектор на них почти не видит нити и путает суда, а дообучение по заранее записанному правилу не прошло — в сервисе прежний детектор.</a:t>
+              <a:t>[2:26–2:55] Главная трудность — сложный фон. Если учить детектор на естественных нитях Cózar, полнота на них растёт до 97 процентов, но пена и суда тоже становятся мусором. Если добавить суда как отрицательные, ложные на судах падают с 26 до 4 процентов, но теряются нити. Правило, записанное заранее, не прошёл ни один вариант — остаётся прежний детектор, а его ограничение по судам мы называем прямо.</a:t>
             </a:r>
           </a:p>
         </p:txBody>
@@ -1780,7 +1851,7 @@
           <a:lstStyle/>
           <a:p>
             <a:r>
-              <a:t>[2:39–3:09] Детектор — пиксельный LightGBM. На test MARIDA F1 0.871, RandomForest — 0.771, индексы FDI — 0.042; саргассум и мутную воду он не путает. На снимках пар мы выключили гармонизацию каналов — решение по MARIDA val, не по тесту. Сейчас 5 объектов на 22 сценах и ни одного в полосах; вне полосы — судно, это верное срабатывание. Прежний режим давал 975 объектов, почти всё — фон моря.</a:t>
+              <a:t>[2:55–3:25] Детектор — пиксельный LightGBM. На test MARIDA F1 0.871, RandomForest — 0.771, индексы FDI — 0.042; саргассум и мутную воду он не путает. На снимках пар мы выключили гармонизацию каналов — решение по MARIDA val, не по тесту. Сейчас 5 объектов на 22 сценах и ни одного в полосах; вне полосы — судно, это верное срабатывание. Прежний режим давал 975 объектов, почти всё — фон моря.</a:t>
             </a:r>
           </a:p>
         </p:txBody>
@@ -5729,7 +5800,7 @@
                 </a:solidFill>
                 <a:latin typeface="Segoe UI"/>
               </a:rPr>
-              <a:t>3:09</a:t>
+              <a:t>3:25</a:t>
             </a:r>
           </a:p>
         </p:txBody>
@@ -6045,7 +6116,7 @@
                 </a:solidFill>
                 <a:latin typeface="Segoe UI"/>
               </a:rPr>
-              <a:t>3:32</a:t>
+              <a:t>3:48</a:t>
             </a:r>
           </a:p>
         </p:txBody>
@@ -6362,7 +6433,7 @@
                 </a:solidFill>
                 <a:latin typeface="Segoe UI"/>
               </a:rPr>
-              <a:t>3:47</a:t>
+              <a:t>4:03</a:t>
             </a:r>
           </a:p>
         </p:txBody>
@@ -6647,7 +6718,7 @@
                 </a:solidFill>
                 <a:latin typeface="Segoe UI"/>
               </a:rPr>
-              <a:t>4:16</a:t>
+              <a:t>4:32</a:t>
             </a:r>
           </a:p>
         </p:txBody>
@@ -6838,7 +6909,7 @@
                 </a:solidFill>
                 <a:latin typeface="Segoe UI"/>
               </a:rPr>
-              <a:t>• Тесты кейса (26.09.2026 04:09): 242 passed, 2 skipped, 0 failed; числа документов сверяет тест</a:t>
+              <a:t>• Тесты кейса (26.09.2026 04:40): 242 passed, 2 skipped, 0 failed; числа документов сверяет тест</a:t>
             </a:r>
           </a:p>
         </p:txBody>
@@ -7038,7 +7109,7 @@
                 </a:solidFill>
                 <a:latin typeface="Segoe UI"/>
               </a:rPr>
-              <a:t>4:28</a:t>
+              <a:t>4:44</a:t>
             </a:r>
           </a:p>
         </p:txBody>
@@ -7136,13 +7207,13 @@
               </a:spcAft>
             </a:pPr>
             <a:r>
-              <a:rPr sz="2600" b="1">
+              <a:rPr sz="2300" b="1">
                 <a:solidFill>
                   <a:srgbClr val="EEEFF1"/>
                 </a:solidFill>
                 <a:latin typeface="Segoe UI"/>
               </a:rPr>
-              <a:t>Дообучение на B + D: принято 0 из 10 вариантов; U-Net MARIDA на test — F1 0.501</a:t>
+              <a:t>Дообучение на B + D: 13 вариантов с новыми данными + контрольный r0 — правило не прошёл ни один; U-Net MARIDA на test — F1 0.501</a:t>
             </a:r>
           </a:p>
         </p:txBody>
@@ -7197,23 +7268,7 @@
                 </a:solidFill>
                 <a:latin typeface="Segoe UI"/>
               </a:rPr>
-              <a:t>• ΔF1 val от −0.057 до 0.002 — в сервисе остаётся weights/lgbm</a:t>
-            </a:r>
-          </a:p>
-          <a:p>
-            <a:pPr algn="l">
-              <a:spcAft>
-                <a:spcPts val="1000"/>
-              </a:spcAft>
-            </a:pPr>
-            <a:r>
-              <a:rPr sz="1600" b="0">
-                <a:solidFill>
-                  <a:srgbClr val="EEEFF1"/>
-                </a:solidFill>
-                <a:latin typeface="Segoe UI"/>
-              </a:rPr>
-              <a:t>• Компромисс: D судов — ложные на судах 26 % → 4 %, но нити Cózar 36 % → 27 %</a:t>
+              <a:t>• ΔF1 val от −0.057 до 0.002 — правило принятия (записано до экспериментов) не прошёл ни один из 13 вариантов с новыми данными (×3 seed) и контрольный r0 → остаётся weights/lgbm</a:t>
             </a:r>
           </a:p>
           <a:p>
@@ -7795,7 +7850,7 @@
                 </a:solidFill>
                 <a:latin typeface="Segoe UI"/>
               </a:rPr>
-              <a:t>Источник: reports/detector_v2/experiments.md, unet_test.json; configs/detector_v2_eval.yaml</a:t>
+              <a:t>Источник: reports/detector_v2/experiments.md, decision.json, unet_test.json; configs/detector_v2_eval.yaml</a:t>
             </a:r>
           </a:p>
         </p:txBody>
@@ -7899,7 +7954,7 @@
                 </a:solidFill>
                 <a:latin typeface="Segoe UI"/>
               </a:rPr>
-              <a:t>16 · Приложение · Количество: поле и снимок раздельно</a:t>
+              <a:t>16 · Приложение · Количество: поле, снимок, сценарий</a:t>
             </a:r>
           </a:p>
         </p:txBody>
@@ -7938,7 +7993,7 @@
                 </a:solidFill>
                 <a:latin typeface="Segoe UI"/>
               </a:rPr>
-              <a:t>Количество раздельно: поле — шт./км², снимок — доля покрытия; калибровки нет, нужно 4–12 пар A с сигналом</a:t>
+              <a:t>Количество: пар по месту и времени 66, видимый сигнал 0, калибровочных пар 0 — шт./км² только по полю</a:t>
             </a:r>
           </a:p>
         </p:txBody>
@@ -7971,13 +8026,13 @@
               </a:spcAft>
             </a:pPr>
             <a:r>
-              <a:rPr sz="1600" b="0">
+              <a:rPr sz="1500" b="0">
                 <a:solidFill>
                   <a:srgbClr val="EEEFF1"/>
                 </a:solidFill>
                 <a:latin typeface="Segoe UI"/>
               </a:rPr>
-              <a:t>• Поле (измерение): S2 ΣN/ΣA = 697 / 12.94 км² = 53.9 [49.9–58.0] шт./км²</a:t>
+              <a:t>• Поле (измерение): C = N/A, интервал Пуассона; S2 ΣN/ΣA = 697 / 12.94 км² = 53.9 [49.9–58.0] шт./км²; на карте — медиана профиля (отложенный test)</a:t>
             </a:r>
           </a:p>
           <a:p>
@@ -7987,13 +8042,13 @@
               </a:spcAft>
             </a:pPr>
             <a:r>
-              <a:rPr sz="1600" b="0">
+              <a:rPr sz="1500" b="0">
                 <a:solidFill>
                   <a:srgbClr val="EEEFF1"/>
                 </a:solidFill>
                 <a:latin typeface="Segoe UI"/>
               </a:rPr>
-              <a:t>• Снимок: доля покрытия подозрительного материала, м²/км² пригодной воды; медиана на 64 живых сценах 3.2; это не мусор и не шт./км²</a:t>
+              <a:t>• Снимок: площадь маски и доля покрытия подозрительного материала (LWD, м²/км²); медиана на 64 живых сценах 3.2; это не мусор и не шт./км²</a:t>
             </a:r>
           </a:p>
           <a:p>
@@ -8003,13 +8058,13 @@
               </a:spcAft>
             </a:pPr>
             <a:r>
-              <a:rPr sz="1600" b="0">
+              <a:rPr sz="1500" b="0">
                 <a:solidFill>
                   <a:srgbClr val="EEEFF1"/>
                 </a:solidFill>
                 <a:latin typeface="Segoe UI"/>
               </a:rPr>
-              <a:t>• Калибровка ln C = ln k + b · ln S требует пар A с ненулевым сигналом — их 0; в 11 полосах CSV сигнал 0</a:t>
+              <a:t>• Калибровка ln C = ln k + b · ln S требует калибровочных пар (по месту и времени и с сигналом) — их 0; нужно 4–12 для k в ×/÷2, для связи r = 0.5 — 30</a:t>
             </a:r>
           </a:p>
           <a:p>
@@ -8019,29 +8074,13 @@
               </a:spcAft>
             </a:pPr>
             <a:r>
-              <a:rPr sz="1600" b="0">
+              <a:rPr sz="1500" b="0">
                 <a:solidFill>
                   <a:srgbClr val="EEEFF1"/>
                 </a:solidFill>
                 <a:latin typeface="Segoe UI"/>
               </a:rPr>
-              <a:t>• Нужно: k в пределах ×/÷2 — 4–12 пар с сигналом; для связи r = 0.5 — 30 пар; обследований в 3.5 раза больше</a:t>
-            </a:r>
-          </a:p>
-          <a:p>
-            <a:pPr algn="l">
-              <a:spcAft>
-                <a:spcPts val="1000"/>
-              </a:spcAft>
-            </a:pPr>
-            <a:r>
-              <a:rPr sz="1600" b="0">
-                <a:solidFill>
-                  <a:srgbClr val="EEEFF1"/>
-                </a:solidFill>
-                <a:latin typeface="Segoe UI"/>
-              </a:rPr>
-              <a:t>• «Площадь / размер = штуки» — только сценарий: 200 м² маски = 160–500000 предметов; массу не оцениваем</a:t>
+              <a:t>• Сценарий шт./км² — только «если это мусорная полоса», с допущениями: 200 м² маски = 160–500000 предметов; не доверительный интервал, не измерение, не результат модели</a:t>
             </a:r>
           </a:p>
         </p:txBody>
@@ -8124,7 +8163,7 @@
                 </a:solidFill>
                 <a:latin typeface="Segoe UI"/>
               </a:rPr>
-              <a:t>4–12</a:t>
+              <a:t>0</a:t>
             </a:r>
           </a:p>
         </p:txBody>
@@ -8163,7 +8202,7 @@
                 </a:solidFill>
                 <a:latin typeface="Segoe UI"/>
               </a:rPr>
-              <a:t>независимых пар A с ненулевым сигналом нужно для калибровки (есть 0)</a:t>
+              <a:t>калибровочных пар «снимок → шт./км²» (нужно 4–12)</a:t>
             </a:r>
           </a:p>
         </p:txBody>
@@ -8202,7 +8241,7 @@
                 </a:solidFill>
                 <a:latin typeface="Segoe UI"/>
               </a:rPr>
-              <a:t>Источник: reports/quantity/*.json, docs/QUANTITY.md (final_numbers → case.sections.quantity)</a:t>
+              <a:t>Источник: docs/QUANTITY.md; reports/quantity/*.json (final_numbers → case.sections.quantity)</a:t>
             </a:r>
           </a:p>
         </p:txBody>
@@ -8681,1469 +8720,7 @@
                 </a:solidFill>
                 <a:latin typeface="Segoe UI"/>
               </a:rPr>
-              <a:t>18 · Приложение · Эксперимент «снимок vs all_litter»</a:t>
-            </a:r>
-          </a:p>
-        </p:txBody>
-      </p:sp>
-      <p:sp>
-        <p:nvSpPr>
-          <p:cNvPr id="3" name="TextBox 2"/>
-          <p:cNvSpPr txBox="1"/>
-          <p:nvPr/>
-        </p:nvSpPr>
-        <p:spPr>
-          <a:xfrm>
-            <a:off x="457200" y="457200"/>
-            <a:ext cx="11247120" cy="960120"/>
-          </a:xfrm>
-          <a:prstGeom prst="rect">
-            <a:avLst/>
-          </a:prstGeom>
-          <a:noFill/>
-        </p:spPr>
-        <p:txBody>
-          <a:bodyPr wrap="square" anchor="t" lIns="18288" rIns="18288" tIns="18288" bIns="18288">
-            <a:spAutoFit/>
-          </a:bodyPr>
-          <a:lstStyle/>
-          <a:p>
-            <a:pPr algn="l">
-              <a:spcAft>
-                <a:spcPts val="600"/>
-              </a:spcAft>
-            </a:pPr>
-            <a:r>
-              <a:rPr sz="2600" b="1">
-                <a:solidFill>
-                  <a:srgbClr val="EEEFF1"/>
-                </a:solidFill>
-                <a:latin typeface="Segoe UI"/>
-              </a:rPr>
-              <a:t>Связь признаков снимка с полевой плотностью всего мусора не установлена: данных на это мало</a:t>
-            </a:r>
-          </a:p>
-        </p:txBody>
-      </p:sp>
-      <p:sp>
-        <p:nvSpPr>
-          <p:cNvPr id="4" name="TextBox 3"/>
-          <p:cNvSpPr txBox="1"/>
-          <p:nvPr/>
-        </p:nvSpPr>
-        <p:spPr>
-          <a:xfrm>
-            <a:off x="457200" y="1600200"/>
-            <a:ext cx="5577840" cy="4572000"/>
-          </a:xfrm>
-          <a:prstGeom prst="rect">
-            <a:avLst/>
-          </a:prstGeom>
-          <a:noFill/>
-        </p:spPr>
-        <p:txBody>
-          <a:bodyPr wrap="square" anchor="t" lIns="18288" rIns="18288" tIns="18288" bIns="18288">
-            <a:spAutoFit/>
-          </a:bodyPr>
-          <a:lstStyle/>
-          <a:p>
-            <a:pPr algn="l">
-              <a:spcAft>
-                <a:spcPts val="1000"/>
-              </a:spcAft>
-            </a:pPr>
-            <a:r>
-              <a:rPr sz="1600" b="0">
-                <a:solidFill>
-                  <a:srgbClr val="EEEFF1"/>
-                </a:solidFill>
-                <a:latin typeface="Segoe UI"/>
-              </a:rPr>
-              <a:t>• 11 пар S2 прошли маски, независимых групп «район × день» — 6; эталон — весь мусор, не пластик</a:t>
-            </a:r>
-          </a:p>
-          <a:p>
-            <a:pPr algn="l">
-              <a:spcAft>
-                <a:spcPts val="1000"/>
-              </a:spcAft>
-            </a:pPr>
-            <a:r>
-              <a:rPr sz="1600" b="0">
-                <a:solidFill>
-                  <a:srgbClr val="EEEFF1"/>
-                </a:solidFill>
-                <a:latin typeface="Segoe UI"/>
-              </a:rPr>
-              <a:t>• FDI в полосе: ρ −0.75 [−1.00; −0.14], p Холма 0.12; та же полоса в случайной воде сцены — −0.52</a:t>
-            </a:r>
-          </a:p>
-          <a:p>
-            <a:pPr algn="l">
-              <a:spcAft>
-                <a:spcPts val="1000"/>
-              </a:spcAft>
-            </a:pPr>
-            <a:r>
-              <a:rPr sz="1600" b="0">
-                <a:solidFill>
-                  <a:srgbClr val="EEEFF1"/>
-                </a:solidFill>
-                <a:latin typeface="Segoe UI"/>
-              </a:rPr>
-              <a:t>• Значит, связь на уровне сцены или дня, а не места; знак к тому же обратный ожидаемому</a:t>
-            </a:r>
-          </a:p>
-          <a:p>
-            <a:pPr algn="l">
-              <a:spcAft>
-                <a:spcPts val="1000"/>
-              </a:spcAft>
-            </a:pPr>
-            <a:r>
-              <a:rPr sz="1600" b="0">
-                <a:solidFill>
-                  <a:srgbClr val="EEEFF1"/>
-                </a:solidFill>
-                <a:latin typeface="Segoe UI"/>
-              </a:rPr>
-              <a:t>• Мощность: при 6 группах видна только |ρ| ≥ 0.96; для ρ = 0.5 нужно ≈ 33 независимых пар</a:t>
-            </a:r>
-          </a:p>
-        </p:txBody>
-      </p:sp>
-      <p:sp>
-        <p:nvSpPr>
-          <p:cNvPr id="5" name="Rectangle 4"/>
-          <p:cNvSpPr/>
-          <p:nvPr/>
-        </p:nvSpPr>
-        <p:spPr>
-          <a:xfrm>
-            <a:off x="6400800" y="1691640"/>
-            <a:ext cx="5349240" cy="1554480"/>
-          </a:xfrm>
-          <a:prstGeom prst="rect">
-            <a:avLst/>
-          </a:prstGeom>
-          <a:solidFill>
-            <a:srgbClr val="1B1E24"/>
-          </a:solidFill>
-          <a:ln>
-            <a:noFill/>
-          </a:ln>
-          <a:effectLst/>
-        </p:spPr>
-        <p:style>
-          <a:lnRef idx="1">
-            <a:schemeClr val="accent1"/>
-          </a:lnRef>
-          <a:fillRef idx="3">
-            <a:schemeClr val="accent1"/>
-          </a:fillRef>
-          <a:effectRef idx="2">
-            <a:schemeClr val="accent1"/>
-          </a:effectRef>
-          <a:fontRef idx="minor">
-            <a:schemeClr val="lt1"/>
-          </a:fontRef>
-        </p:style>
-        <p:txBody>
-          <a:bodyPr rtlCol="0" anchor="ctr"/>
-          <a:lstStyle/>
-          <a:p>
-            <a:pPr algn="ctr"/>
-          </a:p>
-        </p:txBody>
-      </p:sp>
-      <p:sp>
-        <p:nvSpPr>
-          <p:cNvPr id="6" name="TextBox 5"/>
-          <p:cNvSpPr txBox="1"/>
-          <p:nvPr/>
-        </p:nvSpPr>
-        <p:spPr>
-          <a:xfrm>
-            <a:off x="6675120" y="1783080"/>
-            <a:ext cx="4800600" cy="822960"/>
-          </a:xfrm>
-          <a:prstGeom prst="rect">
-            <a:avLst/>
-          </a:prstGeom>
-          <a:noFill/>
-        </p:spPr>
-        <p:txBody>
-          <a:bodyPr wrap="square" anchor="t" lIns="18288" rIns="18288" tIns="18288" bIns="18288">
-            <a:spAutoFit/>
-          </a:bodyPr>
-          <a:lstStyle/>
-          <a:p>
-            <a:pPr algn="l">
-              <a:spcAft>
-                <a:spcPts val="600"/>
-              </a:spcAft>
-            </a:pPr>
-            <a:r>
-              <a:rPr sz="4800" b="1">
-                <a:solidFill>
-                  <a:srgbClr val="D9912E"/>
-                </a:solidFill>
-                <a:latin typeface="Segoe UI"/>
-              </a:rPr>
-              <a:t>33</a:t>
-            </a:r>
-          </a:p>
-        </p:txBody>
-      </p:sp>
-      <p:sp>
-        <p:nvSpPr>
-          <p:cNvPr id="7" name="TextBox 6"/>
-          <p:cNvSpPr txBox="1"/>
-          <p:nvPr/>
-        </p:nvSpPr>
-        <p:spPr>
-          <a:xfrm>
-            <a:off x="6675120" y="2606040"/>
-            <a:ext cx="4800600" cy="594360"/>
-          </a:xfrm>
-          <a:prstGeom prst="rect">
-            <a:avLst/>
-          </a:prstGeom>
-          <a:noFill/>
-        </p:spPr>
-        <p:txBody>
-          <a:bodyPr wrap="square" anchor="t" lIns="18288" rIns="18288" tIns="18288" bIns="18288">
-            <a:spAutoFit/>
-          </a:bodyPr>
-          <a:lstStyle/>
-          <a:p>
-            <a:pPr algn="l">
-              <a:spcAft>
-                <a:spcPts val="600"/>
-              </a:spcAft>
-            </a:pPr>
-            <a:r>
-              <a:rPr sz="1300" b="0">
-                <a:solidFill>
-                  <a:srgbClr val="EEEFF1"/>
-                </a:solidFill>
-                <a:latin typeface="Segoe UI"/>
-              </a:rPr>
-              <a:t>независимых синхронных пар нужно, чтобы увидеть ρ = 0.5 (есть 6 групп)</a:t>
-            </a:r>
-          </a:p>
-        </p:txBody>
-      </p:sp>
-      <p:sp>
-        <p:nvSpPr>
-          <p:cNvPr id="8" name="TextBox 7"/>
-          <p:cNvSpPr txBox="1"/>
-          <p:nvPr/>
-        </p:nvSpPr>
-        <p:spPr>
-          <a:xfrm>
-            <a:off x="457200" y="6355080"/>
-            <a:ext cx="10515600" cy="320040"/>
-          </a:xfrm>
-          <a:prstGeom prst="rect">
-            <a:avLst/>
-          </a:prstGeom>
-          <a:noFill/>
-        </p:spPr>
-        <p:txBody>
-          <a:bodyPr wrap="square" anchor="t" lIns="18288" rIns="18288" tIns="18288" bIns="18288">
-            <a:spAutoFit/>
-          </a:bodyPr>
-          <a:lstStyle/>
-          <a:p>
-            <a:pPr algn="l">
-              <a:spcAft>
-                <a:spcPts val="600"/>
-              </a:spcAft>
-            </a:pPr>
-            <a:r>
-              <a:rPr sz="1000" b="0">
-                <a:solidFill>
-                  <a:srgbClr val="9AA1AC"/>
-                </a:solidFill>
-                <a:latin typeface="Segoe UI"/>
-              </a:rPr>
-              <a:t>Источник: reports/case_pairs/experiment.md, experiment.json</a:t>
-            </a:r>
-          </a:p>
-        </p:txBody>
-      </p:sp>
-      <p:sp>
-        <p:nvSpPr>
-          <p:cNvPr id="9" name="TextBox 8"/>
-          <p:cNvSpPr txBox="1"/>
-          <p:nvPr/>
-        </p:nvSpPr>
-        <p:spPr>
-          <a:xfrm>
-            <a:off x="11155680" y="6355080"/>
-            <a:ext cx="640080" cy="320040"/>
-          </a:xfrm>
-          <a:prstGeom prst="rect">
-            <a:avLst/>
-          </a:prstGeom>
-          <a:noFill/>
-        </p:spPr>
-        <p:txBody>
-          <a:bodyPr wrap="square" anchor="t" lIns="18288" rIns="18288" tIns="18288" bIns="18288">
-            <a:spAutoFit/>
-          </a:bodyPr>
-          <a:lstStyle/>
-          <a:p>
-            <a:pPr algn="r">
-              <a:spcAft>
-                <a:spcPts val="600"/>
-              </a:spcAft>
-            </a:pPr>
-            <a:r>
-              <a:rPr sz="1000" b="0">
-                <a:solidFill>
-                  <a:srgbClr val="9AA1AC"/>
-                </a:solidFill>
-                <a:latin typeface="Segoe UI"/>
-              </a:rPr>
-              <a:t>прил.</a:t>
-            </a:r>
-          </a:p>
-        </p:txBody>
-      </p:sp>
-    </p:spTree>
-  </p:cSld>
-  <p:clrMapOvr>
-    <a:masterClrMapping/>
-  </p:clrMapOvr>
-</p:sld>
-</file>
-
-<file path=ppt/slides/slide19.xml><?xml version="1.0" encoding="utf-8"?>
-<p:sld xmlns:a="http://schemas.openxmlformats.org/drawingml/2006/main" xmlns:p="http://schemas.openxmlformats.org/presentationml/2006/main" xmlns:r="http://schemas.openxmlformats.org/officeDocument/2006/relationships">
-  <p:cSld>
-    <p:bg>
-      <p:bgPr>
-        <a:solidFill>
-          <a:srgbClr val="101216"/>
-        </a:solidFill>
-        <a:effectLst/>
-      </p:bgPr>
-    </p:bg>
-    <p:spTree>
-      <p:nvGrpSpPr>
-        <p:cNvPr id="1" name=""/>
-        <p:cNvGrpSpPr/>
-        <p:nvPr/>
-      </p:nvGrpSpPr>
-      <p:grpSpPr/>
-      <p:sp>
-        <p:nvSpPr>
-          <p:cNvPr id="2" name="TextBox 1"/>
-          <p:cNvSpPr txBox="1"/>
-          <p:nvPr/>
-        </p:nvSpPr>
-        <p:spPr>
-          <a:xfrm>
-            <a:off x="457200" y="201168"/>
-            <a:ext cx="8229600" cy="274320"/>
-          </a:xfrm>
-          <a:prstGeom prst="rect">
-            <a:avLst/>
-          </a:prstGeom>
-          <a:noFill/>
-        </p:spPr>
-        <p:txBody>
-          <a:bodyPr wrap="square" anchor="t" lIns="18288" rIns="18288" tIns="18288" bIns="18288">
-            <a:spAutoFit/>
-          </a:bodyPr>
-          <a:lstStyle/>
-          <a:p>
-            <a:pPr algn="l">
-              <a:spcAft>
-                <a:spcPts val="600"/>
-              </a:spcAft>
-            </a:pPr>
-            <a:r>
-              <a:rPr sz="1200" b="1">
-                <a:solidFill>
-                  <a:srgbClr val="D9912E"/>
-                </a:solidFill>
-                <a:latin typeface="Segoe UI"/>
-              </a:rPr>
-              <a:t>19 · Приложение · Дополнительные функции</a:t>
-            </a:r>
-          </a:p>
-        </p:txBody>
-      </p:sp>
-      <p:sp>
-        <p:nvSpPr>
-          <p:cNvPr id="3" name="TextBox 2"/>
-          <p:cNvSpPr txBox="1"/>
-          <p:nvPr/>
-        </p:nvSpPr>
-        <p:spPr>
-          <a:xfrm>
-            <a:off x="457200" y="457200"/>
-            <a:ext cx="11247120" cy="960120"/>
-          </a:xfrm>
-          <a:prstGeom prst="rect">
-            <a:avLst/>
-          </a:prstGeom>
-          <a:noFill/>
-        </p:spPr>
-        <p:txBody>
-          <a:bodyPr wrap="square" anchor="t" lIns="18288" rIns="18288" tIns="18288" bIns="18288">
-            <a:spAutoFit/>
-          </a:bodyPr>
-          <a:lstStyle/>
-          <a:p>
-            <a:pPr algn="l">
-              <a:spcAft>
-                <a:spcPts val="600"/>
-              </a:spcAft>
-            </a:pPr>
-            <a:r>
-              <a:rPr sz="2600" b="1">
-                <a:solidFill>
-                  <a:srgbClr val="EEEFF1"/>
-                </a:solidFill>
-                <a:latin typeface="Segoe UI"/>
-              </a:rPr>
-              <a:t>«Подобрать снимок»: из правила дрейфа — инструмент планирования полевых работ под пролёт</a:t>
-            </a:r>
-          </a:p>
-        </p:txBody>
-      </p:sp>
-      <p:sp>
-        <p:nvSpPr>
-          <p:cNvPr id="4" name="TextBox 3"/>
-          <p:cNvSpPr txBox="1"/>
-          <p:nvPr/>
-        </p:nvSpPr>
-        <p:spPr>
-          <a:xfrm>
-            <a:off x="457200" y="1600200"/>
-            <a:ext cx="5577840" cy="4572000"/>
-          </a:xfrm>
-          <a:prstGeom prst="rect">
-            <a:avLst/>
-          </a:prstGeom>
-          <a:noFill/>
-        </p:spPr>
-        <p:txBody>
-          <a:bodyPr wrap="square" anchor="t" lIns="18288" rIns="18288" tIns="18288" bIns="18288">
-            <a:spAutoFit/>
-          </a:bodyPr>
-          <a:lstStyle/>
-          <a:p>
-            <a:pPr algn="l">
-              <a:spcAft>
-                <a:spcPts val="1000"/>
-              </a:spcAft>
-            </a:pPr>
-            <a:r>
-              <a:rPr sz="1600" b="0">
-                <a:solidFill>
-                  <a:srgbClr val="EEEFF1"/>
-                </a:solidFill>
-                <a:latin typeface="Segoe UI"/>
-              </a:rPr>
-              <a:t>• Окно синхронизации |dt| ≤ 4.17 ч; наивное окно ±1 сут даёт 29 «пар», синхронных 0</a:t>
-            </a:r>
-          </a:p>
-          <a:p>
-            <a:pPr algn="l">
-              <a:spcAft>
-                <a:spcPts val="1000"/>
-              </a:spcAft>
-            </a:pPr>
-            <a:r>
-              <a:rPr sz="1600" b="0">
-                <a:solidFill>
-                  <a:srgbClr val="EEEFF1"/>
-                </a:solidFill>
-                <a:latin typeface="Segoe UI"/>
-              </a:rPr>
-              <a:t>• Чёрное море без времени трансект: 12 событий получают окно UTC, у 8 полоса чистая по маскам</a:t>
-            </a:r>
-          </a:p>
-          <a:p>
-            <a:pPr algn="l">
-              <a:spcAft>
-                <a:spcPts val="1000"/>
-              </a:spcAft>
-            </a:pPr>
-            <a:r>
-              <a:rPr sz="1600" b="0">
-                <a:solidFill>
-                  <a:srgbClr val="EEEFF1"/>
-                </a:solidFill>
-                <a:latin typeface="Segoe UI"/>
-              </a:rPr>
-              <a:t>• Прогноз пролётов на архиве совпал с реальной съёмкой в 82 из 88 случаев (±5 мин)</a:t>
-            </a:r>
-          </a:p>
-          <a:p>
-            <a:pPr algn="l">
-              <a:spcAft>
-                <a:spcPts val="1000"/>
-              </a:spcAft>
-            </a:pPr>
-            <a:r>
-              <a:rPr sz="1600" b="0">
-                <a:solidFill>
-                  <a:srgbClr val="EEEFF1"/>
-                </a:solidFill>
-                <a:latin typeface="Segoe UI"/>
-              </a:rPr>
-              <a:t>• Геометрия трансект по PANGAEA: 104 события S2/S3, 108 сегментов; 4 прерванные трансекты — двумя сегментами</a:t>
-            </a:r>
-          </a:p>
-        </p:txBody>
-      </p:sp>
-      <p:pic>
-        <p:nvPicPr>
-          <p:cNvPr id="5" name="Picture 4" descr="04_pairfinder_transect.jpg"/>
-          <p:cNvPicPr>
-            <a:picLocks noChangeAspect="1"/>
-          </p:cNvPicPr>
-          <p:nvPr/>
-        </p:nvPicPr>
-        <p:blipFill>
-          <a:blip r:embed="rId2"/>
-          <a:stretch>
-            <a:fillRect/>
-          </a:stretch>
-        </p:blipFill>
-        <p:spPr>
-          <a:xfrm>
-            <a:off x="6914726" y="1645920"/>
-            <a:ext cx="4321386" cy="4023360"/>
-          </a:xfrm>
-          <a:prstGeom prst="rect">
-            <a:avLst/>
-          </a:prstGeom>
-        </p:spPr>
-      </p:pic>
-      <p:sp>
-        <p:nvSpPr>
-          <p:cNvPr id="6" name="TextBox 5"/>
-          <p:cNvSpPr txBox="1"/>
-          <p:nvPr/>
-        </p:nvSpPr>
-        <p:spPr>
-          <a:xfrm>
-            <a:off x="6400800" y="5715000"/>
-            <a:ext cx="5349240" cy="548640"/>
-          </a:xfrm>
-          <a:prstGeom prst="rect">
-            <a:avLst/>
-          </a:prstGeom>
-          <a:noFill/>
-        </p:spPr>
-        <p:txBody>
-          <a:bodyPr wrap="square" anchor="t" lIns="18288" rIns="18288" tIns="18288" bIns="18288">
-            <a:spAutoFit/>
-          </a:bodyPr>
-          <a:lstStyle/>
-          <a:p>
-            <a:pPr algn="l">
-              <a:spcAft>
-                <a:spcPts val="600"/>
-              </a:spcAft>
-            </a:pPr>
-            <a:r>
-              <a:rPr sz="1200" b="0">
-                <a:solidFill>
-                  <a:srgbClr val="9AA1AC"/>
-                </a:solidFill>
-                <a:latin typeface="Segoe UI"/>
-              </a:rPr>
-              <a:t>Саргассово море, T18: прерванная трансекта (2 сегмента) и «Подбор снимка» — сцен в окне нет</a:t>
-            </a:r>
-          </a:p>
-        </p:txBody>
-      </p:sp>
-      <p:sp>
-        <p:nvSpPr>
-          <p:cNvPr id="7" name="TextBox 6"/>
-          <p:cNvSpPr txBox="1"/>
-          <p:nvPr/>
-        </p:nvSpPr>
-        <p:spPr>
-          <a:xfrm>
-            <a:off x="457200" y="6355080"/>
-            <a:ext cx="10515600" cy="320040"/>
-          </a:xfrm>
-          <a:prstGeom prst="rect">
-            <a:avLst/>
-          </a:prstGeom>
-          <a:noFill/>
-        </p:spPr>
-        <p:txBody>
-          <a:bodyPr wrap="square" anchor="t" lIns="18288" rIns="18288" tIns="18288" bIns="18288">
-            <a:spAutoFit/>
-          </a:bodyPr>
-          <a:lstStyle/>
-          <a:p>
-            <a:pPr algn="l">
-              <a:spcAft>
-                <a:spcPts val="600"/>
-              </a:spcAft>
-            </a:pPr>
-            <a:r>
-              <a:rPr sz="1000" b="0">
-                <a:solidFill>
-                  <a:srgbClr val="9AA1AC"/>
-                </a:solidFill>
-                <a:latin typeface="Segoe UI"/>
-              </a:rPr>
-              <a:t>Источник: docs/EXTRA_FEATURES.md; reports/case_pairfinder/evidence.md; reports/case_geometry/summary.md</a:t>
-            </a:r>
-          </a:p>
-        </p:txBody>
-      </p:sp>
-      <p:sp>
-        <p:nvSpPr>
-          <p:cNvPr id="8" name="TextBox 7"/>
-          <p:cNvSpPr txBox="1"/>
-          <p:nvPr/>
-        </p:nvSpPr>
-        <p:spPr>
-          <a:xfrm>
-            <a:off x="11155680" y="6355080"/>
-            <a:ext cx="640080" cy="320040"/>
-          </a:xfrm>
-          <a:prstGeom prst="rect">
-            <a:avLst/>
-          </a:prstGeom>
-          <a:noFill/>
-        </p:spPr>
-        <p:txBody>
-          <a:bodyPr wrap="square" anchor="t" lIns="18288" rIns="18288" tIns="18288" bIns="18288">
-            <a:spAutoFit/>
-          </a:bodyPr>
-          <a:lstStyle/>
-          <a:p>
-            <a:pPr algn="r">
-              <a:spcAft>
-                <a:spcPts val="600"/>
-              </a:spcAft>
-            </a:pPr>
-            <a:r>
-              <a:rPr sz="1000" b="0">
-                <a:solidFill>
-                  <a:srgbClr val="9AA1AC"/>
-                </a:solidFill>
-                <a:latin typeface="Segoe UI"/>
-              </a:rPr>
-              <a:t>прил.</a:t>
-            </a:r>
-          </a:p>
-        </p:txBody>
-      </p:sp>
-    </p:spTree>
-  </p:cSld>
-  <p:clrMapOvr>
-    <a:masterClrMapping/>
-  </p:clrMapOvr>
-</p:sld>
-</file>
-
-<file path=ppt/slides/slide2.xml><?xml version="1.0" encoding="utf-8"?>
-<p:sld xmlns:a="http://schemas.openxmlformats.org/drawingml/2006/main" xmlns:p="http://schemas.openxmlformats.org/presentationml/2006/main" xmlns:r="http://schemas.openxmlformats.org/officeDocument/2006/relationships">
-  <p:cSld>
-    <p:bg>
-      <p:bgPr>
-        <a:solidFill>
-          <a:srgbClr val="101216"/>
-        </a:solidFill>
-        <a:effectLst/>
-      </p:bgPr>
-    </p:bg>
-    <p:spTree>
-      <p:nvGrpSpPr>
-        <p:cNvPr id="1" name=""/>
-        <p:cNvGrpSpPr/>
-        <p:nvPr/>
-      </p:nvGrpSpPr>
-      <p:grpSpPr/>
-      <p:sp>
-        <p:nvSpPr>
-          <p:cNvPr id="2" name="TextBox 1"/>
-          <p:cNvSpPr txBox="1"/>
-          <p:nvPr/>
-        </p:nvSpPr>
-        <p:spPr>
-          <a:xfrm>
-            <a:off x="457200" y="201168"/>
-            <a:ext cx="8229600" cy="274320"/>
-          </a:xfrm>
-          <a:prstGeom prst="rect">
-            <a:avLst/>
-          </a:prstGeom>
-          <a:noFill/>
-        </p:spPr>
-        <p:txBody>
-          <a:bodyPr wrap="square" anchor="t" lIns="18288" rIns="18288" tIns="18288" bIns="18288">
-            <a:spAutoFit/>
-          </a:bodyPr>
-          <a:lstStyle/>
-          <a:p>
-            <a:pPr algn="l">
-              <a:spcAft>
-                <a:spcPts val="600"/>
-              </a:spcAft>
-            </a:pPr>
-            <a:r>
-              <a:rPr sz="1200" b="1">
-                <a:solidFill>
-                  <a:srgbClr val="D9912E"/>
-                </a:solidFill>
-                <a:latin typeface="Segoe UI"/>
-              </a:rPr>
-              <a:t>02 · Задача и пользователь</a:t>
-            </a:r>
-          </a:p>
-        </p:txBody>
-      </p:sp>
-      <p:sp>
-        <p:nvSpPr>
-          <p:cNvPr id="3" name="TextBox 2"/>
-          <p:cNvSpPr txBox="1"/>
-          <p:nvPr/>
-        </p:nvSpPr>
-        <p:spPr>
-          <a:xfrm>
-            <a:off x="457200" y="457200"/>
-            <a:ext cx="11247120" cy="960120"/>
-          </a:xfrm>
-          <a:prstGeom prst="rect">
-            <a:avLst/>
-          </a:prstGeom>
-          <a:noFill/>
-        </p:spPr>
-        <p:txBody>
-          <a:bodyPr wrap="square" anchor="t" lIns="18288" rIns="18288" tIns="18288" bIns="18288">
-            <a:spAutoFit/>
-          </a:bodyPr>
-          <a:lstStyle/>
-          <a:p>
-            <a:pPr algn="l">
-              <a:spcAft>
-                <a:spcPts val="600"/>
-              </a:spcAft>
-            </a:pPr>
-            <a:r>
-              <a:rPr sz="2300" b="1">
-                <a:solidFill>
-                  <a:srgbClr val="EEEFF1"/>
-                </a:solidFill>
-                <a:latin typeface="Segoe UI"/>
-              </a:rPr>
-              <a:t>Пользователь — специалист по мониторингу: акватория и дата → проверка зон → сравнение с полем → выгрузка</a:t>
-            </a:r>
-          </a:p>
-        </p:txBody>
-      </p:sp>
-      <p:sp>
-        <p:nvSpPr>
-          <p:cNvPr id="4" name="TextBox 3"/>
-          <p:cNvSpPr txBox="1"/>
-          <p:nvPr/>
-        </p:nvSpPr>
-        <p:spPr>
-          <a:xfrm>
-            <a:off x="457200" y="1600200"/>
-            <a:ext cx="5577840" cy="4572000"/>
-          </a:xfrm>
-          <a:prstGeom prst="rect">
-            <a:avLst/>
-          </a:prstGeom>
-          <a:noFill/>
-        </p:spPr>
-        <p:txBody>
-          <a:bodyPr wrap="square" anchor="t" lIns="18288" rIns="18288" tIns="18288" bIns="18288">
-            <a:spAutoFit/>
-          </a:bodyPr>
-          <a:lstStyle/>
-          <a:p>
-            <a:pPr algn="l">
-              <a:spcAft>
-                <a:spcPts val="1000"/>
-              </a:spcAft>
-            </a:pPr>
-            <a:r>
-              <a:rPr sz="1600" b="0">
-                <a:solidFill>
-                  <a:srgbClr val="EEEFF1"/>
-                </a:solidFill>
-                <a:latin typeface="Segoe UI"/>
-              </a:rPr>
-              <a:t>• Выбирает акваторию и дату, видит полевые измерения, снимки-кандидаты и маску качества</a:t>
-            </a:r>
-          </a:p>
-          <a:p>
-            <a:pPr algn="l">
-              <a:spcAft>
-                <a:spcPts val="1000"/>
-              </a:spcAft>
-            </a:pPr>
-            <a:r>
-              <a:rPr sz="1600" b="0">
-                <a:solidFill>
-                  <a:srgbClr val="EEEFF1"/>
-                </a:solidFill>
-                <a:latin typeface="Segoe UI"/>
-              </a:rPr>
-              <a:t>• Смотрит, где детектор нашёл подозрительные пиксели, и почему пара «снимок ↔ поле» принята или отклонена</a:t>
-            </a:r>
-          </a:p>
-          <a:p>
-            <a:pPr algn="l">
-              <a:spcAft>
-                <a:spcPts val="1000"/>
-              </a:spcAft>
-            </a:pPr>
-            <a:r>
-              <a:rPr sz="1600" b="0">
-                <a:solidFill>
-                  <a:srgbClr val="EEEFF1"/>
-                </a:solidFill>
-                <a:latin typeface="Segoe UI"/>
-              </a:rPr>
-              <a:t>• Сравнивает с полевым измерением (шт./км² с интервалом), сохраняет запрос, выгружает GeoJSON/CSV</a:t>
-            </a:r>
-          </a:p>
-          <a:p>
-            <a:pPr algn="l">
-              <a:spcAft>
-                <a:spcPts val="1000"/>
-              </a:spcAft>
-            </a:pPr>
-            <a:r>
-              <a:rPr sz="1600" b="0">
-                <a:solidFill>
-                  <a:srgbClr val="EEEFF1"/>
-                </a:solidFill>
-                <a:latin typeface="Segoe UI"/>
-              </a:rPr>
-              <a:t>• Измерение, оценка по полевым данным и площадь маски — разные поля везде: в API, карточке, легенде, выгрузке</a:t>
-            </a:r>
-          </a:p>
-        </p:txBody>
-      </p:sp>
-      <p:pic>
-        <p:nvPicPr>
-          <p:cNvPr id="5" name="Picture 4" descr="01_overview.jpg"/>
-          <p:cNvPicPr>
-            <a:picLocks noChangeAspect="1"/>
-          </p:cNvPicPr>
-          <p:nvPr/>
-        </p:nvPicPr>
-        <p:blipFill>
-          <a:blip r:embed="rId2"/>
-          <a:stretch>
-            <a:fillRect/>
-          </a:stretch>
-        </p:blipFill>
-        <p:spPr>
-          <a:xfrm>
-            <a:off x="6400800" y="1645920"/>
-            <a:ext cx="5349240" cy="3007479"/>
-          </a:xfrm>
-          <a:prstGeom prst="rect">
-            <a:avLst/>
-          </a:prstGeom>
-        </p:spPr>
-      </p:pic>
-      <p:sp>
-        <p:nvSpPr>
-          <p:cNvPr id="6" name="TextBox 5"/>
-          <p:cNvSpPr txBox="1"/>
-          <p:nvPr/>
-        </p:nvSpPr>
-        <p:spPr>
-          <a:xfrm>
-            <a:off x="6400800" y="4699119"/>
-            <a:ext cx="5349240" cy="548640"/>
-          </a:xfrm>
-          <a:prstGeom prst="rect">
-            <a:avLst/>
-          </a:prstGeom>
-          <a:noFill/>
-        </p:spPr>
-        <p:txBody>
-          <a:bodyPr wrap="square" anchor="t" lIns="18288" rIns="18288" tIns="18288" bIns="18288">
-            <a:spAutoFit/>
-          </a:bodyPr>
-          <a:lstStyle/>
-          <a:p>
-            <a:pPr algn="l">
-              <a:spcAft>
-                <a:spcPts val="600"/>
-              </a:spcAft>
-            </a:pPr>
-            <a:r>
-              <a:rPr sz="1200" b="0">
-                <a:solidFill>
-                  <a:srgbClr val="9AA1AC"/>
-                </a:solidFill>
-                <a:latin typeface="Segoe UI"/>
-              </a:rPr>
-              <a:t>Карта кейса: 935 наблюдений, 29 полос обследования со снимками-кандидатами</a:t>
-            </a:r>
-          </a:p>
-        </p:txBody>
-      </p:sp>
-      <p:sp>
-        <p:nvSpPr>
-          <p:cNvPr id="7" name="TextBox 6"/>
-          <p:cNvSpPr txBox="1"/>
-          <p:nvPr/>
-        </p:nvSpPr>
-        <p:spPr>
-          <a:xfrm>
-            <a:off x="457200" y="6355080"/>
-            <a:ext cx="10515600" cy="320040"/>
-          </a:xfrm>
-          <a:prstGeom prst="rect">
-            <a:avLst/>
-          </a:prstGeom>
-          <a:noFill/>
-        </p:spPr>
-        <p:txBody>
-          <a:bodyPr wrap="square" anchor="t" lIns="18288" rIns="18288" tIns="18288" bIns="18288">
-            <a:spAutoFit/>
-          </a:bodyPr>
-          <a:lstStyle/>
-          <a:p>
-            <a:pPr algn="l">
-              <a:spcAft>
-                <a:spcPts val="600"/>
-              </a:spcAft>
-            </a:pPr>
-            <a:r>
-              <a:rPr sz="1000" b="0">
-                <a:solidFill>
-                  <a:srgbClr val="9AA1AC"/>
-                </a:solidFill>
-                <a:latin typeface="Segoe UI"/>
-              </a:rPr>
-              <a:t>Источник: README.md §1, §8; docs/CONTRACTS_V3.md</a:t>
-            </a:r>
-          </a:p>
-        </p:txBody>
-      </p:sp>
-      <p:sp>
-        <p:nvSpPr>
-          <p:cNvPr id="8" name="TextBox 7"/>
-          <p:cNvSpPr txBox="1"/>
-          <p:nvPr/>
-        </p:nvSpPr>
-        <p:spPr>
-          <a:xfrm>
-            <a:off x="11155680" y="6355080"/>
-            <a:ext cx="640080" cy="320040"/>
-          </a:xfrm>
-          <a:prstGeom prst="rect">
-            <a:avLst/>
-          </a:prstGeom>
-          <a:noFill/>
-        </p:spPr>
-        <p:txBody>
-          <a:bodyPr wrap="square" anchor="t" lIns="18288" rIns="18288" tIns="18288" bIns="18288">
-            <a:spAutoFit/>
-          </a:bodyPr>
-          <a:lstStyle/>
-          <a:p>
-            <a:pPr algn="r">
-              <a:spcAft>
-                <a:spcPts val="600"/>
-              </a:spcAft>
-            </a:pPr>
-            <a:r>
-              <a:rPr sz="1000" b="0">
-                <a:solidFill>
-                  <a:srgbClr val="9AA1AC"/>
-                </a:solidFill>
-                <a:latin typeface="Segoe UI"/>
-              </a:rPr>
-              <a:t>0:19</a:t>
-            </a:r>
-          </a:p>
-        </p:txBody>
-      </p:sp>
-    </p:spTree>
-  </p:cSld>
-  <p:clrMapOvr>
-    <a:masterClrMapping/>
-  </p:clrMapOvr>
-</p:sld>
-</file>
-
-<file path=ppt/slides/slide3.xml><?xml version="1.0" encoding="utf-8"?>
-<p:sld xmlns:a="http://schemas.openxmlformats.org/drawingml/2006/main" xmlns:p="http://schemas.openxmlformats.org/presentationml/2006/main" xmlns:r="http://schemas.openxmlformats.org/officeDocument/2006/relationships">
-  <p:cSld>
-    <p:bg>
-      <p:bgPr>
-        <a:solidFill>
-          <a:srgbClr val="101216"/>
-        </a:solidFill>
-        <a:effectLst/>
-      </p:bgPr>
-    </p:bg>
-    <p:spTree>
-      <p:nvGrpSpPr>
-        <p:cNvPr id="1" name=""/>
-        <p:cNvGrpSpPr/>
-        <p:nvPr/>
-      </p:nvGrpSpPr>
-      <p:grpSpPr/>
-      <p:sp>
-        <p:nvSpPr>
-          <p:cNvPr id="2" name="TextBox 1"/>
-          <p:cNvSpPr txBox="1"/>
-          <p:nvPr/>
-        </p:nvSpPr>
-        <p:spPr>
-          <a:xfrm>
-            <a:off x="457200" y="201168"/>
-            <a:ext cx="8229600" cy="274320"/>
-          </a:xfrm>
-          <a:prstGeom prst="rect">
-            <a:avLst/>
-          </a:prstGeom>
-          <a:noFill/>
-        </p:spPr>
-        <p:txBody>
-          <a:bodyPr wrap="square" anchor="t" lIns="18288" rIns="18288" tIns="18288" bIns="18288">
-            <a:spAutoFit/>
-          </a:bodyPr>
-          <a:lstStyle/>
-          <a:p>
-            <a:pPr algn="l">
-              <a:spcAft>
-                <a:spcPts val="600"/>
-              </a:spcAft>
-            </a:pPr>
-            <a:r>
-              <a:rPr sz="1200" b="1">
-                <a:solidFill>
-                  <a:srgbClr val="D9912E"/>
-                </a:solidFill>
-                <a:latin typeface="Segoe UI"/>
-              </a:rPr>
-              <a:t>03 · Целевая величина</a:t>
-            </a:r>
-          </a:p>
-        </p:txBody>
-      </p:sp>
-      <p:sp>
-        <p:nvSpPr>
-          <p:cNvPr id="3" name="TextBox 2"/>
-          <p:cNvSpPr txBox="1"/>
-          <p:nvPr/>
-        </p:nvSpPr>
-        <p:spPr>
-          <a:xfrm>
-            <a:off x="457200" y="457200"/>
-            <a:ext cx="11247120" cy="960120"/>
-          </a:xfrm>
-          <a:prstGeom prst="rect">
-            <a:avLst/>
-          </a:prstGeom>
-          <a:noFill/>
-        </p:spPr>
-        <p:txBody>
-          <a:bodyPr wrap="square" anchor="t" lIns="18288" rIns="18288" tIns="18288" bIns="18288">
-            <a:spAutoFit/>
-          </a:bodyPr>
-          <a:lstStyle/>
-          <a:p>
-            <a:pPr algn="l">
-              <a:spcAft>
-                <a:spcPts val="600"/>
-              </a:spcAft>
-            </a:pPr>
-            <a:r>
-              <a:rPr sz="2300" b="1">
-                <a:solidFill>
-                  <a:srgbClr val="EEEFF1"/>
-                </a:solidFill>
-                <a:latin typeface="Segoe UI"/>
-              </a:rPr>
-              <a:t>Целевая величина — суммарный плавающий пластик &gt; 2 см, шт./км², визуальная полоса 10 м (S2, Саргассово море)</a:t>
-            </a:r>
-          </a:p>
-        </p:txBody>
-      </p:sp>
-      <p:sp>
-        <p:nvSpPr>
-          <p:cNvPr id="4" name="TextBox 3"/>
-          <p:cNvSpPr txBox="1"/>
-          <p:nvPr/>
-        </p:nvSpPr>
-        <p:spPr>
-          <a:xfrm>
-            <a:off x="457200" y="1600200"/>
-            <a:ext cx="5577840" cy="4572000"/>
-          </a:xfrm>
-          <a:prstGeom prst="rect">
-            <a:avLst/>
-          </a:prstGeom>
-          <a:noFill/>
-        </p:spPr>
-        <p:txBody>
-          <a:bodyPr wrap="square" anchor="t" lIns="18288" rIns="18288" tIns="18288" bIns="18288">
-            <a:spAutoFit/>
-          </a:bodyPr>
-          <a:lstStyle/>
-          <a:p>
-            <a:pPr algn="l">
-              <a:spcAft>
-                <a:spcPts val="1000"/>
-              </a:spcAft>
-            </a:pPr>
-            <a:r>
-              <a:rPr sz="1600" b="0">
-                <a:solidFill>
-                  <a:srgbClr val="EEEFF1"/>
-                </a:solidFill>
-                <a:latin typeface="Segoe UI"/>
-              </a:rPr>
-              <a:t>• 63 события за 26 дней (2015-04-01 – 2015-04-26); у всех есть N и A → C = N/A проверяема</a:t>
-            </a:r>
-          </a:p>
-          <a:p>
-            <a:pPr algn="l">
-              <a:spcAft>
-                <a:spcPts val="1000"/>
-              </a:spcAft>
-            </a:pPr>
-            <a:r>
-              <a:rPr sz="1600" b="0">
-                <a:solidFill>
-                  <a:srgbClr val="EEEFF1"/>
-                </a:solidFill>
-                <a:latin typeface="Segoe UI"/>
-              </a:rPr>
-              <a:t>• N 1–55 предметов, A 0.092–0.255 км²: масштаб контрольного примера 12 / 0.20 км²</a:t>
-            </a:r>
-          </a:p>
-          <a:p>
-            <a:pPr algn="l">
-              <a:spcAft>
-                <a:spcPts val="1000"/>
-              </a:spcAft>
-            </a:pPr>
-            <a:r>
-              <a:rPr sz="1600" b="0">
-                <a:solidFill>
-                  <a:srgbClr val="EEEFF1"/>
-                </a:solidFill>
-                <a:latin typeface="Segoe UI"/>
-              </a:rPr>
-              <a:t>• Второй профиль — трал S1, 5–50 см, 83 события: только полевая проверка, со S2 не смешиваем</a:t>
-            </a:r>
-          </a:p>
-          <a:p>
-            <a:pPr algn="l">
-              <a:spcAft>
-                <a:spcPts val="1000"/>
-              </a:spcAft>
-            </a:pPr>
-            <a:r>
-              <a:rPr sz="1600" b="0">
-                <a:solidFill>
-                  <a:srgbClr val="EEEFF1"/>
-                </a:solidFill>
-                <a:latin typeface="Segoe UI"/>
-              </a:rPr>
-              <a:t>• all_litter (S3, S4) — весь мусор всех материалов, не пластик: только в эксперименте на снимках</a:t>
-            </a:r>
-          </a:p>
-          <a:p>
-            <a:pPr algn="l">
-              <a:spcAft>
-                <a:spcPts val="1000"/>
-              </a:spcAft>
-            </a:pPr>
-            <a:r>
-              <a:rPr sz="1600" b="0">
-                <a:solidFill>
-                  <a:srgbClr val="EEEFF1"/>
-                </a:solidFill>
-                <a:latin typeface="Segoe UI"/>
-              </a:rPr>
-              <a:t>• Детектор: класс Marine Debris MARIDA = любой плавающий мусор; пластик отдельно он не выделяет</a:t>
-            </a:r>
-          </a:p>
-        </p:txBody>
-      </p:sp>
-      <p:sp>
-        <p:nvSpPr>
-          <p:cNvPr id="5" name="Rectangle 4"/>
-          <p:cNvSpPr/>
-          <p:nvPr/>
-        </p:nvSpPr>
-        <p:spPr>
-          <a:xfrm>
-            <a:off x="6400800" y="1691640"/>
-            <a:ext cx="5349240" cy="1554480"/>
-          </a:xfrm>
-          <a:prstGeom prst="rect">
-            <a:avLst/>
-          </a:prstGeom>
-          <a:solidFill>
-            <a:srgbClr val="1B1E24"/>
-          </a:solidFill>
-          <a:ln>
-            <a:noFill/>
-          </a:ln>
-          <a:effectLst/>
-        </p:spPr>
-        <p:style>
-          <a:lnRef idx="1">
-            <a:schemeClr val="accent1"/>
-          </a:lnRef>
-          <a:fillRef idx="3">
-            <a:schemeClr val="accent1"/>
-          </a:fillRef>
-          <a:effectRef idx="2">
-            <a:schemeClr val="accent1"/>
-          </a:effectRef>
-          <a:fontRef idx="minor">
-            <a:schemeClr val="lt1"/>
-          </a:fontRef>
-        </p:style>
-        <p:txBody>
-          <a:bodyPr rtlCol="0" anchor="ctr"/>
-          <a:lstStyle/>
-          <a:p>
-            <a:pPr algn="ctr"/>
-          </a:p>
-        </p:txBody>
-      </p:sp>
-      <p:sp>
-        <p:nvSpPr>
-          <p:cNvPr id="6" name="TextBox 5"/>
-          <p:cNvSpPr txBox="1"/>
-          <p:nvPr/>
-        </p:nvSpPr>
-        <p:spPr>
-          <a:xfrm>
-            <a:off x="6675120" y="1783080"/>
-            <a:ext cx="4800600" cy="822960"/>
-          </a:xfrm>
-          <a:prstGeom prst="rect">
-            <a:avLst/>
-          </a:prstGeom>
-          <a:noFill/>
-        </p:spPr>
-        <p:txBody>
-          <a:bodyPr wrap="square" anchor="t" lIns="18288" rIns="18288" tIns="18288" bIns="18288">
-            <a:spAutoFit/>
-          </a:bodyPr>
-          <a:lstStyle/>
-          <a:p>
-            <a:pPr algn="l">
-              <a:spcAft>
-                <a:spcPts val="600"/>
-              </a:spcAft>
-            </a:pPr>
-            <a:r>
-              <a:rPr sz="4800" b="1">
-                <a:solidFill>
-                  <a:srgbClr val="D9912E"/>
-                </a:solidFill>
-                <a:latin typeface="Segoe UI"/>
-              </a:rPr>
-              <a:t>36.1</a:t>
-            </a:r>
-          </a:p>
-        </p:txBody>
-      </p:sp>
-      <p:sp>
-        <p:nvSpPr>
-          <p:cNvPr id="7" name="TextBox 6"/>
-          <p:cNvSpPr txBox="1"/>
-          <p:nvPr/>
-        </p:nvSpPr>
-        <p:spPr>
-          <a:xfrm>
-            <a:off x="6675120" y="2606040"/>
-            <a:ext cx="4800600" cy="594360"/>
-          </a:xfrm>
-          <a:prstGeom prst="rect">
-            <a:avLst/>
-          </a:prstGeom>
-          <a:noFill/>
-        </p:spPr>
-        <p:txBody>
-          <a:bodyPr wrap="square" anchor="t" lIns="18288" rIns="18288" tIns="18288" bIns="18288">
-            <a:spAutoFit/>
-          </a:bodyPr>
-          <a:lstStyle/>
-          <a:p>
-            <a:pPr algn="l">
-              <a:spcAft>
-                <a:spcPts val="600"/>
-              </a:spcAft>
-            </a:pPr>
-            <a:r>
-              <a:rPr sz="1300" b="0">
-                <a:solidFill>
-                  <a:srgbClr val="EEEFF1"/>
-                </a:solidFill>
-                <a:latin typeface="Segoe UI"/>
-              </a:rPr>
-              <a:t>шт./км² — медиана C профиля S2 (диапазон 4.3–222.7)</a:t>
-            </a:r>
-          </a:p>
-        </p:txBody>
-      </p:sp>
-      <p:sp>
-        <p:nvSpPr>
-          <p:cNvPr id="8" name="TextBox 7"/>
-          <p:cNvSpPr txBox="1"/>
-          <p:nvPr/>
-        </p:nvSpPr>
-        <p:spPr>
-          <a:xfrm>
-            <a:off x="457200" y="6355080"/>
-            <a:ext cx="10515600" cy="320040"/>
-          </a:xfrm>
-          <a:prstGeom prst="rect">
-            <a:avLst/>
-          </a:prstGeom>
-          <a:noFill/>
-        </p:spPr>
-        <p:txBody>
-          <a:bodyPr wrap="square" anchor="t" lIns="18288" rIns="18288" tIns="18288" bIns="18288">
-            <a:spAutoFit/>
-          </a:bodyPr>
-          <a:lstStyle/>
-          <a:p>
-            <a:pPr algn="l">
-              <a:spcAft>
-                <a:spcPts val="600"/>
-              </a:spcAft>
-            </a:pPr>
-            <a:r>
-              <a:rPr sz="1000" b="0">
-                <a:solidFill>
-                  <a:srgbClr val="9AA1AC"/>
-                </a:solidFill>
-                <a:latin typeface="Segoe UI"/>
-              </a:rPr>
-              <a:t>Источник: configs/case_selection.yaml; README.md §1; reports/report.md §1</a:t>
-            </a:r>
-          </a:p>
-        </p:txBody>
-      </p:sp>
-      <p:sp>
-        <p:nvSpPr>
-          <p:cNvPr id="9" name="TextBox 8"/>
-          <p:cNvSpPr txBox="1"/>
-          <p:nvPr/>
-        </p:nvSpPr>
-        <p:spPr>
-          <a:xfrm>
-            <a:off x="11155680" y="6355080"/>
-            <a:ext cx="640080" cy="320040"/>
-          </a:xfrm>
-          <a:prstGeom prst="rect">
-            <a:avLst/>
-          </a:prstGeom>
-          <a:noFill/>
-        </p:spPr>
-        <p:txBody>
-          <a:bodyPr wrap="square" anchor="t" lIns="18288" rIns="18288" tIns="18288" bIns="18288">
-            <a:spAutoFit/>
-          </a:bodyPr>
-          <a:lstStyle/>
-          <a:p>
-            <a:pPr algn="r">
-              <a:spcAft>
-                <a:spcPts val="600"/>
-              </a:spcAft>
-            </a:pPr>
-            <a:r>
-              <a:rPr sz="1000" b="0">
-                <a:solidFill>
-                  <a:srgbClr val="9AA1AC"/>
-                </a:solidFill>
-                <a:latin typeface="Segoe UI"/>
-              </a:rPr>
-              <a:t>0:33</a:t>
-            </a:r>
-          </a:p>
-        </p:txBody>
-      </p:sp>
-    </p:spTree>
-  </p:cSld>
-  <p:clrMapOvr>
-    <a:masterClrMapping/>
-  </p:clrMapOvr>
-</p:sld>
-</file>
-
-<file path=ppt/slides/slide4.xml><?xml version="1.0" encoding="utf-8"?>
-<p:sld xmlns:a="http://schemas.openxmlformats.org/drawingml/2006/main" xmlns:p="http://schemas.openxmlformats.org/presentationml/2006/main" xmlns:r="http://schemas.openxmlformats.org/officeDocument/2006/relationships">
-  <p:cSld>
-    <p:bg>
-      <p:bgPr>
-        <a:solidFill>
-          <a:srgbClr val="101216"/>
-        </a:solidFill>
-        <a:effectLst/>
-      </p:bgPr>
-    </p:bg>
-    <p:spTree>
-      <p:nvGrpSpPr>
-        <p:cNvPr id="1" name=""/>
-        <p:cNvGrpSpPr/>
-        <p:nvPr/>
-      </p:nvGrpSpPr>
-      <p:grpSpPr/>
-      <p:sp>
-        <p:nvSpPr>
-          <p:cNvPr id="2" name="TextBox 1"/>
-          <p:cNvSpPr txBox="1"/>
-          <p:nvPr/>
-        </p:nvSpPr>
-        <p:spPr>
-          <a:xfrm>
-            <a:off x="457200" y="201168"/>
-            <a:ext cx="8229600" cy="274320"/>
-          </a:xfrm>
-          <a:prstGeom prst="rect">
-            <a:avLst/>
-          </a:prstGeom>
-          <a:noFill/>
-        </p:spPr>
-        <p:txBody>
-          <a:bodyPr wrap="square" anchor="t" lIns="18288" rIns="18288" tIns="18288" bIns="18288">
-            <a:spAutoFit/>
-          </a:bodyPr>
-          <a:lstStyle/>
-          <a:p>
-            <a:pPr algn="l">
-              <a:spcAft>
-                <a:spcPts val="600"/>
-              </a:spcAft>
-            </a:pPr>
-            <a:r>
-              <a:rPr sz="1200" b="1">
-                <a:solidFill>
-                  <a:srgbClr val="D9912E"/>
-                </a:solidFill>
-                <a:latin typeface="Segoe UI"/>
-              </a:rPr>
-              <a:t>04 · Данные и отбор</a:t>
+              <a:t>18 · Приложение · Данные и отбор</a:t>
             </a:r>
           </a:p>
         </p:txBody>
@@ -10733,6 +9310,2264 @@
                 </a:solidFill>
                 <a:latin typeface="Segoe UI"/>
               </a:rPr>
+              <a:t>прил.</a:t>
+            </a:r>
+          </a:p>
+        </p:txBody>
+      </p:sp>
+    </p:spTree>
+  </p:cSld>
+  <p:clrMapOvr>
+    <a:masterClrMapping/>
+  </p:clrMapOvr>
+</p:sld>
+</file>
+
+<file path=ppt/slides/slide19.xml><?xml version="1.0" encoding="utf-8"?>
+<p:sld xmlns:a="http://schemas.openxmlformats.org/drawingml/2006/main" xmlns:p="http://schemas.openxmlformats.org/presentationml/2006/main" xmlns:r="http://schemas.openxmlformats.org/officeDocument/2006/relationships">
+  <p:cSld>
+    <p:bg>
+      <p:bgPr>
+        <a:solidFill>
+          <a:srgbClr val="101216"/>
+        </a:solidFill>
+        <a:effectLst/>
+      </p:bgPr>
+    </p:bg>
+    <p:spTree>
+      <p:nvGrpSpPr>
+        <p:cNvPr id="1" name=""/>
+        <p:cNvGrpSpPr/>
+        <p:nvPr/>
+      </p:nvGrpSpPr>
+      <p:grpSpPr/>
+      <p:sp>
+        <p:nvSpPr>
+          <p:cNvPr id="2" name="TextBox 1"/>
+          <p:cNvSpPr txBox="1"/>
+          <p:nvPr/>
+        </p:nvSpPr>
+        <p:spPr>
+          <a:xfrm>
+            <a:off x="457200" y="201168"/>
+            <a:ext cx="8229600" cy="274320"/>
+          </a:xfrm>
+          <a:prstGeom prst="rect">
+            <a:avLst/>
+          </a:prstGeom>
+          <a:noFill/>
+        </p:spPr>
+        <p:txBody>
+          <a:bodyPr wrap="square" anchor="t" lIns="18288" rIns="18288" tIns="18288" bIns="18288">
+            <a:spAutoFit/>
+          </a:bodyPr>
+          <a:lstStyle/>
+          <a:p>
+            <a:pPr algn="l">
+              <a:spcAft>
+                <a:spcPts val="600"/>
+              </a:spcAft>
+            </a:pPr>
+            <a:r>
+              <a:rPr sz="1200" b="1">
+                <a:solidFill>
+                  <a:srgbClr val="D9912E"/>
+                </a:solidFill>
+                <a:latin typeface="Segoe UI"/>
+              </a:rPr>
+              <a:t>19 · Приложение · Эксперимент «снимок vs all_litter»</a:t>
+            </a:r>
+          </a:p>
+        </p:txBody>
+      </p:sp>
+      <p:sp>
+        <p:nvSpPr>
+          <p:cNvPr id="3" name="TextBox 2"/>
+          <p:cNvSpPr txBox="1"/>
+          <p:nvPr/>
+        </p:nvSpPr>
+        <p:spPr>
+          <a:xfrm>
+            <a:off x="457200" y="457200"/>
+            <a:ext cx="11247120" cy="960120"/>
+          </a:xfrm>
+          <a:prstGeom prst="rect">
+            <a:avLst/>
+          </a:prstGeom>
+          <a:noFill/>
+        </p:spPr>
+        <p:txBody>
+          <a:bodyPr wrap="square" anchor="t" lIns="18288" rIns="18288" tIns="18288" bIns="18288">
+            <a:spAutoFit/>
+          </a:bodyPr>
+          <a:lstStyle/>
+          <a:p>
+            <a:pPr algn="l">
+              <a:spcAft>
+                <a:spcPts val="600"/>
+              </a:spcAft>
+            </a:pPr>
+            <a:r>
+              <a:rPr sz="2600" b="1">
+                <a:solidFill>
+                  <a:srgbClr val="EEEFF1"/>
+                </a:solidFill>
+                <a:latin typeface="Segoe UI"/>
+              </a:rPr>
+              <a:t>Связь признаков снимка с полевой плотностью всего мусора не установлена: данных на это мало</a:t>
+            </a:r>
+          </a:p>
+        </p:txBody>
+      </p:sp>
+      <p:sp>
+        <p:nvSpPr>
+          <p:cNvPr id="4" name="TextBox 3"/>
+          <p:cNvSpPr txBox="1"/>
+          <p:nvPr/>
+        </p:nvSpPr>
+        <p:spPr>
+          <a:xfrm>
+            <a:off x="457200" y="1600200"/>
+            <a:ext cx="5577840" cy="4572000"/>
+          </a:xfrm>
+          <a:prstGeom prst="rect">
+            <a:avLst/>
+          </a:prstGeom>
+          <a:noFill/>
+        </p:spPr>
+        <p:txBody>
+          <a:bodyPr wrap="square" anchor="t" lIns="18288" rIns="18288" tIns="18288" bIns="18288">
+            <a:spAutoFit/>
+          </a:bodyPr>
+          <a:lstStyle/>
+          <a:p>
+            <a:pPr algn="l">
+              <a:spcAft>
+                <a:spcPts val="1000"/>
+              </a:spcAft>
+            </a:pPr>
+            <a:r>
+              <a:rPr sz="1600" b="0">
+                <a:solidFill>
+                  <a:srgbClr val="EEEFF1"/>
+                </a:solidFill>
+                <a:latin typeface="Segoe UI"/>
+              </a:rPr>
+              <a:t>• 11 пар S2 прошли маски, независимых групп «район × день» — 6; эталон — весь мусор, не пластик</a:t>
+            </a:r>
+          </a:p>
+          <a:p>
+            <a:pPr algn="l">
+              <a:spcAft>
+                <a:spcPts val="1000"/>
+              </a:spcAft>
+            </a:pPr>
+            <a:r>
+              <a:rPr sz="1600" b="0">
+                <a:solidFill>
+                  <a:srgbClr val="EEEFF1"/>
+                </a:solidFill>
+                <a:latin typeface="Segoe UI"/>
+              </a:rPr>
+              <a:t>• FDI в полосе: ρ −0.75 [−1.00; −0.14], p Холма 0.12; та же полоса в случайной воде сцены — −0.52</a:t>
+            </a:r>
+          </a:p>
+          <a:p>
+            <a:pPr algn="l">
+              <a:spcAft>
+                <a:spcPts val="1000"/>
+              </a:spcAft>
+            </a:pPr>
+            <a:r>
+              <a:rPr sz="1600" b="0">
+                <a:solidFill>
+                  <a:srgbClr val="EEEFF1"/>
+                </a:solidFill>
+                <a:latin typeface="Segoe UI"/>
+              </a:rPr>
+              <a:t>• Значит, связь на уровне сцены или дня, а не места; знак к тому же обратный ожидаемому</a:t>
+            </a:r>
+          </a:p>
+          <a:p>
+            <a:pPr algn="l">
+              <a:spcAft>
+                <a:spcPts val="1000"/>
+              </a:spcAft>
+            </a:pPr>
+            <a:r>
+              <a:rPr sz="1600" b="0">
+                <a:solidFill>
+                  <a:srgbClr val="EEEFF1"/>
+                </a:solidFill>
+                <a:latin typeface="Segoe UI"/>
+              </a:rPr>
+              <a:t>• Мощность: при 6 группах видна только |ρ| ≥ 0.96; для ρ = 0.5 нужно ≈ 33 независимых пар</a:t>
+            </a:r>
+          </a:p>
+        </p:txBody>
+      </p:sp>
+      <p:sp>
+        <p:nvSpPr>
+          <p:cNvPr id="5" name="Rectangle 4"/>
+          <p:cNvSpPr/>
+          <p:nvPr/>
+        </p:nvSpPr>
+        <p:spPr>
+          <a:xfrm>
+            <a:off x="6400800" y="1691640"/>
+            <a:ext cx="5349240" cy="1554480"/>
+          </a:xfrm>
+          <a:prstGeom prst="rect">
+            <a:avLst/>
+          </a:prstGeom>
+          <a:solidFill>
+            <a:srgbClr val="1B1E24"/>
+          </a:solidFill>
+          <a:ln>
+            <a:noFill/>
+          </a:ln>
+          <a:effectLst/>
+        </p:spPr>
+        <p:style>
+          <a:lnRef idx="1">
+            <a:schemeClr val="accent1"/>
+          </a:lnRef>
+          <a:fillRef idx="3">
+            <a:schemeClr val="accent1"/>
+          </a:fillRef>
+          <a:effectRef idx="2">
+            <a:schemeClr val="accent1"/>
+          </a:effectRef>
+          <a:fontRef idx="minor">
+            <a:schemeClr val="lt1"/>
+          </a:fontRef>
+        </p:style>
+        <p:txBody>
+          <a:bodyPr rtlCol="0" anchor="ctr"/>
+          <a:lstStyle/>
+          <a:p>
+            <a:pPr algn="ctr"/>
+          </a:p>
+        </p:txBody>
+      </p:sp>
+      <p:sp>
+        <p:nvSpPr>
+          <p:cNvPr id="6" name="TextBox 5"/>
+          <p:cNvSpPr txBox="1"/>
+          <p:nvPr/>
+        </p:nvSpPr>
+        <p:spPr>
+          <a:xfrm>
+            <a:off x="6675120" y="1783080"/>
+            <a:ext cx="4800600" cy="822960"/>
+          </a:xfrm>
+          <a:prstGeom prst="rect">
+            <a:avLst/>
+          </a:prstGeom>
+          <a:noFill/>
+        </p:spPr>
+        <p:txBody>
+          <a:bodyPr wrap="square" anchor="t" lIns="18288" rIns="18288" tIns="18288" bIns="18288">
+            <a:spAutoFit/>
+          </a:bodyPr>
+          <a:lstStyle/>
+          <a:p>
+            <a:pPr algn="l">
+              <a:spcAft>
+                <a:spcPts val="600"/>
+              </a:spcAft>
+            </a:pPr>
+            <a:r>
+              <a:rPr sz="4800" b="1">
+                <a:solidFill>
+                  <a:srgbClr val="D9912E"/>
+                </a:solidFill>
+                <a:latin typeface="Segoe UI"/>
+              </a:rPr>
+              <a:t>33</a:t>
+            </a:r>
+          </a:p>
+        </p:txBody>
+      </p:sp>
+      <p:sp>
+        <p:nvSpPr>
+          <p:cNvPr id="7" name="TextBox 6"/>
+          <p:cNvSpPr txBox="1"/>
+          <p:nvPr/>
+        </p:nvSpPr>
+        <p:spPr>
+          <a:xfrm>
+            <a:off x="6675120" y="2606040"/>
+            <a:ext cx="4800600" cy="594360"/>
+          </a:xfrm>
+          <a:prstGeom prst="rect">
+            <a:avLst/>
+          </a:prstGeom>
+          <a:noFill/>
+        </p:spPr>
+        <p:txBody>
+          <a:bodyPr wrap="square" anchor="t" lIns="18288" rIns="18288" tIns="18288" bIns="18288">
+            <a:spAutoFit/>
+          </a:bodyPr>
+          <a:lstStyle/>
+          <a:p>
+            <a:pPr algn="l">
+              <a:spcAft>
+                <a:spcPts val="600"/>
+              </a:spcAft>
+            </a:pPr>
+            <a:r>
+              <a:rPr sz="1300" b="0">
+                <a:solidFill>
+                  <a:srgbClr val="EEEFF1"/>
+                </a:solidFill>
+                <a:latin typeface="Segoe UI"/>
+              </a:rPr>
+              <a:t>независимых синхронных пар нужно, чтобы увидеть ρ = 0.5 (есть 6 групп)</a:t>
+            </a:r>
+          </a:p>
+        </p:txBody>
+      </p:sp>
+      <p:sp>
+        <p:nvSpPr>
+          <p:cNvPr id="8" name="TextBox 7"/>
+          <p:cNvSpPr txBox="1"/>
+          <p:nvPr/>
+        </p:nvSpPr>
+        <p:spPr>
+          <a:xfrm>
+            <a:off x="457200" y="6355080"/>
+            <a:ext cx="10515600" cy="320040"/>
+          </a:xfrm>
+          <a:prstGeom prst="rect">
+            <a:avLst/>
+          </a:prstGeom>
+          <a:noFill/>
+        </p:spPr>
+        <p:txBody>
+          <a:bodyPr wrap="square" anchor="t" lIns="18288" rIns="18288" tIns="18288" bIns="18288">
+            <a:spAutoFit/>
+          </a:bodyPr>
+          <a:lstStyle/>
+          <a:p>
+            <a:pPr algn="l">
+              <a:spcAft>
+                <a:spcPts val="600"/>
+              </a:spcAft>
+            </a:pPr>
+            <a:r>
+              <a:rPr sz="1000" b="0">
+                <a:solidFill>
+                  <a:srgbClr val="9AA1AC"/>
+                </a:solidFill>
+                <a:latin typeface="Segoe UI"/>
+              </a:rPr>
+              <a:t>Источник: reports/case_pairs/experiment.md, experiment.json</a:t>
+            </a:r>
+          </a:p>
+        </p:txBody>
+      </p:sp>
+      <p:sp>
+        <p:nvSpPr>
+          <p:cNvPr id="9" name="TextBox 8"/>
+          <p:cNvSpPr txBox="1"/>
+          <p:nvPr/>
+        </p:nvSpPr>
+        <p:spPr>
+          <a:xfrm>
+            <a:off x="11155680" y="6355080"/>
+            <a:ext cx="640080" cy="320040"/>
+          </a:xfrm>
+          <a:prstGeom prst="rect">
+            <a:avLst/>
+          </a:prstGeom>
+          <a:noFill/>
+        </p:spPr>
+        <p:txBody>
+          <a:bodyPr wrap="square" anchor="t" lIns="18288" rIns="18288" tIns="18288" bIns="18288">
+            <a:spAutoFit/>
+          </a:bodyPr>
+          <a:lstStyle/>
+          <a:p>
+            <a:pPr algn="r">
+              <a:spcAft>
+                <a:spcPts val="600"/>
+              </a:spcAft>
+            </a:pPr>
+            <a:r>
+              <a:rPr sz="1000" b="0">
+                <a:solidFill>
+                  <a:srgbClr val="9AA1AC"/>
+                </a:solidFill>
+                <a:latin typeface="Segoe UI"/>
+              </a:rPr>
+              <a:t>прил.</a:t>
+            </a:r>
+          </a:p>
+        </p:txBody>
+      </p:sp>
+    </p:spTree>
+  </p:cSld>
+  <p:clrMapOvr>
+    <a:masterClrMapping/>
+  </p:clrMapOvr>
+</p:sld>
+</file>
+
+<file path=ppt/slides/slide2.xml><?xml version="1.0" encoding="utf-8"?>
+<p:sld xmlns:a="http://schemas.openxmlformats.org/drawingml/2006/main" xmlns:p="http://schemas.openxmlformats.org/presentationml/2006/main" xmlns:r="http://schemas.openxmlformats.org/officeDocument/2006/relationships">
+  <p:cSld>
+    <p:bg>
+      <p:bgPr>
+        <a:solidFill>
+          <a:srgbClr val="101216"/>
+        </a:solidFill>
+        <a:effectLst/>
+      </p:bgPr>
+    </p:bg>
+    <p:spTree>
+      <p:nvGrpSpPr>
+        <p:cNvPr id="1" name=""/>
+        <p:cNvGrpSpPr/>
+        <p:nvPr/>
+      </p:nvGrpSpPr>
+      <p:grpSpPr/>
+      <p:sp>
+        <p:nvSpPr>
+          <p:cNvPr id="2" name="TextBox 1"/>
+          <p:cNvSpPr txBox="1"/>
+          <p:nvPr/>
+        </p:nvSpPr>
+        <p:spPr>
+          <a:xfrm>
+            <a:off x="457200" y="201168"/>
+            <a:ext cx="8229600" cy="274320"/>
+          </a:xfrm>
+          <a:prstGeom prst="rect">
+            <a:avLst/>
+          </a:prstGeom>
+          <a:noFill/>
+        </p:spPr>
+        <p:txBody>
+          <a:bodyPr wrap="square" anchor="t" lIns="18288" rIns="18288" tIns="18288" bIns="18288">
+            <a:spAutoFit/>
+          </a:bodyPr>
+          <a:lstStyle/>
+          <a:p>
+            <a:pPr algn="l">
+              <a:spcAft>
+                <a:spcPts val="600"/>
+              </a:spcAft>
+            </a:pPr>
+            <a:r>
+              <a:rPr sz="1200" b="1">
+                <a:solidFill>
+                  <a:srgbClr val="D9912E"/>
+                </a:solidFill>
+                <a:latin typeface="Segoe UI"/>
+              </a:rPr>
+              <a:t>02 · Задача и пользователь</a:t>
+            </a:r>
+          </a:p>
+        </p:txBody>
+      </p:sp>
+      <p:sp>
+        <p:nvSpPr>
+          <p:cNvPr id="3" name="TextBox 2"/>
+          <p:cNvSpPr txBox="1"/>
+          <p:nvPr/>
+        </p:nvSpPr>
+        <p:spPr>
+          <a:xfrm>
+            <a:off x="457200" y="457200"/>
+            <a:ext cx="11247120" cy="960120"/>
+          </a:xfrm>
+          <a:prstGeom prst="rect">
+            <a:avLst/>
+          </a:prstGeom>
+          <a:noFill/>
+        </p:spPr>
+        <p:txBody>
+          <a:bodyPr wrap="square" anchor="t" lIns="18288" rIns="18288" tIns="18288" bIns="18288">
+            <a:spAutoFit/>
+          </a:bodyPr>
+          <a:lstStyle/>
+          <a:p>
+            <a:pPr algn="l">
+              <a:spcAft>
+                <a:spcPts val="600"/>
+              </a:spcAft>
+            </a:pPr>
+            <a:r>
+              <a:rPr sz="2300" b="1">
+                <a:solidFill>
+                  <a:srgbClr val="EEEFF1"/>
+                </a:solidFill>
+                <a:latin typeface="Segoe UI"/>
+              </a:rPr>
+              <a:t>Пользователь — специалист по мониторингу: акватория и дата → проверка зон → сравнение с полем → выгрузка</a:t>
+            </a:r>
+          </a:p>
+        </p:txBody>
+      </p:sp>
+      <p:sp>
+        <p:nvSpPr>
+          <p:cNvPr id="4" name="TextBox 3"/>
+          <p:cNvSpPr txBox="1"/>
+          <p:nvPr/>
+        </p:nvSpPr>
+        <p:spPr>
+          <a:xfrm>
+            <a:off x="457200" y="1600200"/>
+            <a:ext cx="5577840" cy="4572000"/>
+          </a:xfrm>
+          <a:prstGeom prst="rect">
+            <a:avLst/>
+          </a:prstGeom>
+          <a:noFill/>
+        </p:spPr>
+        <p:txBody>
+          <a:bodyPr wrap="square" anchor="t" lIns="18288" rIns="18288" tIns="18288" bIns="18288">
+            <a:spAutoFit/>
+          </a:bodyPr>
+          <a:lstStyle/>
+          <a:p>
+            <a:pPr algn="l">
+              <a:spcAft>
+                <a:spcPts val="1000"/>
+              </a:spcAft>
+            </a:pPr>
+            <a:r>
+              <a:rPr sz="1600" b="0">
+                <a:solidFill>
+                  <a:srgbClr val="EEEFF1"/>
+                </a:solidFill>
+                <a:latin typeface="Segoe UI"/>
+              </a:rPr>
+              <a:t>• Выбирает акваторию и дату, видит полевые измерения, снимки-кандидаты и маску качества</a:t>
+            </a:r>
+          </a:p>
+          <a:p>
+            <a:pPr algn="l">
+              <a:spcAft>
+                <a:spcPts val="1000"/>
+              </a:spcAft>
+            </a:pPr>
+            <a:r>
+              <a:rPr sz="1600" b="0">
+                <a:solidFill>
+                  <a:srgbClr val="EEEFF1"/>
+                </a:solidFill>
+                <a:latin typeface="Segoe UI"/>
+              </a:rPr>
+              <a:t>• Смотрит, где детектор нашёл подозрительные пиксели, и почему пара «снимок ↔ поле» принята или отклонена</a:t>
+            </a:r>
+          </a:p>
+          <a:p>
+            <a:pPr algn="l">
+              <a:spcAft>
+                <a:spcPts val="1000"/>
+              </a:spcAft>
+            </a:pPr>
+            <a:r>
+              <a:rPr sz="1600" b="0">
+                <a:solidFill>
+                  <a:srgbClr val="EEEFF1"/>
+                </a:solidFill>
+                <a:latin typeface="Segoe UI"/>
+              </a:rPr>
+              <a:t>• Сравнивает с полевым измерением (шт./км² с интервалом), сохраняет запрос, выгружает GeoJSON/CSV</a:t>
+            </a:r>
+          </a:p>
+          <a:p>
+            <a:pPr algn="l">
+              <a:spcAft>
+                <a:spcPts val="1000"/>
+              </a:spcAft>
+            </a:pPr>
+            <a:r>
+              <a:rPr sz="1600" b="0">
+                <a:solidFill>
+                  <a:srgbClr val="EEEFF1"/>
+                </a:solidFill>
+                <a:latin typeface="Segoe UI"/>
+              </a:rPr>
+              <a:t>• Измерение, оценка по полевым данным и площадь маски — разные поля везде: в API, карточке, легенде, выгрузке</a:t>
+            </a:r>
+          </a:p>
+        </p:txBody>
+      </p:sp>
+      <p:pic>
+        <p:nvPicPr>
+          <p:cNvPr id="5" name="Picture 4" descr="01_overview.jpg"/>
+          <p:cNvPicPr>
+            <a:picLocks noChangeAspect="1"/>
+          </p:cNvPicPr>
+          <p:nvPr/>
+        </p:nvPicPr>
+        <p:blipFill>
+          <a:blip r:embed="rId2"/>
+          <a:stretch>
+            <a:fillRect/>
+          </a:stretch>
+        </p:blipFill>
+        <p:spPr>
+          <a:xfrm>
+            <a:off x="6400800" y="1645920"/>
+            <a:ext cx="5349240" cy="3007479"/>
+          </a:xfrm>
+          <a:prstGeom prst="rect">
+            <a:avLst/>
+          </a:prstGeom>
+        </p:spPr>
+      </p:pic>
+      <p:sp>
+        <p:nvSpPr>
+          <p:cNvPr id="6" name="TextBox 5"/>
+          <p:cNvSpPr txBox="1"/>
+          <p:nvPr/>
+        </p:nvSpPr>
+        <p:spPr>
+          <a:xfrm>
+            <a:off x="6400800" y="4699119"/>
+            <a:ext cx="5349240" cy="548640"/>
+          </a:xfrm>
+          <a:prstGeom prst="rect">
+            <a:avLst/>
+          </a:prstGeom>
+          <a:noFill/>
+        </p:spPr>
+        <p:txBody>
+          <a:bodyPr wrap="square" anchor="t" lIns="18288" rIns="18288" tIns="18288" bIns="18288">
+            <a:spAutoFit/>
+          </a:bodyPr>
+          <a:lstStyle/>
+          <a:p>
+            <a:pPr algn="l">
+              <a:spcAft>
+                <a:spcPts val="600"/>
+              </a:spcAft>
+            </a:pPr>
+            <a:r>
+              <a:rPr sz="1200" b="0">
+                <a:solidFill>
+                  <a:srgbClr val="9AA1AC"/>
+                </a:solidFill>
+                <a:latin typeface="Segoe UI"/>
+              </a:rPr>
+              <a:t>Карта кейса: 935 наблюдений, 29 полос обследования со снимками-кандидатами</a:t>
+            </a:r>
+          </a:p>
+        </p:txBody>
+      </p:sp>
+      <p:sp>
+        <p:nvSpPr>
+          <p:cNvPr id="7" name="TextBox 6"/>
+          <p:cNvSpPr txBox="1"/>
+          <p:nvPr/>
+        </p:nvSpPr>
+        <p:spPr>
+          <a:xfrm>
+            <a:off x="457200" y="6355080"/>
+            <a:ext cx="10515600" cy="320040"/>
+          </a:xfrm>
+          <a:prstGeom prst="rect">
+            <a:avLst/>
+          </a:prstGeom>
+          <a:noFill/>
+        </p:spPr>
+        <p:txBody>
+          <a:bodyPr wrap="square" anchor="t" lIns="18288" rIns="18288" tIns="18288" bIns="18288">
+            <a:spAutoFit/>
+          </a:bodyPr>
+          <a:lstStyle/>
+          <a:p>
+            <a:pPr algn="l">
+              <a:spcAft>
+                <a:spcPts val="600"/>
+              </a:spcAft>
+            </a:pPr>
+            <a:r>
+              <a:rPr sz="1000" b="0">
+                <a:solidFill>
+                  <a:srgbClr val="9AA1AC"/>
+                </a:solidFill>
+                <a:latin typeface="Segoe UI"/>
+              </a:rPr>
+              <a:t>Источник: README.md §1, §8; docs/CONTRACTS_V3.md</a:t>
+            </a:r>
+          </a:p>
+        </p:txBody>
+      </p:sp>
+      <p:sp>
+        <p:nvSpPr>
+          <p:cNvPr id="8" name="TextBox 7"/>
+          <p:cNvSpPr txBox="1"/>
+          <p:nvPr/>
+        </p:nvSpPr>
+        <p:spPr>
+          <a:xfrm>
+            <a:off x="11155680" y="6355080"/>
+            <a:ext cx="640080" cy="320040"/>
+          </a:xfrm>
+          <a:prstGeom prst="rect">
+            <a:avLst/>
+          </a:prstGeom>
+          <a:noFill/>
+        </p:spPr>
+        <p:txBody>
+          <a:bodyPr wrap="square" anchor="t" lIns="18288" rIns="18288" tIns="18288" bIns="18288">
+            <a:spAutoFit/>
+          </a:bodyPr>
+          <a:lstStyle/>
+          <a:p>
+            <a:pPr algn="r">
+              <a:spcAft>
+                <a:spcPts val="600"/>
+              </a:spcAft>
+            </a:pPr>
+            <a:r>
+              <a:rPr sz="1000" b="0">
+                <a:solidFill>
+                  <a:srgbClr val="9AA1AC"/>
+                </a:solidFill>
+                <a:latin typeface="Segoe UI"/>
+              </a:rPr>
+              <a:t>0:19</a:t>
+            </a:r>
+          </a:p>
+        </p:txBody>
+      </p:sp>
+    </p:spTree>
+  </p:cSld>
+  <p:clrMapOvr>
+    <a:masterClrMapping/>
+  </p:clrMapOvr>
+</p:sld>
+</file>
+
+<file path=ppt/slides/slide20.xml><?xml version="1.0" encoding="utf-8"?>
+<p:sld xmlns:a="http://schemas.openxmlformats.org/drawingml/2006/main" xmlns:p="http://schemas.openxmlformats.org/presentationml/2006/main" xmlns:r="http://schemas.openxmlformats.org/officeDocument/2006/relationships">
+  <p:cSld>
+    <p:bg>
+      <p:bgPr>
+        <a:solidFill>
+          <a:srgbClr val="101216"/>
+        </a:solidFill>
+        <a:effectLst/>
+      </p:bgPr>
+    </p:bg>
+    <p:spTree>
+      <p:nvGrpSpPr>
+        <p:cNvPr id="1" name=""/>
+        <p:cNvGrpSpPr/>
+        <p:nvPr/>
+      </p:nvGrpSpPr>
+      <p:grpSpPr/>
+      <p:sp>
+        <p:nvSpPr>
+          <p:cNvPr id="2" name="TextBox 1"/>
+          <p:cNvSpPr txBox="1"/>
+          <p:nvPr/>
+        </p:nvSpPr>
+        <p:spPr>
+          <a:xfrm>
+            <a:off x="457200" y="201168"/>
+            <a:ext cx="8229600" cy="274320"/>
+          </a:xfrm>
+          <a:prstGeom prst="rect">
+            <a:avLst/>
+          </a:prstGeom>
+          <a:noFill/>
+        </p:spPr>
+        <p:txBody>
+          <a:bodyPr wrap="square" anchor="t" lIns="18288" rIns="18288" tIns="18288" bIns="18288">
+            <a:spAutoFit/>
+          </a:bodyPr>
+          <a:lstStyle/>
+          <a:p>
+            <a:pPr algn="l">
+              <a:spcAft>
+                <a:spcPts val="600"/>
+              </a:spcAft>
+            </a:pPr>
+            <a:r>
+              <a:rPr sz="1200" b="1">
+                <a:solidFill>
+                  <a:srgbClr val="D9912E"/>
+                </a:solidFill>
+                <a:latin typeface="Segoe UI"/>
+              </a:rPr>
+              <a:t>20 · Приложение · Дополнительные функции</a:t>
+            </a:r>
+          </a:p>
+        </p:txBody>
+      </p:sp>
+      <p:sp>
+        <p:nvSpPr>
+          <p:cNvPr id="3" name="TextBox 2"/>
+          <p:cNvSpPr txBox="1"/>
+          <p:nvPr/>
+        </p:nvSpPr>
+        <p:spPr>
+          <a:xfrm>
+            <a:off x="457200" y="457200"/>
+            <a:ext cx="11247120" cy="960120"/>
+          </a:xfrm>
+          <a:prstGeom prst="rect">
+            <a:avLst/>
+          </a:prstGeom>
+          <a:noFill/>
+        </p:spPr>
+        <p:txBody>
+          <a:bodyPr wrap="square" anchor="t" lIns="18288" rIns="18288" tIns="18288" bIns="18288">
+            <a:spAutoFit/>
+          </a:bodyPr>
+          <a:lstStyle/>
+          <a:p>
+            <a:pPr algn="l">
+              <a:spcAft>
+                <a:spcPts val="600"/>
+              </a:spcAft>
+            </a:pPr>
+            <a:r>
+              <a:rPr sz="2600" b="1">
+                <a:solidFill>
+                  <a:srgbClr val="EEEFF1"/>
+                </a:solidFill>
+                <a:latin typeface="Segoe UI"/>
+              </a:rPr>
+              <a:t>«Подобрать снимок»: из правила дрейфа — инструмент планирования полевых работ под пролёт</a:t>
+            </a:r>
+          </a:p>
+        </p:txBody>
+      </p:sp>
+      <p:sp>
+        <p:nvSpPr>
+          <p:cNvPr id="4" name="TextBox 3"/>
+          <p:cNvSpPr txBox="1"/>
+          <p:nvPr/>
+        </p:nvSpPr>
+        <p:spPr>
+          <a:xfrm>
+            <a:off x="457200" y="1600200"/>
+            <a:ext cx="5577840" cy="4572000"/>
+          </a:xfrm>
+          <a:prstGeom prst="rect">
+            <a:avLst/>
+          </a:prstGeom>
+          <a:noFill/>
+        </p:spPr>
+        <p:txBody>
+          <a:bodyPr wrap="square" anchor="t" lIns="18288" rIns="18288" tIns="18288" bIns="18288">
+            <a:spAutoFit/>
+          </a:bodyPr>
+          <a:lstStyle/>
+          <a:p>
+            <a:pPr algn="l">
+              <a:spcAft>
+                <a:spcPts val="1000"/>
+              </a:spcAft>
+            </a:pPr>
+            <a:r>
+              <a:rPr sz="1600" b="0">
+                <a:solidFill>
+                  <a:srgbClr val="EEEFF1"/>
+                </a:solidFill>
+                <a:latin typeface="Segoe UI"/>
+              </a:rPr>
+              <a:t>• Окно синхронизации |dt| ≤ 4.17 ч; наивное окно ±1 сут даёт 29 «пар», синхронных 0</a:t>
+            </a:r>
+          </a:p>
+          <a:p>
+            <a:pPr algn="l">
+              <a:spcAft>
+                <a:spcPts val="1000"/>
+              </a:spcAft>
+            </a:pPr>
+            <a:r>
+              <a:rPr sz="1600" b="0">
+                <a:solidFill>
+                  <a:srgbClr val="EEEFF1"/>
+                </a:solidFill>
+                <a:latin typeface="Segoe UI"/>
+              </a:rPr>
+              <a:t>• Чёрное море без времени трансект: 12 событий получают окно UTC, у 8 полоса чистая по маскам</a:t>
+            </a:r>
+          </a:p>
+          <a:p>
+            <a:pPr algn="l">
+              <a:spcAft>
+                <a:spcPts val="1000"/>
+              </a:spcAft>
+            </a:pPr>
+            <a:r>
+              <a:rPr sz="1600" b="0">
+                <a:solidFill>
+                  <a:srgbClr val="EEEFF1"/>
+                </a:solidFill>
+                <a:latin typeface="Segoe UI"/>
+              </a:rPr>
+              <a:t>• Прогноз пролётов на архиве совпал с реальной съёмкой в 82 из 88 случаев (±5 мин)</a:t>
+            </a:r>
+          </a:p>
+          <a:p>
+            <a:pPr algn="l">
+              <a:spcAft>
+                <a:spcPts val="1000"/>
+              </a:spcAft>
+            </a:pPr>
+            <a:r>
+              <a:rPr sz="1600" b="0">
+                <a:solidFill>
+                  <a:srgbClr val="EEEFF1"/>
+                </a:solidFill>
+                <a:latin typeface="Segoe UI"/>
+              </a:rPr>
+              <a:t>• Геометрия трансект по PANGAEA: 104 события S2/S3, 108 сегментов; 4 прерванные трансекты — двумя сегментами</a:t>
+            </a:r>
+          </a:p>
+        </p:txBody>
+      </p:sp>
+      <p:pic>
+        <p:nvPicPr>
+          <p:cNvPr id="5" name="Picture 4" descr="04_pairfinder_transect.jpg"/>
+          <p:cNvPicPr>
+            <a:picLocks noChangeAspect="1"/>
+          </p:cNvPicPr>
+          <p:nvPr/>
+        </p:nvPicPr>
+        <p:blipFill>
+          <a:blip r:embed="rId2"/>
+          <a:stretch>
+            <a:fillRect/>
+          </a:stretch>
+        </p:blipFill>
+        <p:spPr>
+          <a:xfrm>
+            <a:off x="6914726" y="1645920"/>
+            <a:ext cx="4321386" cy="4023360"/>
+          </a:xfrm>
+          <a:prstGeom prst="rect">
+            <a:avLst/>
+          </a:prstGeom>
+        </p:spPr>
+      </p:pic>
+      <p:sp>
+        <p:nvSpPr>
+          <p:cNvPr id="6" name="TextBox 5"/>
+          <p:cNvSpPr txBox="1"/>
+          <p:nvPr/>
+        </p:nvSpPr>
+        <p:spPr>
+          <a:xfrm>
+            <a:off x="6400800" y="5715000"/>
+            <a:ext cx="5349240" cy="548640"/>
+          </a:xfrm>
+          <a:prstGeom prst="rect">
+            <a:avLst/>
+          </a:prstGeom>
+          <a:noFill/>
+        </p:spPr>
+        <p:txBody>
+          <a:bodyPr wrap="square" anchor="t" lIns="18288" rIns="18288" tIns="18288" bIns="18288">
+            <a:spAutoFit/>
+          </a:bodyPr>
+          <a:lstStyle/>
+          <a:p>
+            <a:pPr algn="l">
+              <a:spcAft>
+                <a:spcPts val="600"/>
+              </a:spcAft>
+            </a:pPr>
+            <a:r>
+              <a:rPr sz="1200" b="0">
+                <a:solidFill>
+                  <a:srgbClr val="9AA1AC"/>
+                </a:solidFill>
+                <a:latin typeface="Segoe UI"/>
+              </a:rPr>
+              <a:t>Саргассово море, T18: прерванная трансекта (2 сегмента) и «Подбор снимка» — сцен в окне нет</a:t>
+            </a:r>
+          </a:p>
+        </p:txBody>
+      </p:sp>
+      <p:sp>
+        <p:nvSpPr>
+          <p:cNvPr id="7" name="TextBox 6"/>
+          <p:cNvSpPr txBox="1"/>
+          <p:nvPr/>
+        </p:nvSpPr>
+        <p:spPr>
+          <a:xfrm>
+            <a:off x="457200" y="6355080"/>
+            <a:ext cx="10515600" cy="320040"/>
+          </a:xfrm>
+          <a:prstGeom prst="rect">
+            <a:avLst/>
+          </a:prstGeom>
+          <a:noFill/>
+        </p:spPr>
+        <p:txBody>
+          <a:bodyPr wrap="square" anchor="t" lIns="18288" rIns="18288" tIns="18288" bIns="18288">
+            <a:spAutoFit/>
+          </a:bodyPr>
+          <a:lstStyle/>
+          <a:p>
+            <a:pPr algn="l">
+              <a:spcAft>
+                <a:spcPts val="600"/>
+              </a:spcAft>
+            </a:pPr>
+            <a:r>
+              <a:rPr sz="1000" b="0">
+                <a:solidFill>
+                  <a:srgbClr val="9AA1AC"/>
+                </a:solidFill>
+                <a:latin typeface="Segoe UI"/>
+              </a:rPr>
+              <a:t>Источник: docs/EXTRA_FEATURES.md; reports/case_pairfinder/evidence.md; reports/case_geometry/summary.md</a:t>
+            </a:r>
+          </a:p>
+        </p:txBody>
+      </p:sp>
+      <p:sp>
+        <p:nvSpPr>
+          <p:cNvPr id="8" name="TextBox 7"/>
+          <p:cNvSpPr txBox="1"/>
+          <p:nvPr/>
+        </p:nvSpPr>
+        <p:spPr>
+          <a:xfrm>
+            <a:off x="11155680" y="6355080"/>
+            <a:ext cx="640080" cy="320040"/>
+          </a:xfrm>
+          <a:prstGeom prst="rect">
+            <a:avLst/>
+          </a:prstGeom>
+          <a:noFill/>
+        </p:spPr>
+        <p:txBody>
+          <a:bodyPr wrap="square" anchor="t" lIns="18288" rIns="18288" tIns="18288" bIns="18288">
+            <a:spAutoFit/>
+          </a:bodyPr>
+          <a:lstStyle/>
+          <a:p>
+            <a:pPr algn="r">
+              <a:spcAft>
+                <a:spcPts val="600"/>
+              </a:spcAft>
+            </a:pPr>
+            <a:r>
+              <a:rPr sz="1000" b="0">
+                <a:solidFill>
+                  <a:srgbClr val="9AA1AC"/>
+                </a:solidFill>
+                <a:latin typeface="Segoe UI"/>
+              </a:rPr>
+              <a:t>прил.</a:t>
+            </a:r>
+          </a:p>
+        </p:txBody>
+      </p:sp>
+    </p:spTree>
+  </p:cSld>
+  <p:clrMapOvr>
+    <a:masterClrMapping/>
+  </p:clrMapOvr>
+</p:sld>
+</file>
+
+<file path=ppt/slides/slide3.xml><?xml version="1.0" encoding="utf-8"?>
+<p:sld xmlns:a="http://schemas.openxmlformats.org/drawingml/2006/main" xmlns:p="http://schemas.openxmlformats.org/presentationml/2006/main" xmlns:r="http://schemas.openxmlformats.org/officeDocument/2006/relationships">
+  <p:cSld>
+    <p:bg>
+      <p:bgPr>
+        <a:solidFill>
+          <a:srgbClr val="101216"/>
+        </a:solidFill>
+        <a:effectLst/>
+      </p:bgPr>
+    </p:bg>
+    <p:spTree>
+      <p:nvGrpSpPr>
+        <p:cNvPr id="1" name=""/>
+        <p:cNvGrpSpPr/>
+        <p:nvPr/>
+      </p:nvGrpSpPr>
+      <p:grpSpPr/>
+      <p:sp>
+        <p:nvSpPr>
+          <p:cNvPr id="2" name="TextBox 1"/>
+          <p:cNvSpPr txBox="1"/>
+          <p:nvPr/>
+        </p:nvSpPr>
+        <p:spPr>
+          <a:xfrm>
+            <a:off x="457200" y="201168"/>
+            <a:ext cx="8229600" cy="274320"/>
+          </a:xfrm>
+          <a:prstGeom prst="rect">
+            <a:avLst/>
+          </a:prstGeom>
+          <a:noFill/>
+        </p:spPr>
+        <p:txBody>
+          <a:bodyPr wrap="square" anchor="t" lIns="18288" rIns="18288" tIns="18288" bIns="18288">
+            <a:spAutoFit/>
+          </a:bodyPr>
+          <a:lstStyle/>
+          <a:p>
+            <a:pPr algn="l">
+              <a:spcAft>
+                <a:spcPts val="600"/>
+              </a:spcAft>
+            </a:pPr>
+            <a:r>
+              <a:rPr sz="1200" b="1">
+                <a:solidFill>
+                  <a:srgbClr val="D9912E"/>
+                </a:solidFill>
+                <a:latin typeface="Segoe UI"/>
+              </a:rPr>
+              <a:t>03 · Целевая величина</a:t>
+            </a:r>
+          </a:p>
+        </p:txBody>
+      </p:sp>
+      <p:sp>
+        <p:nvSpPr>
+          <p:cNvPr id="3" name="TextBox 2"/>
+          <p:cNvSpPr txBox="1"/>
+          <p:nvPr/>
+        </p:nvSpPr>
+        <p:spPr>
+          <a:xfrm>
+            <a:off x="457200" y="457200"/>
+            <a:ext cx="11247120" cy="960120"/>
+          </a:xfrm>
+          <a:prstGeom prst="rect">
+            <a:avLst/>
+          </a:prstGeom>
+          <a:noFill/>
+        </p:spPr>
+        <p:txBody>
+          <a:bodyPr wrap="square" anchor="t" lIns="18288" rIns="18288" tIns="18288" bIns="18288">
+            <a:spAutoFit/>
+          </a:bodyPr>
+          <a:lstStyle/>
+          <a:p>
+            <a:pPr algn="l">
+              <a:spcAft>
+                <a:spcPts val="600"/>
+              </a:spcAft>
+            </a:pPr>
+            <a:r>
+              <a:rPr sz="2300" b="1">
+                <a:solidFill>
+                  <a:srgbClr val="EEEFF1"/>
+                </a:solidFill>
+                <a:latin typeface="Segoe UI"/>
+              </a:rPr>
+              <a:t>Целевая величина — суммарный плавающий пластик &gt; 2 см, шт./км², визуальная полоса 10 м (S2, Саргассово море)</a:t>
+            </a:r>
+          </a:p>
+        </p:txBody>
+      </p:sp>
+      <p:sp>
+        <p:nvSpPr>
+          <p:cNvPr id="4" name="TextBox 3"/>
+          <p:cNvSpPr txBox="1"/>
+          <p:nvPr/>
+        </p:nvSpPr>
+        <p:spPr>
+          <a:xfrm>
+            <a:off x="457200" y="1600200"/>
+            <a:ext cx="5577840" cy="4572000"/>
+          </a:xfrm>
+          <a:prstGeom prst="rect">
+            <a:avLst/>
+          </a:prstGeom>
+          <a:noFill/>
+        </p:spPr>
+        <p:txBody>
+          <a:bodyPr wrap="square" anchor="t" lIns="18288" rIns="18288" tIns="18288" bIns="18288">
+            <a:spAutoFit/>
+          </a:bodyPr>
+          <a:lstStyle/>
+          <a:p>
+            <a:pPr algn="l">
+              <a:spcAft>
+                <a:spcPts val="1000"/>
+              </a:spcAft>
+            </a:pPr>
+            <a:r>
+              <a:rPr sz="1600" b="0">
+                <a:solidFill>
+                  <a:srgbClr val="EEEFF1"/>
+                </a:solidFill>
+                <a:latin typeface="Segoe UI"/>
+              </a:rPr>
+              <a:t>• 63 события за 26 дней (2015-04-01 – 2015-04-26); у всех есть N и A → C = N/A проверяема</a:t>
+            </a:r>
+          </a:p>
+          <a:p>
+            <a:pPr algn="l">
+              <a:spcAft>
+                <a:spcPts val="1000"/>
+              </a:spcAft>
+            </a:pPr>
+            <a:r>
+              <a:rPr sz="1600" b="0">
+                <a:solidFill>
+                  <a:srgbClr val="EEEFF1"/>
+                </a:solidFill>
+                <a:latin typeface="Segoe UI"/>
+              </a:rPr>
+              <a:t>• N 1–55 предметов, A 0.092–0.255 км²: масштаб контрольного примера 12 / 0.20 км²</a:t>
+            </a:r>
+          </a:p>
+          <a:p>
+            <a:pPr algn="l">
+              <a:spcAft>
+                <a:spcPts val="1000"/>
+              </a:spcAft>
+            </a:pPr>
+            <a:r>
+              <a:rPr sz="1600" b="0">
+                <a:solidFill>
+                  <a:srgbClr val="EEEFF1"/>
+                </a:solidFill>
+                <a:latin typeface="Segoe UI"/>
+              </a:rPr>
+              <a:t>• Второй профиль — трал S1, 5–50 см, 83 события: только полевая проверка, со S2 не смешиваем</a:t>
+            </a:r>
+          </a:p>
+          <a:p>
+            <a:pPr algn="l">
+              <a:spcAft>
+                <a:spcPts val="1000"/>
+              </a:spcAft>
+            </a:pPr>
+            <a:r>
+              <a:rPr sz="1600" b="0">
+                <a:solidFill>
+                  <a:srgbClr val="EEEFF1"/>
+                </a:solidFill>
+                <a:latin typeface="Segoe UI"/>
+              </a:rPr>
+              <a:t>• all_litter (S3, S4) — весь мусор всех материалов, не пластик: только в эксперименте на снимках</a:t>
+            </a:r>
+          </a:p>
+          <a:p>
+            <a:pPr algn="l">
+              <a:spcAft>
+                <a:spcPts val="1000"/>
+              </a:spcAft>
+            </a:pPr>
+            <a:r>
+              <a:rPr sz="1600" b="0">
+                <a:solidFill>
+                  <a:srgbClr val="EEEFF1"/>
+                </a:solidFill>
+                <a:latin typeface="Segoe UI"/>
+              </a:rPr>
+              <a:t>• Детектор: класс Marine Debris MARIDA = любой плавающий мусор; пластик отдельно он не выделяет</a:t>
+            </a:r>
+          </a:p>
+        </p:txBody>
+      </p:sp>
+      <p:sp>
+        <p:nvSpPr>
+          <p:cNvPr id="5" name="Rectangle 4"/>
+          <p:cNvSpPr/>
+          <p:nvPr/>
+        </p:nvSpPr>
+        <p:spPr>
+          <a:xfrm>
+            <a:off x="6400800" y="1691640"/>
+            <a:ext cx="5349240" cy="1554480"/>
+          </a:xfrm>
+          <a:prstGeom prst="rect">
+            <a:avLst/>
+          </a:prstGeom>
+          <a:solidFill>
+            <a:srgbClr val="1B1E24"/>
+          </a:solidFill>
+          <a:ln>
+            <a:noFill/>
+          </a:ln>
+          <a:effectLst/>
+        </p:spPr>
+        <p:style>
+          <a:lnRef idx="1">
+            <a:schemeClr val="accent1"/>
+          </a:lnRef>
+          <a:fillRef idx="3">
+            <a:schemeClr val="accent1"/>
+          </a:fillRef>
+          <a:effectRef idx="2">
+            <a:schemeClr val="accent1"/>
+          </a:effectRef>
+          <a:fontRef idx="minor">
+            <a:schemeClr val="lt1"/>
+          </a:fontRef>
+        </p:style>
+        <p:txBody>
+          <a:bodyPr rtlCol="0" anchor="ctr"/>
+          <a:lstStyle/>
+          <a:p>
+            <a:pPr algn="ctr"/>
+          </a:p>
+        </p:txBody>
+      </p:sp>
+      <p:sp>
+        <p:nvSpPr>
+          <p:cNvPr id="6" name="TextBox 5"/>
+          <p:cNvSpPr txBox="1"/>
+          <p:nvPr/>
+        </p:nvSpPr>
+        <p:spPr>
+          <a:xfrm>
+            <a:off x="6675120" y="1783080"/>
+            <a:ext cx="4800600" cy="822960"/>
+          </a:xfrm>
+          <a:prstGeom prst="rect">
+            <a:avLst/>
+          </a:prstGeom>
+          <a:noFill/>
+        </p:spPr>
+        <p:txBody>
+          <a:bodyPr wrap="square" anchor="t" lIns="18288" rIns="18288" tIns="18288" bIns="18288">
+            <a:spAutoFit/>
+          </a:bodyPr>
+          <a:lstStyle/>
+          <a:p>
+            <a:pPr algn="l">
+              <a:spcAft>
+                <a:spcPts val="600"/>
+              </a:spcAft>
+            </a:pPr>
+            <a:r>
+              <a:rPr sz="4800" b="1">
+                <a:solidFill>
+                  <a:srgbClr val="D9912E"/>
+                </a:solidFill>
+                <a:latin typeface="Segoe UI"/>
+              </a:rPr>
+              <a:t>36.1</a:t>
+            </a:r>
+          </a:p>
+        </p:txBody>
+      </p:sp>
+      <p:sp>
+        <p:nvSpPr>
+          <p:cNvPr id="7" name="TextBox 6"/>
+          <p:cNvSpPr txBox="1"/>
+          <p:nvPr/>
+        </p:nvSpPr>
+        <p:spPr>
+          <a:xfrm>
+            <a:off x="6675120" y="2606040"/>
+            <a:ext cx="4800600" cy="594360"/>
+          </a:xfrm>
+          <a:prstGeom prst="rect">
+            <a:avLst/>
+          </a:prstGeom>
+          <a:noFill/>
+        </p:spPr>
+        <p:txBody>
+          <a:bodyPr wrap="square" anchor="t" lIns="18288" rIns="18288" tIns="18288" bIns="18288">
+            <a:spAutoFit/>
+          </a:bodyPr>
+          <a:lstStyle/>
+          <a:p>
+            <a:pPr algn="l">
+              <a:spcAft>
+                <a:spcPts val="600"/>
+              </a:spcAft>
+            </a:pPr>
+            <a:r>
+              <a:rPr sz="1300" b="0">
+                <a:solidFill>
+                  <a:srgbClr val="EEEFF1"/>
+                </a:solidFill>
+                <a:latin typeface="Segoe UI"/>
+              </a:rPr>
+              <a:t>шт./км² — медиана C профиля S2 (диапазон 4.3–222.7)</a:t>
+            </a:r>
+          </a:p>
+        </p:txBody>
+      </p:sp>
+      <p:sp>
+        <p:nvSpPr>
+          <p:cNvPr id="8" name="TextBox 7"/>
+          <p:cNvSpPr txBox="1"/>
+          <p:nvPr/>
+        </p:nvSpPr>
+        <p:spPr>
+          <a:xfrm>
+            <a:off x="457200" y="6355080"/>
+            <a:ext cx="10515600" cy="320040"/>
+          </a:xfrm>
+          <a:prstGeom prst="rect">
+            <a:avLst/>
+          </a:prstGeom>
+          <a:noFill/>
+        </p:spPr>
+        <p:txBody>
+          <a:bodyPr wrap="square" anchor="t" lIns="18288" rIns="18288" tIns="18288" bIns="18288">
+            <a:spAutoFit/>
+          </a:bodyPr>
+          <a:lstStyle/>
+          <a:p>
+            <a:pPr algn="l">
+              <a:spcAft>
+                <a:spcPts val="600"/>
+              </a:spcAft>
+            </a:pPr>
+            <a:r>
+              <a:rPr sz="1000" b="0">
+                <a:solidFill>
+                  <a:srgbClr val="9AA1AC"/>
+                </a:solidFill>
+                <a:latin typeface="Segoe UI"/>
+              </a:rPr>
+              <a:t>Источник: configs/case_selection.yaml; README.md §1; reports/report.md §1</a:t>
+            </a:r>
+          </a:p>
+        </p:txBody>
+      </p:sp>
+      <p:sp>
+        <p:nvSpPr>
+          <p:cNvPr id="9" name="TextBox 8"/>
+          <p:cNvSpPr txBox="1"/>
+          <p:nvPr/>
+        </p:nvSpPr>
+        <p:spPr>
+          <a:xfrm>
+            <a:off x="11155680" y="6355080"/>
+            <a:ext cx="640080" cy="320040"/>
+          </a:xfrm>
+          <a:prstGeom prst="rect">
+            <a:avLst/>
+          </a:prstGeom>
+          <a:noFill/>
+        </p:spPr>
+        <p:txBody>
+          <a:bodyPr wrap="square" anchor="t" lIns="18288" rIns="18288" tIns="18288" bIns="18288">
+            <a:spAutoFit/>
+          </a:bodyPr>
+          <a:lstStyle/>
+          <a:p>
+            <a:pPr algn="r">
+              <a:spcAft>
+                <a:spcPts val="600"/>
+              </a:spcAft>
+            </a:pPr>
+            <a:r>
+              <a:rPr sz="1000" b="0">
+                <a:solidFill>
+                  <a:srgbClr val="9AA1AC"/>
+                </a:solidFill>
+                <a:latin typeface="Segoe UI"/>
+              </a:rPr>
+              <a:t>0:33</a:t>
+            </a:r>
+          </a:p>
+        </p:txBody>
+      </p:sp>
+    </p:spTree>
+  </p:cSld>
+  <p:clrMapOvr>
+    <a:masterClrMapping/>
+  </p:clrMapOvr>
+</p:sld>
+</file>
+
+<file path=ppt/slides/slide4.xml><?xml version="1.0" encoding="utf-8"?>
+<p:sld xmlns:a="http://schemas.openxmlformats.org/drawingml/2006/main" xmlns:p="http://schemas.openxmlformats.org/presentationml/2006/main" xmlns:r="http://schemas.openxmlformats.org/officeDocument/2006/relationships">
+  <p:cSld>
+    <p:bg>
+      <p:bgPr>
+        <a:solidFill>
+          <a:srgbClr val="101216"/>
+        </a:solidFill>
+        <a:effectLst/>
+      </p:bgPr>
+    </p:bg>
+    <p:spTree>
+      <p:nvGrpSpPr>
+        <p:cNvPr id="1" name=""/>
+        <p:cNvGrpSpPr/>
+        <p:nvPr/>
+      </p:nvGrpSpPr>
+      <p:grpSpPr/>
+      <p:sp>
+        <p:nvSpPr>
+          <p:cNvPr id="2" name="TextBox 1"/>
+          <p:cNvSpPr txBox="1"/>
+          <p:nvPr/>
+        </p:nvSpPr>
+        <p:spPr>
+          <a:xfrm>
+            <a:off x="457200" y="201168"/>
+            <a:ext cx="8229600" cy="274320"/>
+          </a:xfrm>
+          <a:prstGeom prst="rect">
+            <a:avLst/>
+          </a:prstGeom>
+          <a:noFill/>
+        </p:spPr>
+        <p:txBody>
+          <a:bodyPr wrap="square" anchor="t" lIns="18288" rIns="18288" tIns="18288" bIns="18288">
+            <a:spAutoFit/>
+          </a:bodyPr>
+          <a:lstStyle/>
+          <a:p>
+            <a:pPr algn="l">
+              <a:spcAft>
+                <a:spcPts val="600"/>
+              </a:spcAft>
+            </a:pPr>
+            <a:r>
+              <a:rPr sz="1200" b="1">
+                <a:solidFill>
+                  <a:srgbClr val="D9912E"/>
+                </a:solidFill>
+                <a:latin typeface="Segoe UI"/>
+              </a:rPr>
+              <a:t>04 · Реестр пар и окно синхронизации</a:t>
+            </a:r>
+          </a:p>
+        </p:txBody>
+      </p:sp>
+      <p:sp>
+        <p:nvSpPr>
+          <p:cNvPr id="3" name="TextBox 2"/>
+          <p:cNvSpPr txBox="1"/>
+          <p:nvPr/>
+        </p:nvSpPr>
+        <p:spPr>
+          <a:xfrm>
+            <a:off x="457200" y="457200"/>
+            <a:ext cx="11247120" cy="960120"/>
+          </a:xfrm>
+          <a:prstGeom prst="rect">
+            <a:avLst/>
+          </a:prstGeom>
+          <a:noFill/>
+        </p:spPr>
+        <p:txBody>
+          <a:bodyPr wrap="square" anchor="t" lIns="18288" rIns="18288" tIns="18288" bIns="18288">
+            <a:spAutoFit/>
+          </a:bodyPr>
+          <a:lstStyle/>
+          <a:p>
+            <a:pPr algn="l">
+              <a:spcAft>
+                <a:spcPts val="600"/>
+              </a:spcAft>
+            </a:pPr>
+            <a:r>
+              <a:rPr sz="2600" b="1">
+                <a:solidFill>
+                  <a:srgbClr val="EEEFF1"/>
+                </a:solidFill>
+                <a:latin typeface="Segoe UI"/>
+              </a:rPr>
+              <a:t>318 событий → 29 по метаданным → 12 по маскам → 0 синхронных с учётом дрейфа</a:t>
+            </a:r>
+          </a:p>
+        </p:txBody>
+      </p:sp>
+      <p:sp>
+        <p:nvSpPr>
+          <p:cNvPr id="4" name="TextBox 3"/>
+          <p:cNvSpPr txBox="1"/>
+          <p:nvPr/>
+        </p:nvSpPr>
+        <p:spPr>
+          <a:xfrm>
+            <a:off x="457200" y="1600200"/>
+            <a:ext cx="5577840" cy="4572000"/>
+          </a:xfrm>
+          <a:prstGeom prst="rect">
+            <a:avLst/>
+          </a:prstGeom>
+          <a:noFill/>
+        </p:spPr>
+        <p:txBody>
+          <a:bodyPr wrap="square" anchor="t" lIns="18288" rIns="18288" tIns="18288" bIns="18288">
+            <a:spAutoFit/>
+          </a:bodyPr>
+          <a:lstStyle/>
+          <a:p>
+            <a:pPr algn="l">
+              <a:spcAft>
+                <a:spcPts val="1000"/>
+              </a:spcAft>
+            </a:pPr>
+            <a:r>
+              <a:rPr sz="1600" b="0">
+                <a:solidFill>
+                  <a:srgbClr val="EEEFF1"/>
+                </a:solidFill>
+                <a:latin typeface="Segoe UI"/>
+              </a:rPr>
+              <a:t>• Для пластика снимков нет: S1 и S2 — открытый океан 2015 г., Sentinel-2A снимает с конца июня 2015 (S1 — 0 сцен в ±5 сут, S2 — 1)</a:t>
+            </a:r>
+          </a:p>
+          <a:p>
+            <a:pPr algn="l">
+              <a:spcAft>
+                <a:spcPts val="1000"/>
+              </a:spcAft>
+            </a:pPr>
+            <a:r>
+              <a:rPr sz="1600" b="0">
+                <a:solidFill>
+                  <a:srgbClr val="EEEFF1"/>
+                </a:solidFill>
+                <a:latin typeface="Segoe UI"/>
+              </a:rPr>
+              <a:t>• Дрейф: при типичных 0.2 м/с вода смещается на 23.4 км (медиана) — допуск 3 км держит только |dt| ≤ 4.2 ч</a:t>
+            </a:r>
+          </a:p>
+          <a:p>
+            <a:pPr algn="l">
+              <a:spcAft>
+                <a:spcPts val="1000"/>
+              </a:spcAft>
+            </a:pPr>
+            <a:r>
+              <a:rPr sz="1600" b="0">
+                <a:solidFill>
+                  <a:srgbClr val="EEEFF1"/>
+                </a:solidFill>
+                <a:latin typeface="Segoe UI"/>
+              </a:rPr>
+              <a:t>• Маски в полосе: блик 10, облака 6 (у 4 флаг QA Landsat сомнителен), покрытие 1</a:t>
+            </a:r>
+          </a:p>
+          <a:p>
+            <a:pPr algn="l">
+              <a:spcAft>
+                <a:spcPts val="1000"/>
+              </a:spcAft>
+            </a:pPr>
+            <a:r>
+              <a:rPr sz="1600" b="0">
+                <a:solidFill>
+                  <a:srgbClr val="EEEFF1"/>
+                </a:solidFill>
+                <a:latin typeface="Segoe UI"/>
+              </a:rPr>
+              <a:t>• Реестр: строка на каждое из 318 событий, этап отказа и все причины</a:t>
+            </a:r>
+          </a:p>
+        </p:txBody>
+      </p:sp>
+      <p:sp>
+        <p:nvSpPr>
+          <p:cNvPr id="5" name="TextBox 4"/>
+          <p:cNvSpPr txBox="1"/>
+          <p:nvPr/>
+        </p:nvSpPr>
+        <p:spPr>
+          <a:xfrm>
+            <a:off x="6400800" y="1691640"/>
+            <a:ext cx="5349240" cy="365760"/>
+          </a:xfrm>
+          <a:prstGeom prst="rect">
+            <a:avLst/>
+          </a:prstGeom>
+          <a:noFill/>
+        </p:spPr>
+        <p:txBody>
+          <a:bodyPr wrap="square" anchor="t" lIns="18288" rIns="18288" tIns="18288" bIns="18288">
+            <a:spAutoFit/>
+          </a:bodyPr>
+          <a:lstStyle/>
+          <a:p>
+            <a:pPr algn="l">
+              <a:spcAft>
+                <a:spcPts val="600"/>
+              </a:spcAft>
+            </a:pPr>
+            <a:r>
+              <a:rPr sz="1400" b="0">
+                <a:solidFill>
+                  <a:srgbClr val="9AA1AC"/>
+                </a:solidFill>
+                <a:latin typeface="Segoe UI"/>
+              </a:rPr>
+              <a:t>События, у которых остаётся пара</a:t>
+            </a:r>
+          </a:p>
+        </p:txBody>
+      </p:sp>
+      <p:sp>
+        <p:nvSpPr>
+          <p:cNvPr id="6" name="TextBox 5"/>
+          <p:cNvSpPr txBox="1"/>
+          <p:nvPr/>
+        </p:nvSpPr>
+        <p:spPr>
+          <a:xfrm>
+            <a:off x="6400800" y="2148840"/>
+            <a:ext cx="2155240" cy="384048"/>
+          </a:xfrm>
+          <a:prstGeom prst="rect">
+            <a:avLst/>
+          </a:prstGeom>
+          <a:noFill/>
+        </p:spPr>
+        <p:txBody>
+          <a:bodyPr wrap="square" anchor="ctr" lIns="18288" rIns="18288" tIns="18288" bIns="18288">
+            <a:spAutoFit/>
+          </a:bodyPr>
+          <a:lstStyle/>
+          <a:p>
+            <a:pPr algn="l">
+              <a:spcAft>
+                <a:spcPts val="600"/>
+              </a:spcAft>
+            </a:pPr>
+            <a:r>
+              <a:rPr sz="1300" b="0">
+                <a:solidFill>
+                  <a:srgbClr val="EEEFF1"/>
+                </a:solidFill>
+                <a:latin typeface="Segoe UI"/>
+              </a:rPr>
+              <a:t>все события</a:t>
+            </a:r>
+          </a:p>
+        </p:txBody>
+      </p:sp>
+      <p:sp>
+        <p:nvSpPr>
+          <p:cNvPr id="7" name="Rectangle 6"/>
+          <p:cNvSpPr/>
+          <p:nvPr/>
+        </p:nvSpPr>
+        <p:spPr>
+          <a:xfrm>
+            <a:off x="8647480" y="2212848"/>
+            <a:ext cx="2279599" cy="274320"/>
+          </a:xfrm>
+          <a:prstGeom prst="rect">
+            <a:avLst/>
+          </a:prstGeom>
+          <a:solidFill>
+            <a:srgbClr val="5B6370"/>
+          </a:solidFill>
+          <a:ln>
+            <a:noFill/>
+          </a:ln>
+          <a:effectLst/>
+        </p:spPr>
+        <p:style>
+          <a:lnRef idx="1">
+            <a:schemeClr val="accent1"/>
+          </a:lnRef>
+          <a:fillRef idx="3">
+            <a:schemeClr val="accent1"/>
+          </a:fillRef>
+          <a:effectRef idx="2">
+            <a:schemeClr val="accent1"/>
+          </a:effectRef>
+          <a:fontRef idx="minor">
+            <a:schemeClr val="lt1"/>
+          </a:fontRef>
+        </p:style>
+        <p:txBody>
+          <a:bodyPr rtlCol="0" anchor="ctr"/>
+          <a:lstStyle/>
+          <a:p>
+            <a:pPr algn="ctr"/>
+          </a:p>
+        </p:txBody>
+      </p:sp>
+      <p:sp>
+        <p:nvSpPr>
+          <p:cNvPr id="8" name="TextBox 7"/>
+          <p:cNvSpPr txBox="1"/>
+          <p:nvPr/>
+        </p:nvSpPr>
+        <p:spPr>
+          <a:xfrm>
+            <a:off x="11000232" y="2148840"/>
+            <a:ext cx="822960" cy="384048"/>
+          </a:xfrm>
+          <a:prstGeom prst="rect">
+            <a:avLst/>
+          </a:prstGeom>
+          <a:noFill/>
+        </p:spPr>
+        <p:txBody>
+          <a:bodyPr wrap="square" anchor="ctr" lIns="18288" rIns="18288" tIns="18288" bIns="18288">
+            <a:spAutoFit/>
+          </a:bodyPr>
+          <a:lstStyle/>
+          <a:p>
+            <a:pPr algn="l">
+              <a:spcAft>
+                <a:spcPts val="600"/>
+              </a:spcAft>
+            </a:pPr>
+            <a:r>
+              <a:rPr sz="1400" b="1">
+                <a:solidFill>
+                  <a:srgbClr val="EEEFF1"/>
+                </a:solidFill>
+                <a:latin typeface="Segoe UI"/>
+              </a:rPr>
+              <a:t>318</a:t>
+            </a:r>
+          </a:p>
+        </p:txBody>
+      </p:sp>
+      <p:sp>
+        <p:nvSpPr>
+          <p:cNvPr id="9" name="TextBox 8"/>
+          <p:cNvSpPr txBox="1"/>
+          <p:nvPr/>
+        </p:nvSpPr>
+        <p:spPr>
+          <a:xfrm>
+            <a:off x="6400800" y="2651760"/>
+            <a:ext cx="2155240" cy="384048"/>
+          </a:xfrm>
+          <a:prstGeom prst="rect">
+            <a:avLst/>
+          </a:prstGeom>
+          <a:noFill/>
+        </p:spPr>
+        <p:txBody>
+          <a:bodyPr wrap="square" anchor="ctr" lIns="18288" rIns="18288" tIns="18288" bIns="18288">
+            <a:spAutoFit/>
+          </a:bodyPr>
+          <a:lstStyle/>
+          <a:p>
+            <a:pPr algn="l">
+              <a:spcAft>
+                <a:spcPts val="600"/>
+              </a:spcAft>
+            </a:pPr>
+            <a:r>
+              <a:rPr sz="1300" b="0">
+                <a:solidFill>
+                  <a:srgbClr val="EEEFF1"/>
+                </a:solidFill>
+                <a:latin typeface="Segoe UI"/>
+              </a:rPr>
+              <a:t>|dt| ≤ 1 сут, облачность ≤ 60 %</a:t>
+            </a:r>
+          </a:p>
+        </p:txBody>
+      </p:sp>
+      <p:sp>
+        <p:nvSpPr>
+          <p:cNvPr id="10" name="Rectangle 9"/>
+          <p:cNvSpPr/>
+          <p:nvPr/>
+        </p:nvSpPr>
+        <p:spPr>
+          <a:xfrm>
+            <a:off x="8647480" y="2715768"/>
+            <a:ext cx="207887" cy="274320"/>
+          </a:xfrm>
+          <a:prstGeom prst="rect">
+            <a:avLst/>
+          </a:prstGeom>
+          <a:solidFill>
+            <a:srgbClr val="5B6370"/>
+          </a:solidFill>
+          <a:ln>
+            <a:noFill/>
+          </a:ln>
+          <a:effectLst/>
+        </p:spPr>
+        <p:style>
+          <a:lnRef idx="1">
+            <a:schemeClr val="accent1"/>
+          </a:lnRef>
+          <a:fillRef idx="3">
+            <a:schemeClr val="accent1"/>
+          </a:fillRef>
+          <a:effectRef idx="2">
+            <a:schemeClr val="accent1"/>
+          </a:effectRef>
+          <a:fontRef idx="minor">
+            <a:schemeClr val="lt1"/>
+          </a:fontRef>
+        </p:style>
+        <p:txBody>
+          <a:bodyPr rtlCol="0" anchor="ctr"/>
+          <a:lstStyle/>
+          <a:p>
+            <a:pPr algn="ctr"/>
+          </a:p>
+        </p:txBody>
+      </p:sp>
+      <p:sp>
+        <p:nvSpPr>
+          <p:cNvPr id="11" name="TextBox 10"/>
+          <p:cNvSpPr txBox="1"/>
+          <p:nvPr/>
+        </p:nvSpPr>
+        <p:spPr>
+          <a:xfrm>
+            <a:off x="8928520" y="2651760"/>
+            <a:ext cx="822960" cy="384048"/>
+          </a:xfrm>
+          <a:prstGeom prst="rect">
+            <a:avLst/>
+          </a:prstGeom>
+          <a:noFill/>
+        </p:spPr>
+        <p:txBody>
+          <a:bodyPr wrap="square" anchor="ctr" lIns="18288" rIns="18288" tIns="18288" bIns="18288">
+            <a:spAutoFit/>
+          </a:bodyPr>
+          <a:lstStyle/>
+          <a:p>
+            <a:pPr algn="l">
+              <a:spcAft>
+                <a:spcPts val="600"/>
+              </a:spcAft>
+            </a:pPr>
+            <a:r>
+              <a:rPr sz="1400" b="1">
+                <a:solidFill>
+                  <a:srgbClr val="EEEFF1"/>
+                </a:solidFill>
+                <a:latin typeface="Segoe UI"/>
+              </a:rPr>
+              <a:t>29</a:t>
+            </a:r>
+          </a:p>
+        </p:txBody>
+      </p:sp>
+      <p:sp>
+        <p:nvSpPr>
+          <p:cNvPr id="12" name="TextBox 11"/>
+          <p:cNvSpPr txBox="1"/>
+          <p:nvPr/>
+        </p:nvSpPr>
+        <p:spPr>
+          <a:xfrm>
+            <a:off x="6400800" y="3154680"/>
+            <a:ext cx="2155240" cy="384048"/>
+          </a:xfrm>
+          <a:prstGeom prst="rect">
+            <a:avLst/>
+          </a:prstGeom>
+          <a:noFill/>
+        </p:spPr>
+        <p:txBody>
+          <a:bodyPr wrap="square" anchor="ctr" lIns="18288" rIns="18288" tIns="18288" bIns="18288">
+            <a:spAutoFit/>
+          </a:bodyPr>
+          <a:lstStyle/>
+          <a:p>
+            <a:pPr algn="l">
+              <a:spcAft>
+                <a:spcPts val="600"/>
+              </a:spcAft>
+            </a:pPr>
+            <a:r>
+              <a:rPr sz="1300" b="0">
+                <a:solidFill>
+                  <a:srgbClr val="EEEFF1"/>
+                </a:solidFill>
+                <a:latin typeface="Segoe UI"/>
+              </a:rPr>
+              <a:t>маски качества в полосе</a:t>
+            </a:r>
+          </a:p>
+        </p:txBody>
+      </p:sp>
+      <p:sp>
+        <p:nvSpPr>
+          <p:cNvPr id="13" name="Rectangle 12"/>
+          <p:cNvSpPr/>
+          <p:nvPr/>
+        </p:nvSpPr>
+        <p:spPr>
+          <a:xfrm>
+            <a:off x="8647480" y="3218688"/>
+            <a:ext cx="86022" cy="274320"/>
+          </a:xfrm>
+          <a:prstGeom prst="rect">
+            <a:avLst/>
+          </a:prstGeom>
+          <a:solidFill>
+            <a:srgbClr val="5B6370"/>
+          </a:solidFill>
+          <a:ln>
+            <a:noFill/>
+          </a:ln>
+          <a:effectLst/>
+        </p:spPr>
+        <p:style>
+          <a:lnRef idx="1">
+            <a:schemeClr val="accent1"/>
+          </a:lnRef>
+          <a:fillRef idx="3">
+            <a:schemeClr val="accent1"/>
+          </a:fillRef>
+          <a:effectRef idx="2">
+            <a:schemeClr val="accent1"/>
+          </a:effectRef>
+          <a:fontRef idx="minor">
+            <a:schemeClr val="lt1"/>
+          </a:fontRef>
+        </p:style>
+        <p:txBody>
+          <a:bodyPr rtlCol="0" anchor="ctr"/>
+          <a:lstStyle/>
+          <a:p>
+            <a:pPr algn="ctr"/>
+          </a:p>
+        </p:txBody>
+      </p:sp>
+      <p:sp>
+        <p:nvSpPr>
+          <p:cNvPr id="14" name="TextBox 13"/>
+          <p:cNvSpPr txBox="1"/>
+          <p:nvPr/>
+        </p:nvSpPr>
+        <p:spPr>
+          <a:xfrm>
+            <a:off x="8806655" y="3154680"/>
+            <a:ext cx="822960" cy="384048"/>
+          </a:xfrm>
+          <a:prstGeom prst="rect">
+            <a:avLst/>
+          </a:prstGeom>
+          <a:noFill/>
+        </p:spPr>
+        <p:txBody>
+          <a:bodyPr wrap="square" anchor="ctr" lIns="18288" rIns="18288" tIns="18288" bIns="18288">
+            <a:spAutoFit/>
+          </a:bodyPr>
+          <a:lstStyle/>
+          <a:p>
+            <a:pPr algn="l">
+              <a:spcAft>
+                <a:spcPts val="600"/>
+              </a:spcAft>
+            </a:pPr>
+            <a:r>
+              <a:rPr sz="1400" b="1">
+                <a:solidFill>
+                  <a:srgbClr val="EEEFF1"/>
+                </a:solidFill>
+                <a:latin typeface="Segoe UI"/>
+              </a:rPr>
+              <a:t>12</a:t>
+            </a:r>
+          </a:p>
+        </p:txBody>
+      </p:sp>
+      <p:sp>
+        <p:nvSpPr>
+          <p:cNvPr id="15" name="TextBox 14"/>
+          <p:cNvSpPr txBox="1"/>
+          <p:nvPr/>
+        </p:nvSpPr>
+        <p:spPr>
+          <a:xfrm>
+            <a:off x="6400800" y="3657600"/>
+            <a:ext cx="2155240" cy="384048"/>
+          </a:xfrm>
+          <a:prstGeom prst="rect">
+            <a:avLst/>
+          </a:prstGeom>
+          <a:noFill/>
+        </p:spPr>
+        <p:txBody>
+          <a:bodyPr wrap="square" anchor="ctr" lIns="18288" rIns="18288" tIns="18288" bIns="18288">
+            <a:spAutoFit/>
+          </a:bodyPr>
+          <a:lstStyle/>
+          <a:p>
+            <a:pPr algn="l">
+              <a:spcAft>
+                <a:spcPts val="600"/>
+              </a:spcAft>
+            </a:pPr>
+            <a:r>
+              <a:rPr sz="1300" b="0">
+                <a:solidFill>
+                  <a:srgbClr val="EEEFF1"/>
+                </a:solidFill>
+                <a:latin typeface="Segoe UI"/>
+              </a:rPr>
+              <a:t>дрейф ≤ допуска (0.2 м/с)</a:t>
+            </a:r>
+          </a:p>
+        </p:txBody>
+      </p:sp>
+      <p:sp>
+        <p:nvSpPr>
+          <p:cNvPr id="16" name="Rectangle 15"/>
+          <p:cNvSpPr/>
+          <p:nvPr/>
+        </p:nvSpPr>
+        <p:spPr>
+          <a:xfrm>
+            <a:off x="8647480" y="3721608"/>
+            <a:ext cx="36576" cy="274320"/>
+          </a:xfrm>
+          <a:prstGeom prst="rect">
+            <a:avLst/>
+          </a:prstGeom>
+          <a:solidFill>
+            <a:srgbClr val="D9912E"/>
+          </a:solidFill>
+          <a:ln>
+            <a:noFill/>
+          </a:ln>
+          <a:effectLst/>
+        </p:spPr>
+        <p:style>
+          <a:lnRef idx="1">
+            <a:schemeClr val="accent1"/>
+          </a:lnRef>
+          <a:fillRef idx="3">
+            <a:schemeClr val="accent1"/>
+          </a:fillRef>
+          <a:effectRef idx="2">
+            <a:schemeClr val="accent1"/>
+          </a:effectRef>
+          <a:fontRef idx="minor">
+            <a:schemeClr val="lt1"/>
+          </a:fontRef>
+        </p:style>
+        <p:txBody>
+          <a:bodyPr rtlCol="0" anchor="ctr"/>
+          <a:lstStyle/>
+          <a:p>
+            <a:pPr algn="ctr"/>
+          </a:p>
+        </p:txBody>
+      </p:sp>
+      <p:sp>
+        <p:nvSpPr>
+          <p:cNvPr id="17" name="TextBox 16"/>
+          <p:cNvSpPr txBox="1"/>
+          <p:nvPr/>
+        </p:nvSpPr>
+        <p:spPr>
+          <a:xfrm>
+            <a:off x="8757208" y="3657600"/>
+            <a:ext cx="822960" cy="384048"/>
+          </a:xfrm>
+          <a:prstGeom prst="rect">
+            <a:avLst/>
+          </a:prstGeom>
+          <a:noFill/>
+        </p:spPr>
+        <p:txBody>
+          <a:bodyPr wrap="square" anchor="ctr" lIns="18288" rIns="18288" tIns="18288" bIns="18288">
+            <a:spAutoFit/>
+          </a:bodyPr>
+          <a:lstStyle/>
+          <a:p>
+            <a:pPr algn="l">
+              <a:spcAft>
+                <a:spcPts val="600"/>
+              </a:spcAft>
+            </a:pPr>
+            <a:r>
+              <a:rPr sz="1400" b="1">
+                <a:solidFill>
+                  <a:srgbClr val="EEEFF1"/>
+                </a:solidFill>
+                <a:latin typeface="Segoe UI"/>
+              </a:rPr>
+              <a:t>0</a:t>
+            </a:r>
+          </a:p>
+        </p:txBody>
+      </p:sp>
+      <p:sp>
+        <p:nvSpPr>
+          <p:cNvPr id="18" name="TextBox 17"/>
+          <p:cNvSpPr txBox="1"/>
+          <p:nvPr/>
+        </p:nvSpPr>
+        <p:spPr>
+          <a:xfrm>
+            <a:off x="457200" y="6355080"/>
+            <a:ext cx="10515600" cy="320040"/>
+          </a:xfrm>
+          <a:prstGeom prst="rect">
+            <a:avLst/>
+          </a:prstGeom>
+          <a:noFill/>
+        </p:spPr>
+        <p:txBody>
+          <a:bodyPr wrap="square" anchor="t" lIns="18288" rIns="18288" tIns="18288" bIns="18288">
+            <a:spAutoFit/>
+          </a:bodyPr>
+          <a:lstStyle/>
+          <a:p>
+            <a:pPr algn="l">
+              <a:spcAft>
+                <a:spcPts val="600"/>
+              </a:spcAft>
+            </a:pPr>
+            <a:r>
+              <a:rPr sz="1000" b="0">
+                <a:solidFill>
+                  <a:srgbClr val="9AA1AC"/>
+                </a:solidFill>
+                <a:latin typeface="Segoe UI"/>
+              </a:rPr>
+              <a:t>Источник: reports/case_pairs/summary.md, quality.md; data/case/run/registry_pairs.csv</a:t>
+            </a:r>
+          </a:p>
+        </p:txBody>
+      </p:sp>
+      <p:sp>
+        <p:nvSpPr>
+          <p:cNvPr id="19" name="TextBox 18"/>
+          <p:cNvSpPr txBox="1"/>
+          <p:nvPr/>
+        </p:nvSpPr>
+        <p:spPr>
+          <a:xfrm>
+            <a:off x="11155680" y="6355080"/>
+            <a:ext cx="640080" cy="320040"/>
+          </a:xfrm>
+          <a:prstGeom prst="rect">
+            <a:avLst/>
+          </a:prstGeom>
+          <a:noFill/>
+        </p:spPr>
+        <p:txBody>
+          <a:bodyPr wrap="square" anchor="t" lIns="18288" rIns="18288" tIns="18288" bIns="18288">
+            <a:spAutoFit/>
+          </a:bodyPr>
+          <a:lstStyle/>
+          <a:p>
+            <a:pPr algn="r">
+              <a:spcAft>
+                <a:spcPts val="600"/>
+              </a:spcAft>
+            </a:pPr>
+            <a:r>
+              <a:rPr sz="1000" b="0">
+                <a:solidFill>
+                  <a:srgbClr val="9AA1AC"/>
+                </a:solidFill>
+                <a:latin typeface="Segoe UI"/>
+              </a:rPr>
               <a:t>0:52</a:t>
             </a:r>
           </a:p>
@@ -10798,7 +11633,7 @@
                 </a:solidFill>
                 <a:latin typeface="Segoe UI"/>
               </a:rPr>
-              <a:t>05 · Реестр пар и окно синхронизации</a:t>
+              <a:t>05 · Как мы искали данные</a:t>
             </a:r>
           </a:p>
         </p:txBody>
@@ -10837,7 +11672,7 @@
                 </a:solidFill>
                 <a:latin typeface="Segoe UI"/>
               </a:rPr>
-              <a:t>318 событий → 29 по метаданным → 12 по маскам → 0 синхронных с учётом дрейфа</a:t>
+              <a:t>Пайплайн поиска данных: 318 событий CSV → пар уровня A 0; ADIS — 66 пар по месту и времени</a:t>
             </a:r>
           </a:p>
         </p:txBody>
@@ -10870,13 +11705,13 @@
               </a:spcAft>
             </a:pPr>
             <a:r>
-              <a:rPr sz="1600" b="0">
+              <a:rPr sz="1500" b="0">
                 <a:solidFill>
                   <a:srgbClr val="EEEFF1"/>
                 </a:solidFill>
                 <a:latin typeface="Segoe UI"/>
               </a:rPr>
-              <a:t>• Для пластика снимков нет: S1 и S2 — открытый океан 2015 г., Sentinel-2A снимает с конца июня 2015 (S1 — 0 сцен в ±5 сут, S2 — 1)</a:t>
+              <a:t>• Уровни: A — снимок и полевое число связаны по времени, месту, площади и категории; B — подтверждённая разметка скопления; C — кандидат; D — отвергнутый или отрицательный пример</a:t>
             </a:r>
           </a:p>
           <a:p>
@@ -10886,13 +11721,13 @@
               </a:spcAft>
             </a:pPr>
             <a:r>
-              <a:rPr sz="1600" b="0">
+              <a:rPr sz="1500" b="0">
                 <a:solidFill>
                   <a:srgbClr val="EEEFF1"/>
                 </a:solidFill>
                 <a:latin typeface="Segoe UI"/>
               </a:rPr>
-              <a:t>• Дрейф: при типичных 0.2 м/с вода смещается на 23.4 км (медиана) — допуск 3 км держит только |dt| ≤ 4.2 ч</a:t>
+              <a:t>• Детектор учим только на B + проверенных D; «снимок → шт./км²» — только на калибровочных парах; C меткой не становится</a:t>
             </a:r>
           </a:p>
           <a:p>
@@ -10902,13 +11737,13 @@
               </a:spcAft>
             </a:pPr>
             <a:r>
-              <a:rPr sz="1600" b="0">
+              <a:rPr sz="1500" b="0">
                 <a:solidFill>
                   <a:srgbClr val="EEEFF1"/>
                 </a:solidFill>
                 <a:latin typeface="Segoe UI"/>
               </a:rPr>
-              <a:t>• Маски в полосе: блик 10, облака 6 (у 4 флаг QA Landsat сомнителен), покрытие 1</a:t>
+              <a:t>• Пластик: снимка нет у 62 из 63 событий Саргассова моря, у S1 датчики не видят предметы; Северное море — облака 21, маршрут вне снимка 29; Чёрное море — C 8 (время и площадь трансект не опубликованы)</a:t>
             </a:r>
           </a:p>
           <a:p>
@@ -10918,27 +11753,51 @@
               </a:spcAft>
             </a:pPr>
             <a:r>
-              <a:rPr sz="1600" b="0">
+              <a:rPr sz="1500" b="0">
                 <a:solidFill>
                   <a:srgbClr val="EEEFF1"/>
                 </a:solidFill>
                 <a:latin typeface="Segoe UI"/>
               </a:rPr>
-              <a:t>• Реестр: строка на каждое из 318 событий, этап отказа и все причины</a:t>
-            </a:r>
-          </a:p>
-        </p:txBody>
-      </p:sp>
-      <p:sp>
-        <p:nvSpPr>
-          <p:cNvPr id="5" name="TextBox 4"/>
-          <p:cNvSpPr txBox="1"/>
-          <p:nvPr/>
-        </p:nvSpPr>
-        <p:spPr>
-          <a:xfrm>
-            <a:off x="6400800" y="1691640"/>
-            <a:ext cx="5349240" cy="365760"/>
+              <a:t>• Стоп-правило: нет A за пилот — поиск по дрейфу не расширяем. Нашли ADIS (The Ocean Cleanup): 177 отрезков → A 66, C 3, D 108</a:t>
+            </a:r>
+          </a:p>
+        </p:txBody>
+      </p:sp>
+      <p:pic>
+        <p:nvPicPr>
+          <p:cNvPr id="5" name="Picture 4" descr="05_funnel.jpg"/>
+          <p:cNvPicPr>
+            <a:picLocks noChangeAspect="1"/>
+          </p:cNvPicPr>
+          <p:nvPr/>
+        </p:nvPicPr>
+        <p:blipFill>
+          <a:blip r:embed="rId2"/>
+          <a:stretch>
+            <a:fillRect/>
+          </a:stretch>
+        </p:blipFill>
+        <p:spPr>
+          <a:xfrm>
+            <a:off x="6400800" y="1645920"/>
+            <a:ext cx="5349240" cy="3209544"/>
+          </a:xfrm>
+          <a:prstGeom prst="rect">
+            <a:avLst/>
+          </a:prstGeom>
+        </p:spPr>
+      </p:pic>
+      <p:sp>
+        <p:nvSpPr>
+          <p:cNvPr id="6" name="TextBox 5"/>
+          <p:cNvSpPr txBox="1"/>
+          <p:nvPr/>
+        </p:nvSpPr>
+        <p:spPr>
+          <a:xfrm>
+            <a:off x="6400800" y="4901183"/>
+            <a:ext cx="5349240" cy="548640"/>
           </a:xfrm>
           <a:prstGeom prst="rect">
             <a:avLst/>
@@ -10957,508 +11816,20 @@
               </a:spcAft>
             </a:pPr>
             <a:r>
-              <a:rPr sz="1400" b="0">
+              <a:rPr sz="1200" b="0">
                 <a:solidFill>
                   <a:srgbClr val="9AA1AC"/>
                 </a:solidFill>
                 <a:latin typeface="Segoe UI"/>
               </a:rPr>
-              <a:t>События, у которых остаётся пара</a:t>
-            </a:r>
-          </a:p>
-        </p:txBody>
-      </p:sp>
-      <p:sp>
-        <p:nvSpPr>
-          <p:cNvPr id="6" name="TextBox 5"/>
-          <p:cNvSpPr txBox="1"/>
-          <p:nvPr/>
-        </p:nvSpPr>
-        <p:spPr>
-          <a:xfrm>
-            <a:off x="6400800" y="2148840"/>
-            <a:ext cx="2155240" cy="384048"/>
-          </a:xfrm>
-          <a:prstGeom prst="rect">
-            <a:avLst/>
-          </a:prstGeom>
-          <a:noFill/>
-        </p:spPr>
-        <p:txBody>
-          <a:bodyPr wrap="square" anchor="ctr" lIns="18288" rIns="18288" tIns="18288" bIns="18288">
-            <a:spAutoFit/>
-          </a:bodyPr>
-          <a:lstStyle/>
-          <a:p>
-            <a:pPr algn="l">
-              <a:spcAft>
-                <a:spcPts val="600"/>
-              </a:spcAft>
-            </a:pPr>
-            <a:r>
-              <a:rPr sz="1300" b="0">
-                <a:solidFill>
-                  <a:srgbClr val="EEEFF1"/>
-                </a:solidFill>
-                <a:latin typeface="Segoe UI"/>
-              </a:rPr>
-              <a:t>все события</a:t>
-            </a:r>
-          </a:p>
-        </p:txBody>
-      </p:sp>
-      <p:sp>
-        <p:nvSpPr>
-          <p:cNvPr id="7" name="Rectangle 6"/>
-          <p:cNvSpPr/>
-          <p:nvPr/>
-        </p:nvSpPr>
-        <p:spPr>
-          <a:xfrm>
-            <a:off x="8647480" y="2212848"/>
-            <a:ext cx="2279599" cy="274320"/>
-          </a:xfrm>
-          <a:prstGeom prst="rect">
-            <a:avLst/>
-          </a:prstGeom>
-          <a:solidFill>
-            <a:srgbClr val="5B6370"/>
-          </a:solidFill>
-          <a:ln>
-            <a:noFill/>
-          </a:ln>
-          <a:effectLst/>
-        </p:spPr>
-        <p:style>
-          <a:lnRef idx="1">
-            <a:schemeClr val="accent1"/>
-          </a:lnRef>
-          <a:fillRef idx="3">
-            <a:schemeClr val="accent1"/>
-          </a:fillRef>
-          <a:effectRef idx="2">
-            <a:schemeClr val="accent1"/>
-          </a:effectRef>
-          <a:fontRef idx="minor">
-            <a:schemeClr val="lt1"/>
-          </a:fontRef>
-        </p:style>
-        <p:txBody>
-          <a:bodyPr rtlCol="0" anchor="ctr"/>
-          <a:lstStyle/>
-          <a:p>
-            <a:pPr algn="ctr"/>
-          </a:p>
-        </p:txBody>
-      </p:sp>
-      <p:sp>
-        <p:nvSpPr>
-          <p:cNvPr id="8" name="TextBox 7"/>
-          <p:cNvSpPr txBox="1"/>
-          <p:nvPr/>
-        </p:nvSpPr>
-        <p:spPr>
-          <a:xfrm>
-            <a:off x="11000232" y="2148840"/>
-            <a:ext cx="822960" cy="384048"/>
-          </a:xfrm>
-          <a:prstGeom prst="rect">
-            <a:avLst/>
-          </a:prstGeom>
-          <a:noFill/>
-        </p:spPr>
-        <p:txBody>
-          <a:bodyPr wrap="square" anchor="ctr" lIns="18288" rIns="18288" tIns="18288" bIns="18288">
-            <a:spAutoFit/>
-          </a:bodyPr>
-          <a:lstStyle/>
-          <a:p>
-            <a:pPr algn="l">
-              <a:spcAft>
-                <a:spcPts val="600"/>
-              </a:spcAft>
-            </a:pPr>
-            <a:r>
-              <a:rPr sz="1400" b="1">
-                <a:solidFill>
-                  <a:srgbClr val="EEEFF1"/>
-                </a:solidFill>
-                <a:latin typeface="Segoe UI"/>
-              </a:rPr>
-              <a:t>318</a:t>
-            </a:r>
-          </a:p>
-        </p:txBody>
-      </p:sp>
-      <p:sp>
-        <p:nvSpPr>
-          <p:cNvPr id="9" name="TextBox 8"/>
-          <p:cNvSpPr txBox="1"/>
-          <p:nvPr/>
-        </p:nvSpPr>
-        <p:spPr>
-          <a:xfrm>
-            <a:off x="6400800" y="2651760"/>
-            <a:ext cx="2155240" cy="384048"/>
-          </a:xfrm>
-          <a:prstGeom prst="rect">
-            <a:avLst/>
-          </a:prstGeom>
-          <a:noFill/>
-        </p:spPr>
-        <p:txBody>
-          <a:bodyPr wrap="square" anchor="ctr" lIns="18288" rIns="18288" tIns="18288" bIns="18288">
-            <a:spAutoFit/>
-          </a:bodyPr>
-          <a:lstStyle/>
-          <a:p>
-            <a:pPr algn="l">
-              <a:spcAft>
-                <a:spcPts val="600"/>
-              </a:spcAft>
-            </a:pPr>
-            <a:r>
-              <a:rPr sz="1300" b="0">
-                <a:solidFill>
-                  <a:srgbClr val="EEEFF1"/>
-                </a:solidFill>
-                <a:latin typeface="Segoe UI"/>
-              </a:rPr>
-              <a:t>|dt| ≤ 1 сут, облачность ≤ 60 %</a:t>
-            </a:r>
-          </a:p>
-        </p:txBody>
-      </p:sp>
-      <p:sp>
-        <p:nvSpPr>
-          <p:cNvPr id="10" name="Rectangle 9"/>
-          <p:cNvSpPr/>
-          <p:nvPr/>
-        </p:nvSpPr>
-        <p:spPr>
-          <a:xfrm>
-            <a:off x="8647480" y="2715768"/>
-            <a:ext cx="207887" cy="274320"/>
-          </a:xfrm>
-          <a:prstGeom prst="rect">
-            <a:avLst/>
-          </a:prstGeom>
-          <a:solidFill>
-            <a:srgbClr val="5B6370"/>
-          </a:solidFill>
-          <a:ln>
-            <a:noFill/>
-          </a:ln>
-          <a:effectLst/>
-        </p:spPr>
-        <p:style>
-          <a:lnRef idx="1">
-            <a:schemeClr val="accent1"/>
-          </a:lnRef>
-          <a:fillRef idx="3">
-            <a:schemeClr val="accent1"/>
-          </a:fillRef>
-          <a:effectRef idx="2">
-            <a:schemeClr val="accent1"/>
-          </a:effectRef>
-          <a:fontRef idx="minor">
-            <a:schemeClr val="lt1"/>
-          </a:fontRef>
-        </p:style>
-        <p:txBody>
-          <a:bodyPr rtlCol="0" anchor="ctr"/>
-          <a:lstStyle/>
-          <a:p>
-            <a:pPr algn="ctr"/>
-          </a:p>
-        </p:txBody>
-      </p:sp>
-      <p:sp>
-        <p:nvSpPr>
-          <p:cNvPr id="11" name="TextBox 10"/>
-          <p:cNvSpPr txBox="1"/>
-          <p:nvPr/>
-        </p:nvSpPr>
-        <p:spPr>
-          <a:xfrm>
-            <a:off x="8928520" y="2651760"/>
-            <a:ext cx="822960" cy="384048"/>
-          </a:xfrm>
-          <a:prstGeom prst="rect">
-            <a:avLst/>
-          </a:prstGeom>
-          <a:noFill/>
-        </p:spPr>
-        <p:txBody>
-          <a:bodyPr wrap="square" anchor="ctr" lIns="18288" rIns="18288" tIns="18288" bIns="18288">
-            <a:spAutoFit/>
-          </a:bodyPr>
-          <a:lstStyle/>
-          <a:p>
-            <a:pPr algn="l">
-              <a:spcAft>
-                <a:spcPts val="600"/>
-              </a:spcAft>
-            </a:pPr>
-            <a:r>
-              <a:rPr sz="1400" b="1">
-                <a:solidFill>
-                  <a:srgbClr val="EEEFF1"/>
-                </a:solidFill>
-                <a:latin typeface="Segoe UI"/>
-              </a:rPr>
-              <a:t>29</a:t>
-            </a:r>
-          </a:p>
-        </p:txBody>
-      </p:sp>
-      <p:sp>
-        <p:nvSpPr>
-          <p:cNvPr id="12" name="TextBox 11"/>
-          <p:cNvSpPr txBox="1"/>
-          <p:nvPr/>
-        </p:nvSpPr>
-        <p:spPr>
-          <a:xfrm>
-            <a:off x="6400800" y="3154680"/>
-            <a:ext cx="2155240" cy="384048"/>
-          </a:xfrm>
-          <a:prstGeom prst="rect">
-            <a:avLst/>
-          </a:prstGeom>
-          <a:noFill/>
-        </p:spPr>
-        <p:txBody>
-          <a:bodyPr wrap="square" anchor="ctr" lIns="18288" rIns="18288" tIns="18288" bIns="18288">
-            <a:spAutoFit/>
-          </a:bodyPr>
-          <a:lstStyle/>
-          <a:p>
-            <a:pPr algn="l">
-              <a:spcAft>
-                <a:spcPts val="600"/>
-              </a:spcAft>
-            </a:pPr>
-            <a:r>
-              <a:rPr sz="1300" b="0">
-                <a:solidFill>
-                  <a:srgbClr val="EEEFF1"/>
-                </a:solidFill>
-                <a:latin typeface="Segoe UI"/>
-              </a:rPr>
-              <a:t>маски качества в полосе</a:t>
-            </a:r>
-          </a:p>
-        </p:txBody>
-      </p:sp>
-      <p:sp>
-        <p:nvSpPr>
-          <p:cNvPr id="13" name="Rectangle 12"/>
-          <p:cNvSpPr/>
-          <p:nvPr/>
-        </p:nvSpPr>
-        <p:spPr>
-          <a:xfrm>
-            <a:off x="8647480" y="3218688"/>
-            <a:ext cx="86022" cy="274320"/>
-          </a:xfrm>
-          <a:prstGeom prst="rect">
-            <a:avLst/>
-          </a:prstGeom>
-          <a:solidFill>
-            <a:srgbClr val="5B6370"/>
-          </a:solidFill>
-          <a:ln>
-            <a:noFill/>
-          </a:ln>
-          <a:effectLst/>
-        </p:spPr>
-        <p:style>
-          <a:lnRef idx="1">
-            <a:schemeClr val="accent1"/>
-          </a:lnRef>
-          <a:fillRef idx="3">
-            <a:schemeClr val="accent1"/>
-          </a:fillRef>
-          <a:effectRef idx="2">
-            <a:schemeClr val="accent1"/>
-          </a:effectRef>
-          <a:fontRef idx="minor">
-            <a:schemeClr val="lt1"/>
-          </a:fontRef>
-        </p:style>
-        <p:txBody>
-          <a:bodyPr rtlCol="0" anchor="ctr"/>
-          <a:lstStyle/>
-          <a:p>
-            <a:pPr algn="ctr"/>
-          </a:p>
-        </p:txBody>
-      </p:sp>
-      <p:sp>
-        <p:nvSpPr>
-          <p:cNvPr id="14" name="TextBox 13"/>
-          <p:cNvSpPr txBox="1"/>
-          <p:nvPr/>
-        </p:nvSpPr>
-        <p:spPr>
-          <a:xfrm>
-            <a:off x="8806655" y="3154680"/>
-            <a:ext cx="822960" cy="384048"/>
-          </a:xfrm>
-          <a:prstGeom prst="rect">
-            <a:avLst/>
-          </a:prstGeom>
-          <a:noFill/>
-        </p:spPr>
-        <p:txBody>
-          <a:bodyPr wrap="square" anchor="ctr" lIns="18288" rIns="18288" tIns="18288" bIns="18288">
-            <a:spAutoFit/>
-          </a:bodyPr>
-          <a:lstStyle/>
-          <a:p>
-            <a:pPr algn="l">
-              <a:spcAft>
-                <a:spcPts val="600"/>
-              </a:spcAft>
-            </a:pPr>
-            <a:r>
-              <a:rPr sz="1400" b="1">
-                <a:solidFill>
-                  <a:srgbClr val="EEEFF1"/>
-                </a:solidFill>
-                <a:latin typeface="Segoe UI"/>
-              </a:rPr>
-              <a:t>12</a:t>
-            </a:r>
-          </a:p>
-        </p:txBody>
-      </p:sp>
-      <p:sp>
-        <p:nvSpPr>
-          <p:cNvPr id="15" name="TextBox 14"/>
-          <p:cNvSpPr txBox="1"/>
-          <p:nvPr/>
-        </p:nvSpPr>
-        <p:spPr>
-          <a:xfrm>
-            <a:off x="6400800" y="3657600"/>
-            <a:ext cx="2155240" cy="384048"/>
-          </a:xfrm>
-          <a:prstGeom prst="rect">
-            <a:avLst/>
-          </a:prstGeom>
-          <a:noFill/>
-        </p:spPr>
-        <p:txBody>
-          <a:bodyPr wrap="square" anchor="ctr" lIns="18288" rIns="18288" tIns="18288" bIns="18288">
-            <a:spAutoFit/>
-          </a:bodyPr>
-          <a:lstStyle/>
-          <a:p>
-            <a:pPr algn="l">
-              <a:spcAft>
-                <a:spcPts val="600"/>
-              </a:spcAft>
-            </a:pPr>
-            <a:r>
-              <a:rPr sz="1300" b="0">
-                <a:solidFill>
-                  <a:srgbClr val="EEEFF1"/>
-                </a:solidFill>
-                <a:latin typeface="Segoe UI"/>
-              </a:rPr>
-              <a:t>дрейф ≤ допуска (0.2 м/с)</a:t>
-            </a:r>
-          </a:p>
-        </p:txBody>
-      </p:sp>
-      <p:sp>
-        <p:nvSpPr>
-          <p:cNvPr id="16" name="Rectangle 15"/>
-          <p:cNvSpPr/>
-          <p:nvPr/>
-        </p:nvSpPr>
-        <p:spPr>
-          <a:xfrm>
-            <a:off x="8647480" y="3721608"/>
-            <a:ext cx="36576" cy="274320"/>
-          </a:xfrm>
-          <a:prstGeom prst="rect">
-            <a:avLst/>
-          </a:prstGeom>
-          <a:solidFill>
-            <a:srgbClr val="D9912E"/>
-          </a:solidFill>
-          <a:ln>
-            <a:noFill/>
-          </a:ln>
-          <a:effectLst/>
-        </p:spPr>
-        <p:style>
-          <a:lnRef idx="1">
-            <a:schemeClr val="accent1"/>
-          </a:lnRef>
-          <a:fillRef idx="3">
-            <a:schemeClr val="accent1"/>
-          </a:fillRef>
-          <a:effectRef idx="2">
-            <a:schemeClr val="accent1"/>
-          </a:effectRef>
-          <a:fontRef idx="minor">
-            <a:schemeClr val="lt1"/>
-          </a:fontRef>
-        </p:style>
-        <p:txBody>
-          <a:bodyPr rtlCol="0" anchor="ctr"/>
-          <a:lstStyle/>
-          <a:p>
-            <a:pPr algn="ctr"/>
-          </a:p>
-        </p:txBody>
-      </p:sp>
-      <p:sp>
-        <p:nvSpPr>
-          <p:cNvPr id="17" name="TextBox 16"/>
-          <p:cNvSpPr txBox="1"/>
-          <p:nvPr/>
-        </p:nvSpPr>
-        <p:spPr>
-          <a:xfrm>
-            <a:off x="8757208" y="3657600"/>
-            <a:ext cx="822960" cy="384048"/>
-          </a:xfrm>
-          <a:prstGeom prst="rect">
-            <a:avLst/>
-          </a:prstGeom>
-          <a:noFill/>
-        </p:spPr>
-        <p:txBody>
-          <a:bodyPr wrap="square" anchor="ctr" lIns="18288" rIns="18288" tIns="18288" bIns="18288">
-            <a:spAutoFit/>
-          </a:bodyPr>
-          <a:lstStyle/>
-          <a:p>
-            <a:pPr algn="l">
-              <a:spcAft>
-                <a:spcPts val="600"/>
-              </a:spcAft>
-            </a:pPr>
-            <a:r>
-              <a:rPr sz="1400" b="1">
-                <a:solidFill>
-                  <a:srgbClr val="EEEFF1"/>
-                </a:solidFill>
-                <a:latin typeface="Segoe UI"/>
-              </a:rPr>
-              <a:t>0</a:t>
-            </a:r>
-          </a:p>
-        </p:txBody>
-      </p:sp>
-      <p:sp>
-        <p:nvSpPr>
-          <p:cNvPr id="18" name="TextBox 17"/>
+              <a:t>Воронка «событие → снимок → маски → синхронность»; каждая попытка — docs/SEARCH_LOG.md, хронология — docs/PIPELINE.md</a:t>
+            </a:r>
+          </a:p>
+        </p:txBody>
+      </p:sp>
+      <p:sp>
+        <p:nvSpPr>
+          <p:cNvPr id="7" name="TextBox 6"/>
           <p:cNvSpPr txBox="1"/>
           <p:nvPr/>
         </p:nvSpPr>
@@ -11490,14 +11861,14 @@
                 </a:solidFill>
                 <a:latin typeface="Segoe UI"/>
               </a:rPr>
-              <a:t>Источник: reports/case_pairs/summary.md, quality.md; data/case/run/registry_pairs.csv</a:t>
-            </a:r>
-          </a:p>
-        </p:txBody>
-      </p:sp>
-      <p:sp>
-        <p:nvSpPr>
-          <p:cNvPr id="19" name="TextBox 18"/>
+              <a:t>Источник: docs/PIPELINE.md; docs/SEARCH_LOG.md; reports/search/*_candidates.csv (final_numbers → case.sections.search)</a:t>
+            </a:r>
+          </a:p>
+        </p:txBody>
+      </p:sp>
+      <p:sp>
+        <p:nvSpPr>
+          <p:cNvPr id="8" name="TextBox 7"/>
           <p:cNvSpPr txBox="1"/>
           <p:nvPr/>
         </p:nvSpPr>
@@ -11529,7 +11900,7 @@
                 </a:solidFill>
                 <a:latin typeface="Segoe UI"/>
               </a:rPr>
-              <a:t>1:04</a:t>
+              <a:t>1:12</a:t>
             </a:r>
           </a:p>
         </p:txBody>
@@ -11594,7 +11965,7 @@
                 </a:solidFill>
                 <a:latin typeface="Segoe UI"/>
               </a:rPr>
-              <a:t>06 · Как мы искали данные</a:t>
+              <a:t>06 · Пары по месту и времени (ADIS)</a:t>
             </a:r>
           </a:p>
         </p:txBody>
@@ -11633,7 +12004,7 @@
                 </a:solidFill>
                 <a:latin typeface="Segoe UI"/>
               </a:rPr>
-              <a:t>Пайплайн поиска данных: 318 событий CSV → пар уровня A 0; в найденных нами данных ADIS — 66</a:t>
+              <a:t>ADIS: 66 пар по месту и времени; на 6 отрезках с единичными предметами детектор их не увидел</a:t>
             </a:r>
           </a:p>
         </p:txBody>
@@ -11672,7 +12043,7 @@
                 </a:solidFill>
                 <a:latin typeface="Segoe UI"/>
               </a:rPr>
-              <a:t>• Уровни: A — снимок и полевое число связаны по времени, месту, площади и категории; B — подтверждённая разметка скопления; C — кандидат; D — отвергнутый или отрицательный пример</a:t>
+              <a:t>• Камера судна, счёт предметов по размерам, время GPS; |dt| ≤ 3 ч; ≈ 52 независимых проходов, время у 26 пар подтверждено самим судном на снимке</a:t>
             </a:r>
           </a:p>
           <a:p>
@@ -11688,7 +12059,7 @@
                 </a:solidFill>
                 <a:latin typeface="Segoe UI"/>
               </a:rPr>
-              <a:t>• Детектор учим только на B + проверенных D; «снимок → шт./км²» — только на A; C меткой не становится</a:t>
+              <a:t>• Детектор оценивается на 28 из 66 (на 38 — низкое солнце или слабый сигнал воды); из 6 отрезков с предметами (3.5–4.4 шт./км²) оценивается 3 — на всех 0 пикселей</a:t>
             </a:r>
           </a:p>
           <a:p>
@@ -11704,7 +12075,7 @@
                 </a:solidFill>
                 <a:latin typeface="Segoe UI"/>
               </a:rPr>
-              <a:t>• Пластик: снимка нет у 62 из 63 событий Саргассова моря, у S1 датчики не видят предметы; Северное море — облака 21, маршрут вне снимка 29; Чёрное море — C 8 (время и площадь трансект не опубликованы)</a:t>
+              <a:t>• Согласуется с физикой: доля покрытия ≈ 6.6·10⁻⁸, предмет — 0.7 % пикселя; но общий предел для всех скоплений это не задаёт — плотные полосы эти пары не проверяют</a:t>
             </a:r>
           </a:p>
           <a:p>
@@ -11720,14 +12091,30 @@
                 </a:solidFill>
                 <a:latin typeface="Segoe UI"/>
               </a:rPr>
-              <a:t>• Стоп-правило: нет A за пилот — поиск по дрейфу не расширяем. Нашли ADIS (The Ocean Cleanup): 177 отрезков → A 66, C 3, D 108</a:t>
+              <a:t>• Ложные при полевом нуле (25 пар): ветер &lt; 7 м/с — 0 пикселей на 9.5 км²; сильнее — 1 на 8.8 км², 0.16 объекта/км² в зоне (барашки)</a:t>
+            </a:r>
+          </a:p>
+          <a:p>
+            <a:pPr algn="l">
+              <a:spcAft>
+                <a:spcPts val="1000"/>
+              </a:spcAft>
+            </a:pPr>
+            <a:r>
+              <a:rPr sz="1500" b="0">
+                <a:solidFill>
+                  <a:srgbClr val="EEEFF1"/>
+                </a:solidFill>
+                <a:latin typeface="Segoe UI"/>
+              </a:rPr>
+              <a:t>• Три уровня: по месту и времени 66 · видимый сигнал 0 из 3 · калибровочных «снимок → шт./км²» 0 (нужно 4–12)</a:t>
             </a:r>
           </a:p>
         </p:txBody>
       </p:sp>
       <p:pic>
         <p:nvPicPr>
-          <p:cNvPr id="5" name="Picture 4" descr="05_funnel.jpg"/>
+          <p:cNvPr id="5" name="Picture 4" descr="06_adis_pair.jpg"/>
           <p:cNvPicPr>
             <a:picLocks noChangeAspect="1"/>
           </p:cNvPicPr>
@@ -11742,7 +12129,7 @@
         <p:spPr>
           <a:xfrm>
             <a:off x="6400800" y="1645920"/>
-            <a:ext cx="5349240" cy="3209544"/>
+            <a:ext cx="5349240" cy="1327280"/>
           </a:xfrm>
           <a:prstGeom prst="rect">
             <a:avLst/>
@@ -11757,7 +12144,7 @@
         </p:nvSpPr>
         <p:spPr>
           <a:xfrm>
-            <a:off x="6400800" y="4901183"/>
+            <a:off x="6400800" y="3018920"/>
             <a:ext cx="5349240" cy="548640"/>
           </a:xfrm>
           <a:prstGeom prst="rect">
@@ -11783,7 +12170,7 @@
                 </a:solidFill>
                 <a:latin typeface="Segoe UI"/>
               </a:rPr>
-              <a:t>Воронка «событие → снимок → маски → синхронность»; каждая попытка — docs/SEARCH_LOG.md, хронология — docs/PIPELINE.md</a:t>
+              <a:t>Пара по месту и времени, Средиземное море: судно-съёмщик видно на снимке в конце полосы скана (пурпур) — время подтверждено; детектор в полосе пикселей не дал</a:t>
             </a:r>
           </a:p>
         </p:txBody>
@@ -11822,7 +12209,7 @@
                 </a:solidFill>
                 <a:latin typeface="Segoe UI"/>
               </a:rPr>
-              <a:t>Источник: docs/PIPELINE.md; docs/SEARCH_LOG.md; reports/search/*_candidates.csv (final_numbers → case.sections.search)</a:t>
+              <a:t>Источник: reports/search/adis_candidates.csv, reports/search/adis.md (final_numbers → case.sections.adis_pairs, quantity.levels)</a:t>
             </a:r>
           </a:p>
         </p:txBody>
@@ -11861,7 +12248,7 @@
                 </a:solidFill>
                 <a:latin typeface="Segoe UI"/>
               </a:rPr>
-              <a:t>1:24</a:t>
+              <a:t>1:39</a:t>
             </a:r>
           </a:p>
         </p:txBody>
@@ -11926,7 +12313,7 @@
                 </a:solidFill>
                 <a:latin typeface="Segoe UI"/>
               </a:rPr>
-              <a:t>07 · Пары уровня A</a:t>
+              <a:t>07 · Новые размеченные данные B/D</a:t>
             </a:r>
           </a:p>
         </p:txBody>
@@ -11965,7 +12352,7 @@
                 </a:solidFill>
                 <a:latin typeface="Segoe UI"/>
               </a:rPr>
-              <a:t>66 пар A: при 3.5–4.4 шт./км² на снимке 0 пикселей — это предел обнаружения</a:t>
+              <a:t>Новые данные: B — 65 съёмок и 14374 нитей Cózar, D — 2094 судов и облака; утечек 0</a:t>
             </a:r>
           </a:p>
         </p:txBody>
@@ -11998,13 +12385,13 @@
               </a:spcAft>
             </a:pPr>
             <a:r>
-              <a:rPr sz="1500" b="0">
+              <a:rPr sz="1600" b="0">
                 <a:solidFill>
                   <a:srgbClr val="EEEFF1"/>
                 </a:solidFill>
                 <a:latin typeface="Segoe UI"/>
               </a:rPr>
-              <a:t>• ADIS: камера судна, счёт предметов по размерам, время GPS; |dt| ≤ 3 ч; ≈ 52 независимых проходов, время у 26 пар подтверждено самим судном на снимке</a:t>
+              <a:t>• B: PLP 38 съёмок (мишени), FloatingObjects 27 съёмок (25 регионов), Cózar 2024 — 14374 окон на 4435 съёмках</a:t>
             </a:r>
           </a:p>
           <a:p>
@@ -12014,13 +12401,13 @@
               </a:spcAft>
             </a:pPr>
             <a:r>
-              <a:rPr sz="1500" b="0">
+              <a:rPr sz="1600" b="0">
                 <a:solidFill>
                   <a:srgbClr val="EEEFF1"/>
                 </a:solidFill>
                 <a:latin typeface="Segoe UI"/>
               </a:rPr>
-              <a:t>• Детектор оценивается на 28 парах A (на 38 — низкое солнце или слабый сигнал воды)</a:t>
+              <a:t>• D: суда у Финляндии — 2094 рамок, 18 съёмок; облака — 28 сцен; отклонено источников 13 (у каждого причина)</a:t>
             </a:r>
           </a:p>
           <a:p>
@@ -12030,13 +12417,13 @@
               </a:spcAft>
             </a:pPr>
             <a:r>
-              <a:rPr sz="1500" b="0">
+              <a:rPr sz="1600" b="0">
                 <a:solidFill>
                   <a:srgbClr val="EEEFF1"/>
                 </a:solidFill>
                 <a:latin typeface="Segoe UI"/>
               </a:rPr>
-              <a:t>• В 6 парах с предметами детектор дал 0 пикселей в полосе и 0 в полосе, сдвинутой на дрейф; из них оцениваемых 3 — тоже 0</a:t>
+              <a:t>• Утечки: та же съёмка или те же пиксели с MARIDA, MADOS и нашими сценами — 0; по содержимому 0 из 119; исключён 1 дубль</a:t>
             </a:r>
           </a:p>
           <a:p>
@@ -12046,393 +12433,13 @@
               </a:spcAft>
             </a:pPr>
             <a:r>
-              <a:rPr sz="1500" b="0">
+              <a:rPr sz="1600" b="0">
                 <a:solidFill>
                   <a:srgbClr val="EEEFF1"/>
                 </a:solidFill>
                 <a:latin typeface="Segoe UI"/>
               </a:rPr>
-              <a:t>• Доля покрытия предметами ≈ 6.6·10⁻⁸; крупнейший предмет — 0.7 % пикселя: Sentinel-2 такие предметы не видит</a:t>
-            </a:r>
-          </a:p>
-          <a:p>
-            <a:pPr algn="l">
-              <a:spcAft>
-                <a:spcPts val="1000"/>
-              </a:spcAft>
-            </a:pPr>
-            <a:r>
-              <a:rPr sz="1500" b="0">
-                <a:solidFill>
-                  <a:srgbClr val="EEEFF1"/>
-                </a:solidFill>
-                <a:latin typeface="Segoe UI"/>
-              </a:rPr>
-              <a:t>• Ложные при полевом нуле (25 пар): ветер &lt; 7 м/с — 0 пикселей на 9.5 км²; сильнее — 1 на 8.8 км², в зоне 0.16 объекта/км² (барашки)</a:t>
-            </a:r>
-          </a:p>
-          <a:p>
-            <a:pPr algn="l">
-              <a:spcAft>
-                <a:spcPts val="1000"/>
-              </a:spcAft>
-            </a:pPr>
-            <a:r>
-              <a:rPr sz="1500" b="0">
-                <a:solidFill>
-                  <a:srgbClr val="EEEFF1"/>
-                </a:solidFill>
-                <a:latin typeface="Segoe UI"/>
-              </a:rPr>
-              <a:t>• Вывод: калибровку «снимок → шт./км²» на них не построить — нужно 4–12 пар A с ненулевым сигналом, есть 0; со снимка — только доля покрытия подозрительного материала</a:t>
-            </a:r>
-          </a:p>
-        </p:txBody>
-      </p:sp>
-      <p:pic>
-        <p:nvPicPr>
-          <p:cNvPr id="5" name="Picture 4" descr="06_adis_pair.jpg"/>
-          <p:cNvPicPr>
-            <a:picLocks noChangeAspect="1"/>
-          </p:cNvPicPr>
-          <p:nvPr/>
-        </p:nvPicPr>
-        <p:blipFill>
-          <a:blip r:embed="rId2"/>
-          <a:stretch>
-            <a:fillRect/>
-          </a:stretch>
-        </p:blipFill>
-        <p:spPr>
-          <a:xfrm>
-            <a:off x="6400800" y="1645920"/>
-            <a:ext cx="5349240" cy="1327280"/>
-          </a:xfrm>
-          <a:prstGeom prst="rect">
-            <a:avLst/>
-          </a:prstGeom>
-        </p:spPr>
-      </p:pic>
-      <p:sp>
-        <p:nvSpPr>
-          <p:cNvPr id="6" name="TextBox 5"/>
-          <p:cNvSpPr txBox="1"/>
-          <p:nvPr/>
-        </p:nvSpPr>
-        <p:spPr>
-          <a:xfrm>
-            <a:off x="6400800" y="3018920"/>
-            <a:ext cx="5349240" cy="548640"/>
-          </a:xfrm>
-          <a:prstGeom prst="rect">
-            <a:avLst/>
-          </a:prstGeom>
-          <a:noFill/>
-        </p:spPr>
-        <p:txBody>
-          <a:bodyPr wrap="square" anchor="t" lIns="18288" rIns="18288" tIns="18288" bIns="18288">
-            <a:spAutoFit/>
-          </a:bodyPr>
-          <a:lstStyle/>
-          <a:p>
-            <a:pPr algn="l">
-              <a:spcAft>
-                <a:spcPts val="600"/>
-              </a:spcAft>
-            </a:pPr>
-            <a:r>
-              <a:rPr sz="1200" b="0">
-                <a:solidFill>
-                  <a:srgbClr val="9AA1AC"/>
-                </a:solidFill>
-                <a:latin typeface="Segoe UI"/>
-              </a:rPr>
-              <a:t>Пара A, Средиземное море: судно-съёмщик видно на снимке в конце полосы скана (пурпур) — время подтверждено; детектор в полосе пикселей не дал</a:t>
-            </a:r>
-          </a:p>
-        </p:txBody>
-      </p:sp>
-      <p:sp>
-        <p:nvSpPr>
-          <p:cNvPr id="7" name="TextBox 6"/>
-          <p:cNvSpPr txBox="1"/>
-          <p:nvPr/>
-        </p:nvSpPr>
-        <p:spPr>
-          <a:xfrm>
-            <a:off x="457200" y="6355080"/>
-            <a:ext cx="10515600" cy="320040"/>
-          </a:xfrm>
-          <a:prstGeom prst="rect">
-            <a:avLst/>
-          </a:prstGeom>
-          <a:noFill/>
-        </p:spPr>
-        <p:txBody>
-          <a:bodyPr wrap="square" anchor="t" lIns="18288" rIns="18288" tIns="18288" bIns="18288">
-            <a:spAutoFit/>
-          </a:bodyPr>
-          <a:lstStyle/>
-          <a:p>
-            <a:pPr algn="l">
-              <a:spcAft>
-                <a:spcPts val="600"/>
-              </a:spcAft>
-            </a:pPr>
-            <a:r>
-              <a:rPr sz="1000" b="0">
-                <a:solidFill>
-                  <a:srgbClr val="9AA1AC"/>
-                </a:solidFill>
-                <a:latin typeface="Segoe UI"/>
-              </a:rPr>
-              <a:t>Источник: reports/search/adis_candidates.csv, reports/search/adis.md (final_numbers → case.sections.adis_pairs)</a:t>
-            </a:r>
-          </a:p>
-        </p:txBody>
-      </p:sp>
-      <p:sp>
-        <p:nvSpPr>
-          <p:cNvPr id="8" name="TextBox 7"/>
-          <p:cNvSpPr txBox="1"/>
-          <p:nvPr/>
-        </p:nvSpPr>
-        <p:spPr>
-          <a:xfrm>
-            <a:off x="11155680" y="6355080"/>
-            <a:ext cx="640080" cy="320040"/>
-          </a:xfrm>
-          <a:prstGeom prst="rect">
-            <a:avLst/>
-          </a:prstGeom>
-          <a:noFill/>
-        </p:spPr>
-        <p:txBody>
-          <a:bodyPr wrap="square" anchor="t" lIns="18288" rIns="18288" tIns="18288" bIns="18288">
-            <a:spAutoFit/>
-          </a:bodyPr>
-          <a:lstStyle/>
-          <a:p>
-            <a:pPr algn="r">
-              <a:spcAft>
-                <a:spcPts val="600"/>
-              </a:spcAft>
-            </a:pPr>
-            <a:r>
-              <a:rPr sz="1000" b="0">
-                <a:solidFill>
-                  <a:srgbClr val="9AA1AC"/>
-                </a:solidFill>
-                <a:latin typeface="Segoe UI"/>
-              </a:rPr>
-              <a:t>1:51</a:t>
-            </a:r>
-          </a:p>
-        </p:txBody>
-      </p:sp>
-    </p:spTree>
-  </p:cSld>
-  <p:clrMapOvr>
-    <a:masterClrMapping/>
-  </p:clrMapOvr>
-</p:sld>
-</file>
-
-<file path=ppt/slides/slide8.xml><?xml version="1.0" encoding="utf-8"?>
-<p:sld xmlns:a="http://schemas.openxmlformats.org/drawingml/2006/main" xmlns:p="http://schemas.openxmlformats.org/presentationml/2006/main" xmlns:r="http://schemas.openxmlformats.org/officeDocument/2006/relationships">
-  <p:cSld>
-    <p:bg>
-      <p:bgPr>
-        <a:solidFill>
-          <a:srgbClr val="101216"/>
-        </a:solidFill>
-        <a:effectLst/>
-      </p:bgPr>
-    </p:bg>
-    <p:spTree>
-      <p:nvGrpSpPr>
-        <p:cNvPr id="1" name=""/>
-        <p:cNvGrpSpPr/>
-        <p:nvPr/>
-      </p:nvGrpSpPr>
-      <p:grpSpPr/>
-      <p:sp>
-        <p:nvSpPr>
-          <p:cNvPr id="2" name="TextBox 1"/>
-          <p:cNvSpPr txBox="1"/>
-          <p:nvPr/>
-        </p:nvSpPr>
-        <p:spPr>
-          <a:xfrm>
-            <a:off x="457200" y="201168"/>
-            <a:ext cx="8229600" cy="274320"/>
-          </a:xfrm>
-          <a:prstGeom prst="rect">
-            <a:avLst/>
-          </a:prstGeom>
-          <a:noFill/>
-        </p:spPr>
-        <p:txBody>
-          <a:bodyPr wrap="square" anchor="t" lIns="18288" rIns="18288" tIns="18288" bIns="18288">
-            <a:spAutoFit/>
-          </a:bodyPr>
-          <a:lstStyle/>
-          <a:p>
-            <a:pPr algn="l">
-              <a:spcAft>
-                <a:spcPts val="600"/>
-              </a:spcAft>
-            </a:pPr>
-            <a:r>
-              <a:rPr sz="1200" b="1">
-                <a:solidFill>
-                  <a:srgbClr val="D9912E"/>
-                </a:solidFill>
-                <a:latin typeface="Segoe UI"/>
-              </a:rPr>
-              <a:t>08 · Новые размеченные данные B/D</a:t>
-            </a:r>
-          </a:p>
-        </p:txBody>
-      </p:sp>
-      <p:sp>
-        <p:nvSpPr>
-          <p:cNvPr id="3" name="TextBox 2"/>
-          <p:cNvSpPr txBox="1"/>
-          <p:nvPr/>
-        </p:nvSpPr>
-        <p:spPr>
-          <a:xfrm>
-            <a:off x="457200" y="457200"/>
-            <a:ext cx="11247120" cy="960120"/>
-          </a:xfrm>
-          <a:prstGeom prst="rect">
-            <a:avLst/>
-          </a:prstGeom>
-          <a:noFill/>
-        </p:spPr>
-        <p:txBody>
-          <a:bodyPr wrap="square" anchor="t" lIns="18288" rIns="18288" tIns="18288" bIns="18288">
-            <a:spAutoFit/>
-          </a:bodyPr>
-          <a:lstStyle/>
-          <a:p>
-            <a:pPr algn="l">
-              <a:spcAft>
-                <a:spcPts val="600"/>
-              </a:spcAft>
-            </a:pPr>
-            <a:r>
-              <a:rPr sz="2600" b="1">
-                <a:solidFill>
-                  <a:srgbClr val="EEEFF1"/>
-                </a:solidFill>
-                <a:latin typeface="Segoe UI"/>
-              </a:rPr>
-              <a:t>Новые данные: B — 65 съёмок и 14374 нитей Cózar, D — 2094 судов и облака; утечек 0</a:t>
-            </a:r>
-          </a:p>
-        </p:txBody>
-      </p:sp>
-      <p:sp>
-        <p:nvSpPr>
-          <p:cNvPr id="4" name="TextBox 3"/>
-          <p:cNvSpPr txBox="1"/>
-          <p:nvPr/>
-        </p:nvSpPr>
-        <p:spPr>
-          <a:xfrm>
-            <a:off x="457200" y="1600200"/>
-            <a:ext cx="5577840" cy="4572000"/>
-          </a:xfrm>
-          <a:prstGeom prst="rect">
-            <a:avLst/>
-          </a:prstGeom>
-          <a:noFill/>
-        </p:spPr>
-        <p:txBody>
-          <a:bodyPr wrap="square" anchor="t" lIns="18288" rIns="18288" tIns="18288" bIns="18288">
-            <a:spAutoFit/>
-          </a:bodyPr>
-          <a:lstStyle/>
-          <a:p>
-            <a:pPr algn="l">
-              <a:spcAft>
-                <a:spcPts val="1000"/>
-              </a:spcAft>
-            </a:pPr>
-            <a:r>
-              <a:rPr sz="1500" b="0">
-                <a:solidFill>
-                  <a:srgbClr val="EEEFF1"/>
-                </a:solidFill>
-                <a:latin typeface="Segoe UI"/>
-              </a:rPr>
-              <a:t>• B: PLP 38 съёмок (мишени), FloatingObjects 27 съёмок (25 регионов), Cózar 2024 — 14374 окон на 4435 съёмках</a:t>
-            </a:r>
-          </a:p>
-          <a:p>
-            <a:pPr algn="l">
-              <a:spcAft>
-                <a:spcPts val="1000"/>
-              </a:spcAft>
-            </a:pPr>
-            <a:r>
-              <a:rPr sz="1500" b="0">
-                <a:solidFill>
-                  <a:srgbClr val="EEEFF1"/>
-                </a:solidFill>
-                <a:latin typeface="Segoe UI"/>
-              </a:rPr>
-              <a:t>• D: суда у Финляндии — 2094 рамок, 18 съёмок; облака — 28 сцен; отклонено источников 13 (у каждого причина)</a:t>
-            </a:r>
-          </a:p>
-          <a:p>
-            <a:pPr algn="l">
-              <a:spcAft>
-                <a:spcPts val="1000"/>
-              </a:spcAft>
-            </a:pPr>
-            <a:r>
-              <a:rPr sz="1500" b="0">
-                <a:solidFill>
-                  <a:srgbClr val="EEEFF1"/>
-                </a:solidFill>
-                <a:latin typeface="Segoe UI"/>
-              </a:rPr>
-              <a:t>• Утечки: та же съёмка или те же пиксели с MARIDA, MADOS и нашими сценами — 0; по содержимому 0 из 119; исключён 1 дубль</a:t>
-            </a:r>
-          </a:p>
-          <a:p>
-            <a:pPr algn="l">
-              <a:spcAft>
-                <a:spcPts val="1000"/>
-              </a:spcAft>
-            </a:pPr>
-            <a:r>
-              <a:rPr sz="1500" b="0">
-                <a:solidFill>
-                  <a:srgbClr val="EEEFF1"/>
-                </a:solidFill>
-                <a:latin typeface="Segoe UI"/>
-              </a:rPr>
               <a:t>• Детектор без дообучения на L2A: нити Cózar 36 %, Refined 2.8 % пикселей; ложные на судах 25.9 %; облака — 4 пикс.</a:t>
-            </a:r>
-          </a:p>
-          <a:p>
-            <a:pPr algn="l">
-              <a:spcAft>
-                <a:spcPts val="1000"/>
-              </a:spcAft>
-            </a:pPr>
-            <a:r>
-              <a:rPr sz="1500" b="0">
-                <a:solidFill>
-                  <a:srgbClr val="EEEFF1"/>
-                </a:solidFill>
-                <a:latin typeface="Segoe UI"/>
-              </a:rPr>
-              <a:t>• Дообучение на B + D по правилу, записанному заранее: принято 0 из 10 — в сервисе weights/lgbm; U-Net MARIDA на test 0.501 против 0.871 (приложение)</a:t>
             </a:r>
           </a:p>
         </p:txBody>
@@ -12771,7 +12778,490 @@
                 </a:solidFill>
                 <a:latin typeface="Segoe UI"/>
               </a:rPr>
-              <a:t>2:12</a:t>
+              <a:t>2:05</a:t>
+            </a:r>
+          </a:p>
+        </p:txBody>
+      </p:sp>
+    </p:spTree>
+  </p:cSld>
+  <p:clrMapOvr>
+    <a:masterClrMapping/>
+  </p:clrMapOvr>
+</p:sld>
+</file>
+
+<file path=ppt/slides/slide8.xml><?xml version="1.0" encoding="utf-8"?>
+<p:sld xmlns:a="http://schemas.openxmlformats.org/drawingml/2006/main" xmlns:p="http://schemas.openxmlformats.org/presentationml/2006/main" xmlns:r="http://schemas.openxmlformats.org/officeDocument/2006/relationships">
+  <p:cSld>
+    <p:bg>
+      <p:bgPr>
+        <a:solidFill>
+          <a:srgbClr val="101216"/>
+        </a:solidFill>
+        <a:effectLst/>
+      </p:bgPr>
+    </p:bg>
+    <p:spTree>
+      <p:nvGrpSpPr>
+        <p:cNvPr id="1" name=""/>
+        <p:cNvGrpSpPr/>
+        <p:nvPr/>
+      </p:nvGrpSpPr>
+      <p:grpSpPr/>
+      <p:sp>
+        <p:nvSpPr>
+          <p:cNvPr id="2" name="TextBox 1"/>
+          <p:cNvSpPr txBox="1"/>
+          <p:nvPr/>
+        </p:nvSpPr>
+        <p:spPr>
+          <a:xfrm>
+            <a:off x="457200" y="201168"/>
+            <a:ext cx="8229600" cy="274320"/>
+          </a:xfrm>
+          <a:prstGeom prst="rect">
+            <a:avLst/>
+          </a:prstGeom>
+          <a:noFill/>
+        </p:spPr>
+        <p:txBody>
+          <a:bodyPr wrap="square" anchor="t" lIns="18288" rIns="18288" tIns="18288" bIns="18288">
+            <a:spAutoFit/>
+          </a:bodyPr>
+          <a:lstStyle/>
+          <a:p>
+            <a:pPr algn="l">
+              <a:spcAft>
+                <a:spcPts val="600"/>
+              </a:spcAft>
+            </a:pPr>
+            <a:r>
+              <a:rPr sz="1200" b="1">
+                <a:solidFill>
+                  <a:srgbClr val="D9912E"/>
+                </a:solidFill>
+                <a:latin typeface="Segoe UI"/>
+              </a:rPr>
+              <a:t>08 · Разбор ошибок на сложном фоне</a:t>
+            </a:r>
+          </a:p>
+        </p:txBody>
+      </p:sp>
+      <p:sp>
+        <p:nvSpPr>
+          <p:cNvPr id="3" name="TextBox 2"/>
+          <p:cNvSpPr txBox="1"/>
+          <p:nvPr/>
+        </p:nvSpPr>
+        <p:spPr>
+          <a:xfrm>
+            <a:off x="457200" y="457200"/>
+            <a:ext cx="11247120" cy="960120"/>
+          </a:xfrm>
+          <a:prstGeom prst="rect">
+            <a:avLst/>
+          </a:prstGeom>
+          <a:noFill/>
+        </p:spPr>
+        <p:txBody>
+          <a:bodyPr wrap="square" anchor="t" lIns="18288" rIns="18288" tIns="18288" bIns="18288">
+            <a:spAutoFit/>
+          </a:bodyPr>
+          <a:lstStyle/>
+          <a:p>
+            <a:pPr algn="l">
+              <a:spcAft>
+                <a:spcPts val="600"/>
+              </a:spcAft>
+            </a:pPr>
+            <a:r>
+              <a:rPr sz="2300" b="1">
+                <a:solidFill>
+                  <a:srgbClr val="EEEFF1"/>
+                </a:solidFill>
+                <a:latin typeface="Segoe UI"/>
+              </a:rPr>
+              <a:t>Сложный фон: нити Cózar в обучении — полнота до 97 %, но пена 50/50 и до 91 % судов становятся «мусором»</a:t>
+            </a:r>
+          </a:p>
+        </p:txBody>
+      </p:sp>
+      <p:sp>
+        <p:nvSpPr>
+          <p:cNvPr id="4" name="TextBox 3"/>
+          <p:cNvSpPr txBox="1"/>
+          <p:nvPr/>
+        </p:nvSpPr>
+        <p:spPr>
+          <a:xfrm>
+            <a:off x="457200" y="1600200"/>
+            <a:ext cx="5577840" cy="4572000"/>
+          </a:xfrm>
+          <a:prstGeom prst="rect">
+            <a:avLst/>
+          </a:prstGeom>
+          <a:noFill/>
+        </p:spPr>
+        <p:txBody>
+          <a:bodyPr wrap="square" anchor="t" lIns="18288" rIns="18288" tIns="18288" bIns="18288">
+            <a:spAutoFit/>
+          </a:bodyPr>
+          <a:lstStyle/>
+          <a:p>
+            <a:pPr algn="l">
+              <a:spcAft>
+                <a:spcPts val="1000"/>
+              </a:spcAft>
+            </a:pPr>
+            <a:r>
+              <a:rPr sz="1500" b="0">
+                <a:solidFill>
+                  <a:srgbClr val="EEEFF1"/>
+                </a:solidFill>
+                <a:latin typeface="Segoe UI"/>
+              </a:rPr>
+              <a:t>• Откат weights/lgbm (L2A, как в сервисе): нити Cózar 36 %, ложные на судах 26 %, на пене пар 4/50</a:t>
+            </a:r>
+          </a:p>
+          <a:p>
+            <a:pPr algn="l">
+              <a:spcAft>
+                <a:spcPts val="1000"/>
+              </a:spcAft>
+            </a:pPr>
+            <a:r>
+              <a:rPr sz="1500" b="0">
+                <a:solidFill>
+                  <a:srgbClr val="EEEFF1"/>
+                </a:solidFill>
+                <a:latin typeface="Segoe UI"/>
+              </a:rPr>
+              <a:t>• + естественные B (Cózar, линии FloatingObjects): нити 77–97 %, но F1 MARIDA val −0.031…−0.057, ложные на 6–7 % чистой воды и 74–91 % судов</a:t>
+            </a:r>
+          </a:p>
+          <a:p>
+            <a:pPr algn="l">
+              <a:spcAft>
+                <a:spcPts val="1000"/>
+              </a:spcAft>
+            </a:pPr>
+            <a:r>
+              <a:rPr sz="1500" b="0">
+                <a:solidFill>
+                  <a:srgbClr val="EEEFF1"/>
+                </a:solidFill>
+                <a:latin typeface="Segoe UI"/>
+              </a:rPr>
+              <a:t>• + D судов: ложные на судах 26 % → 4 %, на пене 0/50, но нити 36 % → 27 %</a:t>
+            </a:r>
+          </a:p>
+          <a:p>
+            <a:pPr algn="l">
+              <a:spcAft>
+                <a:spcPts val="1000"/>
+              </a:spcAft>
+            </a:pPr>
+            <a:r>
+              <a:rPr sz="1500" b="0">
+                <a:solidFill>
+                  <a:srgbClr val="EEEFF1"/>
+                </a:solidFill>
+                <a:latin typeface="Segoe UI"/>
+              </a:rPr>
+              <a:t>• Суда, пена и нити спектрально близки: выигрыш на одном ломает другое. Итог: правило принятия (записано до экспериментов) не прошёл ни один из 13 вариантов с новыми данными (×3 seed) и контрольный r0 → остаётся weights/lgbm</a:t>
+            </a:r>
+          </a:p>
+        </p:txBody>
+      </p:sp>
+      <p:graphicFrame>
+        <p:nvGraphicFramePr>
+          <p:cNvPr id="5" name="Table 4"/>
+          <p:cNvGraphicFramePr>
+            <a:graphicFrameLocks noGrp="1"/>
+          </p:cNvGraphicFramePr>
+          <p:nvPr/>
+        </p:nvGraphicFramePr>
+        <p:xfrm>
+          <a:off x="6400800" y="1691640"/>
+          <a:ext cx="5349239" cy="1316736"/>
+        </p:xfrm>
+        <a:graphic>
+          <a:graphicData uri="http://schemas.openxmlformats.org/drawingml/2006/table">
+            <a:tbl>
+              <a:tblPr firstRow="1" bandRow="1">
+                <a:tableStyleId>{5C22544A-7EE6-4342-B048-85BDC9FD1C3A}</a:tableStyleId>
+              </a:tblPr>
+              <a:tblGrid>
+                <a:gridCol w="2460650"/>
+                <a:gridCol w="2888589"/>
+              </a:tblGrid>
+              <a:tr h="329184">
+                <a:tc>
+                  <a:txBody>
+                    <a:bodyPr/>
+                    <a:lstStyle/>
+                    <a:p>
+                      <a:r>
+                        <a:rPr sz="1300" b="1">
+                          <a:solidFill>
+                            <a:srgbClr val="EEEFF1"/>
+                          </a:solidFill>
+                          <a:latin typeface="Segoe UI"/>
+                        </a:rPr>
+                        <a:t>Вариант</a:t>
+                      </a:r>
+                    </a:p>
+                  </a:txBody>
+                  <a:tcPr marL="73152" marR="73152" marT="27432" marB="27432">
+                    <a:solidFill>
+                      <a:srgbClr val="5B6370"/>
+                    </a:solidFill>
+                  </a:tcPr>
+                </a:tc>
+                <a:tc>
+                  <a:txBody>
+                    <a:bodyPr/>
+                    <a:lstStyle/>
+                    <a:p>
+                      <a:pPr algn="r"/>
+                      <a:r>
+                        <a:rPr sz="1300" b="1">
+                          <a:solidFill>
+                            <a:srgbClr val="EEEFF1"/>
+                          </a:solidFill>
+                          <a:latin typeface="Segoe UI"/>
+                        </a:rPr>
+                        <a:t>Нити · суда · пена</a:t>
+                      </a:r>
+                    </a:p>
+                  </a:txBody>
+                  <a:tcPr marL="73152" marR="73152" marT="27432" marB="27432">
+                    <a:solidFill>
+                      <a:srgbClr val="5B6370"/>
+                    </a:solidFill>
+                  </a:tcPr>
+                </a:tc>
+              </a:tr>
+              <a:tr h="329184">
+                <a:tc>
+                  <a:txBody>
+                    <a:bodyPr/>
+                    <a:lstStyle/>
+                    <a:p>
+                      <a:r>
+                        <a:rPr sz="1300" b="0">
+                          <a:solidFill>
+                            <a:srgbClr val="EEEFF1"/>
+                          </a:solidFill>
+                          <a:latin typeface="Segoe UI"/>
+                        </a:rPr>
+                        <a:t>Откат weights/lgbm</a:t>
+                      </a:r>
+                    </a:p>
+                  </a:txBody>
+                  <a:tcPr marL="73152" marR="73152" marT="27432" marB="27432">
+                    <a:solidFill>
+                      <a:srgbClr val="1B1E24"/>
+                    </a:solidFill>
+                  </a:tcPr>
+                </a:tc>
+                <a:tc>
+                  <a:txBody>
+                    <a:bodyPr/>
+                    <a:lstStyle/>
+                    <a:p>
+                      <a:pPr algn="r"/>
+                      <a:r>
+                        <a:rPr sz="1300" b="0">
+                          <a:solidFill>
+                            <a:srgbClr val="EEEFF1"/>
+                          </a:solidFill>
+                          <a:latin typeface="Segoe UI"/>
+                        </a:rPr>
+                        <a:t>36 % · 26 % · 4/50</a:t>
+                      </a:r>
+                    </a:p>
+                  </a:txBody>
+                  <a:tcPr marL="73152" marR="73152" marT="27432" marB="27432">
+                    <a:solidFill>
+                      <a:srgbClr val="1B1E24"/>
+                    </a:solidFill>
+                  </a:tcPr>
+                </a:tc>
+              </a:tr>
+              <a:tr h="329184">
+                <a:tc>
+                  <a:txBody>
+                    <a:bodyPr/>
+                    <a:lstStyle/>
+                    <a:p>
+                      <a:r>
+                        <a:rPr sz="1300" b="0">
+                          <a:solidFill>
+                            <a:srgbClr val="EEEFF1"/>
+                          </a:solidFill>
+                          <a:latin typeface="Segoe UI"/>
+                        </a:rPr>
+                        <a:t>+ естественные B</a:t>
+                      </a:r>
+                    </a:p>
+                  </a:txBody>
+                  <a:tcPr marL="73152" marR="73152" marT="27432" marB="27432">
+                    <a:solidFill>
+                      <a:srgbClr val="1B1E24"/>
+                    </a:solidFill>
+                  </a:tcPr>
+                </a:tc>
+                <a:tc>
+                  <a:txBody>
+                    <a:bodyPr/>
+                    <a:lstStyle/>
+                    <a:p>
+                      <a:pPr algn="r"/>
+                      <a:r>
+                        <a:rPr sz="1300" b="0">
+                          <a:solidFill>
+                            <a:srgbClr val="EEEFF1"/>
+                          </a:solidFill>
+                          <a:latin typeface="Segoe UI"/>
+                        </a:rPr>
+                        <a:t>77–97 % · 74–91 % · 50/50</a:t>
+                      </a:r>
+                    </a:p>
+                  </a:txBody>
+                  <a:tcPr marL="73152" marR="73152" marT="27432" marB="27432">
+                    <a:solidFill>
+                      <a:srgbClr val="1B1E24"/>
+                    </a:solidFill>
+                  </a:tcPr>
+                </a:tc>
+              </a:tr>
+              <a:tr h="329184">
+                <a:tc>
+                  <a:txBody>
+                    <a:bodyPr/>
+                    <a:lstStyle/>
+                    <a:p>
+                      <a:r>
+                        <a:rPr sz="1300" b="1">
+                          <a:solidFill>
+                            <a:srgbClr val="EEEFF1"/>
+                          </a:solidFill>
+                          <a:latin typeface="Segoe UI"/>
+                        </a:rPr>
+                        <a:t>+ D судов</a:t>
+                      </a:r>
+                    </a:p>
+                  </a:txBody>
+                  <a:tcPr marL="73152" marR="73152" marT="27432" marB="27432">
+                    <a:solidFill>
+                      <a:srgbClr val="1B1E24"/>
+                    </a:solidFill>
+                  </a:tcPr>
+                </a:tc>
+                <a:tc>
+                  <a:txBody>
+                    <a:bodyPr/>
+                    <a:lstStyle/>
+                    <a:p>
+                      <a:pPr algn="r"/>
+                      <a:r>
+                        <a:rPr sz="1300" b="1">
+                          <a:solidFill>
+                            <a:srgbClr val="EEEFF1"/>
+                          </a:solidFill>
+                          <a:latin typeface="Segoe UI"/>
+                        </a:rPr>
+                        <a:t>27 % · 4 % · 0/50</a:t>
+                      </a:r>
+                    </a:p>
+                  </a:txBody>
+                  <a:tcPr marL="73152" marR="73152" marT="27432" marB="27432">
+                    <a:solidFill>
+                      <a:srgbClr val="1B1E24"/>
+                    </a:solidFill>
+                  </a:tcPr>
+                </a:tc>
+              </a:tr>
+            </a:tbl>
+          </a:graphicData>
+        </a:graphic>
+      </p:graphicFrame>
+      <p:sp>
+        <p:nvSpPr>
+          <p:cNvPr id="6" name="TextBox 5"/>
+          <p:cNvSpPr txBox="1"/>
+          <p:nvPr/>
+        </p:nvSpPr>
+        <p:spPr>
+          <a:xfrm>
+            <a:off x="457200" y="6355080"/>
+            <a:ext cx="10515600" cy="320040"/>
+          </a:xfrm>
+          <a:prstGeom prst="rect">
+            <a:avLst/>
+          </a:prstGeom>
+          <a:noFill/>
+        </p:spPr>
+        <p:txBody>
+          <a:bodyPr wrap="square" anchor="t" lIns="18288" rIns="18288" tIns="18288" bIns="18288">
+            <a:spAutoFit/>
+          </a:bodyPr>
+          <a:lstStyle/>
+          <a:p>
+            <a:pPr algn="l">
+              <a:spcAft>
+                <a:spcPts val="600"/>
+              </a:spcAft>
+            </a:pPr>
+            <a:r>
+              <a:rPr sz="1000" b="0">
+                <a:solidFill>
+                  <a:srgbClr val="9AA1AC"/>
+                </a:solidFill>
+                <a:latin typeface="Segoe UI"/>
+              </a:rPr>
+              <a:t>Источник: reports/detector_v2/experiments.md (снимок experiments_snapshot.json), decision.json; configs/detector_v2_eval.yaml</a:t>
+            </a:r>
+          </a:p>
+        </p:txBody>
+      </p:sp>
+      <p:sp>
+        <p:nvSpPr>
+          <p:cNvPr id="7" name="TextBox 6"/>
+          <p:cNvSpPr txBox="1"/>
+          <p:nvPr/>
+        </p:nvSpPr>
+        <p:spPr>
+          <a:xfrm>
+            <a:off x="11155680" y="6355080"/>
+            <a:ext cx="640080" cy="320040"/>
+          </a:xfrm>
+          <a:prstGeom prst="rect">
+            <a:avLst/>
+          </a:prstGeom>
+          <a:noFill/>
+        </p:spPr>
+        <p:txBody>
+          <a:bodyPr wrap="square" anchor="t" lIns="18288" rIns="18288" tIns="18288" bIns="18288">
+            <a:spAutoFit/>
+          </a:bodyPr>
+          <a:lstStyle/>
+          <a:p>
+            <a:pPr algn="r">
+              <a:spcAft>
+                <a:spcPts val="600"/>
+              </a:spcAft>
+            </a:pPr>
+            <a:r>
+              <a:rPr sz="1000" b="0">
+                <a:solidFill>
+                  <a:srgbClr val="9AA1AC"/>
+                </a:solidFill>
+                <a:latin typeface="Segoe UI"/>
+              </a:rPr>
+              <a:t>2:26</a:t>
             </a:r>
           </a:p>
         </p:txBody>
@@ -13461,7 +13951,7 @@
                 </a:solidFill>
                 <a:latin typeface="Segoe UI"/>
               </a:rPr>
-              <a:t>2:39</a:t>
+              <a:t>2:55</a:t>
             </a:r>
           </a:p>
         </p:txBody>

--- a/reports/case_deck.pptx
+++ b/reports/case_deck.pptx
@@ -591,7 +591,7 @@
           <a:lstStyle/>
           <a:p>
             <a:r>
-              <a:t>[3:25–3:48] Концентрация: C равно N на A, интервал Пуассона, контрольный пример — 60.0. Модели сравниваем с медианой на участках маршрута. На dev ridge выигрывает слабо, а на отложенном test, посчитанном один раз, — 30.0 против 25.2 у медианы. Правило записано до открытия test, поэтому на карте — медиана. Модель не спасаем.</a:t>
+              <a:t>[3:27–3:50] Концентрация: C равно N на A, интервал Пуассона, контрольный пример — 60.0. Модели сравниваем с медианой на участках маршрута. На dev ridge выигрывает слабо, а на отложенном test, посчитанном один раз, — 30.0 против 25.2 у медианы. Правило записано до открытия test, поэтому на карте — медиана. Модель не спасаем.</a:t>
             </a:r>
           </a:p>
         </p:txBody>
@@ -661,7 +661,7 @@
           <a:lstStyle/>
           <a:p>
             <a:r>
-              <a:t>[3:48–4:03] Карта повторяет отчёт: три слоя и два статуса полосы. Эта пара отклонена по дрейфу — «связь не подтверждена»; пикселей детектора в полосе нет, концентрация по снимку недоступна. Выгрузка сверена с API самопроверкой.</a:t>
+              <a:t>[3:50–4:05] Карта повторяет отчёт: три слоя и два статуса полосы. Эта пара отклонена по дрейфу — «связь не подтверждена»; пикселей детектора в полосе нет, концентрация по снимку недоступна. Выгрузка сверена с API самопроверкой.</a:t>
             </a:r>
           </a:p>
         </p:txBody>
@@ -731,7 +731,7 @@
           <a:lstStyle/>
           <a:p>
             <a:r>
-              <a:t>[4:03–4:32] Наш вклад — не модель, а решения, которые защищают выводы от самообмана. Допуск по дрейфу в реестре пар, сплит по участкам маршрута, найденный после утечки через соседей дня, test один раз по заранее записанному правилу, отказ от гармонизации по val, геометрия трансект по первоисточникам и один источник чисел с тестом. Разметка MARIDA, протокол RandomForest и индекс FDI — готовые, мы с ними сравниваемся.</a:t>
+              <a:t>[4:05–4:34] Наш вклад — не модель, а решения, которые защищают выводы от самообмана. Допуск по дрейфу в реестре пар, сплит по участкам маршрута, найденный после утечки через соседей дня, test один раз по заранее записанному правилу, отказ от гармонизации по val, геометрия трансект по первоисточникам и один источник чисел с тестом. Разметка MARIDA, протокол RandomForest и индекс FDI — готовые, мы с ними сравниваемся.</a:t>
             </a:r>
           </a:p>
         </p:txBody>
@@ -801,7 +801,7 @@
           <a:lstStyle/>
           <a:p>
             <a:r>
-              <a:t>[4:32–4:44] Ограничения называем сами: перенос на снимок не доказан, данных мало, интервалы недопокрывают. Развитие — трансекты под пролёт с записанным временем и больше рейсов.</a:t>
+              <a:t>[4:34–4:46] Ограничения называем сами: перенос на снимок не доказан, данных мало, интервалы недопокрывают. Развитие — трансекты под пролёт с записанным временем и больше рейсов.</a:t>
             </a:r>
           </a:p>
         </p:txBody>
@@ -871,7 +871,7 @@
           <a:lstStyle/>
           <a:p>
             <a:r>
-              <a:t>[4:44–4:56] Всё воспроизводится одной командой без сети; чистый клон до карты — 7,5 минуты, числа совпали. Спасибо, готовы к вопросам.</a:t>
+              <a:t>[4:46–4:58] Всё воспроизводится одной командой без сети; чистый клон до карты — 7,5 минуты, числа совпали. Спасибо, готовы к вопросам.</a:t>
             </a:r>
           </a:p>
         </p:txBody>
@@ -1711,7 +1711,7 @@
           <a:lstStyle/>
           <a:p>
             <a:r>
-              <a:t>[2:05–2:26] Для детектора мы собрали новые метки: подтверждённые скопления PLP, FloatingObjects и нити Cózar — это B, суда и облака — D. Утечек с MARIDA и MADOS нет, проверяли по дате и по самим пикселям. Текущий детектор на них почти не видит нити и путает суда.</a:t>
+              <a:t>[2:05–2:24] Для детектора мы собрали новые метки: скопления PLP, FloatingObjects и нити Cózar — B, суда и облака — D. С MARIDA совпадений нет; с MADOS по пикселям сверены PLP и FloatingObjects. Детектор на них почти не видит нити и путает суда.</a:t>
             </a:r>
           </a:p>
         </p:txBody>
@@ -1781,7 +1781,7 @@
           <a:lstStyle/>
           <a:p>
             <a:r>
-              <a:t>[2:26–2:55] Главная трудность — сложный фон. Если учить детектор на естественных нитях Cózar, полнота на них растёт до 97 процентов, но пена и суда тоже становятся мусором. Если добавить суда как отрицательные, ложные на судах падают с 26 до 4 процентов, но теряются нити. Правило, записанное заранее, не прошёл ни один вариант — остаётся прежний детектор, а его ограничение по судам мы называем прямо.</a:t>
+              <a:t>[2:24–2:53] Главная трудность — сложный фон. Если учить детектор на естественных нитях Cózar, полнота на них растёт до 97 процентов, но пена и суда тоже становятся мусором. Если добавить суда как отрицательные, ложные на судах падают с 26 до 4 процентов, но теряются нити. Правило, записанное заранее, не прошёл ни один вариант — остаётся прежний детектор, а его ограничение по судам мы называем прямо.</a:t>
             </a:r>
           </a:p>
         </p:txBody>
@@ -1851,7 +1851,7 @@
           <a:lstStyle/>
           <a:p>
             <a:r>
-              <a:t>[2:55–3:25] Детектор — пиксельный LightGBM. На test MARIDA F1 0.871, RandomForest — 0.771, индексы FDI — 0.042; саргассум и мутную воду он не путает. На снимках пар мы выключили гармонизацию каналов — решение по MARIDA val, не по тесту. Сейчас 5 объектов на 22 сценах и ни одного в полосах; вне полосы — судно, это верное срабатывание. Прежний режим давал 975 объектов, почти всё — фон моря.</a:t>
+              <a:t>[2:53–3:27] Детектор — пиксельный LightGBM. На test MARIDA F1 0.871, RandomForest — 0.771, индексы FDI — 0.042; саргассум и мутную воду он не путает. На снимках пар мы выключили гармонизацию каналов — решение по MARIDA val, не по тесту. Сейчас 5 объектов на 22 сценах и ни одного в полосах; вне полосы — одиночные пиксели пены и, вероятно, судно — все ложные, скоплений нет. Прежний режим давал 975 объектов, почти всё — фон моря.</a:t>
             </a:r>
           </a:p>
         </p:txBody>
@@ -5170,7 +5170,7 @@
                 </a:solidFill>
                 <a:latin typeface="Segoe UI"/>
               </a:rPr>
-              <a:t>Источник: reports/final_numbers.json → case.sections (13 разделов с источником и протоколом)</a:t>
+              <a:t>Источник: reports/final_numbers.json → case.sections (14 разделов с источником и протоколом)</a:t>
             </a:r>
           </a:p>
         </p:txBody>
@@ -5405,16 +5405,324 @@
           </a:p>
         </p:txBody>
       </p:sp>
-      <p:sp>
-        <p:nvSpPr>
-          <p:cNvPr id="5" name="TextBox 4"/>
+      <p:graphicFrame>
+        <p:nvGraphicFramePr>
+          <p:cNvPr id="5" name="Table 4"/>
+          <p:cNvGraphicFramePr>
+            <a:graphicFrameLocks noGrp="1"/>
+          </p:cNvGraphicFramePr>
+          <p:nvPr/>
+        </p:nvGraphicFramePr>
+        <p:xfrm>
+          <a:off x="6400800" y="1691640"/>
+          <a:ext cx="5349240" cy="1975104"/>
+        </p:xfrm>
+        <a:graphic>
+          <a:graphicData uri="http://schemas.openxmlformats.org/drawingml/2006/table">
+            <a:tbl>
+              <a:tblPr firstRow="1" bandRow="1">
+                <a:tableStyleId>{5C22544A-7EE6-4342-B048-85BDC9FD1C3A}</a:tableStyleId>
+              </a:tblPr>
+              <a:tblGrid>
+                <a:gridCol w="2674620"/>
+                <a:gridCol w="2674620"/>
+              </a:tblGrid>
+              <a:tr h="329184">
+                <a:tc>
+                  <a:txBody>
+                    <a:bodyPr/>
+                    <a:lstStyle/>
+                    <a:p>
+                      <a:r>
+                        <a:rPr sz="1300" b="1">
+                          <a:solidFill>
+                            <a:srgbClr val="EEEFF1"/>
+                          </a:solidFill>
+                          <a:latin typeface="Segoe UI"/>
+                        </a:rPr>
+                        <a:t>Отложенный test: модель / медиана</a:t>
+                      </a:r>
+                    </a:p>
+                  </a:txBody>
+                  <a:tcPr marL="73152" marR="73152" marT="27432" marB="27432">
+                    <a:solidFill>
+                      <a:srgbClr val="5B6370"/>
+                    </a:solidFill>
+                  </a:tcPr>
+                </a:tc>
+                <a:tc>
+                  <a:txBody>
+                    <a:bodyPr/>
+                    <a:lstStyle/>
+                    <a:p>
+                      <a:pPr algn="r"/>
+                      <a:r>
+                        <a:rPr sz="1300" b="1">
+                          <a:solidFill>
+                            <a:srgbClr val="EEEFF1"/>
+                          </a:solidFill>
+                          <a:latin typeface="Segoe UI"/>
+                        </a:rPr>
+                        <a:t>S2 · S1</a:t>
+                      </a:r>
+                    </a:p>
+                  </a:txBody>
+                  <a:tcPr marL="73152" marR="73152" marT="27432" marB="27432">
+                    <a:solidFill>
+                      <a:srgbClr val="5B6370"/>
+                    </a:solidFill>
+                  </a:tcPr>
+                </a:tc>
+              </a:tr>
+              <a:tr h="329184">
+                <a:tc>
+                  <a:txBody>
+                    <a:bodyPr/>
+                    <a:lstStyle/>
+                    <a:p>
+                      <a:r>
+                        <a:rPr sz="1300" b="0">
+                          <a:solidFill>
+                            <a:srgbClr val="EEEFF1"/>
+                          </a:solidFill>
+                          <a:latin typeface="Segoe UI"/>
+                        </a:rPr>
+                        <a:t>n событий</a:t>
+                      </a:r>
+                    </a:p>
+                  </a:txBody>
+                  <a:tcPr marL="73152" marR="73152" marT="27432" marB="27432">
+                    <a:solidFill>
+                      <a:srgbClr val="1B1E24"/>
+                    </a:solidFill>
+                  </a:tcPr>
+                </a:tc>
+                <a:tc>
+                  <a:txBody>
+                    <a:bodyPr/>
+                    <a:lstStyle/>
+                    <a:p>
+                      <a:pPr algn="r"/>
+                      <a:r>
+                        <a:rPr sz="1300" b="0">
+                          <a:solidFill>
+                            <a:srgbClr val="EEEFF1"/>
+                          </a:solidFill>
+                          <a:latin typeface="Segoe UI"/>
+                        </a:rPr>
+                        <a:t>14 · 19</a:t>
+                      </a:r>
+                    </a:p>
+                  </a:txBody>
+                  <a:tcPr marL="73152" marR="73152" marT="27432" marB="27432">
+                    <a:solidFill>
+                      <a:srgbClr val="1B1E24"/>
+                    </a:solidFill>
+                  </a:tcPr>
+                </a:tc>
+              </a:tr>
+              <a:tr h="329184">
+                <a:tc>
+                  <a:txBody>
+                    <a:bodyPr/>
+                    <a:lstStyle/>
+                    <a:p>
+                      <a:r>
+                        <a:rPr sz="1300" b="0">
+                          <a:solidFill>
+                            <a:srgbClr val="EEEFF1"/>
+                          </a:solidFill>
+                          <a:latin typeface="Segoe UI"/>
+                        </a:rPr>
+                        <a:t>MAE, шт./км²</a:t>
+                      </a:r>
+                    </a:p>
+                  </a:txBody>
+                  <a:tcPr marL="73152" marR="73152" marT="27432" marB="27432">
+                    <a:solidFill>
+                      <a:srgbClr val="1B1E24"/>
+                    </a:solidFill>
+                  </a:tcPr>
+                </a:tc>
+                <a:tc>
+                  <a:txBody>
+                    <a:bodyPr/>
+                    <a:lstStyle/>
+                    <a:p>
+                      <a:pPr algn="r"/>
+                      <a:r>
+                        <a:rPr sz="1300" b="0">
+                          <a:solidFill>
+                            <a:srgbClr val="EEEFF1"/>
+                          </a:solidFill>
+                          <a:latin typeface="Segoe UI"/>
+                        </a:rPr>
+                        <a:t>30.0 / 25.2 · 370.0 / 371.1</a:t>
+                      </a:r>
+                    </a:p>
+                  </a:txBody>
+                  <a:tcPr marL="73152" marR="73152" marT="27432" marB="27432">
+                    <a:solidFill>
+                      <a:srgbClr val="1B1E24"/>
+                    </a:solidFill>
+                  </a:tcPr>
+                </a:tc>
+              </a:tr>
+              <a:tr h="329184">
+                <a:tc>
+                  <a:txBody>
+                    <a:bodyPr/>
+                    <a:lstStyle/>
+                    <a:p>
+                      <a:r>
+                        <a:rPr sz="1300" b="0">
+                          <a:solidFill>
+                            <a:srgbClr val="EEEFF1"/>
+                          </a:solidFill>
+                          <a:latin typeface="Segoe UI"/>
+                        </a:rPr>
+                        <a:t>RMSE, шт./км²</a:t>
+                      </a:r>
+                    </a:p>
+                  </a:txBody>
+                  <a:tcPr marL="73152" marR="73152" marT="27432" marB="27432">
+                    <a:solidFill>
+                      <a:srgbClr val="1B1E24"/>
+                    </a:solidFill>
+                  </a:tcPr>
+                </a:tc>
+                <a:tc>
+                  <a:txBody>
+                    <a:bodyPr/>
+                    <a:lstStyle/>
+                    <a:p>
+                      <a:pPr algn="r"/>
+                      <a:r>
+                        <a:rPr sz="1300" b="0">
+                          <a:solidFill>
+                            <a:srgbClr val="EEEFF1"/>
+                          </a:solidFill>
+                          <a:latin typeface="Segoe UI"/>
+                        </a:rPr>
+                        <a:t>41.5 / 32.3 · 522.5 / 502.4</a:t>
+                      </a:r>
+                    </a:p>
+                  </a:txBody>
+                  <a:tcPr marL="73152" marR="73152" marT="27432" marB="27432">
+                    <a:solidFill>
+                      <a:srgbClr val="1B1E24"/>
+                    </a:solidFill>
+                  </a:tcPr>
+                </a:tc>
+              </a:tr>
+              <a:tr h="329184">
+                <a:tc>
+                  <a:txBody>
+                    <a:bodyPr/>
+                    <a:lstStyle/>
+                    <a:p>
+                      <a:r>
+                        <a:rPr sz="1300" b="0">
+                          <a:solidFill>
+                            <a:srgbClr val="EEEFF1"/>
+                          </a:solidFill>
+                          <a:latin typeface="Segoe UI"/>
+                        </a:rPr>
+                        <a:t>Покрытие 90 %-интервала</a:t>
+                      </a:r>
+                    </a:p>
+                  </a:txBody>
+                  <a:tcPr marL="73152" marR="73152" marT="27432" marB="27432">
+                    <a:solidFill>
+                      <a:srgbClr val="1B1E24"/>
+                    </a:solidFill>
+                  </a:tcPr>
+                </a:tc>
+                <a:tc>
+                  <a:txBody>
+                    <a:bodyPr/>
+                    <a:lstStyle/>
+                    <a:p>
+                      <a:pPr algn="r"/>
+                      <a:r>
+                        <a:rPr sz="1300" b="0">
+                          <a:solidFill>
+                            <a:srgbClr val="EEEFF1"/>
+                          </a:solidFill>
+                          <a:latin typeface="Segoe UI"/>
+                        </a:rPr>
+                        <a:t>71 / 93 % · 89 / 100 %</a:t>
+                      </a:r>
+                    </a:p>
+                  </a:txBody>
+                  <a:tcPr marL="73152" marR="73152" marT="27432" marB="27432">
+                    <a:solidFill>
+                      <a:srgbClr val="1B1E24"/>
+                    </a:solidFill>
+                  </a:tcPr>
+                </a:tc>
+              </a:tr>
+              <a:tr h="329184">
+                <a:tc>
+                  <a:txBody>
+                    <a:bodyPr/>
+                    <a:lstStyle/>
+                    <a:p>
+                      <a:r>
+                        <a:rPr sz="1300" b="1">
+                          <a:solidFill>
+                            <a:srgbClr val="EEEFF1"/>
+                          </a:solidFill>
+                          <a:latin typeface="Segoe UI"/>
+                        </a:rPr>
+                        <a:t>На карте</a:t>
+                      </a:r>
+                    </a:p>
+                  </a:txBody>
+                  <a:tcPr marL="73152" marR="73152" marT="27432" marB="27432">
+                    <a:solidFill>
+                      <a:srgbClr val="1B1E24"/>
+                    </a:solidFill>
+                  </a:tcPr>
+                </a:tc>
+                <a:tc>
+                  <a:txBody>
+                    <a:bodyPr/>
+                    <a:lstStyle/>
+                    <a:p>
+                      <a:pPr algn="r"/>
+                      <a:r>
+                        <a:rPr sz="1300" b="1">
+                          <a:solidFill>
+                            <a:srgbClr val="EEEFF1"/>
+                          </a:solidFill>
+                          <a:latin typeface="Segoe UI"/>
+                        </a:rPr>
+                        <a:t>медиана профиля</a:t>
+                      </a:r>
+                    </a:p>
+                  </a:txBody>
+                  <a:tcPr marL="73152" marR="73152" marT="27432" marB="27432">
+                    <a:solidFill>
+                      <a:srgbClr val="1B1E24"/>
+                    </a:solidFill>
+                  </a:tcPr>
+                </a:tc>
+              </a:tr>
+            </a:tbl>
+          </a:graphicData>
+        </a:graphic>
+      </p:graphicFrame>
+      <p:sp>
+        <p:nvSpPr>
+          <p:cNvPr id="6" name="TextBox 5"/>
           <p:cNvSpPr txBox="1"/>
           <p:nvPr/>
         </p:nvSpPr>
         <p:spPr>
           <a:xfrm>
-            <a:off x="6400800" y="1691640"/>
-            <a:ext cx="5349240" cy="365760"/>
+            <a:off x="457200" y="6355080"/>
+            <a:ext cx="10515600" cy="320040"/>
           </a:xfrm>
           <a:prstGeom prst="rect">
             <a:avLst/>
@@ -5433,271 +5741,27 @@
               </a:spcAft>
             </a:pPr>
             <a:r>
-              <a:rPr sz="1400" b="0">
+              <a:rPr sz="1000" b="0">
                 <a:solidFill>
                   <a:srgbClr val="9AA1AC"/>
                 </a:solidFill>
                 <a:latin typeface="Segoe UI"/>
               </a:rPr>
-              <a:t>S2, отложенный test (14 событий): MAE, шт./км²</a:t>
-            </a:r>
-          </a:p>
-        </p:txBody>
-      </p:sp>
-      <p:sp>
-        <p:nvSpPr>
-          <p:cNvPr id="6" name="TextBox 5"/>
+              <a:t>Источник: reports/case_conc/dev_cv.json, final_test.json; configs/case_selection.yaml: final_test</a:t>
+            </a:r>
+          </a:p>
+        </p:txBody>
+      </p:sp>
+      <p:sp>
+        <p:nvSpPr>
+          <p:cNvPr id="7" name="TextBox 6"/>
           <p:cNvSpPr txBox="1"/>
           <p:nvPr/>
         </p:nvSpPr>
         <p:spPr>
           <a:xfrm>
-            <a:off x="6400800" y="2148840"/>
-            <a:ext cx="2155240" cy="384048"/>
-          </a:xfrm>
-          <a:prstGeom prst="rect">
-            <a:avLst/>
-          </a:prstGeom>
-          <a:noFill/>
-        </p:spPr>
-        <p:txBody>
-          <a:bodyPr wrap="square" anchor="ctr" lIns="18288" rIns="18288" tIns="18288" bIns="18288">
-            <a:spAutoFit/>
-          </a:bodyPr>
-          <a:lstStyle/>
-          <a:p>
-            <a:pPr algn="l">
-              <a:spcAft>
-                <a:spcPts val="600"/>
-              </a:spcAft>
-            </a:pPr>
-            <a:r>
-              <a:rPr sz="1300" b="0">
-                <a:solidFill>
-                  <a:srgbClr val="EEEFF1"/>
-                </a:solidFill>
-                <a:latin typeface="Segoe UI"/>
-              </a:rPr>
-              <a:t>ridge_log (основная)</a:t>
-            </a:r>
-          </a:p>
-        </p:txBody>
-      </p:sp>
-      <p:sp>
-        <p:nvSpPr>
-          <p:cNvPr id="7" name="Rectangle 6"/>
-          <p:cNvSpPr/>
-          <p:nvPr/>
-        </p:nvSpPr>
-        <p:spPr>
-          <a:xfrm>
-            <a:off x="8647480" y="2212848"/>
-            <a:ext cx="2279599" cy="274320"/>
-          </a:xfrm>
-          <a:prstGeom prst="rect">
-            <a:avLst/>
-          </a:prstGeom>
-          <a:solidFill>
-            <a:srgbClr val="5B6370"/>
-          </a:solidFill>
-          <a:ln>
-            <a:noFill/>
-          </a:ln>
-          <a:effectLst/>
-        </p:spPr>
-        <p:style>
-          <a:lnRef idx="1">
-            <a:schemeClr val="accent1"/>
-          </a:lnRef>
-          <a:fillRef idx="3">
-            <a:schemeClr val="accent1"/>
-          </a:fillRef>
-          <a:effectRef idx="2">
-            <a:schemeClr val="accent1"/>
-          </a:effectRef>
-          <a:fontRef idx="minor">
-            <a:schemeClr val="lt1"/>
-          </a:fontRef>
-        </p:style>
-        <p:txBody>
-          <a:bodyPr rtlCol="0" anchor="ctr"/>
-          <a:lstStyle/>
-          <a:p>
-            <a:pPr algn="ctr"/>
-          </a:p>
-        </p:txBody>
-      </p:sp>
-      <p:sp>
-        <p:nvSpPr>
-          <p:cNvPr id="8" name="TextBox 7"/>
-          <p:cNvSpPr txBox="1"/>
-          <p:nvPr/>
-        </p:nvSpPr>
-        <p:spPr>
-          <a:xfrm>
-            <a:off x="11000232" y="2148840"/>
-            <a:ext cx="822960" cy="384048"/>
-          </a:xfrm>
-          <a:prstGeom prst="rect">
-            <a:avLst/>
-          </a:prstGeom>
-          <a:noFill/>
-        </p:spPr>
-        <p:txBody>
-          <a:bodyPr wrap="square" anchor="ctr" lIns="18288" rIns="18288" tIns="18288" bIns="18288">
-            <a:spAutoFit/>
-          </a:bodyPr>
-          <a:lstStyle/>
-          <a:p>
-            <a:pPr algn="l">
-              <a:spcAft>
-                <a:spcPts val="600"/>
-              </a:spcAft>
-            </a:pPr>
-            <a:r>
-              <a:rPr sz="1400" b="1">
-                <a:solidFill>
-                  <a:srgbClr val="EEEFF1"/>
-                </a:solidFill>
-                <a:latin typeface="Segoe UI"/>
-              </a:rPr>
-              <a:t>30.0</a:t>
-            </a:r>
-          </a:p>
-        </p:txBody>
-      </p:sp>
-      <p:sp>
-        <p:nvSpPr>
-          <p:cNvPr id="9" name="TextBox 8"/>
-          <p:cNvSpPr txBox="1"/>
-          <p:nvPr/>
-        </p:nvSpPr>
-        <p:spPr>
-          <a:xfrm>
-            <a:off x="6400800" y="2651760"/>
-            <a:ext cx="2155240" cy="384048"/>
-          </a:xfrm>
-          <a:prstGeom prst="rect">
-            <a:avLst/>
-          </a:prstGeom>
-          <a:noFill/>
-        </p:spPr>
-        <p:txBody>
-          <a:bodyPr wrap="square" anchor="ctr" lIns="18288" rIns="18288" tIns="18288" bIns="18288">
-            <a:spAutoFit/>
-          </a:bodyPr>
-          <a:lstStyle/>
-          <a:p>
-            <a:pPr algn="l">
-              <a:spcAft>
-                <a:spcPts val="600"/>
-              </a:spcAft>
-            </a:pPr>
-            <a:r>
-              <a:rPr sz="1300" b="0">
-                <a:solidFill>
-                  <a:srgbClr val="EEEFF1"/>
-                </a:solidFill>
-                <a:latin typeface="Segoe UI"/>
-              </a:rPr>
-              <a:t>медиана dev (на карте)</a:t>
-            </a:r>
-          </a:p>
-        </p:txBody>
-      </p:sp>
-      <p:sp>
-        <p:nvSpPr>
-          <p:cNvPr id="10" name="Rectangle 9"/>
-          <p:cNvSpPr/>
-          <p:nvPr/>
-        </p:nvSpPr>
-        <p:spPr>
-          <a:xfrm>
-            <a:off x="8647480" y="2715768"/>
-            <a:ext cx="1914863" cy="274320"/>
-          </a:xfrm>
-          <a:prstGeom prst="rect">
-            <a:avLst/>
-          </a:prstGeom>
-          <a:solidFill>
-            <a:srgbClr val="D9912E"/>
-          </a:solidFill>
-          <a:ln>
-            <a:noFill/>
-          </a:ln>
-          <a:effectLst/>
-        </p:spPr>
-        <p:style>
-          <a:lnRef idx="1">
-            <a:schemeClr val="accent1"/>
-          </a:lnRef>
-          <a:fillRef idx="3">
-            <a:schemeClr val="accent1"/>
-          </a:fillRef>
-          <a:effectRef idx="2">
-            <a:schemeClr val="accent1"/>
-          </a:effectRef>
-          <a:fontRef idx="minor">
-            <a:schemeClr val="lt1"/>
-          </a:fontRef>
-        </p:style>
-        <p:txBody>
-          <a:bodyPr rtlCol="0" anchor="ctr"/>
-          <a:lstStyle/>
-          <a:p>
-            <a:pPr algn="ctr"/>
-          </a:p>
-        </p:txBody>
-      </p:sp>
-      <p:sp>
-        <p:nvSpPr>
-          <p:cNvPr id="11" name="TextBox 10"/>
-          <p:cNvSpPr txBox="1"/>
-          <p:nvPr/>
-        </p:nvSpPr>
-        <p:spPr>
-          <a:xfrm>
-            <a:off x="10635496" y="2651760"/>
-            <a:ext cx="822960" cy="384048"/>
-          </a:xfrm>
-          <a:prstGeom prst="rect">
-            <a:avLst/>
-          </a:prstGeom>
-          <a:noFill/>
-        </p:spPr>
-        <p:txBody>
-          <a:bodyPr wrap="square" anchor="ctr" lIns="18288" rIns="18288" tIns="18288" bIns="18288">
-            <a:spAutoFit/>
-          </a:bodyPr>
-          <a:lstStyle/>
-          <a:p>
-            <a:pPr algn="l">
-              <a:spcAft>
-                <a:spcPts val="600"/>
-              </a:spcAft>
-            </a:pPr>
-            <a:r>
-              <a:rPr sz="1400" b="1">
-                <a:solidFill>
-                  <a:srgbClr val="EEEFF1"/>
-                </a:solidFill>
-                <a:latin typeface="Segoe UI"/>
-              </a:rPr>
-              <a:t>25.2</a:t>
-            </a:r>
-          </a:p>
-        </p:txBody>
-      </p:sp>
-      <p:sp>
-        <p:nvSpPr>
-          <p:cNvPr id="12" name="TextBox 11"/>
-          <p:cNvSpPr txBox="1"/>
-          <p:nvPr/>
-        </p:nvSpPr>
-        <p:spPr>
-          <a:xfrm>
-            <a:off x="6400800" y="3200400"/>
-            <a:ext cx="5349240" cy="365760"/>
+            <a:off x="11155680" y="6355080"/>
+            <a:ext cx="640080" cy="320040"/>
           </a:xfrm>
           <a:prstGeom prst="rect">
             <a:avLst/>
@@ -5710,97 +5774,19 @@
           </a:bodyPr>
           <a:lstStyle/>
           <a:p>
-            <a:pPr algn="l">
+            <a:pPr algn="r">
               <a:spcAft>
                 <a:spcPts val="600"/>
               </a:spcAft>
             </a:pPr>
             <a:r>
-              <a:rPr sz="1300" b="0">
+              <a:rPr sz="1000" b="0">
                 <a:solidFill>
                   <a:srgbClr val="9AA1AC"/>
                 </a:solidFill>
                 <a:latin typeface="Segoe UI"/>
               </a:rPr>
-              <a:t>ΔMAE +4.8 [−1.6; +12.9] — ДИ содержит 0</a:t>
-            </a:r>
-          </a:p>
-        </p:txBody>
-      </p:sp>
-      <p:sp>
-        <p:nvSpPr>
-          <p:cNvPr id="13" name="TextBox 12"/>
-          <p:cNvSpPr txBox="1"/>
-          <p:nvPr/>
-        </p:nvSpPr>
-        <p:spPr>
-          <a:xfrm>
-            <a:off x="457200" y="6355080"/>
-            <a:ext cx="10515600" cy="320040"/>
-          </a:xfrm>
-          <a:prstGeom prst="rect">
-            <a:avLst/>
-          </a:prstGeom>
-          <a:noFill/>
-        </p:spPr>
-        <p:txBody>
-          <a:bodyPr wrap="square" anchor="t" lIns="18288" rIns="18288" tIns="18288" bIns="18288">
-            <a:spAutoFit/>
-          </a:bodyPr>
-          <a:lstStyle/>
-          <a:p>
-            <a:pPr algn="l">
-              <a:spcAft>
-                <a:spcPts val="600"/>
-              </a:spcAft>
-            </a:pPr>
-            <a:r>
-              <a:rPr sz="1000" b="0">
-                <a:solidFill>
-                  <a:srgbClr val="9AA1AC"/>
-                </a:solidFill>
-                <a:latin typeface="Segoe UI"/>
-              </a:rPr>
-              <a:t>Источник: reports/case_conc/dev_cv.json, final_test.json; configs/case_selection.yaml: final_test</a:t>
-            </a:r>
-          </a:p>
-        </p:txBody>
-      </p:sp>
-      <p:sp>
-        <p:nvSpPr>
-          <p:cNvPr id="14" name="TextBox 13"/>
-          <p:cNvSpPr txBox="1"/>
-          <p:nvPr/>
-        </p:nvSpPr>
-        <p:spPr>
-          <a:xfrm>
-            <a:off x="11155680" y="6355080"/>
-            <a:ext cx="640080" cy="320040"/>
-          </a:xfrm>
-          <a:prstGeom prst="rect">
-            <a:avLst/>
-          </a:prstGeom>
-          <a:noFill/>
-        </p:spPr>
-        <p:txBody>
-          <a:bodyPr wrap="square" anchor="t" lIns="18288" rIns="18288" tIns="18288" bIns="18288">
-            <a:spAutoFit/>
-          </a:bodyPr>
-          <a:lstStyle/>
-          <a:p>
-            <a:pPr algn="r">
-              <a:spcAft>
-                <a:spcPts val="600"/>
-              </a:spcAft>
-            </a:pPr>
-            <a:r>
-              <a:rPr sz="1000" b="0">
-                <a:solidFill>
-                  <a:srgbClr val="9AA1AC"/>
-                </a:solidFill>
-                <a:latin typeface="Segoe UI"/>
-              </a:rPr>
-              <a:t>3:25</a:t>
+              <a:t>3:27</a:t>
             </a:r>
           </a:p>
         </p:txBody>
@@ -6116,7 +6102,7 @@
                 </a:solidFill>
                 <a:latin typeface="Segoe UI"/>
               </a:rPr>
-              <a:t>3:48</a:t>
+              <a:t>3:50</a:t>
             </a:r>
           </a:p>
         </p:txBody>
@@ -6339,7 +6325,7 @@
                 </a:solidFill>
                 <a:latin typeface="Segoe UI"/>
               </a:rPr>
-              <a:t>• Один источник чисел: final_numbers.json → README, отчёт, дека, речь, ответы; тест сверяет (242 passed)</a:t>
+              <a:t>• Один источник чисел: final_numbers.json → README, отчёт, дека, речь, ответы; тест сверяет (252 passed)</a:t>
             </a:r>
           </a:p>
           <a:p>
@@ -6433,7 +6419,7 @@
                 </a:solidFill>
                 <a:latin typeface="Segoe UI"/>
               </a:rPr>
-              <a:t>4:03</a:t>
+              <a:t>4:05</a:t>
             </a:r>
           </a:p>
         </p:txBody>
@@ -6718,7 +6704,7 @@
                 </a:solidFill>
                 <a:latin typeface="Segoe UI"/>
               </a:rPr>
-              <a:t>4:32</a:t>
+              <a:t>4:34</a:t>
             </a:r>
           </a:p>
         </p:txBody>
@@ -6822,7 +6808,7 @@
                 </a:solidFill>
                 <a:latin typeface="Segoe UI"/>
               </a:rPr>
-              <a:t>Одна команда, 7.7 с без сети; чистый клон до карты — 7,5 мин, числа совпали</a:t>
+              <a:t>Одна команда, 11.5 с без сети; чистый клон до карты — 7,5 мин, числа совпали</a:t>
             </a:r>
           </a:p>
         </p:txBody>
@@ -6877,7 +6863,7 @@
                 </a:solidFill>
                 <a:latin typeface="Segoe UI"/>
               </a:rPr>
-              <a:t>• 24 выходные таблицы с одинаковыми sha256 при повторе; отпечаток fccf808a8817d7c4…</a:t>
+              <a:t>• 24 выходные таблицы с одинаковыми sha256 при повторе; отпечаток 3db680b6661e86d3…</a:t>
             </a:r>
           </a:p>
           <a:p>
@@ -6909,7 +6895,7 @@
                 </a:solidFill>
                 <a:latin typeface="Segoe UI"/>
               </a:rPr>
-              <a:t>• Тесты кейса (26.09.2026 04:40): 242 passed, 2 skipped, 0 failed; числа документов сверяет тест</a:t>
+              <a:t>• Тесты кейса (26.09.2026 05:13): 252 passed, 2 skipped, 0 failed; числа документов сверяет тест</a:t>
             </a:r>
           </a:p>
         </p:txBody>
@@ -7109,7 +7095,7 @@
                 </a:solidFill>
                 <a:latin typeface="Segoe UI"/>
               </a:rPr>
-              <a:t>4:44</a:t>
+              <a:t>4:46</a:t>
             </a:r>
           </a:p>
         </p:txBody>
@@ -12110,11 +12096,27 @@
               <a:t>• Три уровня: по месту и времени 66 · видимый сигнал 0 из 3 · калибровочных «снимок → шт./км²» 0 (нужно 4–12)</a:t>
             </a:r>
           </a:p>
+          <a:p>
+            <a:pPr algn="l">
+              <a:spcAft>
+                <a:spcPts val="1000"/>
+              </a:spcAft>
+            </a:pPr>
+            <a:r>
+              <a:rPr sz="1500" b="0">
+                <a:solidFill>
+                  <a:srgbClr val="EEEFF1"/>
+                </a:solidFill>
+                <a:latin typeface="Segoe UI"/>
+              </a:rPr>
+              <a:t>• Независимая проверка: 6 наглядных пар по предметам &gt; 50 см (другая выборка, наши — &gt; 5 см); S2 в тот же день — у 12 из 36 маршрутов</a:t>
+            </a:r>
+          </a:p>
         </p:txBody>
       </p:sp>
       <p:pic>
         <p:nvPicPr>
-          <p:cNvPr id="5" name="Picture 4" descr="06_adis_pair.jpg"/>
+          <p:cNvPr id="5" name="Picture 4" descr="08_independent_adis.jpg"/>
           <p:cNvPicPr>
             <a:picLocks noChangeAspect="1"/>
           </p:cNvPicPr>
@@ -12129,7 +12131,7 @@
         <p:spPr>
           <a:xfrm>
             <a:off x="6400800" y="1645920"/>
-            <a:ext cx="5349240" cy="1327280"/>
+            <a:ext cx="5349240" cy="2664590"/>
           </a:xfrm>
           <a:prstGeom prst="rect">
             <a:avLst/>
@@ -12144,7 +12146,7 @@
         </p:nvSpPr>
         <p:spPr>
           <a:xfrm>
-            <a:off x="6400800" y="3018920"/>
+            <a:off x="6400800" y="4356230"/>
             <a:ext cx="5349240" cy="548640"/>
           </a:xfrm>
           <a:prstGeom prst="rect">
@@ -12170,7 +12172,7 @@
                 </a:solidFill>
                 <a:latin typeface="Segoe UI"/>
               </a:rPr>
-              <a:t>Пара по месту и времени, Средиземное море: судно-съёмщик видно на снимке в конце полосы скана (пурпур) — время подтверждено; детектор в полосе пикселей не дал</a:t>
+              <a:t>Независимая проверка: пары ADIS ↔ S2 по предметам &gt; 50 см — маршрут судна (жёлтый), поиск с учётом дрейфа (голубой); предметы на снимке не различимы</a:t>
             </a:r>
           </a:p>
         </p:txBody>
@@ -12346,13 +12348,13 @@
               </a:spcAft>
             </a:pPr>
             <a:r>
-              <a:rPr sz="2600" b="1">
+              <a:rPr sz="2300" b="1">
                 <a:solidFill>
                   <a:srgbClr val="EEEFF1"/>
                 </a:solidFill>
                 <a:latin typeface="Segoe UI"/>
               </a:rPr>
-              <a:t>Новые данные: B — 65 съёмок и 14374 нитей Cózar, D — 2094 судов и облака; утечек 0</a:t>
+              <a:t>Новые данные: B — 65 съёмок и 14374 нитей Cózar, D — 2094 судов и облака; с MARIDA совпадений 0</a:t>
             </a:r>
           </a:p>
         </p:txBody>
@@ -12385,7 +12387,7 @@
               </a:spcAft>
             </a:pPr>
             <a:r>
-              <a:rPr sz="1600" b="0">
+              <a:rPr sz="1500" b="0">
                 <a:solidFill>
                   <a:srgbClr val="EEEFF1"/>
                 </a:solidFill>
@@ -12401,7 +12403,7 @@
               </a:spcAft>
             </a:pPr>
             <a:r>
-              <a:rPr sz="1600" b="0">
+              <a:rPr sz="1500" b="0">
                 <a:solidFill>
                   <a:srgbClr val="EEEFF1"/>
                 </a:solidFill>
@@ -12417,13 +12419,13 @@
               </a:spcAft>
             </a:pPr>
             <a:r>
-              <a:rPr sz="1600" b="0">
+              <a:rPr sz="1500" b="0">
                 <a:solidFill>
                   <a:srgbClr val="EEEFF1"/>
                 </a:solidFill>
                 <a:latin typeface="Segoe UI"/>
               </a:rPr>
-              <a:t>• Утечки: та же съёмка или те же пиксели с MARIDA, MADOS и нашими сценами — 0; по содержимому 0 из 119; исключён 1 дубль</a:t>
+              <a:t>• Утечки: с MARIDA — 0 совпадений по тайлу и дате у всех наборов; с MADOS по пикселям — PLP и FO (0 из 119); Cózar, суда, облака с MADOS не сверить — у MADOS нет геопривязки</a:t>
             </a:r>
           </a:p>
           <a:p>
@@ -12433,13 +12435,13 @@
               </a:spcAft>
             </a:pPr>
             <a:r>
-              <a:rPr sz="1600" b="0">
+              <a:rPr sz="1500" b="0">
                 <a:solidFill>
                   <a:srgbClr val="EEEFF1"/>
                 </a:solidFill>
                 <a:latin typeface="Segoe UI"/>
               </a:rPr>
-              <a:t>• Детектор без дообучения на L2A: нити Cózar 36 %, Refined 2.8 % пикселей; ложные на судах 25.9 %; облака — 4 пикс.</a:t>
+              <a:t>• Детектор без дообучения на L2A: нити Cózar 36 % (хотя бы один пиксель нити; ≥ 3 пикс. — 21 %, по пикселям 7 %), Refined 2.8 % пикселей; ложные на судах 25.9 %; облака — 4 пикс.</a:t>
             </a:r>
           </a:p>
         </p:txBody>
@@ -12921,7 +12923,7 @@
                 </a:solidFill>
                 <a:latin typeface="Segoe UI"/>
               </a:rPr>
-              <a:t>• Откат weights/lgbm (L2A, как в сервисе): нити Cózar 36 %, ложные на судах 26 %, на пене пар 4/50</a:t>
+              <a:t>• Откат weights/lgbm (L2A, как в сервисе): нити Cózar 36 % (хотя бы один пиксель нити; по пикселям 7 %), ложные на судах 26 %; D пар 5 из 97 объектов, все на 1 съёмке из 8</a:t>
             </a:r>
           </a:p>
           <a:p>
@@ -13056,7 +13058,7 @@
                           </a:solidFill>
                           <a:latin typeface="Segoe UI"/>
                         </a:rPr>
-                        <a:t>Откат weights/lgbm</a:t>
+                        <a:t>Откат weights/lgbm (нить — ≥ 1 пикс.)</a:t>
                       </a:r>
                     </a:p>
                   </a:txBody>
@@ -13261,7 +13263,7 @@
                 </a:solidFill>
                 <a:latin typeface="Segoe UI"/>
               </a:rPr>
-              <a:t>2:26</a:t>
+              <a:t>2:24</a:t>
             </a:r>
           </a:p>
         </p:txBody>
@@ -13452,7 +13454,7 @@
                 </a:solidFill>
                 <a:latin typeface="Segoe UI"/>
               </a:rPr>
-              <a:t>• Сейчас: 5 объектов на 22 сценах, в полосах 0; вне полосы HE460 т.03 — 1 судно (верное срабатывание на сложном фоне) и 4 одиночных пикселя</a:t>
+              <a:t>• Сейчас: 5 объектов на 22 сценах, в полосах 0; все на HE460 т.03 вне полосы: 4 пена/барашки, 1 вероятно судно (тип по правилам) — все ложные, скоплений нет (суда — известная слабость: 26 % судов)</a:t>
             </a:r>
           </a:p>
           <a:p>
@@ -13951,7 +13953,7 @@
                 </a:solidFill>
                 <a:latin typeface="Segoe UI"/>
               </a:rPr>
-              <a:t>2:55</a:t>
+              <a:t>2:53</a:t>
             </a:r>
           </a:p>
         </p:txBody>

--- a/reports/case_deck.pptx
+++ b/reports/case_deck.pptx
@@ -661,7 +661,7 @@
           <a:lstStyle/>
           <a:p>
             <a:r>
-              <a:t>[3:50–4:05] Карта повторяет отчёт: три слоя и два статуса полосы. Эта пара отклонена по дрейфу — «связь не подтверждена»; пикселей детектора в полосе нет, концентрация по снимку недоступна. Выгрузка сверена с API самопроверкой.</a:t>
+              <a:t>[3:50–4:06] Карта на сцене, которую модель не видела. Каждая зона — измерено по снимку, вероятность с признаками ложных и, статус «концентрация по снимку не подтверждена» — штук по снимку мы не показываем. Выгрузка равна карте.</a:t>
             </a:r>
           </a:p>
         </p:txBody>
@@ -731,7 +731,7 @@
           <a:lstStyle/>
           <a:p>
             <a:r>
-              <a:t>[4:05–4:34] Наш вклад — не модель, а решения, которые защищают выводы от самообмана. Допуск по дрейфу в реестре пар, сплит по участкам маршрута, найденный после утечки через соседей дня, test один раз по заранее записанному правилу, отказ от гармонизации по val, геометрия трансект по первоисточникам и один источник чисел с тестом. Разметка MARIDA, протокол RandomForest и индекс FDI — готовые, мы с ними сравниваемся.</a:t>
+              <a:t>[4:06–4:35] Наш вклад — не модель, а решения, которые защищают выводы от самообмана. Допуск по дрейфу в реестре пар, сплит по участкам маршрута, найденный после утечки через соседей дня, test один раз по заранее записанному правилу, отказ от гармонизации по val, геометрия трансект по первоисточникам и один источник чисел с тестом. Разметка MARIDA, протокол RandomForest и индекс FDI — готовые, мы с ними сравниваемся.</a:t>
             </a:r>
           </a:p>
         </p:txBody>
@@ -801,7 +801,7 @@
           <a:lstStyle/>
           <a:p>
             <a:r>
-              <a:t>[4:34–4:46] Ограничения называем сами: перенос на снимок не доказан, данных мало, интервалы недопокрывают. Развитие — трансекты под пролёт с записанным временем и больше рейсов.</a:t>
+              <a:t>[4:35–4:47] Ограничения называем сами: перенос на снимок не доказан, данных мало, интервалы недопокрывают. Развитие — трансекты под пролёт с записанным временем и больше рейсов.</a:t>
             </a:r>
           </a:p>
         </p:txBody>
@@ -871,7 +871,7 @@
           <a:lstStyle/>
           <a:p>
             <a:r>
-              <a:t>[4:46–4:58] Всё воспроизводится одной командой без сети; чистый клон до карты — 7,5 минуты, числа совпали. Спасибо, готовы к вопросам.</a:t>
+              <a:t>[4:47–4:59] Всё воспроизводится одной командой без сети; чистый клон до карты — 7,5 минуты, числа совпали. Спасибо, готовы к вопросам.</a:t>
             </a:r>
           </a:p>
         </p:txBody>
@@ -1011,7 +1011,7 @@
           <a:lstStyle/>
           <a:p>
             <a:r>
-              <a:t>[прил.–прил.] Количество: штуки на квадратный километр — только по полю. Со снимка — площадь маски и доля покрытия; сценарий в штуках — только условный диапазон с допущениями.</a:t>
+              <a:t>[прил.–прил.] Количество: штуки на квадратный километр — только по полю. Со снимка — площадь маски и доля покрытия; перевода в штуки нет, калибровочных пар ноль, калибровка по ячейкам дала отрицательный результат.</a:t>
             </a:r>
           </a:p>
         </p:txBody>
@@ -5170,7 +5170,7 @@
                 </a:solidFill>
                 <a:latin typeface="Segoe UI"/>
               </a:rPr>
-              <a:t>Источник: reports/final_numbers.json → case.sections (14 разделов с источником и протоколом)</a:t>
+              <a:t>Источник: reports/final_numbers.json → case.sections (15 разделов с источником и протоколом)</a:t>
             </a:r>
           </a:p>
         </p:txBody>
@@ -5890,7 +5890,7 @@
                 </a:solidFill>
                 <a:latin typeface="Segoe UI"/>
               </a:rPr>
-              <a:t>Карта говорит то же, что отчёт: 29 полос-кандидатов, 0 подтверждённых пар, концентрация по снимку недоступна</a:t>
+              <a:t>Карта: отложенная сцена Cózar 30SXE — 23 зон, 14 совпали с нитями Cózar; концентрация по снимку не подтверждена</a:t>
             </a:r>
           </a:p>
         </p:txBody>
@@ -5923,13 +5923,13 @@
               </a:spcAft>
             </a:pPr>
             <a:r>
-              <a:rPr sz="1600" b="0">
+              <a:rPr sz="1500" b="0">
                 <a:solidFill>
                   <a:srgbClr val="EEEFF1"/>
                 </a:solidFill>
                 <a:latin typeface="Segoe UI"/>
               </a:rPr>
-              <a:t>• Три слоя: полевые измерения (шт./км² с интервалом Пуассона) · снимки-кандидаты (полосы обследования) · подозрительные пиксели детектора</a:t>
+              <a:t>• Сцена 30SXE, 11.03.2021 не участвовала в обучении, подборе порога и экспериментах детектора; всего в слое 286 зон на 75 оцениваемых сценах</a:t>
             </a:r>
           </a:p>
           <a:p>
@@ -5939,13 +5939,13 @@
               </a:spcAft>
             </a:pPr>
             <a:r>
-              <a:rPr sz="1600" b="0">
+              <a:rPr sz="1500" b="0">
                 <a:solidFill>
                   <a:srgbClr val="EEEFF1"/>
                 </a:solidFill>
                 <a:latin typeface="Segoe UI"/>
               </a:rPr>
-              <a:t>• Два статуса полосы: детекция («связь не подтверждена» + причина) и концентрация («недоступна»)</a:t>
+              <a:t>• Карточка зоны: измерено (площадь 4.18 км², LWD, маска качества, версия модели) · вероятно (статус, признаки пены/блика/судна) · главный статус — «концентрация по снимку не подтверждена»</a:t>
             </a:r>
           </a:p>
           <a:p>
@@ -5955,20 +5955,36 @@
               </a:spcAft>
             </a:pPr>
             <a:r>
-              <a:rPr sz="1600" b="0">
+              <a:rPr sz="1500" b="0">
                 <a:solidFill>
                   <a:srgbClr val="EEEFF1"/>
                 </a:solidFill>
                 <a:latin typeface="Segoe UI"/>
               </a:rPr>
-              <a:t>• Реестр пар, выгрузка GeoJSON/CSV, сохранённые запросы; самопроверка API ↔ выгрузка: 284 из 284, ошибочные входы 46/46, p95 ≤ 104 мс</a:t>
+              <a:t>• «Обнаружено» только при совпадении с нитью Cózar (14); признаки пены, блика, судна, берега → «недостаточно данных» (164)</a:t>
+            </a:r>
+          </a:p>
+          <a:p>
+            <a:pPr algn="l">
+              <a:spcAft>
+                <a:spcPts val="1000"/>
+              </a:spcAft>
+            </a:pPr>
+            <a:r>
+              <a:rPr sz="1500" b="0">
+                <a:solidFill>
+                  <a:srgbClr val="EEEFF1"/>
+                </a:solidFill>
+                <a:latin typeface="Segoe UI"/>
+              </a:rPr>
+              <a:t>• Полосы кейса (29): связь с полем не подтверждена, концентрация по снимку недоступна; выгрузка = карта (23 = 23 строк CSV)</a:t>
             </a:r>
           </a:p>
         </p:txBody>
       </p:sp>
       <p:pic>
         <p:nvPicPr>
-          <p:cNvPr id="5" name="Picture 4" descr="02_zone_he460_t03.jpg"/>
+          <p:cNvPr id="5" name="Picture 4" descr="09_demo_zone_card.jpg"/>
           <p:cNvPicPr>
             <a:picLocks noChangeAspect="1"/>
           </p:cNvPicPr>
@@ -5983,7 +5999,7 @@
         <p:spPr>
           <a:xfrm>
             <a:off x="6400800" y="1645920"/>
-            <a:ext cx="5349240" cy="3656442"/>
+            <a:ext cx="5349240" cy="3647209"/>
           </a:xfrm>
           <a:prstGeom prst="rect">
             <a:avLst/>
@@ -5998,7 +6014,7 @@
         </p:nvSpPr>
         <p:spPr>
           <a:xfrm>
-            <a:off x="6400800" y="5348082"/>
+            <a:off x="6400800" y="5338849"/>
             <a:ext cx="5349240" cy="548640"/>
           </a:xfrm>
           <a:prstGeom prst="rect">
@@ -6024,7 +6040,7 @@
                 </a:solidFill>
                 <a:latin typeface="Segoe UI"/>
               </a:rPr>
-              <a:t>Северное море, HE460 трансекта 03: связь с полем не подтверждена (дрейф &gt; допуска), подозрительных пикселей в полосе нет</a:t>
+              <a:t>Отложенная сцена Cózar: контуры зон детектора и карточка «Измерено / Вероятно»</a:t>
             </a:r>
           </a:p>
         </p:txBody>
@@ -6063,7 +6079,7 @@
                 </a:solidFill>
                 <a:latin typeface="Segoe UI"/>
               </a:rPr>
-              <a:t>Источник: service/routes_v3.py; reports/selfcheck/consistency_latest.json</a:t>
+              <a:t>Источник: data/case/scene_zones; reports/case_demo/demo_path.json (final_numbers → case.sections.scene_zones); reports/selfcheck/consistency_latest.json</a:t>
             </a:r>
           </a:p>
         </p:txBody>
@@ -6419,7 +6435,7 @@
                 </a:solidFill>
                 <a:latin typeface="Segoe UI"/>
               </a:rPr>
-              <a:t>4:05</a:t>
+              <a:t>4:06</a:t>
             </a:r>
           </a:p>
         </p:txBody>
@@ -6704,7 +6720,7 @@
                 </a:solidFill>
                 <a:latin typeface="Segoe UI"/>
               </a:rPr>
-              <a:t>4:34</a:t>
+              <a:t>4:35</a:t>
             </a:r>
           </a:p>
         </p:txBody>
@@ -6895,7 +6911,7 @@
                 </a:solidFill>
                 <a:latin typeface="Segoe UI"/>
               </a:rPr>
-              <a:t>• Тесты кейса (26.09.2026 05:13): 252 passed, 2 skipped, 0 failed; числа документов сверяет тест</a:t>
+              <a:t>• Тесты кейса (26.09.2026 05:48): 252 passed, 2 skipped, 0 failed; числа документов сверяет тест</a:t>
             </a:r>
           </a:p>
         </p:txBody>
@@ -7095,7 +7111,7 @@
                 </a:solidFill>
                 <a:latin typeface="Segoe UI"/>
               </a:rPr>
-              <a:t>4:46</a:t>
+              <a:t>4:47</a:t>
             </a:r>
           </a:p>
         </p:txBody>
@@ -7940,7 +7956,7 @@
                 </a:solidFill>
                 <a:latin typeface="Segoe UI"/>
               </a:rPr>
-              <a:t>16 · Приложение · Количество: поле, снимок, сценарий</a:t>
+              <a:t>16 · Приложение · Количество: поле и снимок</a:t>
             </a:r>
           </a:p>
         </p:txBody>
@@ -8066,7 +8082,23 @@
                 </a:solidFill>
                 <a:latin typeface="Segoe UI"/>
               </a:rPr>
-              <a:t>• Сценарий шт./км² — только «если это мусорная полоса», с допущениями: 200 м² маски = 160–500000 предметов; не доверительный интервал, не измерение, не результат модели</a:t>
+              <a:t>• Штуки по снимку не показываем: перевод площади маски в штуки не показываем — нет калибровочных пар «снимок → шт./км²»; перевод «площадь / размер предмета» дал бы разброс в 3125 раз</a:t>
+            </a:r>
+          </a:p>
+          <a:p>
+            <a:pPr algn="l">
+              <a:spcAft>
+                <a:spcPts val="1000"/>
+              </a:spcAft>
+            </a:pPr>
+            <a:r>
+              <a:rPr sz="1500" b="0">
+                <a:solidFill>
+                  <a:srgbClr val="EEEFF1"/>
+                </a:solidFill>
+                <a:latin typeface="Segoe UI"/>
+              </a:rPr>
+              <a:t>• Аналогия: пальмы на гектар по Sentinel-2 с опорой на подсчёт по снимкам высокого разрешения (arXiv 2105.11207): MAE ±7,3 пальмы/га. Для мусора — мусор дрейфует (часы между снимком и полем уже сдвигают поле), разнороден по размеру и материалу и занимает доли процента пикселя; поэтому калибровка по ячейкам требует независимой проверки — у нас она дала отрицательный результат: общих дат поле × спутник 0, климатологии ρ = 0.18 на 123 ячейках</a:t>
             </a:r>
           </a:p>
         </p:txBody>

--- a/reports/case_deck.pptx
+++ b/reports/case_deck.pptx
@@ -6341,7 +6341,7 @@
                 </a:solidFill>
                 <a:latin typeface="Segoe UI"/>
               </a:rPr>
-              <a:t>• Один источник чисел: final_numbers.json → README, отчёт, дека, речь, ответы; тест сверяет (252 passed)</a:t>
+              <a:t>• Один источник чисел: final_numbers.json → README, отчёт, дека, речь, ответы; тест сверяет (255 passed)</a:t>
             </a:r>
           </a:p>
           <a:p>
@@ -6911,7 +6911,7 @@
                 </a:solidFill>
                 <a:latin typeface="Segoe UI"/>
               </a:rPr>
-              <a:t>• Тесты кейса (26.09.2026 05:48): 252 passed, 2 skipped, 0 failed; числа документов сверяет тест</a:t>
+              <a:t>• Тесты кейса (26.09.2026 06:03): 255 passed, 2 skipped, 0 failed; числа документов сверяет тест</a:t>
             </a:r>
           </a:p>
         </p:txBody>

--- a/reports/case_deck.pptx
+++ b/reports/case_deck.pptx
@@ -591,7 +591,7 @@
           <a:lstStyle/>
           <a:p>
             <a:r>
-              <a:t>[3:27–3:50] Концентрация: C равно N на A, интервал Пуассона, контрольный пример — 60.0. Модели сравниваем с медианой на участках маршрута. На dev ridge выигрывает слабо, а на отложенном test, посчитанном один раз, — 30.0 против 25.2 у медианы. Правило записано до открытия test, поэтому на карте — медиана. Модель не спасаем.</a:t>
+              <a:t>[3:32–3:55] Концентрация: C равно N на A, интервал Пуассона, контрольный пример — 60.0. Модели сравниваем с медианой на участках маршрута. На dev ridge выигрывает слабо, а на отложенном test, посчитанном один раз, — 30.0 против 25.2 у медианы. Правило записано до открытия test, поэтому на карте — медиана. Модель не спасаем.</a:t>
             </a:r>
           </a:p>
         </p:txBody>
@@ -661,7 +661,7 @@
           <a:lstStyle/>
           <a:p>
             <a:r>
-              <a:t>[3:50–4:06] Карта на сцене, которую модель не видела. Каждая зона — измерено по снимку, вероятность с признаками ложных и, статус «концентрация по снимку не подтверждена» — штук по снимку мы не показываем. Выгрузка равна карте.</a:t>
+              <a:t>[3:55–4:11] Карта на сцене, которую модель не видела. Каждая зона — измерено по снимку, вероятность с признаками ложных и, статус «концентрация по снимку не подтверждена» — штук по снимку мы не показываем. Выгрузка равна карте.</a:t>
             </a:r>
           </a:p>
         </p:txBody>
@@ -731,7 +731,7 @@
           <a:lstStyle/>
           <a:p>
             <a:r>
-              <a:t>[4:06–4:35] Наш вклад — не модель, а решения, которые защищают выводы от самообмана. Допуск по дрейфу в реестре пар, сплит по участкам маршрута, найденный после утечки через соседей дня, test один раз по заранее записанному правилу, отказ от гармонизации по val, геометрия трансект по первоисточникам и один источник чисел с тестом. Разметка MARIDA, протокол RandomForest и индекс FDI — готовые, мы с ними сравниваемся.</a:t>
+              <a:t>[4:11–4:36] Наш вклад — решения, которые защищают выводы от самообмана. Допуск по дрейфу в реестре пар, сплит по участкам маршрута, test один раз по заранее записанному правилу, отказ от гармонизации по val, геометрия трансект по первоисточникам и один источник чисел с тестом. Разметка MARIDA, протокол RandomForest и индекс FDI — готовые, мы с ними сравниваемся.</a:t>
             </a:r>
           </a:p>
         </p:txBody>
@@ -801,7 +801,7 @@
           <a:lstStyle/>
           <a:p>
             <a:r>
-              <a:t>[4:35–4:47] Ограничения называем сами: перенос на снимок не доказан, данных мало, интервалы недопокрывают. Развитие — трансекты под пролёт с записанным временем и больше рейсов.</a:t>
+              <a:t>[4:36–4:48] Ограничения называем сами: перенос на снимок не доказан, данных мало, интервалы недопокрывают. Развитие — трансекты под пролёт с записанным временем и больше рейсов.</a:t>
             </a:r>
           </a:p>
         </p:txBody>
@@ -871,7 +871,7 @@
           <a:lstStyle/>
           <a:p>
             <a:r>
-              <a:t>[4:47–4:59] Всё воспроизводится одной командой без сети; чистый клон до карты — 7,5 минуты, числа совпали. Спасибо, готовы к вопросам.</a:t>
+              <a:t>[4:48–5:00] Всё воспроизводится одной командой без сети; чистый клон до карты — 7,5 минуты, числа совпали. Спасибо, готовы к вопросам.</a:t>
             </a:r>
           </a:p>
         </p:txBody>
@@ -1641,7 +1641,7 @@
           <a:lstStyle/>
           <a:p>
             <a:r>
-              <a:t>[1:39–2:05] Пар по месту и времени — 66, время подтверждено даже по самому судну на снимке. Это не калибровочные пары. На 6 отрезках с единичными предметами детектор их не увидел: предмет меньше процента пикселя. Это согласуется с физикой, но общий предел для плотных скоплений не задаёт. Калибровочных пар — 0, поэтому перевода «снимок в штуки» мы не заявляем.</a:t>
+              <a:t>[1:39–2:10] Пар по месту и времени — 66, но это не калибровочные пары: на 6 отрезках с предметами детектор их не увидел, предмет меньше процента пикселя. Калибровочных пар «снимок — штуки» 0: мы проверили 318 событий CSV и 177 синхронных отрезков ADIS. У авторов крупнейшего набора полос тоже: «The current matching of satellite detections and field observations is limited to fake targets» (Cózar и др., 2024, doi 10.1038/s41467-024-48674-7).</a:t>
             </a:r>
           </a:p>
         </p:txBody>
@@ -1711,7 +1711,7 @@
           <a:lstStyle/>
           <a:p>
             <a:r>
-              <a:t>[2:05–2:24] Для детектора мы собрали новые метки: скопления PLP, FloatingObjects и нити Cózar — B, суда и облака — D. С MARIDA совпадений нет; с MADOS по пикселям сверены PLP и FloatingObjects. Детектор на них почти не видит нити и путает суда.</a:t>
+              <a:t>[2:10–2:29] Для детектора мы собрали новые метки: скопления PLP, FloatingObjects и нити Cózar — B, суда и облака — D. С MARIDA совпадений нет; с MADOS по пикселям сверены PLP и FloatingObjects. Детектор на них почти не видит нити и путает суда.</a:t>
             </a:r>
           </a:p>
         </p:txBody>
@@ -1781,7 +1781,7 @@
           <a:lstStyle/>
           <a:p>
             <a:r>
-              <a:t>[2:24–2:53] Главная трудность — сложный фон. Если учить детектор на естественных нитях Cózar, полнота на них растёт до 97 процентов, но пена и суда тоже становятся мусором. Если добавить суда как отрицательные, ложные на судах падают с 26 до 4 процентов, но теряются нити. Правило, записанное заранее, не прошёл ни один вариант — остаётся прежний детектор, а его ограничение по судам мы называем прямо.</a:t>
+              <a:t>[2:29–2:58] Главная трудность — сложный фон. Если учить детектор на естественных нитях Cózar, полнота на них растёт до 97 процентов, но пена и суда тоже становятся мусором. Если добавить суда как отрицательные, ложные на судах падают с 26 до 4 процентов, но теряются нити. Правило, записанное заранее, не прошёл ни один вариант — остаётся прежний детектор, а его ограничение по судам мы называем прямо.</a:t>
             </a:r>
           </a:p>
         </p:txBody>
@@ -1851,7 +1851,7 @@
           <a:lstStyle/>
           <a:p>
             <a:r>
-              <a:t>[2:53–3:27] Детектор — пиксельный LightGBM. На test MARIDA F1 0.871, RandomForest — 0.771, индексы FDI — 0.042; саргассум и мутную воду он не путает. На снимках пар мы выключили гармонизацию каналов — решение по MARIDA val, не по тесту. Сейчас 5 объектов на 22 сценах и ни одного в полосах; вне полосы — одиночные пиксели пены и, вероятно, судно — все ложные, скоплений нет. Прежний режим давал 975 объектов, почти всё — фон моря.</a:t>
+              <a:t>[2:58–3:32] Детектор — пиксельный LightGBM. На test MARIDA F1 0.871, RandomForest — 0.771, индексы FDI — 0.042; саргассум и мутную воду он не путает. На снимках пар мы выключили гармонизацию каналов — решение по MARIDA val, не по тесту. Сейчас 5 объектов на 22 сценах и ни одного в полосах; вне полосы — одиночные пиксели пены и, вероятно, судно — все ложные, скоплений нет. Прежний режим давал 975 объектов, почти всё — фон моря.</a:t>
             </a:r>
           </a:p>
         </p:txBody>
@@ -5170,7 +5170,7 @@
                 </a:solidFill>
                 <a:latin typeface="Segoe UI"/>
               </a:rPr>
-              <a:t>Источник: reports/final_numbers.json → case.sections (15 разделов с источником и протоколом)</a:t>
+              <a:t>Источник: reports/final_numbers.json → case.sections (16 разделов с источником и протоколом)</a:t>
             </a:r>
           </a:p>
         </p:txBody>
@@ -5786,7 +5786,7 @@
                 </a:solidFill>
                 <a:latin typeface="Segoe UI"/>
               </a:rPr>
-              <a:t>3:27</a:t>
+              <a:t>3:32</a:t>
             </a:r>
           </a:p>
         </p:txBody>
@@ -5961,7 +5961,7 @@
                 </a:solidFill>
                 <a:latin typeface="Segoe UI"/>
               </a:rPr>
-              <a:t>• «Обнаружено» только при совпадении с нитью Cózar (14); признаки пены, блика, судна, берега → «недостаточно данных» (164)</a:t>
+              <a:t>• «Обнаружено» только при совпадении с нитью Cózar (14); признаки пены, блика, судна, берега → «недостаточно данных» (180)</a:t>
             </a:r>
           </a:p>
           <a:p>
@@ -6118,7 +6118,7 @@
                 </a:solidFill>
                 <a:latin typeface="Segoe UI"/>
               </a:rPr>
-              <a:t>3:50</a:t>
+              <a:t>3:55</a:t>
             </a:r>
           </a:p>
         </p:txBody>
@@ -6435,7 +6435,7 @@
                 </a:solidFill>
                 <a:latin typeface="Segoe UI"/>
               </a:rPr>
-              <a:t>4:06</a:t>
+              <a:t>4:11</a:t>
             </a:r>
           </a:p>
         </p:txBody>
@@ -6720,7 +6720,7 @@
                 </a:solidFill>
                 <a:latin typeface="Segoe UI"/>
               </a:rPr>
-              <a:t>4:35</a:t>
+              <a:t>4:36</a:t>
             </a:r>
           </a:p>
         </p:txBody>
@@ -6911,7 +6911,7 @@
                 </a:solidFill>
                 <a:latin typeface="Segoe UI"/>
               </a:rPr>
-              <a:t>• Тесты кейса (26.09.2026 06:03): 255 passed, 2 skipped, 0 failed; числа документов сверяет тест</a:t>
+              <a:t>• Тесты кейса (26.09.2026 06:32): 255 passed, 2 skipped, 0 failed; числа документов сверяет тест</a:t>
             </a:r>
           </a:p>
         </p:txBody>
@@ -7111,7 +7111,7 @@
                 </a:solidFill>
                 <a:latin typeface="Segoe UI"/>
               </a:rPr>
-              <a:t>4:47</a:t>
+              <a:t>4:48</a:t>
             </a:r>
           </a:p>
         </p:txBody>
@@ -8103,50 +8103,30 @@
           </a:p>
         </p:txBody>
       </p:sp>
-      <p:sp>
-        <p:nvSpPr>
-          <p:cNvPr id="5" name="Rectangle 4"/>
-          <p:cNvSpPr/>
-          <p:nvPr/>
-        </p:nvSpPr>
-        <p:spPr>
-          <a:xfrm>
-            <a:off x="6400800" y="1691640"/>
-            <a:ext cx="5349240" cy="1554480"/>
-          </a:xfrm>
-          <a:prstGeom prst="rect">
-            <a:avLst/>
-          </a:prstGeom>
-          <a:solidFill>
-            <a:srgbClr val="1B1E24"/>
-          </a:solidFill>
-          <a:ln>
-            <a:noFill/>
-          </a:ln>
-          <a:effectLst/>
-        </p:spPr>
-        <p:style>
-          <a:lnRef idx="1">
-            <a:schemeClr val="accent1"/>
-          </a:lnRef>
-          <a:fillRef idx="3">
-            <a:schemeClr val="accent1"/>
-          </a:fillRef>
-          <a:effectRef idx="2">
-            <a:schemeClr val="accent1"/>
-          </a:effectRef>
-          <a:fontRef idx="minor">
-            <a:schemeClr val="lt1"/>
-          </a:fontRef>
-        </p:style>
-        <p:txBody>
-          <a:bodyPr rtlCol="0" anchor="ctr"/>
-          <a:lstStyle/>
-          <a:p>
-            <a:pPr algn="ctr"/>
-          </a:p>
-        </p:txBody>
-      </p:sp>
+      <p:pic>
+        <p:nvPicPr>
+          <p:cNvPr id="5" name="Picture 4" descr="10_units_ladder.jpg"/>
+          <p:cNvPicPr>
+            <a:picLocks noChangeAspect="1"/>
+          </p:cNvPicPr>
+          <p:nvPr/>
+        </p:nvPicPr>
+        <p:blipFill>
+          <a:blip r:embed="rId2"/>
+          <a:stretch>
+            <a:fillRect/>
+          </a:stretch>
+        </p:blipFill>
+        <p:spPr>
+          <a:xfrm>
+            <a:off x="6400800" y="1645920"/>
+            <a:ext cx="5349240" cy="1803686"/>
+          </a:xfrm>
+          <a:prstGeom prst="rect">
+            <a:avLst/>
+          </a:prstGeom>
+        </p:spPr>
+      </p:pic>
       <p:sp>
         <p:nvSpPr>
           <p:cNvPr id="6" name="TextBox 5"/>
@@ -8155,8 +8135,8 @@
         </p:nvSpPr>
         <p:spPr>
           <a:xfrm>
-            <a:off x="6675120" y="1783080"/>
-            <a:ext cx="4800600" cy="822960"/>
+            <a:off x="6400800" y="3495326"/>
+            <a:ext cx="5349240" cy="548640"/>
           </a:xfrm>
           <a:prstGeom prst="rect">
             <a:avLst/>
@@ -8175,13 +8155,13 @@
               </a:spcAft>
             </a:pPr>
             <a:r>
-              <a:rPr sz="4800" b="1">
-                <a:solidFill>
-                  <a:srgbClr val="D9912E"/>
-                </a:solidFill>
-                <a:latin typeface="Segoe UI"/>
-              </a:rPr>
-              <a:t>0</a:t>
+              <a:rPr sz="1200" b="0">
+                <a:solidFill>
+                  <a:srgbClr val="9AA1AC"/>
+                </a:solidFill>
+                <a:latin typeface="Segoe UI"/>
+              </a:rPr>
+              <a:t>Лестница единиц: предмет на кадре → шт./м² кадра → шт./км² маршрута → спутниковая зона; у каждой ступени своя метрика</a:t>
             </a:r>
           </a:p>
         </p:txBody>
@@ -8194,8 +8174,8 @@
         </p:nvSpPr>
         <p:spPr>
           <a:xfrm>
-            <a:off x="6675120" y="2606040"/>
-            <a:ext cx="4800600" cy="594360"/>
+            <a:off x="457200" y="6355080"/>
+            <a:ext cx="10515600" cy="320040"/>
           </a:xfrm>
           <a:prstGeom prst="rect">
             <a:avLst/>
@@ -8214,13 +8194,13 @@
               </a:spcAft>
             </a:pPr>
             <a:r>
-              <a:rPr sz="1300" b="0">
-                <a:solidFill>
-                  <a:srgbClr val="EEEFF1"/>
-                </a:solidFill>
-                <a:latin typeface="Segoe UI"/>
-              </a:rPr>
-              <a:t>калибровочных пар «снимок → шт./км²» (нужно 4–12)</a:t>
+              <a:rPr sz="1000" b="0">
+                <a:solidFill>
+                  <a:srgbClr val="9AA1AC"/>
+                </a:solidFill>
+                <a:latin typeface="Segoe UI"/>
+              </a:rPr>
+              <a:t>Источник: docs/QUANTITY.md; reports/quantity/*.json (final_numbers → case.sections.quantity)</a:t>
             </a:r>
           </a:p>
         </p:txBody>
@@ -8228,45 +8208,6 @@
       <p:sp>
         <p:nvSpPr>
           <p:cNvPr id="8" name="TextBox 7"/>
-          <p:cNvSpPr txBox="1"/>
-          <p:nvPr/>
-        </p:nvSpPr>
-        <p:spPr>
-          <a:xfrm>
-            <a:off x="457200" y="6355080"/>
-            <a:ext cx="10515600" cy="320040"/>
-          </a:xfrm>
-          <a:prstGeom prst="rect">
-            <a:avLst/>
-          </a:prstGeom>
-          <a:noFill/>
-        </p:spPr>
-        <p:txBody>
-          <a:bodyPr wrap="square" anchor="t" lIns="18288" rIns="18288" tIns="18288" bIns="18288">
-            <a:spAutoFit/>
-          </a:bodyPr>
-          <a:lstStyle/>
-          <a:p>
-            <a:pPr algn="l">
-              <a:spcAft>
-                <a:spcPts val="600"/>
-              </a:spcAft>
-            </a:pPr>
-            <a:r>
-              <a:rPr sz="1000" b="0">
-                <a:solidFill>
-                  <a:srgbClr val="9AA1AC"/>
-                </a:solidFill>
-                <a:latin typeface="Segoe UI"/>
-              </a:rPr>
-              <a:t>Источник: docs/QUANTITY.md; reports/quantity/*.json (final_numbers → case.sections.quantity)</a:t>
-            </a:r>
-          </a:p>
-        </p:txBody>
-      </p:sp>
-      <p:sp>
-        <p:nvSpPr>
-          <p:cNvPr id="9" name="TextBox 8"/>
           <p:cNvSpPr txBox="1"/>
           <p:nvPr/>
         </p:nvSpPr>
@@ -12812,7 +12753,7 @@
                 </a:solidFill>
                 <a:latin typeface="Segoe UI"/>
               </a:rPr>
-              <a:t>2:05</a:t>
+              <a:t>2:10</a:t>
             </a:r>
           </a:p>
         </p:txBody>
@@ -13295,7 +13236,7 @@
                 </a:solidFill>
                 <a:latin typeface="Segoe UI"/>
               </a:rPr>
-              <a:t>2:24</a:t>
+              <a:t>2:29</a:t>
             </a:r>
           </a:p>
         </p:txBody>
@@ -13985,7 +13926,7 @@
                 </a:solidFill>
                 <a:latin typeface="Segoe UI"/>
               </a:rPr>
-              <a:t>2:53</a:t>
+              <a:t>2:58</a:t>
             </a:r>
           </a:p>
         </p:txBody>

--- a/reports/case_deck.pptx
+++ b/reports/case_deck.pptx
@@ -603,7 +603,7 @@
           <a:lstStyle/>
           <a:p>
             <a:r>
-              <a:t>[3:04–3:20] В карточке у каждого числа подписан источник: измерено в поле, посчитано по фото или по снимку. Режим «Фото» считает предметы на загруженном кадре. Выгрузка GeoJSON и CSV совпадает с картой, запрос можно сохранить и повторить.</a:t>
+              <a:t>[3:04–3:21] Режим «Фото» открывается с готовым примером: рамки и число предметов, а при известной площади кадра — штуки на квадратный километр. У каждого числа подписан источник. Выгрузка GeoJSON и CSV совпадает с картой, запрос можно сохранить и повторить.</a:t>
             </a:r>
           </a:p>
           <a:p/>
@@ -679,7 +679,7 @@
           <a:lstStyle/>
           <a:p>
             <a:r>
-              <a:t>[3:20–3:42] Что мы не утверждаем. Штук по снимку — нет, калибровочных пар ноль. Пластик по снимку — нет, детектор видит любой мусор и путает суда. Предел обнаружения не доказан. При сильном ветре — «недостаточно данных». Поле — один рейс, а счётчик по фото без дообучения на реку не переносится.</a:t>
+              <a:t>[3:21–3:43] Что мы не утверждаем. Штук по снимку — нет, калибровочных пар ноль. Пластик по снимку — нет, детектор видит любой мусор и путает суда. Предел обнаружения не доказан. При сильном ветре — «недостаточно данных». Поле — один рейс, а счётчик по фото без дообучения на реку не переносится.</a:t>
             </a:r>
           </a:p>
           <a:p/>
@@ -755,7 +755,7 @@
           <a:lstStyle/>
           <a:p>
             <a:r>
-              <a:t>[3:42–3:56] Развитие — замкнуть лестницу. Спутник находит зону, над ней делается детальный снимок с дрона, счётчик даёт штуки на квадратный километр, их сверяем с полем. Для калибровки хватит 4–12 таких пар.</a:t>
+              <a:t>[3:43–3:57] Развитие — замкнуть лестницу. Спутник находит зону, над ней делается детальный снимок с дрона, счётчик даёт штуки на квадратный километр, их сверяем с полем. Для калибровки хватит 4–12 таких пар.</a:t>
             </a:r>
           </a:p>
           <a:p/>
@@ -831,13 +831,13 @@
           <a:lstStyle/>
           <a:p>
             <a:r>
-              <a:t>[3:56–4:09] Всё воспроизводится одной командой без сети за 11.5 секунды, чистый клон до карты — 7,5 минуты, числа в README, отчёте и этой презентации сверяет тест. Спасибо, готовы к вопросам.</a:t>
+              <a:t>[3:57–4:10] Всё воспроизводится одной командой без сети за 11.5 секунды, чистый клон до карты — 7,5 минуты, числа в README, отчёте и этой презентации сверяет тест. Спасибо, готовы к вопросам.</a:t>
             </a:r>
           </a:p>
           <a:p/>
           <a:p>
             <a:r>
-              <a:t>Если спросят: Тесты кейса (26.09.2026 06:32): 255 passed. Приложение — подробные слайды для вопросов.</a:t>
+              <a:t>Если спросят: Тесты кейса (26.09.2026 09:06): 255 passed. Приложение — подробные слайды для вопросов.</a:t>
             </a:r>
           </a:p>
         </p:txBody>
@@ -6167,13 +6167,13 @@
               </a:spcAft>
             </a:pPr>
             <a:r>
-              <a:rPr sz="2800" b="1">
+              <a:rPr sz="2400" b="1">
                 <a:solidFill>
                   <a:srgbClr val="EEEFF1"/>
                 </a:solidFill>
                 <a:latin typeface="Segoe UI"/>
               </a:rPr>
-              <a:t>Счётчик по фото и выгрузка: карта = CSV = GeoJSON (23 = 23 = 23)</a:t>
+              <a:t>Счётчик по фото и выгрузка: зоны отложенной сцены на карте = CSV = GeoJSON (23 = 23 = 23)</a:t>
             </a:r>
           </a:p>
         </p:txBody>
@@ -6195,7 +6195,7 @@
         <p:spPr>
           <a:xfrm>
             <a:off x="457200" y="1600200"/>
-            <a:ext cx="5486400" cy="3084593"/>
+            <a:ext cx="5486400" cy="3086100"/>
           </a:xfrm>
           <a:prstGeom prst="rect">
             <a:avLst/>
@@ -6210,7 +6210,7 @@
         </p:nvSpPr>
         <p:spPr>
           <a:xfrm>
-            <a:off x="457200" y="4757945"/>
+            <a:off x="457200" y="4759452"/>
             <a:ext cx="5486400" cy="640080"/>
           </a:xfrm>
           <a:prstGeom prst="rect">
@@ -6299,7 +6299,7 @@
                 </a:solidFill>
                 <a:latin typeface="Segoe UI"/>
               </a:rPr>
-              <a:t>Выгрузка GeoJSON/CSV и повтор сохранённого запроса</a:t>
+              <a:t>Выгрузка GeoJSON/CSV того, что на карте; запросы сохраняются и повторяются</a:t>
             </a:r>
           </a:p>
         </p:txBody>
@@ -6377,7 +6377,7 @@
                 </a:solidFill>
                 <a:latin typeface="Segoe UI"/>
               </a:rPr>
-              <a:t>Источник: reports/case_demo/*.png; reports/photo_count/ui_photo_v2.png; docs/CONTRACTS_V3.md</a:t>
+              <a:t>Источник: presentation/img/*.png (presentation/make_shots.py, http://localhost:8070, 1920×1080); docs/CONTRACTS_V3.md</a:t>
             </a:r>
           </a:p>
         </p:txBody>
@@ -6717,7 +6717,7 @@
                 </a:solidFill>
                 <a:latin typeface="Segoe UI"/>
               </a:rPr>
-              <a:t>3:20</a:t>
+              <a:t>3:21</a:t>
             </a:r>
           </a:p>
         </p:txBody>
@@ -7230,7 +7230,7 @@
                 </a:solidFill>
                 <a:latin typeface="Segoe UI"/>
               </a:rPr>
-              <a:t>3:42</a:t>
+              <a:t>3:43</a:t>
             </a:r>
           </a:p>
         </p:txBody>
@@ -7849,7 +7849,7 @@
                 </a:solidFill>
                 <a:latin typeface="Segoe UI"/>
               </a:rPr>
-              <a:t>3:56</a:t>
+              <a:t>3:57</a:t>
             </a:r>
           </a:p>
         </p:txBody>
@@ -17673,7 +17673,7 @@
         <p:spPr>
           <a:xfrm>
             <a:off x="4892040" y="1600200"/>
-            <a:ext cx="6858000" cy="3855742"/>
+            <a:ext cx="6858000" cy="3857625"/>
           </a:xfrm>
           <a:prstGeom prst="rect">
             <a:avLst/>
@@ -17688,7 +17688,7 @@
         </p:nvSpPr>
         <p:spPr>
           <a:xfrm>
-            <a:off x="4892040" y="5547382"/>
+            <a:off x="4892040" y="5549265"/>
             <a:ext cx="6858000" cy="548640"/>
           </a:xfrm>
           <a:prstGeom prst="rect">
@@ -18059,7 +18059,7 @@
       </p:sp>
       <p:pic>
         <p:nvPicPr>
-          <p:cNvPr id="8" name="Picture 7" descr="09_demo_zone_card.jpg"/>
+          <p:cNvPr id="8" name="Picture 7" descr="26_sz_card.jpg"/>
           <p:cNvPicPr>
             <a:picLocks noChangeAspect="1"/>
           </p:cNvPicPr>
@@ -18302,131 +18302,9 @@
           </a:p>
         </p:txBody>
       </p:sp>
-      <p:sp>
-        <p:nvSpPr>
-          <p:cNvPr id="4" name="Rectangle 3"/>
-          <p:cNvSpPr/>
-          <p:nvPr/>
-        </p:nvSpPr>
-        <p:spPr>
-          <a:xfrm>
-            <a:off x="457200" y="1600200"/>
-            <a:ext cx="3566160" cy="3566160"/>
-          </a:xfrm>
-          <a:prstGeom prst="rect">
-            <a:avLst/>
-          </a:prstGeom>
-          <a:solidFill>
-            <a:srgbClr val="1B1E24"/>
-          </a:solidFill>
-          <a:ln>
-            <a:noFill/>
-          </a:ln>
-          <a:effectLst/>
-        </p:spPr>
-        <p:style>
-          <a:lnRef idx="1">
-            <a:schemeClr val="accent1"/>
-          </a:lnRef>
-          <a:fillRef idx="3">
-            <a:schemeClr val="accent1"/>
-          </a:fillRef>
-          <a:effectRef idx="2">
-            <a:schemeClr val="accent1"/>
-          </a:effectRef>
-          <a:fontRef idx="minor">
-            <a:schemeClr val="lt1"/>
-          </a:fontRef>
-        </p:style>
-        <p:txBody>
-          <a:bodyPr rtlCol="0" anchor="ctr"/>
-          <a:lstStyle/>
-          <a:p>
-            <a:pPr algn="ctr"/>
-          </a:p>
-        </p:txBody>
-      </p:sp>
-      <p:sp>
-        <p:nvSpPr>
-          <p:cNvPr id="5" name="TextBox 4"/>
-          <p:cNvSpPr txBox="1"/>
-          <p:nvPr/>
-        </p:nvSpPr>
-        <p:spPr>
-          <a:xfrm>
-            <a:off x="731520" y="3017520"/>
-            <a:ext cx="3017520" cy="731520"/>
-          </a:xfrm>
-          <a:prstGeom prst="rect">
-            <a:avLst/>
-          </a:prstGeom>
-          <a:noFill/>
-        </p:spPr>
-        <p:txBody>
-          <a:bodyPr wrap="square" anchor="ctr" lIns="18288" rIns="18288" tIns="18288" bIns="18288">
-            <a:spAutoFit/>
-          </a:bodyPr>
-          <a:lstStyle/>
-          <a:p>
-            <a:pPr algn="ctr">
-              <a:spcAft>
-                <a:spcPts val="600"/>
-              </a:spcAft>
-            </a:pPr>
-            <a:r>
-              <a:rPr sz="1600" b="0">
-                <a:solidFill>
-                  <a:srgbClr val="9AA1AC"/>
-                </a:solidFill>
-                <a:latin typeface="Segoe UI"/>
-              </a:rPr>
-              <a:t>Скрин сервиса v2 (http://localhost:8070) — будет вставлен после финальной правки интерфейса</a:t>
-            </a:r>
-          </a:p>
-        </p:txBody>
-      </p:sp>
-      <p:sp>
-        <p:nvSpPr>
-          <p:cNvPr id="6" name="TextBox 5"/>
-          <p:cNvSpPr txBox="1"/>
-          <p:nvPr/>
-        </p:nvSpPr>
-        <p:spPr>
-          <a:xfrm>
-            <a:off x="457200" y="5239512"/>
-            <a:ext cx="3566160" cy="640080"/>
-          </a:xfrm>
-          <a:prstGeom prst="rect">
-            <a:avLst/>
-          </a:prstGeom>
-          <a:noFill/>
-        </p:spPr>
-        <p:txBody>
-          <a:bodyPr wrap="square" anchor="t" lIns="18288" rIns="18288" tIns="18288" bIns="18288">
-            <a:spAutoFit/>
-          </a:bodyPr>
-          <a:lstStyle/>
-          <a:p>
-            <a:pPr algn="l">
-              <a:spcAft>
-                <a:spcPts val="600"/>
-              </a:spcAft>
-            </a:pPr>
-            <a:r>
-              <a:rPr sz="1300" b="0">
-                <a:solidFill>
-                  <a:srgbClr val="EEEFF1"/>
-                </a:solidFill>
-                <a:latin typeface="Segoe UI"/>
-              </a:rPr>
-              <a:t>1. Обзор Земли: находки обработанных сцен сразу, без формы</a:t>
-            </a:r>
-          </a:p>
-        </p:txBody>
-      </p:sp>
       <p:pic>
         <p:nvPicPr>
-          <p:cNvPr id="7" name="Picture 6" descr="22_svc_card.jpg"/>
+          <p:cNvPr id="4" name="Picture 3" descr="21_svc_earth.jpg"/>
           <p:cNvPicPr>
             <a:picLocks noChangeAspect="1"/>
           </p:cNvPicPr>
@@ -18440,6 +18318,69 @@
         </p:blipFill>
         <p:spPr>
           <a:xfrm>
+            <a:off x="457200" y="1600200"/>
+            <a:ext cx="3566160" cy="2431472"/>
+          </a:xfrm>
+          <a:prstGeom prst="rect">
+            <a:avLst/>
+          </a:prstGeom>
+        </p:spPr>
+      </p:pic>
+      <p:sp>
+        <p:nvSpPr>
+          <p:cNvPr id="5" name="TextBox 4"/>
+          <p:cNvSpPr txBox="1"/>
+          <p:nvPr/>
+        </p:nvSpPr>
+        <p:spPr>
+          <a:xfrm>
+            <a:off x="457200" y="4104824"/>
+            <a:ext cx="3566160" cy="640080"/>
+          </a:xfrm>
+          <a:prstGeom prst="rect">
+            <a:avLst/>
+          </a:prstGeom>
+          <a:noFill/>
+        </p:spPr>
+        <p:txBody>
+          <a:bodyPr wrap="square" anchor="t" lIns="18288" rIns="18288" tIns="18288" bIns="18288">
+            <a:spAutoFit/>
+          </a:bodyPr>
+          <a:lstStyle/>
+          <a:p>
+            <a:pPr algn="l">
+              <a:spcAft>
+                <a:spcPts val="600"/>
+              </a:spcAft>
+            </a:pPr>
+            <a:r>
+              <a:rPr sz="1300" b="0">
+                <a:solidFill>
+                  <a:srgbClr val="EEEFF1"/>
+                </a:solidFill>
+                <a:latin typeface="Segoe UI"/>
+              </a:rPr>
+              <a:t>1. Обзор Земли: находки обработанных сцен сразу, без формы</a:t>
+            </a:r>
+          </a:p>
+        </p:txBody>
+      </p:sp>
+      <p:pic>
+        <p:nvPicPr>
+          <p:cNvPr id="6" name="Picture 5" descr="22_svc_card.jpg"/>
+          <p:cNvPicPr>
+            <a:picLocks noChangeAspect="1"/>
+          </p:cNvPicPr>
+          <p:nvPr/>
+        </p:nvPicPr>
+        <p:blipFill>
+          <a:blip r:embed="rId3"/>
+          <a:stretch>
+            <a:fillRect/>
+          </a:stretch>
+        </p:blipFill>
+        <p:spPr>
+          <a:xfrm>
             <a:off x="4297680" y="1600200"/>
             <a:ext cx="3566160" cy="2005965"/>
           </a:xfrm>
@@ -18450,7 +18391,7 @@
       </p:pic>
       <p:sp>
         <p:nvSpPr>
-          <p:cNvPr id="8" name="TextBox 7"/>
+          <p:cNvPr id="7" name="TextBox 6"/>
           <p:cNvSpPr txBox="1"/>
           <p:nvPr/>
         </p:nvSpPr>
@@ -18487,131 +18428,72 @@
           </a:p>
         </p:txBody>
       </p:sp>
-      <p:sp>
-        <p:nvSpPr>
-          <p:cNvPr id="9" name="Rectangle 8"/>
-          <p:cNvSpPr/>
-          <p:nvPr/>
-        </p:nvSpPr>
+      <p:pic>
+        <p:nvPicPr>
+          <p:cNvPr id="8" name="Picture 7" descr="25_svc_studio.jpg"/>
+          <p:cNvPicPr>
+            <a:picLocks noChangeAspect="1"/>
+          </p:cNvPicPr>
+          <p:nvPr/>
+        </p:nvPicPr>
+        <p:blipFill>
+          <a:blip r:embed="rId4"/>
+          <a:stretch>
+            <a:fillRect/>
+          </a:stretch>
+        </p:blipFill>
         <p:spPr>
           <a:xfrm>
             <a:off x="8138160" y="1600200"/>
-            <a:ext cx="3566160" cy="3566160"/>
-          </a:xfrm>
-          <a:prstGeom prst="rect">
-            <a:avLst/>
-          </a:prstGeom>
-          <a:solidFill>
-            <a:srgbClr val="1B1E24"/>
-          </a:solidFill>
-          <a:ln>
-            <a:noFill/>
-          </a:ln>
-          <a:effectLst/>
-        </p:spPr>
-        <p:style>
-          <a:lnRef idx="1">
-            <a:schemeClr val="accent1"/>
-          </a:lnRef>
-          <a:fillRef idx="3">
-            <a:schemeClr val="accent1"/>
-          </a:fillRef>
-          <a:effectRef idx="2">
-            <a:schemeClr val="accent1"/>
-          </a:effectRef>
-          <a:fontRef idx="minor">
-            <a:schemeClr val="lt1"/>
-          </a:fontRef>
-        </p:style>
-        <p:txBody>
-          <a:bodyPr rtlCol="0" anchor="ctr"/>
-          <a:lstStyle/>
-          <a:p>
-            <a:pPr algn="ctr"/>
+            <a:ext cx="3566160" cy="2431472"/>
+          </a:xfrm>
+          <a:prstGeom prst="rect">
+            <a:avLst/>
+          </a:prstGeom>
+        </p:spPr>
+      </p:pic>
+      <p:sp>
+        <p:nvSpPr>
+          <p:cNvPr id="9" name="TextBox 8"/>
+          <p:cNvSpPr txBox="1"/>
+          <p:nvPr/>
+        </p:nvSpPr>
+        <p:spPr>
+          <a:xfrm>
+            <a:off x="8138160" y="4104824"/>
+            <a:ext cx="3566160" cy="640080"/>
+          </a:xfrm>
+          <a:prstGeom prst="rect">
+            <a:avLst/>
+          </a:prstGeom>
+          <a:noFill/>
+        </p:spPr>
+        <p:txBody>
+          <a:bodyPr wrap="square" anchor="t" lIns="18288" rIns="18288" tIns="18288" bIns="18288">
+            <a:spAutoFit/>
+          </a:bodyPr>
+          <a:lstStyle/>
+          <a:p>
+            <a:pPr algn="l">
+              <a:spcAft>
+                <a:spcPts val="600"/>
+              </a:spcAft>
+            </a:pPr>
+            <a:r>
+              <a:rPr sz="1300" b="0">
+                <a:solidFill>
+                  <a:srgbClr val="EEEFF1"/>
+                </a:solidFill>
+                <a:latin typeface="Segoe UI"/>
+              </a:rPr>
+              <a:t>3. «В студию» — работа с зоной; «Назад к карте» — к той же точке обзора</a:t>
+            </a:r>
           </a:p>
         </p:txBody>
       </p:sp>
       <p:sp>
         <p:nvSpPr>
           <p:cNvPr id="10" name="TextBox 9"/>
-          <p:cNvSpPr txBox="1"/>
-          <p:nvPr/>
-        </p:nvSpPr>
-        <p:spPr>
-          <a:xfrm>
-            <a:off x="8412480" y="3017520"/>
-            <a:ext cx="3017520" cy="731520"/>
-          </a:xfrm>
-          <a:prstGeom prst="rect">
-            <a:avLst/>
-          </a:prstGeom>
-          <a:noFill/>
-        </p:spPr>
-        <p:txBody>
-          <a:bodyPr wrap="square" anchor="ctr" lIns="18288" rIns="18288" tIns="18288" bIns="18288">
-            <a:spAutoFit/>
-          </a:bodyPr>
-          <a:lstStyle/>
-          <a:p>
-            <a:pPr algn="ctr">
-              <a:spcAft>
-                <a:spcPts val="600"/>
-              </a:spcAft>
-            </a:pPr>
-            <a:r>
-              <a:rPr sz="1600" b="0">
-                <a:solidFill>
-                  <a:srgbClr val="9AA1AC"/>
-                </a:solidFill>
-                <a:latin typeface="Segoe UI"/>
-              </a:rPr>
-              <a:t>Скрин сервиса v2 (http://localhost:8070) — будет вставлен после финальной правки интерфейса</a:t>
-            </a:r>
-          </a:p>
-        </p:txBody>
-      </p:sp>
-      <p:sp>
-        <p:nvSpPr>
-          <p:cNvPr id="11" name="TextBox 10"/>
-          <p:cNvSpPr txBox="1"/>
-          <p:nvPr/>
-        </p:nvSpPr>
-        <p:spPr>
-          <a:xfrm>
-            <a:off x="8138160" y="5239512"/>
-            <a:ext cx="3566160" cy="640080"/>
-          </a:xfrm>
-          <a:prstGeom prst="rect">
-            <a:avLst/>
-          </a:prstGeom>
-          <a:noFill/>
-        </p:spPr>
-        <p:txBody>
-          <a:bodyPr wrap="square" anchor="t" lIns="18288" rIns="18288" tIns="18288" bIns="18288">
-            <a:spAutoFit/>
-          </a:bodyPr>
-          <a:lstStyle/>
-          <a:p>
-            <a:pPr algn="l">
-              <a:spcAft>
-                <a:spcPts val="600"/>
-              </a:spcAft>
-            </a:pPr>
-            <a:r>
-              <a:rPr sz="1300" b="0">
-                <a:solidFill>
-                  <a:srgbClr val="EEEFF1"/>
-                </a:solidFill>
-                <a:latin typeface="Segoe UI"/>
-              </a:rPr>
-              <a:t>3. «В студию» — работа с зоной; «Назад к карте» — к той же точке обзора</a:t>
-            </a:r>
-          </a:p>
-        </p:txBody>
-      </p:sp>
-      <p:sp>
-        <p:nvSpPr>
-          <p:cNvPr id="12" name="TextBox 11"/>
           <p:cNvSpPr txBox="1"/>
           <p:nvPr/>
         </p:nvSpPr>
@@ -18650,7 +18532,7 @@
       </p:sp>
       <p:sp>
         <p:nvSpPr>
-          <p:cNvPr id="13" name="TextBox 12"/>
+          <p:cNvPr id="11" name="TextBox 10"/>
           <p:cNvSpPr txBox="1"/>
           <p:nvPr/>
         </p:nvSpPr>
@@ -18682,14 +18564,14 @@
                 </a:solidFill>
                 <a:latin typeface="Segoe UI"/>
               </a:rPr>
-              <a:t>Источник: http://localhost:8070 (v2); docs/DEMO.md</a:t>
-            </a:r>
-          </a:p>
-        </p:txBody>
-      </p:sp>
-      <p:sp>
-        <p:nvSpPr>
-          <p:cNvPr id="14" name="TextBox 13"/>
+              <a:t>Источник: presentation/img/*.png (presentation/make_shots.py, http://localhost:8070, 1920×1080, без фикстур); docs/DEMO.md</a:t>
+            </a:r>
+          </a:p>
+        </p:txBody>
+      </p:sp>
+      <p:sp>
+        <p:nvSpPr>
+          <p:cNvPr id="12" name="TextBox 11"/>
           <p:cNvSpPr txBox="1"/>
           <p:nvPr/>
         </p:nvSpPr>

--- a/reports/case_deck.pptx
+++ b/reports/case_deck.pptx
@@ -18013,7 +18013,7 @@
                 </a:solidFill>
                 <a:latin typeface="Segoe UI"/>
               </a:rPr>
-              <a:t>14 + 64</a:t>
+              <a:t>78</a:t>
             </a:r>
           </a:p>
         </p:txBody>

--- a/reports/case_deck.pptx
+++ b/reports/case_deck.pptx
@@ -837,7 +837,7 @@
           <a:p/>
           <a:p>
             <a:r>
-              <a:t>Если спросят: Тесты кейса (26.09.2026 09:06): 255 passed. Приложение — подробные слайды для вопросов.</a:t>
+              <a:t>Если спросят: Тесты кейса (26.09.2026 09:46): 255 passed. Приложение — подробные слайды для вопросов.</a:t>
             </a:r>
           </a:p>
         </p:txBody>

--- a/reports/case_deck.pptx
+++ b/reports/case_deck.pptx
@@ -5919,7 +5919,7 @@
                           </a:solidFill>
                           <a:latin typeface="Segoe UI"/>
                         </a:rPr>
-                        <a:t>плавающие предметы &gt; 10 см</a:t>
+                        <a:t>все плавающие предметы &gt; 10 см (не только пластик)</a:t>
                       </a:r>
                     </a:p>
                   </a:txBody>
@@ -6377,7 +6377,7 @@
                 </a:solidFill>
                 <a:latin typeface="Segoe UI"/>
               </a:rPr>
-              <a:t>Источник: presentation/img/*.png (presentation/make_shots.py, http://localhost:8070, 1920×1080); docs/CONTRACTS_V3.md</a:t>
+              <a:t>Источник: presentation/img/*.jpg (presentation/make_shots.py, http://localhost:8070, 1920×1080); docs/CONTRACTS_V3.md</a:t>
             </a:r>
           </a:p>
         </p:txBody>
@@ -16889,7 +16889,7 @@
                 </a:solidFill>
                 <a:latin typeface="Segoe UI"/>
               </a:rPr>
-              <a:t>шт./км², ADIS, предметы &gt; 10 см [1.52–1.56]; калибровка авторов по тралу — 4.64</a:t>
+              <a:t>шт./км², ADIS: все предметы &gt; 10 см (не только пластик), измерение ΣN/ΣA [1.52–1.56]; калибровка авторов по тралу — 4.64</a:t>
             </a:r>
           </a:p>
         </p:txBody>
@@ -18564,7 +18564,7 @@
                 </a:solidFill>
                 <a:latin typeface="Segoe UI"/>
               </a:rPr>
-              <a:t>Источник: presentation/img/*.png (presentation/make_shots.py, http://localhost:8070, 1920×1080, без фикстур); docs/DEMO.md</a:t>
+              <a:t>Источник: presentation/img/*.jpg (presentation/make_shots.py, http://localhost:8070, 1920×1080, без фикстур); docs/DEMO.md</a:t>
             </a:r>
           </a:p>
         </p:txBody>

--- a/reports/case_deck.pptx
+++ b/reports/case_deck.pptx
@@ -831,13 +831,13 @@
           <a:lstStyle/>
           <a:p>
             <a:r>
-              <a:t>[3:57–4:10] Всё воспроизводится одной командой без сети за 11.5 секунды, чистый клон до карты — 7,5 минуты, числа в README, отчёте и этой презентации сверяет тест. Спасибо, готовы к вопросам.</a:t>
+              <a:t>[3:57–4:10] Всё воспроизводится одной командой без сети за 7.5 секунды, чистый клон до карты — 7,5 минуты, числа в README, отчёте и этой презентации сверяет тест. Спасибо, готовы к вопросам.</a:t>
             </a:r>
           </a:p>
           <a:p/>
           <a:p>
             <a:r>
-              <a:t>Если спросят: Тесты кейса (26.09.2026 09:46): 255 passed. Приложение — подробные слайды для вопросов.</a:t>
+              <a:t>Если спросят: Тесты кейса (26.09.2026 11:15): 255 passed. Приложение — подробные слайды для вопросов.</a:t>
             </a:r>
           </a:p>
         </p:txBody>
@@ -7334,7 +7334,7 @@
                 </a:solidFill>
                 <a:latin typeface="Segoe UI"/>
               </a:rPr>
-              <a:t>Одна команда без сети — 11.5 с; чистый клон до карты — 7,5 мин; числа из одного файла</a:t>
+              <a:t>Одна команда без сети — 7.5 с; чистый клон до карты — 7,5 мин; числа из одного файла</a:t>
             </a:r>
           </a:p>
         </p:txBody>
@@ -7417,7 +7417,7 @@
                 </a:solidFill>
                 <a:latin typeface="Segoe UI"/>
               </a:rPr>
-              <a:t>11.5 с</a:t>
+              <a:t>7.5 с</a:t>
             </a:r>
           </a:p>
         </p:txBody>
@@ -7755,7 +7755,7 @@
                 </a:solidFill>
                 <a:latin typeface="Segoe UI"/>
               </a:rPr>
-              <a:t>• Все числа — reports/final_numbers.json; отпечаток прогона 3db680b6661e86d3</a:t>
+              <a:t>• Все числа — reports/final_numbers.json; отпечаток прогона 278d93fb3390edeb</a:t>
             </a:r>
           </a:p>
           <a:p>
@@ -18013,7 +18013,7 @@
                 </a:solidFill>
                 <a:latin typeface="Segoe UI"/>
               </a:rPr>
-              <a:t>78</a:t>
+              <a:t>77</a:t>
             </a:r>
           </a:p>
         </p:txBody>
@@ -18052,7 +18052,7 @@
                 </a:solidFill>
                 <a:latin typeface="Segoe UI"/>
               </a:rPr>
-              <a:t>находок детектора на 75 сценах: 14 совпали с Cózar, 64 требуют проверки; ещё 180 — недостаточно данных или ложные, 28 — не обнаружено</a:t>
+              <a:t>находок детектора на 75 сценах (14 совпали с Cózar; на снимках из обучения MARIDA не считаем — 1); ещё 180 — недостаточно данных или ложные, 28 — не обнаружено</a:t>
             </a:r>
           </a:p>
         </p:txBody>

--- a/reports/case_deck.pptx
+++ b/reports/case_deck.pptx
@@ -6134,7 +6134,7 @@
                 </a:solidFill>
                 <a:latin typeface="Segoe UI"/>
               </a:rPr>
-              <a:t>10 · Сервис: фото и выгрузка</a:t>
+              <a:t>10 · Сервис: фото, метрики, выгрузка</a:t>
             </a:r>
           </a:p>
         </p:txBody>
@@ -6173,7 +6173,7 @@
                 </a:solidFill>
                 <a:latin typeface="Segoe UI"/>
               </a:rPr>
-              <a:t>Счётчик по фото и выгрузка: зоны отложенной сцены на карте = CSV = GeoJSON (23 = 23 = 23)</a:t>
+              <a:t>Фото, метрики, выгрузка: зоны отложенной сцены на карте = CSV = GeoJSON (23 = 23 = 23)</a:t>
             </a:r>
           </a:p>
         </p:txBody>
@@ -6195,7 +6195,7 @@
         <p:spPr>
           <a:xfrm>
             <a:off x="457200" y="1600200"/>
-            <a:ext cx="5486400" cy="3086100"/>
+            <a:ext cx="3566160" cy="2005965"/>
           </a:xfrm>
           <a:prstGeom prst="rect">
             <a:avLst/>
@@ -6210,8 +6210,8 @@
         </p:nvSpPr>
         <p:spPr>
           <a:xfrm>
-            <a:off x="457200" y="4759452"/>
-            <a:ext cx="5486400" cy="640080"/>
+            <a:off x="457200" y="3679316"/>
+            <a:ext cx="3566160" cy="640080"/>
           </a:xfrm>
           <a:prstGeom prst="rect">
             <a:avLst/>
@@ -6243,7 +6243,7 @@
       </p:sp>
       <p:pic>
         <p:nvPicPr>
-          <p:cNvPr id="6" name="Picture 5" descr="24_svc_export.jpg"/>
+          <p:cNvPr id="6" name="Picture 5" descr="27_svc_metrics.jpg"/>
           <p:cNvPicPr>
             <a:picLocks noChangeAspect="1"/>
           </p:cNvPicPr>
@@ -6257,8 +6257,8 @@
         </p:blipFill>
         <p:spPr>
           <a:xfrm>
-            <a:off x="6217920" y="1600200"/>
-            <a:ext cx="5486400" cy="3086100"/>
+            <a:off x="4297680" y="1600200"/>
+            <a:ext cx="3566160" cy="3413324"/>
           </a:xfrm>
           <a:prstGeom prst="rect">
             <a:avLst/>
@@ -6273,8 +6273,8 @@
         </p:nvSpPr>
         <p:spPr>
           <a:xfrm>
-            <a:off x="6217920" y="4759452"/>
-            <a:ext cx="5486400" cy="640080"/>
+            <a:off x="4297680" y="5086676"/>
+            <a:ext cx="3566160" cy="640080"/>
           </a:xfrm>
           <a:prstGeom prst="rect">
             <a:avLst/>
@@ -6299,6 +6299,69 @@
                 </a:solidFill>
                 <a:latin typeface="Segoe UI"/>
               </a:rPr>
+              <a:t>«Метрики»: F1 детектора и отложенный test концентрации против медианы</a:t>
+            </a:r>
+          </a:p>
+        </p:txBody>
+      </p:sp>
+      <p:pic>
+        <p:nvPicPr>
+          <p:cNvPr id="8" name="Picture 7" descr="24_svc_export.jpg"/>
+          <p:cNvPicPr>
+            <a:picLocks noChangeAspect="1"/>
+          </p:cNvPicPr>
+          <p:nvPr/>
+        </p:nvPicPr>
+        <p:blipFill>
+          <a:blip r:embed="rId4"/>
+          <a:stretch>
+            <a:fillRect/>
+          </a:stretch>
+        </p:blipFill>
+        <p:spPr>
+          <a:xfrm>
+            <a:off x="8138160" y="1600200"/>
+            <a:ext cx="3566160" cy="2005965"/>
+          </a:xfrm>
+          <a:prstGeom prst="rect">
+            <a:avLst/>
+          </a:prstGeom>
+        </p:spPr>
+      </p:pic>
+      <p:sp>
+        <p:nvSpPr>
+          <p:cNvPr id="9" name="TextBox 8"/>
+          <p:cNvSpPr txBox="1"/>
+          <p:nvPr/>
+        </p:nvSpPr>
+        <p:spPr>
+          <a:xfrm>
+            <a:off x="8138160" y="3679316"/>
+            <a:ext cx="3566160" cy="640080"/>
+          </a:xfrm>
+          <a:prstGeom prst="rect">
+            <a:avLst/>
+          </a:prstGeom>
+          <a:noFill/>
+        </p:spPr>
+        <p:txBody>
+          <a:bodyPr wrap="square" anchor="t" lIns="18288" rIns="18288" tIns="18288" bIns="18288">
+            <a:spAutoFit/>
+          </a:bodyPr>
+          <a:lstStyle/>
+          <a:p>
+            <a:pPr algn="l">
+              <a:spcAft>
+                <a:spcPts val="600"/>
+              </a:spcAft>
+            </a:pPr>
+            <a:r>
+              <a:rPr sz="1300" b="0">
+                <a:solidFill>
+                  <a:srgbClr val="EEEFF1"/>
+                </a:solidFill>
+                <a:latin typeface="Segoe UI"/>
+              </a:rPr>
               <a:t>Выгрузка GeoJSON/CSV того, что на карте; запросы сохраняются и повторяются</a:t>
             </a:r>
           </a:p>
@@ -6306,7 +6369,7 @@
       </p:sp>
       <p:sp>
         <p:nvSpPr>
-          <p:cNvPr id="8" name="TextBox 7"/>
+          <p:cNvPr id="10" name="TextBox 9"/>
           <p:cNvSpPr txBox="1"/>
           <p:nvPr/>
         </p:nvSpPr>
@@ -6345,7 +6408,7 @@
       </p:sp>
       <p:sp>
         <p:nvSpPr>
-          <p:cNvPr id="9" name="TextBox 8"/>
+          <p:cNvPr id="11" name="TextBox 10"/>
           <p:cNvSpPr txBox="1"/>
           <p:nvPr/>
         </p:nvSpPr>
@@ -6384,7 +6447,7 @@
       </p:sp>
       <p:sp>
         <p:nvSpPr>
-          <p:cNvPr id="10" name="TextBox 9"/>
+          <p:cNvPr id="12" name="TextBox 11"/>
           <p:cNvSpPr txBox="1"/>
           <p:nvPr/>
         </p:nvSpPr>

--- a/reports/case_deck.pptx
+++ b/reports/case_deck.pptx
@@ -31,6 +31,7 @@
     <p:sldId id="279" r:id="rId31"/>
     <p:sldId id="280" r:id="rId32"/>
     <p:sldId id="281" r:id="rId33"/>
+    <p:sldId id="282" r:id="rId34"/>
   </p:sldIdLst>
   <p:sldSz cx="12191695" cy="6858000" type="screen4x3"/>
   <p:notesSz cx="6858000" cy="9144000"/>
@@ -603,13 +604,13 @@
           <a:lstStyle/>
           <a:p>
             <a:r>
-              <a:t>[3:04–3:21] Режим «Фото» открывается с готовым примером: рамки и число предметов, а при известной площади кадра — штуки на квадратный километр. У каждого числа подписан источник. Выгрузка GeoJSON и CSV совпадает с картой, запрос можно сохранить и повторить.</a:t>
+              <a:t>[3:15–3:36] Сервис. При открытии — Земля и список снимков с находками. Клик по снимку — зоны по номерам с площадью и оценкой. Клик по зоне — карточка: что найдено, когда, уверенность и откуда каждое число. Из карточки — в студию, кнопкой «Назад» — к следующей находке.</a:t>
             </a:r>
           </a:p>
           <a:p/>
           <a:p>
             <a:r>
-              <a:t>Если спросят: Выгрузка сверяется тестом: UI 23, CSV 23, GeoJSON 23 строк.</a:t>
+              <a:t>Если спросят: Показ вживую — docs/DEMO.md; запасное видео — presentation/demo.mp4. Полевые шт./км² другого места не выдаются за плотность зоны.</a:t>
             </a:r>
           </a:p>
         </p:txBody>
@@ -679,13 +680,13 @@
           <a:lstStyle/>
           <a:p>
             <a:r>
-              <a:t>[3:21–3:43] Что мы не утверждаем. Штук по снимку — нет, калибровочных пар ноль. Пластик по снимку — нет, детектор видит любой мусор и путает суда. Предел обнаружения не доказан. При сильном ветре — «недостаточно данных». Поле — один рейс, а счётчик по фото без дообучения на реку не переносится.</a:t>
+              <a:t>[3:36–3:53] Режим «Фото» открывается с готовым примером: рамки и число предметов, а при известной площади кадра — штуки на квадратный километр. У каждого числа подписан источник. Выгрузка GeoJSON и CSV совпадает с картой, запрос можно сохранить и повторить.</a:t>
             </a:r>
           </a:p>
           <a:p/>
           <a:p>
             <a:r>
-              <a:t>Если спросят: Test концентрации не абсолютно нетронутый: ранняя разведка бейзлайнов (baseline_concentration.py, run_all шаг 4: median/mean/kNN) видела все события профиля, включая будущий test; test не абсолютно нетронутый — указывается как ограничение. Порог ветра — 5 м/с из Methods Cózar 2024, не подбирался.</a:t>
+              <a:t>Если спросят: Выгрузка сверяется тестом: UI 23, CSV 23, GeoJSON 23 строк.</a:t>
             </a:r>
           </a:p>
         </p:txBody>
@@ -755,13 +756,13 @@
           <a:lstStyle/>
           <a:p>
             <a:r>
-              <a:t>[3:43–3:57] Развитие — замкнуть лестницу. Спутник находит зону, над ней делается детальный снимок с дрона, счётчик даёт штуки на квадратный километр, их сверяем с полем. Для калибровки хватит 4–12 таких пар.</a:t>
+              <a:t>[3:53–4:17] Что мы не утверждаем. Штуки по снимку — только исследовательская оценка, природных калибровочных пар ноль. Пластик по снимку — нет, детектор видит любой мусор и путает суда. Предел обнаружения не доказан. При сильном ветре — «недостаточно данных». Поле — один рейс, а счётчик по фото без дообучения на реку не переносится.</a:t>
             </a:r>
           </a:p>
           <a:p/>
           <a:p>
             <a:r>
-              <a:t>Если спросят: Проверено: доступа к VHR над положительными отрезками ADIS в тот же день нет; поэтому это следующий шаг, а не результат.</a:t>
+              <a:t>Если спросят: Test концентрации не абсолютно нетронутый: ранняя разведка бейзлайнов (baseline_concentration.py, run_all шаг 4: median/mean/kNN) видела все события профиля, включая будущий test; test не абсолютно нетронутый — указывается как ограничение. Порог ветра — 5 м/с из Methods Cózar 2024, не подбирался.</a:t>
             </a:r>
           </a:p>
         </p:txBody>
@@ -831,13 +832,13 @@
           <a:lstStyle/>
           <a:p>
             <a:r>
-              <a:t>[3:57–4:10] Всё воспроизводится одной командой без сети за 7.5 секунды, чистый клон до карты — 7,5 минуты, числа в README, отчёте и этой презентации сверяет тест. Спасибо, готовы к вопросам.</a:t>
+              <a:t>[4:17–4:31] Развитие — замкнуть лестницу. Спутник находит зону, над ней делается детальный снимок с дрона, счётчик даёт штуки на квадратный километр, их сверяем с полем. Для калибровки хватит 4–12 таких пар.</a:t>
             </a:r>
           </a:p>
           <a:p/>
           <a:p>
             <a:r>
-              <a:t>Если спросят: Тесты кейса (26.09.2026 11:15): 255 passed. Приложение — подробные слайды для вопросов.</a:t>
+              <a:t>Если спросят: Проверено: доступа к VHR над положительными отрезками ADIS в тот же день нет; поэтому это следующий шаг, а не результат.</a:t>
             </a:r>
           </a:p>
         </p:txBody>
@@ -907,7 +908,13 @@
           <a:lstStyle/>
           <a:p>
             <a:r>
-              <a:t>[прил.–прил.] Главное в работе — как мы искали данные. CSV — это подсчёты вдоль маршрутов, поэтому каждую находку мы помечаем уровнем: A, B, C или D. У событий CSV пар уровня A — 0: для пластика снимков нет, в Северном море облака, в Чёрном время трансект не опубликовано. Тогда мы нашли открытые данные ADIS: 66 пар по месту и времени.</a:t>
+              <a:t>[4:31–4:44] Всё воспроизводится одной командой без сети за 7.5 секунды, чистый клон до карты — 7,5 минуты, числа в README, отчёте и этой презентации сверяет тест. Спасибо, готовы к вопросам.</a:t>
+            </a:r>
+          </a:p>
+          <a:p/>
+          <a:p>
+            <a:r>
+              <a:t>Если спросят: Тесты кейса (26.09.2026 16:31): 255 passed. Приложение — подробные слайды для вопросов.</a:t>
             </a:r>
           </a:p>
         </p:txBody>
@@ -977,7 +984,7 @@
           <a:lstStyle/>
           <a:p>
             <a:r>
-              <a:t>[прил.–прил.] Пар по месту и времени — 66, но это не калибровочные пары: на 6 отрезках с предметами детектор их не увидел, предмет меньше процента пикселя. Калибровочных пар «снимок — штуки» 0: мы проверили 318 событий CSV и 177 синхронных отрезков ADIS. У авторов крупнейшего набора полос тоже: «The current matching of satellite detections and field observations is limited to fake targets» (Cózar и др., 2024, doi 10.1038/s41467-024-48674-7).</a:t>
+              <a:t>[прил.–прил.] Главное в работе — как мы искали данные. CSV — это подсчёты вдоль маршрутов, поэтому каждую находку мы помечаем уровнем: A, B, C или D. У событий CSV пар уровня A — 0: для пластика снимков нет, в Северном море облака, в Чёрном время трансект не опубликовано. Тогда мы нашли открытые данные ADIS: 66 пар по месту и времени.</a:t>
             </a:r>
           </a:p>
         </p:txBody>
@@ -1047,7 +1054,7 @@
           <a:lstStyle/>
           <a:p>
             <a:r>
-              <a:t>[прил.–прил.] Для детектора мы собрали новые метки: скопления PLP, FloatingObjects и нити Cózar — B, суда и облака — D. С MARIDA совпадений нет; с MADOS по пикселям сверены PLP и FloatingObjects. Детектор на них почти не видит нити и путает суда.</a:t>
+              <a:t>[прил.–прил.] Пар по месту и времени — 66, но это не калибровочные пары: на 6 отрезках с предметами детектор их не увидел, предмет меньше процента пикселя. Калибровочных пар «снимок — штуки» 0: мы проверили 318 событий CSV и 177 синхронных отрезков ADIS. У авторов крупнейшего набора полос тоже: «The current matching of satellite detections and field observations is limited to fake targets» (Cózar и др., 2024, doi 10.1038/s41467-024-48674-7).</a:t>
             </a:r>
           </a:p>
         </p:txBody>
@@ -1117,7 +1124,7 @@
           <a:lstStyle/>
           <a:p>
             <a:r>
-              <a:t>[прил.–прил.] Ответ на вопрос о дообучении: правило принятия (записано до экспериментов) не прошёл ни один из 13 вариантов с новыми данными (×3 seed) и контрольный r0 → остаётся weights/lgbm. Официальный U-Net MARIDA на том же test — F1 0.501, наш LightGBM — 0.871.</a:t>
+              <a:t>[прил.–прил.] Для детектора мы собрали новые метки: скопления PLP, FloatingObjects и нити Cózar — B, суда и облака — D. С MARIDA совпадений нет; с MADOS по пикселям сверены PLP и FloatingObjects. Детектор на них почти не видит нити и путает суда.</a:t>
             </a:r>
           </a:p>
         </p:txBody>
@@ -1187,7 +1194,7 @@
           <a:lstStyle/>
           <a:p>
             <a:r>
-              <a:t>[прил.–прил.] Количество: штуки на квадратный километр — только по полю. Со снимка — площадь маски и доля покрытия; перевода в штуки нет, калибровочных пар ноль, калибровка по ячейкам дала отрицательный результат.</a:t>
+              <a:t>[прил.–прил.] Ответ на вопрос о дообучении: правило принятия (записано до экспериментов) не прошёл ни один из 13 вариантов с новыми данными (×3 seed) и контрольный r0 → остаётся weights/lgbm. Официальный U-Net MARIDA на том же test — F1 0.501, наш LightGBM — 0.871.</a:t>
             </a:r>
           </a:p>
         </p:txBody>
@@ -1257,7 +1264,7 @@
           <a:lstStyle/>
           <a:p>
             <a:r>
-              <a:t>[прил.–прил.] Нефть — отдельный эксперимент. На разметке MADOS голова лучше простого индекса, но известный разлив Wakashio на реальном снимке она не нашла. Поэтому слой выключен и подписан как эксперимент.</a:t>
+              <a:t>[прил.–прил.] Количество: штуки на квадратный километр — только по полю. Со снимка — площадь маски и доля покрытия; перевода в штуки нет, калибровочных пар ноль, калибровка по ячейкам дала отрицательный результат.</a:t>
             </a:r>
           </a:p>
         </p:txBody>
@@ -1403,7 +1410,7 @@
           <a:lstStyle/>
           <a:p>
             <a:r>
-              <a:t>[прил.–прил.] Из 935 строк в основной профиль попадают 63. У каждого отказа есть причина: объектные строки, категории, весь мусор. Поля-утечки в признаки не попадают, это проверяют тесты.</a:t>
+              <a:t>[прил.–прил.] Нефть — отдельный эксперимент. На разметке MADOS голова лучше простого индекса, но известный разлив Wakashio на реальном снимке она не нашла. Поэтому слой выключен и подписан как эксперимент.</a:t>
             </a:r>
           </a:p>
         </p:txBody>
@@ -1473,7 +1480,7 @@
           <a:lstStyle/>
           <a:p>
             <a:r>
-              <a:t>[прил.–прил.] Реестр пар — главный фильтр. Из 318 событий по метаданным проходят 29, маски в полосе — 12. Но вода за сутки уходит на десятки километров: пара синхронна, только если между снимком и наблюдением не больше 4.2 часа. Таких ноль. Для пластика снимков нет вообще.</a:t>
+              <a:t>[прил.–прил.] Из 935 строк в основной профиль попадают 63. У каждого отказа есть причина: объектные строки, категории, весь мусор. Поля-утечки в признаки не попадают, это проверяют тесты.</a:t>
             </a:r>
           </a:p>
         </p:txBody>
@@ -1543,7 +1550,7 @@
           <a:lstStyle/>
           <a:p>
             <a:r>
-              <a:t>[прил.–прил.] Детектор — пиксельный LightGBM. На test MARIDA F1 0.871, RandomForest — 0.771, индексы FDI — 0.042; саргассум и мутную воду он не путает. На снимках пар мы выключили гармонизацию каналов — решение по MARIDA val, не по тесту. Сейчас 5 объектов на 22 сценах и ни одного в полосах; вне полосы — одиночные пиксели пены и, вероятно, судно — все ложные, скоплений нет. Прежний режим давал 975 объектов, почти всё — фон моря.</a:t>
+              <a:t>[прил.–прил.] Реестр пар — главный фильтр. Из 318 событий по метаданным проходят 29, маски в полосе — 12. Но вода за сутки уходит на десятки километров: пара синхронна, только если между снимком и наблюдением не больше 4.2 часа. Таких ноль. Для пластика снимков нет вообще.</a:t>
             </a:r>
           </a:p>
         </p:txBody>
@@ -1613,7 +1620,7 @@
           <a:lstStyle/>
           <a:p>
             <a:r>
-              <a:t>[прил.–прил.] Концентрация: C равно N на A, интервал Пуассона, контрольный пример — 60.0. Модели сравниваем с медианой на участках маршрута. На dev ridge выигрывает слабо, а на отложенном test, посчитанном один раз, — 30.0 против 25.2 у медианы. Правило записано до открытия test, поэтому на карте — медиана. Модель не спасаем.</a:t>
+              <a:t>[прил.–прил.] Детектор — пиксельный LightGBM. На test MARIDA F1 0.871, RandomForest — 0.771, индексы FDI — 0.042; саргассум и мутную воду он не путает. На снимках пар мы выключили гармонизацию каналов — решение по MARIDA val, не по тесту. Сейчас 5 объектов на 22 сценах и ни одного в полосах; вне полосы — одиночные пиксели пены и, вероятно, судно — все ложные, скоплений нет. Прежний режим давал 975 объектов, почти всё — фон моря.</a:t>
             </a:r>
           </a:p>
         </p:txBody>
@@ -1683,7 +1690,7 @@
           <a:lstStyle/>
           <a:p>
             <a:r>
-              <a:t>[прил.–прил.] Связь снимка с полем мы всё же проверили. На 11 парах FDI даёт ρ −0.75, но после поправки Холма p 0.12, а случайная вода той же сцены даёт почти то же. Вывод — данных мало: нужно около 33 независимых пар.</a:t>
+              <a:t>[прил.–прил.] Концентрация: C равно N на A, интервал Пуассона, контрольный пример — 60.0. Модели сравниваем с медианой на участках маршрута. На dev ridge выигрывает слабо, а на отложенном test, посчитанном один раз, — 30.0 против 25.2 у медианы. Правило записано до открытия test, поэтому на карте — медиана. Модель не спасаем.</a:t>
             </a:r>
           </a:p>
         </p:txBody>
@@ -1753,7 +1760,7 @@
           <a:lstStyle/>
           <a:p>
             <a:r>
-              <a:t>[прил.–прил.] Наш вклад — решения, которые защищают выводы от самообмана. Допуск по дрейфу в реестре пар, сплит по участкам маршрута, test один раз по заранее записанному правилу, отказ от гармонизации по val, геометрия трансект по первоисточникам и один источник чисел с тестом. Разметка MARIDA, протокол RandomForest и индекс FDI — готовые, мы с ними сравниваемся.</a:t>
+              <a:t>[прил.–прил.] Связь снимка с полем мы всё же проверили. На 11 парах FDI даёт ρ −0.75, но после поправки Холма p 0.12, а случайная вода той же сцены даёт почти то же. Вывод — данных мало: нужно около 33 независимых пар.</a:t>
             </a:r>
           </a:p>
         </p:txBody>
@@ -1823,6 +1830,76 @@
           <a:lstStyle/>
           <a:p>
             <a:r>
+              <a:t>[прил.–прил.] Наш вклад — решения, которые защищают выводы от самообмана. Допуск по дрейфу в реестре пар, сплит по участкам маршрута, test один раз по заранее записанному правилу, отказ от гармонизации по val, геометрия трансект по первоисточникам и один источник чисел с тестом. Разметка MARIDA, протокол RandomForest и индекс FDI — готовые, мы с ними сравниваемся.</a:t>
+            </a:r>
+          </a:p>
+        </p:txBody>
+      </p:sp>
+      <p:sp>
+        <p:nvSpPr>
+          <p:cNvPr id="4" name="Slide Number Placeholder 3"/>
+          <p:cNvSpPr>
+            <a:spLocks noGrp="1"/>
+          </p:cNvSpPr>
+          <p:nvPr>
+            <p:ph type="sldNum" idx="5" sz="quarter"/>
+          </p:nvPr>
+        </p:nvSpPr>
+        <p:spPr/>
+      </p:sp>
+    </p:spTree>
+  </p:cSld>
+  <p:clrMapOvr>
+    <a:masterClrMapping/>
+  </p:clrMapOvr>
+</p:notes>
+</file>
+
+<file path=ppt/notesSlides/notesSlide27.xml><?xml version="1.0" encoding="utf-8"?>
+<p:notes xmlns:a="http://schemas.openxmlformats.org/drawingml/2006/main" xmlns:p="http://schemas.openxmlformats.org/presentationml/2006/main" xmlns:r="http://schemas.openxmlformats.org/officeDocument/2006/relationships">
+  <p:cSld>
+    <p:spTree>
+      <p:nvGrpSpPr>
+        <p:cNvPr id="1" name=""/>
+        <p:cNvGrpSpPr/>
+        <p:nvPr/>
+      </p:nvGrpSpPr>
+      <p:grpSpPr>
+        <a:xfrm>
+          <a:off x="0" y="0"/>
+          <a:ext cx="0" cy="0"/>
+          <a:chOff x="0" y="0"/>
+          <a:chExt cx="0" cy="0"/>
+        </a:xfrm>
+      </p:grpSpPr>
+      <p:sp>
+        <p:nvSpPr>
+          <p:cNvPr id="2" name="Slide Image Placeholder 1"/>
+          <p:cNvSpPr>
+            <a:spLocks noGrp="1"/>
+          </p:cNvSpPr>
+          <p:nvPr>
+            <p:ph type="sldImg" idx="2"/>
+          </p:nvPr>
+        </p:nvSpPr>
+        <p:spPr/>
+      </p:sp>
+      <p:sp>
+        <p:nvSpPr>
+          <p:cNvPr id="3" name="Notes Placeholder 2"/>
+          <p:cNvSpPr>
+            <a:spLocks noGrp="1"/>
+          </p:cNvSpPr>
+          <p:nvPr>
+            <p:ph type="body" idx="3" sz="quarter"/>
+          </p:nvPr>
+        </p:nvSpPr>
+        <p:spPr/>
+        <p:txBody>
+          <a:bodyPr/>
+          <a:lstStyle/>
+          <a:p>
+            <a:r>
               <a:t>[прил.–прил.] Из правила дрейфа мы сделали инструмент «Подобрать снимок»: он говорит, когда выходить на трансекту. Для Чёрного моря это окна UTC у 12 событий. Геометрию трансект восстановили по PANGAEA.</a:t>
             </a:r>
           </a:p>
@@ -2127,7 +2204,7 @@
           <a:p/>
           <a:p>
             <a:r>
-              <a:t>Если спросят: Интервал Пуассона [49.9–58.0] — только ошибка счёта; разброс между днями (sd ln C ≈ 0.46) он не учитывает. Одно новое место: 10.2–157.0 шт./км². ADIS: модели по регионам не лучше медианы (ни один кандидат (B1, M1, M2) не прошёл правило на val в обеих схемах → медиана профиля остаётся). Калибровка авторов ADIS — de Vries et al. 2026, Environ. Res. Commun., doi 10.1088/2515-7620/ae8152, типичный интервал отрезка 1.1–18.7; наше число без поправки не заменяем.</a:t>
+              <a:t>Если спросят: Интервал Пуассона [49.9–58.0] — только ошибка счёта; разброс между днями (sd ln C ≈ 0.46) он не учитывает. Одно новое место: 10.0–160.3 шт./км². ADIS: модели по регионам не лучше медианы (ни один кандидат (B1, M1, M2) не прошёл правило на val в обеих схемах → медиана профиля остаётся). Калибровка авторов ADIS — de Vries et al. 2026, Environ. Res. Commun., doi 10.1088/2515-7620/ae8152, типичный интервал отрезка 1.1–18.7; наше число без поправки не заменяем.</a:t>
             </a:r>
           </a:p>
         </p:txBody>
@@ -2349,13 +2426,13 @@
           <a:lstStyle/>
           <a:p>
             <a:r>
-              <a:t>[2:44–3:04] Сервис. При открытии — Земля с реальными находками обработанных сцен. Клик по точке — сцена и карточка зоны: что найдено, когда, площадь, уверенность и откуда каждое число. Из карточки — в студию, кнопкой «Назад» — к той же точке обзора и к следующей находке.</a:t>
+              <a:t>[2:44–3:15] Как мы всё-таки получаем штуки по снимку. На мишенях PLP из бутылок детектор срабатывает, когда в пикселе 470–670 бутылок. Отсюда сценарий: пиксели зоны, умноженные на это число, делённые на площадь. Медиана по находкам — около 32000 штук на квадратный километр, если бы это были бутылки. Это сценарий по искусственным мишеням: для природного мусора не проверен, и на природной паре ISPRA посчитанные предметы лежат не там, где пиксели детектора.</a:t>
             </a:r>
           </a:p>
           <a:p/>
           <a:p>
             <a:r>
-              <a:t>Если спросят: Показ вживую — docs/DEMO.md. Полевые шт./км² другого места не выдаются за плотность зоны: «не определено по этому снимку».</a:t>
+              <a:t>Если спросят: Метод: исследовательский сценарий: калибровка на искусственных мишенях PLP (бутылки PET 1.5 л). Протокол ISPRA MSFD Modulo 2bis: предметы 2.5–50 см, ширина полосы в файле 2019 г. не записана, часовой пояс не указан — пара не калибровочная. Точек калибровки 2 (по пикселю на дату). Почему это не интервал: пиксели ниже порога не учтены, а мелкие предметы дали бы больше штук. Почему не сравнивать с полем: поле — средняя по километрам маршрута и предметы &gt; 2 см, здесь — плотность внутри нити в пересчёте на бутылки.</a:t>
             </a:r>
           </a:p>
         </p:txBody>
@@ -6134,7 +6211,7 @@
                 </a:solidFill>
                 <a:latin typeface="Segoe UI"/>
               </a:rPr>
-              <a:t>10 · Сервис: фото, метрики, выгрузка</a:t>
+              <a:t>10 · Сервис: путь эколога</a:t>
             </a:r>
           </a:p>
         </p:txBody>
@@ -6173,14 +6250,14 @@
                 </a:solidFill>
                 <a:latin typeface="Segoe UI"/>
               </a:rPr>
-              <a:t>Фото, метрики, выгрузка: зоны отложенной сцены на карте = CSV = GeoJSON (23 = 23 = 23)</a:t>
+              <a:t>Сервис: снимки с находками → снимок и нумерованные зоны → карточка зоны → студия → назад</a:t>
             </a:r>
           </a:p>
         </p:txBody>
       </p:sp>
       <p:pic>
         <p:nvPicPr>
-          <p:cNvPr id="4" name="Picture 3" descr="20_photo.jpg"/>
+          <p:cNvPr id="4" name="Picture 3" descr="21_svc_earth.jpg"/>
           <p:cNvPicPr>
             <a:picLocks noChangeAspect="1"/>
           </p:cNvPicPr>
@@ -6195,7 +6272,7 @@
         <p:spPr>
           <a:xfrm>
             <a:off x="457200" y="1600200"/>
-            <a:ext cx="3566160" cy="2005965"/>
+            <a:ext cx="2606040" cy="1464540"/>
           </a:xfrm>
           <a:prstGeom prst="rect">
             <a:avLst/>
@@ -6210,8 +6287,8 @@
         </p:nvSpPr>
         <p:spPr>
           <a:xfrm>
-            <a:off x="457200" y="3679316"/>
-            <a:ext cx="3566160" cy="640080"/>
+            <a:off x="457200" y="3137892"/>
+            <a:ext cx="2606040" cy="640080"/>
           </a:xfrm>
           <a:prstGeom prst="rect">
             <a:avLst/>
@@ -6236,14 +6313,14 @@
                 </a:solidFill>
                 <a:latin typeface="Segoe UI"/>
               </a:rPr>
-              <a:t>«Фото»: рамки и число предметов, площадь кадра → шт./км²; состав не определён</a:t>
+              <a:t>1. Обзор: Земля и снимки «район · дата · N находок · облачность» — сразу, без формы</a:t>
             </a:r>
           </a:p>
         </p:txBody>
       </p:sp>
       <p:pic>
         <p:nvPicPr>
-          <p:cNvPr id="6" name="Picture 5" descr="27_svc_metrics.jpg"/>
+          <p:cNvPr id="6" name="Picture 5" descr="28_scene.jpg"/>
           <p:cNvPicPr>
             <a:picLocks noChangeAspect="1"/>
           </p:cNvPicPr>
@@ -6257,8 +6334,8 @@
         </p:blipFill>
         <p:spPr>
           <a:xfrm>
-            <a:off x="4297680" y="1600200"/>
-            <a:ext cx="3566160" cy="3413324"/>
+            <a:off x="3337560" y="1600200"/>
+            <a:ext cx="2606040" cy="1464540"/>
           </a:xfrm>
           <a:prstGeom prst="rect">
             <a:avLst/>
@@ -6273,8 +6350,8 @@
         </p:nvSpPr>
         <p:spPr>
           <a:xfrm>
-            <a:off x="4297680" y="5086676"/>
-            <a:ext cx="3566160" cy="640080"/>
+            <a:off x="3337560" y="3137892"/>
+            <a:ext cx="2606040" cy="640080"/>
           </a:xfrm>
           <a:prstGeom prst="rect">
             <a:avLst/>
@@ -6299,14 +6376,14 @@
                 </a:solidFill>
                 <a:latin typeface="Segoe UI"/>
               </a:rPr>
-              <a:t>«Метрики»: F1 детектора и отложенный test концентрации против медианы</a:t>
+              <a:t>2. Снимок: зоны по номерам, площадь, статус, оценка шт./км²</a:t>
             </a:r>
           </a:p>
         </p:txBody>
       </p:sp>
       <p:pic>
         <p:nvPicPr>
-          <p:cNvPr id="8" name="Picture 7" descr="24_svc_export.jpg"/>
+          <p:cNvPr id="8" name="Picture 7" descr="22_svc_card.jpg"/>
           <p:cNvPicPr>
             <a:picLocks noChangeAspect="1"/>
           </p:cNvPicPr>
@@ -6320,8 +6397,8 @@
         </p:blipFill>
         <p:spPr>
           <a:xfrm>
-            <a:off x="8138160" y="1600200"/>
-            <a:ext cx="3566160" cy="2005965"/>
+            <a:off x="6217920" y="1600200"/>
+            <a:ext cx="2606040" cy="1464540"/>
           </a:xfrm>
           <a:prstGeom prst="rect">
             <a:avLst/>
@@ -6336,8 +6413,8 @@
         </p:nvSpPr>
         <p:spPr>
           <a:xfrm>
-            <a:off x="8138160" y="3679316"/>
-            <a:ext cx="3566160" cy="640080"/>
+            <a:off x="6217920" y="3137892"/>
+            <a:ext cx="2606040" cy="640080"/>
           </a:xfrm>
           <a:prstGeom prst="rect">
             <a:avLst/>
@@ -6362,14 +6439,77 @@
                 </a:solidFill>
                 <a:latin typeface="Segoe UI"/>
               </a:rPr>
-              <a:t>Выгрузка GeoJSON/CSV того, что на карте; запросы сохраняются и повторяются</a:t>
-            </a:r>
-          </a:p>
-        </p:txBody>
-      </p:sp>
-      <p:sp>
-        <p:nvSpPr>
-          <p:cNvPr id="10" name="TextBox 9"/>
+              <a:t>3. Карточка: что найдено, когда, площадь, уверенность, источник каждого числа</a:t>
+            </a:r>
+          </a:p>
+        </p:txBody>
+      </p:sp>
+      <p:pic>
+        <p:nvPicPr>
+          <p:cNvPr id="10" name="Picture 9" descr="25_svc_studio.jpg"/>
+          <p:cNvPicPr>
+            <a:picLocks noChangeAspect="1"/>
+          </p:cNvPicPr>
+          <p:nvPr/>
+        </p:nvPicPr>
+        <p:blipFill>
+          <a:blip r:embed="rId5"/>
+          <a:stretch>
+            <a:fillRect/>
+          </a:stretch>
+        </p:blipFill>
+        <p:spPr>
+          <a:xfrm>
+            <a:off x="9098280" y="1600200"/>
+            <a:ext cx="2606040" cy="1776845"/>
+          </a:xfrm>
+          <a:prstGeom prst="rect">
+            <a:avLst/>
+          </a:prstGeom>
+        </p:spPr>
+      </p:pic>
+      <p:sp>
+        <p:nvSpPr>
+          <p:cNvPr id="11" name="TextBox 10"/>
+          <p:cNvSpPr txBox="1"/>
+          <p:nvPr/>
+        </p:nvSpPr>
+        <p:spPr>
+          <a:xfrm>
+            <a:off x="9098280" y="3450197"/>
+            <a:ext cx="2606040" cy="640080"/>
+          </a:xfrm>
+          <a:prstGeom prst="rect">
+            <a:avLst/>
+          </a:prstGeom>
+          <a:noFill/>
+        </p:spPr>
+        <p:txBody>
+          <a:bodyPr wrap="square" anchor="t" lIns="18288" rIns="18288" tIns="18288" bIns="18288">
+            <a:spAutoFit/>
+          </a:bodyPr>
+          <a:lstStyle/>
+          <a:p>
+            <a:pPr algn="l">
+              <a:spcAft>
+                <a:spcPts val="600"/>
+              </a:spcAft>
+            </a:pPr>
+            <a:r>
+              <a:rPr sz="1300" b="0">
+                <a:solidFill>
+                  <a:srgbClr val="EEEFF1"/>
+                </a:solidFill>
+                <a:latin typeface="Segoe UI"/>
+              </a:rPr>
+              <a:t>4. «В студию» — снимок, маска, объекты; «Назад» — к тому же месту</a:t>
+            </a:r>
+          </a:p>
+        </p:txBody>
+      </p:sp>
+      <p:sp>
+        <p:nvSpPr>
+          <p:cNvPr id="12" name="TextBox 11"/>
           <p:cNvSpPr txBox="1"/>
           <p:nvPr/>
         </p:nvSpPr>
@@ -6401,14 +6541,14 @@
                 </a:solidFill>
                 <a:latin typeface="Segoe UI"/>
               </a:rPr>
-              <a:t>Вывод: у каждого числа подписан источник — поле, фото, снимок или «нет данных»</a:t>
-            </a:r>
-          </a:p>
-        </p:txBody>
-      </p:sp>
-      <p:sp>
-        <p:nvSpPr>
-          <p:cNvPr id="11" name="TextBox 10"/>
+              <a:t>Вывод: путь эколога — снимок → зона → карточка → студия → назад к следующей находке</a:t>
+            </a:r>
+          </a:p>
+        </p:txBody>
+      </p:sp>
+      <p:sp>
+        <p:nvSpPr>
+          <p:cNvPr id="13" name="TextBox 12"/>
           <p:cNvSpPr txBox="1"/>
           <p:nvPr/>
         </p:nvSpPr>
@@ -6440,14 +6580,14 @@
                 </a:solidFill>
                 <a:latin typeface="Segoe UI"/>
               </a:rPr>
-              <a:t>Источник: presentation/img/*.jpg (presentation/make_shots.py, http://localhost:8070, 1920×1080); docs/CONTRACTS_V3.md</a:t>
-            </a:r>
-          </a:p>
-        </p:txBody>
-      </p:sp>
-      <p:sp>
-        <p:nvSpPr>
-          <p:cNvPr id="12" name="TextBox 11"/>
+              <a:t>Источник: presentation/img/*.jpg (presentation/make_shots.py, http://localhost:8070, 1920×1080, без фикстур); docs/DEMO.md</a:t>
+            </a:r>
+          </a:p>
+        </p:txBody>
+      </p:sp>
+      <p:sp>
+        <p:nvSpPr>
+          <p:cNvPr id="14" name="TextBox 13"/>
           <p:cNvSpPr txBox="1"/>
           <p:nvPr/>
         </p:nvSpPr>
@@ -6479,7 +6619,7 @@
                 </a:solidFill>
                 <a:latin typeface="Segoe UI"/>
               </a:rPr>
-              <a:t>3:04</a:t>
+              <a:t>3:15</a:t>
             </a:r>
           </a:p>
         </p:txBody>
@@ -6544,7 +6684,7 @@
                 </a:solidFill>
                 <a:latin typeface="Segoe UI"/>
               </a:rPr>
-              <a:t>11 · Ограничения: что мы НЕ утверждаем</a:t>
+              <a:t>11 · Сервис: фото, метрики, выгрузка</a:t>
             </a:r>
           </a:p>
         </p:txBody>
@@ -6577,139 +6717,248 @@
               </a:spcAft>
             </a:pPr>
             <a:r>
-              <a:rPr sz="2800" b="1">
+              <a:rPr sz="2400" b="1">
                 <a:solidFill>
                   <a:srgbClr val="EEEFF1"/>
                 </a:solidFill>
                 <a:latin typeface="Segoe UI"/>
               </a:rPr>
-              <a:t>Что мы НЕ утверждаем</a:t>
-            </a:r>
-          </a:p>
-        </p:txBody>
-      </p:sp>
-      <p:sp>
-        <p:nvSpPr>
-          <p:cNvPr id="4" name="TextBox 3"/>
-          <p:cNvSpPr txBox="1"/>
-          <p:nvPr/>
-        </p:nvSpPr>
-        <p:spPr>
-          <a:xfrm>
-            <a:off x="640080" y="1600200"/>
-            <a:ext cx="10881360" cy="4572000"/>
-          </a:xfrm>
-          <a:prstGeom prst="rect">
-            <a:avLst/>
-          </a:prstGeom>
-          <a:noFill/>
-        </p:spPr>
-        <p:txBody>
-          <a:bodyPr wrap="square" anchor="t" lIns="18288" rIns="18288" tIns="18288" bIns="18288">
-            <a:spAutoFit/>
-          </a:bodyPr>
-          <a:lstStyle/>
-          <a:p>
-            <a:pPr algn="l">
-              <a:spcAft>
-                <a:spcPts val="1400"/>
-              </a:spcAft>
-            </a:pPr>
-            <a:r>
-              <a:rPr sz="2000" b="0">
+              <a:t>Фото, метрики, выгрузка: зоны отложенной сцены на карте = CSV = GeoJSON (23 = 23 = 23)</a:t>
+            </a:r>
+          </a:p>
+        </p:txBody>
+      </p:sp>
+      <p:pic>
+        <p:nvPicPr>
+          <p:cNvPr id="4" name="Picture 3" descr="20_photo.jpg"/>
+          <p:cNvPicPr>
+            <a:picLocks noChangeAspect="1"/>
+          </p:cNvPicPr>
+          <p:nvPr/>
+        </p:nvPicPr>
+        <p:blipFill>
+          <a:blip r:embed="rId2"/>
+          <a:stretch>
+            <a:fillRect/>
+          </a:stretch>
+        </p:blipFill>
+        <p:spPr>
+          <a:xfrm>
+            <a:off x="457200" y="1600200"/>
+            <a:ext cx="3566160" cy="2004107"/>
+          </a:xfrm>
+          <a:prstGeom prst="rect">
+            <a:avLst/>
+          </a:prstGeom>
+        </p:spPr>
+      </p:pic>
+      <p:sp>
+        <p:nvSpPr>
+          <p:cNvPr id="5" name="TextBox 4"/>
+          <p:cNvSpPr txBox="1"/>
+          <p:nvPr/>
+        </p:nvSpPr>
+        <p:spPr>
+          <a:xfrm>
+            <a:off x="457200" y="3677459"/>
+            <a:ext cx="3566160" cy="640080"/>
+          </a:xfrm>
+          <a:prstGeom prst="rect">
+            <a:avLst/>
+          </a:prstGeom>
+          <a:noFill/>
+        </p:spPr>
+        <p:txBody>
+          <a:bodyPr wrap="square" anchor="t" lIns="18288" rIns="18288" tIns="18288" bIns="18288">
+            <a:spAutoFit/>
+          </a:bodyPr>
+          <a:lstStyle/>
+          <a:p>
+            <a:pPr algn="l">
+              <a:spcAft>
+                <a:spcPts val="600"/>
+              </a:spcAft>
+            </a:pPr>
+            <a:r>
+              <a:rPr sz="1300" b="0">
                 <a:solidFill>
                   <a:srgbClr val="EEEFF1"/>
                 </a:solidFill>
                 <a:latin typeface="Segoe UI"/>
               </a:rPr>
-              <a:t>• шт./км² по снимку — не выдаём: калибровочных пар 0; «концентрация по снимку не подтверждена»</a:t>
-            </a:r>
-          </a:p>
-          <a:p>
-            <a:pPr algn="l">
-              <a:spcAft>
-                <a:spcPts val="1400"/>
-              </a:spcAft>
-            </a:pPr>
-            <a:r>
-              <a:rPr sz="2000" b="0">
+              <a:t>«Фото»: рамки и число предметов, площадь кадра → шт./км²; состав не определён</a:t>
+            </a:r>
+          </a:p>
+        </p:txBody>
+      </p:sp>
+      <p:pic>
+        <p:nvPicPr>
+          <p:cNvPr id="6" name="Picture 5" descr="27_svc_metrics.jpg"/>
+          <p:cNvPicPr>
+            <a:picLocks noChangeAspect="1"/>
+          </p:cNvPicPr>
+          <p:nvPr/>
+        </p:nvPicPr>
+        <p:blipFill>
+          <a:blip r:embed="rId3"/>
+          <a:stretch>
+            <a:fillRect/>
+          </a:stretch>
+        </p:blipFill>
+        <p:spPr>
+          <a:xfrm>
+            <a:off x="4507454" y="1600200"/>
+            <a:ext cx="3146611" cy="3566160"/>
+          </a:xfrm>
+          <a:prstGeom prst="rect">
+            <a:avLst/>
+          </a:prstGeom>
+        </p:spPr>
+      </p:pic>
+      <p:sp>
+        <p:nvSpPr>
+          <p:cNvPr id="7" name="TextBox 6"/>
+          <p:cNvSpPr txBox="1"/>
+          <p:nvPr/>
+        </p:nvSpPr>
+        <p:spPr>
+          <a:xfrm>
+            <a:off x="4297680" y="5239512"/>
+            <a:ext cx="3566160" cy="640080"/>
+          </a:xfrm>
+          <a:prstGeom prst="rect">
+            <a:avLst/>
+          </a:prstGeom>
+          <a:noFill/>
+        </p:spPr>
+        <p:txBody>
+          <a:bodyPr wrap="square" anchor="t" lIns="18288" rIns="18288" tIns="18288" bIns="18288">
+            <a:spAutoFit/>
+          </a:bodyPr>
+          <a:lstStyle/>
+          <a:p>
+            <a:pPr algn="l">
+              <a:spcAft>
+                <a:spcPts val="600"/>
+              </a:spcAft>
+            </a:pPr>
+            <a:r>
+              <a:rPr sz="1300" b="0">
                 <a:solidFill>
                   <a:srgbClr val="EEEFF1"/>
                 </a:solidFill>
                 <a:latin typeface="Segoe UI"/>
               </a:rPr>
-              <a:t>• «Пластик» по снимку — нет: детектор видит любой плавающий мусор; суда — известная слабость (26 % судов)</a:t>
-            </a:r>
-          </a:p>
-          <a:p>
-            <a:pPr algn="l">
-              <a:spcAft>
-                <a:spcPts val="1400"/>
-              </a:spcAft>
-            </a:pPr>
-            <a:r>
-              <a:rPr sz="2000" b="0">
+              <a:t>«Метрики»: F1 детектора и отложенный test концентрации против медианы</a:t>
+            </a:r>
+          </a:p>
+        </p:txBody>
+      </p:sp>
+      <p:pic>
+        <p:nvPicPr>
+          <p:cNvPr id="8" name="Picture 7" descr="24_svc_export.jpg"/>
+          <p:cNvPicPr>
+            <a:picLocks noChangeAspect="1"/>
+          </p:cNvPicPr>
+          <p:nvPr/>
+        </p:nvPicPr>
+        <p:blipFill>
+          <a:blip r:embed="rId4"/>
+          <a:stretch>
+            <a:fillRect/>
+          </a:stretch>
+        </p:blipFill>
+        <p:spPr>
+          <a:xfrm>
+            <a:off x="8138160" y="1600200"/>
+            <a:ext cx="3566160" cy="2004107"/>
+          </a:xfrm>
+          <a:prstGeom prst="rect">
+            <a:avLst/>
+          </a:prstGeom>
+        </p:spPr>
+      </p:pic>
+      <p:sp>
+        <p:nvSpPr>
+          <p:cNvPr id="9" name="TextBox 8"/>
+          <p:cNvSpPr txBox="1"/>
+          <p:nvPr/>
+        </p:nvSpPr>
+        <p:spPr>
+          <a:xfrm>
+            <a:off x="8138160" y="3677459"/>
+            <a:ext cx="3566160" cy="640080"/>
+          </a:xfrm>
+          <a:prstGeom prst="rect">
+            <a:avLst/>
+          </a:prstGeom>
+          <a:noFill/>
+        </p:spPr>
+        <p:txBody>
+          <a:bodyPr wrap="square" anchor="t" lIns="18288" rIns="18288" tIns="18288" bIns="18288">
+            <a:spAutoFit/>
+          </a:bodyPr>
+          <a:lstStyle/>
+          <a:p>
+            <a:pPr algn="l">
+              <a:spcAft>
+                <a:spcPts val="600"/>
+              </a:spcAft>
+            </a:pPr>
+            <a:r>
+              <a:rPr sz="1300" b="0">
                 <a:solidFill>
                   <a:srgbClr val="EEEFF1"/>
                 </a:solidFill>
                 <a:latin typeface="Segoe UI"/>
               </a:rPr>
-              <a:t>• Предел обнаружения не доказан: на 6 отрезках ADIS с единичными предметами детектор их не увидел — согласуется с физикой, но общий предел для всех скоплений не задаёт</a:t>
-            </a:r>
-          </a:p>
-          <a:p>
-            <a:pPr algn="l">
-              <a:spcAft>
-                <a:spcPts val="1400"/>
-              </a:spcAft>
-            </a:pPr>
-            <a:r>
-              <a:rPr sz="2000" b="0">
+              <a:t>Выгрузка GeoJSON/CSV того, что на карте; запросы сохраняются и повторяются</a:t>
+            </a:r>
+          </a:p>
+        </p:txBody>
+      </p:sp>
+      <p:sp>
+        <p:nvSpPr>
+          <p:cNvPr id="10" name="TextBox 9"/>
+          <p:cNvSpPr txBox="1"/>
+          <p:nvPr/>
+        </p:nvSpPr>
+        <p:spPr>
+          <a:xfrm>
+            <a:off x="457200" y="5715000"/>
+            <a:ext cx="11247120" cy="457200"/>
+          </a:xfrm>
+          <a:prstGeom prst="rect">
+            <a:avLst/>
+          </a:prstGeom>
+          <a:noFill/>
+        </p:spPr>
+        <p:txBody>
+          <a:bodyPr wrap="square" anchor="t" lIns="18288" rIns="18288" tIns="18288" bIns="18288">
+            <a:spAutoFit/>
+          </a:bodyPr>
+          <a:lstStyle/>
+          <a:p>
+            <a:pPr algn="ctr">
+              <a:spcAft>
+                <a:spcPts val="600"/>
+              </a:spcAft>
+            </a:pPr>
+            <a:r>
+              <a:rPr sz="1600" b="1">
                 <a:solidFill>
                   <a:srgbClr val="EEEFF1"/>
                 </a:solidFill>
                 <a:latin typeface="Segoe UI"/>
               </a:rPr>
-              <a:t>• Сильный ветер: «не обнаружено» → «недостаточно данных» (правило Cózar 2024)</a:t>
-            </a:r>
-          </a:p>
-          <a:p>
-            <a:pPr algn="l">
-              <a:spcAft>
-                <a:spcPts val="1400"/>
-              </a:spcAft>
-            </a:pPr>
-            <a:r>
-              <a:rPr sz="2000" b="0">
-                <a:solidFill>
-                  <a:srgbClr val="EEEFF1"/>
-                </a:solidFill>
-                <a:latin typeface="Segoe UI"/>
-              </a:rPr>
-              <a:t>• Поле: S2 — один рейс; интервал одного нового места широкий (10–157 шт./км²)</a:t>
-            </a:r>
-          </a:p>
-          <a:p>
-            <a:pPr algn="l">
-              <a:spcAft>
-                <a:spcPts val="1400"/>
-              </a:spcAft>
-            </a:pPr>
-            <a:r>
-              <a:rPr sz="2000" b="0">
-                <a:solidFill>
-                  <a:srgbClr val="EEEFF1"/>
-                </a:solidFill>
-                <a:latin typeface="Segoe UI"/>
-              </a:rPr>
-              <a:t>• Счётчик по фото на реку и спутник без дообучения не переносится</a:t>
-            </a:r>
-          </a:p>
-        </p:txBody>
-      </p:sp>
-      <p:sp>
-        <p:nvSpPr>
-          <p:cNvPr id="5" name="TextBox 4"/>
+              <a:t>Вывод: у каждого числа подписан источник — поле, фото, снимок или «нет данных»</a:t>
+            </a:r>
+          </a:p>
+        </p:txBody>
+      </p:sp>
+      <p:sp>
+        <p:nvSpPr>
+          <p:cNvPr id="11" name="TextBox 10"/>
           <p:cNvSpPr txBox="1"/>
           <p:nvPr/>
         </p:nvSpPr>
@@ -6741,14 +6990,14 @@
                 </a:solidFill>
                 <a:latin typeface="Segoe UI"/>
               </a:rPr>
-              <a:t>Источник: README.md «Ограничения»; reports/report.md; docs/QUANTITY.md</a:t>
-            </a:r>
-          </a:p>
-        </p:txBody>
-      </p:sp>
-      <p:sp>
-        <p:nvSpPr>
-          <p:cNvPr id="6" name="TextBox 5"/>
+              <a:t>Источник: presentation/img/*.jpg (presentation/make_shots.py, http://localhost:8070, 1920×1080); docs/CONTRACTS_V3.md</a:t>
+            </a:r>
+          </a:p>
+        </p:txBody>
+      </p:sp>
+      <p:sp>
+        <p:nvSpPr>
+          <p:cNvPr id="12" name="TextBox 11"/>
           <p:cNvSpPr txBox="1"/>
           <p:nvPr/>
         </p:nvSpPr>
@@ -6780,7 +7029,7 @@
                 </a:solidFill>
                 <a:latin typeface="Segoe UI"/>
               </a:rPr>
-              <a:t>3:21</a:t>
+              <a:t>3:36</a:t>
             </a:r>
           </a:p>
         </p:txBody>
@@ -6845,7 +7094,7 @@
                 </a:solidFill>
                 <a:latin typeface="Segoe UI"/>
               </a:rPr>
-              <a:t>12 · Развитие</a:t>
+              <a:t>12 · Ограничения: что мы НЕ утверждаем</a:t>
             </a:r>
           </a:p>
         </p:txBody>
@@ -6878,351 +7127,139 @@
               </a:spcAft>
             </a:pPr>
             <a:r>
-              <a:rPr sz="2400" b="1">
+              <a:rPr sz="2800" b="1">
                 <a:solidFill>
                   <a:srgbClr val="EEEFF1"/>
                 </a:solidFill>
                 <a:latin typeface="Segoe UI"/>
               </a:rPr>
-              <a:t>Развитие: спутник находит зону → детальный снимок над ней → счёт предметов → шт./км² → сверка с полем</a:t>
-            </a:r>
-          </a:p>
-        </p:txBody>
-      </p:sp>
-      <p:sp>
-        <p:nvSpPr>
-          <p:cNvPr id="4" name="Rectangle 3"/>
-          <p:cNvSpPr/>
-          <p:nvPr/>
-        </p:nvSpPr>
-        <p:spPr>
-          <a:xfrm>
-            <a:off x="457200" y="1600200"/>
-            <a:ext cx="5486400" cy="1737360"/>
-          </a:xfrm>
-          <a:prstGeom prst="rect">
-            <a:avLst/>
-          </a:prstGeom>
-          <a:solidFill>
-            <a:srgbClr val="1B1E24"/>
-          </a:solidFill>
-          <a:ln>
-            <a:noFill/>
-          </a:ln>
-          <a:effectLst/>
-        </p:spPr>
-        <p:style>
-          <a:lnRef idx="1">
-            <a:schemeClr val="accent1"/>
-          </a:lnRef>
-          <a:fillRef idx="3">
-            <a:schemeClr val="accent1"/>
-          </a:fillRef>
-          <a:effectRef idx="2">
-            <a:schemeClr val="accent1"/>
-          </a:effectRef>
-          <a:fontRef idx="minor">
-            <a:schemeClr val="lt1"/>
-          </a:fontRef>
-        </p:style>
-        <p:txBody>
-          <a:bodyPr rtlCol="0" anchor="ctr"/>
-          <a:lstStyle/>
-          <a:p>
-            <a:pPr algn="ctr"/>
+              <a:t>Что мы НЕ утверждаем</a:t>
+            </a:r>
+          </a:p>
+        </p:txBody>
+      </p:sp>
+      <p:sp>
+        <p:nvSpPr>
+          <p:cNvPr id="4" name="TextBox 3"/>
+          <p:cNvSpPr txBox="1"/>
+          <p:nvPr/>
+        </p:nvSpPr>
+        <p:spPr>
+          <a:xfrm>
+            <a:off x="640080" y="1600200"/>
+            <a:ext cx="10881360" cy="4572000"/>
+          </a:xfrm>
+          <a:prstGeom prst="rect">
+            <a:avLst/>
+          </a:prstGeom>
+          <a:noFill/>
+        </p:spPr>
+        <p:txBody>
+          <a:bodyPr wrap="square" anchor="t" lIns="18288" rIns="18288" tIns="18288" bIns="18288">
+            <a:spAutoFit/>
+          </a:bodyPr>
+          <a:lstStyle/>
+          <a:p>
+            <a:pPr algn="l">
+              <a:spcAft>
+                <a:spcPts val="1400"/>
+              </a:spcAft>
+            </a:pPr>
+            <a:r>
+              <a:rPr sz="2000" b="0">
+                <a:solidFill>
+                  <a:srgbClr val="EEEFF1"/>
+                </a:solidFill>
+                <a:latin typeface="Segoe UI"/>
+              </a:rPr>
+              <a:t>• шт./км² по снимку — не измерение: исследовательский сценарий по мишеням PLP, на природе не проверен; природных калибровочных пар 0</a:t>
+            </a:r>
+          </a:p>
+          <a:p>
+            <a:pPr algn="l">
+              <a:spcAft>
+                <a:spcPts val="1400"/>
+              </a:spcAft>
+            </a:pPr>
+            <a:r>
+              <a:rPr sz="2000" b="0">
+                <a:solidFill>
+                  <a:srgbClr val="EEEFF1"/>
+                </a:solidFill>
+                <a:latin typeface="Segoe UI"/>
+              </a:rPr>
+              <a:t>• «Пластик» по снимку — нет: детектор видит любой плавающий мусор; суда — известная слабость (26 % судов)</a:t>
+            </a:r>
+          </a:p>
+          <a:p>
+            <a:pPr algn="l">
+              <a:spcAft>
+                <a:spcPts val="1400"/>
+              </a:spcAft>
+            </a:pPr>
+            <a:r>
+              <a:rPr sz="2000" b="0">
+                <a:solidFill>
+                  <a:srgbClr val="EEEFF1"/>
+                </a:solidFill>
+                <a:latin typeface="Segoe UI"/>
+              </a:rPr>
+              <a:t>• Предел обнаружения не доказан: на 6 отрезках ADIS с единичными предметами детектор их не увидел — согласуется с физикой, но общий предел для всех скоплений не задаёт</a:t>
+            </a:r>
+          </a:p>
+          <a:p>
+            <a:pPr algn="l">
+              <a:spcAft>
+                <a:spcPts val="1400"/>
+              </a:spcAft>
+            </a:pPr>
+            <a:r>
+              <a:rPr sz="2000" b="0">
+                <a:solidFill>
+                  <a:srgbClr val="EEEFF1"/>
+                </a:solidFill>
+                <a:latin typeface="Segoe UI"/>
+              </a:rPr>
+              <a:t>• Сильный ветер: «не обнаружено» → «недостаточно данных» (правило Cózar 2024)</a:t>
+            </a:r>
+          </a:p>
+          <a:p>
+            <a:pPr algn="l">
+              <a:spcAft>
+                <a:spcPts val="1400"/>
+              </a:spcAft>
+            </a:pPr>
+            <a:r>
+              <a:rPr sz="2000" b="0">
+                <a:solidFill>
+                  <a:srgbClr val="EEEFF1"/>
+                </a:solidFill>
+                <a:latin typeface="Segoe UI"/>
+              </a:rPr>
+              <a:t>• Поле: S2 — один рейс; интервал одного нового места широкий (10–160 шт./км²)</a:t>
+            </a:r>
+          </a:p>
+          <a:p>
+            <a:pPr algn="l">
+              <a:spcAft>
+                <a:spcPts val="1400"/>
+              </a:spcAft>
+            </a:pPr>
+            <a:r>
+              <a:rPr sz="2000" b="0">
+                <a:solidFill>
+                  <a:srgbClr val="EEEFF1"/>
+                </a:solidFill>
+                <a:latin typeface="Segoe UI"/>
+              </a:rPr>
+              <a:t>• Счётчик по фото на реку и спутник без дообучения не переносится</a:t>
+            </a:r>
           </a:p>
         </p:txBody>
       </p:sp>
       <p:sp>
         <p:nvSpPr>
           <p:cNvPr id="5" name="TextBox 4"/>
-          <p:cNvSpPr txBox="1"/>
-          <p:nvPr/>
-        </p:nvSpPr>
-        <p:spPr>
-          <a:xfrm>
-            <a:off x="685800" y="1737360"/>
-            <a:ext cx="5029200" cy="731520"/>
-          </a:xfrm>
-          <a:prstGeom prst="rect">
-            <a:avLst/>
-          </a:prstGeom>
-          <a:noFill/>
-        </p:spPr>
-        <p:txBody>
-          <a:bodyPr wrap="square" anchor="t" lIns="18288" rIns="18288" tIns="18288" bIns="18288">
-            <a:spAutoFit/>
-          </a:bodyPr>
-          <a:lstStyle/>
-          <a:p>
-            <a:pPr algn="l">
-              <a:spcAft>
-                <a:spcPts val="600"/>
-              </a:spcAft>
-            </a:pPr>
-            <a:r>
-              <a:rPr sz="4000" b="1">
-                <a:solidFill>
-                  <a:srgbClr val="D9912E"/>
-                </a:solidFill>
-                <a:latin typeface="Segoe UI"/>
-              </a:rPr>
-              <a:t>4–12</a:t>
-            </a:r>
-          </a:p>
-        </p:txBody>
-      </p:sp>
-      <p:sp>
-        <p:nvSpPr>
-          <p:cNvPr id="6" name="TextBox 5"/>
-          <p:cNvSpPr txBox="1"/>
-          <p:nvPr/>
-        </p:nvSpPr>
-        <p:spPr>
-          <a:xfrm>
-            <a:off x="685800" y="2514600"/>
-            <a:ext cx="5029200" cy="731520"/>
-          </a:xfrm>
-          <a:prstGeom prst="rect">
-            <a:avLst/>
-          </a:prstGeom>
-          <a:noFill/>
-        </p:spPr>
-        <p:txBody>
-          <a:bodyPr wrap="square" anchor="t" lIns="18288" rIns="18288" tIns="18288" bIns="18288">
-            <a:spAutoFit/>
-          </a:bodyPr>
-          <a:lstStyle/>
-          <a:p>
-            <a:pPr algn="l">
-              <a:spcAft>
-                <a:spcPts val="600"/>
-              </a:spcAft>
-            </a:pPr>
-            <a:r>
-              <a:rPr sz="1400" b="0">
-                <a:solidFill>
-                  <a:srgbClr val="EEEFF1"/>
-                </a:solidFill>
-                <a:latin typeface="Segoe UI"/>
-              </a:rPr>
-              <a:t>калибровочных пар «снимок → шт./км²» хватит для коэффициента в ×/÷2</a:t>
-            </a:r>
-          </a:p>
-        </p:txBody>
-      </p:sp>
-      <p:sp>
-        <p:nvSpPr>
-          <p:cNvPr id="7" name="Rectangle 6"/>
-          <p:cNvSpPr/>
-          <p:nvPr/>
-        </p:nvSpPr>
-        <p:spPr>
-          <a:xfrm>
-            <a:off x="6217920" y="1600200"/>
-            <a:ext cx="5486400" cy="1737360"/>
-          </a:xfrm>
-          <a:prstGeom prst="rect">
-            <a:avLst/>
-          </a:prstGeom>
-          <a:solidFill>
-            <a:srgbClr val="1B1E24"/>
-          </a:solidFill>
-          <a:ln>
-            <a:noFill/>
-          </a:ln>
-          <a:effectLst/>
-        </p:spPr>
-        <p:style>
-          <a:lnRef idx="1">
-            <a:schemeClr val="accent1"/>
-          </a:lnRef>
-          <a:fillRef idx="3">
-            <a:schemeClr val="accent1"/>
-          </a:fillRef>
-          <a:effectRef idx="2">
-            <a:schemeClr val="accent1"/>
-          </a:effectRef>
-          <a:fontRef idx="minor">
-            <a:schemeClr val="lt1"/>
-          </a:fontRef>
-        </p:style>
-        <p:txBody>
-          <a:bodyPr rtlCol="0" anchor="ctr"/>
-          <a:lstStyle/>
-          <a:p>
-            <a:pPr algn="ctr"/>
-          </a:p>
-        </p:txBody>
-      </p:sp>
-      <p:sp>
-        <p:nvSpPr>
-          <p:cNvPr id="8" name="TextBox 7"/>
-          <p:cNvSpPr txBox="1"/>
-          <p:nvPr/>
-        </p:nvSpPr>
-        <p:spPr>
-          <a:xfrm>
-            <a:off x="6446520" y="1737360"/>
-            <a:ext cx="5029200" cy="731520"/>
-          </a:xfrm>
-          <a:prstGeom prst="rect">
-            <a:avLst/>
-          </a:prstGeom>
-          <a:noFill/>
-        </p:spPr>
-        <p:txBody>
-          <a:bodyPr wrap="square" anchor="t" lIns="18288" rIns="18288" tIns="18288" bIns="18288">
-            <a:spAutoFit/>
-          </a:bodyPr>
-          <a:lstStyle/>
-          <a:p>
-            <a:pPr algn="l">
-              <a:spcAft>
-                <a:spcPts val="600"/>
-              </a:spcAft>
-            </a:pPr>
-            <a:r>
-              <a:rPr sz="4000" b="1">
-                <a:solidFill>
-                  <a:srgbClr val="D9912E"/>
-                </a:solidFill>
-                <a:latin typeface="Segoe UI"/>
-              </a:rPr>
-              <a:t>30</a:t>
-            </a:r>
-          </a:p>
-        </p:txBody>
-      </p:sp>
-      <p:sp>
-        <p:nvSpPr>
-          <p:cNvPr id="9" name="TextBox 8"/>
-          <p:cNvSpPr txBox="1"/>
-          <p:nvPr/>
-        </p:nvSpPr>
-        <p:spPr>
-          <a:xfrm>
-            <a:off x="6446520" y="2514600"/>
-            <a:ext cx="5029200" cy="731520"/>
-          </a:xfrm>
-          <a:prstGeom prst="rect">
-            <a:avLst/>
-          </a:prstGeom>
-          <a:noFill/>
-        </p:spPr>
-        <p:txBody>
-          <a:bodyPr wrap="square" anchor="t" lIns="18288" rIns="18288" tIns="18288" bIns="18288">
-            <a:spAutoFit/>
-          </a:bodyPr>
-          <a:lstStyle/>
-          <a:p>
-            <a:pPr algn="l">
-              <a:spcAft>
-                <a:spcPts val="600"/>
-              </a:spcAft>
-            </a:pPr>
-            <a:r>
-              <a:rPr sz="1400" b="0">
-                <a:solidFill>
-                  <a:srgbClr val="EEEFF1"/>
-                </a:solidFill>
-                <a:latin typeface="Segoe UI"/>
-              </a:rPr>
-              <a:t>пар — чтобы увидеть связь r = 0.5</a:t>
-            </a:r>
-          </a:p>
-        </p:txBody>
-      </p:sp>
-      <p:sp>
-        <p:nvSpPr>
-          <p:cNvPr id="10" name="TextBox 9"/>
-          <p:cNvSpPr txBox="1"/>
-          <p:nvPr/>
-        </p:nvSpPr>
-        <p:spPr>
-          <a:xfrm>
-            <a:off x="640080" y="3703320"/>
-            <a:ext cx="10881360" cy="2514600"/>
-          </a:xfrm>
-          <a:prstGeom prst="rect">
-            <a:avLst/>
-          </a:prstGeom>
-          <a:noFill/>
-        </p:spPr>
-        <p:txBody>
-          <a:bodyPr wrap="square" anchor="t" lIns="18288" rIns="18288" tIns="18288" bIns="18288">
-            <a:spAutoFit/>
-          </a:bodyPr>
-          <a:lstStyle/>
-          <a:p>
-            <a:pPr algn="l">
-              <a:spcAft>
-                <a:spcPts val="1000"/>
-              </a:spcAft>
-            </a:pPr>
-            <a:r>
-              <a:rPr sz="1800" b="0">
-                <a:solidFill>
-                  <a:srgbClr val="EEEFF1"/>
-                </a:solidFill>
-                <a:latin typeface="Segoe UI"/>
-              </a:rPr>
-              <a:t>• Трансекты и пролёты дронов под пролёт Sentinel-2, время записано</a:t>
-            </a:r>
-          </a:p>
-          <a:p>
-            <a:pPr algn="l">
-              <a:spcAft>
-                <a:spcPts val="1000"/>
-              </a:spcAft>
-            </a:pPr>
-            <a:r>
-              <a:rPr sz="1800" b="0">
-                <a:solidFill>
-                  <a:srgbClr val="EEEFF1"/>
-                </a:solidFill>
-                <a:latin typeface="Segoe UI"/>
-              </a:rPr>
-              <a:t>• Детальные снимки (дрон, VHR) над найденными зонами → счётчик → шт./км² кадра</a:t>
-            </a:r>
-          </a:p>
-          <a:p>
-            <a:pPr algn="l">
-              <a:spcAft>
-                <a:spcPts val="1000"/>
-              </a:spcAft>
-            </a:pPr>
-            <a:r>
-              <a:rPr sz="1800" b="0">
-                <a:solidFill>
-                  <a:srgbClr val="EEEFF1"/>
-                </a:solidFill>
-                <a:latin typeface="Segoe UI"/>
-              </a:rPr>
-              <a:t>• Дообучить счётчик на реке и дронах; классы материалов — с матрицей ошибок</a:t>
-            </a:r>
-          </a:p>
-          <a:p>
-            <a:pPr algn="l">
-              <a:spcAft>
-                <a:spcPts val="1000"/>
-              </a:spcAft>
-            </a:pPr>
-            <a:r>
-              <a:rPr sz="1800" b="0">
-                <a:solidFill>
-                  <a:srgbClr val="EEEFF1"/>
-                </a:solidFill>
-                <a:latin typeface="Segoe UI"/>
-              </a:rPr>
-              <a:t>• Больше рейсов и сезонов для поля; дрейф по течениям и ветру</a:t>
-            </a:r>
-          </a:p>
-        </p:txBody>
-      </p:sp>
-      <p:sp>
-        <p:nvSpPr>
-          <p:cNvPr id="11" name="TextBox 10"/>
           <p:cNvSpPr txBox="1"/>
           <p:nvPr/>
         </p:nvSpPr>
@@ -7254,14 +7291,14 @@
                 </a:solidFill>
                 <a:latin typeface="Segoe UI"/>
               </a:rPr>
-              <a:t>Источник: docs/QUANTITY.md; docs/research/marine_quantity/DECISION.md; reports/quantity/calibration.json</a:t>
-            </a:r>
-          </a:p>
-        </p:txBody>
-      </p:sp>
-      <p:sp>
-        <p:nvSpPr>
-          <p:cNvPr id="12" name="TextBox 11"/>
+              <a:t>Источник: README.md «Ограничения»; reports/report.md; docs/QUANTITY.md</a:t>
+            </a:r>
+          </a:p>
+        </p:txBody>
+      </p:sp>
+      <p:sp>
+        <p:nvSpPr>
+          <p:cNvPr id="6" name="TextBox 5"/>
           <p:cNvSpPr txBox="1"/>
           <p:nvPr/>
         </p:nvSpPr>
@@ -7293,7 +7330,7 @@
                 </a:solidFill>
                 <a:latin typeface="Segoe UI"/>
               </a:rPr>
-              <a:t>3:43</a:t>
+              <a:t>3:53</a:t>
             </a:r>
           </a:p>
         </p:txBody>
@@ -7358,7 +7395,7 @@
                 </a:solidFill>
                 <a:latin typeface="Segoe UI"/>
               </a:rPr>
-              <a:t>13 · Воспроизводимость, команда, репозиторий</a:t>
+              <a:t>13 · Развитие</a:t>
             </a:r>
           </a:p>
         </p:txBody>
@@ -7397,7 +7434,7 @@
                 </a:solidFill>
                 <a:latin typeface="Segoe UI"/>
               </a:rPr>
-              <a:t>Одна команда без сети — 7.5 с; чистый клон до карты — 7,5 мин; числа из одного файла</a:t>
+              <a:t>Развитие: спутник находит зону → детальный снимок над ней → счёт предметов → шт./км² → сверка с полем</a:t>
             </a:r>
           </a:p>
         </p:txBody>
@@ -7411,7 +7448,7 @@
         <p:spPr>
           <a:xfrm>
             <a:off x="457200" y="1600200"/>
-            <a:ext cx="3566160" cy="1737360"/>
+            <a:ext cx="5486400" cy="1737360"/>
           </a:xfrm>
           <a:prstGeom prst="rect">
             <a:avLst/>
@@ -7455,7 +7492,7 @@
         <p:spPr>
           <a:xfrm>
             <a:off x="685800" y="1737360"/>
-            <a:ext cx="3108960" cy="731520"/>
+            <a:ext cx="5029200" cy="731520"/>
           </a:xfrm>
           <a:prstGeom prst="rect">
             <a:avLst/>
@@ -7480,7 +7517,7 @@
                 </a:solidFill>
                 <a:latin typeface="Segoe UI"/>
               </a:rPr>
-              <a:t>7.5 с</a:t>
+              <a:t>4–12</a:t>
             </a:r>
           </a:p>
         </p:txBody>
@@ -7494,7 +7531,7 @@
         <p:spPr>
           <a:xfrm>
             <a:off x="685800" y="2514600"/>
-            <a:ext cx="3108960" cy="731520"/>
+            <a:ext cx="5029200" cy="731520"/>
           </a:xfrm>
           <a:prstGeom prst="rect">
             <a:avLst/>
@@ -7519,7 +7556,7 @@
                 </a:solidFill>
                 <a:latin typeface="Segoe UI"/>
               </a:rPr>
-              <a:t>run.ps1 -Case all -Offline, CPU, без сети</a:t>
+              <a:t>калибровочных пар «снимок → шт./км²» хватит для коэффициента в ×/÷2</a:t>
             </a:r>
           </a:p>
         </p:txBody>
@@ -7532,8 +7569,8 @@
         </p:nvSpPr>
         <p:spPr>
           <a:xfrm>
-            <a:off x="4297680" y="1600200"/>
-            <a:ext cx="3566160" cy="1737360"/>
+            <a:off x="6217920" y="1600200"/>
+            <a:ext cx="5486400" cy="1737360"/>
           </a:xfrm>
           <a:prstGeom prst="rect">
             <a:avLst/>
@@ -7576,8 +7613,8 @@
         </p:nvSpPr>
         <p:spPr>
           <a:xfrm>
-            <a:off x="4526280" y="1737360"/>
-            <a:ext cx="3108960" cy="731520"/>
+            <a:off x="6446520" y="1737360"/>
+            <a:ext cx="5029200" cy="731520"/>
           </a:xfrm>
           <a:prstGeom prst="rect">
             <a:avLst/>
@@ -7602,7 +7639,7 @@
                 </a:solidFill>
                 <a:latin typeface="Segoe UI"/>
               </a:rPr>
-              <a:t>7,5 мин</a:t>
+              <a:t>30</a:t>
             </a:r>
           </a:p>
         </p:txBody>
@@ -7615,8 +7652,8 @@
         </p:nvSpPr>
         <p:spPr>
           <a:xfrm>
-            <a:off x="4526280" y="2514600"/>
-            <a:ext cx="3108960" cy="731520"/>
+            <a:off x="6446520" y="2514600"/>
+            <a:ext cx="5029200" cy="731520"/>
           </a:xfrm>
           <a:prstGeom prst="rect">
             <a:avLst/>
@@ -7641,136 +7678,14 @@
                 </a:solidFill>
                 <a:latin typeface="Segoe UI"/>
               </a:rPr>
-              <a:t>от git clone до карты на экране</a:t>
-            </a:r>
-          </a:p>
-        </p:txBody>
-      </p:sp>
-      <p:sp>
-        <p:nvSpPr>
-          <p:cNvPr id="10" name="Rectangle 9"/>
-          <p:cNvSpPr/>
-          <p:nvPr/>
-        </p:nvSpPr>
-        <p:spPr>
-          <a:xfrm>
-            <a:off x="8138160" y="1600200"/>
-            <a:ext cx="3566160" cy="1737360"/>
-          </a:xfrm>
-          <a:prstGeom prst="rect">
-            <a:avLst/>
-          </a:prstGeom>
-          <a:solidFill>
-            <a:srgbClr val="1B1E24"/>
-          </a:solidFill>
-          <a:ln>
-            <a:noFill/>
-          </a:ln>
-          <a:effectLst/>
-        </p:spPr>
-        <p:style>
-          <a:lnRef idx="1">
-            <a:schemeClr val="accent1"/>
-          </a:lnRef>
-          <a:fillRef idx="3">
-            <a:schemeClr val="accent1"/>
-          </a:fillRef>
-          <a:effectRef idx="2">
-            <a:schemeClr val="accent1"/>
-          </a:effectRef>
-          <a:fontRef idx="minor">
-            <a:schemeClr val="lt1"/>
-          </a:fontRef>
-        </p:style>
-        <p:txBody>
-          <a:bodyPr rtlCol="0" anchor="ctr"/>
-          <a:lstStyle/>
-          <a:p>
-            <a:pPr algn="ctr"/>
-          </a:p>
-        </p:txBody>
-      </p:sp>
-      <p:sp>
-        <p:nvSpPr>
-          <p:cNvPr id="11" name="TextBox 10"/>
-          <p:cNvSpPr txBox="1"/>
-          <p:nvPr/>
-        </p:nvSpPr>
-        <p:spPr>
-          <a:xfrm>
-            <a:off x="8366760" y="1737360"/>
-            <a:ext cx="3108960" cy="731520"/>
-          </a:xfrm>
-          <a:prstGeom prst="rect">
-            <a:avLst/>
-          </a:prstGeom>
-          <a:noFill/>
-        </p:spPr>
-        <p:txBody>
-          <a:bodyPr wrap="square" anchor="t" lIns="18288" rIns="18288" tIns="18288" bIns="18288">
-            <a:spAutoFit/>
-          </a:bodyPr>
-          <a:lstStyle/>
-          <a:p>
-            <a:pPr algn="l">
-              <a:spcAft>
-                <a:spcPts val="600"/>
-              </a:spcAft>
-            </a:pPr>
-            <a:r>
-              <a:rPr sz="4000" b="1">
-                <a:solidFill>
-                  <a:srgbClr val="D9912E"/>
-                </a:solidFill>
-                <a:latin typeface="Segoe UI"/>
-              </a:rPr>
-              <a:t>255 passed</a:t>
-            </a:r>
-          </a:p>
-        </p:txBody>
-      </p:sp>
-      <p:sp>
-        <p:nvSpPr>
-          <p:cNvPr id="12" name="TextBox 11"/>
-          <p:cNvSpPr txBox="1"/>
-          <p:nvPr/>
-        </p:nvSpPr>
-        <p:spPr>
-          <a:xfrm>
-            <a:off x="8366760" y="2514600"/>
-            <a:ext cx="3108960" cy="731520"/>
-          </a:xfrm>
-          <a:prstGeom prst="rect">
-            <a:avLst/>
-          </a:prstGeom>
-          <a:noFill/>
-        </p:spPr>
-        <p:txBody>
-          <a:bodyPr wrap="square" anchor="t" lIns="18288" rIns="18288" tIns="18288" bIns="18288">
-            <a:spAutoFit/>
-          </a:bodyPr>
-          <a:lstStyle/>
-          <a:p>
-            <a:pPr algn="l">
-              <a:spcAft>
-                <a:spcPts val="600"/>
-              </a:spcAft>
-            </a:pPr>
-            <a:r>
-              <a:rPr sz="1400" b="0">
-                <a:solidFill>
-                  <a:srgbClr val="EEEFF1"/>
-                </a:solidFill>
-                <a:latin typeface="Segoe UI"/>
-              </a:rPr>
-              <a:t>тесты кейса; skipped 2, failed 0</a:t>
-            </a:r>
-          </a:p>
-        </p:txBody>
-      </p:sp>
-      <p:sp>
-        <p:nvSpPr>
-          <p:cNvPr id="13" name="TextBox 12"/>
+              <a:t>пар — чтобы увидеть связь r = 0.5</a:t>
+            </a:r>
+          </a:p>
+        </p:txBody>
+      </p:sp>
+      <p:sp>
+        <p:nvSpPr>
+          <p:cNvPr id="10" name="TextBox 9"/>
           <p:cNvSpPr txBox="1"/>
           <p:nvPr/>
         </p:nvSpPr>
@@ -7802,7 +7717,7 @@
                 </a:solidFill>
                 <a:latin typeface="Segoe UI"/>
               </a:rPr>
-              <a:t>• Репозиторий: github.com/azama2t/final-cosmohack</a:t>
+              <a:t>• Трансекты и пролёты дронов под пролёт Sentinel-2, время записано</a:t>
             </a:r>
           </a:p>
           <a:p>
@@ -7818,7 +7733,7 @@
                 </a:solidFill>
                 <a:latin typeface="Segoe UI"/>
               </a:rPr>
-              <a:t>• Все числа — reports/final_numbers.json; отпечаток прогона 278d93fb3390edeb</a:t>
+              <a:t>• Детальные снимки (дрон, VHR) над найденными зонами → счётчик → шт./км² кадра</a:t>
             </a:r>
           </a:p>
           <a:p>
@@ -7834,14 +7749,30 @@
                 </a:solidFill>
                 <a:latin typeface="Segoe UI"/>
               </a:rPr>
-              <a:t>• Спасибо! Вопросы — в приложении и в presentation/qa.md</a:t>
-            </a:r>
-          </a:p>
-        </p:txBody>
-      </p:sp>
-      <p:sp>
-        <p:nvSpPr>
-          <p:cNvPr id="14" name="TextBox 13"/>
+              <a:t>• Дообучить счётчик на реке и дронах; классы материалов — с матрицей ошибок</a:t>
+            </a:r>
+          </a:p>
+          <a:p>
+            <a:pPr algn="l">
+              <a:spcAft>
+                <a:spcPts val="1000"/>
+              </a:spcAft>
+            </a:pPr>
+            <a:r>
+              <a:rPr sz="1800" b="0">
+                <a:solidFill>
+                  <a:srgbClr val="EEEFF1"/>
+                </a:solidFill>
+                <a:latin typeface="Segoe UI"/>
+              </a:rPr>
+              <a:t>• Больше рейсов и сезонов для поля; дрейф по течениям и ветру</a:t>
+            </a:r>
+          </a:p>
+        </p:txBody>
+      </p:sp>
+      <p:sp>
+        <p:nvSpPr>
+          <p:cNvPr id="11" name="TextBox 10"/>
           <p:cNvSpPr txBox="1"/>
           <p:nvPr/>
         </p:nvSpPr>
@@ -7873,14 +7804,14 @@
                 </a:solidFill>
                 <a:latin typeface="Segoe UI"/>
               </a:rPr>
-              <a:t>Источник: reports/selfcheck/clean_clone_1941.md; reports/case_run/run_summary.json; README.md «Как пересчитать»</a:t>
-            </a:r>
-          </a:p>
-        </p:txBody>
-      </p:sp>
-      <p:sp>
-        <p:nvSpPr>
-          <p:cNvPr id="15" name="TextBox 14"/>
+              <a:t>Источник: docs/QUANTITY.md; docs/research/marine_quantity/DECISION.md; reports/quantity/calibration.json</a:t>
+            </a:r>
+          </a:p>
+        </p:txBody>
+      </p:sp>
+      <p:sp>
+        <p:nvSpPr>
+          <p:cNvPr id="12" name="TextBox 11"/>
           <p:cNvSpPr txBox="1"/>
           <p:nvPr/>
         </p:nvSpPr>
@@ -7912,7 +7843,7 @@
                 </a:solidFill>
                 <a:latin typeface="Segoe UI"/>
               </a:rPr>
-              <a:t>3:57</a:t>
+              <a:t>4:17</a:t>
             </a:r>
           </a:p>
         </p:txBody>
@@ -7977,7 +7908,7 @@
                 </a:solidFill>
                 <a:latin typeface="Segoe UI"/>
               </a:rPr>
-              <a:t>14 · Приложение · Как мы искали данные</a:t>
+              <a:t>14 · Воспроизводимость, команда, репозиторий</a:t>
             </a:r>
           </a:p>
         </p:txBody>
@@ -8010,27 +7941,393 @@
               </a:spcAft>
             </a:pPr>
             <a:r>
-              <a:rPr sz="2600" b="1">
+              <a:rPr sz="2400" b="1">
                 <a:solidFill>
                   <a:srgbClr val="EEEFF1"/>
                 </a:solidFill>
                 <a:latin typeface="Segoe UI"/>
               </a:rPr>
-              <a:t>Пайплайн поиска данных: 318 событий CSV → пар уровня A 0; ADIS — 66 пар по месту и времени</a:t>
-            </a:r>
-          </a:p>
-        </p:txBody>
-      </p:sp>
-      <p:sp>
-        <p:nvSpPr>
-          <p:cNvPr id="4" name="TextBox 3"/>
-          <p:cNvSpPr txBox="1"/>
+              <a:t>Одна команда без сети — 7.5 с; чистый клон до карты — 7,5 мин; числа из одного файла</a:t>
+            </a:r>
+          </a:p>
+        </p:txBody>
+      </p:sp>
+      <p:sp>
+        <p:nvSpPr>
+          <p:cNvPr id="4" name="Rectangle 3"/>
+          <p:cNvSpPr/>
           <p:nvPr/>
         </p:nvSpPr>
         <p:spPr>
           <a:xfrm>
             <a:off x="457200" y="1600200"/>
-            <a:ext cx="5577840" cy="4572000"/>
+            <a:ext cx="3566160" cy="1737360"/>
+          </a:xfrm>
+          <a:prstGeom prst="rect">
+            <a:avLst/>
+          </a:prstGeom>
+          <a:solidFill>
+            <a:srgbClr val="1B1E24"/>
+          </a:solidFill>
+          <a:ln>
+            <a:noFill/>
+          </a:ln>
+          <a:effectLst/>
+        </p:spPr>
+        <p:style>
+          <a:lnRef idx="1">
+            <a:schemeClr val="accent1"/>
+          </a:lnRef>
+          <a:fillRef idx="3">
+            <a:schemeClr val="accent1"/>
+          </a:fillRef>
+          <a:effectRef idx="2">
+            <a:schemeClr val="accent1"/>
+          </a:effectRef>
+          <a:fontRef idx="minor">
+            <a:schemeClr val="lt1"/>
+          </a:fontRef>
+        </p:style>
+        <p:txBody>
+          <a:bodyPr rtlCol="0" anchor="ctr"/>
+          <a:lstStyle/>
+          <a:p>
+            <a:pPr algn="ctr"/>
+          </a:p>
+        </p:txBody>
+      </p:sp>
+      <p:sp>
+        <p:nvSpPr>
+          <p:cNvPr id="5" name="TextBox 4"/>
+          <p:cNvSpPr txBox="1"/>
+          <p:nvPr/>
+        </p:nvSpPr>
+        <p:spPr>
+          <a:xfrm>
+            <a:off x="685800" y="1737360"/>
+            <a:ext cx="3108960" cy="731520"/>
+          </a:xfrm>
+          <a:prstGeom prst="rect">
+            <a:avLst/>
+          </a:prstGeom>
+          <a:noFill/>
+        </p:spPr>
+        <p:txBody>
+          <a:bodyPr wrap="square" anchor="t" lIns="18288" rIns="18288" tIns="18288" bIns="18288">
+            <a:spAutoFit/>
+          </a:bodyPr>
+          <a:lstStyle/>
+          <a:p>
+            <a:pPr algn="l">
+              <a:spcAft>
+                <a:spcPts val="600"/>
+              </a:spcAft>
+            </a:pPr>
+            <a:r>
+              <a:rPr sz="4000" b="1">
+                <a:solidFill>
+                  <a:srgbClr val="D9912E"/>
+                </a:solidFill>
+                <a:latin typeface="Segoe UI"/>
+              </a:rPr>
+              <a:t>7.5 с</a:t>
+            </a:r>
+          </a:p>
+        </p:txBody>
+      </p:sp>
+      <p:sp>
+        <p:nvSpPr>
+          <p:cNvPr id="6" name="TextBox 5"/>
+          <p:cNvSpPr txBox="1"/>
+          <p:nvPr/>
+        </p:nvSpPr>
+        <p:spPr>
+          <a:xfrm>
+            <a:off x="685800" y="2514600"/>
+            <a:ext cx="3108960" cy="731520"/>
+          </a:xfrm>
+          <a:prstGeom prst="rect">
+            <a:avLst/>
+          </a:prstGeom>
+          <a:noFill/>
+        </p:spPr>
+        <p:txBody>
+          <a:bodyPr wrap="square" anchor="t" lIns="18288" rIns="18288" tIns="18288" bIns="18288">
+            <a:spAutoFit/>
+          </a:bodyPr>
+          <a:lstStyle/>
+          <a:p>
+            <a:pPr algn="l">
+              <a:spcAft>
+                <a:spcPts val="600"/>
+              </a:spcAft>
+            </a:pPr>
+            <a:r>
+              <a:rPr sz="1400" b="0">
+                <a:solidFill>
+                  <a:srgbClr val="EEEFF1"/>
+                </a:solidFill>
+                <a:latin typeface="Segoe UI"/>
+              </a:rPr>
+              <a:t>run.ps1 -Case all -Offline, CPU, без сети</a:t>
+            </a:r>
+          </a:p>
+        </p:txBody>
+      </p:sp>
+      <p:sp>
+        <p:nvSpPr>
+          <p:cNvPr id="7" name="Rectangle 6"/>
+          <p:cNvSpPr/>
+          <p:nvPr/>
+        </p:nvSpPr>
+        <p:spPr>
+          <a:xfrm>
+            <a:off x="4297680" y="1600200"/>
+            <a:ext cx="3566160" cy="1737360"/>
+          </a:xfrm>
+          <a:prstGeom prst="rect">
+            <a:avLst/>
+          </a:prstGeom>
+          <a:solidFill>
+            <a:srgbClr val="1B1E24"/>
+          </a:solidFill>
+          <a:ln>
+            <a:noFill/>
+          </a:ln>
+          <a:effectLst/>
+        </p:spPr>
+        <p:style>
+          <a:lnRef idx="1">
+            <a:schemeClr val="accent1"/>
+          </a:lnRef>
+          <a:fillRef idx="3">
+            <a:schemeClr val="accent1"/>
+          </a:fillRef>
+          <a:effectRef idx="2">
+            <a:schemeClr val="accent1"/>
+          </a:effectRef>
+          <a:fontRef idx="minor">
+            <a:schemeClr val="lt1"/>
+          </a:fontRef>
+        </p:style>
+        <p:txBody>
+          <a:bodyPr rtlCol="0" anchor="ctr"/>
+          <a:lstStyle/>
+          <a:p>
+            <a:pPr algn="ctr"/>
+          </a:p>
+        </p:txBody>
+      </p:sp>
+      <p:sp>
+        <p:nvSpPr>
+          <p:cNvPr id="8" name="TextBox 7"/>
+          <p:cNvSpPr txBox="1"/>
+          <p:nvPr/>
+        </p:nvSpPr>
+        <p:spPr>
+          <a:xfrm>
+            <a:off x="4526280" y="1737360"/>
+            <a:ext cx="3108960" cy="731520"/>
+          </a:xfrm>
+          <a:prstGeom prst="rect">
+            <a:avLst/>
+          </a:prstGeom>
+          <a:noFill/>
+        </p:spPr>
+        <p:txBody>
+          <a:bodyPr wrap="square" anchor="t" lIns="18288" rIns="18288" tIns="18288" bIns="18288">
+            <a:spAutoFit/>
+          </a:bodyPr>
+          <a:lstStyle/>
+          <a:p>
+            <a:pPr algn="l">
+              <a:spcAft>
+                <a:spcPts val="600"/>
+              </a:spcAft>
+            </a:pPr>
+            <a:r>
+              <a:rPr sz="4000" b="1">
+                <a:solidFill>
+                  <a:srgbClr val="D9912E"/>
+                </a:solidFill>
+                <a:latin typeface="Segoe UI"/>
+              </a:rPr>
+              <a:t>7,5 мин</a:t>
+            </a:r>
+          </a:p>
+        </p:txBody>
+      </p:sp>
+      <p:sp>
+        <p:nvSpPr>
+          <p:cNvPr id="9" name="TextBox 8"/>
+          <p:cNvSpPr txBox="1"/>
+          <p:nvPr/>
+        </p:nvSpPr>
+        <p:spPr>
+          <a:xfrm>
+            <a:off x="4526280" y="2514600"/>
+            <a:ext cx="3108960" cy="731520"/>
+          </a:xfrm>
+          <a:prstGeom prst="rect">
+            <a:avLst/>
+          </a:prstGeom>
+          <a:noFill/>
+        </p:spPr>
+        <p:txBody>
+          <a:bodyPr wrap="square" anchor="t" lIns="18288" rIns="18288" tIns="18288" bIns="18288">
+            <a:spAutoFit/>
+          </a:bodyPr>
+          <a:lstStyle/>
+          <a:p>
+            <a:pPr algn="l">
+              <a:spcAft>
+                <a:spcPts val="600"/>
+              </a:spcAft>
+            </a:pPr>
+            <a:r>
+              <a:rPr sz="1400" b="0">
+                <a:solidFill>
+                  <a:srgbClr val="EEEFF1"/>
+                </a:solidFill>
+                <a:latin typeface="Segoe UI"/>
+              </a:rPr>
+              <a:t>от git clone до карты на экране</a:t>
+            </a:r>
+          </a:p>
+        </p:txBody>
+      </p:sp>
+      <p:sp>
+        <p:nvSpPr>
+          <p:cNvPr id="10" name="Rectangle 9"/>
+          <p:cNvSpPr/>
+          <p:nvPr/>
+        </p:nvSpPr>
+        <p:spPr>
+          <a:xfrm>
+            <a:off x="8138160" y="1600200"/>
+            <a:ext cx="3566160" cy="1737360"/>
+          </a:xfrm>
+          <a:prstGeom prst="rect">
+            <a:avLst/>
+          </a:prstGeom>
+          <a:solidFill>
+            <a:srgbClr val="1B1E24"/>
+          </a:solidFill>
+          <a:ln>
+            <a:noFill/>
+          </a:ln>
+          <a:effectLst/>
+        </p:spPr>
+        <p:style>
+          <a:lnRef idx="1">
+            <a:schemeClr val="accent1"/>
+          </a:lnRef>
+          <a:fillRef idx="3">
+            <a:schemeClr val="accent1"/>
+          </a:fillRef>
+          <a:effectRef idx="2">
+            <a:schemeClr val="accent1"/>
+          </a:effectRef>
+          <a:fontRef idx="minor">
+            <a:schemeClr val="lt1"/>
+          </a:fontRef>
+        </p:style>
+        <p:txBody>
+          <a:bodyPr rtlCol="0" anchor="ctr"/>
+          <a:lstStyle/>
+          <a:p>
+            <a:pPr algn="ctr"/>
+          </a:p>
+        </p:txBody>
+      </p:sp>
+      <p:sp>
+        <p:nvSpPr>
+          <p:cNvPr id="11" name="TextBox 10"/>
+          <p:cNvSpPr txBox="1"/>
+          <p:nvPr/>
+        </p:nvSpPr>
+        <p:spPr>
+          <a:xfrm>
+            <a:off x="8366760" y="1737360"/>
+            <a:ext cx="3108960" cy="731520"/>
+          </a:xfrm>
+          <a:prstGeom prst="rect">
+            <a:avLst/>
+          </a:prstGeom>
+          <a:noFill/>
+        </p:spPr>
+        <p:txBody>
+          <a:bodyPr wrap="square" anchor="t" lIns="18288" rIns="18288" tIns="18288" bIns="18288">
+            <a:spAutoFit/>
+          </a:bodyPr>
+          <a:lstStyle/>
+          <a:p>
+            <a:pPr algn="l">
+              <a:spcAft>
+                <a:spcPts val="600"/>
+              </a:spcAft>
+            </a:pPr>
+            <a:r>
+              <a:rPr sz="4000" b="1">
+                <a:solidFill>
+                  <a:srgbClr val="D9912E"/>
+                </a:solidFill>
+                <a:latin typeface="Segoe UI"/>
+              </a:rPr>
+              <a:t>255 passed</a:t>
+            </a:r>
+          </a:p>
+        </p:txBody>
+      </p:sp>
+      <p:sp>
+        <p:nvSpPr>
+          <p:cNvPr id="12" name="TextBox 11"/>
+          <p:cNvSpPr txBox="1"/>
+          <p:nvPr/>
+        </p:nvSpPr>
+        <p:spPr>
+          <a:xfrm>
+            <a:off x="8366760" y="2514600"/>
+            <a:ext cx="3108960" cy="731520"/>
+          </a:xfrm>
+          <a:prstGeom prst="rect">
+            <a:avLst/>
+          </a:prstGeom>
+          <a:noFill/>
+        </p:spPr>
+        <p:txBody>
+          <a:bodyPr wrap="square" anchor="t" lIns="18288" rIns="18288" tIns="18288" bIns="18288">
+            <a:spAutoFit/>
+          </a:bodyPr>
+          <a:lstStyle/>
+          <a:p>
+            <a:pPr algn="l">
+              <a:spcAft>
+                <a:spcPts val="600"/>
+              </a:spcAft>
+            </a:pPr>
+            <a:r>
+              <a:rPr sz="1400" b="0">
+                <a:solidFill>
+                  <a:srgbClr val="EEEFF1"/>
+                </a:solidFill>
+                <a:latin typeface="Segoe UI"/>
+              </a:rPr>
+              <a:t>тесты кейса; skipped 2, failed 0</a:t>
+            </a:r>
+          </a:p>
+        </p:txBody>
+      </p:sp>
+      <p:sp>
+        <p:nvSpPr>
+          <p:cNvPr id="13" name="TextBox 12"/>
+          <p:cNvSpPr txBox="1"/>
+          <p:nvPr/>
+        </p:nvSpPr>
+        <p:spPr>
+          <a:xfrm>
+            <a:off x="640080" y="3703320"/>
+            <a:ext cx="10881360" cy="2514600"/>
           </a:xfrm>
           <a:prstGeom prst="rect">
             <a:avLst/>
@@ -8049,13 +8346,13 @@
               </a:spcAft>
             </a:pPr>
             <a:r>
-              <a:rPr sz="1500" b="0">
+              <a:rPr sz="1800" b="0">
                 <a:solidFill>
                   <a:srgbClr val="EEEFF1"/>
                 </a:solidFill>
                 <a:latin typeface="Segoe UI"/>
               </a:rPr>
-              <a:t>• Уровни: A — снимок и полевое число связаны по времени, месту, площади и категории; B — подтверждённая разметка скопления; C — кандидат; D — отвергнутый или отрицательный пример</a:t>
+              <a:t>• Репозиторий: github.com/azama2t/final-cosmohack</a:t>
             </a:r>
           </a:p>
           <a:p>
@@ -8065,13 +8362,13 @@
               </a:spcAft>
             </a:pPr>
             <a:r>
-              <a:rPr sz="1500" b="0">
+              <a:rPr sz="1800" b="0">
                 <a:solidFill>
                   <a:srgbClr val="EEEFF1"/>
                 </a:solidFill>
                 <a:latin typeface="Segoe UI"/>
               </a:rPr>
-              <a:t>• Детектор учим только на B + проверенных D; «снимок → шт./км²» — только на калибровочных парах; C меткой не становится</a:t>
+              <a:t>• Все числа — reports/final_numbers.json; отпечаток прогона 278d93fb3390edeb</a:t>
             </a:r>
           </a:p>
           <a:p>
@@ -8081,99 +8378,20 @@
               </a:spcAft>
             </a:pPr>
             <a:r>
-              <a:rPr sz="1500" b="0">
+              <a:rPr sz="1800" b="0">
                 <a:solidFill>
                   <a:srgbClr val="EEEFF1"/>
                 </a:solidFill>
                 <a:latin typeface="Segoe UI"/>
               </a:rPr>
-              <a:t>• Пластик: снимка нет у 62 из 63 событий Саргассова моря, у S1 датчики не видят предметы; Северное море — облака 21, маршрут вне снимка 29; Чёрное море — C 8 (время и площадь трансект не опубликованы)</a:t>
-            </a:r>
-          </a:p>
-          <a:p>
-            <a:pPr algn="l">
-              <a:spcAft>
-                <a:spcPts val="1000"/>
-              </a:spcAft>
-            </a:pPr>
-            <a:r>
-              <a:rPr sz="1500" b="0">
-                <a:solidFill>
-                  <a:srgbClr val="EEEFF1"/>
-                </a:solidFill>
-                <a:latin typeface="Segoe UI"/>
-              </a:rPr>
-              <a:t>• Стоп-правило: нет A за пилот — поиск по дрейфу не расширяем. Нашли ADIS (The Ocean Cleanup): 177 отрезков → A 66, C 3, D 108</a:t>
-            </a:r>
-          </a:p>
-        </p:txBody>
-      </p:sp>
-      <p:pic>
-        <p:nvPicPr>
-          <p:cNvPr id="5" name="Picture 4" descr="05_funnel.jpg"/>
-          <p:cNvPicPr>
-            <a:picLocks noChangeAspect="1"/>
-          </p:cNvPicPr>
-          <p:nvPr/>
-        </p:nvPicPr>
-        <p:blipFill>
-          <a:blip r:embed="rId2"/>
-          <a:stretch>
-            <a:fillRect/>
-          </a:stretch>
-        </p:blipFill>
-        <p:spPr>
-          <a:xfrm>
-            <a:off x="6400800" y="1645920"/>
-            <a:ext cx="5349240" cy="3209544"/>
-          </a:xfrm>
-          <a:prstGeom prst="rect">
-            <a:avLst/>
-          </a:prstGeom>
-        </p:spPr>
-      </p:pic>
-      <p:sp>
-        <p:nvSpPr>
-          <p:cNvPr id="6" name="TextBox 5"/>
-          <p:cNvSpPr txBox="1"/>
-          <p:nvPr/>
-        </p:nvSpPr>
-        <p:spPr>
-          <a:xfrm>
-            <a:off x="6400800" y="4901183"/>
-            <a:ext cx="5349240" cy="548640"/>
-          </a:xfrm>
-          <a:prstGeom prst="rect">
-            <a:avLst/>
-          </a:prstGeom>
-          <a:noFill/>
-        </p:spPr>
-        <p:txBody>
-          <a:bodyPr wrap="square" anchor="t" lIns="18288" rIns="18288" tIns="18288" bIns="18288">
-            <a:spAutoFit/>
-          </a:bodyPr>
-          <a:lstStyle/>
-          <a:p>
-            <a:pPr algn="l">
-              <a:spcAft>
-                <a:spcPts val="600"/>
-              </a:spcAft>
-            </a:pPr>
-            <a:r>
-              <a:rPr sz="1200" b="0">
-                <a:solidFill>
-                  <a:srgbClr val="9AA1AC"/>
-                </a:solidFill>
-                <a:latin typeface="Segoe UI"/>
-              </a:rPr>
-              <a:t>Воронка «событие → снимок → маски → синхронность»; каждая попытка — docs/SEARCH_LOG.md, хронология — docs/PIPELINE.md</a:t>
-            </a:r>
-          </a:p>
-        </p:txBody>
-      </p:sp>
-      <p:sp>
-        <p:nvSpPr>
-          <p:cNvPr id="7" name="TextBox 6"/>
+              <a:t>• Спасибо! Вопросы — в приложении и в presentation/qa.md</a:t>
+            </a:r>
+          </a:p>
+        </p:txBody>
+      </p:sp>
+      <p:sp>
+        <p:nvSpPr>
+          <p:cNvPr id="14" name="TextBox 13"/>
           <p:cNvSpPr txBox="1"/>
           <p:nvPr/>
         </p:nvSpPr>
@@ -8205,14 +8423,14 @@
                 </a:solidFill>
                 <a:latin typeface="Segoe UI"/>
               </a:rPr>
-              <a:t>Источник: docs/PIPELINE.md; docs/SEARCH_LOG.md; reports/search/*_candidates.csv (final_numbers → case.sections.search)</a:t>
-            </a:r>
-          </a:p>
-        </p:txBody>
-      </p:sp>
-      <p:sp>
-        <p:nvSpPr>
-          <p:cNvPr id="8" name="TextBox 7"/>
+              <a:t>Источник: reports/selfcheck/clean_clone_1941.md; reports/case_run/run_summary.json; README.md «Как пересчитать»</a:t>
+            </a:r>
+          </a:p>
+        </p:txBody>
+      </p:sp>
+      <p:sp>
+        <p:nvSpPr>
+          <p:cNvPr id="15" name="TextBox 14"/>
           <p:cNvSpPr txBox="1"/>
           <p:nvPr/>
         </p:nvSpPr>
@@ -8244,7 +8462,7 @@
                 </a:solidFill>
                 <a:latin typeface="Segoe UI"/>
               </a:rPr>
-              <a:t>прил.</a:t>
+              <a:t>4:31</a:t>
             </a:r>
           </a:p>
         </p:txBody>
@@ -8309,7 +8527,7 @@
                 </a:solidFill>
                 <a:latin typeface="Segoe UI"/>
               </a:rPr>
-              <a:t>15 · Приложение · Пары по месту и времени (ADIS)</a:t>
+              <a:t>15 · Приложение · Как мы искали данные</a:t>
             </a:r>
           </a:p>
         </p:txBody>
@@ -8348,7 +8566,7 @@
                 </a:solidFill>
                 <a:latin typeface="Segoe UI"/>
               </a:rPr>
-              <a:t>ADIS: 66 пар по месту и времени; на 6 отрезках с единичными предметами детектор их не увидел</a:t>
+              <a:t>Пайплайн поиска данных: 318 событий CSV → пар уровня A 0; ADIS — 66 пар по месту и времени</a:t>
             </a:r>
           </a:p>
         </p:txBody>
@@ -8387,7 +8605,7 @@
                 </a:solidFill>
                 <a:latin typeface="Segoe UI"/>
               </a:rPr>
-              <a:t>• Камера судна, счёт предметов по размерам, время GPS; |dt| ≤ 3 ч; ≈ 52 независимых проходов, время у 26 пар подтверждено самим судном на снимке</a:t>
+              <a:t>• Уровни: A — снимок и полевое число связаны по времени, месту, площади и категории; B — подтверждённая разметка скопления; C — кандидат; D — отвергнутый или отрицательный пример</a:t>
             </a:r>
           </a:p>
           <a:p>
@@ -8403,7 +8621,7 @@
                 </a:solidFill>
                 <a:latin typeface="Segoe UI"/>
               </a:rPr>
-              <a:t>• Детектор оценивается на 28 из 66 (на 38 — низкое солнце или слабый сигнал воды); из 6 отрезков с предметами (3.5–4.4 шт./км²) оценивается 3 — на всех 0 пикселей</a:t>
+              <a:t>• Детектор учим только на B + проверенных D; «снимок → шт./км²» — только на калибровочных парах; C меткой не становится</a:t>
             </a:r>
           </a:p>
           <a:p>
@@ -8419,7 +8637,7 @@
                 </a:solidFill>
                 <a:latin typeface="Segoe UI"/>
               </a:rPr>
-              <a:t>• Согласуется с физикой: доля покрытия ≈ 6.6·10⁻⁸, предмет — 0.7 % пикселя; но общий предел для всех скоплений это не задаёт — плотные полосы эти пары не проверяют</a:t>
+              <a:t>• Пластик: снимка нет у 62 из 63 событий Саргассова моря, у S1 датчики не видят предметы; Северное море — облака 21, маршрут вне снимка 29; Чёрное море — C 8 (время и площадь трансект не опубликованы)</a:t>
             </a:r>
           </a:p>
           <a:p>
@@ -8435,46 +8653,14 @@
                 </a:solidFill>
                 <a:latin typeface="Segoe UI"/>
               </a:rPr>
-              <a:t>• Ложные при полевом нуле (25 пар): ветер &lt; 7 м/с — 0 пикселей на 9.5 км²; сильнее — 1 на 8.8 км², 0.16 объекта/км² в зоне (барашки)</a:t>
-            </a:r>
-          </a:p>
-          <a:p>
-            <a:pPr algn="l">
-              <a:spcAft>
-                <a:spcPts val="1000"/>
-              </a:spcAft>
-            </a:pPr>
-            <a:r>
-              <a:rPr sz="1500" b="0">
-                <a:solidFill>
-                  <a:srgbClr val="EEEFF1"/>
-                </a:solidFill>
-                <a:latin typeface="Segoe UI"/>
-              </a:rPr>
-              <a:t>• Три уровня: по месту и времени 66 · видимый сигнал 0 из 3 · калибровочных «снимок → шт./км²» 0 (нужно 4–12)</a:t>
-            </a:r>
-          </a:p>
-          <a:p>
-            <a:pPr algn="l">
-              <a:spcAft>
-                <a:spcPts val="1000"/>
-              </a:spcAft>
-            </a:pPr>
-            <a:r>
-              <a:rPr sz="1500" b="0">
-                <a:solidFill>
-                  <a:srgbClr val="EEEFF1"/>
-                </a:solidFill>
-                <a:latin typeface="Segoe UI"/>
-              </a:rPr>
-              <a:t>• Независимая проверка: 6 наглядных пар по предметам &gt; 50 см (другая выборка, наши — &gt; 5 см); S2 в тот же день — у 12 из 36 маршрутов</a:t>
+              <a:t>• Стоп-правило: нет A за пилот — поиск по дрейфу не расширяем. Нашли ADIS (The Ocean Cleanup): 177 отрезков → A 66, C 3, D 108</a:t>
             </a:r>
           </a:p>
         </p:txBody>
       </p:sp>
       <p:pic>
         <p:nvPicPr>
-          <p:cNvPr id="5" name="Picture 4" descr="08_independent_adis.jpg"/>
+          <p:cNvPr id="5" name="Picture 4" descr="05_funnel.jpg"/>
           <p:cNvPicPr>
             <a:picLocks noChangeAspect="1"/>
           </p:cNvPicPr>
@@ -8489,7 +8675,7 @@
         <p:spPr>
           <a:xfrm>
             <a:off x="6400800" y="1645920"/>
-            <a:ext cx="5349240" cy="2664590"/>
+            <a:ext cx="5349240" cy="3209544"/>
           </a:xfrm>
           <a:prstGeom prst="rect">
             <a:avLst/>
@@ -8504,7 +8690,7 @@
         </p:nvSpPr>
         <p:spPr>
           <a:xfrm>
-            <a:off x="6400800" y="4356230"/>
+            <a:off x="6400800" y="4901183"/>
             <a:ext cx="5349240" cy="548640"/>
           </a:xfrm>
           <a:prstGeom prst="rect">
@@ -8530,7 +8716,7 @@
                 </a:solidFill>
                 <a:latin typeface="Segoe UI"/>
               </a:rPr>
-              <a:t>Независимая проверка: пары ADIS ↔ S2 по предметам &gt; 50 см — маршрут судна (жёлтый), поиск с учётом дрейфа (голубой); предметы на снимке не различимы</a:t>
+              <a:t>Воронка «событие → снимок → маски → синхронность»; каждая попытка — docs/SEARCH_LOG.md, хронология — docs/PIPELINE.md</a:t>
             </a:r>
           </a:p>
         </p:txBody>
@@ -8569,7 +8755,7 @@
                 </a:solidFill>
                 <a:latin typeface="Segoe UI"/>
               </a:rPr>
-              <a:t>Источник: reports/search/adis_candidates.csv, reports/search/adis.md (final_numbers → case.sections.adis_pairs, quantity.levels)</a:t>
+              <a:t>Источник: docs/PIPELINE.md; docs/SEARCH_LOG.md; reports/search/*_candidates.csv (final_numbers → case.sections.search)</a:t>
             </a:r>
           </a:p>
         </p:txBody>
@@ -8673,7 +8859,371 @@
                 </a:solidFill>
                 <a:latin typeface="Segoe UI"/>
               </a:rPr>
-              <a:t>16 · Приложение · Новые размеченные данные B/D</a:t>
+              <a:t>16 · Приложение · Пары по месту и времени (ADIS)</a:t>
+            </a:r>
+          </a:p>
+        </p:txBody>
+      </p:sp>
+      <p:sp>
+        <p:nvSpPr>
+          <p:cNvPr id="3" name="TextBox 2"/>
+          <p:cNvSpPr txBox="1"/>
+          <p:nvPr/>
+        </p:nvSpPr>
+        <p:spPr>
+          <a:xfrm>
+            <a:off x="457200" y="457200"/>
+            <a:ext cx="11247120" cy="960120"/>
+          </a:xfrm>
+          <a:prstGeom prst="rect">
+            <a:avLst/>
+          </a:prstGeom>
+          <a:noFill/>
+        </p:spPr>
+        <p:txBody>
+          <a:bodyPr wrap="square" anchor="t" lIns="18288" rIns="18288" tIns="18288" bIns="18288">
+            <a:spAutoFit/>
+          </a:bodyPr>
+          <a:lstStyle/>
+          <a:p>
+            <a:pPr algn="l">
+              <a:spcAft>
+                <a:spcPts val="600"/>
+              </a:spcAft>
+            </a:pPr>
+            <a:r>
+              <a:rPr sz="2600" b="1">
+                <a:solidFill>
+                  <a:srgbClr val="EEEFF1"/>
+                </a:solidFill>
+                <a:latin typeface="Segoe UI"/>
+              </a:rPr>
+              <a:t>ADIS: 66 пар по месту и времени; на 6 отрезках с единичными предметами детектор их не увидел</a:t>
+            </a:r>
+          </a:p>
+        </p:txBody>
+      </p:sp>
+      <p:sp>
+        <p:nvSpPr>
+          <p:cNvPr id="4" name="TextBox 3"/>
+          <p:cNvSpPr txBox="1"/>
+          <p:nvPr/>
+        </p:nvSpPr>
+        <p:spPr>
+          <a:xfrm>
+            <a:off x="457200" y="1600200"/>
+            <a:ext cx="5577840" cy="4572000"/>
+          </a:xfrm>
+          <a:prstGeom prst="rect">
+            <a:avLst/>
+          </a:prstGeom>
+          <a:noFill/>
+        </p:spPr>
+        <p:txBody>
+          <a:bodyPr wrap="square" anchor="t" lIns="18288" rIns="18288" tIns="18288" bIns="18288">
+            <a:spAutoFit/>
+          </a:bodyPr>
+          <a:lstStyle/>
+          <a:p>
+            <a:pPr algn="l">
+              <a:spcAft>
+                <a:spcPts val="1000"/>
+              </a:spcAft>
+            </a:pPr>
+            <a:r>
+              <a:rPr sz="1500" b="0">
+                <a:solidFill>
+                  <a:srgbClr val="EEEFF1"/>
+                </a:solidFill>
+                <a:latin typeface="Segoe UI"/>
+              </a:rPr>
+              <a:t>• Камера судна, счёт предметов по размерам, время GPS; |dt| ≤ 3 ч; ≈ 52 независимых проходов, время у 26 пар подтверждено самим судном на снимке</a:t>
+            </a:r>
+          </a:p>
+          <a:p>
+            <a:pPr algn="l">
+              <a:spcAft>
+                <a:spcPts val="1000"/>
+              </a:spcAft>
+            </a:pPr>
+            <a:r>
+              <a:rPr sz="1500" b="0">
+                <a:solidFill>
+                  <a:srgbClr val="EEEFF1"/>
+                </a:solidFill>
+                <a:latin typeface="Segoe UI"/>
+              </a:rPr>
+              <a:t>• Детектор оценивается на 28 из 66 (на 38 — низкое солнце или слабый сигнал воды); из 6 отрезков с предметами (3.5–4.4 шт./км²) оценивается 3 — на всех 0 пикселей</a:t>
+            </a:r>
+          </a:p>
+          <a:p>
+            <a:pPr algn="l">
+              <a:spcAft>
+                <a:spcPts val="1000"/>
+              </a:spcAft>
+            </a:pPr>
+            <a:r>
+              <a:rPr sz="1500" b="0">
+                <a:solidFill>
+                  <a:srgbClr val="EEEFF1"/>
+                </a:solidFill>
+                <a:latin typeface="Segoe UI"/>
+              </a:rPr>
+              <a:t>• Согласуется с физикой: доля покрытия ≈ 6.6·10⁻⁸, предмет — 0.7 % пикселя; но общий предел для всех скоплений это не задаёт — плотные полосы эти пары не проверяют</a:t>
+            </a:r>
+          </a:p>
+          <a:p>
+            <a:pPr algn="l">
+              <a:spcAft>
+                <a:spcPts val="1000"/>
+              </a:spcAft>
+            </a:pPr>
+            <a:r>
+              <a:rPr sz="1500" b="0">
+                <a:solidFill>
+                  <a:srgbClr val="EEEFF1"/>
+                </a:solidFill>
+                <a:latin typeface="Segoe UI"/>
+              </a:rPr>
+              <a:t>• Ложные при полевом нуле (25 пар): ветер &lt; 7 м/с — 0 пикселей на 9.5 км²; сильнее — 1 на 8.8 км², 0.16 объекта/км² в зоне (барашки)</a:t>
+            </a:r>
+          </a:p>
+          <a:p>
+            <a:pPr algn="l">
+              <a:spcAft>
+                <a:spcPts val="1000"/>
+              </a:spcAft>
+            </a:pPr>
+            <a:r>
+              <a:rPr sz="1500" b="0">
+                <a:solidFill>
+                  <a:srgbClr val="EEEFF1"/>
+                </a:solidFill>
+                <a:latin typeface="Segoe UI"/>
+              </a:rPr>
+              <a:t>• Три уровня: по месту и времени 66 · видимый сигнал 0 из 3 · калибровочных «снимок → шт./км²» 0 (нужно 4–12)</a:t>
+            </a:r>
+          </a:p>
+          <a:p>
+            <a:pPr algn="l">
+              <a:spcAft>
+                <a:spcPts val="1000"/>
+              </a:spcAft>
+            </a:pPr>
+            <a:r>
+              <a:rPr sz="1500" b="0">
+                <a:solidFill>
+                  <a:srgbClr val="EEEFF1"/>
+                </a:solidFill>
+                <a:latin typeface="Segoe UI"/>
+              </a:rPr>
+              <a:t>• Независимая проверка: 6 наглядных пар по предметам &gt; 50 см (другая выборка, наши — &gt; 5 см); S2 в тот же день — у 12 из 36 маршрутов</a:t>
+            </a:r>
+          </a:p>
+        </p:txBody>
+      </p:sp>
+      <p:pic>
+        <p:nvPicPr>
+          <p:cNvPr id="5" name="Picture 4" descr="08_independent_adis.jpg"/>
+          <p:cNvPicPr>
+            <a:picLocks noChangeAspect="1"/>
+          </p:cNvPicPr>
+          <p:nvPr/>
+        </p:nvPicPr>
+        <p:blipFill>
+          <a:blip r:embed="rId2"/>
+          <a:stretch>
+            <a:fillRect/>
+          </a:stretch>
+        </p:blipFill>
+        <p:spPr>
+          <a:xfrm>
+            <a:off x="6400800" y="1645920"/>
+            <a:ext cx="5349240" cy="2664590"/>
+          </a:xfrm>
+          <a:prstGeom prst="rect">
+            <a:avLst/>
+          </a:prstGeom>
+        </p:spPr>
+      </p:pic>
+      <p:sp>
+        <p:nvSpPr>
+          <p:cNvPr id="6" name="TextBox 5"/>
+          <p:cNvSpPr txBox="1"/>
+          <p:nvPr/>
+        </p:nvSpPr>
+        <p:spPr>
+          <a:xfrm>
+            <a:off x="6400800" y="4356230"/>
+            <a:ext cx="5349240" cy="548640"/>
+          </a:xfrm>
+          <a:prstGeom prst="rect">
+            <a:avLst/>
+          </a:prstGeom>
+          <a:noFill/>
+        </p:spPr>
+        <p:txBody>
+          <a:bodyPr wrap="square" anchor="t" lIns="18288" rIns="18288" tIns="18288" bIns="18288">
+            <a:spAutoFit/>
+          </a:bodyPr>
+          <a:lstStyle/>
+          <a:p>
+            <a:pPr algn="l">
+              <a:spcAft>
+                <a:spcPts val="600"/>
+              </a:spcAft>
+            </a:pPr>
+            <a:r>
+              <a:rPr sz="1200" b="0">
+                <a:solidFill>
+                  <a:srgbClr val="9AA1AC"/>
+                </a:solidFill>
+                <a:latin typeface="Segoe UI"/>
+              </a:rPr>
+              <a:t>Независимая проверка: пары ADIS ↔ S2 по предметам &gt; 50 см — маршрут судна (жёлтый), поиск с учётом дрейфа (голубой); предметы на снимке не различимы</a:t>
+            </a:r>
+          </a:p>
+        </p:txBody>
+      </p:sp>
+      <p:sp>
+        <p:nvSpPr>
+          <p:cNvPr id="7" name="TextBox 6"/>
+          <p:cNvSpPr txBox="1"/>
+          <p:nvPr/>
+        </p:nvSpPr>
+        <p:spPr>
+          <a:xfrm>
+            <a:off x="457200" y="6355080"/>
+            <a:ext cx="10515600" cy="320040"/>
+          </a:xfrm>
+          <a:prstGeom prst="rect">
+            <a:avLst/>
+          </a:prstGeom>
+          <a:noFill/>
+        </p:spPr>
+        <p:txBody>
+          <a:bodyPr wrap="square" anchor="t" lIns="18288" rIns="18288" tIns="18288" bIns="18288">
+            <a:spAutoFit/>
+          </a:bodyPr>
+          <a:lstStyle/>
+          <a:p>
+            <a:pPr algn="l">
+              <a:spcAft>
+                <a:spcPts val="600"/>
+              </a:spcAft>
+            </a:pPr>
+            <a:r>
+              <a:rPr sz="1000" b="0">
+                <a:solidFill>
+                  <a:srgbClr val="9AA1AC"/>
+                </a:solidFill>
+                <a:latin typeface="Segoe UI"/>
+              </a:rPr>
+              <a:t>Источник: reports/search/adis_candidates.csv, reports/search/adis.md (final_numbers → case.sections.adis_pairs, quantity.levels)</a:t>
+            </a:r>
+          </a:p>
+        </p:txBody>
+      </p:sp>
+      <p:sp>
+        <p:nvSpPr>
+          <p:cNvPr id="8" name="TextBox 7"/>
+          <p:cNvSpPr txBox="1"/>
+          <p:nvPr/>
+        </p:nvSpPr>
+        <p:spPr>
+          <a:xfrm>
+            <a:off x="11155680" y="6355080"/>
+            <a:ext cx="640080" cy="320040"/>
+          </a:xfrm>
+          <a:prstGeom prst="rect">
+            <a:avLst/>
+          </a:prstGeom>
+          <a:noFill/>
+        </p:spPr>
+        <p:txBody>
+          <a:bodyPr wrap="square" anchor="t" lIns="18288" rIns="18288" tIns="18288" bIns="18288">
+            <a:spAutoFit/>
+          </a:bodyPr>
+          <a:lstStyle/>
+          <a:p>
+            <a:pPr algn="r">
+              <a:spcAft>
+                <a:spcPts val="600"/>
+              </a:spcAft>
+            </a:pPr>
+            <a:r>
+              <a:rPr sz="1000" b="0">
+                <a:solidFill>
+                  <a:srgbClr val="9AA1AC"/>
+                </a:solidFill>
+                <a:latin typeface="Segoe UI"/>
+              </a:rPr>
+              <a:t>прил.</a:t>
+            </a:r>
+          </a:p>
+        </p:txBody>
+      </p:sp>
+    </p:spTree>
+  </p:cSld>
+  <p:clrMapOvr>
+    <a:masterClrMapping/>
+  </p:clrMapOvr>
+</p:sld>
+</file>
+
+<file path=ppt/slides/slide17.xml><?xml version="1.0" encoding="utf-8"?>
+<p:sld xmlns:a="http://schemas.openxmlformats.org/drawingml/2006/main" xmlns:p="http://schemas.openxmlformats.org/presentationml/2006/main" xmlns:r="http://schemas.openxmlformats.org/officeDocument/2006/relationships">
+  <p:cSld>
+    <p:bg>
+      <p:bgPr>
+        <a:solidFill>
+          <a:srgbClr val="101216"/>
+        </a:solidFill>
+        <a:effectLst/>
+      </p:bgPr>
+    </p:bg>
+    <p:spTree>
+      <p:nvGrpSpPr>
+        <p:cNvPr id="1" name=""/>
+        <p:cNvGrpSpPr/>
+        <p:nvPr/>
+      </p:nvGrpSpPr>
+      <p:grpSpPr/>
+      <p:sp>
+        <p:nvSpPr>
+          <p:cNvPr id="2" name="TextBox 1"/>
+          <p:cNvSpPr txBox="1"/>
+          <p:nvPr/>
+        </p:nvSpPr>
+        <p:spPr>
+          <a:xfrm>
+            <a:off x="457200" y="201168"/>
+            <a:ext cx="8229600" cy="274320"/>
+          </a:xfrm>
+          <a:prstGeom prst="rect">
+            <a:avLst/>
+          </a:prstGeom>
+          <a:noFill/>
+        </p:spPr>
+        <p:txBody>
+          <a:bodyPr wrap="square" anchor="t" lIns="18288" rIns="18288" tIns="18288" bIns="18288">
+            <a:spAutoFit/>
+          </a:bodyPr>
+          <a:lstStyle/>
+          <a:p>
+            <a:pPr algn="l">
+              <a:spcAft>
+                <a:spcPts val="600"/>
+              </a:spcAft>
+            </a:pPr>
+            <a:r>
+              <a:rPr sz="1200" b="1">
+                <a:solidFill>
+                  <a:srgbClr val="D9912E"/>
+                </a:solidFill>
+                <a:latin typeface="Segoe UI"/>
+              </a:rPr>
+              <a:t>17 · Приложение · Новые размеченные данные B/D</a:t>
             </a:r>
           </a:p>
         </p:txBody>
@@ -9151,786 +9701,6 @@
 </p:sld>
 </file>
 
-<file path=ppt/slides/slide17.xml><?xml version="1.0" encoding="utf-8"?>
-<p:sld xmlns:a="http://schemas.openxmlformats.org/drawingml/2006/main" xmlns:p="http://schemas.openxmlformats.org/presentationml/2006/main" xmlns:r="http://schemas.openxmlformats.org/officeDocument/2006/relationships">
-  <p:cSld>
-    <p:bg>
-      <p:bgPr>
-        <a:solidFill>
-          <a:srgbClr val="101216"/>
-        </a:solidFill>
-        <a:effectLst/>
-      </p:bgPr>
-    </p:bg>
-    <p:spTree>
-      <p:nvGrpSpPr>
-        <p:cNvPr id="1" name=""/>
-        <p:cNvGrpSpPr/>
-        <p:nvPr/>
-      </p:nvGrpSpPr>
-      <p:grpSpPr/>
-      <p:sp>
-        <p:nvSpPr>
-          <p:cNvPr id="2" name="TextBox 1"/>
-          <p:cNvSpPr txBox="1"/>
-          <p:nvPr/>
-        </p:nvSpPr>
-        <p:spPr>
-          <a:xfrm>
-            <a:off x="457200" y="201168"/>
-            <a:ext cx="8229600" cy="274320"/>
-          </a:xfrm>
-          <a:prstGeom prst="rect">
-            <a:avLst/>
-          </a:prstGeom>
-          <a:noFill/>
-        </p:spPr>
-        <p:txBody>
-          <a:bodyPr wrap="square" anchor="t" lIns="18288" rIns="18288" tIns="18288" bIns="18288">
-            <a:spAutoFit/>
-          </a:bodyPr>
-          <a:lstStyle/>
-          <a:p>
-            <a:pPr algn="l">
-              <a:spcAft>
-                <a:spcPts val="600"/>
-              </a:spcAft>
-            </a:pPr>
-            <a:r>
-              <a:rPr sz="1200" b="1">
-                <a:solidFill>
-                  <a:srgbClr val="D9912E"/>
-                </a:solidFill>
-                <a:latin typeface="Segoe UI"/>
-              </a:rPr>
-              <a:t>17 · Приложение · Детектор v2 и бейзлайны</a:t>
-            </a:r>
-          </a:p>
-        </p:txBody>
-      </p:sp>
-      <p:sp>
-        <p:nvSpPr>
-          <p:cNvPr id="3" name="TextBox 2"/>
-          <p:cNvSpPr txBox="1"/>
-          <p:nvPr/>
-        </p:nvSpPr>
-        <p:spPr>
-          <a:xfrm>
-            <a:off x="457200" y="457200"/>
-            <a:ext cx="11247120" cy="960120"/>
-          </a:xfrm>
-          <a:prstGeom prst="rect">
-            <a:avLst/>
-          </a:prstGeom>
-          <a:noFill/>
-        </p:spPr>
-        <p:txBody>
-          <a:bodyPr wrap="square" anchor="t" lIns="18288" rIns="18288" tIns="18288" bIns="18288">
-            <a:spAutoFit/>
-          </a:bodyPr>
-          <a:lstStyle/>
-          <a:p>
-            <a:pPr algn="l">
-              <a:spcAft>
-                <a:spcPts val="600"/>
-              </a:spcAft>
-            </a:pPr>
-            <a:r>
-              <a:rPr sz="2300" b="1">
-                <a:solidFill>
-                  <a:srgbClr val="EEEFF1"/>
-                </a:solidFill>
-                <a:latin typeface="Segoe UI"/>
-              </a:rPr>
-              <a:t>Дообучение на B + D: 13 вариантов с новыми данными + контрольный r0 — правило не прошёл ни один; U-Net MARIDA на test — F1 0.501</a:t>
-            </a:r>
-          </a:p>
-        </p:txBody>
-      </p:sp>
-      <p:sp>
-        <p:nvSpPr>
-          <p:cNvPr id="4" name="TextBox 3"/>
-          <p:cNvSpPr txBox="1"/>
-          <p:nvPr/>
-        </p:nvSpPr>
-        <p:spPr>
-          <a:xfrm>
-            <a:off x="457200" y="1600200"/>
-            <a:ext cx="5577840" cy="4572000"/>
-          </a:xfrm>
-          <a:prstGeom prst="rect">
-            <a:avLst/>
-          </a:prstGeom>
-          <a:noFill/>
-        </p:spPr>
-        <p:txBody>
-          <a:bodyPr wrap="square" anchor="t" lIns="18288" rIns="18288" tIns="18288" bIns="18288">
-            <a:spAutoFit/>
-          </a:bodyPr>
-          <a:lstStyle/>
-          <a:p>
-            <a:pPr algn="l">
-              <a:spcAft>
-                <a:spcPts val="1000"/>
-              </a:spcAft>
-            </a:pPr>
-            <a:r>
-              <a:rPr sz="1600" b="0">
-                <a:solidFill>
-                  <a:srgbClr val="EEEFF1"/>
-                </a:solidFill>
-                <a:latin typeface="Segoe UI"/>
-              </a:rPr>
-              <a:t>• Правило принятия записано до экспериментов: ΔF1 val ≥ 0.01 и не хуже на B и D; 3 seed; test не читался</a:t>
-            </a:r>
-          </a:p>
-          <a:p>
-            <a:pPr algn="l">
-              <a:spcAft>
-                <a:spcPts val="1000"/>
-              </a:spcAft>
-            </a:pPr>
-            <a:r>
-              <a:rPr sz="1600" b="0">
-                <a:solidFill>
-                  <a:srgbClr val="EEEFF1"/>
-                </a:solidFill>
-                <a:latin typeface="Segoe UI"/>
-              </a:rPr>
-              <a:t>• ΔF1 val от −0.057 до 0.002 — правило принятия (записано до экспериментов) не прошёл ни один из 13 вариантов с новыми данными (×3 seed) и контрольный r0 → остаётся weights/lgbm</a:t>
-            </a:r>
-          </a:p>
-          <a:p>
-            <a:pPr algn="l">
-              <a:spcAft>
-                <a:spcPts val="1000"/>
-              </a:spcAft>
-            </a:pPr>
-            <a:r>
-              <a:rPr sz="1600" b="0">
-                <a:solidFill>
-                  <a:srgbClr val="EEEFF1"/>
-                </a:solidFill>
-                <a:latin typeface="Segoe UI"/>
-              </a:rPr>
-              <a:t>• U-Net MARIDA (официальные веса): LightGBM лучше на 0.370 [0.215; 0.481], в 13 из 15 сцен; на снимках пар U-Net — 253 объектов «соль-перец», в полосах 0</a:t>
-            </a:r>
-          </a:p>
-        </p:txBody>
-      </p:sp>
-      <p:sp>
-        <p:nvSpPr>
-          <p:cNvPr id="5" name="TextBox 4"/>
-          <p:cNvSpPr txBox="1"/>
-          <p:nvPr/>
-        </p:nvSpPr>
-        <p:spPr>
-          <a:xfrm>
-            <a:off x="6400800" y="1691640"/>
-            <a:ext cx="5349240" cy="365760"/>
-          </a:xfrm>
-          <a:prstGeom prst="rect">
-            <a:avLst/>
-          </a:prstGeom>
-          <a:noFill/>
-        </p:spPr>
-        <p:txBody>
-          <a:bodyPr wrap="square" anchor="t" lIns="18288" rIns="18288" tIns="18288" bIns="18288">
-            <a:spAutoFit/>
-          </a:bodyPr>
-          <a:lstStyle/>
-          <a:p>
-            <a:pPr algn="l">
-              <a:spcAft>
-                <a:spcPts val="600"/>
-              </a:spcAft>
-            </a:pPr>
-            <a:r>
-              <a:rPr sz="1400" b="0">
-                <a:solidFill>
-                  <a:srgbClr val="9AA1AC"/>
-                </a:solidFill>
-                <a:latin typeface="Segoe UI"/>
-              </a:rPr>
-              <a:t>F1 Marine Debris, test MARIDA (15 сцен)</a:t>
-            </a:r>
-          </a:p>
-        </p:txBody>
-      </p:sp>
-      <p:sp>
-        <p:nvSpPr>
-          <p:cNvPr id="6" name="TextBox 5"/>
-          <p:cNvSpPr txBox="1"/>
-          <p:nvPr/>
-        </p:nvSpPr>
-        <p:spPr>
-          <a:xfrm>
-            <a:off x="6400800" y="2148840"/>
-            <a:ext cx="2155240" cy="384048"/>
-          </a:xfrm>
-          <a:prstGeom prst="rect">
-            <a:avLst/>
-          </a:prstGeom>
-          <a:noFill/>
-        </p:spPr>
-        <p:txBody>
-          <a:bodyPr wrap="square" anchor="ctr" lIns="18288" rIns="18288" tIns="18288" bIns="18288">
-            <a:spAutoFit/>
-          </a:bodyPr>
-          <a:lstStyle/>
-          <a:p>
-            <a:pPr algn="l">
-              <a:spcAft>
-                <a:spcPts val="600"/>
-              </a:spcAft>
-            </a:pPr>
-            <a:r>
-              <a:rPr sz="1300" b="0">
-                <a:solidFill>
-                  <a:srgbClr val="EEEFF1"/>
-                </a:solidFill>
-                <a:latin typeface="Segoe UI"/>
-              </a:rPr>
-              <a:t>LightGBM (основной)</a:t>
-            </a:r>
-          </a:p>
-        </p:txBody>
-      </p:sp>
-      <p:sp>
-        <p:nvSpPr>
-          <p:cNvPr id="7" name="Rectangle 6"/>
-          <p:cNvSpPr/>
-          <p:nvPr/>
-        </p:nvSpPr>
-        <p:spPr>
-          <a:xfrm>
-            <a:off x="8647480" y="2212848"/>
-            <a:ext cx="1985530" cy="274320"/>
-          </a:xfrm>
-          <a:prstGeom prst="rect">
-            <a:avLst/>
-          </a:prstGeom>
-          <a:solidFill>
-            <a:srgbClr val="D9912E"/>
-          </a:solidFill>
-          <a:ln>
-            <a:noFill/>
-          </a:ln>
-          <a:effectLst/>
-        </p:spPr>
-        <p:style>
-          <a:lnRef idx="1">
-            <a:schemeClr val="accent1"/>
-          </a:lnRef>
-          <a:fillRef idx="3">
-            <a:schemeClr val="accent1"/>
-          </a:fillRef>
-          <a:effectRef idx="2">
-            <a:schemeClr val="accent1"/>
-          </a:effectRef>
-          <a:fontRef idx="minor">
-            <a:schemeClr val="lt1"/>
-          </a:fontRef>
-        </p:style>
-        <p:txBody>
-          <a:bodyPr rtlCol="0" anchor="ctr"/>
-          <a:lstStyle/>
-          <a:p>
-            <a:pPr algn="ctr"/>
-          </a:p>
-        </p:txBody>
-      </p:sp>
-      <p:sp>
-        <p:nvSpPr>
-          <p:cNvPr id="8" name="TextBox 7"/>
-          <p:cNvSpPr txBox="1"/>
-          <p:nvPr/>
-        </p:nvSpPr>
-        <p:spPr>
-          <a:xfrm>
-            <a:off x="10706163" y="2148840"/>
-            <a:ext cx="822960" cy="384048"/>
-          </a:xfrm>
-          <a:prstGeom prst="rect">
-            <a:avLst/>
-          </a:prstGeom>
-          <a:noFill/>
-        </p:spPr>
-        <p:txBody>
-          <a:bodyPr wrap="square" anchor="ctr" lIns="18288" rIns="18288" tIns="18288" bIns="18288">
-            <a:spAutoFit/>
-          </a:bodyPr>
-          <a:lstStyle/>
-          <a:p>
-            <a:pPr algn="l">
-              <a:spcAft>
-                <a:spcPts val="600"/>
-              </a:spcAft>
-            </a:pPr>
-            <a:r>
-              <a:rPr sz="1400" b="1">
-                <a:solidFill>
-                  <a:srgbClr val="EEEFF1"/>
-                </a:solidFill>
-                <a:latin typeface="Segoe UI"/>
-              </a:rPr>
-              <a:t>0.871</a:t>
-            </a:r>
-          </a:p>
-        </p:txBody>
-      </p:sp>
-      <p:sp>
-        <p:nvSpPr>
-          <p:cNvPr id="9" name="TextBox 8"/>
-          <p:cNvSpPr txBox="1"/>
-          <p:nvPr/>
-        </p:nvSpPr>
-        <p:spPr>
-          <a:xfrm>
-            <a:off x="6400800" y="2651760"/>
-            <a:ext cx="2155240" cy="384048"/>
-          </a:xfrm>
-          <a:prstGeom prst="rect">
-            <a:avLst/>
-          </a:prstGeom>
-          <a:noFill/>
-        </p:spPr>
-        <p:txBody>
-          <a:bodyPr wrap="square" anchor="ctr" lIns="18288" rIns="18288" tIns="18288" bIns="18288">
-            <a:spAutoFit/>
-          </a:bodyPr>
-          <a:lstStyle/>
-          <a:p>
-            <a:pPr algn="l">
-              <a:spcAft>
-                <a:spcPts val="600"/>
-              </a:spcAft>
-            </a:pPr>
-            <a:r>
-              <a:rPr sz="1300" b="0">
-                <a:solidFill>
-                  <a:srgbClr val="EEEFF1"/>
-                </a:solidFill>
-                <a:latin typeface="Segoe UI"/>
-              </a:rPr>
-              <a:t>RandomForest, протокол MARIDA</a:t>
-            </a:r>
-          </a:p>
-        </p:txBody>
-      </p:sp>
-      <p:sp>
-        <p:nvSpPr>
-          <p:cNvPr id="10" name="Rectangle 9"/>
-          <p:cNvSpPr/>
-          <p:nvPr/>
-        </p:nvSpPr>
-        <p:spPr>
-          <a:xfrm>
-            <a:off x="8647480" y="2715768"/>
-            <a:ext cx="1757570" cy="274320"/>
-          </a:xfrm>
-          <a:prstGeom prst="rect">
-            <a:avLst/>
-          </a:prstGeom>
-          <a:solidFill>
-            <a:srgbClr val="5B6370"/>
-          </a:solidFill>
-          <a:ln>
-            <a:noFill/>
-          </a:ln>
-          <a:effectLst/>
-        </p:spPr>
-        <p:style>
-          <a:lnRef idx="1">
-            <a:schemeClr val="accent1"/>
-          </a:lnRef>
-          <a:fillRef idx="3">
-            <a:schemeClr val="accent1"/>
-          </a:fillRef>
-          <a:effectRef idx="2">
-            <a:schemeClr val="accent1"/>
-          </a:effectRef>
-          <a:fontRef idx="minor">
-            <a:schemeClr val="lt1"/>
-          </a:fontRef>
-        </p:style>
-        <p:txBody>
-          <a:bodyPr rtlCol="0" anchor="ctr"/>
-          <a:lstStyle/>
-          <a:p>
-            <a:pPr algn="ctr"/>
-          </a:p>
-        </p:txBody>
-      </p:sp>
-      <p:sp>
-        <p:nvSpPr>
-          <p:cNvPr id="11" name="TextBox 10"/>
-          <p:cNvSpPr txBox="1"/>
-          <p:nvPr/>
-        </p:nvSpPr>
-        <p:spPr>
-          <a:xfrm>
-            <a:off x="10478203" y="2651760"/>
-            <a:ext cx="822960" cy="384048"/>
-          </a:xfrm>
-          <a:prstGeom prst="rect">
-            <a:avLst/>
-          </a:prstGeom>
-          <a:noFill/>
-        </p:spPr>
-        <p:txBody>
-          <a:bodyPr wrap="square" anchor="ctr" lIns="18288" rIns="18288" tIns="18288" bIns="18288">
-            <a:spAutoFit/>
-          </a:bodyPr>
-          <a:lstStyle/>
-          <a:p>
-            <a:pPr algn="l">
-              <a:spcAft>
-                <a:spcPts val="600"/>
-              </a:spcAft>
-            </a:pPr>
-            <a:r>
-              <a:rPr sz="1400" b="1">
-                <a:solidFill>
-                  <a:srgbClr val="EEEFF1"/>
-                </a:solidFill>
-                <a:latin typeface="Segoe UI"/>
-              </a:rPr>
-              <a:t>0.771</a:t>
-            </a:r>
-          </a:p>
-        </p:txBody>
-      </p:sp>
-      <p:sp>
-        <p:nvSpPr>
-          <p:cNvPr id="12" name="TextBox 11"/>
-          <p:cNvSpPr txBox="1"/>
-          <p:nvPr/>
-        </p:nvSpPr>
-        <p:spPr>
-          <a:xfrm>
-            <a:off x="6400800" y="3154680"/>
-            <a:ext cx="2155240" cy="384048"/>
-          </a:xfrm>
-          <a:prstGeom prst="rect">
-            <a:avLst/>
-          </a:prstGeom>
-          <a:noFill/>
-        </p:spPr>
-        <p:txBody>
-          <a:bodyPr wrap="square" anchor="ctr" lIns="18288" rIns="18288" tIns="18288" bIns="18288">
-            <a:spAutoFit/>
-          </a:bodyPr>
-          <a:lstStyle/>
-          <a:p>
-            <a:pPr algn="l">
-              <a:spcAft>
-                <a:spcPts val="600"/>
-              </a:spcAft>
-            </a:pPr>
-            <a:r>
-              <a:rPr sz="1300" b="0">
-                <a:solidFill>
-                  <a:srgbClr val="EEEFF1"/>
-                </a:solidFill>
-                <a:latin typeface="Segoe UI"/>
-              </a:rPr>
-              <a:t>U-Net MARIDA, веса авторов</a:t>
-            </a:r>
-          </a:p>
-        </p:txBody>
-      </p:sp>
-      <p:sp>
-        <p:nvSpPr>
-          <p:cNvPr id="13" name="Rectangle 12"/>
-          <p:cNvSpPr/>
-          <p:nvPr/>
-        </p:nvSpPr>
-        <p:spPr>
-          <a:xfrm>
-            <a:off x="8647480" y="3218688"/>
-            <a:ext cx="1142079" cy="274320"/>
-          </a:xfrm>
-          <a:prstGeom prst="rect">
-            <a:avLst/>
-          </a:prstGeom>
-          <a:solidFill>
-            <a:srgbClr val="5B6370"/>
-          </a:solidFill>
-          <a:ln>
-            <a:noFill/>
-          </a:ln>
-          <a:effectLst/>
-        </p:spPr>
-        <p:style>
-          <a:lnRef idx="1">
-            <a:schemeClr val="accent1"/>
-          </a:lnRef>
-          <a:fillRef idx="3">
-            <a:schemeClr val="accent1"/>
-          </a:fillRef>
-          <a:effectRef idx="2">
-            <a:schemeClr val="accent1"/>
-          </a:effectRef>
-          <a:fontRef idx="minor">
-            <a:schemeClr val="lt1"/>
-          </a:fontRef>
-        </p:style>
-        <p:txBody>
-          <a:bodyPr rtlCol="0" anchor="ctr"/>
-          <a:lstStyle/>
-          <a:p>
-            <a:pPr algn="ctr"/>
-          </a:p>
-        </p:txBody>
-      </p:sp>
-      <p:sp>
-        <p:nvSpPr>
-          <p:cNvPr id="14" name="TextBox 13"/>
-          <p:cNvSpPr txBox="1"/>
-          <p:nvPr/>
-        </p:nvSpPr>
-        <p:spPr>
-          <a:xfrm>
-            <a:off x="9862711" y="3154680"/>
-            <a:ext cx="822960" cy="384048"/>
-          </a:xfrm>
-          <a:prstGeom prst="rect">
-            <a:avLst/>
-          </a:prstGeom>
-          <a:noFill/>
-        </p:spPr>
-        <p:txBody>
-          <a:bodyPr wrap="square" anchor="ctr" lIns="18288" rIns="18288" tIns="18288" bIns="18288">
-            <a:spAutoFit/>
-          </a:bodyPr>
-          <a:lstStyle/>
-          <a:p>
-            <a:pPr algn="l">
-              <a:spcAft>
-                <a:spcPts val="600"/>
-              </a:spcAft>
-            </a:pPr>
-            <a:r>
-              <a:rPr sz="1400" b="1">
-                <a:solidFill>
-                  <a:srgbClr val="EEEFF1"/>
-                </a:solidFill>
-                <a:latin typeface="Segoe UI"/>
-              </a:rPr>
-              <a:t>0.501</a:t>
-            </a:r>
-          </a:p>
-        </p:txBody>
-      </p:sp>
-      <p:sp>
-        <p:nvSpPr>
-          <p:cNvPr id="15" name="TextBox 14"/>
-          <p:cNvSpPr txBox="1"/>
-          <p:nvPr/>
-        </p:nvSpPr>
-        <p:spPr>
-          <a:xfrm>
-            <a:off x="6400800" y="3657600"/>
-            <a:ext cx="2155240" cy="384048"/>
-          </a:xfrm>
-          <a:prstGeom prst="rect">
-            <a:avLst/>
-          </a:prstGeom>
-          <a:noFill/>
-        </p:spPr>
-        <p:txBody>
-          <a:bodyPr wrap="square" anchor="ctr" lIns="18288" rIns="18288" tIns="18288" bIns="18288">
-            <a:spAutoFit/>
-          </a:bodyPr>
-          <a:lstStyle/>
-          <a:p>
-            <a:pPr algn="l">
-              <a:spcAft>
-                <a:spcPts val="600"/>
-              </a:spcAft>
-            </a:pPr>
-            <a:r>
-              <a:rPr sz="1300" b="0">
-                <a:solidFill>
-                  <a:srgbClr val="EEEFF1"/>
-                </a:solidFill>
-                <a:latin typeface="Segoe UI"/>
-              </a:rPr>
-              <a:t>окно FDI × NDVI</a:t>
-            </a:r>
-          </a:p>
-        </p:txBody>
-      </p:sp>
-      <p:sp>
-        <p:nvSpPr>
-          <p:cNvPr id="16" name="Rectangle 15"/>
-          <p:cNvSpPr/>
-          <p:nvPr/>
-        </p:nvSpPr>
-        <p:spPr>
-          <a:xfrm>
-            <a:off x="8647480" y="3721608"/>
-            <a:ext cx="95743" cy="274320"/>
-          </a:xfrm>
-          <a:prstGeom prst="rect">
-            <a:avLst/>
-          </a:prstGeom>
-          <a:solidFill>
-            <a:srgbClr val="5B6370"/>
-          </a:solidFill>
-          <a:ln>
-            <a:noFill/>
-          </a:ln>
-          <a:effectLst/>
-        </p:spPr>
-        <p:style>
-          <a:lnRef idx="1">
-            <a:schemeClr val="accent1"/>
-          </a:lnRef>
-          <a:fillRef idx="3">
-            <a:schemeClr val="accent1"/>
-          </a:fillRef>
-          <a:effectRef idx="2">
-            <a:schemeClr val="accent1"/>
-          </a:effectRef>
-          <a:fontRef idx="minor">
-            <a:schemeClr val="lt1"/>
-          </a:fontRef>
-        </p:style>
-        <p:txBody>
-          <a:bodyPr rtlCol="0" anchor="ctr"/>
-          <a:lstStyle/>
-          <a:p>
-            <a:pPr algn="ctr"/>
-          </a:p>
-        </p:txBody>
-      </p:sp>
-      <p:sp>
-        <p:nvSpPr>
-          <p:cNvPr id="17" name="TextBox 16"/>
-          <p:cNvSpPr txBox="1"/>
-          <p:nvPr/>
-        </p:nvSpPr>
-        <p:spPr>
-          <a:xfrm>
-            <a:off x="8816375" y="3657600"/>
-            <a:ext cx="822960" cy="384048"/>
-          </a:xfrm>
-          <a:prstGeom prst="rect">
-            <a:avLst/>
-          </a:prstGeom>
-          <a:noFill/>
-        </p:spPr>
-        <p:txBody>
-          <a:bodyPr wrap="square" anchor="ctr" lIns="18288" rIns="18288" tIns="18288" bIns="18288">
-            <a:spAutoFit/>
-          </a:bodyPr>
-          <a:lstStyle/>
-          <a:p>
-            <a:pPr algn="l">
-              <a:spcAft>
-                <a:spcPts val="600"/>
-              </a:spcAft>
-            </a:pPr>
-            <a:r>
-              <a:rPr sz="1400" b="1">
-                <a:solidFill>
-                  <a:srgbClr val="EEEFF1"/>
-                </a:solidFill>
-                <a:latin typeface="Segoe UI"/>
-              </a:rPr>
-              <a:t>0.042</a:t>
-            </a:r>
-          </a:p>
-        </p:txBody>
-      </p:sp>
-      <p:sp>
-        <p:nvSpPr>
-          <p:cNvPr id="18" name="TextBox 17"/>
-          <p:cNvSpPr txBox="1"/>
-          <p:nvPr/>
-        </p:nvSpPr>
-        <p:spPr>
-          <a:xfrm>
-            <a:off x="457200" y="6355080"/>
-            <a:ext cx="10515600" cy="320040"/>
-          </a:xfrm>
-          <a:prstGeom prst="rect">
-            <a:avLst/>
-          </a:prstGeom>
-          <a:noFill/>
-        </p:spPr>
-        <p:txBody>
-          <a:bodyPr wrap="square" anchor="t" lIns="18288" rIns="18288" tIns="18288" bIns="18288">
-            <a:spAutoFit/>
-          </a:bodyPr>
-          <a:lstStyle/>
-          <a:p>
-            <a:pPr algn="l">
-              <a:spcAft>
-                <a:spcPts val="600"/>
-              </a:spcAft>
-            </a:pPr>
-            <a:r>
-              <a:rPr sz="1000" b="0">
-                <a:solidFill>
-                  <a:srgbClr val="9AA1AC"/>
-                </a:solidFill>
-                <a:latin typeface="Segoe UI"/>
-              </a:rPr>
-              <a:t>Источник: reports/detector_v2/experiments.md, decision.json, unet_test.json; configs/detector_v2_eval.yaml</a:t>
-            </a:r>
-          </a:p>
-        </p:txBody>
-      </p:sp>
-      <p:sp>
-        <p:nvSpPr>
-          <p:cNvPr id="19" name="TextBox 18"/>
-          <p:cNvSpPr txBox="1"/>
-          <p:nvPr/>
-        </p:nvSpPr>
-        <p:spPr>
-          <a:xfrm>
-            <a:off x="11155680" y="6355080"/>
-            <a:ext cx="640080" cy="320040"/>
-          </a:xfrm>
-          <a:prstGeom prst="rect">
-            <a:avLst/>
-          </a:prstGeom>
-          <a:noFill/>
-        </p:spPr>
-        <p:txBody>
-          <a:bodyPr wrap="square" anchor="t" lIns="18288" rIns="18288" tIns="18288" bIns="18288">
-            <a:spAutoFit/>
-          </a:bodyPr>
-          <a:lstStyle/>
-          <a:p>
-            <a:pPr algn="r">
-              <a:spcAft>
-                <a:spcPts val="600"/>
-              </a:spcAft>
-            </a:pPr>
-            <a:r>
-              <a:rPr sz="1000" b="0">
-                <a:solidFill>
-                  <a:srgbClr val="9AA1AC"/>
-                </a:solidFill>
-                <a:latin typeface="Segoe UI"/>
-              </a:rPr>
-              <a:t>прил.</a:t>
-            </a:r>
-          </a:p>
-        </p:txBody>
-      </p:sp>
-    </p:spTree>
-  </p:cSld>
-  <p:clrMapOvr>
-    <a:masterClrMapping/>
-  </p:clrMapOvr>
-</p:sld>
-</file>
-
 <file path=ppt/slides/slide18.xml><?xml version="1.0" encoding="utf-8"?>
 <p:sld xmlns:a="http://schemas.openxmlformats.org/drawingml/2006/main" xmlns:p="http://schemas.openxmlformats.org/presentationml/2006/main" xmlns:r="http://schemas.openxmlformats.org/officeDocument/2006/relationships">
   <p:cSld>
@@ -9983,7 +9753,7 @@
                 </a:solidFill>
                 <a:latin typeface="Segoe UI"/>
               </a:rPr>
-              <a:t>18 · Приложение · Количество: поле и снимок</a:t>
+              <a:t>18 · Приложение · Детектор v2 и бейзлайны</a:t>
             </a:r>
           </a:p>
         </p:txBody>
@@ -10022,7 +9792,7 @@
                 </a:solidFill>
                 <a:latin typeface="Segoe UI"/>
               </a:rPr>
-              <a:t>Количество: пар по месту и времени 66, видимый сигнал 0, калибровочных пар 0 — шт./км² только по полю</a:t>
+              <a:t>Дообучение на B + D: 13 вариантов с новыми данными + контрольный r0 — правило не прошёл ни один; U-Net MARIDA на test — F1 0.501</a:t>
             </a:r>
           </a:p>
         </p:txBody>
@@ -10055,13 +9825,13 @@
               </a:spcAft>
             </a:pPr>
             <a:r>
-              <a:rPr sz="1500" b="0">
+              <a:rPr sz="1600" b="0">
                 <a:solidFill>
                   <a:srgbClr val="EEEFF1"/>
                 </a:solidFill>
                 <a:latin typeface="Segoe UI"/>
               </a:rPr>
-              <a:t>• Поле (измерение): C = N/A, интервал Пуассона; S2 ΣN/ΣA = 697 / 12.94 км² = 53.9 [49.9–58.0] шт./км²; на карте — медиана профиля (отложенный test)</a:t>
+              <a:t>• Правило принятия записано до экспериментов: ΔF1 val ≥ 0.01 и не хуже на B и D; 3 seed; test не читался</a:t>
             </a:r>
           </a:p>
           <a:p>
@@ -10071,13 +9841,13 @@
               </a:spcAft>
             </a:pPr>
             <a:r>
-              <a:rPr sz="1500" b="0">
+              <a:rPr sz="1600" b="0">
                 <a:solidFill>
                   <a:srgbClr val="EEEFF1"/>
                 </a:solidFill>
                 <a:latin typeface="Segoe UI"/>
               </a:rPr>
-              <a:t>• Снимок: площадь маски и доля покрытия подозрительного материала (LWD, м²/км²); медиана на 64 живых сценах 3.2; это не мусор и не шт./км²</a:t>
+              <a:t>• ΔF1 val от −0.057 до 0.002 — правило принятия (записано до экспериментов) не прошёл ни один из 13 вариантов с новыми данными (×3 seed) и контрольный r0 → остаётся weights/lgbm</a:t>
             </a:r>
           </a:p>
           <a:p>
@@ -10087,115 +9857,547 @@
               </a:spcAft>
             </a:pPr>
             <a:r>
-              <a:rPr sz="1500" b="0">
+              <a:rPr sz="1600" b="0">
                 <a:solidFill>
                   <a:srgbClr val="EEEFF1"/>
                 </a:solidFill>
                 <a:latin typeface="Segoe UI"/>
               </a:rPr>
-              <a:t>• Калибровка ln C = ln k + b · ln S требует калибровочных пар (по месту и времени и с сигналом) — их 0; нужно 4–12 для k в ×/÷2, для связи r = 0.5 — 30</a:t>
-            </a:r>
-          </a:p>
-          <a:p>
-            <a:pPr algn="l">
-              <a:spcAft>
-                <a:spcPts val="1000"/>
-              </a:spcAft>
-            </a:pPr>
-            <a:r>
-              <a:rPr sz="1500" b="0">
+              <a:t>• U-Net MARIDA (официальные веса): LightGBM лучше на 0.370 [0.215; 0.481], в 13 из 15 сцен; на снимках пар U-Net — 253 объектов «соль-перец», в полосах 0</a:t>
+            </a:r>
+          </a:p>
+        </p:txBody>
+      </p:sp>
+      <p:sp>
+        <p:nvSpPr>
+          <p:cNvPr id="5" name="TextBox 4"/>
+          <p:cNvSpPr txBox="1"/>
+          <p:nvPr/>
+        </p:nvSpPr>
+        <p:spPr>
+          <a:xfrm>
+            <a:off x="6400800" y="1691640"/>
+            <a:ext cx="5349240" cy="365760"/>
+          </a:xfrm>
+          <a:prstGeom prst="rect">
+            <a:avLst/>
+          </a:prstGeom>
+          <a:noFill/>
+        </p:spPr>
+        <p:txBody>
+          <a:bodyPr wrap="square" anchor="t" lIns="18288" rIns="18288" tIns="18288" bIns="18288">
+            <a:spAutoFit/>
+          </a:bodyPr>
+          <a:lstStyle/>
+          <a:p>
+            <a:pPr algn="l">
+              <a:spcAft>
+                <a:spcPts val="600"/>
+              </a:spcAft>
+            </a:pPr>
+            <a:r>
+              <a:rPr sz="1400" b="0">
+                <a:solidFill>
+                  <a:srgbClr val="9AA1AC"/>
+                </a:solidFill>
+                <a:latin typeface="Segoe UI"/>
+              </a:rPr>
+              <a:t>F1 Marine Debris, test MARIDA (15 сцен)</a:t>
+            </a:r>
+          </a:p>
+        </p:txBody>
+      </p:sp>
+      <p:sp>
+        <p:nvSpPr>
+          <p:cNvPr id="6" name="TextBox 5"/>
+          <p:cNvSpPr txBox="1"/>
+          <p:nvPr/>
+        </p:nvSpPr>
+        <p:spPr>
+          <a:xfrm>
+            <a:off x="6400800" y="2148840"/>
+            <a:ext cx="2155240" cy="384048"/>
+          </a:xfrm>
+          <a:prstGeom prst="rect">
+            <a:avLst/>
+          </a:prstGeom>
+          <a:noFill/>
+        </p:spPr>
+        <p:txBody>
+          <a:bodyPr wrap="square" anchor="ctr" lIns="18288" rIns="18288" tIns="18288" bIns="18288">
+            <a:spAutoFit/>
+          </a:bodyPr>
+          <a:lstStyle/>
+          <a:p>
+            <a:pPr algn="l">
+              <a:spcAft>
+                <a:spcPts val="600"/>
+              </a:spcAft>
+            </a:pPr>
+            <a:r>
+              <a:rPr sz="1300" b="0">
                 <a:solidFill>
                   <a:srgbClr val="EEEFF1"/>
                 </a:solidFill>
                 <a:latin typeface="Segoe UI"/>
               </a:rPr>
-              <a:t>• Штуки по снимку не показываем: перевод площади маски в штуки не показываем — нет калибровочных пар «снимок → шт./км²»; перевод «площадь / размер предмета» дал бы разброс в 3125 раз</a:t>
-            </a:r>
-          </a:p>
-          <a:p>
-            <a:pPr algn="l">
-              <a:spcAft>
-                <a:spcPts val="1000"/>
-              </a:spcAft>
-            </a:pPr>
-            <a:r>
-              <a:rPr sz="1500" b="0">
+              <a:t>LightGBM (основной)</a:t>
+            </a:r>
+          </a:p>
+        </p:txBody>
+      </p:sp>
+      <p:sp>
+        <p:nvSpPr>
+          <p:cNvPr id="7" name="Rectangle 6"/>
+          <p:cNvSpPr/>
+          <p:nvPr/>
+        </p:nvSpPr>
+        <p:spPr>
+          <a:xfrm>
+            <a:off x="8647480" y="2212848"/>
+            <a:ext cx="1985530" cy="274320"/>
+          </a:xfrm>
+          <a:prstGeom prst="rect">
+            <a:avLst/>
+          </a:prstGeom>
+          <a:solidFill>
+            <a:srgbClr val="D9912E"/>
+          </a:solidFill>
+          <a:ln>
+            <a:noFill/>
+          </a:ln>
+          <a:effectLst/>
+        </p:spPr>
+        <p:style>
+          <a:lnRef idx="1">
+            <a:schemeClr val="accent1"/>
+          </a:lnRef>
+          <a:fillRef idx="3">
+            <a:schemeClr val="accent1"/>
+          </a:fillRef>
+          <a:effectRef idx="2">
+            <a:schemeClr val="accent1"/>
+          </a:effectRef>
+          <a:fontRef idx="minor">
+            <a:schemeClr val="lt1"/>
+          </a:fontRef>
+        </p:style>
+        <p:txBody>
+          <a:bodyPr rtlCol="0" anchor="ctr"/>
+          <a:lstStyle/>
+          <a:p>
+            <a:pPr algn="ctr"/>
+          </a:p>
+        </p:txBody>
+      </p:sp>
+      <p:sp>
+        <p:nvSpPr>
+          <p:cNvPr id="8" name="TextBox 7"/>
+          <p:cNvSpPr txBox="1"/>
+          <p:nvPr/>
+        </p:nvSpPr>
+        <p:spPr>
+          <a:xfrm>
+            <a:off x="10706163" y="2148840"/>
+            <a:ext cx="822960" cy="384048"/>
+          </a:xfrm>
+          <a:prstGeom prst="rect">
+            <a:avLst/>
+          </a:prstGeom>
+          <a:noFill/>
+        </p:spPr>
+        <p:txBody>
+          <a:bodyPr wrap="square" anchor="ctr" lIns="18288" rIns="18288" tIns="18288" bIns="18288">
+            <a:spAutoFit/>
+          </a:bodyPr>
+          <a:lstStyle/>
+          <a:p>
+            <a:pPr algn="l">
+              <a:spcAft>
+                <a:spcPts val="600"/>
+              </a:spcAft>
+            </a:pPr>
+            <a:r>
+              <a:rPr sz="1400" b="1">
                 <a:solidFill>
                   <a:srgbClr val="EEEFF1"/>
                 </a:solidFill>
                 <a:latin typeface="Segoe UI"/>
               </a:rPr>
-              <a:t>• Аналогия: пальмы на гектар по Sentinel-2 с опорой на подсчёт по снимкам высокого разрешения (arXiv 2105.11207): MAE ±7,3 пальмы/га. Для мусора — мусор дрейфует (часы между снимком и полем уже сдвигают поле), разнороден по размеру и материалу и занимает доли процента пикселя; поэтому калибровка по ячейкам требует независимой проверки — у нас она дала отрицательный результат: общих дат поле × спутник 0, климатологии ρ = 0.18 на 123 ячейках</a:t>
-            </a:r>
-          </a:p>
-        </p:txBody>
-      </p:sp>
-      <p:pic>
-        <p:nvPicPr>
-          <p:cNvPr id="5" name="Picture 4" descr="10_units_ladder.jpg"/>
-          <p:cNvPicPr>
-            <a:picLocks noChangeAspect="1"/>
-          </p:cNvPicPr>
-          <p:nvPr/>
-        </p:nvPicPr>
-        <p:blipFill>
-          <a:blip r:embed="rId2"/>
-          <a:stretch>
-            <a:fillRect/>
-          </a:stretch>
-        </p:blipFill>
-        <p:spPr>
-          <a:xfrm>
-            <a:off x="6400800" y="1645920"/>
-            <a:ext cx="5349240" cy="1803686"/>
-          </a:xfrm>
-          <a:prstGeom prst="rect">
-            <a:avLst/>
-          </a:prstGeom>
-        </p:spPr>
-      </p:pic>
-      <p:sp>
-        <p:nvSpPr>
-          <p:cNvPr id="6" name="TextBox 5"/>
-          <p:cNvSpPr txBox="1"/>
-          <p:nvPr/>
-        </p:nvSpPr>
-        <p:spPr>
-          <a:xfrm>
-            <a:off x="6400800" y="3495326"/>
-            <a:ext cx="5349240" cy="548640"/>
-          </a:xfrm>
-          <a:prstGeom prst="rect">
-            <a:avLst/>
-          </a:prstGeom>
-          <a:noFill/>
-        </p:spPr>
-        <p:txBody>
-          <a:bodyPr wrap="square" anchor="t" lIns="18288" rIns="18288" tIns="18288" bIns="18288">
-            <a:spAutoFit/>
-          </a:bodyPr>
-          <a:lstStyle/>
-          <a:p>
-            <a:pPr algn="l">
-              <a:spcAft>
-                <a:spcPts val="600"/>
-              </a:spcAft>
-            </a:pPr>
-            <a:r>
-              <a:rPr sz="1200" b="0">
-                <a:solidFill>
-                  <a:srgbClr val="9AA1AC"/>
-                </a:solidFill>
-                <a:latin typeface="Segoe UI"/>
-              </a:rPr>
-              <a:t>Лестница единиц: предмет на кадре → шт./м² кадра → шт./км² маршрута → спутниковая зона; у каждой ступени своя метрика</a:t>
-            </a:r>
-          </a:p>
-        </p:txBody>
-      </p:sp>
-      <p:sp>
-        <p:nvSpPr>
-          <p:cNvPr id="7" name="TextBox 6"/>
+              <a:t>0.871</a:t>
+            </a:r>
+          </a:p>
+        </p:txBody>
+      </p:sp>
+      <p:sp>
+        <p:nvSpPr>
+          <p:cNvPr id="9" name="TextBox 8"/>
+          <p:cNvSpPr txBox="1"/>
+          <p:nvPr/>
+        </p:nvSpPr>
+        <p:spPr>
+          <a:xfrm>
+            <a:off x="6400800" y="2651760"/>
+            <a:ext cx="2155240" cy="384048"/>
+          </a:xfrm>
+          <a:prstGeom prst="rect">
+            <a:avLst/>
+          </a:prstGeom>
+          <a:noFill/>
+        </p:spPr>
+        <p:txBody>
+          <a:bodyPr wrap="square" anchor="ctr" lIns="18288" rIns="18288" tIns="18288" bIns="18288">
+            <a:spAutoFit/>
+          </a:bodyPr>
+          <a:lstStyle/>
+          <a:p>
+            <a:pPr algn="l">
+              <a:spcAft>
+                <a:spcPts val="600"/>
+              </a:spcAft>
+            </a:pPr>
+            <a:r>
+              <a:rPr sz="1300" b="0">
+                <a:solidFill>
+                  <a:srgbClr val="EEEFF1"/>
+                </a:solidFill>
+                <a:latin typeface="Segoe UI"/>
+              </a:rPr>
+              <a:t>RandomForest, протокол MARIDA</a:t>
+            </a:r>
+          </a:p>
+        </p:txBody>
+      </p:sp>
+      <p:sp>
+        <p:nvSpPr>
+          <p:cNvPr id="10" name="Rectangle 9"/>
+          <p:cNvSpPr/>
+          <p:nvPr/>
+        </p:nvSpPr>
+        <p:spPr>
+          <a:xfrm>
+            <a:off x="8647480" y="2715768"/>
+            <a:ext cx="1757570" cy="274320"/>
+          </a:xfrm>
+          <a:prstGeom prst="rect">
+            <a:avLst/>
+          </a:prstGeom>
+          <a:solidFill>
+            <a:srgbClr val="5B6370"/>
+          </a:solidFill>
+          <a:ln>
+            <a:noFill/>
+          </a:ln>
+          <a:effectLst/>
+        </p:spPr>
+        <p:style>
+          <a:lnRef idx="1">
+            <a:schemeClr val="accent1"/>
+          </a:lnRef>
+          <a:fillRef idx="3">
+            <a:schemeClr val="accent1"/>
+          </a:fillRef>
+          <a:effectRef idx="2">
+            <a:schemeClr val="accent1"/>
+          </a:effectRef>
+          <a:fontRef idx="minor">
+            <a:schemeClr val="lt1"/>
+          </a:fontRef>
+        </p:style>
+        <p:txBody>
+          <a:bodyPr rtlCol="0" anchor="ctr"/>
+          <a:lstStyle/>
+          <a:p>
+            <a:pPr algn="ctr"/>
+          </a:p>
+        </p:txBody>
+      </p:sp>
+      <p:sp>
+        <p:nvSpPr>
+          <p:cNvPr id="11" name="TextBox 10"/>
+          <p:cNvSpPr txBox="1"/>
+          <p:nvPr/>
+        </p:nvSpPr>
+        <p:spPr>
+          <a:xfrm>
+            <a:off x="10478203" y="2651760"/>
+            <a:ext cx="822960" cy="384048"/>
+          </a:xfrm>
+          <a:prstGeom prst="rect">
+            <a:avLst/>
+          </a:prstGeom>
+          <a:noFill/>
+        </p:spPr>
+        <p:txBody>
+          <a:bodyPr wrap="square" anchor="ctr" lIns="18288" rIns="18288" tIns="18288" bIns="18288">
+            <a:spAutoFit/>
+          </a:bodyPr>
+          <a:lstStyle/>
+          <a:p>
+            <a:pPr algn="l">
+              <a:spcAft>
+                <a:spcPts val="600"/>
+              </a:spcAft>
+            </a:pPr>
+            <a:r>
+              <a:rPr sz="1400" b="1">
+                <a:solidFill>
+                  <a:srgbClr val="EEEFF1"/>
+                </a:solidFill>
+                <a:latin typeface="Segoe UI"/>
+              </a:rPr>
+              <a:t>0.771</a:t>
+            </a:r>
+          </a:p>
+        </p:txBody>
+      </p:sp>
+      <p:sp>
+        <p:nvSpPr>
+          <p:cNvPr id="12" name="TextBox 11"/>
+          <p:cNvSpPr txBox="1"/>
+          <p:nvPr/>
+        </p:nvSpPr>
+        <p:spPr>
+          <a:xfrm>
+            <a:off x="6400800" y="3154680"/>
+            <a:ext cx="2155240" cy="384048"/>
+          </a:xfrm>
+          <a:prstGeom prst="rect">
+            <a:avLst/>
+          </a:prstGeom>
+          <a:noFill/>
+        </p:spPr>
+        <p:txBody>
+          <a:bodyPr wrap="square" anchor="ctr" lIns="18288" rIns="18288" tIns="18288" bIns="18288">
+            <a:spAutoFit/>
+          </a:bodyPr>
+          <a:lstStyle/>
+          <a:p>
+            <a:pPr algn="l">
+              <a:spcAft>
+                <a:spcPts val="600"/>
+              </a:spcAft>
+            </a:pPr>
+            <a:r>
+              <a:rPr sz="1300" b="0">
+                <a:solidFill>
+                  <a:srgbClr val="EEEFF1"/>
+                </a:solidFill>
+                <a:latin typeface="Segoe UI"/>
+              </a:rPr>
+              <a:t>U-Net MARIDA, веса авторов</a:t>
+            </a:r>
+          </a:p>
+        </p:txBody>
+      </p:sp>
+      <p:sp>
+        <p:nvSpPr>
+          <p:cNvPr id="13" name="Rectangle 12"/>
+          <p:cNvSpPr/>
+          <p:nvPr/>
+        </p:nvSpPr>
+        <p:spPr>
+          <a:xfrm>
+            <a:off x="8647480" y="3218688"/>
+            <a:ext cx="1142079" cy="274320"/>
+          </a:xfrm>
+          <a:prstGeom prst="rect">
+            <a:avLst/>
+          </a:prstGeom>
+          <a:solidFill>
+            <a:srgbClr val="5B6370"/>
+          </a:solidFill>
+          <a:ln>
+            <a:noFill/>
+          </a:ln>
+          <a:effectLst/>
+        </p:spPr>
+        <p:style>
+          <a:lnRef idx="1">
+            <a:schemeClr val="accent1"/>
+          </a:lnRef>
+          <a:fillRef idx="3">
+            <a:schemeClr val="accent1"/>
+          </a:fillRef>
+          <a:effectRef idx="2">
+            <a:schemeClr val="accent1"/>
+          </a:effectRef>
+          <a:fontRef idx="minor">
+            <a:schemeClr val="lt1"/>
+          </a:fontRef>
+        </p:style>
+        <p:txBody>
+          <a:bodyPr rtlCol="0" anchor="ctr"/>
+          <a:lstStyle/>
+          <a:p>
+            <a:pPr algn="ctr"/>
+          </a:p>
+        </p:txBody>
+      </p:sp>
+      <p:sp>
+        <p:nvSpPr>
+          <p:cNvPr id="14" name="TextBox 13"/>
+          <p:cNvSpPr txBox="1"/>
+          <p:nvPr/>
+        </p:nvSpPr>
+        <p:spPr>
+          <a:xfrm>
+            <a:off x="9862711" y="3154680"/>
+            <a:ext cx="822960" cy="384048"/>
+          </a:xfrm>
+          <a:prstGeom prst="rect">
+            <a:avLst/>
+          </a:prstGeom>
+          <a:noFill/>
+        </p:spPr>
+        <p:txBody>
+          <a:bodyPr wrap="square" anchor="ctr" lIns="18288" rIns="18288" tIns="18288" bIns="18288">
+            <a:spAutoFit/>
+          </a:bodyPr>
+          <a:lstStyle/>
+          <a:p>
+            <a:pPr algn="l">
+              <a:spcAft>
+                <a:spcPts val="600"/>
+              </a:spcAft>
+            </a:pPr>
+            <a:r>
+              <a:rPr sz="1400" b="1">
+                <a:solidFill>
+                  <a:srgbClr val="EEEFF1"/>
+                </a:solidFill>
+                <a:latin typeface="Segoe UI"/>
+              </a:rPr>
+              <a:t>0.501</a:t>
+            </a:r>
+          </a:p>
+        </p:txBody>
+      </p:sp>
+      <p:sp>
+        <p:nvSpPr>
+          <p:cNvPr id="15" name="TextBox 14"/>
+          <p:cNvSpPr txBox="1"/>
+          <p:nvPr/>
+        </p:nvSpPr>
+        <p:spPr>
+          <a:xfrm>
+            <a:off x="6400800" y="3657600"/>
+            <a:ext cx="2155240" cy="384048"/>
+          </a:xfrm>
+          <a:prstGeom prst="rect">
+            <a:avLst/>
+          </a:prstGeom>
+          <a:noFill/>
+        </p:spPr>
+        <p:txBody>
+          <a:bodyPr wrap="square" anchor="ctr" lIns="18288" rIns="18288" tIns="18288" bIns="18288">
+            <a:spAutoFit/>
+          </a:bodyPr>
+          <a:lstStyle/>
+          <a:p>
+            <a:pPr algn="l">
+              <a:spcAft>
+                <a:spcPts val="600"/>
+              </a:spcAft>
+            </a:pPr>
+            <a:r>
+              <a:rPr sz="1300" b="0">
+                <a:solidFill>
+                  <a:srgbClr val="EEEFF1"/>
+                </a:solidFill>
+                <a:latin typeface="Segoe UI"/>
+              </a:rPr>
+              <a:t>окно FDI × NDVI</a:t>
+            </a:r>
+          </a:p>
+        </p:txBody>
+      </p:sp>
+      <p:sp>
+        <p:nvSpPr>
+          <p:cNvPr id="16" name="Rectangle 15"/>
+          <p:cNvSpPr/>
+          <p:nvPr/>
+        </p:nvSpPr>
+        <p:spPr>
+          <a:xfrm>
+            <a:off x="8647480" y="3721608"/>
+            <a:ext cx="95743" cy="274320"/>
+          </a:xfrm>
+          <a:prstGeom prst="rect">
+            <a:avLst/>
+          </a:prstGeom>
+          <a:solidFill>
+            <a:srgbClr val="5B6370"/>
+          </a:solidFill>
+          <a:ln>
+            <a:noFill/>
+          </a:ln>
+          <a:effectLst/>
+        </p:spPr>
+        <p:style>
+          <a:lnRef idx="1">
+            <a:schemeClr val="accent1"/>
+          </a:lnRef>
+          <a:fillRef idx="3">
+            <a:schemeClr val="accent1"/>
+          </a:fillRef>
+          <a:effectRef idx="2">
+            <a:schemeClr val="accent1"/>
+          </a:effectRef>
+          <a:fontRef idx="minor">
+            <a:schemeClr val="lt1"/>
+          </a:fontRef>
+        </p:style>
+        <p:txBody>
+          <a:bodyPr rtlCol="0" anchor="ctr"/>
+          <a:lstStyle/>
+          <a:p>
+            <a:pPr algn="ctr"/>
+          </a:p>
+        </p:txBody>
+      </p:sp>
+      <p:sp>
+        <p:nvSpPr>
+          <p:cNvPr id="17" name="TextBox 16"/>
+          <p:cNvSpPr txBox="1"/>
+          <p:nvPr/>
+        </p:nvSpPr>
+        <p:spPr>
+          <a:xfrm>
+            <a:off x="8816375" y="3657600"/>
+            <a:ext cx="822960" cy="384048"/>
+          </a:xfrm>
+          <a:prstGeom prst="rect">
+            <a:avLst/>
+          </a:prstGeom>
+          <a:noFill/>
+        </p:spPr>
+        <p:txBody>
+          <a:bodyPr wrap="square" anchor="ctr" lIns="18288" rIns="18288" tIns="18288" bIns="18288">
+            <a:spAutoFit/>
+          </a:bodyPr>
+          <a:lstStyle/>
+          <a:p>
+            <a:pPr algn="l">
+              <a:spcAft>
+                <a:spcPts val="600"/>
+              </a:spcAft>
+            </a:pPr>
+            <a:r>
+              <a:rPr sz="1400" b="1">
+                <a:solidFill>
+                  <a:srgbClr val="EEEFF1"/>
+                </a:solidFill>
+                <a:latin typeface="Segoe UI"/>
+              </a:rPr>
+              <a:t>0.042</a:t>
+            </a:r>
+          </a:p>
+        </p:txBody>
+      </p:sp>
+      <p:sp>
+        <p:nvSpPr>
+          <p:cNvPr id="18" name="TextBox 17"/>
           <p:cNvSpPr txBox="1"/>
           <p:nvPr/>
         </p:nvSpPr>
@@ -10227,14 +10429,14 @@
                 </a:solidFill>
                 <a:latin typeface="Segoe UI"/>
               </a:rPr>
-              <a:t>Источник: docs/QUANTITY.md; reports/quantity/*.json (final_numbers → case.sections.quantity)</a:t>
-            </a:r>
-          </a:p>
-        </p:txBody>
-      </p:sp>
-      <p:sp>
-        <p:nvSpPr>
-          <p:cNvPr id="8" name="TextBox 7"/>
+              <a:t>Источник: reports/detector_v2/experiments.md, decision.json, unet_test.json; configs/detector_v2_eval.yaml</a:t>
+            </a:r>
+          </a:p>
+        </p:txBody>
+      </p:sp>
+      <p:sp>
+        <p:nvSpPr>
+          <p:cNvPr id="19" name="TextBox 18"/>
           <p:cNvSpPr txBox="1"/>
           <p:nvPr/>
         </p:nvSpPr>
@@ -10331,7 +10533,7 @@
                 </a:solidFill>
                 <a:latin typeface="Segoe UI"/>
               </a:rPr>
-              <a:t>19 · Приложение · Нефтяное пятно — эксперимент</a:t>
+              <a:t>19 · Приложение · Количество: поле и снимок</a:t>
             </a:r>
           </a:p>
         </p:txBody>
@@ -10364,13 +10566,13 @@
               </a:spcAft>
             </a:pPr>
             <a:r>
-              <a:rPr sz="2600" b="1">
+              <a:rPr sz="2300" b="1">
                 <a:solidFill>
                   <a:srgbClr val="EEEFF1"/>
                 </a:solidFill>
                 <a:latin typeface="Segoe UI"/>
               </a:rPr>
-              <a:t>Нефть: на MADOS F1 0.733 против OSI 0.324, но разлив Wakashio не найден — слой выключен</a:t>
+              <a:t>Количество: пар по месту и времени 66, видимый сигнал 0, калибровочных пар 0 — шт./км² только по полю</a:t>
             </a:r>
           </a:p>
         </p:txBody>
@@ -10403,13 +10605,13 @@
               </a:spcAft>
             </a:pPr>
             <a:r>
-              <a:rPr sz="1600" b="0">
+              <a:rPr sz="1500" b="0">
                 <a:solidFill>
                   <a:srgbClr val="EEEFF1"/>
                 </a:solidFill>
                 <a:latin typeface="Segoe UI"/>
               </a:rPr>
-              <a:t>• Отдельная голова на MADOS, сплит по сценам заморожен до обучения; val F1 0.888, test один раз 0.733 [0.612; 0.947]</a:t>
+              <a:t>• Поле (измерение): C = N/A, интервал Пуассона; S2 ΣN/ΣA = 697 / 12.94 км² = 53.9 [49.9–58.0] шт./км²; на карте — медиана профиля (отложенный test)</a:t>
             </a:r>
           </a:p>
           <a:p>
@@ -10419,13 +10621,13 @@
               </a:spcAft>
             </a:pPr>
             <a:r>
-              <a:rPr sz="1600" b="0">
+              <a:rPr sz="1500" b="0">
                 <a:solidFill>
                   <a:srgbClr val="EEEFF1"/>
                 </a:solidFill>
                 <a:latin typeface="Segoe UI"/>
               </a:rPr>
-              <a:t>• Контроль на реальном L2A: Wakashio 2020-08-11 — 0.17 км² мелких пятен (пятно в лагуне не найдено), 2020-08-16 — 62.41 км² ряби</a:t>
+              <a:t>• Снимок: площадь маски и доля покрытия подозрительного материала (LWD, м²/км²); медиана на 64 живых сценах 3.2; это не мусор и не шт./км²</a:t>
             </a:r>
           </a:p>
           <a:p>
@@ -10435,61 +10637,73 @@
               </a:spcAft>
             </a:pPr>
             <a:r>
-              <a:rPr sz="1600" b="0">
+              <a:rPr sz="1500" b="0">
                 <a:solidFill>
                   <a:srgbClr val="EEEFF1"/>
                 </a:solidFill>
                 <a:latin typeface="Segoe UI"/>
               </a:rPr>
-              <a:t>• Честный отказ: это не детектор нефти на L2A; слой «эксперимент», выключен по умолчанию; единица — площадь, не объём и не масса</a:t>
-            </a:r>
-          </a:p>
-        </p:txBody>
-      </p:sp>
-      <p:sp>
-        <p:nvSpPr>
-          <p:cNvPr id="5" name="Rectangle 4"/>
-          <p:cNvSpPr/>
-          <p:nvPr/>
-        </p:nvSpPr>
-        <p:spPr>
-          <a:xfrm>
-            <a:off x="6400800" y="1691640"/>
-            <a:ext cx="5349240" cy="1554480"/>
-          </a:xfrm>
-          <a:prstGeom prst="rect">
-            <a:avLst/>
-          </a:prstGeom>
-          <a:solidFill>
-            <a:srgbClr val="1B1E24"/>
-          </a:solidFill>
-          <a:ln>
-            <a:noFill/>
-          </a:ln>
-          <a:effectLst/>
-        </p:spPr>
-        <p:style>
-          <a:lnRef idx="1">
-            <a:schemeClr val="accent1"/>
-          </a:lnRef>
-          <a:fillRef idx="3">
-            <a:schemeClr val="accent1"/>
-          </a:fillRef>
-          <a:effectRef idx="2">
-            <a:schemeClr val="accent1"/>
-          </a:effectRef>
-          <a:fontRef idx="minor">
-            <a:schemeClr val="lt1"/>
-          </a:fontRef>
-        </p:style>
-        <p:txBody>
-          <a:bodyPr rtlCol="0" anchor="ctr"/>
-          <a:lstStyle/>
-          <a:p>
-            <a:pPr algn="ctr"/>
-          </a:p>
-        </p:txBody>
-      </p:sp>
+              <a:t>• Калибровка ln C = ln k + b · ln S требует калибровочных пар (по месту и времени и с сигналом) — их 0; нужно 4–12 для k в ×/÷2, для связи r = 0.5 — 30</a:t>
+            </a:r>
+          </a:p>
+          <a:p>
+            <a:pPr algn="l">
+              <a:spcAft>
+                <a:spcPts val="1000"/>
+              </a:spcAft>
+            </a:pPr>
+            <a:r>
+              <a:rPr sz="1500" b="0">
+                <a:solidFill>
+                  <a:srgbClr val="EEEFF1"/>
+                </a:solidFill>
+                <a:latin typeface="Segoe UI"/>
+              </a:rPr>
+              <a:t>• Штуки по снимку не показываем: перевод площади маски в штуки не показываем — нет калибровочных пар «снимок → шт./км²»; перевод «площадь / размер предмета» дал бы разброс в 3125 раз</a:t>
+            </a:r>
+          </a:p>
+          <a:p>
+            <a:pPr algn="l">
+              <a:spcAft>
+                <a:spcPts val="1000"/>
+              </a:spcAft>
+            </a:pPr>
+            <a:r>
+              <a:rPr sz="1500" b="0">
+                <a:solidFill>
+                  <a:srgbClr val="EEEFF1"/>
+                </a:solidFill>
+                <a:latin typeface="Segoe UI"/>
+              </a:rPr>
+              <a:t>• Аналогия: пальмы на гектар по Sentinel-2 с опорой на подсчёт по снимкам высокого разрешения (arXiv 2105.11207): MAE ±7,3 пальмы/га. Для мусора — мусор дрейфует (часы между снимком и полем уже сдвигают поле), разнороден по размеру и материалу и занимает доли процента пикселя; поэтому калибровка по ячейкам требует независимой проверки — у нас она дала отрицательный результат: общих дат поле × спутник 0, климатологии ρ = 0.18 на 123 ячейках</a:t>
+            </a:r>
+          </a:p>
+        </p:txBody>
+      </p:sp>
+      <p:pic>
+        <p:nvPicPr>
+          <p:cNvPr id="5" name="Picture 4" descr="10_units_ladder.jpg"/>
+          <p:cNvPicPr>
+            <a:picLocks noChangeAspect="1"/>
+          </p:cNvPicPr>
+          <p:nvPr/>
+        </p:nvPicPr>
+        <p:blipFill>
+          <a:blip r:embed="rId2"/>
+          <a:stretch>
+            <a:fillRect/>
+          </a:stretch>
+        </p:blipFill>
+        <p:spPr>
+          <a:xfrm>
+            <a:off x="6400800" y="1645920"/>
+            <a:ext cx="5349240" cy="1803686"/>
+          </a:xfrm>
+          <a:prstGeom prst="rect">
+            <a:avLst/>
+          </a:prstGeom>
+        </p:spPr>
+      </p:pic>
       <p:sp>
         <p:nvSpPr>
           <p:cNvPr id="6" name="TextBox 5"/>
@@ -10498,33 +10712,33 @@
         </p:nvSpPr>
         <p:spPr>
           <a:xfrm>
-            <a:off x="6675120" y="1783080"/>
-            <a:ext cx="4800600" cy="822960"/>
-          </a:xfrm>
-          <a:prstGeom prst="rect">
-            <a:avLst/>
-          </a:prstGeom>
-          <a:noFill/>
-        </p:spPr>
-        <p:txBody>
-          <a:bodyPr wrap="square" anchor="t" lIns="18288" rIns="18288" tIns="18288" bIns="18288">
-            <a:spAutoFit/>
-          </a:bodyPr>
-          <a:lstStyle/>
-          <a:p>
-            <a:pPr algn="l">
-              <a:spcAft>
-                <a:spcPts val="600"/>
-              </a:spcAft>
-            </a:pPr>
-            <a:r>
-              <a:rPr sz="4800" b="1">
-                <a:solidFill>
-                  <a:srgbClr val="D9912E"/>
-                </a:solidFill>
-                <a:latin typeface="Segoe UI"/>
-              </a:rPr>
-              <a:t>выкл.</a:t>
+            <a:off x="6400800" y="3495326"/>
+            <a:ext cx="5349240" cy="548640"/>
+          </a:xfrm>
+          <a:prstGeom prst="rect">
+            <a:avLst/>
+          </a:prstGeom>
+          <a:noFill/>
+        </p:spPr>
+        <p:txBody>
+          <a:bodyPr wrap="square" anchor="t" lIns="18288" rIns="18288" tIns="18288" bIns="18288">
+            <a:spAutoFit/>
+          </a:bodyPr>
+          <a:lstStyle/>
+          <a:p>
+            <a:pPr algn="l">
+              <a:spcAft>
+                <a:spcPts val="600"/>
+              </a:spcAft>
+            </a:pPr>
+            <a:r>
+              <a:rPr sz="1200" b="0">
+                <a:solidFill>
+                  <a:srgbClr val="9AA1AC"/>
+                </a:solidFill>
+                <a:latin typeface="Segoe UI"/>
+              </a:rPr>
+              <a:t>Лестница единиц: предмет на кадре → шт./м² кадра → шт./км² маршрута → спутниковая зона; у каждой ступени своя метрика</a:t>
             </a:r>
           </a:p>
         </p:txBody>
@@ -10532,45 +10746,6 @@
       <p:sp>
         <p:nvSpPr>
           <p:cNvPr id="7" name="TextBox 6"/>
-          <p:cNvSpPr txBox="1"/>
-          <p:nvPr/>
-        </p:nvSpPr>
-        <p:spPr>
-          <a:xfrm>
-            <a:off x="6675120" y="2606040"/>
-            <a:ext cx="4800600" cy="594360"/>
-          </a:xfrm>
-          <a:prstGeom prst="rect">
-            <a:avLst/>
-          </a:prstGeom>
-          <a:noFill/>
-        </p:spPr>
-        <p:txBody>
-          <a:bodyPr wrap="square" anchor="t" lIns="18288" rIns="18288" tIns="18288" bIns="18288">
-            <a:spAutoFit/>
-          </a:bodyPr>
-          <a:lstStyle/>
-          <a:p>
-            <a:pPr algn="l">
-              <a:spcAft>
-                <a:spcPts val="600"/>
-              </a:spcAft>
-            </a:pPr>
-            <a:r>
-              <a:rPr sz="1300" b="0">
-                <a:solidFill>
-                  <a:srgbClr val="EEEFF1"/>
-                </a:solidFill>
-                <a:latin typeface="Segoe UI"/>
-              </a:rPr>
-              <a:t>слой «Нефтяное пятно» — эксперимент; для нефти обычно нужен радар Sentinel-1</a:t>
-            </a:r>
-          </a:p>
-        </p:txBody>
-      </p:sp>
-      <p:sp>
-        <p:nvSpPr>
-          <p:cNvPr id="8" name="TextBox 7"/>
           <p:cNvSpPr txBox="1"/>
           <p:nvPr/>
         </p:nvSpPr>
@@ -10602,14 +10777,14 @@
                 </a:solidFill>
                 <a:latin typeface="Segoe UI"/>
               </a:rPr>
-              <a:t>Источник: reports/oil/test.json, control.json; docs/OIL.md</a:t>
-            </a:r>
-          </a:p>
-        </p:txBody>
-      </p:sp>
-      <p:sp>
-        <p:nvSpPr>
-          <p:cNvPr id="9" name="TextBox 8"/>
+              <a:t>Источник: docs/QUANTITY.md; reports/quantity/*.json (final_numbers → case.sections.quantity)</a:t>
+            </a:r>
+          </a:p>
+        </p:txBody>
+      </p:sp>
+      <p:sp>
+        <p:nvSpPr>
+          <p:cNvPr id="8" name="TextBox 7"/>
           <p:cNvSpPr txBox="1"/>
           <p:nvPr/>
         </p:nvSpPr>
@@ -11224,7 +11399,382 @@
                 </a:solidFill>
                 <a:latin typeface="Segoe UI"/>
               </a:rPr>
-              <a:t>20 · Приложение · Данные и отбор</a:t>
+              <a:t>20 · Приложение · Нефтяное пятно — эксперимент</a:t>
+            </a:r>
+          </a:p>
+        </p:txBody>
+      </p:sp>
+      <p:sp>
+        <p:nvSpPr>
+          <p:cNvPr id="3" name="TextBox 2"/>
+          <p:cNvSpPr txBox="1"/>
+          <p:nvPr/>
+        </p:nvSpPr>
+        <p:spPr>
+          <a:xfrm>
+            <a:off x="457200" y="457200"/>
+            <a:ext cx="11247120" cy="960120"/>
+          </a:xfrm>
+          <a:prstGeom prst="rect">
+            <a:avLst/>
+          </a:prstGeom>
+          <a:noFill/>
+        </p:spPr>
+        <p:txBody>
+          <a:bodyPr wrap="square" anchor="t" lIns="18288" rIns="18288" tIns="18288" bIns="18288">
+            <a:spAutoFit/>
+          </a:bodyPr>
+          <a:lstStyle/>
+          <a:p>
+            <a:pPr algn="l">
+              <a:spcAft>
+                <a:spcPts val="600"/>
+              </a:spcAft>
+            </a:pPr>
+            <a:r>
+              <a:rPr sz="2600" b="1">
+                <a:solidFill>
+                  <a:srgbClr val="EEEFF1"/>
+                </a:solidFill>
+                <a:latin typeface="Segoe UI"/>
+              </a:rPr>
+              <a:t>Нефть: на MADOS F1 0.733 против OSI 0.324, но разлив Wakashio не найден — слой выключен</a:t>
+            </a:r>
+          </a:p>
+        </p:txBody>
+      </p:sp>
+      <p:sp>
+        <p:nvSpPr>
+          <p:cNvPr id="4" name="TextBox 3"/>
+          <p:cNvSpPr txBox="1"/>
+          <p:nvPr/>
+        </p:nvSpPr>
+        <p:spPr>
+          <a:xfrm>
+            <a:off x="457200" y="1600200"/>
+            <a:ext cx="5577840" cy="4572000"/>
+          </a:xfrm>
+          <a:prstGeom prst="rect">
+            <a:avLst/>
+          </a:prstGeom>
+          <a:noFill/>
+        </p:spPr>
+        <p:txBody>
+          <a:bodyPr wrap="square" anchor="t" lIns="18288" rIns="18288" tIns="18288" bIns="18288">
+            <a:spAutoFit/>
+          </a:bodyPr>
+          <a:lstStyle/>
+          <a:p>
+            <a:pPr algn="l">
+              <a:spcAft>
+                <a:spcPts val="1000"/>
+              </a:spcAft>
+            </a:pPr>
+            <a:r>
+              <a:rPr sz="1600" b="0">
+                <a:solidFill>
+                  <a:srgbClr val="EEEFF1"/>
+                </a:solidFill>
+                <a:latin typeface="Segoe UI"/>
+              </a:rPr>
+              <a:t>• Отдельная голова на MADOS, сплит по сценам заморожен до обучения; val F1 0.888, test один раз 0.733 [0.612; 0.947]</a:t>
+            </a:r>
+          </a:p>
+          <a:p>
+            <a:pPr algn="l">
+              <a:spcAft>
+                <a:spcPts val="1000"/>
+              </a:spcAft>
+            </a:pPr>
+            <a:r>
+              <a:rPr sz="1600" b="0">
+                <a:solidFill>
+                  <a:srgbClr val="EEEFF1"/>
+                </a:solidFill>
+                <a:latin typeface="Segoe UI"/>
+              </a:rPr>
+              <a:t>• Контроль на реальном L2A: Wakashio 2020-08-11 — 0.17 км² мелких пятен (пятно в лагуне не найдено), 2020-08-16 — 62.41 км² ряби</a:t>
+            </a:r>
+          </a:p>
+          <a:p>
+            <a:pPr algn="l">
+              <a:spcAft>
+                <a:spcPts val="1000"/>
+              </a:spcAft>
+            </a:pPr>
+            <a:r>
+              <a:rPr sz="1600" b="0">
+                <a:solidFill>
+                  <a:srgbClr val="EEEFF1"/>
+                </a:solidFill>
+                <a:latin typeface="Segoe UI"/>
+              </a:rPr>
+              <a:t>• Честный отказ: это не детектор нефти на L2A; слой «эксперимент», выключен по умолчанию; единица — площадь, не объём и не масса</a:t>
+            </a:r>
+          </a:p>
+        </p:txBody>
+      </p:sp>
+      <p:sp>
+        <p:nvSpPr>
+          <p:cNvPr id="5" name="Rectangle 4"/>
+          <p:cNvSpPr/>
+          <p:nvPr/>
+        </p:nvSpPr>
+        <p:spPr>
+          <a:xfrm>
+            <a:off x="6400800" y="1691640"/>
+            <a:ext cx="5349240" cy="1554480"/>
+          </a:xfrm>
+          <a:prstGeom prst="rect">
+            <a:avLst/>
+          </a:prstGeom>
+          <a:solidFill>
+            <a:srgbClr val="1B1E24"/>
+          </a:solidFill>
+          <a:ln>
+            <a:noFill/>
+          </a:ln>
+          <a:effectLst/>
+        </p:spPr>
+        <p:style>
+          <a:lnRef idx="1">
+            <a:schemeClr val="accent1"/>
+          </a:lnRef>
+          <a:fillRef idx="3">
+            <a:schemeClr val="accent1"/>
+          </a:fillRef>
+          <a:effectRef idx="2">
+            <a:schemeClr val="accent1"/>
+          </a:effectRef>
+          <a:fontRef idx="minor">
+            <a:schemeClr val="lt1"/>
+          </a:fontRef>
+        </p:style>
+        <p:txBody>
+          <a:bodyPr rtlCol="0" anchor="ctr"/>
+          <a:lstStyle/>
+          <a:p>
+            <a:pPr algn="ctr"/>
+          </a:p>
+        </p:txBody>
+      </p:sp>
+      <p:sp>
+        <p:nvSpPr>
+          <p:cNvPr id="6" name="TextBox 5"/>
+          <p:cNvSpPr txBox="1"/>
+          <p:nvPr/>
+        </p:nvSpPr>
+        <p:spPr>
+          <a:xfrm>
+            <a:off x="6675120" y="1783080"/>
+            <a:ext cx="4800600" cy="822960"/>
+          </a:xfrm>
+          <a:prstGeom prst="rect">
+            <a:avLst/>
+          </a:prstGeom>
+          <a:noFill/>
+        </p:spPr>
+        <p:txBody>
+          <a:bodyPr wrap="square" anchor="t" lIns="18288" rIns="18288" tIns="18288" bIns="18288">
+            <a:spAutoFit/>
+          </a:bodyPr>
+          <a:lstStyle/>
+          <a:p>
+            <a:pPr algn="l">
+              <a:spcAft>
+                <a:spcPts val="600"/>
+              </a:spcAft>
+            </a:pPr>
+            <a:r>
+              <a:rPr sz="4800" b="1">
+                <a:solidFill>
+                  <a:srgbClr val="D9912E"/>
+                </a:solidFill>
+                <a:latin typeface="Segoe UI"/>
+              </a:rPr>
+              <a:t>выкл.</a:t>
+            </a:r>
+          </a:p>
+        </p:txBody>
+      </p:sp>
+      <p:sp>
+        <p:nvSpPr>
+          <p:cNvPr id="7" name="TextBox 6"/>
+          <p:cNvSpPr txBox="1"/>
+          <p:nvPr/>
+        </p:nvSpPr>
+        <p:spPr>
+          <a:xfrm>
+            <a:off x="6675120" y="2606040"/>
+            <a:ext cx="4800600" cy="594360"/>
+          </a:xfrm>
+          <a:prstGeom prst="rect">
+            <a:avLst/>
+          </a:prstGeom>
+          <a:noFill/>
+        </p:spPr>
+        <p:txBody>
+          <a:bodyPr wrap="square" anchor="t" lIns="18288" rIns="18288" tIns="18288" bIns="18288">
+            <a:spAutoFit/>
+          </a:bodyPr>
+          <a:lstStyle/>
+          <a:p>
+            <a:pPr algn="l">
+              <a:spcAft>
+                <a:spcPts val="600"/>
+              </a:spcAft>
+            </a:pPr>
+            <a:r>
+              <a:rPr sz="1300" b="0">
+                <a:solidFill>
+                  <a:srgbClr val="EEEFF1"/>
+                </a:solidFill>
+                <a:latin typeface="Segoe UI"/>
+              </a:rPr>
+              <a:t>слой «Нефтяное пятно» — эксперимент; для нефти обычно нужен радар Sentinel-1</a:t>
+            </a:r>
+          </a:p>
+        </p:txBody>
+      </p:sp>
+      <p:sp>
+        <p:nvSpPr>
+          <p:cNvPr id="8" name="TextBox 7"/>
+          <p:cNvSpPr txBox="1"/>
+          <p:nvPr/>
+        </p:nvSpPr>
+        <p:spPr>
+          <a:xfrm>
+            <a:off x="457200" y="6355080"/>
+            <a:ext cx="10515600" cy="320040"/>
+          </a:xfrm>
+          <a:prstGeom prst="rect">
+            <a:avLst/>
+          </a:prstGeom>
+          <a:noFill/>
+        </p:spPr>
+        <p:txBody>
+          <a:bodyPr wrap="square" anchor="t" lIns="18288" rIns="18288" tIns="18288" bIns="18288">
+            <a:spAutoFit/>
+          </a:bodyPr>
+          <a:lstStyle/>
+          <a:p>
+            <a:pPr algn="l">
+              <a:spcAft>
+                <a:spcPts val="600"/>
+              </a:spcAft>
+            </a:pPr>
+            <a:r>
+              <a:rPr sz="1000" b="0">
+                <a:solidFill>
+                  <a:srgbClr val="9AA1AC"/>
+                </a:solidFill>
+                <a:latin typeface="Segoe UI"/>
+              </a:rPr>
+              <a:t>Источник: reports/oil/test.json, control.json; docs/OIL.md</a:t>
+            </a:r>
+          </a:p>
+        </p:txBody>
+      </p:sp>
+      <p:sp>
+        <p:nvSpPr>
+          <p:cNvPr id="9" name="TextBox 8"/>
+          <p:cNvSpPr txBox="1"/>
+          <p:nvPr/>
+        </p:nvSpPr>
+        <p:spPr>
+          <a:xfrm>
+            <a:off x="11155680" y="6355080"/>
+            <a:ext cx="640080" cy="320040"/>
+          </a:xfrm>
+          <a:prstGeom prst="rect">
+            <a:avLst/>
+          </a:prstGeom>
+          <a:noFill/>
+        </p:spPr>
+        <p:txBody>
+          <a:bodyPr wrap="square" anchor="t" lIns="18288" rIns="18288" tIns="18288" bIns="18288">
+            <a:spAutoFit/>
+          </a:bodyPr>
+          <a:lstStyle/>
+          <a:p>
+            <a:pPr algn="r">
+              <a:spcAft>
+                <a:spcPts val="600"/>
+              </a:spcAft>
+            </a:pPr>
+            <a:r>
+              <a:rPr sz="1000" b="0">
+                <a:solidFill>
+                  <a:srgbClr val="9AA1AC"/>
+                </a:solidFill>
+                <a:latin typeface="Segoe UI"/>
+              </a:rPr>
+              <a:t>прил.</a:t>
+            </a:r>
+          </a:p>
+        </p:txBody>
+      </p:sp>
+    </p:spTree>
+  </p:cSld>
+  <p:clrMapOvr>
+    <a:masterClrMapping/>
+  </p:clrMapOvr>
+</p:sld>
+</file>
+
+<file path=ppt/slides/slide21.xml><?xml version="1.0" encoding="utf-8"?>
+<p:sld xmlns:a="http://schemas.openxmlformats.org/drawingml/2006/main" xmlns:p="http://schemas.openxmlformats.org/presentationml/2006/main" xmlns:r="http://schemas.openxmlformats.org/officeDocument/2006/relationships">
+  <p:cSld>
+    <p:bg>
+      <p:bgPr>
+        <a:solidFill>
+          <a:srgbClr val="101216"/>
+        </a:solidFill>
+        <a:effectLst/>
+      </p:bgPr>
+    </p:bg>
+    <p:spTree>
+      <p:nvGrpSpPr>
+        <p:cNvPr id="1" name=""/>
+        <p:cNvGrpSpPr/>
+        <p:nvPr/>
+      </p:nvGrpSpPr>
+      <p:grpSpPr/>
+      <p:sp>
+        <p:nvSpPr>
+          <p:cNvPr id="2" name="TextBox 1"/>
+          <p:cNvSpPr txBox="1"/>
+          <p:nvPr/>
+        </p:nvSpPr>
+        <p:spPr>
+          <a:xfrm>
+            <a:off x="457200" y="201168"/>
+            <a:ext cx="8229600" cy="274320"/>
+          </a:xfrm>
+          <a:prstGeom prst="rect">
+            <a:avLst/>
+          </a:prstGeom>
+          <a:noFill/>
+        </p:spPr>
+        <p:txBody>
+          <a:bodyPr wrap="square" anchor="t" lIns="18288" rIns="18288" tIns="18288" bIns="18288">
+            <a:spAutoFit/>
+          </a:bodyPr>
+          <a:lstStyle/>
+          <a:p>
+            <a:pPr algn="l">
+              <a:spcAft>
+                <a:spcPts val="600"/>
+              </a:spcAft>
+            </a:pPr>
+            <a:r>
+              <a:rPr sz="1200" b="1">
+                <a:solidFill>
+                  <a:srgbClr val="D9912E"/>
+                </a:solidFill>
+                <a:latin typeface="Segoe UI"/>
+              </a:rPr>
+              <a:t>21 · Приложение · Данные и отбор</a:t>
             </a:r>
           </a:p>
         </p:txBody>
@@ -11827,802 +12377,6 @@
 </p:sld>
 </file>
 
-<file path=ppt/slides/slide21.xml><?xml version="1.0" encoding="utf-8"?>
-<p:sld xmlns:a="http://schemas.openxmlformats.org/drawingml/2006/main" xmlns:p="http://schemas.openxmlformats.org/presentationml/2006/main" xmlns:r="http://schemas.openxmlformats.org/officeDocument/2006/relationships">
-  <p:cSld>
-    <p:bg>
-      <p:bgPr>
-        <a:solidFill>
-          <a:srgbClr val="101216"/>
-        </a:solidFill>
-        <a:effectLst/>
-      </p:bgPr>
-    </p:bg>
-    <p:spTree>
-      <p:nvGrpSpPr>
-        <p:cNvPr id="1" name=""/>
-        <p:cNvGrpSpPr/>
-        <p:nvPr/>
-      </p:nvGrpSpPr>
-      <p:grpSpPr/>
-      <p:sp>
-        <p:nvSpPr>
-          <p:cNvPr id="2" name="TextBox 1"/>
-          <p:cNvSpPr txBox="1"/>
-          <p:nvPr/>
-        </p:nvSpPr>
-        <p:spPr>
-          <a:xfrm>
-            <a:off x="457200" y="201168"/>
-            <a:ext cx="8229600" cy="274320"/>
-          </a:xfrm>
-          <a:prstGeom prst="rect">
-            <a:avLst/>
-          </a:prstGeom>
-          <a:noFill/>
-        </p:spPr>
-        <p:txBody>
-          <a:bodyPr wrap="square" anchor="t" lIns="18288" rIns="18288" tIns="18288" bIns="18288">
-            <a:spAutoFit/>
-          </a:bodyPr>
-          <a:lstStyle/>
-          <a:p>
-            <a:pPr algn="l">
-              <a:spcAft>
-                <a:spcPts val="600"/>
-              </a:spcAft>
-            </a:pPr>
-            <a:r>
-              <a:rPr sz="1200" b="1">
-                <a:solidFill>
-                  <a:srgbClr val="D9912E"/>
-                </a:solidFill>
-                <a:latin typeface="Segoe UI"/>
-              </a:rPr>
-              <a:t>21 · Приложение · Реестр пар и окно синхронизации</a:t>
-            </a:r>
-          </a:p>
-        </p:txBody>
-      </p:sp>
-      <p:sp>
-        <p:nvSpPr>
-          <p:cNvPr id="3" name="TextBox 2"/>
-          <p:cNvSpPr txBox="1"/>
-          <p:nvPr/>
-        </p:nvSpPr>
-        <p:spPr>
-          <a:xfrm>
-            <a:off x="457200" y="457200"/>
-            <a:ext cx="11247120" cy="960120"/>
-          </a:xfrm>
-          <a:prstGeom prst="rect">
-            <a:avLst/>
-          </a:prstGeom>
-          <a:noFill/>
-        </p:spPr>
-        <p:txBody>
-          <a:bodyPr wrap="square" anchor="t" lIns="18288" rIns="18288" tIns="18288" bIns="18288">
-            <a:spAutoFit/>
-          </a:bodyPr>
-          <a:lstStyle/>
-          <a:p>
-            <a:pPr algn="l">
-              <a:spcAft>
-                <a:spcPts val="600"/>
-              </a:spcAft>
-            </a:pPr>
-            <a:r>
-              <a:rPr sz="2600" b="1">
-                <a:solidFill>
-                  <a:srgbClr val="EEEFF1"/>
-                </a:solidFill>
-                <a:latin typeface="Segoe UI"/>
-              </a:rPr>
-              <a:t>318 событий → 29 по метаданным → 12 по маскам → 0 синхронных с учётом дрейфа</a:t>
-            </a:r>
-          </a:p>
-        </p:txBody>
-      </p:sp>
-      <p:sp>
-        <p:nvSpPr>
-          <p:cNvPr id="4" name="TextBox 3"/>
-          <p:cNvSpPr txBox="1"/>
-          <p:nvPr/>
-        </p:nvSpPr>
-        <p:spPr>
-          <a:xfrm>
-            <a:off x="457200" y="1600200"/>
-            <a:ext cx="5577840" cy="4572000"/>
-          </a:xfrm>
-          <a:prstGeom prst="rect">
-            <a:avLst/>
-          </a:prstGeom>
-          <a:noFill/>
-        </p:spPr>
-        <p:txBody>
-          <a:bodyPr wrap="square" anchor="t" lIns="18288" rIns="18288" tIns="18288" bIns="18288">
-            <a:spAutoFit/>
-          </a:bodyPr>
-          <a:lstStyle/>
-          <a:p>
-            <a:pPr algn="l">
-              <a:spcAft>
-                <a:spcPts val="1000"/>
-              </a:spcAft>
-            </a:pPr>
-            <a:r>
-              <a:rPr sz="1600" b="0">
-                <a:solidFill>
-                  <a:srgbClr val="EEEFF1"/>
-                </a:solidFill>
-                <a:latin typeface="Segoe UI"/>
-              </a:rPr>
-              <a:t>• Для пластика снимков нет: S1 и S2 — открытый океан 2015 г., Sentinel-2A снимает с конца июня 2015 (S1 — 0 сцен в ±5 сут, S2 — 1)</a:t>
-            </a:r>
-          </a:p>
-          <a:p>
-            <a:pPr algn="l">
-              <a:spcAft>
-                <a:spcPts val="1000"/>
-              </a:spcAft>
-            </a:pPr>
-            <a:r>
-              <a:rPr sz="1600" b="0">
-                <a:solidFill>
-                  <a:srgbClr val="EEEFF1"/>
-                </a:solidFill>
-                <a:latin typeface="Segoe UI"/>
-              </a:rPr>
-              <a:t>• Дрейф: при типичных 0.2 м/с вода смещается на 23.4 км (медиана) — допуск 3 км держит только |dt| ≤ 4.2 ч</a:t>
-            </a:r>
-          </a:p>
-          <a:p>
-            <a:pPr algn="l">
-              <a:spcAft>
-                <a:spcPts val="1000"/>
-              </a:spcAft>
-            </a:pPr>
-            <a:r>
-              <a:rPr sz="1600" b="0">
-                <a:solidFill>
-                  <a:srgbClr val="EEEFF1"/>
-                </a:solidFill>
-                <a:latin typeface="Segoe UI"/>
-              </a:rPr>
-              <a:t>• Маски в полосе: блик 10, облака 6 (у 4 флаг QA Landsat сомнителен), покрытие 1</a:t>
-            </a:r>
-          </a:p>
-          <a:p>
-            <a:pPr algn="l">
-              <a:spcAft>
-                <a:spcPts val="1000"/>
-              </a:spcAft>
-            </a:pPr>
-            <a:r>
-              <a:rPr sz="1600" b="0">
-                <a:solidFill>
-                  <a:srgbClr val="EEEFF1"/>
-                </a:solidFill>
-                <a:latin typeface="Segoe UI"/>
-              </a:rPr>
-              <a:t>• Реестр: строка на каждое из 318 событий, этап отказа и все причины</a:t>
-            </a:r>
-          </a:p>
-        </p:txBody>
-      </p:sp>
-      <p:sp>
-        <p:nvSpPr>
-          <p:cNvPr id="5" name="TextBox 4"/>
-          <p:cNvSpPr txBox="1"/>
-          <p:nvPr/>
-        </p:nvSpPr>
-        <p:spPr>
-          <a:xfrm>
-            <a:off x="6400800" y="1691640"/>
-            <a:ext cx="5349240" cy="365760"/>
-          </a:xfrm>
-          <a:prstGeom prst="rect">
-            <a:avLst/>
-          </a:prstGeom>
-          <a:noFill/>
-        </p:spPr>
-        <p:txBody>
-          <a:bodyPr wrap="square" anchor="t" lIns="18288" rIns="18288" tIns="18288" bIns="18288">
-            <a:spAutoFit/>
-          </a:bodyPr>
-          <a:lstStyle/>
-          <a:p>
-            <a:pPr algn="l">
-              <a:spcAft>
-                <a:spcPts val="600"/>
-              </a:spcAft>
-            </a:pPr>
-            <a:r>
-              <a:rPr sz="1400" b="0">
-                <a:solidFill>
-                  <a:srgbClr val="9AA1AC"/>
-                </a:solidFill>
-                <a:latin typeface="Segoe UI"/>
-              </a:rPr>
-              <a:t>События, у которых остаётся пара</a:t>
-            </a:r>
-          </a:p>
-        </p:txBody>
-      </p:sp>
-      <p:sp>
-        <p:nvSpPr>
-          <p:cNvPr id="6" name="TextBox 5"/>
-          <p:cNvSpPr txBox="1"/>
-          <p:nvPr/>
-        </p:nvSpPr>
-        <p:spPr>
-          <a:xfrm>
-            <a:off x="6400800" y="2148840"/>
-            <a:ext cx="2155240" cy="384048"/>
-          </a:xfrm>
-          <a:prstGeom prst="rect">
-            <a:avLst/>
-          </a:prstGeom>
-          <a:noFill/>
-        </p:spPr>
-        <p:txBody>
-          <a:bodyPr wrap="square" anchor="ctr" lIns="18288" rIns="18288" tIns="18288" bIns="18288">
-            <a:spAutoFit/>
-          </a:bodyPr>
-          <a:lstStyle/>
-          <a:p>
-            <a:pPr algn="l">
-              <a:spcAft>
-                <a:spcPts val="600"/>
-              </a:spcAft>
-            </a:pPr>
-            <a:r>
-              <a:rPr sz="1300" b="0">
-                <a:solidFill>
-                  <a:srgbClr val="EEEFF1"/>
-                </a:solidFill>
-                <a:latin typeface="Segoe UI"/>
-              </a:rPr>
-              <a:t>все события</a:t>
-            </a:r>
-          </a:p>
-        </p:txBody>
-      </p:sp>
-      <p:sp>
-        <p:nvSpPr>
-          <p:cNvPr id="7" name="Rectangle 6"/>
-          <p:cNvSpPr/>
-          <p:nvPr/>
-        </p:nvSpPr>
-        <p:spPr>
-          <a:xfrm>
-            <a:off x="8647480" y="2212848"/>
-            <a:ext cx="2279599" cy="274320"/>
-          </a:xfrm>
-          <a:prstGeom prst="rect">
-            <a:avLst/>
-          </a:prstGeom>
-          <a:solidFill>
-            <a:srgbClr val="5B6370"/>
-          </a:solidFill>
-          <a:ln>
-            <a:noFill/>
-          </a:ln>
-          <a:effectLst/>
-        </p:spPr>
-        <p:style>
-          <a:lnRef idx="1">
-            <a:schemeClr val="accent1"/>
-          </a:lnRef>
-          <a:fillRef idx="3">
-            <a:schemeClr val="accent1"/>
-          </a:fillRef>
-          <a:effectRef idx="2">
-            <a:schemeClr val="accent1"/>
-          </a:effectRef>
-          <a:fontRef idx="minor">
-            <a:schemeClr val="lt1"/>
-          </a:fontRef>
-        </p:style>
-        <p:txBody>
-          <a:bodyPr rtlCol="0" anchor="ctr"/>
-          <a:lstStyle/>
-          <a:p>
-            <a:pPr algn="ctr"/>
-          </a:p>
-        </p:txBody>
-      </p:sp>
-      <p:sp>
-        <p:nvSpPr>
-          <p:cNvPr id="8" name="TextBox 7"/>
-          <p:cNvSpPr txBox="1"/>
-          <p:nvPr/>
-        </p:nvSpPr>
-        <p:spPr>
-          <a:xfrm>
-            <a:off x="11000232" y="2148840"/>
-            <a:ext cx="822960" cy="384048"/>
-          </a:xfrm>
-          <a:prstGeom prst="rect">
-            <a:avLst/>
-          </a:prstGeom>
-          <a:noFill/>
-        </p:spPr>
-        <p:txBody>
-          <a:bodyPr wrap="square" anchor="ctr" lIns="18288" rIns="18288" tIns="18288" bIns="18288">
-            <a:spAutoFit/>
-          </a:bodyPr>
-          <a:lstStyle/>
-          <a:p>
-            <a:pPr algn="l">
-              <a:spcAft>
-                <a:spcPts val="600"/>
-              </a:spcAft>
-            </a:pPr>
-            <a:r>
-              <a:rPr sz="1400" b="1">
-                <a:solidFill>
-                  <a:srgbClr val="EEEFF1"/>
-                </a:solidFill>
-                <a:latin typeface="Segoe UI"/>
-              </a:rPr>
-              <a:t>318</a:t>
-            </a:r>
-          </a:p>
-        </p:txBody>
-      </p:sp>
-      <p:sp>
-        <p:nvSpPr>
-          <p:cNvPr id="9" name="TextBox 8"/>
-          <p:cNvSpPr txBox="1"/>
-          <p:nvPr/>
-        </p:nvSpPr>
-        <p:spPr>
-          <a:xfrm>
-            <a:off x="6400800" y="2651760"/>
-            <a:ext cx="2155240" cy="384048"/>
-          </a:xfrm>
-          <a:prstGeom prst="rect">
-            <a:avLst/>
-          </a:prstGeom>
-          <a:noFill/>
-        </p:spPr>
-        <p:txBody>
-          <a:bodyPr wrap="square" anchor="ctr" lIns="18288" rIns="18288" tIns="18288" bIns="18288">
-            <a:spAutoFit/>
-          </a:bodyPr>
-          <a:lstStyle/>
-          <a:p>
-            <a:pPr algn="l">
-              <a:spcAft>
-                <a:spcPts val="600"/>
-              </a:spcAft>
-            </a:pPr>
-            <a:r>
-              <a:rPr sz="1300" b="0">
-                <a:solidFill>
-                  <a:srgbClr val="EEEFF1"/>
-                </a:solidFill>
-                <a:latin typeface="Segoe UI"/>
-              </a:rPr>
-              <a:t>|dt| ≤ 1 сут, облачность ≤ 60 %</a:t>
-            </a:r>
-          </a:p>
-        </p:txBody>
-      </p:sp>
-      <p:sp>
-        <p:nvSpPr>
-          <p:cNvPr id="10" name="Rectangle 9"/>
-          <p:cNvSpPr/>
-          <p:nvPr/>
-        </p:nvSpPr>
-        <p:spPr>
-          <a:xfrm>
-            <a:off x="8647480" y="2715768"/>
-            <a:ext cx="207887" cy="274320"/>
-          </a:xfrm>
-          <a:prstGeom prst="rect">
-            <a:avLst/>
-          </a:prstGeom>
-          <a:solidFill>
-            <a:srgbClr val="5B6370"/>
-          </a:solidFill>
-          <a:ln>
-            <a:noFill/>
-          </a:ln>
-          <a:effectLst/>
-        </p:spPr>
-        <p:style>
-          <a:lnRef idx="1">
-            <a:schemeClr val="accent1"/>
-          </a:lnRef>
-          <a:fillRef idx="3">
-            <a:schemeClr val="accent1"/>
-          </a:fillRef>
-          <a:effectRef idx="2">
-            <a:schemeClr val="accent1"/>
-          </a:effectRef>
-          <a:fontRef idx="minor">
-            <a:schemeClr val="lt1"/>
-          </a:fontRef>
-        </p:style>
-        <p:txBody>
-          <a:bodyPr rtlCol="0" anchor="ctr"/>
-          <a:lstStyle/>
-          <a:p>
-            <a:pPr algn="ctr"/>
-          </a:p>
-        </p:txBody>
-      </p:sp>
-      <p:sp>
-        <p:nvSpPr>
-          <p:cNvPr id="11" name="TextBox 10"/>
-          <p:cNvSpPr txBox="1"/>
-          <p:nvPr/>
-        </p:nvSpPr>
-        <p:spPr>
-          <a:xfrm>
-            <a:off x="8928520" y="2651760"/>
-            <a:ext cx="822960" cy="384048"/>
-          </a:xfrm>
-          <a:prstGeom prst="rect">
-            <a:avLst/>
-          </a:prstGeom>
-          <a:noFill/>
-        </p:spPr>
-        <p:txBody>
-          <a:bodyPr wrap="square" anchor="ctr" lIns="18288" rIns="18288" tIns="18288" bIns="18288">
-            <a:spAutoFit/>
-          </a:bodyPr>
-          <a:lstStyle/>
-          <a:p>
-            <a:pPr algn="l">
-              <a:spcAft>
-                <a:spcPts val="600"/>
-              </a:spcAft>
-            </a:pPr>
-            <a:r>
-              <a:rPr sz="1400" b="1">
-                <a:solidFill>
-                  <a:srgbClr val="EEEFF1"/>
-                </a:solidFill>
-                <a:latin typeface="Segoe UI"/>
-              </a:rPr>
-              <a:t>29</a:t>
-            </a:r>
-          </a:p>
-        </p:txBody>
-      </p:sp>
-      <p:sp>
-        <p:nvSpPr>
-          <p:cNvPr id="12" name="TextBox 11"/>
-          <p:cNvSpPr txBox="1"/>
-          <p:nvPr/>
-        </p:nvSpPr>
-        <p:spPr>
-          <a:xfrm>
-            <a:off x="6400800" y="3154680"/>
-            <a:ext cx="2155240" cy="384048"/>
-          </a:xfrm>
-          <a:prstGeom prst="rect">
-            <a:avLst/>
-          </a:prstGeom>
-          <a:noFill/>
-        </p:spPr>
-        <p:txBody>
-          <a:bodyPr wrap="square" anchor="ctr" lIns="18288" rIns="18288" tIns="18288" bIns="18288">
-            <a:spAutoFit/>
-          </a:bodyPr>
-          <a:lstStyle/>
-          <a:p>
-            <a:pPr algn="l">
-              <a:spcAft>
-                <a:spcPts val="600"/>
-              </a:spcAft>
-            </a:pPr>
-            <a:r>
-              <a:rPr sz="1300" b="0">
-                <a:solidFill>
-                  <a:srgbClr val="EEEFF1"/>
-                </a:solidFill>
-                <a:latin typeface="Segoe UI"/>
-              </a:rPr>
-              <a:t>маски качества в полосе</a:t>
-            </a:r>
-          </a:p>
-        </p:txBody>
-      </p:sp>
-      <p:sp>
-        <p:nvSpPr>
-          <p:cNvPr id="13" name="Rectangle 12"/>
-          <p:cNvSpPr/>
-          <p:nvPr/>
-        </p:nvSpPr>
-        <p:spPr>
-          <a:xfrm>
-            <a:off x="8647480" y="3218688"/>
-            <a:ext cx="86022" cy="274320"/>
-          </a:xfrm>
-          <a:prstGeom prst="rect">
-            <a:avLst/>
-          </a:prstGeom>
-          <a:solidFill>
-            <a:srgbClr val="5B6370"/>
-          </a:solidFill>
-          <a:ln>
-            <a:noFill/>
-          </a:ln>
-          <a:effectLst/>
-        </p:spPr>
-        <p:style>
-          <a:lnRef idx="1">
-            <a:schemeClr val="accent1"/>
-          </a:lnRef>
-          <a:fillRef idx="3">
-            <a:schemeClr val="accent1"/>
-          </a:fillRef>
-          <a:effectRef idx="2">
-            <a:schemeClr val="accent1"/>
-          </a:effectRef>
-          <a:fontRef idx="minor">
-            <a:schemeClr val="lt1"/>
-          </a:fontRef>
-        </p:style>
-        <p:txBody>
-          <a:bodyPr rtlCol="0" anchor="ctr"/>
-          <a:lstStyle/>
-          <a:p>
-            <a:pPr algn="ctr"/>
-          </a:p>
-        </p:txBody>
-      </p:sp>
-      <p:sp>
-        <p:nvSpPr>
-          <p:cNvPr id="14" name="TextBox 13"/>
-          <p:cNvSpPr txBox="1"/>
-          <p:nvPr/>
-        </p:nvSpPr>
-        <p:spPr>
-          <a:xfrm>
-            <a:off x="8806655" y="3154680"/>
-            <a:ext cx="822960" cy="384048"/>
-          </a:xfrm>
-          <a:prstGeom prst="rect">
-            <a:avLst/>
-          </a:prstGeom>
-          <a:noFill/>
-        </p:spPr>
-        <p:txBody>
-          <a:bodyPr wrap="square" anchor="ctr" lIns="18288" rIns="18288" tIns="18288" bIns="18288">
-            <a:spAutoFit/>
-          </a:bodyPr>
-          <a:lstStyle/>
-          <a:p>
-            <a:pPr algn="l">
-              <a:spcAft>
-                <a:spcPts val="600"/>
-              </a:spcAft>
-            </a:pPr>
-            <a:r>
-              <a:rPr sz="1400" b="1">
-                <a:solidFill>
-                  <a:srgbClr val="EEEFF1"/>
-                </a:solidFill>
-                <a:latin typeface="Segoe UI"/>
-              </a:rPr>
-              <a:t>12</a:t>
-            </a:r>
-          </a:p>
-        </p:txBody>
-      </p:sp>
-      <p:sp>
-        <p:nvSpPr>
-          <p:cNvPr id="15" name="TextBox 14"/>
-          <p:cNvSpPr txBox="1"/>
-          <p:nvPr/>
-        </p:nvSpPr>
-        <p:spPr>
-          <a:xfrm>
-            <a:off x="6400800" y="3657600"/>
-            <a:ext cx="2155240" cy="384048"/>
-          </a:xfrm>
-          <a:prstGeom prst="rect">
-            <a:avLst/>
-          </a:prstGeom>
-          <a:noFill/>
-        </p:spPr>
-        <p:txBody>
-          <a:bodyPr wrap="square" anchor="ctr" lIns="18288" rIns="18288" tIns="18288" bIns="18288">
-            <a:spAutoFit/>
-          </a:bodyPr>
-          <a:lstStyle/>
-          <a:p>
-            <a:pPr algn="l">
-              <a:spcAft>
-                <a:spcPts val="600"/>
-              </a:spcAft>
-            </a:pPr>
-            <a:r>
-              <a:rPr sz="1300" b="0">
-                <a:solidFill>
-                  <a:srgbClr val="EEEFF1"/>
-                </a:solidFill>
-                <a:latin typeface="Segoe UI"/>
-              </a:rPr>
-              <a:t>дрейф ≤ допуска (0.2 м/с)</a:t>
-            </a:r>
-          </a:p>
-        </p:txBody>
-      </p:sp>
-      <p:sp>
-        <p:nvSpPr>
-          <p:cNvPr id="16" name="Rectangle 15"/>
-          <p:cNvSpPr/>
-          <p:nvPr/>
-        </p:nvSpPr>
-        <p:spPr>
-          <a:xfrm>
-            <a:off x="8647480" y="3721608"/>
-            <a:ext cx="36576" cy="274320"/>
-          </a:xfrm>
-          <a:prstGeom prst="rect">
-            <a:avLst/>
-          </a:prstGeom>
-          <a:solidFill>
-            <a:srgbClr val="D9912E"/>
-          </a:solidFill>
-          <a:ln>
-            <a:noFill/>
-          </a:ln>
-          <a:effectLst/>
-        </p:spPr>
-        <p:style>
-          <a:lnRef idx="1">
-            <a:schemeClr val="accent1"/>
-          </a:lnRef>
-          <a:fillRef idx="3">
-            <a:schemeClr val="accent1"/>
-          </a:fillRef>
-          <a:effectRef idx="2">
-            <a:schemeClr val="accent1"/>
-          </a:effectRef>
-          <a:fontRef idx="minor">
-            <a:schemeClr val="lt1"/>
-          </a:fontRef>
-        </p:style>
-        <p:txBody>
-          <a:bodyPr rtlCol="0" anchor="ctr"/>
-          <a:lstStyle/>
-          <a:p>
-            <a:pPr algn="ctr"/>
-          </a:p>
-        </p:txBody>
-      </p:sp>
-      <p:sp>
-        <p:nvSpPr>
-          <p:cNvPr id="17" name="TextBox 16"/>
-          <p:cNvSpPr txBox="1"/>
-          <p:nvPr/>
-        </p:nvSpPr>
-        <p:spPr>
-          <a:xfrm>
-            <a:off x="8757208" y="3657600"/>
-            <a:ext cx="822960" cy="384048"/>
-          </a:xfrm>
-          <a:prstGeom prst="rect">
-            <a:avLst/>
-          </a:prstGeom>
-          <a:noFill/>
-        </p:spPr>
-        <p:txBody>
-          <a:bodyPr wrap="square" anchor="ctr" lIns="18288" rIns="18288" tIns="18288" bIns="18288">
-            <a:spAutoFit/>
-          </a:bodyPr>
-          <a:lstStyle/>
-          <a:p>
-            <a:pPr algn="l">
-              <a:spcAft>
-                <a:spcPts val="600"/>
-              </a:spcAft>
-            </a:pPr>
-            <a:r>
-              <a:rPr sz="1400" b="1">
-                <a:solidFill>
-                  <a:srgbClr val="EEEFF1"/>
-                </a:solidFill>
-                <a:latin typeface="Segoe UI"/>
-              </a:rPr>
-              <a:t>0</a:t>
-            </a:r>
-          </a:p>
-        </p:txBody>
-      </p:sp>
-      <p:sp>
-        <p:nvSpPr>
-          <p:cNvPr id="18" name="TextBox 17"/>
-          <p:cNvSpPr txBox="1"/>
-          <p:nvPr/>
-        </p:nvSpPr>
-        <p:spPr>
-          <a:xfrm>
-            <a:off x="457200" y="6355080"/>
-            <a:ext cx="10515600" cy="320040"/>
-          </a:xfrm>
-          <a:prstGeom prst="rect">
-            <a:avLst/>
-          </a:prstGeom>
-          <a:noFill/>
-        </p:spPr>
-        <p:txBody>
-          <a:bodyPr wrap="square" anchor="t" lIns="18288" rIns="18288" tIns="18288" bIns="18288">
-            <a:spAutoFit/>
-          </a:bodyPr>
-          <a:lstStyle/>
-          <a:p>
-            <a:pPr algn="l">
-              <a:spcAft>
-                <a:spcPts val="600"/>
-              </a:spcAft>
-            </a:pPr>
-            <a:r>
-              <a:rPr sz="1000" b="0">
-                <a:solidFill>
-                  <a:srgbClr val="9AA1AC"/>
-                </a:solidFill>
-                <a:latin typeface="Segoe UI"/>
-              </a:rPr>
-              <a:t>Источник: reports/case_pairs/summary.md, quality.md; data/case/run/registry_pairs.csv</a:t>
-            </a:r>
-          </a:p>
-        </p:txBody>
-      </p:sp>
-      <p:sp>
-        <p:nvSpPr>
-          <p:cNvPr id="19" name="TextBox 18"/>
-          <p:cNvSpPr txBox="1"/>
-          <p:nvPr/>
-        </p:nvSpPr>
-        <p:spPr>
-          <a:xfrm>
-            <a:off x="11155680" y="6355080"/>
-            <a:ext cx="640080" cy="320040"/>
-          </a:xfrm>
-          <a:prstGeom prst="rect">
-            <a:avLst/>
-          </a:prstGeom>
-          <a:noFill/>
-        </p:spPr>
-        <p:txBody>
-          <a:bodyPr wrap="square" anchor="t" lIns="18288" rIns="18288" tIns="18288" bIns="18288">
-            <a:spAutoFit/>
-          </a:bodyPr>
-          <a:lstStyle/>
-          <a:p>
-            <a:pPr algn="r">
-              <a:spcAft>
-                <a:spcPts val="600"/>
-              </a:spcAft>
-            </a:pPr>
-            <a:r>
-              <a:rPr sz="1000" b="0">
-                <a:solidFill>
-                  <a:srgbClr val="9AA1AC"/>
-                </a:solidFill>
-                <a:latin typeface="Segoe UI"/>
-              </a:rPr>
-              <a:t>прил.</a:t>
-            </a:r>
-          </a:p>
-        </p:txBody>
-      </p:sp>
-    </p:spTree>
-  </p:cSld>
-  <p:clrMapOvr>
-    <a:masterClrMapping/>
-  </p:clrMapOvr>
-</p:sld>
-</file>
-
 <file path=ppt/slides/slide22.xml><?xml version="1.0" encoding="utf-8"?>
 <p:sld xmlns:a="http://schemas.openxmlformats.org/drawingml/2006/main" xmlns:p="http://schemas.openxmlformats.org/presentationml/2006/main" xmlns:r="http://schemas.openxmlformats.org/officeDocument/2006/relationships">
   <p:cSld>
@@ -12675,7 +12429,7 @@
                 </a:solidFill>
                 <a:latin typeface="Segoe UI"/>
               </a:rPr>
-              <a:t>22 · Приложение · Детектор</a:t>
+              <a:t>22 · Приложение · Реестр пар и окно синхронизации</a:t>
             </a:r>
           </a:p>
         </p:txBody>
@@ -12714,7 +12468,7 @@
                 </a:solidFill>
                 <a:latin typeface="Segoe UI"/>
               </a:rPr>
-              <a:t>Детектор: F1 0.871 на test MARIDA; на снимках пар — 5 объектов, в полосах 0</a:t>
+              <a:t>318 событий → 29 по метаданным → 12 по маскам → 0 синхронных с учётом дрейфа</a:t>
             </a:r>
           </a:p>
         </p:txBody>
@@ -12747,13 +12501,13 @@
               </a:spcAft>
             </a:pPr>
             <a:r>
-              <a:rPr sz="1500" b="0">
+              <a:rPr sz="1600" b="0">
                 <a:solidFill>
                   <a:srgbClr val="EEEFF1"/>
                 </a:solidFill>
                 <a:latin typeface="Segoe UI"/>
               </a:rPr>
-              <a:t>• LightGBM, порог 0.63 с val; test MARIDA посчитан один раз: ΔF1 к RF 0.100 [0.049; 0.150]</a:t>
+              <a:t>• Для пластика снимков нет: S1 и S2 — открытый океан 2015 г., Sentinel-2A снимает с конца июня 2015 (S1 — 0 сцен в ±5 сут, S2 — 1)</a:t>
             </a:r>
           </a:p>
           <a:p>
@@ -12763,13 +12517,13 @@
               </a:spcAft>
             </a:pPr>
             <a:r>
-              <a:rPr sz="1500" b="0">
+              <a:rPr sz="1600" b="0">
                 <a:solidFill>
                   <a:srgbClr val="EEEFF1"/>
                 </a:solidFill>
                 <a:latin typeface="Segoe UI"/>
               </a:rPr>
-              <a:t>• MARIDA test: на саргассуме и мутной воде ложных 0 (FDI × NDVI помечает 46 % саргассума); ошибки — суда 27 и органика 21</a:t>
+              <a:t>• Дрейф: при типичных 0.2 м/с вода смещается на 23.4 км (медиана) — допуск 3 км держит только |dt| ≤ 4.2 ч</a:t>
             </a:r>
           </a:p>
           <a:p>
@@ -12779,13 +12533,13 @@
               </a:spcAft>
             </a:pPr>
             <a:r>
-              <a:rPr sz="1500" b="0">
+              <a:rPr sz="1600" b="0">
                 <a:solidFill>
                   <a:srgbClr val="EEEFF1"/>
                 </a:solidFill>
                 <a:latin typeface="Segoe UI"/>
               </a:rPr>
-              <a:t>• Снимки пар (L2A): гармонизация каналов выключена по MARIDA val — F1 0.923 без сдвига против 0.897 со сдвигом, Δ −0.025 [−0.072; −0.013]</a:t>
+              <a:t>• Маски в полосе: блик 10, облака 6 (у 4 флаг QA Landsat сомнителен), покрытие 1</a:t>
             </a:r>
           </a:p>
           <a:p>
@@ -12795,29 +12549,13 @@
               </a:spcAft>
             </a:pPr>
             <a:r>
-              <a:rPr sz="1500" b="0">
+              <a:rPr sz="1600" b="0">
                 <a:solidFill>
                   <a:srgbClr val="EEEFF1"/>
                 </a:solidFill>
                 <a:latin typeface="Segoe UI"/>
               </a:rPr>
-              <a:t>• Сейчас: 5 объектов на 22 сценах, в полосах 0; все на HE460 т.03 вне полосы: 4 пена/барашки, 1 вероятно судно (тип по правилам) — все ложные, скоплений нет (суда — известная слабость: 26 % судов)</a:t>
-            </a:r>
-          </a:p>
-          <a:p>
-            <a:pPr algn="l">
-              <a:spcAft>
-                <a:spcPts val="1000"/>
-              </a:spcAft>
-            </a:pPr>
-            <a:r>
-              <a:rPr sz="1500" b="0">
-                <a:solidFill>
-                  <a:srgbClr val="EEEFF1"/>
-                </a:solidFill>
-                <a:latin typeface="Segoe UI"/>
-              </a:rPr>
-              <a:t>• Прежний режим (с гармонизацией) — основание отказа: 975 объектов, вероятное скопление по виду у 1.7 % [0.0; 5.0]; размечал ИИ-агент, один аннотатор, κ 0.77 — его же слепой повтор</a:t>
+              <a:t>• Реестр: строка на каждое из 318 событий, этап отказа и все причины</a:t>
             </a:r>
           </a:p>
         </p:txBody>
@@ -12856,7 +12594,7 @@
                 </a:solidFill>
                 <a:latin typeface="Segoe UI"/>
               </a:rPr>
-              <a:t>F1 Marine Debris, test MARIDA (15 сцен)</a:t>
+              <a:t>События, у которых остаётся пара</a:t>
             </a:r>
           </a:p>
         </p:txBody>
@@ -12895,7 +12633,7 @@
                 </a:solidFill>
                 <a:latin typeface="Segoe UI"/>
               </a:rPr>
-              <a:t>LightGBM (основной)</a:t>
+              <a:t>все события</a:t>
             </a:r>
           </a:p>
         </p:txBody>
@@ -12909,13 +12647,13 @@
         <p:spPr>
           <a:xfrm>
             <a:off x="8647480" y="2212848"/>
-            <a:ext cx="1985530" cy="274320"/>
+            <a:ext cx="2279599" cy="274320"/>
           </a:xfrm>
           <a:prstGeom prst="rect">
             <a:avLst/>
           </a:prstGeom>
           <a:solidFill>
-            <a:srgbClr val="D9912E"/>
+            <a:srgbClr val="5B6370"/>
           </a:solidFill>
           <a:ln>
             <a:noFill/>
@@ -12952,7 +12690,7 @@
         </p:nvSpPr>
         <p:spPr>
           <a:xfrm>
-            <a:off x="10706163" y="2148840"/>
+            <a:off x="11000232" y="2148840"/>
             <a:ext cx="822960" cy="384048"/>
           </a:xfrm>
           <a:prstGeom prst="rect">
@@ -12978,7 +12716,7 @@
                 </a:solidFill>
                 <a:latin typeface="Segoe UI"/>
               </a:rPr>
-              <a:t>0.871</a:t>
+              <a:t>318</a:t>
             </a:r>
           </a:p>
         </p:txBody>
@@ -13017,7 +12755,7 @@
                 </a:solidFill>
                 <a:latin typeface="Segoe UI"/>
               </a:rPr>
-              <a:t>RandomForest, протокол MARIDA</a:t>
+              <a:t>|dt| ≤ 1 сут, облачность ≤ 60 %</a:t>
             </a:r>
           </a:p>
         </p:txBody>
@@ -13031,7 +12769,7 @@
         <p:spPr>
           <a:xfrm>
             <a:off x="8647480" y="2715768"/>
-            <a:ext cx="1757570" cy="274320"/>
+            <a:ext cx="207887" cy="274320"/>
           </a:xfrm>
           <a:prstGeom prst="rect">
             <a:avLst/>
@@ -13074,7 +12812,7 @@
         </p:nvSpPr>
         <p:spPr>
           <a:xfrm>
-            <a:off x="10478203" y="2651760"/>
+            <a:off x="8928520" y="2651760"/>
             <a:ext cx="822960" cy="384048"/>
           </a:xfrm>
           <a:prstGeom prst="rect">
@@ -13100,7 +12838,7 @@
                 </a:solidFill>
                 <a:latin typeface="Segoe UI"/>
               </a:rPr>
-              <a:t>0.771</a:t>
+              <a:t>29</a:t>
             </a:r>
           </a:p>
         </p:txBody>
@@ -13139,7 +12877,7 @@
                 </a:solidFill>
                 <a:latin typeface="Segoe UI"/>
               </a:rPr>
-              <a:t>окно FDI × NDVI</a:t>
+              <a:t>маски качества в полосе</a:t>
             </a:r>
           </a:p>
         </p:txBody>
@@ -13153,7 +12891,7 @@
         <p:spPr>
           <a:xfrm>
             <a:off x="8647480" y="3218688"/>
-            <a:ext cx="95743" cy="274320"/>
+            <a:ext cx="86022" cy="274320"/>
           </a:xfrm>
           <a:prstGeom prst="rect">
             <a:avLst/>
@@ -13196,7 +12934,7 @@
         </p:nvSpPr>
         <p:spPr>
           <a:xfrm>
-            <a:off x="8816375" y="3154680"/>
+            <a:off x="8806655" y="3154680"/>
             <a:ext cx="822960" cy="384048"/>
           </a:xfrm>
           <a:prstGeom prst="rect">
@@ -13222,7 +12960,7 @@
                 </a:solidFill>
                 <a:latin typeface="Segoe UI"/>
               </a:rPr>
-              <a:t>0.042</a:t>
+              <a:t>12</a:t>
             </a:r>
           </a:p>
         </p:txBody>
@@ -13230,6 +12968,128 @@
       <p:sp>
         <p:nvSpPr>
           <p:cNvPr id="15" name="TextBox 14"/>
+          <p:cNvSpPr txBox="1"/>
+          <p:nvPr/>
+        </p:nvSpPr>
+        <p:spPr>
+          <a:xfrm>
+            <a:off x="6400800" y="3657600"/>
+            <a:ext cx="2155240" cy="384048"/>
+          </a:xfrm>
+          <a:prstGeom prst="rect">
+            <a:avLst/>
+          </a:prstGeom>
+          <a:noFill/>
+        </p:spPr>
+        <p:txBody>
+          <a:bodyPr wrap="square" anchor="ctr" lIns="18288" rIns="18288" tIns="18288" bIns="18288">
+            <a:spAutoFit/>
+          </a:bodyPr>
+          <a:lstStyle/>
+          <a:p>
+            <a:pPr algn="l">
+              <a:spcAft>
+                <a:spcPts val="600"/>
+              </a:spcAft>
+            </a:pPr>
+            <a:r>
+              <a:rPr sz="1300" b="0">
+                <a:solidFill>
+                  <a:srgbClr val="EEEFF1"/>
+                </a:solidFill>
+                <a:latin typeface="Segoe UI"/>
+              </a:rPr>
+              <a:t>дрейф ≤ допуска (0.2 м/с)</a:t>
+            </a:r>
+          </a:p>
+        </p:txBody>
+      </p:sp>
+      <p:sp>
+        <p:nvSpPr>
+          <p:cNvPr id="16" name="Rectangle 15"/>
+          <p:cNvSpPr/>
+          <p:nvPr/>
+        </p:nvSpPr>
+        <p:spPr>
+          <a:xfrm>
+            <a:off x="8647480" y="3721608"/>
+            <a:ext cx="36576" cy="274320"/>
+          </a:xfrm>
+          <a:prstGeom prst="rect">
+            <a:avLst/>
+          </a:prstGeom>
+          <a:solidFill>
+            <a:srgbClr val="D9912E"/>
+          </a:solidFill>
+          <a:ln>
+            <a:noFill/>
+          </a:ln>
+          <a:effectLst/>
+        </p:spPr>
+        <p:style>
+          <a:lnRef idx="1">
+            <a:schemeClr val="accent1"/>
+          </a:lnRef>
+          <a:fillRef idx="3">
+            <a:schemeClr val="accent1"/>
+          </a:fillRef>
+          <a:effectRef idx="2">
+            <a:schemeClr val="accent1"/>
+          </a:effectRef>
+          <a:fontRef idx="minor">
+            <a:schemeClr val="lt1"/>
+          </a:fontRef>
+        </p:style>
+        <p:txBody>
+          <a:bodyPr rtlCol="0" anchor="ctr"/>
+          <a:lstStyle/>
+          <a:p>
+            <a:pPr algn="ctr"/>
+          </a:p>
+        </p:txBody>
+      </p:sp>
+      <p:sp>
+        <p:nvSpPr>
+          <p:cNvPr id="17" name="TextBox 16"/>
+          <p:cNvSpPr txBox="1"/>
+          <p:nvPr/>
+        </p:nvSpPr>
+        <p:spPr>
+          <a:xfrm>
+            <a:off x="8757208" y="3657600"/>
+            <a:ext cx="822960" cy="384048"/>
+          </a:xfrm>
+          <a:prstGeom prst="rect">
+            <a:avLst/>
+          </a:prstGeom>
+          <a:noFill/>
+        </p:spPr>
+        <p:txBody>
+          <a:bodyPr wrap="square" anchor="ctr" lIns="18288" rIns="18288" tIns="18288" bIns="18288">
+            <a:spAutoFit/>
+          </a:bodyPr>
+          <a:lstStyle/>
+          <a:p>
+            <a:pPr algn="l">
+              <a:spcAft>
+                <a:spcPts val="600"/>
+              </a:spcAft>
+            </a:pPr>
+            <a:r>
+              <a:rPr sz="1400" b="1">
+                <a:solidFill>
+                  <a:srgbClr val="EEEFF1"/>
+                </a:solidFill>
+                <a:latin typeface="Segoe UI"/>
+              </a:rPr>
+              <a:t>0</a:t>
+            </a:r>
+          </a:p>
+        </p:txBody>
+      </p:sp>
+      <p:sp>
+        <p:nvSpPr>
+          <p:cNvPr id="18" name="TextBox 17"/>
           <p:cNvSpPr txBox="1"/>
           <p:nvPr/>
         </p:nvSpPr>
@@ -13261,14 +13121,14 @@
                 </a:solidFill>
                 <a:latin typeface="Segoe UI"/>
               </a:rPr>
-              <a:t>Источник: reports/case_detector/compare.md; reports/case_pairs/visual_review.md; docs/DECISIONS.md (final_numbers → case.detector_current)</a:t>
-            </a:r>
-          </a:p>
-        </p:txBody>
-      </p:sp>
-      <p:sp>
-        <p:nvSpPr>
-          <p:cNvPr id="16" name="TextBox 15"/>
+              <a:t>Источник: reports/case_pairs/summary.md, quality.md; data/case/run/registry_pairs.csv</a:t>
+            </a:r>
+          </a:p>
+        </p:txBody>
+      </p:sp>
+      <p:sp>
+        <p:nvSpPr>
+          <p:cNvPr id="19" name="TextBox 18"/>
           <p:cNvSpPr txBox="1"/>
           <p:nvPr/>
         </p:nvSpPr>
@@ -13365,7 +13225,697 @@
                 </a:solidFill>
                 <a:latin typeface="Segoe UI"/>
               </a:rPr>
-              <a:t>23 · Приложение · Концентрация</a:t>
+              <a:t>23 · Приложение · Детектор</a:t>
+            </a:r>
+          </a:p>
+        </p:txBody>
+      </p:sp>
+      <p:sp>
+        <p:nvSpPr>
+          <p:cNvPr id="3" name="TextBox 2"/>
+          <p:cNvSpPr txBox="1"/>
+          <p:nvPr/>
+        </p:nvSpPr>
+        <p:spPr>
+          <a:xfrm>
+            <a:off x="457200" y="457200"/>
+            <a:ext cx="11247120" cy="960120"/>
+          </a:xfrm>
+          <a:prstGeom prst="rect">
+            <a:avLst/>
+          </a:prstGeom>
+          <a:noFill/>
+        </p:spPr>
+        <p:txBody>
+          <a:bodyPr wrap="square" anchor="t" lIns="18288" rIns="18288" tIns="18288" bIns="18288">
+            <a:spAutoFit/>
+          </a:bodyPr>
+          <a:lstStyle/>
+          <a:p>
+            <a:pPr algn="l">
+              <a:spcAft>
+                <a:spcPts val="600"/>
+              </a:spcAft>
+            </a:pPr>
+            <a:r>
+              <a:rPr sz="2600" b="1">
+                <a:solidFill>
+                  <a:srgbClr val="EEEFF1"/>
+                </a:solidFill>
+                <a:latin typeface="Segoe UI"/>
+              </a:rPr>
+              <a:t>Детектор: F1 0.871 на test MARIDA; на снимках пар — 5 объектов, в полосах 0</a:t>
+            </a:r>
+          </a:p>
+        </p:txBody>
+      </p:sp>
+      <p:sp>
+        <p:nvSpPr>
+          <p:cNvPr id="4" name="TextBox 3"/>
+          <p:cNvSpPr txBox="1"/>
+          <p:nvPr/>
+        </p:nvSpPr>
+        <p:spPr>
+          <a:xfrm>
+            <a:off x="457200" y="1600200"/>
+            <a:ext cx="5577840" cy="4572000"/>
+          </a:xfrm>
+          <a:prstGeom prst="rect">
+            <a:avLst/>
+          </a:prstGeom>
+          <a:noFill/>
+        </p:spPr>
+        <p:txBody>
+          <a:bodyPr wrap="square" anchor="t" lIns="18288" rIns="18288" tIns="18288" bIns="18288">
+            <a:spAutoFit/>
+          </a:bodyPr>
+          <a:lstStyle/>
+          <a:p>
+            <a:pPr algn="l">
+              <a:spcAft>
+                <a:spcPts val="1000"/>
+              </a:spcAft>
+            </a:pPr>
+            <a:r>
+              <a:rPr sz="1500" b="0">
+                <a:solidFill>
+                  <a:srgbClr val="EEEFF1"/>
+                </a:solidFill>
+                <a:latin typeface="Segoe UI"/>
+              </a:rPr>
+              <a:t>• LightGBM, порог 0.63 с val; test MARIDA посчитан один раз: ΔF1 к RF 0.100 [0.049; 0.150]</a:t>
+            </a:r>
+          </a:p>
+          <a:p>
+            <a:pPr algn="l">
+              <a:spcAft>
+                <a:spcPts val="1000"/>
+              </a:spcAft>
+            </a:pPr>
+            <a:r>
+              <a:rPr sz="1500" b="0">
+                <a:solidFill>
+                  <a:srgbClr val="EEEFF1"/>
+                </a:solidFill>
+                <a:latin typeface="Segoe UI"/>
+              </a:rPr>
+              <a:t>• MARIDA test: на саргассуме и мутной воде ложных 0 (FDI × NDVI помечает 46 % саргассума); ошибки — суда 27 и органика 21</a:t>
+            </a:r>
+          </a:p>
+          <a:p>
+            <a:pPr algn="l">
+              <a:spcAft>
+                <a:spcPts val="1000"/>
+              </a:spcAft>
+            </a:pPr>
+            <a:r>
+              <a:rPr sz="1500" b="0">
+                <a:solidFill>
+                  <a:srgbClr val="EEEFF1"/>
+                </a:solidFill>
+                <a:latin typeface="Segoe UI"/>
+              </a:rPr>
+              <a:t>• Снимки пар (L2A): гармонизация каналов выключена по MARIDA val — F1 0.923 без сдвига против 0.897 со сдвигом, Δ −0.025 [−0.072; −0.013]</a:t>
+            </a:r>
+          </a:p>
+          <a:p>
+            <a:pPr algn="l">
+              <a:spcAft>
+                <a:spcPts val="1000"/>
+              </a:spcAft>
+            </a:pPr>
+            <a:r>
+              <a:rPr sz="1500" b="0">
+                <a:solidFill>
+                  <a:srgbClr val="EEEFF1"/>
+                </a:solidFill>
+                <a:latin typeface="Segoe UI"/>
+              </a:rPr>
+              <a:t>• Сейчас: 5 объектов на 22 сценах, в полосах 0; все на HE460 т.03 вне полосы: 4 пена/барашки, 1 вероятно судно (тип по правилам) — все ложные, скоплений нет (суда — известная слабость: 26 % судов)</a:t>
+            </a:r>
+          </a:p>
+          <a:p>
+            <a:pPr algn="l">
+              <a:spcAft>
+                <a:spcPts val="1000"/>
+              </a:spcAft>
+            </a:pPr>
+            <a:r>
+              <a:rPr sz="1500" b="0">
+                <a:solidFill>
+                  <a:srgbClr val="EEEFF1"/>
+                </a:solidFill>
+                <a:latin typeface="Segoe UI"/>
+              </a:rPr>
+              <a:t>• Прежний режим (с гармонизацией) — основание отказа: 975 объектов, вероятное скопление по виду у 1.7 % [0.0; 5.0]; размечал ИИ-агент, один аннотатор, κ 0.77 — его же слепой повтор</a:t>
+            </a:r>
+          </a:p>
+        </p:txBody>
+      </p:sp>
+      <p:sp>
+        <p:nvSpPr>
+          <p:cNvPr id="5" name="TextBox 4"/>
+          <p:cNvSpPr txBox="1"/>
+          <p:nvPr/>
+        </p:nvSpPr>
+        <p:spPr>
+          <a:xfrm>
+            <a:off x="6400800" y="1691640"/>
+            <a:ext cx="5349240" cy="365760"/>
+          </a:xfrm>
+          <a:prstGeom prst="rect">
+            <a:avLst/>
+          </a:prstGeom>
+          <a:noFill/>
+        </p:spPr>
+        <p:txBody>
+          <a:bodyPr wrap="square" anchor="t" lIns="18288" rIns="18288" tIns="18288" bIns="18288">
+            <a:spAutoFit/>
+          </a:bodyPr>
+          <a:lstStyle/>
+          <a:p>
+            <a:pPr algn="l">
+              <a:spcAft>
+                <a:spcPts val="600"/>
+              </a:spcAft>
+            </a:pPr>
+            <a:r>
+              <a:rPr sz="1400" b="0">
+                <a:solidFill>
+                  <a:srgbClr val="9AA1AC"/>
+                </a:solidFill>
+                <a:latin typeface="Segoe UI"/>
+              </a:rPr>
+              <a:t>F1 Marine Debris, test MARIDA (15 сцен)</a:t>
+            </a:r>
+          </a:p>
+        </p:txBody>
+      </p:sp>
+      <p:sp>
+        <p:nvSpPr>
+          <p:cNvPr id="6" name="TextBox 5"/>
+          <p:cNvSpPr txBox="1"/>
+          <p:nvPr/>
+        </p:nvSpPr>
+        <p:spPr>
+          <a:xfrm>
+            <a:off x="6400800" y="2148840"/>
+            <a:ext cx="2155240" cy="384048"/>
+          </a:xfrm>
+          <a:prstGeom prst="rect">
+            <a:avLst/>
+          </a:prstGeom>
+          <a:noFill/>
+        </p:spPr>
+        <p:txBody>
+          <a:bodyPr wrap="square" anchor="ctr" lIns="18288" rIns="18288" tIns="18288" bIns="18288">
+            <a:spAutoFit/>
+          </a:bodyPr>
+          <a:lstStyle/>
+          <a:p>
+            <a:pPr algn="l">
+              <a:spcAft>
+                <a:spcPts val="600"/>
+              </a:spcAft>
+            </a:pPr>
+            <a:r>
+              <a:rPr sz="1300" b="0">
+                <a:solidFill>
+                  <a:srgbClr val="EEEFF1"/>
+                </a:solidFill>
+                <a:latin typeface="Segoe UI"/>
+              </a:rPr>
+              <a:t>LightGBM (основной)</a:t>
+            </a:r>
+          </a:p>
+        </p:txBody>
+      </p:sp>
+      <p:sp>
+        <p:nvSpPr>
+          <p:cNvPr id="7" name="Rectangle 6"/>
+          <p:cNvSpPr/>
+          <p:nvPr/>
+        </p:nvSpPr>
+        <p:spPr>
+          <a:xfrm>
+            <a:off x="8647480" y="2212848"/>
+            <a:ext cx="1985530" cy="274320"/>
+          </a:xfrm>
+          <a:prstGeom prst="rect">
+            <a:avLst/>
+          </a:prstGeom>
+          <a:solidFill>
+            <a:srgbClr val="D9912E"/>
+          </a:solidFill>
+          <a:ln>
+            <a:noFill/>
+          </a:ln>
+          <a:effectLst/>
+        </p:spPr>
+        <p:style>
+          <a:lnRef idx="1">
+            <a:schemeClr val="accent1"/>
+          </a:lnRef>
+          <a:fillRef idx="3">
+            <a:schemeClr val="accent1"/>
+          </a:fillRef>
+          <a:effectRef idx="2">
+            <a:schemeClr val="accent1"/>
+          </a:effectRef>
+          <a:fontRef idx="minor">
+            <a:schemeClr val="lt1"/>
+          </a:fontRef>
+        </p:style>
+        <p:txBody>
+          <a:bodyPr rtlCol="0" anchor="ctr"/>
+          <a:lstStyle/>
+          <a:p>
+            <a:pPr algn="ctr"/>
+          </a:p>
+        </p:txBody>
+      </p:sp>
+      <p:sp>
+        <p:nvSpPr>
+          <p:cNvPr id="8" name="TextBox 7"/>
+          <p:cNvSpPr txBox="1"/>
+          <p:nvPr/>
+        </p:nvSpPr>
+        <p:spPr>
+          <a:xfrm>
+            <a:off x="10706163" y="2148840"/>
+            <a:ext cx="822960" cy="384048"/>
+          </a:xfrm>
+          <a:prstGeom prst="rect">
+            <a:avLst/>
+          </a:prstGeom>
+          <a:noFill/>
+        </p:spPr>
+        <p:txBody>
+          <a:bodyPr wrap="square" anchor="ctr" lIns="18288" rIns="18288" tIns="18288" bIns="18288">
+            <a:spAutoFit/>
+          </a:bodyPr>
+          <a:lstStyle/>
+          <a:p>
+            <a:pPr algn="l">
+              <a:spcAft>
+                <a:spcPts val="600"/>
+              </a:spcAft>
+            </a:pPr>
+            <a:r>
+              <a:rPr sz="1400" b="1">
+                <a:solidFill>
+                  <a:srgbClr val="EEEFF1"/>
+                </a:solidFill>
+                <a:latin typeface="Segoe UI"/>
+              </a:rPr>
+              <a:t>0.871</a:t>
+            </a:r>
+          </a:p>
+        </p:txBody>
+      </p:sp>
+      <p:sp>
+        <p:nvSpPr>
+          <p:cNvPr id="9" name="TextBox 8"/>
+          <p:cNvSpPr txBox="1"/>
+          <p:nvPr/>
+        </p:nvSpPr>
+        <p:spPr>
+          <a:xfrm>
+            <a:off x="6400800" y="2651760"/>
+            <a:ext cx="2155240" cy="384048"/>
+          </a:xfrm>
+          <a:prstGeom prst="rect">
+            <a:avLst/>
+          </a:prstGeom>
+          <a:noFill/>
+        </p:spPr>
+        <p:txBody>
+          <a:bodyPr wrap="square" anchor="ctr" lIns="18288" rIns="18288" tIns="18288" bIns="18288">
+            <a:spAutoFit/>
+          </a:bodyPr>
+          <a:lstStyle/>
+          <a:p>
+            <a:pPr algn="l">
+              <a:spcAft>
+                <a:spcPts val="600"/>
+              </a:spcAft>
+            </a:pPr>
+            <a:r>
+              <a:rPr sz="1300" b="0">
+                <a:solidFill>
+                  <a:srgbClr val="EEEFF1"/>
+                </a:solidFill>
+                <a:latin typeface="Segoe UI"/>
+              </a:rPr>
+              <a:t>RandomForest, протокол MARIDA</a:t>
+            </a:r>
+          </a:p>
+        </p:txBody>
+      </p:sp>
+      <p:sp>
+        <p:nvSpPr>
+          <p:cNvPr id="10" name="Rectangle 9"/>
+          <p:cNvSpPr/>
+          <p:nvPr/>
+        </p:nvSpPr>
+        <p:spPr>
+          <a:xfrm>
+            <a:off x="8647480" y="2715768"/>
+            <a:ext cx="1757570" cy="274320"/>
+          </a:xfrm>
+          <a:prstGeom prst="rect">
+            <a:avLst/>
+          </a:prstGeom>
+          <a:solidFill>
+            <a:srgbClr val="5B6370"/>
+          </a:solidFill>
+          <a:ln>
+            <a:noFill/>
+          </a:ln>
+          <a:effectLst/>
+        </p:spPr>
+        <p:style>
+          <a:lnRef idx="1">
+            <a:schemeClr val="accent1"/>
+          </a:lnRef>
+          <a:fillRef idx="3">
+            <a:schemeClr val="accent1"/>
+          </a:fillRef>
+          <a:effectRef idx="2">
+            <a:schemeClr val="accent1"/>
+          </a:effectRef>
+          <a:fontRef idx="minor">
+            <a:schemeClr val="lt1"/>
+          </a:fontRef>
+        </p:style>
+        <p:txBody>
+          <a:bodyPr rtlCol="0" anchor="ctr"/>
+          <a:lstStyle/>
+          <a:p>
+            <a:pPr algn="ctr"/>
+          </a:p>
+        </p:txBody>
+      </p:sp>
+      <p:sp>
+        <p:nvSpPr>
+          <p:cNvPr id="11" name="TextBox 10"/>
+          <p:cNvSpPr txBox="1"/>
+          <p:nvPr/>
+        </p:nvSpPr>
+        <p:spPr>
+          <a:xfrm>
+            <a:off x="10478203" y="2651760"/>
+            <a:ext cx="822960" cy="384048"/>
+          </a:xfrm>
+          <a:prstGeom prst="rect">
+            <a:avLst/>
+          </a:prstGeom>
+          <a:noFill/>
+        </p:spPr>
+        <p:txBody>
+          <a:bodyPr wrap="square" anchor="ctr" lIns="18288" rIns="18288" tIns="18288" bIns="18288">
+            <a:spAutoFit/>
+          </a:bodyPr>
+          <a:lstStyle/>
+          <a:p>
+            <a:pPr algn="l">
+              <a:spcAft>
+                <a:spcPts val="600"/>
+              </a:spcAft>
+            </a:pPr>
+            <a:r>
+              <a:rPr sz="1400" b="1">
+                <a:solidFill>
+                  <a:srgbClr val="EEEFF1"/>
+                </a:solidFill>
+                <a:latin typeface="Segoe UI"/>
+              </a:rPr>
+              <a:t>0.771</a:t>
+            </a:r>
+          </a:p>
+        </p:txBody>
+      </p:sp>
+      <p:sp>
+        <p:nvSpPr>
+          <p:cNvPr id="12" name="TextBox 11"/>
+          <p:cNvSpPr txBox="1"/>
+          <p:nvPr/>
+        </p:nvSpPr>
+        <p:spPr>
+          <a:xfrm>
+            <a:off x="6400800" y="3154680"/>
+            <a:ext cx="2155240" cy="384048"/>
+          </a:xfrm>
+          <a:prstGeom prst="rect">
+            <a:avLst/>
+          </a:prstGeom>
+          <a:noFill/>
+        </p:spPr>
+        <p:txBody>
+          <a:bodyPr wrap="square" anchor="ctr" lIns="18288" rIns="18288" tIns="18288" bIns="18288">
+            <a:spAutoFit/>
+          </a:bodyPr>
+          <a:lstStyle/>
+          <a:p>
+            <a:pPr algn="l">
+              <a:spcAft>
+                <a:spcPts val="600"/>
+              </a:spcAft>
+            </a:pPr>
+            <a:r>
+              <a:rPr sz="1300" b="0">
+                <a:solidFill>
+                  <a:srgbClr val="EEEFF1"/>
+                </a:solidFill>
+                <a:latin typeface="Segoe UI"/>
+              </a:rPr>
+              <a:t>окно FDI × NDVI</a:t>
+            </a:r>
+          </a:p>
+        </p:txBody>
+      </p:sp>
+      <p:sp>
+        <p:nvSpPr>
+          <p:cNvPr id="13" name="Rectangle 12"/>
+          <p:cNvSpPr/>
+          <p:nvPr/>
+        </p:nvSpPr>
+        <p:spPr>
+          <a:xfrm>
+            <a:off x="8647480" y="3218688"/>
+            <a:ext cx="95743" cy="274320"/>
+          </a:xfrm>
+          <a:prstGeom prst="rect">
+            <a:avLst/>
+          </a:prstGeom>
+          <a:solidFill>
+            <a:srgbClr val="5B6370"/>
+          </a:solidFill>
+          <a:ln>
+            <a:noFill/>
+          </a:ln>
+          <a:effectLst/>
+        </p:spPr>
+        <p:style>
+          <a:lnRef idx="1">
+            <a:schemeClr val="accent1"/>
+          </a:lnRef>
+          <a:fillRef idx="3">
+            <a:schemeClr val="accent1"/>
+          </a:fillRef>
+          <a:effectRef idx="2">
+            <a:schemeClr val="accent1"/>
+          </a:effectRef>
+          <a:fontRef idx="minor">
+            <a:schemeClr val="lt1"/>
+          </a:fontRef>
+        </p:style>
+        <p:txBody>
+          <a:bodyPr rtlCol="0" anchor="ctr"/>
+          <a:lstStyle/>
+          <a:p>
+            <a:pPr algn="ctr"/>
+          </a:p>
+        </p:txBody>
+      </p:sp>
+      <p:sp>
+        <p:nvSpPr>
+          <p:cNvPr id="14" name="TextBox 13"/>
+          <p:cNvSpPr txBox="1"/>
+          <p:nvPr/>
+        </p:nvSpPr>
+        <p:spPr>
+          <a:xfrm>
+            <a:off x="8816375" y="3154680"/>
+            <a:ext cx="822960" cy="384048"/>
+          </a:xfrm>
+          <a:prstGeom prst="rect">
+            <a:avLst/>
+          </a:prstGeom>
+          <a:noFill/>
+        </p:spPr>
+        <p:txBody>
+          <a:bodyPr wrap="square" anchor="ctr" lIns="18288" rIns="18288" tIns="18288" bIns="18288">
+            <a:spAutoFit/>
+          </a:bodyPr>
+          <a:lstStyle/>
+          <a:p>
+            <a:pPr algn="l">
+              <a:spcAft>
+                <a:spcPts val="600"/>
+              </a:spcAft>
+            </a:pPr>
+            <a:r>
+              <a:rPr sz="1400" b="1">
+                <a:solidFill>
+                  <a:srgbClr val="EEEFF1"/>
+                </a:solidFill>
+                <a:latin typeface="Segoe UI"/>
+              </a:rPr>
+              <a:t>0.042</a:t>
+            </a:r>
+          </a:p>
+        </p:txBody>
+      </p:sp>
+      <p:sp>
+        <p:nvSpPr>
+          <p:cNvPr id="15" name="TextBox 14"/>
+          <p:cNvSpPr txBox="1"/>
+          <p:nvPr/>
+        </p:nvSpPr>
+        <p:spPr>
+          <a:xfrm>
+            <a:off x="457200" y="6355080"/>
+            <a:ext cx="10515600" cy="320040"/>
+          </a:xfrm>
+          <a:prstGeom prst="rect">
+            <a:avLst/>
+          </a:prstGeom>
+          <a:noFill/>
+        </p:spPr>
+        <p:txBody>
+          <a:bodyPr wrap="square" anchor="t" lIns="18288" rIns="18288" tIns="18288" bIns="18288">
+            <a:spAutoFit/>
+          </a:bodyPr>
+          <a:lstStyle/>
+          <a:p>
+            <a:pPr algn="l">
+              <a:spcAft>
+                <a:spcPts val="600"/>
+              </a:spcAft>
+            </a:pPr>
+            <a:r>
+              <a:rPr sz="1000" b="0">
+                <a:solidFill>
+                  <a:srgbClr val="9AA1AC"/>
+                </a:solidFill>
+                <a:latin typeface="Segoe UI"/>
+              </a:rPr>
+              <a:t>Источник: reports/case_detector/compare.md; reports/case_pairs/visual_review.md; docs/DECISIONS.md (final_numbers → case.detector_current)</a:t>
+            </a:r>
+          </a:p>
+        </p:txBody>
+      </p:sp>
+      <p:sp>
+        <p:nvSpPr>
+          <p:cNvPr id="16" name="TextBox 15"/>
+          <p:cNvSpPr txBox="1"/>
+          <p:nvPr/>
+        </p:nvSpPr>
+        <p:spPr>
+          <a:xfrm>
+            <a:off x="11155680" y="6355080"/>
+            <a:ext cx="640080" cy="320040"/>
+          </a:xfrm>
+          <a:prstGeom prst="rect">
+            <a:avLst/>
+          </a:prstGeom>
+          <a:noFill/>
+        </p:spPr>
+        <p:txBody>
+          <a:bodyPr wrap="square" anchor="t" lIns="18288" rIns="18288" tIns="18288" bIns="18288">
+            <a:spAutoFit/>
+          </a:bodyPr>
+          <a:lstStyle/>
+          <a:p>
+            <a:pPr algn="r">
+              <a:spcAft>
+                <a:spcPts val="600"/>
+              </a:spcAft>
+            </a:pPr>
+            <a:r>
+              <a:rPr sz="1000" b="0">
+                <a:solidFill>
+                  <a:srgbClr val="9AA1AC"/>
+                </a:solidFill>
+                <a:latin typeface="Segoe UI"/>
+              </a:rPr>
+              <a:t>прил.</a:t>
+            </a:r>
+          </a:p>
+        </p:txBody>
+      </p:sp>
+    </p:spTree>
+  </p:cSld>
+  <p:clrMapOvr>
+    <a:masterClrMapping/>
+  </p:clrMapOvr>
+</p:sld>
+</file>
+
+<file path=ppt/slides/slide24.xml><?xml version="1.0" encoding="utf-8"?>
+<p:sld xmlns:a="http://schemas.openxmlformats.org/drawingml/2006/main" xmlns:p="http://schemas.openxmlformats.org/presentationml/2006/main" xmlns:r="http://schemas.openxmlformats.org/officeDocument/2006/relationships">
+  <p:cSld>
+    <p:bg>
+      <p:bgPr>
+        <a:solidFill>
+          <a:srgbClr val="101216"/>
+        </a:solidFill>
+        <a:effectLst/>
+      </p:bgPr>
+    </p:bg>
+    <p:spTree>
+      <p:nvGrpSpPr>
+        <p:cNvPr id="1" name=""/>
+        <p:cNvGrpSpPr/>
+        <p:nvPr/>
+      </p:nvGrpSpPr>
+      <p:grpSpPr/>
+      <p:sp>
+        <p:nvSpPr>
+          <p:cNvPr id="2" name="TextBox 1"/>
+          <p:cNvSpPr txBox="1"/>
+          <p:nvPr/>
+        </p:nvSpPr>
+        <p:spPr>
+          <a:xfrm>
+            <a:off x="457200" y="201168"/>
+            <a:ext cx="8229600" cy="274320"/>
+          </a:xfrm>
+          <a:prstGeom prst="rect">
+            <a:avLst/>
+          </a:prstGeom>
+          <a:noFill/>
+        </p:spPr>
+        <p:txBody>
+          <a:bodyPr wrap="square" anchor="t" lIns="18288" rIns="18288" tIns="18288" bIns="18288">
+            <a:spAutoFit/>
+          </a:bodyPr>
+          <a:lstStyle/>
+          <a:p>
+            <a:pPr algn="l">
+              <a:spcAft>
+                <a:spcPts val="600"/>
+              </a:spcAft>
+            </a:pPr>
+            <a:r>
+              <a:rPr sz="1200" b="1">
+                <a:solidFill>
+                  <a:srgbClr val="D9912E"/>
+                </a:solidFill>
+                <a:latin typeface="Segoe UI"/>
+              </a:rPr>
+              <a:t>24 · Приложение · Концентрация</a:t>
             </a:r>
           </a:p>
         </p:txBody>
@@ -13890,397 +14440,6 @@
 </p:sld>
 </file>
 
-<file path=ppt/slides/slide24.xml><?xml version="1.0" encoding="utf-8"?>
-<p:sld xmlns:a="http://schemas.openxmlformats.org/drawingml/2006/main" xmlns:p="http://schemas.openxmlformats.org/presentationml/2006/main" xmlns:r="http://schemas.openxmlformats.org/officeDocument/2006/relationships">
-  <p:cSld>
-    <p:bg>
-      <p:bgPr>
-        <a:solidFill>
-          <a:srgbClr val="101216"/>
-        </a:solidFill>
-        <a:effectLst/>
-      </p:bgPr>
-    </p:bg>
-    <p:spTree>
-      <p:nvGrpSpPr>
-        <p:cNvPr id="1" name=""/>
-        <p:cNvGrpSpPr/>
-        <p:nvPr/>
-      </p:nvGrpSpPr>
-      <p:grpSpPr/>
-      <p:sp>
-        <p:nvSpPr>
-          <p:cNvPr id="2" name="TextBox 1"/>
-          <p:cNvSpPr txBox="1"/>
-          <p:nvPr/>
-        </p:nvSpPr>
-        <p:spPr>
-          <a:xfrm>
-            <a:off x="457200" y="201168"/>
-            <a:ext cx="8229600" cy="274320"/>
-          </a:xfrm>
-          <a:prstGeom prst="rect">
-            <a:avLst/>
-          </a:prstGeom>
-          <a:noFill/>
-        </p:spPr>
-        <p:txBody>
-          <a:bodyPr wrap="square" anchor="t" lIns="18288" rIns="18288" tIns="18288" bIns="18288">
-            <a:spAutoFit/>
-          </a:bodyPr>
-          <a:lstStyle/>
-          <a:p>
-            <a:pPr algn="l">
-              <a:spcAft>
-                <a:spcPts val="600"/>
-              </a:spcAft>
-            </a:pPr>
-            <a:r>
-              <a:rPr sz="1200" b="1">
-                <a:solidFill>
-                  <a:srgbClr val="D9912E"/>
-                </a:solidFill>
-                <a:latin typeface="Segoe UI"/>
-              </a:rPr>
-              <a:t>24 · Приложение · Эксперимент «снимок vs all_litter»</a:t>
-            </a:r>
-          </a:p>
-        </p:txBody>
-      </p:sp>
-      <p:sp>
-        <p:nvSpPr>
-          <p:cNvPr id="3" name="TextBox 2"/>
-          <p:cNvSpPr txBox="1"/>
-          <p:nvPr/>
-        </p:nvSpPr>
-        <p:spPr>
-          <a:xfrm>
-            <a:off x="457200" y="457200"/>
-            <a:ext cx="11247120" cy="960120"/>
-          </a:xfrm>
-          <a:prstGeom prst="rect">
-            <a:avLst/>
-          </a:prstGeom>
-          <a:noFill/>
-        </p:spPr>
-        <p:txBody>
-          <a:bodyPr wrap="square" anchor="t" lIns="18288" rIns="18288" tIns="18288" bIns="18288">
-            <a:spAutoFit/>
-          </a:bodyPr>
-          <a:lstStyle/>
-          <a:p>
-            <a:pPr algn="l">
-              <a:spcAft>
-                <a:spcPts val="600"/>
-              </a:spcAft>
-            </a:pPr>
-            <a:r>
-              <a:rPr sz="2600" b="1">
-                <a:solidFill>
-                  <a:srgbClr val="EEEFF1"/>
-                </a:solidFill>
-                <a:latin typeface="Segoe UI"/>
-              </a:rPr>
-              <a:t>Связь признаков снимка с полевой плотностью всего мусора не установлена: данных на это мало</a:t>
-            </a:r>
-          </a:p>
-        </p:txBody>
-      </p:sp>
-      <p:sp>
-        <p:nvSpPr>
-          <p:cNvPr id="4" name="TextBox 3"/>
-          <p:cNvSpPr txBox="1"/>
-          <p:nvPr/>
-        </p:nvSpPr>
-        <p:spPr>
-          <a:xfrm>
-            <a:off x="457200" y="1600200"/>
-            <a:ext cx="5577840" cy="4572000"/>
-          </a:xfrm>
-          <a:prstGeom prst="rect">
-            <a:avLst/>
-          </a:prstGeom>
-          <a:noFill/>
-        </p:spPr>
-        <p:txBody>
-          <a:bodyPr wrap="square" anchor="t" lIns="18288" rIns="18288" tIns="18288" bIns="18288">
-            <a:spAutoFit/>
-          </a:bodyPr>
-          <a:lstStyle/>
-          <a:p>
-            <a:pPr algn="l">
-              <a:spcAft>
-                <a:spcPts val="1000"/>
-              </a:spcAft>
-            </a:pPr>
-            <a:r>
-              <a:rPr sz="1600" b="0">
-                <a:solidFill>
-                  <a:srgbClr val="EEEFF1"/>
-                </a:solidFill>
-                <a:latin typeface="Segoe UI"/>
-              </a:rPr>
-              <a:t>• 11 пар S2 прошли маски, независимых групп «район × день» — 6; эталон — весь мусор, не пластик</a:t>
-            </a:r>
-          </a:p>
-          <a:p>
-            <a:pPr algn="l">
-              <a:spcAft>
-                <a:spcPts val="1000"/>
-              </a:spcAft>
-            </a:pPr>
-            <a:r>
-              <a:rPr sz="1600" b="0">
-                <a:solidFill>
-                  <a:srgbClr val="EEEFF1"/>
-                </a:solidFill>
-                <a:latin typeface="Segoe UI"/>
-              </a:rPr>
-              <a:t>• FDI в полосе: ρ −0.75 [−1.00; −0.14], p Холма 0.12; та же полоса в случайной воде сцены — −0.52</a:t>
-            </a:r>
-          </a:p>
-          <a:p>
-            <a:pPr algn="l">
-              <a:spcAft>
-                <a:spcPts val="1000"/>
-              </a:spcAft>
-            </a:pPr>
-            <a:r>
-              <a:rPr sz="1600" b="0">
-                <a:solidFill>
-                  <a:srgbClr val="EEEFF1"/>
-                </a:solidFill>
-                <a:latin typeface="Segoe UI"/>
-              </a:rPr>
-              <a:t>• Значит, связь на уровне сцены или дня, а не места; знак к тому же обратный ожидаемому</a:t>
-            </a:r>
-          </a:p>
-          <a:p>
-            <a:pPr algn="l">
-              <a:spcAft>
-                <a:spcPts val="1000"/>
-              </a:spcAft>
-            </a:pPr>
-            <a:r>
-              <a:rPr sz="1600" b="0">
-                <a:solidFill>
-                  <a:srgbClr val="EEEFF1"/>
-                </a:solidFill>
-                <a:latin typeface="Segoe UI"/>
-              </a:rPr>
-              <a:t>• Мощность: при 6 группах видна только |ρ| ≥ 0.96; для ρ = 0.5 нужно ≈ 33 независимых пар</a:t>
-            </a:r>
-          </a:p>
-        </p:txBody>
-      </p:sp>
-      <p:sp>
-        <p:nvSpPr>
-          <p:cNvPr id="5" name="Rectangle 4"/>
-          <p:cNvSpPr/>
-          <p:nvPr/>
-        </p:nvSpPr>
-        <p:spPr>
-          <a:xfrm>
-            <a:off x="6400800" y="1691640"/>
-            <a:ext cx="5349240" cy="1554480"/>
-          </a:xfrm>
-          <a:prstGeom prst="rect">
-            <a:avLst/>
-          </a:prstGeom>
-          <a:solidFill>
-            <a:srgbClr val="1B1E24"/>
-          </a:solidFill>
-          <a:ln>
-            <a:noFill/>
-          </a:ln>
-          <a:effectLst/>
-        </p:spPr>
-        <p:style>
-          <a:lnRef idx="1">
-            <a:schemeClr val="accent1"/>
-          </a:lnRef>
-          <a:fillRef idx="3">
-            <a:schemeClr val="accent1"/>
-          </a:fillRef>
-          <a:effectRef idx="2">
-            <a:schemeClr val="accent1"/>
-          </a:effectRef>
-          <a:fontRef idx="minor">
-            <a:schemeClr val="lt1"/>
-          </a:fontRef>
-        </p:style>
-        <p:txBody>
-          <a:bodyPr rtlCol="0" anchor="ctr"/>
-          <a:lstStyle/>
-          <a:p>
-            <a:pPr algn="ctr"/>
-          </a:p>
-        </p:txBody>
-      </p:sp>
-      <p:sp>
-        <p:nvSpPr>
-          <p:cNvPr id="6" name="TextBox 5"/>
-          <p:cNvSpPr txBox="1"/>
-          <p:nvPr/>
-        </p:nvSpPr>
-        <p:spPr>
-          <a:xfrm>
-            <a:off x="6675120" y="1783080"/>
-            <a:ext cx="4800600" cy="822960"/>
-          </a:xfrm>
-          <a:prstGeom prst="rect">
-            <a:avLst/>
-          </a:prstGeom>
-          <a:noFill/>
-        </p:spPr>
-        <p:txBody>
-          <a:bodyPr wrap="square" anchor="t" lIns="18288" rIns="18288" tIns="18288" bIns="18288">
-            <a:spAutoFit/>
-          </a:bodyPr>
-          <a:lstStyle/>
-          <a:p>
-            <a:pPr algn="l">
-              <a:spcAft>
-                <a:spcPts val="600"/>
-              </a:spcAft>
-            </a:pPr>
-            <a:r>
-              <a:rPr sz="4800" b="1">
-                <a:solidFill>
-                  <a:srgbClr val="D9912E"/>
-                </a:solidFill>
-                <a:latin typeface="Segoe UI"/>
-              </a:rPr>
-              <a:t>33</a:t>
-            </a:r>
-          </a:p>
-        </p:txBody>
-      </p:sp>
-      <p:sp>
-        <p:nvSpPr>
-          <p:cNvPr id="7" name="TextBox 6"/>
-          <p:cNvSpPr txBox="1"/>
-          <p:nvPr/>
-        </p:nvSpPr>
-        <p:spPr>
-          <a:xfrm>
-            <a:off x="6675120" y="2606040"/>
-            <a:ext cx="4800600" cy="594360"/>
-          </a:xfrm>
-          <a:prstGeom prst="rect">
-            <a:avLst/>
-          </a:prstGeom>
-          <a:noFill/>
-        </p:spPr>
-        <p:txBody>
-          <a:bodyPr wrap="square" anchor="t" lIns="18288" rIns="18288" tIns="18288" bIns="18288">
-            <a:spAutoFit/>
-          </a:bodyPr>
-          <a:lstStyle/>
-          <a:p>
-            <a:pPr algn="l">
-              <a:spcAft>
-                <a:spcPts val="600"/>
-              </a:spcAft>
-            </a:pPr>
-            <a:r>
-              <a:rPr sz="1300" b="0">
-                <a:solidFill>
-                  <a:srgbClr val="EEEFF1"/>
-                </a:solidFill>
-                <a:latin typeface="Segoe UI"/>
-              </a:rPr>
-              <a:t>независимых синхронных пар нужно, чтобы увидеть ρ = 0.5 (есть 6 групп)</a:t>
-            </a:r>
-          </a:p>
-        </p:txBody>
-      </p:sp>
-      <p:sp>
-        <p:nvSpPr>
-          <p:cNvPr id="8" name="TextBox 7"/>
-          <p:cNvSpPr txBox="1"/>
-          <p:nvPr/>
-        </p:nvSpPr>
-        <p:spPr>
-          <a:xfrm>
-            <a:off x="457200" y="6355080"/>
-            <a:ext cx="10515600" cy="320040"/>
-          </a:xfrm>
-          <a:prstGeom prst="rect">
-            <a:avLst/>
-          </a:prstGeom>
-          <a:noFill/>
-        </p:spPr>
-        <p:txBody>
-          <a:bodyPr wrap="square" anchor="t" lIns="18288" rIns="18288" tIns="18288" bIns="18288">
-            <a:spAutoFit/>
-          </a:bodyPr>
-          <a:lstStyle/>
-          <a:p>
-            <a:pPr algn="l">
-              <a:spcAft>
-                <a:spcPts val="600"/>
-              </a:spcAft>
-            </a:pPr>
-            <a:r>
-              <a:rPr sz="1000" b="0">
-                <a:solidFill>
-                  <a:srgbClr val="9AA1AC"/>
-                </a:solidFill>
-                <a:latin typeface="Segoe UI"/>
-              </a:rPr>
-              <a:t>Источник: reports/case_pairs/experiment.md, experiment.json</a:t>
-            </a:r>
-          </a:p>
-        </p:txBody>
-      </p:sp>
-      <p:sp>
-        <p:nvSpPr>
-          <p:cNvPr id="9" name="TextBox 8"/>
-          <p:cNvSpPr txBox="1"/>
-          <p:nvPr/>
-        </p:nvSpPr>
-        <p:spPr>
-          <a:xfrm>
-            <a:off x="11155680" y="6355080"/>
-            <a:ext cx="640080" cy="320040"/>
-          </a:xfrm>
-          <a:prstGeom prst="rect">
-            <a:avLst/>
-          </a:prstGeom>
-          <a:noFill/>
-        </p:spPr>
-        <p:txBody>
-          <a:bodyPr wrap="square" anchor="t" lIns="18288" rIns="18288" tIns="18288" bIns="18288">
-            <a:spAutoFit/>
-          </a:bodyPr>
-          <a:lstStyle/>
-          <a:p>
-            <a:pPr algn="r">
-              <a:spcAft>
-                <a:spcPts val="600"/>
-              </a:spcAft>
-            </a:pPr>
-            <a:r>
-              <a:rPr sz="1000" b="0">
-                <a:solidFill>
-                  <a:srgbClr val="9AA1AC"/>
-                </a:solidFill>
-                <a:latin typeface="Segoe UI"/>
-              </a:rPr>
-              <a:t>прил.</a:t>
-            </a:r>
-          </a:p>
-        </p:txBody>
-      </p:sp>
-    </p:spTree>
-  </p:cSld>
-  <p:clrMapOvr>
-    <a:masterClrMapping/>
-  </p:clrMapOvr>
-</p:sld>
-</file>
-
 <file path=ppt/slides/slide25.xml><?xml version="1.0" encoding="utf-8"?>
 <p:sld xmlns:a="http://schemas.openxmlformats.org/drawingml/2006/main" xmlns:p="http://schemas.openxmlformats.org/presentationml/2006/main" xmlns:r="http://schemas.openxmlformats.org/officeDocument/2006/relationships">
   <p:cSld>
@@ -14333,7 +14492,7 @@
                 </a:solidFill>
                 <a:latin typeface="Segoe UI"/>
               </a:rPr>
-              <a:t>25 · Приложение · Собственный вклад и ключевые решения</a:t>
+              <a:t>25 · Приложение · Эксперимент «снимок vs all_litter»</a:t>
             </a:r>
           </a:p>
         </p:txBody>
@@ -14372,7 +14531,7 @@
                 </a:solidFill>
                 <a:latin typeface="Segoe UI"/>
               </a:rPr>
-              <a:t>Наш вклад — решения, каждое проверено экспериментом или записано до результата</a:t>
+              <a:t>Связь признаков снимка с полевой плотностью всего мусора не установлена: данных на это мало</a:t>
             </a:r>
           </a:p>
         </p:txBody>
@@ -14386,7 +14545,7 @@
         <p:spPr>
           <a:xfrm>
             <a:off x="457200" y="1600200"/>
-            <a:ext cx="11247120" cy="4572000"/>
+            <a:ext cx="5577840" cy="4572000"/>
           </a:xfrm>
           <a:prstGeom prst="rect">
             <a:avLst/>
@@ -14405,13 +14564,13 @@
               </a:spcAft>
             </a:pPr>
             <a:r>
-              <a:rPr sz="1500" b="0">
+              <a:rPr sz="1600" b="0">
                 <a:solidFill>
                   <a:srgbClr val="EEEFF1"/>
                 </a:solidFill>
                 <a:latin typeface="Segoe UI"/>
               </a:rPr>
-              <a:t>• Реестр пар с допуском по дрейфу вместо «±1 сут»: 29 пар по метаданным → 0 синхронных; причины у каждого из 318 событий</a:t>
+              <a:t>• 11 пар S2 прошли маски, независимых групп «район × день» — 6; эталон — весь мусор, не пластик</a:t>
             </a:r>
           </a:p>
           <a:p>
@@ -14421,13 +14580,13 @@
               </a:spcAft>
             </a:pPr>
             <a:r>
-              <a:rPr sz="1500" b="0">
+              <a:rPr sz="1600" b="0">
                 <a:solidFill>
                   <a:srgbClr val="EEEFF1"/>
                 </a:solidFill>
                 <a:latin typeface="Segoe UI"/>
               </a:rPr>
-              <a:t>• Сплит по участкам маршрута + буфер: на «связных компонентах» kNN выигрывал −11.6 [−23.1; −0.9], на маршруте −4.2 [−12.0; 3.4] — утечка через соседей дня</a:t>
+              <a:t>• FDI в полосе: ρ −0.75 [−1.00; −0.14], p Холма 0.12; та же полоса в случайной воде сцены — −0.52</a:t>
             </a:r>
           </a:p>
           <a:p>
@@ -14437,13 +14596,13 @@
               </a:spcAft>
             </a:pPr>
             <a:r>
-              <a:rPr sz="1500" b="0">
+              <a:rPr sz="1600" b="0">
                 <a:solidFill>
                   <a:srgbClr val="EEEFF1"/>
                 </a:solidFill>
                 <a:latin typeface="Segoe UI"/>
               </a:rPr>
-              <a:t>• Отложенный test один раз: правило «не лучше медианы → медиана» записано 25.09.2026 19:05, test открыт 25.09.2026 19:15 — на карте медиана</a:t>
+              <a:t>• Значит, связь на уровне сцены или дня, а не места; знак к тому же обратный ожидаемому</a:t>
             </a:r>
           </a:p>
           <a:p>
@@ -14453,68 +14612,142 @@
               </a:spcAft>
             </a:pPr>
             <a:r>
-              <a:rPr sz="1500" b="0">
+              <a:rPr sz="1600" b="0">
                 <a:solidFill>
                   <a:srgbClr val="EEEFF1"/>
                 </a:solidFill>
                 <a:latin typeface="Segoe UI"/>
               </a:rPr>
-              <a:t>• Отказ от гармонизации L2A по MARIDA val (F1 0.923 против 0.897), test не использовался</a:t>
-            </a:r>
-          </a:p>
-          <a:p>
-            <a:pPr algn="l">
-              <a:spcAft>
-                <a:spcPts val="1000"/>
-              </a:spcAft>
-            </a:pPr>
-            <a:r>
-              <a:rPr sz="1500" b="0">
+              <a:t>• Мощность: при 6 группах видна только |ρ| ≥ 0.96; для ρ = 0.5 нужно ≈ 33 независимых пар</a:t>
+            </a:r>
+          </a:p>
+        </p:txBody>
+      </p:sp>
+      <p:sp>
+        <p:nvSpPr>
+          <p:cNvPr id="5" name="Rectangle 4"/>
+          <p:cNvSpPr/>
+          <p:nvPr/>
+        </p:nvSpPr>
+        <p:spPr>
+          <a:xfrm>
+            <a:off x="6400800" y="1691640"/>
+            <a:ext cx="5349240" cy="1554480"/>
+          </a:xfrm>
+          <a:prstGeom prst="rect">
+            <a:avLst/>
+          </a:prstGeom>
+          <a:solidFill>
+            <a:srgbClr val="1B1E24"/>
+          </a:solidFill>
+          <a:ln>
+            <a:noFill/>
+          </a:ln>
+          <a:effectLst/>
+        </p:spPr>
+        <p:style>
+          <a:lnRef idx="1">
+            <a:schemeClr val="accent1"/>
+          </a:lnRef>
+          <a:fillRef idx="3">
+            <a:schemeClr val="accent1"/>
+          </a:fillRef>
+          <a:effectRef idx="2">
+            <a:schemeClr val="accent1"/>
+          </a:effectRef>
+          <a:fontRef idx="minor">
+            <a:schemeClr val="lt1"/>
+          </a:fontRef>
+        </p:style>
+        <p:txBody>
+          <a:bodyPr rtlCol="0" anchor="ctr"/>
+          <a:lstStyle/>
+          <a:p>
+            <a:pPr algn="ctr"/>
+          </a:p>
+        </p:txBody>
+      </p:sp>
+      <p:sp>
+        <p:nvSpPr>
+          <p:cNvPr id="6" name="TextBox 5"/>
+          <p:cNvSpPr txBox="1"/>
+          <p:nvPr/>
+        </p:nvSpPr>
+        <p:spPr>
+          <a:xfrm>
+            <a:off x="6675120" y="1783080"/>
+            <a:ext cx="4800600" cy="822960"/>
+          </a:xfrm>
+          <a:prstGeom prst="rect">
+            <a:avLst/>
+          </a:prstGeom>
+          <a:noFill/>
+        </p:spPr>
+        <p:txBody>
+          <a:bodyPr wrap="square" anchor="t" lIns="18288" rIns="18288" tIns="18288" bIns="18288">
+            <a:spAutoFit/>
+          </a:bodyPr>
+          <a:lstStyle/>
+          <a:p>
+            <a:pPr algn="l">
+              <a:spcAft>
+                <a:spcPts val="600"/>
+              </a:spcAft>
+            </a:pPr>
+            <a:r>
+              <a:rPr sz="4800" b="1">
+                <a:solidFill>
+                  <a:srgbClr val="D9912E"/>
+                </a:solidFill>
+                <a:latin typeface="Segoe UI"/>
+              </a:rPr>
+              <a:t>33</a:t>
+            </a:r>
+          </a:p>
+        </p:txBody>
+      </p:sp>
+      <p:sp>
+        <p:nvSpPr>
+          <p:cNvPr id="7" name="TextBox 6"/>
+          <p:cNvSpPr txBox="1"/>
+          <p:nvPr/>
+        </p:nvSpPr>
+        <p:spPr>
+          <a:xfrm>
+            <a:off x="6675120" y="2606040"/>
+            <a:ext cx="4800600" cy="594360"/>
+          </a:xfrm>
+          <a:prstGeom prst="rect">
+            <a:avLst/>
+          </a:prstGeom>
+          <a:noFill/>
+        </p:spPr>
+        <p:txBody>
+          <a:bodyPr wrap="square" anchor="t" lIns="18288" rIns="18288" tIns="18288" bIns="18288">
+            <a:spAutoFit/>
+          </a:bodyPr>
+          <a:lstStyle/>
+          <a:p>
+            <a:pPr algn="l">
+              <a:spcAft>
+                <a:spcPts val="600"/>
+              </a:spcAft>
+            </a:pPr>
+            <a:r>
+              <a:rPr sz="1300" b="0">
                 <a:solidFill>
                   <a:srgbClr val="EEEFF1"/>
                 </a:solidFill>
                 <a:latin typeface="Segoe UI"/>
               </a:rPr>
-              <a:t>• Геометрия трансект по первоисточникам PANGAEA: 104 события, 4 прерванные — двумя сегментами; окно синхронизации |dt| ≤ 4.17 ч</a:t>
-            </a:r>
-          </a:p>
-          <a:p>
-            <a:pPr algn="l">
-              <a:spcAft>
-                <a:spcPts val="1000"/>
-              </a:spcAft>
-            </a:pPr>
-            <a:r>
-              <a:rPr sz="1500" b="0">
-                <a:solidFill>
-                  <a:srgbClr val="EEEFF1"/>
-                </a:solidFill>
-                <a:latin typeface="Segoe UI"/>
-              </a:rPr>
-              <a:t>• Один источник чисел: final_numbers.json → README, отчёт, дека, речь, ответы; тест сверяет (255 passed)</a:t>
-            </a:r>
-          </a:p>
-          <a:p>
-            <a:pPr algn="l">
-              <a:spcAft>
-                <a:spcPts val="1000"/>
-              </a:spcAft>
-            </a:pPr>
-            <a:r>
-              <a:rPr sz="1500" b="0">
-                <a:solidFill>
-                  <a:srgbClr val="EEEFF1"/>
-                </a:solidFill>
-                <a:latin typeface="Segoe UI"/>
-              </a:rPr>
-              <a:t>• Готовое, не наше: разметка MARIDA и MADOS, протокол RandomForest MARIDA, индекс FDI, каталоги STAC</a:t>
-            </a:r>
-          </a:p>
-        </p:txBody>
-      </p:sp>
-      <p:sp>
-        <p:nvSpPr>
-          <p:cNvPr id="5" name="TextBox 4"/>
+              <a:t>независимых синхронных пар нужно, чтобы увидеть ρ = 0.5 (есть 6 групп)</a:t>
+            </a:r>
+          </a:p>
+        </p:txBody>
+      </p:sp>
+      <p:sp>
+        <p:nvSpPr>
+          <p:cNvPr id="8" name="TextBox 7"/>
           <p:cNvSpPr txBox="1"/>
           <p:nvPr/>
         </p:nvSpPr>
@@ -14546,14 +14779,14 @@
                 </a:solidFill>
                 <a:latin typeface="Segoe UI"/>
               </a:rPr>
-              <a:t>Источник: reports/case_pairs/summary.md; reports/case_conc/metrics.json; configs/case_selection.yaml; docs/DECISIONS.md; reports/case_geometry/summary.md</a:t>
-            </a:r>
-          </a:p>
-        </p:txBody>
-      </p:sp>
-      <p:sp>
-        <p:nvSpPr>
-          <p:cNvPr id="6" name="TextBox 5"/>
+              <a:t>Источник: reports/case_pairs/experiment.md, experiment.json</a:t>
+            </a:r>
+          </a:p>
+        </p:txBody>
+      </p:sp>
+      <p:sp>
+        <p:nvSpPr>
+          <p:cNvPr id="9" name="TextBox 8"/>
           <p:cNvSpPr txBox="1"/>
           <p:nvPr/>
         </p:nvSpPr>
@@ -14650,7 +14883,324 @@
                 </a:solidFill>
                 <a:latin typeface="Segoe UI"/>
               </a:rPr>
-              <a:t>26 · Приложение · Дополнительные функции</a:t>
+              <a:t>26 · Приложение · Собственный вклад и ключевые решения</a:t>
+            </a:r>
+          </a:p>
+        </p:txBody>
+      </p:sp>
+      <p:sp>
+        <p:nvSpPr>
+          <p:cNvPr id="3" name="TextBox 2"/>
+          <p:cNvSpPr txBox="1"/>
+          <p:nvPr/>
+        </p:nvSpPr>
+        <p:spPr>
+          <a:xfrm>
+            <a:off x="457200" y="457200"/>
+            <a:ext cx="11247120" cy="960120"/>
+          </a:xfrm>
+          <a:prstGeom prst="rect">
+            <a:avLst/>
+          </a:prstGeom>
+          <a:noFill/>
+        </p:spPr>
+        <p:txBody>
+          <a:bodyPr wrap="square" anchor="t" lIns="18288" rIns="18288" tIns="18288" bIns="18288">
+            <a:spAutoFit/>
+          </a:bodyPr>
+          <a:lstStyle/>
+          <a:p>
+            <a:pPr algn="l">
+              <a:spcAft>
+                <a:spcPts val="600"/>
+              </a:spcAft>
+            </a:pPr>
+            <a:r>
+              <a:rPr sz="2600" b="1">
+                <a:solidFill>
+                  <a:srgbClr val="EEEFF1"/>
+                </a:solidFill>
+                <a:latin typeface="Segoe UI"/>
+              </a:rPr>
+              <a:t>Наш вклад — решения, каждое проверено экспериментом или записано до результата</a:t>
+            </a:r>
+          </a:p>
+        </p:txBody>
+      </p:sp>
+      <p:sp>
+        <p:nvSpPr>
+          <p:cNvPr id="4" name="TextBox 3"/>
+          <p:cNvSpPr txBox="1"/>
+          <p:nvPr/>
+        </p:nvSpPr>
+        <p:spPr>
+          <a:xfrm>
+            <a:off x="457200" y="1600200"/>
+            <a:ext cx="11247120" cy="4572000"/>
+          </a:xfrm>
+          <a:prstGeom prst="rect">
+            <a:avLst/>
+          </a:prstGeom>
+          <a:noFill/>
+        </p:spPr>
+        <p:txBody>
+          <a:bodyPr wrap="square" anchor="t" lIns="18288" rIns="18288" tIns="18288" bIns="18288">
+            <a:spAutoFit/>
+          </a:bodyPr>
+          <a:lstStyle/>
+          <a:p>
+            <a:pPr algn="l">
+              <a:spcAft>
+                <a:spcPts val="1000"/>
+              </a:spcAft>
+            </a:pPr>
+            <a:r>
+              <a:rPr sz="1500" b="0">
+                <a:solidFill>
+                  <a:srgbClr val="EEEFF1"/>
+                </a:solidFill>
+                <a:latin typeface="Segoe UI"/>
+              </a:rPr>
+              <a:t>• Реестр пар с допуском по дрейфу вместо «±1 сут»: 29 пар по метаданным → 0 синхронных; причины у каждого из 318 событий</a:t>
+            </a:r>
+          </a:p>
+          <a:p>
+            <a:pPr algn="l">
+              <a:spcAft>
+                <a:spcPts val="1000"/>
+              </a:spcAft>
+            </a:pPr>
+            <a:r>
+              <a:rPr sz="1500" b="0">
+                <a:solidFill>
+                  <a:srgbClr val="EEEFF1"/>
+                </a:solidFill>
+                <a:latin typeface="Segoe UI"/>
+              </a:rPr>
+              <a:t>• Сплит по участкам маршрута + буфер: на «связных компонентах» kNN выигрывал −11.6 [−23.1; −0.9], на маршруте −4.2 [−12.0; 3.4] — утечка через соседей дня</a:t>
+            </a:r>
+          </a:p>
+          <a:p>
+            <a:pPr algn="l">
+              <a:spcAft>
+                <a:spcPts val="1000"/>
+              </a:spcAft>
+            </a:pPr>
+            <a:r>
+              <a:rPr sz="1500" b="0">
+                <a:solidFill>
+                  <a:srgbClr val="EEEFF1"/>
+                </a:solidFill>
+                <a:latin typeface="Segoe UI"/>
+              </a:rPr>
+              <a:t>• Отложенный test один раз: правило «не лучше медианы → медиана» записано 25.09.2026 19:05, test открыт 25.09.2026 19:15 — на карте медиана</a:t>
+            </a:r>
+          </a:p>
+          <a:p>
+            <a:pPr algn="l">
+              <a:spcAft>
+                <a:spcPts val="1000"/>
+              </a:spcAft>
+            </a:pPr>
+            <a:r>
+              <a:rPr sz="1500" b="0">
+                <a:solidFill>
+                  <a:srgbClr val="EEEFF1"/>
+                </a:solidFill>
+                <a:latin typeface="Segoe UI"/>
+              </a:rPr>
+              <a:t>• Отказ от гармонизации L2A по MARIDA val (F1 0.923 против 0.897), test не использовался</a:t>
+            </a:r>
+          </a:p>
+          <a:p>
+            <a:pPr algn="l">
+              <a:spcAft>
+                <a:spcPts val="1000"/>
+              </a:spcAft>
+            </a:pPr>
+            <a:r>
+              <a:rPr sz="1500" b="0">
+                <a:solidFill>
+                  <a:srgbClr val="EEEFF1"/>
+                </a:solidFill>
+                <a:latin typeface="Segoe UI"/>
+              </a:rPr>
+              <a:t>• Геометрия трансект по первоисточникам PANGAEA: 104 события, 4 прерванные — двумя сегментами; окно синхронизации |dt| ≤ 4.17 ч</a:t>
+            </a:r>
+          </a:p>
+          <a:p>
+            <a:pPr algn="l">
+              <a:spcAft>
+                <a:spcPts val="1000"/>
+              </a:spcAft>
+            </a:pPr>
+            <a:r>
+              <a:rPr sz="1500" b="0">
+                <a:solidFill>
+                  <a:srgbClr val="EEEFF1"/>
+                </a:solidFill>
+                <a:latin typeface="Segoe UI"/>
+              </a:rPr>
+              <a:t>• Один источник чисел: final_numbers.json → README, отчёт, дека, речь, ответы; тест сверяет (255 passed)</a:t>
+            </a:r>
+          </a:p>
+          <a:p>
+            <a:pPr algn="l">
+              <a:spcAft>
+                <a:spcPts val="1000"/>
+              </a:spcAft>
+            </a:pPr>
+            <a:r>
+              <a:rPr sz="1500" b="0">
+                <a:solidFill>
+                  <a:srgbClr val="EEEFF1"/>
+                </a:solidFill>
+                <a:latin typeface="Segoe UI"/>
+              </a:rPr>
+              <a:t>• Готовое, не наше: разметка MARIDA и MADOS, протокол RandomForest MARIDA, индекс FDI, каталоги STAC</a:t>
+            </a:r>
+          </a:p>
+        </p:txBody>
+      </p:sp>
+      <p:sp>
+        <p:nvSpPr>
+          <p:cNvPr id="5" name="TextBox 4"/>
+          <p:cNvSpPr txBox="1"/>
+          <p:nvPr/>
+        </p:nvSpPr>
+        <p:spPr>
+          <a:xfrm>
+            <a:off x="457200" y="6355080"/>
+            <a:ext cx="10515600" cy="320040"/>
+          </a:xfrm>
+          <a:prstGeom prst="rect">
+            <a:avLst/>
+          </a:prstGeom>
+          <a:noFill/>
+        </p:spPr>
+        <p:txBody>
+          <a:bodyPr wrap="square" anchor="t" lIns="18288" rIns="18288" tIns="18288" bIns="18288">
+            <a:spAutoFit/>
+          </a:bodyPr>
+          <a:lstStyle/>
+          <a:p>
+            <a:pPr algn="l">
+              <a:spcAft>
+                <a:spcPts val="600"/>
+              </a:spcAft>
+            </a:pPr>
+            <a:r>
+              <a:rPr sz="1000" b="0">
+                <a:solidFill>
+                  <a:srgbClr val="9AA1AC"/>
+                </a:solidFill>
+                <a:latin typeface="Segoe UI"/>
+              </a:rPr>
+              <a:t>Источник: reports/case_pairs/summary.md; reports/case_conc/metrics.json; configs/case_selection.yaml; docs/DECISIONS.md; reports/case_geometry/summary.md</a:t>
+            </a:r>
+          </a:p>
+        </p:txBody>
+      </p:sp>
+      <p:sp>
+        <p:nvSpPr>
+          <p:cNvPr id="6" name="TextBox 5"/>
+          <p:cNvSpPr txBox="1"/>
+          <p:nvPr/>
+        </p:nvSpPr>
+        <p:spPr>
+          <a:xfrm>
+            <a:off x="11155680" y="6355080"/>
+            <a:ext cx="640080" cy="320040"/>
+          </a:xfrm>
+          <a:prstGeom prst="rect">
+            <a:avLst/>
+          </a:prstGeom>
+          <a:noFill/>
+        </p:spPr>
+        <p:txBody>
+          <a:bodyPr wrap="square" anchor="t" lIns="18288" rIns="18288" tIns="18288" bIns="18288">
+            <a:spAutoFit/>
+          </a:bodyPr>
+          <a:lstStyle/>
+          <a:p>
+            <a:pPr algn="r">
+              <a:spcAft>
+                <a:spcPts val="600"/>
+              </a:spcAft>
+            </a:pPr>
+            <a:r>
+              <a:rPr sz="1000" b="0">
+                <a:solidFill>
+                  <a:srgbClr val="9AA1AC"/>
+                </a:solidFill>
+                <a:latin typeface="Segoe UI"/>
+              </a:rPr>
+              <a:t>прил.</a:t>
+            </a:r>
+          </a:p>
+        </p:txBody>
+      </p:sp>
+    </p:spTree>
+  </p:cSld>
+  <p:clrMapOvr>
+    <a:masterClrMapping/>
+  </p:clrMapOvr>
+</p:sld>
+</file>
+
+<file path=ppt/slides/slide27.xml><?xml version="1.0" encoding="utf-8"?>
+<p:sld xmlns:a="http://schemas.openxmlformats.org/drawingml/2006/main" xmlns:p="http://schemas.openxmlformats.org/presentationml/2006/main" xmlns:r="http://schemas.openxmlformats.org/officeDocument/2006/relationships">
+  <p:cSld>
+    <p:bg>
+      <p:bgPr>
+        <a:solidFill>
+          <a:srgbClr val="101216"/>
+        </a:solidFill>
+        <a:effectLst/>
+      </p:bgPr>
+    </p:bg>
+    <p:spTree>
+      <p:nvGrpSpPr>
+        <p:cNvPr id="1" name=""/>
+        <p:cNvGrpSpPr/>
+        <p:nvPr/>
+      </p:nvGrpSpPr>
+      <p:grpSpPr/>
+      <p:sp>
+        <p:nvSpPr>
+          <p:cNvPr id="2" name="TextBox 1"/>
+          <p:cNvSpPr txBox="1"/>
+          <p:nvPr/>
+        </p:nvSpPr>
+        <p:spPr>
+          <a:xfrm>
+            <a:off x="457200" y="201168"/>
+            <a:ext cx="8229600" cy="274320"/>
+          </a:xfrm>
+          <a:prstGeom prst="rect">
+            <a:avLst/>
+          </a:prstGeom>
+          <a:noFill/>
+        </p:spPr>
+        <p:txBody>
+          <a:bodyPr wrap="square" anchor="t" lIns="18288" rIns="18288" tIns="18288" bIns="18288">
+            <a:spAutoFit/>
+          </a:bodyPr>
+          <a:lstStyle/>
+          <a:p>
+            <a:pPr algn="l">
+              <a:spcAft>
+                <a:spcPts val="600"/>
+              </a:spcAft>
+            </a:pPr>
+            <a:r>
+              <a:rPr sz="1200" b="1">
+                <a:solidFill>
+                  <a:srgbClr val="D9912E"/>
+                </a:solidFill>
+                <a:latin typeface="Segoe UI"/>
+              </a:rPr>
+              <a:t>27 · Приложение · Дополнительные функции</a:t>
             </a:r>
           </a:p>
         </p:txBody>
@@ -17736,7 +18286,7 @@
         <p:spPr>
           <a:xfrm>
             <a:off x="4892040" y="1600200"/>
-            <a:ext cx="6858000" cy="3857625"/>
+            <a:ext cx="6858000" cy="3854053"/>
           </a:xfrm>
           <a:prstGeom prst="rect">
             <a:avLst/>
@@ -17751,7 +18301,7 @@
         </p:nvSpPr>
         <p:spPr>
           <a:xfrm>
-            <a:off x="4892040" y="5549265"/>
+            <a:off x="4892040" y="5545693"/>
             <a:ext cx="6858000" cy="548640"/>
           </a:xfrm>
           <a:prstGeom prst="rect">
@@ -18178,7 +18728,7 @@
                 </a:solidFill>
                 <a:latin typeface="Segoe UI"/>
               </a:rPr>
-              <a:t>Вывод: снимок даёт место, площадь и статус зоны; шт./км² — «концентрация по снимку не подтверждена»</a:t>
+              <a:t>Вывод: снимок даёт место, площадь и статус зоны; количество предметов по снимку не определено; исследовательский сценарий — следующий слайд</a:t>
             </a:r>
           </a:p>
         </p:txBody>
@@ -18321,7 +18871,7 @@
                 </a:solidFill>
                 <a:latin typeface="Segoe UI"/>
               </a:rPr>
-              <a:t>09 · Сервис: путь эколога</a:t>
+              <a:t>09 · Как получаем шт./км² по снимку и насколько этому верить</a:t>
             </a:r>
           </a:p>
         </p:txBody>
@@ -18360,14 +18910,241 @@
                 </a:solidFill>
                 <a:latin typeface="Segoe UI"/>
               </a:rPr>
-              <a:t>Сервис: Земля с находками → точка → сцена и карточка зоны → студия → назад к следующей точке</a:t>
+              <a:t>шт./км² по снимку — исследовательский сценарий по искусственным мишеням PLP (2 даты): на природе не проверен</a:t>
+            </a:r>
+          </a:p>
+        </p:txBody>
+      </p:sp>
+      <p:sp>
+        <p:nvSpPr>
+          <p:cNvPr id="4" name="TextBox 3"/>
+          <p:cNvSpPr txBox="1"/>
+          <p:nvPr/>
+        </p:nvSpPr>
+        <p:spPr>
+          <a:xfrm>
+            <a:off x="457200" y="1600200"/>
+            <a:ext cx="4160520" cy="658368"/>
+          </a:xfrm>
+          <a:prstGeom prst="rect">
+            <a:avLst/>
+          </a:prstGeom>
+          <a:noFill/>
+        </p:spPr>
+        <p:txBody>
+          <a:bodyPr wrap="square" anchor="t" lIns="18288" rIns="18288" tIns="18288" bIns="18288">
+            <a:spAutoFit/>
+          </a:bodyPr>
+          <a:lstStyle/>
+          <a:p>
+            <a:pPr algn="l">
+              <a:spcAft>
+                <a:spcPts val="600"/>
+              </a:spcAft>
+            </a:pPr>
+            <a:r>
+              <a:rPr sz="4000" b="1">
+                <a:solidFill>
+                  <a:srgbClr val="D9912E"/>
+                </a:solidFill>
+                <a:latin typeface="Segoe UI"/>
+              </a:rPr>
+              <a:t>470–670</a:t>
+            </a:r>
+          </a:p>
+        </p:txBody>
+      </p:sp>
+      <p:sp>
+        <p:nvSpPr>
+          <p:cNvPr id="5" name="TextBox 4"/>
+          <p:cNvSpPr txBox="1"/>
+          <p:nvPr/>
+        </p:nvSpPr>
+        <p:spPr>
+          <a:xfrm>
+            <a:off x="457200" y="2258568"/>
+            <a:ext cx="4160520" cy="640080"/>
+          </a:xfrm>
+          <a:prstGeom prst="rect">
+            <a:avLst/>
+          </a:prstGeom>
+          <a:noFill/>
+        </p:spPr>
+        <p:txBody>
+          <a:bodyPr wrap="square" anchor="t" lIns="18288" rIns="18288" tIns="18288" bIns="18288">
+            <a:spAutoFit/>
+          </a:bodyPr>
+          <a:lstStyle/>
+          <a:p>
+            <a:pPr algn="l">
+              <a:spcAft>
+                <a:spcPts val="600"/>
+              </a:spcAft>
+            </a:pPr>
+            <a:r>
+              <a:rPr sz="1300" b="0">
+                <a:solidFill>
+                  <a:srgbClr val="EEEFF1"/>
+                </a:solidFill>
+                <a:latin typeface="Segoe UI"/>
+              </a:rPr>
+              <a:t>бутылок PET 1.5 л на сработавший пиксель мишени PLP (2019-04-18, 2019-05-18) — допущение, не доверительный интервал</a:t>
+            </a:r>
+          </a:p>
+        </p:txBody>
+      </p:sp>
+      <p:sp>
+        <p:nvSpPr>
+          <p:cNvPr id="6" name="TextBox 5"/>
+          <p:cNvSpPr txBox="1"/>
+          <p:nvPr/>
+        </p:nvSpPr>
+        <p:spPr>
+          <a:xfrm>
+            <a:off x="457200" y="3063240"/>
+            <a:ext cx="4160520" cy="658368"/>
+          </a:xfrm>
+          <a:prstGeom prst="rect">
+            <a:avLst/>
+          </a:prstGeom>
+          <a:noFill/>
+        </p:spPr>
+        <p:txBody>
+          <a:bodyPr wrap="square" anchor="t" lIns="18288" rIns="18288" tIns="18288" bIns="18288">
+            <a:spAutoFit/>
+          </a:bodyPr>
+          <a:lstStyle/>
+          <a:p>
+            <a:pPr algn="l">
+              <a:spcAft>
+                <a:spcPts val="600"/>
+              </a:spcAft>
+            </a:pPr>
+            <a:r>
+              <a:rPr sz="4000" b="1">
+                <a:solidFill>
+                  <a:srgbClr val="D9912E"/>
+                </a:solidFill>
+                <a:latin typeface="Segoe UI"/>
+              </a:rPr>
+              <a:t>≈ 32000</a:t>
+            </a:r>
+          </a:p>
+        </p:txBody>
+      </p:sp>
+      <p:sp>
+        <p:nvSpPr>
+          <p:cNvPr id="7" name="TextBox 6"/>
+          <p:cNvSpPr txBox="1"/>
+          <p:nvPr/>
+        </p:nvSpPr>
+        <p:spPr>
+          <a:xfrm>
+            <a:off x="457200" y="3721608"/>
+            <a:ext cx="4160520" cy="640080"/>
+          </a:xfrm>
+          <a:prstGeom prst="rect">
+            <a:avLst/>
+          </a:prstGeom>
+          <a:noFill/>
+        </p:spPr>
+        <p:txBody>
+          <a:bodyPr wrap="square" anchor="t" lIns="18288" rIns="18288" tIns="18288" bIns="18288">
+            <a:spAutoFit/>
+          </a:bodyPr>
+          <a:lstStyle/>
+          <a:p>
+            <a:pPr algn="l">
+              <a:spcAft>
+                <a:spcPts val="600"/>
+              </a:spcAft>
+            </a:pPr>
+            <a:r>
+              <a:rPr sz="1300" b="0">
+                <a:solidFill>
+                  <a:srgbClr val="EEEFF1"/>
+                </a:solidFill>
+                <a:latin typeface="Segoe UI"/>
+              </a:rPr>
+              <a:t>шт./км² — медиана сценария по 77 находкам (разброс 9100–130000), если бы это были предметы размера бутылки 1,5 л при покрытии 28–40 %</a:t>
+            </a:r>
+          </a:p>
+        </p:txBody>
+      </p:sp>
+      <p:sp>
+        <p:nvSpPr>
+          <p:cNvPr id="8" name="TextBox 7"/>
+          <p:cNvSpPr txBox="1"/>
+          <p:nvPr/>
+        </p:nvSpPr>
+        <p:spPr>
+          <a:xfrm>
+            <a:off x="457200" y="4526280"/>
+            <a:ext cx="4160520" cy="1691639"/>
+          </a:xfrm>
+          <a:prstGeom prst="rect">
+            <a:avLst/>
+          </a:prstGeom>
+          <a:noFill/>
+        </p:spPr>
+        <p:txBody>
+          <a:bodyPr wrap="square" anchor="t" lIns="18288" rIns="18288" tIns="18288" bIns="18288">
+            <a:spAutoFit/>
+          </a:bodyPr>
+          <a:lstStyle/>
+          <a:p>
+            <a:pPr algn="l">
+              <a:spcAft>
+                <a:spcPts val="600"/>
+              </a:spcAft>
+            </a:pPr>
+            <a:r>
+              <a:rPr sz="1300" b="0">
+                <a:solidFill>
+                  <a:srgbClr val="9AA1AC"/>
+                </a:solidFill>
+                <a:latin typeface="Segoe UI"/>
+              </a:rPr>
+              <a:t>• C ≈ n_пикселей × [470; 670] / площадь зоны; зона 16: 691 пикс. на 4.18 км² → ≈ 92800 шт./км² (сценарий)</a:t>
+            </a:r>
+          </a:p>
+          <a:p>
+            <a:pPr algn="l">
+              <a:spcAft>
+                <a:spcPts val="600"/>
+              </a:spcAft>
+            </a:pPr>
+            <a:r>
+              <a:rPr sz="1300" b="0">
+                <a:solidFill>
+                  <a:srgbClr val="9AA1AC"/>
+                </a:solidFill>
+                <a:latin typeface="Segoe UI"/>
+              </a:rPr>
+              <a:t>• На оценщике «снимок → штуки» сценарий хуже ответа «0» — в карточке он свёрнут</a:t>
+            </a:r>
+          </a:p>
+          <a:p>
+            <a:pPr algn="l">
+              <a:spcAft>
+                <a:spcPts val="600"/>
+              </a:spcAft>
+            </a:pPr>
+            <a:r>
+              <a:rPr sz="1300" b="0">
+                <a:solidFill>
+                  <a:srgbClr val="9AA1AC"/>
+                </a:solidFill>
+                <a:latin typeface="Segoe UI"/>
+              </a:rPr>
+              <a:t>• С полем (53.9 шт./км² — средняя по маршруту) напрямую не сравниваем</a:t>
             </a:r>
           </a:p>
         </p:txBody>
       </p:sp>
       <p:pic>
         <p:nvPicPr>
-          <p:cNvPr id="4" name="Picture 3" descr="21_svc_earth.jpg"/>
+          <p:cNvPr id="9" name="Picture 8" descr="28_scene.jpg"/>
           <p:cNvPicPr>
             <a:picLocks noChangeAspect="1"/>
           </p:cNvPicPr>
@@ -18381,8 +19158,8 @@
         </p:blipFill>
         <p:spPr>
           <a:xfrm>
-            <a:off x="457200" y="1600200"/>
-            <a:ext cx="3566160" cy="2431472"/>
+            <a:off x="4892040" y="1600200"/>
+            <a:ext cx="6858000" cy="3854053"/>
           </a:xfrm>
           <a:prstGeom prst="rect">
             <a:avLst/>
@@ -18391,204 +19168,39 @@
       </p:pic>
       <p:sp>
         <p:nvSpPr>
-          <p:cNvPr id="5" name="TextBox 4"/>
-          <p:cNvSpPr txBox="1"/>
-          <p:nvPr/>
-        </p:nvSpPr>
-        <p:spPr>
-          <a:xfrm>
-            <a:off x="457200" y="4104824"/>
-            <a:ext cx="3566160" cy="640080"/>
-          </a:xfrm>
-          <a:prstGeom prst="rect">
-            <a:avLst/>
-          </a:prstGeom>
-          <a:noFill/>
-        </p:spPr>
-        <p:txBody>
-          <a:bodyPr wrap="square" anchor="t" lIns="18288" rIns="18288" tIns="18288" bIns="18288">
-            <a:spAutoFit/>
-          </a:bodyPr>
-          <a:lstStyle/>
-          <a:p>
-            <a:pPr algn="l">
-              <a:spcAft>
-                <a:spcPts val="600"/>
-              </a:spcAft>
-            </a:pPr>
-            <a:r>
-              <a:rPr sz="1300" b="0">
+          <p:cNvPr id="10" name="TextBox 9"/>
+          <p:cNvSpPr txBox="1"/>
+          <p:nvPr/>
+        </p:nvSpPr>
+        <p:spPr>
+          <a:xfrm>
+            <a:off x="4892040" y="5545693"/>
+            <a:ext cx="6858000" cy="548640"/>
+          </a:xfrm>
+          <a:prstGeom prst="rect">
+            <a:avLst/>
+          </a:prstGeom>
+          <a:noFill/>
+        </p:spPr>
+        <p:txBody>
+          <a:bodyPr wrap="square" anchor="t" lIns="18288" rIns="18288" tIns="18288" bIns="18288">
+            <a:spAutoFit/>
+          </a:bodyPr>
+          <a:lstStyle/>
+          <a:p>
+            <a:pPr algn="l">
+              <a:spcAft>
+                <a:spcPts val="600"/>
+              </a:spcAft>
+            </a:pPr>
+            <a:r>
+              <a:rPr sz="1500" b="1">
                 <a:solidFill>
                   <a:srgbClr val="EEEFF1"/>
                 </a:solidFill>
                 <a:latin typeface="Segoe UI"/>
               </a:rPr>
-              <a:t>1. Обзор Земли: находки обработанных сцен сразу, без формы</a:t>
-            </a:r>
-          </a:p>
-        </p:txBody>
-      </p:sp>
-      <p:pic>
-        <p:nvPicPr>
-          <p:cNvPr id="6" name="Picture 5" descr="22_svc_card.jpg"/>
-          <p:cNvPicPr>
-            <a:picLocks noChangeAspect="1"/>
-          </p:cNvPicPr>
-          <p:nvPr/>
-        </p:nvPicPr>
-        <p:blipFill>
-          <a:blip r:embed="rId3"/>
-          <a:stretch>
-            <a:fillRect/>
-          </a:stretch>
-        </p:blipFill>
-        <p:spPr>
-          <a:xfrm>
-            <a:off x="4297680" y="1600200"/>
-            <a:ext cx="3566160" cy="2005965"/>
-          </a:xfrm>
-          <a:prstGeom prst="rect">
-            <a:avLst/>
-          </a:prstGeom>
-        </p:spPr>
-      </p:pic>
-      <p:sp>
-        <p:nvSpPr>
-          <p:cNvPr id="7" name="TextBox 6"/>
-          <p:cNvSpPr txBox="1"/>
-          <p:nvPr/>
-        </p:nvSpPr>
-        <p:spPr>
-          <a:xfrm>
-            <a:off x="4297680" y="3679316"/>
-            <a:ext cx="3566160" cy="640080"/>
-          </a:xfrm>
-          <a:prstGeom prst="rect">
-            <a:avLst/>
-          </a:prstGeom>
-          <a:noFill/>
-        </p:spPr>
-        <p:txBody>
-          <a:bodyPr wrap="square" anchor="t" lIns="18288" rIns="18288" tIns="18288" bIns="18288">
-            <a:spAutoFit/>
-          </a:bodyPr>
-          <a:lstStyle/>
-          <a:p>
-            <a:pPr algn="l">
-              <a:spcAft>
-                <a:spcPts val="600"/>
-              </a:spcAft>
-            </a:pPr>
-            <a:r>
-              <a:rPr sz="1300" b="0">
-                <a:solidFill>
-                  <a:srgbClr val="EEEFF1"/>
-                </a:solidFill>
-                <a:latin typeface="Segoe UI"/>
-              </a:rPr>
-              <a:t>2. Точка → сцена и карточка: что найдено, когда, площадь, уверенность</a:t>
-            </a:r>
-          </a:p>
-        </p:txBody>
-      </p:sp>
-      <p:pic>
-        <p:nvPicPr>
-          <p:cNvPr id="8" name="Picture 7" descr="25_svc_studio.jpg"/>
-          <p:cNvPicPr>
-            <a:picLocks noChangeAspect="1"/>
-          </p:cNvPicPr>
-          <p:nvPr/>
-        </p:nvPicPr>
-        <p:blipFill>
-          <a:blip r:embed="rId4"/>
-          <a:stretch>
-            <a:fillRect/>
-          </a:stretch>
-        </p:blipFill>
-        <p:spPr>
-          <a:xfrm>
-            <a:off x="8138160" y="1600200"/>
-            <a:ext cx="3566160" cy="2431472"/>
-          </a:xfrm>
-          <a:prstGeom prst="rect">
-            <a:avLst/>
-          </a:prstGeom>
-        </p:spPr>
-      </p:pic>
-      <p:sp>
-        <p:nvSpPr>
-          <p:cNvPr id="9" name="TextBox 8"/>
-          <p:cNvSpPr txBox="1"/>
-          <p:nvPr/>
-        </p:nvSpPr>
-        <p:spPr>
-          <a:xfrm>
-            <a:off x="8138160" y="4104824"/>
-            <a:ext cx="3566160" cy="640080"/>
-          </a:xfrm>
-          <a:prstGeom prst="rect">
-            <a:avLst/>
-          </a:prstGeom>
-          <a:noFill/>
-        </p:spPr>
-        <p:txBody>
-          <a:bodyPr wrap="square" anchor="t" lIns="18288" rIns="18288" tIns="18288" bIns="18288">
-            <a:spAutoFit/>
-          </a:bodyPr>
-          <a:lstStyle/>
-          <a:p>
-            <a:pPr algn="l">
-              <a:spcAft>
-                <a:spcPts val="600"/>
-              </a:spcAft>
-            </a:pPr>
-            <a:r>
-              <a:rPr sz="1300" b="0">
-                <a:solidFill>
-                  <a:srgbClr val="EEEFF1"/>
-                </a:solidFill>
-                <a:latin typeface="Segoe UI"/>
-              </a:rPr>
-              <a:t>3. «В студию» — работа с зоной; «Назад к карте» — к той же точке обзора</a:t>
-            </a:r>
-          </a:p>
-        </p:txBody>
-      </p:sp>
-      <p:sp>
-        <p:nvSpPr>
-          <p:cNvPr id="10" name="TextBox 9"/>
-          <p:cNvSpPr txBox="1"/>
-          <p:nvPr/>
-        </p:nvSpPr>
-        <p:spPr>
-          <a:xfrm>
-            <a:off x="457200" y="5715000"/>
-            <a:ext cx="11247120" cy="457200"/>
-          </a:xfrm>
-          <a:prstGeom prst="rect">
-            <a:avLst/>
-          </a:prstGeom>
-          <a:noFill/>
-        </p:spPr>
-        <p:txBody>
-          <a:bodyPr wrap="square" anchor="t" lIns="18288" rIns="18288" tIns="18288" bIns="18288">
-            <a:spAutoFit/>
-          </a:bodyPr>
-          <a:lstStyle/>
-          <a:p>
-            <a:pPr algn="ctr">
-              <a:spcAft>
-                <a:spcPts val="600"/>
-              </a:spcAft>
-            </a:pPr>
-            <a:r>
-              <a:rPr sz="1600" b="1">
-                <a:solidFill>
-                  <a:srgbClr val="EEEFF1"/>
-                </a:solidFill>
-                <a:latin typeface="Segoe UI"/>
-              </a:rPr>
-              <a:t>Вывод: путь эколога — Земля → точка → карточка → студия → назад к следующей находке</a:t>
+              <a:t>Вывод: порядок величины, не измерение; на природной паре ISPRA (16.09.2019) посчитанные с судна предметы не рядом с пикселями детектора — для природы не проверено</a:t>
             </a:r>
           </a:p>
         </p:txBody>
@@ -18627,7 +19239,7 @@
                 </a:solidFill>
                 <a:latin typeface="Segoe UI"/>
               </a:rPr>
-              <a:t>Источник: presentation/img/*.jpg (presentation/make_shots.py, http://localhost:8070, 1920×1080, без фикстур); docs/DEMO.md</a:t>
+              <a:t>Источник: configs/zone_estimate.yaml; reports/count_datasets/115_bridge_s2.md (final_numbers → case.sections.scene_zones.research_estimate)</a:t>
             </a:r>
           </a:p>
         </p:txBody>

--- a/reports/case_deck.pptx
+++ b/reports/case_deck.pptx
@@ -914,7 +914,7 @@
           <a:p/>
           <a:p>
             <a:r>
-              <a:t>Если спросят: Тесты кейса (26.09.2026 16:31): 255 passed. Приложение — подробные слайды для вопросов.</a:t>
+              <a:t>Если спросят: Тесты кейса (26.09.2026 17:36): 255 passed. Приложение — подробные слайды для вопросов.</a:t>
             </a:r>
           </a:p>
         </p:txBody>

--- a/reports/case_deck.pptx
+++ b/reports/case_deck.pptx
@@ -604,7 +604,7 @@
           <a:lstStyle/>
           <a:p>
             <a:r>
-              <a:t>[3:15–3:36] Сервис. При открытии — Земля и список снимков с находками. Клик по снимку — зоны по номерам с площадью и оценкой. Клик по зоне — карточка: что найдено, когда, уверенность и откуда каждое число. Из карточки — в студию, кнопкой «Назад» — к следующей находке.</a:t>
+              <a:t>[3:15–3:37] Сервис. Кнопка «Демо ▶» проводит по пяти шагам на реальной сцене Альборана: снимок, зона, качество, итоговый статус, выгрузка. Та же полоса шагов ведёт свой поиск: район и даты, снимок, зона. В карточке зоны — что это, статус и подтверждение, откуда каждое число; количество по снимку не определено.</a:t>
             </a:r>
           </a:p>
           <a:p/>
@@ -680,7 +680,7 @@
           <a:lstStyle/>
           <a:p>
             <a:r>
-              <a:t>[3:36–3:53] Режим «Фото» открывается с готовым примером: рамки и число предметов, а при известной площади кадра — штуки на квадратный километр. У каждого числа подписан источник. Выгрузка GeoJSON и CSV совпадает с картой, запрос можно сохранить и повторить.</a:t>
+              <a:t>[3:37–3:54] Режим «Фото» открывается с готовым примером: рамки и число предметов, а при известной площади кадра — штуки на квадратный километр. У каждого числа подписан источник. Выгрузка GeoJSON и CSV совпадает с картой, запрос можно сохранить и повторить.</a:t>
             </a:r>
           </a:p>
           <a:p/>
@@ -756,7 +756,7 @@
           <a:lstStyle/>
           <a:p>
             <a:r>
-              <a:t>[3:53–4:17] Что мы не утверждаем. Штуки по снимку — только исследовательская оценка, природных калибровочных пар ноль. Пластик по снимку — нет, детектор видит любой мусор и путает суда. Предел обнаружения не доказан. При сильном ветре — «недостаточно данных». Поле — один рейс, а счётчик по фото без дообучения на реку не переносится.</a:t>
+              <a:t>[3:54–4:18] Что мы не утверждаем. Штуки по снимку — только исследовательская оценка, природных калибровочных пар ноль. Пластик по снимку — нет, детектор видит любой мусор и путает суда. Предел обнаружения не доказан. При сильном ветре — «недостаточно данных». Поле — один рейс, а счётчик по фото без дообучения на реку не переносится.</a:t>
             </a:r>
           </a:p>
           <a:p/>
@@ -832,7 +832,7 @@
           <a:lstStyle/>
           <a:p>
             <a:r>
-              <a:t>[4:17–4:31] Развитие — замкнуть лестницу. Спутник находит зону, над ней делается детальный снимок с дрона, счётчик даёт штуки на квадратный километр, их сверяем с полем. Для калибровки хватит 4–12 таких пар.</a:t>
+              <a:t>[4:18–4:32] Развитие — замкнуть лестницу. Спутник находит зону, над ней делается детальный снимок с дрона, счётчик даёт штуки на квадратный километр, их сверяем с полем. Для калибровки хватит 4–12 таких пар.</a:t>
             </a:r>
           </a:p>
           <a:p/>
@@ -908,13 +908,13 @@
           <a:lstStyle/>
           <a:p>
             <a:r>
-              <a:t>[4:31–4:44] Всё воспроизводится одной командой без сети за 7.5 секунды, чистый клон до карты — 7,5 минуты, числа в README, отчёте и этой презентации сверяет тест. Спасибо, готовы к вопросам.</a:t>
+              <a:t>[4:32–4:45] Всё воспроизводится одной командой без сети за 7.5 секунды, чистый клон до карты — 7,5 минуты, числа в README, отчёте и этой презентации сверяет тест. Спасибо, готовы к вопросам.</a:t>
             </a:r>
           </a:p>
           <a:p/>
           <a:p>
             <a:r>
-              <a:t>Если спросят: Тесты кейса (26.09.2026 17:36): 255 passed. Приложение — подробные слайды для вопросов.</a:t>
+              <a:t>Если спросят: Тесты кейса (26.09.2026 18:24): 255 passed. Приложение — подробные слайды для вопросов.</a:t>
             </a:r>
           </a:p>
         </p:txBody>
@@ -7029,7 +7029,7 @@
                 </a:solidFill>
                 <a:latin typeface="Segoe UI"/>
               </a:rPr>
-              <a:t>3:36</a:t>
+              <a:t>3:37</a:t>
             </a:r>
           </a:p>
         </p:txBody>
@@ -7330,7 +7330,7 @@
                 </a:solidFill>
                 <a:latin typeface="Segoe UI"/>
               </a:rPr>
-              <a:t>3:53</a:t>
+              <a:t>3:54</a:t>
             </a:r>
           </a:p>
         </p:txBody>
@@ -7843,7 +7843,7 @@
                 </a:solidFill>
                 <a:latin typeface="Segoe UI"/>
               </a:rPr>
-              <a:t>4:17</a:t>
+              <a:t>4:18</a:t>
             </a:r>
           </a:p>
         </p:txBody>
@@ -8462,7 +8462,7 @@
                 </a:solidFill>
                 <a:latin typeface="Segoe UI"/>
               </a:rPr>
-              <a:t>4:31</a:t>
+              <a:t>4:32</a:t>
             </a:r>
           </a:p>
         </p:txBody>

--- a/reports/case_deck.pptx
+++ b/reports/case_deck.pptx
@@ -6244,13 +6244,13 @@
               </a:spcAft>
             </a:pPr>
             <a:r>
-              <a:rPr sz="2400" b="1">
+              <a:rPr sz="2800" b="1">
                 <a:solidFill>
                   <a:srgbClr val="EEEFF1"/>
                 </a:solidFill>
                 <a:latin typeface="Segoe UI"/>
               </a:rPr>
-              <a:t>Сервис: снимки с находками → снимок и нумерованные зоны → карточка зоны → студия → назад</a:t>
+              <a:t>Сервис: «Демо ▶» — Район и даты → Снимок → Зона → Качество и статус → Выгрузка</a:t>
             </a:r>
           </a:p>
         </p:txBody>
@@ -6313,7 +6313,7 @@
                 </a:solidFill>
                 <a:latin typeface="Segoe UI"/>
               </a:rPr>
-              <a:t>1. Обзор: Земля и снимки «район · дата · N находок · облачность» — сразу, без формы</a:t>
+              <a:t>1. Район и даты: Земля и снимки «район · дата · находки · облачность»</a:t>
             </a:r>
           </a:p>
         </p:txBody>
@@ -6376,7 +6376,7 @@
                 </a:solidFill>
                 <a:latin typeface="Segoe UI"/>
               </a:rPr>
-              <a:t>2. Снимок: зоны по номерам, площадь, статус, оценка шт./км²</a:t>
+              <a:t>2. Снимок: зоны по номерам, площадь — оценка детектора</a:t>
             </a:r>
           </a:p>
         </p:txBody>
@@ -6439,14 +6439,14 @@
                 </a:solidFill>
                 <a:latin typeface="Segoe UI"/>
               </a:rPr>
-              <a:t>3. Карточка: что найдено, когда, площадь, уверенность, источник каждого числа</a:t>
+              <a:t>3. Зона: «Что это» → статус → подтверждение → «Количество … не определено»</a:t>
             </a:r>
           </a:p>
         </p:txBody>
       </p:sp>
       <p:pic>
         <p:nvPicPr>
-          <p:cNvPr id="10" name="Picture 9" descr="25_svc_studio.jpg"/>
+          <p:cNvPr id="10" name="Picture 9" descr="27_svc_metrics.jpg"/>
           <p:cNvPicPr>
             <a:picLocks noChangeAspect="1"/>
           </p:cNvPicPr>
@@ -6461,7 +6461,7 @@
         <p:spPr>
           <a:xfrm>
             <a:off x="9098280" y="1600200"/>
-            <a:ext cx="2606040" cy="1776845"/>
+            <a:ext cx="2606040" cy="2956226"/>
           </a:xfrm>
           <a:prstGeom prst="rect">
             <a:avLst/>
@@ -6476,7 +6476,7 @@
         </p:nvSpPr>
         <p:spPr>
           <a:xfrm>
-            <a:off x="9098280" y="3450197"/>
+            <a:off x="9098280" y="4629578"/>
             <a:ext cx="2606040" cy="640080"/>
           </a:xfrm>
           <a:prstGeom prst="rect">
@@ -6502,7 +6502,7 @@
                 </a:solidFill>
                 <a:latin typeface="Segoe UI"/>
               </a:rPr>
-              <a:t>4. «В студию» — снимок, маска, объекты; «Назад» — к тому же месту</a:t>
+              <a:t>4. Качество и статус: метрики и примеры верно / пропуск / судно / пена / анализ невозможен</a:t>
             </a:r>
           </a:p>
         </p:txBody>
@@ -6541,7 +6541,7 @@
                 </a:solidFill>
                 <a:latin typeface="Segoe UI"/>
               </a:rPr>
-              <a:t>Вывод: путь эколога — снимок → зона → карточка → студия → назад к следующей находке</a:t>
+              <a:t>Вывод: кнопка «Демо ▶» проводит эколога по пяти шагам; пятый — выгрузка GeoJSON/CSV</a:t>
             </a:r>
           </a:p>
         </p:txBody>
@@ -6807,8 +6807,8 @@
         </p:blipFill>
         <p:spPr>
           <a:xfrm>
-            <a:off x="4507454" y="1600200"/>
-            <a:ext cx="3146611" cy="3566160"/>
+            <a:off x="4508898" y="1600200"/>
+            <a:ext cx="3143722" cy="3566160"/>
           </a:xfrm>
           <a:prstGeom prst="rect">
             <a:avLst/>
@@ -18686,8 +18686,8 @@
         </p:blipFill>
         <p:spPr>
           <a:xfrm>
-            <a:off x="5437632" y="1600200"/>
-            <a:ext cx="5766816" cy="3931920"/>
+            <a:off x="5437431" y="1600200"/>
+            <a:ext cx="5767216" cy="3931920"/>
           </a:xfrm>
           <a:prstGeom prst="rect">
             <a:avLst/>

--- a/reports/case_deck.pptx
+++ b/reports/case_deck.pptx
@@ -914,7 +914,7 @@
           <a:p/>
           <a:p>
             <a:r>
-              <a:t>Если спросят: Тесты кейса (26.09.2026 18:24): 255 passed. Приложение — подробные слайды для вопросов.</a:t>
+              <a:t>Если спросят: Тесты кейса (26.09.2026 20:39): 255 passed. Приложение — подробные слайды для вопросов.</a:t>
             </a:r>
           </a:p>
         </p:txBody>

--- a/reports/case_deck.pptx
+++ b/reports/case_deck.pptx
@@ -914,7 +914,7 @@
           <a:p/>
           <a:p>
             <a:r>
-              <a:t>Если спросят: Тесты кейса (26.09.2026 20:39): 255 passed. Приложение — подробные слайды для вопросов.</a:t>
+              <a:t>Если спросят: Тесты кейса (27.09.2026 00:12): 252 passed. Приложение — подробные слайды для вопросов.</a:t>
             </a:r>
           </a:p>
         </p:txBody>
@@ -8274,7 +8274,7 @@
                 </a:solidFill>
                 <a:latin typeface="Segoe UI"/>
               </a:rPr>
-              <a:t>255 passed</a:t>
+              <a:t>252 passed</a:t>
             </a:r>
           </a:p>
         </p:txBody>
@@ -8313,7 +8313,7 @@
                 </a:solidFill>
                 <a:latin typeface="Segoe UI"/>
               </a:rPr>
-              <a:t>тесты кейса; skipped 2, failed 0</a:t>
+              <a:t>тесты кейса; skipped 2, failed 3</a:t>
             </a:r>
           </a:p>
         </p:txBody>
@@ -15041,7 +15041,7 @@
                 </a:solidFill>
                 <a:latin typeface="Segoe UI"/>
               </a:rPr>
-              <a:t>• Один источник чисел: final_numbers.json → README, отчёт, дека, речь, ответы; тест сверяет (255 passed)</a:t>
+              <a:t>• Один источник чисел: final_numbers.json → README, отчёт, дека, речь, ответы; тест сверяет (252 passed)</a:t>
             </a:r>
           </a:p>
           <a:p>
